--- a/docs/Fitness-MCP-Product-Vision.pptx
+++ b/docs/Fitness-MCP-Product-Vision.pptx
@@ -4,6 +4,9 @@
   <p:sldMasterIdLst>
     <p:sldMasterId id="2147483648" r:id="rId1"/>
   </p:sldMasterIdLst>
+  <p:notesMasterIdLst>
+    <p:notesMasterId r:id="rId31"/>
+  </p:notesMasterIdLst>
   <p:sldIdLst>
     <p:sldId id="256" r:id="rId2"/>
     <p:sldId id="257" r:id="rId3"/>
@@ -35,9 +38,6 @@
     <p:sldId id="283" r:id="rId29"/>
     <p:sldId id="284" r:id="rId30"/>
   </p:sldIdLst>
-  <p:notesMasterIdLst>
-    <p:notesMasterId r:id="rId31"/>
-  </p:notesMasterIdLst>
   <p:sldSz cx="12192000" cy="6858000"/>
   <p:notesSz cx="6858000" cy="12192000"/>
   <p:defaultTextStyle>
@@ -132,6 +132,11 @@
       </a:defRPr>
     </a:lvl9pPr>
   </p:defaultTextStyle>
+  <p:extLst>
+    <p:ext uri="{EFAFB233-063F-42B5-8137-9DF3F51BA10A}">
+      <p15:sldGuideLst xmlns:p15="http://schemas.microsoft.com/office/powerpoint/2012/main"/>
+    </p:ext>
+  </p:extLst>
 </p:presentation>
 </file>
 
@@ -157,234 +162,10 @@
           <a:chExt cx="0" cy="0"/>
         </a:xfrm>
       </p:grpSpPr>
-      <p:sp>
-        <p:nvSpPr>
-          <p:cNvPr id="2" name="Header Placeholder 1"/>
-          <p:cNvSpPr>
-            <a:spLocks noGrp="1"/>
-          </p:cNvSpPr>
-          <p:nvPr>
-            <p:ph type="hdr" sz="quarter"/>
-          </p:nvPr>
-        </p:nvSpPr>
-        <p:spPr>
-          <a:xfrm>
-            <a:off x="0" y="0"/>
-            <a:ext cx="2971800" cy="458788"/>
-          </a:xfrm>
-          <a:prstGeom prst="rect">
-            <a:avLst/>
-          </a:prstGeom>
-        </p:spPr>
-        <p:txBody>
-          <a:bodyPr vert="horz" lIns="91440" tIns="45720" rIns="91440" bIns="45720" rtlCol="0"/>
-          <a:lstStyle>
-            <a:lvl1pPr algn="l">
-              <a:defRPr sz="1200"/>
-            </a:lvl1pPr>
-          </a:lstStyle>
-          <a:p>
-            <a:endParaRPr lang="en-US"/>
-          </a:p>
-        </p:txBody>
-      </p:sp>
-      <p:sp>
-        <p:nvSpPr>
-          <p:cNvPr id="3" name="Date Placeholder 2"/>
-          <p:cNvSpPr>
-            <a:spLocks noGrp="1"/>
-          </p:cNvSpPr>
-          <p:nvPr>
-            <p:ph type="dt" idx="1"/>
-          </p:nvPr>
-        </p:nvSpPr>
-        <p:spPr>
-          <a:xfrm>
-            <a:off x="3884613" y="0"/>
-            <a:ext cx="2971800" cy="458788"/>
-          </a:xfrm>
-          <a:prstGeom prst="rect">
-            <a:avLst/>
-          </a:prstGeom>
-        </p:spPr>
-        <p:txBody>
-          <a:bodyPr vert="horz" lIns="91440" tIns="45720" rIns="91440" bIns="45720" rtlCol="0"/>
-          <a:lstStyle>
-            <a:lvl1pPr algn="r">
-              <a:defRPr sz="1200"/>
-            </a:lvl1pPr>
-          </a:lstStyle>
-          <a:p>
-            <a:fld id="{5282F153-3F37-0F45-9E97-73ACFA13230C}" type="datetimeFigureOut">
-              <a:rPr lang="en-US"/>
-              <a:t>7/23/19</a:t>
-            </a:fld>
-            <a:endParaRPr lang="en-US"/>
-          </a:p>
-        </p:txBody>
-      </p:sp>
-      <p:sp>
-        <p:nvSpPr>
-          <p:cNvPr id="4" name="Slide Image Placeholder 3"/>
-          <p:cNvSpPr>
-            <a:spLocks noGrp="1" noRot="1" noChangeAspect="1"/>
-          </p:cNvSpPr>
-          <p:nvPr>
-            <p:ph type="sldImg" idx="2"/>
-          </p:nvPr>
-        </p:nvSpPr>
-        <p:spPr>
-          <a:xfrm>
-            <a:off x="685800" y="1143000"/>
-            <a:ext cx="5486400" cy="3086100"/>
-          </a:xfrm>
-          <a:prstGeom prst="rect">
-            <a:avLst/>
-          </a:prstGeom>
-          <a:noFill/>
-          <a:ln w="12700">
-            <a:solidFill>
-              <a:prstClr val="black"/>
-            </a:solidFill>
-          </a:ln>
-        </p:spPr>
-        <p:txBody>
-          <a:bodyPr vert="horz" lIns="91440" tIns="45720" rIns="91440" bIns="45720" rtlCol="0" anchor="ctr"/>
-          <a:lstStyle/>
-          <a:p>
-            <a:endParaRPr lang="en-US"/>
-          </a:p>
-        </p:txBody>
-      </p:sp>
-      <p:sp>
-        <p:nvSpPr>
-          <p:cNvPr id="5" name="Notes Placeholder 4"/>
-          <p:cNvSpPr>
-            <a:spLocks noGrp="1"/>
-          </p:cNvSpPr>
-          <p:nvPr>
-            <p:ph type="body" sz="quarter" idx="3"/>
-          </p:nvPr>
-        </p:nvSpPr>
-        <p:spPr>
-          <a:xfrm>
-            <a:off x="685800" y="4400550"/>
-            <a:ext cx="5486400" cy="3600450"/>
-          </a:xfrm>
-          <a:prstGeom prst="rect">
-            <a:avLst/>
-          </a:prstGeom>
-        </p:spPr>
-        <p:txBody>
-          <a:bodyPr vert="horz" lIns="91440" tIns="45720" rIns="91440" bIns="45720" rtlCol="0"/>
-          <a:lstStyle/>
-          <a:p>
-            <a:pPr lvl="0"/>
-            <a:r>
-              <a:rPr lang="en-US"/>
-              <a:t>Click to edit Master text styles</a:t>
-            </a:r>
-          </a:p>
-          <a:p>
-            <a:pPr lvl="1"/>
-            <a:r>
-              <a:rPr lang="en-US"/>
-              <a:t>Second level</a:t>
-            </a:r>
-          </a:p>
-          <a:p>
-            <a:pPr lvl="2"/>
-            <a:r>
-              <a:rPr lang="en-US"/>
-              <a:t>Third level</a:t>
-            </a:r>
-          </a:p>
-          <a:p>
-            <a:pPr lvl="3"/>
-            <a:r>
-              <a:rPr lang="en-US"/>
-              <a:t>Fourth level</a:t>
-            </a:r>
-          </a:p>
-          <a:p>
-            <a:pPr lvl="4"/>
-            <a:r>
-              <a:rPr lang="en-US"/>
-              <a:t>Fifth level</a:t>
-            </a:r>
-          </a:p>
-        </p:txBody>
-      </p:sp>
-      <p:sp>
-        <p:nvSpPr>
-          <p:cNvPr id="6" name="Footer Placeholder 5"/>
-          <p:cNvSpPr>
-            <a:spLocks noGrp="1"/>
-          </p:cNvSpPr>
-          <p:nvPr>
-            <p:ph type="ftr" sz="quarter" idx="4"/>
-          </p:nvPr>
-        </p:nvSpPr>
-        <p:spPr>
-          <a:xfrm>
-            <a:off x="0" y="8685213"/>
-            <a:ext cx="2971800" cy="458787"/>
-          </a:xfrm>
-          <a:prstGeom prst="rect">
-            <a:avLst/>
-          </a:prstGeom>
-        </p:spPr>
-        <p:txBody>
-          <a:bodyPr vert="horz" lIns="91440" tIns="45720" rIns="91440" bIns="45720" rtlCol="0" anchor="b"/>
-          <a:lstStyle>
-            <a:lvl1pPr algn="l">
-              <a:defRPr sz="1200"/>
-            </a:lvl1pPr>
-          </a:lstStyle>
-          <a:p>
-            <a:endParaRPr lang="en-US"/>
-          </a:p>
-        </p:txBody>
-      </p:sp>
-      <p:sp>
-        <p:nvSpPr>
-          <p:cNvPr id="7" name="Slide Number Placeholder 6"/>
-          <p:cNvSpPr>
-            <a:spLocks noGrp="1"/>
-          </p:cNvSpPr>
-          <p:nvPr>
-            <p:ph type="sldNum" sz="quarter" idx="5"/>
-          </p:nvPr>
-        </p:nvSpPr>
-        <p:spPr>
-          <a:xfrm>
-            <a:off x="3884613" y="8685213"/>
-            <a:ext cx="2971800" cy="458787"/>
-          </a:xfrm>
-          <a:prstGeom prst="rect">
-            <a:avLst/>
-          </a:prstGeom>
-        </p:spPr>
-        <p:txBody>
-          <a:bodyPr vert="horz" lIns="91440" tIns="45720" rIns="91440" bIns="45720" rtlCol="0" anchor="b"/>
-          <a:lstStyle>
-            <a:lvl1pPr algn="r">
-              <a:defRPr sz="1200"/>
-            </a:lvl1pPr>
-          </a:lstStyle>
-          <a:p>
-            <a:fld id="{CE5E9CC1-C706-0F49-92D6-E571CC5EEA8F}" type="slidenum">
-              <a:rPr lang="en-US"/>
-              <a:t>‹#›</a:t>
-            </a:fld>
-            <a:endParaRPr lang="en-US"/>
-          </a:p>
-        </p:txBody>
-      </p:sp>
     </p:spTree>
     <p:extLst>
       <p:ext uri="{BB962C8B-B14F-4D97-AF65-F5344CB8AC3E}">
-        <p14:creationId xmlns:p14="http://schemas.microsoft.com/office/powerpoint/2010/main" val="1024086991"/>
+        <p14:creationId xmlns:p14="http://schemas.microsoft.com/office/powerpoint/2010/main" val="4190912120"/>
       </p:ext>
     </p:extLst>
   </p:cSld>
@@ -528,10 +309,6 @@
           <a:bodyPr/>
           <a:lstStyle/>
           <a:p>
-            <a:r>
-              <a:rPr lang="en-US" dirty="0"/>
-              <a:t/>
-            </a:r>
             <a:endParaRPr lang="en-US" dirty="0"/>
           </a:p>
         </p:txBody>
@@ -616,10 +393,6 @@
           <a:bodyPr/>
           <a:lstStyle/>
           <a:p>
-            <a:r>
-              <a:rPr lang="en-US" dirty="0"/>
-              <a:t/>
-            </a:r>
             <a:endParaRPr lang="en-US" dirty="0"/>
           </a:p>
         </p:txBody>
@@ -708,7 +481,6 @@
               <a:rPr lang="en-US" dirty="0"/>
               <a:t>計畫不是一份靜態文件:改掉其中一週,後面所有週會跟著重算。</a:t>
             </a:r>
-            <a:endParaRPr lang="en-US" dirty="0"/>
           </a:p>
         </p:txBody>
       </p:sp>
@@ -796,7 +568,6 @@
               <a:rPr lang="en-US" dirty="0"/>
               <a:t>Graph 實際分八層:Exercise、Workout、Program、User、Health、Training Load、Nutrition、Knowledge。</a:t>
             </a:r>
-            <a:endParaRPr lang="en-US" dirty="0"/>
           </a:p>
         </p:txBody>
       </p:sp>
@@ -880,10 +651,6 @@
           <a:bodyPr/>
           <a:lstStyle/>
           <a:p>
-            <a:r>
-              <a:rPr lang="en-US" dirty="0"/>
-              <a:t/>
-            </a:r>
             <a:endParaRPr lang="en-US" dirty="0"/>
           </a:p>
         </p:txBody>
@@ -968,10 +735,6 @@
           <a:bodyPr/>
           <a:lstStyle/>
           <a:p>
-            <a:r>
-              <a:rPr lang="en-US" dirty="0"/>
-              <a:t/>
-            </a:r>
             <a:endParaRPr lang="en-US" dirty="0"/>
           </a:p>
         </p:txBody>
@@ -1060,7 +823,6 @@
               <a:rPr lang="en-US" dirty="0"/>
               <a:t>換掉任何一家裝置商,AI 那一側完全不用改。</a:t>
             </a:r>
-            <a:endParaRPr lang="en-US" dirty="0"/>
           </a:p>
         </p:txBody>
       </p:sp>
@@ -1144,10 +906,6 @@
           <a:bodyPr/>
           <a:lstStyle/>
           <a:p>
-            <a:r>
-              <a:rPr lang="en-US" dirty="0"/>
-              <a:t/>
-            </a:r>
             <a:endParaRPr lang="en-US" dirty="0"/>
           </a:p>
         </p:txBody>
@@ -1236,7 +994,6 @@
               <a:rPr lang="en-US" dirty="0"/>
               <a:t>這十組會收斂成四個 MCP:Workout、Health、Nutrition、Coach。</a:t>
             </a:r>
-            <a:endParaRPr lang="en-US" dirty="0"/>
           </a:p>
         </p:txBody>
       </p:sp>
@@ -1320,10 +1077,6 @@
           <a:bodyPr/>
           <a:lstStyle/>
           <a:p>
-            <a:r>
-              <a:rPr lang="en-US" dirty="0"/>
-              <a:t/>
-            </a:r>
             <a:endParaRPr lang="en-US" dirty="0"/>
           </a:p>
         </p:txBody>
@@ -1408,10 +1161,6 @@
           <a:bodyPr/>
           <a:lstStyle/>
           <a:p>
-            <a:r>
-              <a:rPr lang="en-US" dirty="0"/>
-              <a:t/>
-            </a:r>
             <a:endParaRPr lang="en-US" dirty="0"/>
           </a:p>
         </p:txBody>
@@ -1496,10 +1245,6 @@
           <a:bodyPr/>
           <a:lstStyle/>
           <a:p>
-            <a:r>
-              <a:rPr lang="en-US" dirty="0"/>
-              <a:t/>
-            </a:r>
             <a:endParaRPr lang="en-US" dirty="0"/>
           </a:p>
         </p:txBody>
@@ -1588,7 +1333,6 @@
               <a:rPr lang="en-US" dirty="0"/>
               <a:t>關鍵字是「昨天」和「腿」:一個要跨來源歷程,一個要分肌群疲勞。</a:t>
             </a:r>
-            <a:endParaRPr lang="en-US" dirty="0"/>
           </a:p>
         </p:txBody>
       </p:sp>
@@ -1676,7 +1420,6 @@
               <a:rPr lang="en-US" dirty="0"/>
               <a:t>課表必須是一張可被改寫、且會自動往下傳遞影響的圖,不是一份文字清單。</a:t>
             </a:r>
-            <a:endParaRPr lang="en-US" dirty="0"/>
           </a:p>
         </p:txBody>
       </p:sp>
@@ -1764,7 +1507,6 @@
               <a:rPr lang="en-US" dirty="0"/>
               <a:t>這題會撞到動作本體資料的建置成本,Phase 1 範圍界定時要先想清楚。</a:t>
             </a:r>
-            <a:endParaRPr lang="en-US" dirty="0"/>
           </a:p>
         </p:txBody>
       </p:sp>
@@ -1852,7 +1594,6 @@
               <a:rPr lang="en-US" dirty="0"/>
               <a:t>傷勢必須是常駐資料,不能靠使用者每次自己記得講。</a:t>
             </a:r>
-            <a:endParaRPr lang="en-US" dirty="0"/>
           </a:p>
         </p:txBody>
       </p:sp>
@@ -1940,7 +1681,6 @@
               <a:rPr lang="en-US" dirty="0"/>
               <a:t>這題證明語意層要保存歷程,不只保存當下狀態。</a:t>
             </a:r>
-            <a:endParaRPr lang="en-US" dirty="0"/>
           </a:p>
         </p:txBody>
       </p:sp>
@@ -2028,7 +1768,6 @@
               <a:rPr lang="en-US" dirty="0"/>
               <a:t>語音是最好的壓力測試:理解沒有事先存好,就不可能一句話回完。</a:t>
             </a:r>
-            <a:endParaRPr lang="en-US" dirty="0"/>
           </a:p>
         </p:txBody>
       </p:sp>
@@ -2112,10 +1851,6 @@
           <a:bodyPr/>
           <a:lstStyle/>
           <a:p>
-            <a:r>
-              <a:rPr lang="en-US" dirty="0"/>
-              <a:t/>
-            </a:r>
             <a:endParaRPr lang="en-US" dirty="0"/>
           </a:p>
         </p:txBody>
@@ -2204,7 +1939,6 @@
               <a:rPr lang="en-US" dirty="0"/>
               <a:t>Phase 0 沒有 demo 價值,但 transport 與 auth 之後改成本極高,不能跳過。驗收數字來自 offline evaluation set:固定 50-100 條 golden query,量 grounding rate、tool selection accuracy、plan validity rate。</a:t>
             </a:r>
-            <a:endParaRPr lang="en-US" dirty="0"/>
           </a:p>
         </p:txBody>
       </p:sp>
@@ -2288,10 +2022,6 @@
           <a:bodyPr/>
           <a:lstStyle/>
           <a:p>
-            <a:r>
-              <a:rPr lang="en-US" dirty="0"/>
-              <a:t/>
-            </a:r>
             <a:endParaRPr lang="en-US" dirty="0"/>
           </a:p>
         </p:txBody>
@@ -2376,10 +2106,6 @@
           <a:bodyPr/>
           <a:lstStyle/>
           <a:p>
-            <a:r>
-              <a:rPr lang="en-US" dirty="0"/>
-              <a:t/>
-            </a:r>
             <a:endParaRPr lang="en-US" dirty="0"/>
           </a:p>
         </p:txBody>
@@ -2464,10 +2190,6 @@
           <a:bodyPr/>
           <a:lstStyle/>
           <a:p>
-            <a:r>
-              <a:rPr lang="en-US" dirty="0"/>
-              <a:t/>
-            </a:r>
             <a:endParaRPr lang="en-US" dirty="0"/>
           </a:p>
         </p:txBody>
@@ -2556,7 +2278,6 @@
               <a:rPr lang="en-US" dirty="0"/>
               <a:t>問題不在模型不夠聰明,而在每個模型都得重新推理一次,結果無法收斂。</a:t>
             </a:r>
-            <a:endParaRPr lang="en-US" dirty="0"/>
           </a:p>
         </p:txBody>
       </p:sp>
@@ -2640,10 +2361,6 @@
           <a:bodyPr/>
           <a:lstStyle/>
           <a:p>
-            <a:r>
-              <a:rPr lang="en-US" dirty="0"/>
-              <a:t/>
-            </a:r>
             <a:endParaRPr lang="en-US" dirty="0"/>
           </a:p>
         </p:txBody>
@@ -2732,7 +2449,6 @@
               <a:rPr lang="en-US" dirty="0"/>
               <a:t>這是語意層與資料倉儲的分界線:一個存事實,一個存已經被理解過的結論。</a:t>
             </a:r>
-            <a:endParaRPr lang="en-US" dirty="0"/>
           </a:p>
         </p:txBody>
       </p:sp>
@@ -2820,7 +2536,6 @@
               <a:rPr lang="en-US" dirty="0"/>
               <a:t>Reasoning 是關鍵欄位:它讓建議可被稽核,也讓下一個模型知道前一個結論從哪裡來。</a:t>
             </a:r>
-            <a:endParaRPr lang="en-US" dirty="0"/>
           </a:p>
         </p:txBody>
       </p:sp>
@@ -2904,10 +2619,6 @@
           <a:bodyPr/>
           <a:lstStyle/>
           <a:p>
-            <a:r>
-              <a:rPr lang="en-US" dirty="0"/>
-              <a:t/>
-            </a:r>
             <a:endParaRPr lang="en-US" dirty="0"/>
           </a:p>
         </p:txBody>
@@ -2996,7 +2707,6 @@
               <a:rPr lang="en-US" dirty="0"/>
               <a:t>邏輯寫在 prompt 裡就會隨模型漂移;寫在引擎裡才可被驗證、可被回測。</a:t>
             </a:r>
-            <a:endParaRPr lang="en-US" dirty="0"/>
           </a:p>
         </p:txBody>
       </p:sp>
@@ -3069,6 +2779,11 @@
 <file path=ppt/slideMasters/slideMaster1.xml><?xml version="1.0" encoding="utf-8"?>
 <p:sldMaster xmlns:a="http://schemas.openxmlformats.org/drawingml/2006/main" xmlns:r="http://schemas.openxmlformats.org/officeDocument/2006/relationships" xmlns:p="http://schemas.openxmlformats.org/presentationml/2006/main">
   <p:cSld>
+    <p:bg>
+      <p:bgRef idx="1001">
+        <a:schemeClr val="bg1"/>
+      </p:bgRef>
+    </p:bg>
     <p:spTree>
       <p:nvGrpSpPr>
         <p:cNvPr id="1" name=""/>
@@ -3351,6 +3066,7 @@
         <a:solidFill>
           <a:srgbClr val="10131A"/>
         </a:solidFill>
+        <a:effectLst/>
       </p:bgPr>
     </p:bg>
     <p:spTree>
@@ -3452,11 +3168,11 @@
           <a:bodyPr wrap="square" lIns="0" tIns="0" rIns="0" bIns="0" rtlCol="0" anchor="ctr"/>
           <a:lstStyle/>
           <a:p>
-            <a:pPr indent="0" marL="0">
-              <a:buNone/>
-            </a:pPr>
-            <a:r>
-              <a:rPr lang="en-US" sz="1300" b="1" spc="300" kern="0" dirty="0">
+            <a:pPr marL="0" indent="0">
+              <a:buNone/>
+            </a:pPr>
+            <a:r>
+              <a:rPr lang="en-US" sz="1300" b="1" kern="0" spc="300" dirty="0">
                 <a:solidFill>
                   <a:srgbClr val="8A93A6"/>
                 </a:solidFill>
@@ -3491,7 +3207,7 @@
           <a:bodyPr wrap="square" lIns="0" tIns="0" rIns="0" bIns="0" rtlCol="0" anchor="t"/>
           <a:lstStyle/>
           <a:p>
-            <a:pPr indent="0" marL="0">
+            <a:pPr marL="0" indent="0">
               <a:lnSpc>
                 <a:spcPts val="6000"/>
               </a:lnSpc>
@@ -3511,7 +3227,7 @@
             <a:endParaRPr lang="en-US" sz="5000" dirty="0"/>
           </a:p>
           <a:p>
-            <a:pPr indent="0" marL="0">
+            <a:pPr marL="0" indent="0">
               <a:lnSpc>
                 <a:spcPts val="6000"/>
               </a:lnSpc>
@@ -3553,7 +3269,7 @@
           <a:bodyPr wrap="square" lIns="0" tIns="0" rIns="0" bIns="0" rtlCol="0" anchor="t"/>
           <a:lstStyle/>
           <a:p>
-            <a:pPr indent="0" marL="0">
+            <a:pPr marL="0" indent="0">
               <a:lnSpc>
                 <a:spcPts val="3000"/>
               </a:lnSpc>
@@ -3618,7 +3334,7 @@
           <a:bodyPr wrap="square" lIns="0" tIns="0" rIns="0" bIns="0" rtlCol="0" anchor="ctr"/>
           <a:lstStyle/>
           <a:p>
-            <a:pPr indent="0" marL="0">
+            <a:pPr marL="0" indent="0">
               <a:buNone/>
             </a:pPr>
             <a:r>
@@ -3652,6 +3368,7 @@
         <a:solidFill>
           <a:srgbClr val="FFFFFF"/>
         </a:solidFill>
+        <a:effectLst/>
       </p:bgPr>
     </p:bg>
     <p:spTree>
@@ -3709,11 +3426,11 @@
           <a:bodyPr wrap="square" lIns="0" tIns="0" rIns="0" bIns="0" rtlCol="0" anchor="ctr"/>
           <a:lstStyle/>
           <a:p>
-            <a:pPr indent="0" marL="0">
-              <a:buNone/>
-            </a:pPr>
-            <a:r>
-              <a:rPr lang="en-US" sz="1200" b="1" spc="200" kern="0" dirty="0">
+            <a:pPr marL="0" indent="0">
+              <a:buNone/>
+            </a:pPr>
+            <a:r>
+              <a:rPr lang="en-US" sz="1200" b="1" kern="0" spc="200" dirty="0">
                 <a:solidFill>
                   <a:srgbClr val="6E7687"/>
                 </a:solidFill>
@@ -3748,7 +3465,7 @@
           <a:bodyPr wrap="square" lIns="0" tIns="0" rIns="0" bIns="0" rtlCol="0" anchor="ctr"/>
           <a:lstStyle/>
           <a:p>
-            <a:pPr indent="0" marL="0">
+            <a:pPr marL="0" indent="0">
               <a:buNone/>
             </a:pPr>
             <a:r>
@@ -3787,7 +3504,7 @@
           <a:bodyPr wrap="square" lIns="0" tIns="0" rIns="0" bIns="0" rtlCol="0" anchor="t"/>
           <a:lstStyle/>
           <a:p>
-            <a:pPr indent="0" marL="0">
+            <a:pPr marL="0" indent="0">
               <a:lnSpc>
                 <a:spcPts val="3200"/>
               </a:lnSpc>
@@ -3851,7 +3568,7 @@
           <a:bodyPr wrap="square" lIns="0" tIns="0" rIns="0" bIns="0" rtlCol="0" anchor="t"/>
           <a:lstStyle/>
           <a:p>
-            <a:pPr indent="0" marL="0">
+            <a:pPr marL="0" indent="0">
               <a:lnSpc>
                 <a:spcPts val="2200"/>
               </a:lnSpc>
@@ -3871,7 +3588,7 @@
             <a:endParaRPr lang="en-US" sz="1400" dirty="0"/>
           </a:p>
           <a:p>
-            <a:pPr indent="0" marL="0">
+            <a:pPr marL="0" indent="0">
               <a:lnSpc>
                 <a:spcPts val="2200"/>
               </a:lnSpc>
@@ -3891,7 +3608,7 @@
             <a:endParaRPr lang="en-US" sz="1400" dirty="0"/>
           </a:p>
           <a:p>
-            <a:pPr indent="0" marL="0">
+            <a:pPr marL="0" indent="0">
               <a:lnSpc>
                 <a:spcPts val="2200"/>
               </a:lnSpc>
@@ -3911,7 +3628,7 @@
             <a:endParaRPr lang="en-US" sz="1400" dirty="0"/>
           </a:p>
           <a:p>
-            <a:pPr indent="0" marL="0">
+            <a:pPr marL="0" indent="0">
               <a:lnSpc>
                 <a:spcPts val="2200"/>
               </a:lnSpc>
@@ -3995,7 +3712,7 @@
           <a:bodyPr wrap="square" lIns="0" tIns="0" rIns="0" bIns="0" rtlCol="0" anchor="ctr"/>
           <a:lstStyle/>
           <a:p>
-            <a:pPr indent="0" marL="0">
+            <a:pPr marL="0" indent="0">
               <a:buNone/>
             </a:pPr>
             <a:r>
@@ -4034,7 +3751,7 @@
           <a:bodyPr wrap="square" lIns="0" tIns="0" rIns="0" bIns="0" rtlCol="0" anchor="ctr"/>
           <a:lstStyle/>
           <a:p>
-            <a:pPr indent="0" marL="0">
+            <a:pPr marL="0" indent="0">
               <a:buNone/>
             </a:pPr>
             <a:r>
@@ -4115,7 +3832,7 @@
           <a:bodyPr wrap="square" lIns="0" tIns="0" rIns="0" bIns="0" rtlCol="0" anchor="ctr"/>
           <a:lstStyle/>
           <a:p>
-            <a:pPr indent="0" marL="0">
+            <a:pPr marL="0" indent="0">
               <a:buNone/>
             </a:pPr>
             <a:r>
@@ -4154,7 +3871,7 @@
           <a:bodyPr wrap="square" lIns="0" tIns="0" rIns="0" bIns="0" rtlCol="0" anchor="ctr"/>
           <a:lstStyle/>
           <a:p>
-            <a:pPr indent="0" marL="0">
+            <a:pPr marL="0" indent="0">
               <a:buNone/>
             </a:pPr>
             <a:r>
@@ -4235,7 +3952,7 @@
           <a:bodyPr wrap="square" lIns="0" tIns="0" rIns="0" bIns="0" rtlCol="0" anchor="ctr"/>
           <a:lstStyle/>
           <a:p>
-            <a:pPr indent="0" marL="0">
+            <a:pPr marL="0" indent="0">
               <a:buNone/>
             </a:pPr>
             <a:r>
@@ -4274,7 +3991,7 @@
           <a:bodyPr wrap="square" lIns="0" tIns="0" rIns="0" bIns="0" rtlCol="0" anchor="ctr"/>
           <a:lstStyle/>
           <a:p>
-            <a:pPr indent="0" marL="0">
+            <a:pPr marL="0" indent="0">
               <a:buNone/>
             </a:pPr>
             <a:r>
@@ -4313,7 +4030,7 @@
           <a:bodyPr wrap="square" lIns="0" tIns="0" rIns="0" bIns="0" rtlCol="0" anchor="ctr"/>
           <a:lstStyle/>
           <a:p>
-            <a:pPr indent="0" marL="0">
+            <a:pPr marL="0" indent="0">
               <a:buNone/>
             </a:pPr>
             <a:r>
@@ -4352,7 +4069,7 @@
           <a:bodyPr wrap="square" lIns="0" tIns="0" rIns="0" bIns="0" rtlCol="0" anchor="ctr"/>
           <a:lstStyle/>
           <a:p>
-            <a:pPr algn="r" indent="0" marL="0">
+            <a:pPr marL="0" indent="0" algn="r">
               <a:buNone/>
             </a:pPr>
             <a:r>
@@ -4386,6 +4103,7 @@
         <a:solidFill>
           <a:srgbClr val="10131A"/>
         </a:solidFill>
+        <a:effectLst/>
       </p:bgPr>
     </p:bg>
     <p:spTree>
@@ -4443,11 +4161,11 @@
           <a:bodyPr wrap="square" lIns="0" tIns="0" rIns="0" bIns="0" rtlCol="0" anchor="ctr"/>
           <a:lstStyle/>
           <a:p>
-            <a:pPr indent="0" marL="0">
-              <a:buNone/>
-            </a:pPr>
-            <a:r>
-              <a:rPr lang="en-US" sz="1200" b="1" spc="200" kern="0" dirty="0">
+            <a:pPr marL="0" indent="0">
+              <a:buNone/>
+            </a:pPr>
+            <a:r>
+              <a:rPr lang="en-US" sz="1200" b="1" kern="0" spc="200" dirty="0">
                 <a:solidFill>
                   <a:srgbClr val="8A93A6"/>
                 </a:solidFill>
@@ -4482,7 +4200,7 @@
           <a:bodyPr wrap="square" lIns="0" tIns="0" rIns="0" bIns="0" rtlCol="0" anchor="ctr"/>
           <a:lstStyle/>
           <a:p>
-            <a:pPr indent="0" marL="0">
+            <a:pPr marL="0" indent="0">
               <a:buNone/>
             </a:pPr>
             <a:r>
@@ -4521,7 +4239,7 @@
           <a:bodyPr wrap="square" lIns="0" tIns="0" rIns="0" bIns="0" rtlCol="0" anchor="t"/>
           <a:lstStyle/>
           <a:p>
-            <a:pPr indent="0" marL="0">
+            <a:pPr marL="0" indent="0">
               <a:lnSpc>
                 <a:spcPts val="3200"/>
               </a:lnSpc>
@@ -4585,7 +4303,7 @@
           <a:bodyPr wrap="square" lIns="0" tIns="0" rIns="0" bIns="0" rtlCol="0" anchor="ctr"/>
           <a:lstStyle/>
           <a:p>
-            <a:pPr algn="ctr" indent="0" marL="0">
+            <a:pPr marL="0" indent="0" algn="ctr">
               <a:buNone/>
             </a:pPr>
             <a:r>
@@ -4646,7 +4364,7 @@
           <a:bodyPr wrap="square" lIns="0" tIns="0" rIns="0" bIns="0" rtlCol="0" anchor="ctr"/>
           <a:lstStyle/>
           <a:p>
-            <a:pPr algn="ctr" indent="0" marL="0">
+            <a:pPr marL="0" indent="0" algn="ctr">
               <a:buNone/>
             </a:pPr>
             <a:r>
@@ -4707,7 +4425,7 @@
           <a:bodyPr wrap="square" lIns="0" tIns="0" rIns="0" bIns="0" rtlCol="0" anchor="ctr"/>
           <a:lstStyle/>
           <a:p>
-            <a:pPr algn="ctr" indent="0" marL="0">
+            <a:pPr marL="0" indent="0" algn="ctr">
               <a:buNone/>
             </a:pPr>
             <a:r>
@@ -4768,7 +4486,7 @@
           <a:bodyPr wrap="square" lIns="0" tIns="0" rIns="0" bIns="0" rtlCol="0" anchor="ctr"/>
           <a:lstStyle/>
           <a:p>
-            <a:pPr algn="ctr" indent="0" marL="0">
+            <a:pPr marL="0" indent="0" algn="ctr">
               <a:buNone/>
             </a:pPr>
             <a:r>
@@ -4829,7 +4547,7 @@
           <a:bodyPr wrap="square" lIns="0" tIns="0" rIns="0" bIns="0" rtlCol="0" anchor="ctr"/>
           <a:lstStyle/>
           <a:p>
-            <a:pPr algn="ctr" indent="0" marL="0">
+            <a:pPr marL="0" indent="0" algn="ctr">
               <a:buNone/>
             </a:pPr>
             <a:r>
@@ -4868,7 +4586,7 @@
           <a:bodyPr wrap="square" lIns="0" tIns="0" rIns="0" bIns="0" rtlCol="0" anchor="ctr"/>
           <a:lstStyle/>
           <a:p>
-            <a:pPr algn="ctr" indent="0" marL="0">
+            <a:pPr marL="0" indent="0" algn="ctr">
               <a:buNone/>
             </a:pPr>
             <a:r>
@@ -4929,7 +4647,7 @@
           <a:bodyPr wrap="square" lIns="0" tIns="0" rIns="0" bIns="0" rtlCol="0" anchor="ctr"/>
           <a:lstStyle/>
           <a:p>
-            <a:pPr algn="ctr" indent="0" marL="0">
+            <a:pPr marL="0" indent="0" algn="ctr">
               <a:lnSpc>
                 <a:spcPts val="2600"/>
               </a:lnSpc>
@@ -4949,7 +4667,7 @@
             <a:endParaRPr lang="en-US" sz="2000" dirty="0"/>
           </a:p>
           <a:p>
-            <a:pPr algn="ctr" indent="0" marL="0">
+            <a:pPr marL="0" indent="0" algn="ctr">
               <a:lnSpc>
                 <a:spcPts val="2600"/>
               </a:lnSpc>
@@ -4991,7 +4709,7 @@
           <a:bodyPr wrap="square" lIns="0" tIns="0" rIns="0" bIns="0" rtlCol="0" anchor="ctr"/>
           <a:lstStyle/>
           <a:p>
-            <a:pPr algn="ctr" indent="0" marL="0">
+            <a:pPr marL="0" indent="0" algn="ctr">
               <a:buNone/>
             </a:pPr>
             <a:r>
@@ -5052,7 +4770,7 @@
           <a:bodyPr wrap="square" lIns="0" tIns="0" rIns="0" bIns="0" rtlCol="0" anchor="ctr"/>
           <a:lstStyle/>
           <a:p>
-            <a:pPr indent="0" marL="0">
+            <a:pPr marL="0" indent="0">
               <a:buNone/>
             </a:pPr>
             <a:r>
@@ -5091,7 +4809,7 @@
           <a:bodyPr wrap="square" lIns="0" tIns="0" rIns="0" bIns="0" rtlCol="0" anchor="t"/>
           <a:lstStyle/>
           <a:p>
-            <a:pPr indent="0" marL="0">
+            <a:pPr marL="0" indent="0">
               <a:lnSpc>
                 <a:spcPts val="2400"/>
               </a:lnSpc>
@@ -5111,7 +4829,7 @@
             <a:endParaRPr lang="en-US" sz="1300" dirty="0"/>
           </a:p>
           <a:p>
-            <a:pPr indent="0" marL="0">
+            <a:pPr marL="0" indent="0">
               <a:lnSpc>
                 <a:spcPts val="2400"/>
               </a:lnSpc>
@@ -5131,7 +4849,7 @@
             <a:endParaRPr lang="en-US" sz="1300" dirty="0"/>
           </a:p>
           <a:p>
-            <a:pPr indent="0" marL="0">
+            <a:pPr marL="0" indent="0">
               <a:lnSpc>
                 <a:spcPts val="2400"/>
               </a:lnSpc>
@@ -5151,7 +4869,7 @@
             <a:endParaRPr lang="en-US" sz="1300" dirty="0"/>
           </a:p>
           <a:p>
-            <a:pPr indent="0" marL="0">
+            <a:pPr marL="0" indent="0">
               <a:lnSpc>
                 <a:spcPts val="2400"/>
               </a:lnSpc>
@@ -5193,7 +4911,7 @@
           <a:bodyPr wrap="square" lIns="0" tIns="0" rIns="0" bIns="0" rtlCol="0" anchor="ctr"/>
           <a:lstStyle/>
           <a:p>
-            <a:pPr algn="r" indent="0" marL="0">
+            <a:pPr marL="0" indent="0" algn="r">
               <a:buNone/>
             </a:pPr>
             <a:r>
@@ -5227,6 +4945,7 @@
         <a:solidFill>
           <a:srgbClr val="FFFFFF"/>
         </a:solidFill>
+        <a:effectLst/>
       </p:bgPr>
     </p:bg>
     <p:spTree>
@@ -5284,11 +5003,11 @@
           <a:bodyPr wrap="square" lIns="0" tIns="0" rIns="0" bIns="0" rtlCol="0" anchor="ctr"/>
           <a:lstStyle/>
           <a:p>
-            <a:pPr indent="0" marL="0">
-              <a:buNone/>
-            </a:pPr>
-            <a:r>
-              <a:rPr lang="en-US" sz="1200" b="1" spc="200" kern="0" dirty="0">
+            <a:pPr marL="0" indent="0">
+              <a:buNone/>
+            </a:pPr>
+            <a:r>
+              <a:rPr lang="en-US" sz="1200" b="1" kern="0" spc="200" dirty="0">
                 <a:solidFill>
                   <a:srgbClr val="6E7687"/>
                 </a:solidFill>
@@ -5323,7 +5042,7 @@
           <a:bodyPr wrap="square" lIns="0" tIns="0" rIns="0" bIns="0" rtlCol="0" anchor="ctr"/>
           <a:lstStyle/>
           <a:p>
-            <a:pPr indent="0" marL="0">
+            <a:pPr marL="0" indent="0">
               <a:buNone/>
             </a:pPr>
             <a:r>
@@ -5362,7 +5081,7 @@
           <a:bodyPr wrap="square" lIns="0" tIns="0" rIns="0" bIns="0" rtlCol="0" anchor="t"/>
           <a:lstStyle/>
           <a:p>
-            <a:pPr indent="0" marL="0">
+            <a:pPr marL="0" indent="0">
               <a:lnSpc>
                 <a:spcPts val="3200"/>
               </a:lnSpc>
@@ -5446,7 +5165,7 @@
           <a:bodyPr wrap="square" lIns="0" tIns="0" rIns="0" bIns="0" rtlCol="0" anchor="ctr"/>
           <a:lstStyle/>
           <a:p>
-            <a:pPr indent="0" marL="0">
+            <a:pPr marL="0" indent="0">
               <a:buNone/>
             </a:pPr>
             <a:r>
@@ -5485,7 +5204,7 @@
           <a:bodyPr wrap="square" lIns="0" tIns="0" rIns="0" bIns="0" rtlCol="0" anchor="t"/>
           <a:lstStyle/>
           <a:p>
-            <a:pPr indent="0" marL="0">
+            <a:pPr marL="0" indent="0">
               <a:lnSpc>
                 <a:spcPts val="1800"/>
               </a:lnSpc>
@@ -5505,7 +5224,7 @@
             <a:endParaRPr lang="en-US" sz="1150" dirty="0"/>
           </a:p>
           <a:p>
-            <a:pPr indent="0" marL="0">
+            <a:pPr marL="0" indent="0">
               <a:lnSpc>
                 <a:spcPts val="1800"/>
               </a:lnSpc>
@@ -5525,7 +5244,7 @@
             <a:endParaRPr lang="en-US" sz="1150" dirty="0"/>
           </a:p>
           <a:p>
-            <a:pPr indent="0" marL="0">
+            <a:pPr marL="0" indent="0">
               <a:lnSpc>
                 <a:spcPts val="1800"/>
               </a:lnSpc>
@@ -5545,7 +5264,7 @@
             <a:endParaRPr lang="en-US" sz="1150" dirty="0"/>
           </a:p>
           <a:p>
-            <a:pPr indent="0" marL="0">
+            <a:pPr marL="0" indent="0">
               <a:lnSpc>
                 <a:spcPts val="1800"/>
               </a:lnSpc>
@@ -5565,7 +5284,7 @@
             <a:endParaRPr lang="en-US" sz="1150" dirty="0"/>
           </a:p>
           <a:p>
-            <a:pPr indent="0" marL="0">
+            <a:pPr marL="0" indent="0">
               <a:lnSpc>
                 <a:spcPts val="1800"/>
               </a:lnSpc>
@@ -5585,7 +5304,7 @@
             <a:endParaRPr lang="en-US" sz="1150" dirty="0"/>
           </a:p>
           <a:p>
-            <a:pPr indent="0" marL="0">
+            <a:pPr marL="0" indent="0">
               <a:lnSpc>
                 <a:spcPts val="1800"/>
               </a:lnSpc>
@@ -5669,7 +5388,7 @@
           <a:bodyPr wrap="square" lIns="0" tIns="0" rIns="0" bIns="0" rtlCol="0" anchor="ctr"/>
           <a:lstStyle/>
           <a:p>
-            <a:pPr indent="0" marL="0">
+            <a:pPr marL="0" indent="0">
               <a:buNone/>
             </a:pPr>
             <a:r>
@@ -5708,7 +5427,7 @@
           <a:bodyPr wrap="square" lIns="0" tIns="0" rIns="0" bIns="0" rtlCol="0" anchor="t"/>
           <a:lstStyle/>
           <a:p>
-            <a:pPr indent="0" marL="0">
+            <a:pPr marL="0" indent="0">
               <a:lnSpc>
                 <a:spcPts val="1800"/>
               </a:lnSpc>
@@ -5728,7 +5447,7 @@
             <a:endParaRPr lang="en-US" sz="1150" dirty="0"/>
           </a:p>
           <a:p>
-            <a:pPr indent="0" marL="0">
+            <a:pPr marL="0" indent="0">
               <a:lnSpc>
                 <a:spcPts val="1800"/>
               </a:lnSpc>
@@ -5748,7 +5467,7 @@
             <a:endParaRPr lang="en-US" sz="1150" dirty="0"/>
           </a:p>
           <a:p>
-            <a:pPr indent="0" marL="0">
+            <a:pPr marL="0" indent="0">
               <a:lnSpc>
                 <a:spcPts val="1800"/>
               </a:lnSpc>
@@ -5768,7 +5487,7 @@
             <a:endParaRPr lang="en-US" sz="1150" dirty="0"/>
           </a:p>
           <a:p>
-            <a:pPr indent="0" marL="0">
+            <a:pPr marL="0" indent="0">
               <a:lnSpc>
                 <a:spcPts val="1800"/>
               </a:lnSpc>
@@ -5788,7 +5507,7 @@
             <a:endParaRPr lang="en-US" sz="1150" dirty="0"/>
           </a:p>
           <a:p>
-            <a:pPr indent="0" marL="0">
+            <a:pPr marL="0" indent="0">
               <a:lnSpc>
                 <a:spcPts val="1800"/>
               </a:lnSpc>
@@ -5808,7 +5527,7 @@
             <a:endParaRPr lang="en-US" sz="1150" dirty="0"/>
           </a:p>
           <a:p>
-            <a:pPr indent="0" marL="0">
+            <a:pPr marL="0" indent="0">
               <a:lnSpc>
                 <a:spcPts val="1800"/>
               </a:lnSpc>
@@ -5892,7 +5611,7 @@
           <a:bodyPr wrap="square" lIns="0" tIns="0" rIns="0" bIns="0" rtlCol="0" anchor="ctr"/>
           <a:lstStyle/>
           <a:p>
-            <a:pPr indent="0" marL="0">
+            <a:pPr marL="0" indent="0">
               <a:buNone/>
             </a:pPr>
             <a:r>
@@ -5931,7 +5650,7 @@
           <a:bodyPr wrap="square" lIns="0" tIns="0" rIns="0" bIns="0" rtlCol="0" anchor="t"/>
           <a:lstStyle/>
           <a:p>
-            <a:pPr indent="0" marL="0">
+            <a:pPr marL="0" indent="0">
               <a:lnSpc>
                 <a:spcPts val="1800"/>
               </a:lnSpc>
@@ -5951,7 +5670,7 @@
             <a:endParaRPr lang="en-US" sz="1150" dirty="0"/>
           </a:p>
           <a:p>
-            <a:pPr indent="0" marL="0">
+            <a:pPr marL="0" indent="0">
               <a:lnSpc>
                 <a:spcPts val="1800"/>
               </a:lnSpc>
@@ -5971,7 +5690,7 @@
             <a:endParaRPr lang="en-US" sz="1150" dirty="0"/>
           </a:p>
           <a:p>
-            <a:pPr indent="0" marL="0">
+            <a:pPr marL="0" indent="0">
               <a:lnSpc>
                 <a:spcPts val="1800"/>
               </a:lnSpc>
@@ -5991,7 +5710,7 @@
             <a:endParaRPr lang="en-US" sz="1150" dirty="0"/>
           </a:p>
           <a:p>
-            <a:pPr indent="0" marL="0">
+            <a:pPr marL="0" indent="0">
               <a:lnSpc>
                 <a:spcPts val="1800"/>
               </a:lnSpc>
@@ -6011,7 +5730,7 @@
             <a:endParaRPr lang="en-US" sz="1150" dirty="0"/>
           </a:p>
           <a:p>
-            <a:pPr indent="0" marL="0">
+            <a:pPr marL="0" indent="0">
               <a:lnSpc>
                 <a:spcPts val="1800"/>
               </a:lnSpc>
@@ -6095,7 +5814,7 @@
           <a:bodyPr wrap="square" lIns="0" tIns="0" rIns="0" bIns="0" rtlCol="0" anchor="ctr"/>
           <a:lstStyle/>
           <a:p>
-            <a:pPr indent="0" marL="0">
+            <a:pPr marL="0" indent="0">
               <a:buNone/>
             </a:pPr>
             <a:r>
@@ -6134,7 +5853,7 @@
           <a:bodyPr wrap="square" lIns="0" tIns="0" rIns="0" bIns="0" rtlCol="0" anchor="t"/>
           <a:lstStyle/>
           <a:p>
-            <a:pPr indent="0" marL="0">
+            <a:pPr marL="0" indent="0">
               <a:lnSpc>
                 <a:spcPts val="1800"/>
               </a:lnSpc>
@@ -6154,7 +5873,7 @@
             <a:endParaRPr lang="en-US" sz="1150" dirty="0"/>
           </a:p>
           <a:p>
-            <a:pPr indent="0" marL="0">
+            <a:pPr marL="0" indent="0">
               <a:lnSpc>
                 <a:spcPts val="1800"/>
               </a:lnSpc>
@@ -6174,7 +5893,7 @@
             <a:endParaRPr lang="en-US" sz="1150" dirty="0"/>
           </a:p>
           <a:p>
-            <a:pPr indent="0" marL="0">
+            <a:pPr marL="0" indent="0">
               <a:lnSpc>
                 <a:spcPts val="1800"/>
               </a:lnSpc>
@@ -6194,7 +5913,7 @@
             <a:endParaRPr lang="en-US" sz="1150" dirty="0"/>
           </a:p>
           <a:p>
-            <a:pPr indent="0" marL="0">
+            <a:pPr marL="0" indent="0">
               <a:lnSpc>
                 <a:spcPts val="1800"/>
               </a:lnSpc>
@@ -6236,7 +5955,7 @@
           <a:bodyPr wrap="square" lIns="0" tIns="0" rIns="0" bIns="0" rtlCol="0" anchor="ctr"/>
           <a:lstStyle/>
           <a:p>
-            <a:pPr algn="r" indent="0" marL="0">
+            <a:pPr marL="0" indent="0" algn="r">
               <a:buNone/>
             </a:pPr>
             <a:r>
@@ -6270,6 +5989,7 @@
         <a:solidFill>
           <a:srgbClr val="FFFFFF"/>
         </a:solidFill>
+        <a:effectLst/>
       </p:bgPr>
     </p:bg>
     <p:spTree>
@@ -6327,11 +6047,11 @@
           <a:bodyPr wrap="square" lIns="0" tIns="0" rIns="0" bIns="0" rtlCol="0" anchor="ctr"/>
           <a:lstStyle/>
           <a:p>
-            <a:pPr indent="0" marL="0">
-              <a:buNone/>
-            </a:pPr>
-            <a:r>
-              <a:rPr lang="en-US" sz="1200" b="1" spc="200" kern="0" dirty="0">
+            <a:pPr marL="0" indent="0">
+              <a:buNone/>
+            </a:pPr>
+            <a:r>
+              <a:rPr lang="en-US" sz="1200" b="1" kern="0" spc="200" dirty="0">
                 <a:solidFill>
                   <a:srgbClr val="6E7687"/>
                 </a:solidFill>
@@ -6366,7 +6086,7 @@
           <a:bodyPr wrap="square" lIns="0" tIns="0" rIns="0" bIns="0" rtlCol="0" anchor="ctr"/>
           <a:lstStyle/>
           <a:p>
-            <a:pPr indent="0" marL="0">
+            <a:pPr marL="0" indent="0">
               <a:buNone/>
             </a:pPr>
             <a:r>
@@ -6405,7 +6125,7 @@
           <a:bodyPr wrap="square" lIns="0" tIns="0" rIns="0" bIns="0" rtlCol="0" anchor="t"/>
           <a:lstStyle/>
           <a:p>
-            <a:pPr indent="0" marL="0">
+            <a:pPr marL="0" indent="0">
               <a:lnSpc>
                 <a:spcPts val="3200"/>
               </a:lnSpc>
@@ -6469,7 +6189,7 @@
           <a:bodyPr wrap="square" lIns="0" tIns="0" rIns="0" bIns="0" rtlCol="0" anchor="ctr"/>
           <a:lstStyle/>
           <a:p>
-            <a:pPr algn="ctr" indent="0" marL="0">
+            <a:pPr marL="0" indent="0" algn="ctr">
               <a:buNone/>
             </a:pPr>
             <a:r>
@@ -6508,7 +6228,7 @@
           <a:bodyPr wrap="square" lIns="0" tIns="0" rIns="0" bIns="0" rtlCol="0" anchor="ctr"/>
           <a:lstStyle/>
           <a:p>
-            <a:pPr algn="ctr" indent="0" marL="0">
+            <a:pPr marL="0" indent="0" algn="ctr">
               <a:buNone/>
             </a:pPr>
             <a:r>
@@ -6569,7 +6289,7 @@
           <a:bodyPr wrap="square" lIns="0" tIns="0" rIns="0" bIns="0" rtlCol="0" anchor="ctr"/>
           <a:lstStyle/>
           <a:p>
-            <a:pPr algn="ctr" indent="0" marL="0">
+            <a:pPr marL="0" indent="0" algn="ctr">
               <a:buNone/>
             </a:pPr>
             <a:r>
@@ -6630,7 +6350,7 @@
           <a:bodyPr wrap="square" lIns="0" tIns="0" rIns="0" bIns="0" rtlCol="0" anchor="ctr"/>
           <a:lstStyle/>
           <a:p>
-            <a:pPr algn="ctr" indent="0" marL="0">
+            <a:pPr marL="0" indent="0" algn="ctr">
               <a:buNone/>
             </a:pPr>
             <a:r>
@@ -6669,7 +6389,7 @@
           <a:bodyPr wrap="square" lIns="0" tIns="0" rIns="0" bIns="0" rtlCol="0" anchor="ctr"/>
           <a:lstStyle/>
           <a:p>
-            <a:pPr algn="ctr" indent="0" marL="0">
+            <a:pPr marL="0" indent="0" algn="ctr">
               <a:buNone/>
             </a:pPr>
             <a:r>
@@ -6730,7 +6450,7 @@
           <a:bodyPr wrap="square" lIns="0" tIns="0" rIns="0" bIns="0" rtlCol="0" anchor="ctr"/>
           <a:lstStyle/>
           <a:p>
-            <a:pPr algn="ctr" indent="0" marL="0">
+            <a:pPr marL="0" indent="0" algn="ctr">
               <a:buNone/>
             </a:pPr>
             <a:r>
@@ -6791,7 +6511,7 @@
           <a:bodyPr wrap="square" lIns="0" tIns="0" rIns="0" bIns="0" rtlCol="0" anchor="ctr"/>
           <a:lstStyle/>
           <a:p>
-            <a:pPr algn="ctr" indent="0" marL="0">
+            <a:pPr marL="0" indent="0" algn="ctr">
               <a:buNone/>
             </a:pPr>
             <a:r>
@@ -6830,7 +6550,7 @@
           <a:bodyPr wrap="square" lIns="0" tIns="0" rIns="0" bIns="0" rtlCol="0" anchor="ctr"/>
           <a:lstStyle/>
           <a:p>
-            <a:pPr algn="ctr" indent="0" marL="0">
+            <a:pPr marL="0" indent="0" algn="ctr">
               <a:buNone/>
             </a:pPr>
             <a:r>
@@ -6891,7 +6611,7 @@
           <a:bodyPr wrap="square" lIns="0" tIns="0" rIns="0" bIns="0" rtlCol="0" anchor="ctr"/>
           <a:lstStyle/>
           <a:p>
-            <a:pPr algn="ctr" indent="0" marL="0">
+            <a:pPr marL="0" indent="0" algn="ctr">
               <a:buNone/>
             </a:pPr>
             <a:r>
@@ -6930,7 +6650,7 @@
           <a:bodyPr wrap="square" lIns="0" tIns="0" rIns="0" bIns="0" rtlCol="0" anchor="ctr"/>
           <a:lstStyle/>
           <a:p>
-            <a:pPr indent="0" marL="0">
+            <a:pPr marL="0" indent="0">
               <a:buNone/>
             </a:pPr>
             <a:r>
@@ -6969,7 +6689,7 @@
           <a:bodyPr wrap="square" lIns="0" tIns="0" rIns="0" bIns="0" rtlCol="0" anchor="ctr"/>
           <a:lstStyle/>
           <a:p>
-            <a:pPr algn="r" indent="0" marL="0">
+            <a:pPr marL="0" indent="0" algn="r">
               <a:buNone/>
             </a:pPr>
             <a:r>
@@ -7003,6 +6723,7 @@
         <a:solidFill>
           <a:srgbClr val="10131A"/>
         </a:solidFill>
+        <a:effectLst/>
       </p:bgPr>
     </p:bg>
     <p:spTree>
@@ -7060,11 +6781,11 @@
           <a:bodyPr wrap="square" lIns="0" tIns="0" rIns="0" bIns="0" rtlCol="0" anchor="ctr"/>
           <a:lstStyle/>
           <a:p>
-            <a:pPr indent="0" marL="0">
-              <a:buNone/>
-            </a:pPr>
-            <a:r>
-              <a:rPr lang="en-US" sz="1200" b="1" spc="200" kern="0" dirty="0">
+            <a:pPr marL="0" indent="0">
+              <a:buNone/>
+            </a:pPr>
+            <a:r>
+              <a:rPr lang="en-US" sz="1200" b="1" kern="0" spc="200" dirty="0">
                 <a:solidFill>
                   <a:srgbClr val="8A93A6"/>
                 </a:solidFill>
@@ -7099,7 +6820,7 @@
           <a:bodyPr wrap="square" lIns="0" tIns="0" rIns="0" bIns="0" rtlCol="0" anchor="ctr"/>
           <a:lstStyle/>
           <a:p>
-            <a:pPr indent="0" marL="0">
+            <a:pPr marL="0" indent="0">
               <a:buNone/>
             </a:pPr>
             <a:r>
@@ -7138,7 +6859,7 @@
           <a:bodyPr wrap="square" lIns="0" tIns="0" rIns="0" bIns="0" rtlCol="0" anchor="t"/>
           <a:lstStyle/>
           <a:p>
-            <a:pPr indent="0" marL="0">
+            <a:pPr marL="0" indent="0">
               <a:lnSpc>
                 <a:spcPts val="3200"/>
               </a:lnSpc>
@@ -7167,8 +6888,8 @@
         </p:nvSpPr>
         <p:spPr>
           <a:xfrm>
-            <a:off x="685800" y="3200400"/>
-            <a:ext cx="4206240" cy="2286000"/>
+            <a:off x="685800" y="3200399"/>
+            <a:ext cx="4206240" cy="2685393"/>
           </a:xfrm>
           <a:prstGeom prst="roundRect">
             <a:avLst>
@@ -7202,7 +6923,7 @@
           <a:bodyPr wrap="square" lIns="0" tIns="0" rIns="0" bIns="0" rtlCol="0" anchor="ctr"/>
           <a:lstStyle/>
           <a:p>
-            <a:pPr indent="0" marL="0">
+            <a:pPr marL="0" indent="0">
               <a:buNone/>
             </a:pPr>
             <a:r>
@@ -7229,7 +6950,7 @@
         <p:spPr>
           <a:xfrm>
             <a:off x="1005840" y="3840480"/>
-            <a:ext cx="3611880" cy="1371600"/>
+            <a:ext cx="3611880" cy="1950720"/>
           </a:xfrm>
           <a:prstGeom prst="rect">
             <a:avLst/>
@@ -7241,7 +6962,7 @@
           <a:bodyPr wrap="square" lIns="0" tIns="0" rIns="0" bIns="0" rtlCol="0" anchor="t"/>
           <a:lstStyle/>
           <a:p>
-            <a:pPr indent="0" marL="0">
+            <a:pPr marL="0" indent="0">
               <a:lnSpc>
                 <a:spcPts val="2600"/>
               </a:lnSpc>
@@ -7261,7 +6982,7 @@
             <a:endParaRPr lang="en-US" sz="1500" dirty="0"/>
           </a:p>
           <a:p>
-            <a:pPr indent="0" marL="0">
+            <a:pPr marL="0" indent="0">
               <a:lnSpc>
                 <a:spcPts val="2600"/>
               </a:lnSpc>
@@ -7270,12 +6991,6 @@
             <a:endParaRPr lang="en-US" sz="1500" dirty="0"/>
           </a:p>
           <a:p>
-            <a:pPr indent="0" marL="0">
-              <a:lnSpc>
-                <a:spcPts val="2600"/>
-              </a:lnSpc>
-              <a:buNone/>
-            </a:pPr>
             <a:r>
               <a:rPr lang="en-US" sz="1500" b="1" dirty="0">
                 <a:solidFill>
@@ -7285,8 +7000,232 @@
                 <a:ea typeface="Arial" pitchFamily="34" charset="-122"/>
                 <a:cs typeface="Arial" pitchFamily="34" charset="-120"/>
               </a:rPr>
-              <a:t>ATL  →  CTL  →  TSB</a:t>
-            </a:r>
+              <a:t>ATL </a:t>
+            </a:r>
+            <a:r>
+              <a:rPr lang="zh-TW" altLang="en" sz="1200" b="1" dirty="0">
+                <a:solidFill>
+                  <a:schemeClr val="bg1">
+                    <a:lumMod val="75000"/>
+                  </a:schemeClr>
+                </a:solidFill>
+                <a:latin typeface="Microsoft JhengHei" panose="020B0604030504040204" pitchFamily="34" charset="-120"/>
+                <a:ea typeface="Microsoft JhengHei" panose="020B0604030504040204" pitchFamily="34" charset="-120"/>
+              </a:rPr>
+              <a:t>（</a:t>
+            </a:r>
+            <a:r>
+              <a:rPr lang="en" altLang="zh-TW" sz="1200" b="1" dirty="0">
+                <a:solidFill>
+                  <a:schemeClr val="bg1">
+                    <a:lumMod val="75000"/>
+                  </a:schemeClr>
+                </a:solidFill>
+                <a:latin typeface="Microsoft JhengHei" panose="020B0604030504040204" pitchFamily="34" charset="-120"/>
+                <a:ea typeface="Microsoft JhengHei" panose="020B0604030504040204" pitchFamily="34" charset="-120"/>
+              </a:rPr>
+              <a:t>Acute Training Load</a:t>
+            </a:r>
+            <a:r>
+              <a:rPr lang="zh-TW" altLang="en" sz="1200" b="1" dirty="0">
+                <a:solidFill>
+                  <a:schemeClr val="bg1">
+                    <a:lumMod val="75000"/>
+                  </a:schemeClr>
+                </a:solidFill>
+                <a:latin typeface="Microsoft JhengHei" panose="020B0604030504040204" pitchFamily="34" charset="-120"/>
+                <a:ea typeface="Microsoft JhengHei" panose="020B0604030504040204" pitchFamily="34" charset="-120"/>
+              </a:rPr>
+              <a:t>）</a:t>
+            </a:r>
+          </a:p>
+          <a:p>
+            <a:r>
+              <a:rPr lang="zh-TW" altLang="en-US" sz="1200" b="1" dirty="0">
+                <a:solidFill>
+                  <a:schemeClr val="bg1">
+                    <a:lumMod val="75000"/>
+                  </a:schemeClr>
+                </a:solidFill>
+                <a:latin typeface="Microsoft JhengHei" panose="020B0604030504040204" pitchFamily="34" charset="-120"/>
+                <a:ea typeface="Microsoft JhengHei" panose="020B0604030504040204" pitchFamily="34" charset="-120"/>
+              </a:rPr>
+              <a:t>急性訓練負荷（短期疲勞）</a:t>
+            </a:r>
+            <a:endParaRPr lang="en-US" altLang="zh-TW" sz="1200" b="1" dirty="0">
+              <a:solidFill>
+                <a:schemeClr val="bg1">
+                  <a:lumMod val="75000"/>
+                </a:schemeClr>
+              </a:solidFill>
+              <a:latin typeface="Microsoft JhengHei" panose="020B0604030504040204" pitchFamily="34" charset="-120"/>
+              <a:ea typeface="Microsoft JhengHei" panose="020B0604030504040204" pitchFamily="34" charset="-120"/>
+            </a:endParaRPr>
+          </a:p>
+          <a:p>
+            <a:r>
+              <a:rPr lang="en-US" sz="1500" b="1" dirty="0">
+                <a:solidFill>
+                  <a:srgbClr val="CFD4DF"/>
+                </a:solidFill>
+                <a:latin typeface="Arial" pitchFamily="34" charset="0"/>
+                <a:ea typeface="Arial" pitchFamily="34" charset="-122"/>
+                <a:cs typeface="Arial" pitchFamily="34" charset="-120"/>
+              </a:rPr>
+              <a:t>→  CTL </a:t>
+            </a:r>
+            <a:r>
+              <a:rPr lang="zh-TW" altLang="en" sz="1200" b="1" dirty="0">
+                <a:solidFill>
+                  <a:schemeClr val="bg1">
+                    <a:lumMod val="75000"/>
+                  </a:schemeClr>
+                </a:solidFill>
+                <a:latin typeface="Microsoft JhengHei" panose="020B0604030504040204" pitchFamily="34" charset="-120"/>
+                <a:ea typeface="Microsoft JhengHei" panose="020B0604030504040204" pitchFamily="34" charset="-120"/>
+              </a:rPr>
+              <a:t>（</a:t>
+            </a:r>
+            <a:r>
+              <a:rPr lang="en" altLang="zh-TW" sz="1200" b="1" dirty="0">
+                <a:solidFill>
+                  <a:schemeClr val="bg1">
+                    <a:lumMod val="75000"/>
+                  </a:schemeClr>
+                </a:solidFill>
+                <a:latin typeface="Microsoft JhengHei" panose="020B0604030504040204" pitchFamily="34" charset="-120"/>
+                <a:ea typeface="Microsoft JhengHei" panose="020B0604030504040204" pitchFamily="34" charset="-120"/>
+              </a:rPr>
+              <a:t>Chronic Training Load</a:t>
+            </a:r>
+            <a:r>
+              <a:rPr lang="zh-TW" altLang="en" sz="1200" b="1" dirty="0">
+                <a:solidFill>
+                  <a:schemeClr val="bg1">
+                    <a:lumMod val="75000"/>
+                  </a:schemeClr>
+                </a:solidFill>
+                <a:latin typeface="Microsoft JhengHei" panose="020B0604030504040204" pitchFamily="34" charset="-120"/>
+                <a:ea typeface="Microsoft JhengHei" panose="020B0604030504040204" pitchFamily="34" charset="-120"/>
+              </a:rPr>
+              <a:t>）</a:t>
+            </a:r>
+          </a:p>
+          <a:p>
+            <a:r>
+              <a:rPr lang="zh-TW" altLang="en-US" sz="1200" b="1" dirty="0">
+                <a:solidFill>
+                  <a:schemeClr val="bg1">
+                    <a:lumMod val="75000"/>
+                  </a:schemeClr>
+                </a:solidFill>
+                <a:latin typeface="Microsoft JhengHei" panose="020B0604030504040204" pitchFamily="34" charset="-120"/>
+                <a:ea typeface="Microsoft JhengHei" panose="020B0604030504040204" pitchFamily="34" charset="-120"/>
+              </a:rPr>
+              <a:t>慢性訓練負荷（長期體能）</a:t>
+            </a:r>
+            <a:endParaRPr lang="zh-TW" altLang="en-US" sz="1200" dirty="0">
+              <a:solidFill>
+                <a:schemeClr val="bg1">
+                  <a:lumMod val="75000"/>
+                </a:schemeClr>
+              </a:solidFill>
+              <a:latin typeface="Microsoft JhengHei" panose="020B0604030504040204" pitchFamily="34" charset="-120"/>
+              <a:ea typeface="Microsoft JhengHei" panose="020B0604030504040204" pitchFamily="34" charset="-120"/>
+            </a:endParaRPr>
+          </a:p>
+          <a:p>
+            <a:r>
+              <a:rPr lang="en-US" sz="1500" b="1" dirty="0">
+                <a:solidFill>
+                  <a:srgbClr val="CFD4DF"/>
+                </a:solidFill>
+                <a:latin typeface="Arial" pitchFamily="34" charset="0"/>
+                <a:ea typeface="Arial" pitchFamily="34" charset="-122"/>
+                <a:cs typeface="Arial" pitchFamily="34" charset="-120"/>
+              </a:rPr>
+              <a:t>→  </a:t>
+            </a:r>
+            <a:r>
+              <a:rPr lang="en-US" sz="1500" b="1" dirty="0">
+                <a:solidFill>
+                  <a:schemeClr val="bg1">
+                    <a:lumMod val="75000"/>
+                  </a:schemeClr>
+                </a:solidFill>
+                <a:latin typeface="Arial" pitchFamily="34" charset="0"/>
+                <a:ea typeface="Microsoft JhengHei" panose="020B0604030504040204" pitchFamily="34" charset="-120"/>
+                <a:cs typeface="Arial" pitchFamily="34" charset="-120"/>
+              </a:rPr>
+              <a:t>TSB</a:t>
+            </a:r>
+            <a:r>
+              <a:rPr lang="zh-TW" altLang="en-US" sz="1500" b="1" dirty="0">
+                <a:solidFill>
+                  <a:schemeClr val="bg1">
+                    <a:lumMod val="75000"/>
+                  </a:schemeClr>
+                </a:solidFill>
+                <a:latin typeface="Arial" pitchFamily="34" charset="0"/>
+                <a:ea typeface="Microsoft JhengHei" panose="020B0604030504040204" pitchFamily="34" charset="-120"/>
+                <a:cs typeface="Arial" pitchFamily="34" charset="-120"/>
+              </a:rPr>
+              <a:t>  </a:t>
+            </a:r>
+            <a:r>
+              <a:rPr lang="zh-TW" altLang="en-US" sz="1200" b="1" dirty="0">
+                <a:solidFill>
+                  <a:schemeClr val="bg1">
+                    <a:lumMod val="75000"/>
+                  </a:schemeClr>
+                </a:solidFill>
+                <a:latin typeface="Arial" pitchFamily="34" charset="0"/>
+                <a:ea typeface="Microsoft JhengHei" panose="020B0604030504040204" pitchFamily="34" charset="-120"/>
+                <a:cs typeface="Arial" pitchFamily="34" charset="-120"/>
+              </a:rPr>
+              <a:t>（</a:t>
+            </a:r>
+            <a:r>
+              <a:rPr lang="en" altLang="zh-TW" sz="1200" b="1" dirty="0">
+                <a:solidFill>
+                  <a:schemeClr val="bg1">
+                    <a:lumMod val="75000"/>
+                  </a:schemeClr>
+                </a:solidFill>
+              </a:rPr>
+              <a:t>Training Stress Balance</a:t>
+            </a:r>
+            <a:r>
+              <a:rPr lang="zh-TW" altLang="en" sz="1200" b="1" dirty="0">
+                <a:solidFill>
+                  <a:schemeClr val="bg1">
+                    <a:lumMod val="75000"/>
+                  </a:schemeClr>
+                </a:solidFill>
+              </a:rPr>
+              <a:t>）</a:t>
+            </a:r>
+          </a:p>
+          <a:p>
+            <a:r>
+              <a:rPr lang="zh-TW" altLang="en-US" sz="1200" b="1" dirty="0">
+                <a:solidFill>
+                  <a:schemeClr val="bg1">
+                    <a:lumMod val="75000"/>
+                  </a:schemeClr>
+                </a:solidFill>
+              </a:rPr>
+              <a:t>訓練壓力平衡（恢復程度）</a:t>
+            </a:r>
+            <a:endParaRPr lang="zh-TW" altLang="en-US" sz="1200" dirty="0">
+              <a:solidFill>
+                <a:schemeClr val="bg1">
+                  <a:lumMod val="75000"/>
+                </a:schemeClr>
+              </a:solidFill>
+            </a:endParaRPr>
+          </a:p>
+          <a:p>
             <a:endParaRPr lang="en-US" sz="1500" dirty="0"/>
           </a:p>
         </p:txBody>
@@ -7334,7 +7273,7 @@
           <a:bodyPr wrap="square" lIns="0" tIns="0" rIns="0" bIns="0" rtlCol="0" anchor="ctr"/>
           <a:lstStyle/>
           <a:p>
-            <a:pPr indent="0" marL="0">
+            <a:pPr marL="0" indent="0">
               <a:buNone/>
             </a:pPr>
             <a:r>
@@ -7373,7 +7312,7 @@
           <a:bodyPr wrap="square" lIns="0" tIns="0" rIns="0" bIns="0" rtlCol="0" anchor="ctr"/>
           <a:lstStyle/>
           <a:p>
-            <a:pPr indent="0" marL="0">
+            <a:pPr marL="0" indent="0">
               <a:buNone/>
             </a:pPr>
             <a:r>
@@ -7456,7 +7395,7 @@
           <a:bodyPr wrap="square" lIns="0" tIns="0" rIns="0" bIns="0" rtlCol="0" anchor="ctr"/>
           <a:lstStyle/>
           <a:p>
-            <a:pPr indent="0" marL="0">
+            <a:pPr marL="0" indent="0">
               <a:buNone/>
             </a:pPr>
             <a:r>
@@ -7495,7 +7434,7 @@
           <a:bodyPr wrap="square" lIns="0" tIns="0" rIns="0" bIns="0" rtlCol="0" anchor="ctr"/>
           <a:lstStyle/>
           <a:p>
-            <a:pPr indent="0" marL="0">
+            <a:pPr marL="0" indent="0">
               <a:buNone/>
             </a:pPr>
             <a:r>
@@ -7578,7 +7517,7 @@
           <a:bodyPr wrap="square" lIns="0" tIns="0" rIns="0" bIns="0" rtlCol="0" anchor="ctr"/>
           <a:lstStyle/>
           <a:p>
-            <a:pPr indent="0" marL="0">
+            <a:pPr marL="0" indent="0">
               <a:buNone/>
             </a:pPr>
             <a:r>
@@ -7617,7 +7556,7 @@
           <a:bodyPr wrap="square" lIns="0" tIns="0" rIns="0" bIns="0" rtlCol="0" anchor="ctr"/>
           <a:lstStyle/>
           <a:p>
-            <a:pPr indent="0" marL="0">
+            <a:pPr marL="0" indent="0">
               <a:buNone/>
             </a:pPr>
             <a:r>
@@ -7700,7 +7639,7 @@
           <a:bodyPr wrap="square" lIns="0" tIns="0" rIns="0" bIns="0" rtlCol="0" anchor="ctr"/>
           <a:lstStyle/>
           <a:p>
-            <a:pPr indent="0" marL="0">
+            <a:pPr marL="0" indent="0">
               <a:buNone/>
             </a:pPr>
             <a:r>
@@ -7739,7 +7678,7 @@
           <a:bodyPr wrap="square" lIns="0" tIns="0" rIns="0" bIns="0" rtlCol="0" anchor="ctr"/>
           <a:lstStyle/>
           <a:p>
-            <a:pPr algn="r" indent="0" marL="0">
+            <a:pPr marL="0" indent="0" algn="r">
               <a:buNone/>
             </a:pPr>
             <a:r>
@@ -7773,6 +7712,7 @@
         <a:solidFill>
           <a:srgbClr val="FFFFFF"/>
         </a:solidFill>
+        <a:effectLst/>
       </p:bgPr>
     </p:bg>
     <p:spTree>
@@ -7830,11 +7770,11 @@
           <a:bodyPr wrap="square" lIns="0" tIns="0" rIns="0" bIns="0" rtlCol="0" anchor="ctr"/>
           <a:lstStyle/>
           <a:p>
-            <a:pPr indent="0" marL="0">
-              <a:buNone/>
-            </a:pPr>
-            <a:r>
-              <a:rPr lang="en-US" sz="1200" b="1" spc="200" kern="0" dirty="0">
+            <a:pPr marL="0" indent="0">
+              <a:buNone/>
+            </a:pPr>
+            <a:r>
+              <a:rPr lang="en-US" sz="1200" b="1" kern="0" spc="200" dirty="0">
                 <a:solidFill>
                   <a:srgbClr val="6E7687"/>
                 </a:solidFill>
@@ -7869,7 +7809,7 @@
           <a:bodyPr wrap="square" lIns="0" tIns="0" rIns="0" bIns="0" rtlCol="0" anchor="ctr"/>
           <a:lstStyle/>
           <a:p>
-            <a:pPr indent="0" marL="0">
+            <a:pPr marL="0" indent="0">
               <a:buNone/>
             </a:pPr>
             <a:r>
@@ -7908,7 +7848,7 @@
           <a:bodyPr wrap="square" lIns="0" tIns="0" rIns="0" bIns="0" rtlCol="0" anchor="t"/>
           <a:lstStyle/>
           <a:p>
-            <a:pPr indent="0" marL="0">
+            <a:pPr marL="0" indent="0">
               <a:lnSpc>
                 <a:spcPts val="3200"/>
               </a:lnSpc>
@@ -7972,7 +7912,7 @@
           <a:bodyPr wrap="square" lIns="0" tIns="0" rIns="0" bIns="0" rtlCol="0" anchor="ctr"/>
           <a:lstStyle/>
           <a:p>
-            <a:pPr indent="0" marL="0">
+            <a:pPr marL="0" indent="0">
               <a:buNone/>
             </a:pPr>
             <a:r>
@@ -8011,7 +7951,7 @@
           <a:bodyPr wrap="square" lIns="0" tIns="0" rIns="0" bIns="0" rtlCol="0" anchor="t"/>
           <a:lstStyle/>
           <a:p>
-            <a:pPr indent="0" marL="0">
+            <a:pPr marL="0" indent="0">
               <a:lnSpc>
                 <a:spcPts val="2500"/>
               </a:lnSpc>
@@ -8031,7 +7971,7 @@
             <a:endParaRPr lang="en-US" sz="1500" dirty="0"/>
           </a:p>
           <a:p>
-            <a:pPr indent="0" marL="0">
+            <a:pPr marL="0" indent="0">
               <a:lnSpc>
                 <a:spcPts val="2500"/>
               </a:lnSpc>
@@ -8051,7 +7991,7 @@
             <a:endParaRPr lang="en-US" sz="1500" dirty="0"/>
           </a:p>
           <a:p>
-            <a:pPr indent="0" marL="0">
+            <a:pPr marL="0" indent="0">
               <a:lnSpc>
                 <a:spcPts val="2500"/>
               </a:lnSpc>
@@ -8071,7 +8011,7 @@
             <a:endParaRPr lang="en-US" sz="1500" dirty="0"/>
           </a:p>
           <a:p>
-            <a:pPr indent="0" marL="0">
+            <a:pPr marL="0" indent="0">
               <a:lnSpc>
                 <a:spcPts val="2500"/>
               </a:lnSpc>
@@ -8113,7 +8053,7 @@
           <a:bodyPr wrap="square" lIns="0" tIns="0" rIns="0" bIns="0" rtlCol="0" anchor="ctr"/>
           <a:lstStyle/>
           <a:p>
-            <a:pPr algn="ctr" indent="0" marL="0">
+            <a:pPr marL="0" indent="0" algn="ctr">
               <a:buNone/>
             </a:pPr>
             <a:r>
@@ -8174,7 +8114,7 @@
           <a:bodyPr wrap="square" lIns="0" tIns="0" rIns="0" bIns="0" rtlCol="0" anchor="ctr"/>
           <a:lstStyle/>
           <a:p>
-            <a:pPr indent="0" marL="0">
+            <a:pPr marL="0" indent="0">
               <a:buNone/>
             </a:pPr>
             <a:r>
@@ -8213,7 +8153,7 @@
           <a:bodyPr wrap="square" lIns="0" tIns="0" rIns="0" bIns="0" rtlCol="0" anchor="t"/>
           <a:lstStyle/>
           <a:p>
-            <a:pPr indent="0" marL="0">
+            <a:pPr marL="0" indent="0">
               <a:lnSpc>
                 <a:spcPts val="2500"/>
               </a:lnSpc>
@@ -8233,7 +8173,7 @@
             <a:endParaRPr lang="en-US" sz="1400" dirty="0"/>
           </a:p>
           <a:p>
-            <a:pPr indent="0" marL="0">
+            <a:pPr marL="0" indent="0">
               <a:lnSpc>
                 <a:spcPts val="2500"/>
               </a:lnSpc>
@@ -8253,7 +8193,7 @@
             <a:endParaRPr lang="en-US" sz="1400" dirty="0"/>
           </a:p>
           <a:p>
-            <a:pPr indent="0" marL="0">
+            <a:pPr marL="0" indent="0">
               <a:lnSpc>
                 <a:spcPts val="2500"/>
               </a:lnSpc>
@@ -8273,7 +8213,7 @@
             <a:endParaRPr lang="en-US" sz="1400" dirty="0"/>
           </a:p>
           <a:p>
-            <a:pPr indent="0" marL="0">
+            <a:pPr marL="0" indent="0">
               <a:lnSpc>
                 <a:spcPts val="2500"/>
               </a:lnSpc>
@@ -8315,7 +8255,7 @@
           <a:bodyPr wrap="square" lIns="0" tIns="0" rIns="0" bIns="0" rtlCol="0" anchor="ctr"/>
           <a:lstStyle/>
           <a:p>
-            <a:pPr algn="ctr" indent="0" marL="0">
+            <a:pPr marL="0" indent="0" algn="ctr">
               <a:buNone/>
             </a:pPr>
             <a:r>
@@ -8376,7 +8316,7 @@
           <a:bodyPr wrap="square" lIns="0" tIns="0" rIns="0" bIns="0" rtlCol="0" anchor="ctr"/>
           <a:lstStyle/>
           <a:p>
-            <a:pPr indent="0" marL="0">
+            <a:pPr marL="0" indent="0">
               <a:buNone/>
             </a:pPr>
             <a:r>
@@ -8415,7 +8355,7 @@
           <a:bodyPr wrap="square" lIns="0" tIns="0" rIns="0" bIns="0" rtlCol="0" anchor="t"/>
           <a:lstStyle/>
           <a:p>
-            <a:pPr indent="0" marL="0">
+            <a:pPr marL="0" indent="0">
               <a:lnSpc>
                 <a:spcPts val="3100"/>
               </a:lnSpc>
@@ -8435,7 +8375,7 @@
             <a:endParaRPr lang="en-US" sz="1800" dirty="0"/>
           </a:p>
           <a:p>
-            <a:pPr indent="0" marL="0">
+            <a:pPr marL="0" indent="0">
               <a:lnSpc>
                 <a:spcPts val="3100"/>
               </a:lnSpc>
@@ -8455,7 +8395,7 @@
             <a:endParaRPr lang="en-US" sz="1800" dirty="0"/>
           </a:p>
           <a:p>
-            <a:pPr indent="0" marL="0">
+            <a:pPr marL="0" indent="0">
               <a:lnSpc>
                 <a:spcPts val="3100"/>
               </a:lnSpc>
@@ -8497,7 +8437,7 @@
           <a:bodyPr wrap="square" lIns="0" tIns="0" rIns="0" bIns="0" rtlCol="0" anchor="ctr"/>
           <a:lstStyle/>
           <a:p>
-            <a:pPr algn="r" indent="0" marL="0">
+            <a:pPr marL="0" indent="0" algn="r">
               <a:buNone/>
             </a:pPr>
             <a:r>
@@ -8531,6 +8471,7 @@
         <a:solidFill>
           <a:srgbClr val="FFFFFF"/>
         </a:solidFill>
+        <a:effectLst/>
       </p:bgPr>
     </p:bg>
     <p:spTree>
@@ -8588,11 +8529,11 @@
           <a:bodyPr wrap="square" lIns="0" tIns="0" rIns="0" bIns="0" rtlCol="0" anchor="ctr"/>
           <a:lstStyle/>
           <a:p>
-            <a:pPr indent="0" marL="0">
-              <a:buNone/>
-            </a:pPr>
-            <a:r>
-              <a:rPr lang="en-US" sz="1200" b="1" spc="200" kern="0" dirty="0">
+            <a:pPr marL="0" indent="0">
+              <a:buNone/>
+            </a:pPr>
+            <a:r>
+              <a:rPr lang="en-US" sz="1200" b="1" kern="0" spc="200" dirty="0">
                 <a:solidFill>
                   <a:srgbClr val="6E7687"/>
                 </a:solidFill>
@@ -8627,7 +8568,7 @@
           <a:bodyPr wrap="square" lIns="0" tIns="0" rIns="0" bIns="0" rtlCol="0" anchor="ctr"/>
           <a:lstStyle/>
           <a:p>
-            <a:pPr indent="0" marL="0">
+            <a:pPr marL="0" indent="0">
               <a:buNone/>
             </a:pPr>
             <a:r>
@@ -8666,7 +8607,7 @@
           <a:bodyPr wrap="square" lIns="0" tIns="0" rIns="0" bIns="0" rtlCol="0" anchor="t"/>
           <a:lstStyle/>
           <a:p>
-            <a:pPr indent="0" marL="0">
+            <a:pPr marL="0" indent="0">
               <a:lnSpc>
                 <a:spcPts val="3200"/>
               </a:lnSpc>
@@ -8681,7 +8622,51 @@
                 <a:ea typeface="Microsoft JhengHei" pitchFamily="34" charset="-122"/>
                 <a:cs typeface="Microsoft JhengHei" pitchFamily="34" charset="-120"/>
               </a:rPr>
-              <a:t>每個 Connector 只負責四件事,把外部世界的髒活關在平台邊界之外。</a:t>
+              <a:t>每個 Connector </a:t>
+            </a:r>
+            <a:r>
+              <a:rPr lang="en-US" sz="2000" dirty="0" err="1">
+                <a:solidFill>
+                  <a:srgbClr val="353A46"/>
+                </a:solidFill>
+                <a:latin typeface="Microsoft JhengHei" pitchFamily="34" charset="0"/>
+                <a:ea typeface="Microsoft JhengHei" pitchFamily="34" charset="-122"/>
+                <a:cs typeface="Microsoft JhengHei" pitchFamily="34" charset="-120"/>
+              </a:rPr>
+              <a:t>只負責四件事,把外部世界的</a:t>
+            </a:r>
+            <a:r>
+              <a:rPr lang="zh-CN" altLang="en-US" sz="2000" dirty="0">
+                <a:solidFill>
+                  <a:srgbClr val="353A46"/>
+                </a:solidFill>
+                <a:latin typeface="Microsoft JhengHei" pitchFamily="34" charset="0"/>
+                <a:ea typeface="Microsoft JhengHei" pitchFamily="34" charset="-122"/>
+                <a:cs typeface="Microsoft JhengHei" pitchFamily="34" charset="-120"/>
+              </a:rPr>
+              <a:t>數據雜亂資料</a:t>
+            </a:r>
+            <a:r>
+              <a:rPr lang="en-US" sz="2000" dirty="0" err="1">
+                <a:solidFill>
+                  <a:srgbClr val="353A46"/>
+                </a:solidFill>
+                <a:latin typeface="Microsoft JhengHei" pitchFamily="34" charset="0"/>
+                <a:ea typeface="Microsoft JhengHei" pitchFamily="34" charset="-122"/>
+                <a:cs typeface="Microsoft JhengHei" pitchFamily="34" charset="-120"/>
+              </a:rPr>
+              <a:t>關在平台邊界之外</a:t>
+            </a:r>
+            <a:r>
+              <a:rPr lang="en-US" sz="2000" dirty="0">
+                <a:solidFill>
+                  <a:srgbClr val="353A46"/>
+                </a:solidFill>
+                <a:latin typeface="Microsoft JhengHei" pitchFamily="34" charset="0"/>
+                <a:ea typeface="Microsoft JhengHei" pitchFamily="34" charset="-122"/>
+                <a:cs typeface="Microsoft JhengHei" pitchFamily="34" charset="-120"/>
+              </a:rPr>
+              <a:t>。</a:t>
             </a:r>
             <a:endParaRPr lang="en-US" sz="2000" dirty="0"/>
           </a:p>
@@ -8730,7 +8715,7 @@
           <a:bodyPr wrap="square" lIns="0" tIns="0" rIns="0" bIns="0" rtlCol="0" anchor="ctr"/>
           <a:lstStyle/>
           <a:p>
-            <a:pPr algn="ctr" indent="0" marL="0">
+            <a:pPr marL="0" indent="0" algn="ctr">
               <a:buNone/>
             </a:pPr>
             <a:r>
@@ -8791,7 +8776,7 @@
           <a:bodyPr wrap="square" lIns="0" tIns="0" rIns="0" bIns="0" rtlCol="0" anchor="ctr"/>
           <a:lstStyle/>
           <a:p>
-            <a:pPr algn="ctr" indent="0" marL="0">
+            <a:pPr marL="0" indent="0" algn="ctr">
               <a:buNone/>
             </a:pPr>
             <a:r>
@@ -8852,7 +8837,7 @@
           <a:bodyPr wrap="square" lIns="0" tIns="0" rIns="0" bIns="0" rtlCol="0" anchor="ctr"/>
           <a:lstStyle/>
           <a:p>
-            <a:pPr algn="ctr" indent="0" marL="0">
+            <a:pPr marL="0" indent="0" algn="ctr">
               <a:buNone/>
             </a:pPr>
             <a:r>
@@ -8913,7 +8898,7 @@
           <a:bodyPr wrap="square" lIns="0" tIns="0" rIns="0" bIns="0" rtlCol="0" anchor="ctr"/>
           <a:lstStyle/>
           <a:p>
-            <a:pPr algn="ctr" indent="0" marL="0">
+            <a:pPr marL="0" indent="0" algn="ctr">
               <a:buNone/>
             </a:pPr>
             <a:r>
@@ -8974,7 +8959,7 @@
           <a:bodyPr wrap="square" lIns="0" tIns="0" rIns="0" bIns="0" rtlCol="0" anchor="ctr"/>
           <a:lstStyle/>
           <a:p>
-            <a:pPr algn="ctr" indent="0" marL="0">
+            <a:pPr marL="0" indent="0" algn="ctr">
               <a:buNone/>
             </a:pPr>
             <a:r>
@@ -9035,7 +9020,7 @@
           <a:bodyPr wrap="square" lIns="0" tIns="0" rIns="0" bIns="0" rtlCol="0" anchor="ctr"/>
           <a:lstStyle/>
           <a:p>
-            <a:pPr algn="ctr" indent="0" marL="0">
+            <a:pPr marL="0" indent="0" algn="ctr">
               <a:buNone/>
             </a:pPr>
             <a:r>
@@ -9096,7 +9081,7 @@
           <a:bodyPr wrap="square" lIns="0" tIns="0" rIns="0" bIns="0" rtlCol="0" anchor="ctr"/>
           <a:lstStyle/>
           <a:p>
-            <a:pPr algn="ctr" indent="0" marL="0">
+            <a:pPr marL="0" indent="0" algn="ctr">
               <a:buNone/>
             </a:pPr>
             <a:r>
@@ -9116,14 +9101,14 @@
       </p:sp>
       <p:sp>
         <p:nvSpPr>
-          <p:cNvPr id="20" name="Shape 18"/>
-          <p:cNvSpPr/>
-          <p:nvPr/>
-        </p:nvSpPr>
-        <p:spPr>
-          <a:xfrm>
-            <a:off x="4690872" y="4526280"/>
-            <a:ext cx="864108" cy="502920"/>
+          <p:cNvPr id="24" name="Shape 22"/>
+          <p:cNvSpPr/>
+          <p:nvPr/>
+        </p:nvSpPr>
+        <p:spPr>
+          <a:xfrm>
+            <a:off x="5833872" y="4526280"/>
+            <a:ext cx="960120" cy="502920"/>
           </a:xfrm>
           <a:prstGeom prst="roundRect">
             <a:avLst>
@@ -9138,26 +9123,26 @@
       </p:sp>
       <p:sp>
         <p:nvSpPr>
-          <p:cNvPr id="21" name="Text 19"/>
-          <p:cNvSpPr/>
-          <p:nvPr/>
-        </p:nvSpPr>
-        <p:spPr>
-          <a:xfrm>
-            <a:off x="4690872" y="4526280"/>
-            <a:ext cx="864108" cy="502920"/>
-          </a:xfrm>
-          <a:prstGeom prst="rect">
-            <a:avLst/>
-          </a:prstGeom>
-          <a:noFill/>
-          <a:ln/>
-        </p:spPr>
-        <p:txBody>
-          <a:bodyPr wrap="square" lIns="0" tIns="0" rIns="0" bIns="0" rtlCol="0" anchor="ctr"/>
-          <a:lstStyle/>
-          <a:p>
-            <a:pPr algn="ctr" indent="0" marL="0">
+          <p:cNvPr id="25" name="Text 23"/>
+          <p:cNvSpPr/>
+          <p:nvPr/>
+        </p:nvSpPr>
+        <p:spPr>
+          <a:xfrm>
+            <a:off x="5833872" y="4526280"/>
+            <a:ext cx="960120" cy="502920"/>
+          </a:xfrm>
+          <a:prstGeom prst="rect">
+            <a:avLst/>
+          </a:prstGeom>
+          <a:noFill/>
+          <a:ln/>
+        </p:spPr>
+        <p:txBody>
+          <a:bodyPr wrap="square" lIns="0" tIns="0" rIns="0" bIns="0" rtlCol="0" anchor="ctr"/>
+          <a:lstStyle/>
+          <a:p>
+            <a:pPr marL="0" indent="0" algn="ctr">
               <a:buNone/>
             </a:pPr>
             <a:r>
@@ -9169,7 +9154,7 @@
                 <a:ea typeface="Microsoft JhengHei" pitchFamily="34" charset="-122"/>
                 <a:cs typeface="Microsoft JhengHei" pitchFamily="34" charset="-120"/>
               </a:rPr>
-              <a:t>WHOOP</a:t>
+              <a:t>Fitbit</a:t>
             </a:r>
             <a:endParaRPr lang="en-US" sz="1300" dirty="0"/>
           </a:p>
@@ -9177,14 +9162,14 @@
       </p:sp>
       <p:sp>
         <p:nvSpPr>
-          <p:cNvPr id="22" name="Shape 20"/>
-          <p:cNvSpPr/>
-          <p:nvPr/>
-        </p:nvSpPr>
-        <p:spPr>
-          <a:xfrm>
-            <a:off x="5737860" y="4526280"/>
-            <a:ext cx="768096" cy="502920"/>
+          <p:cNvPr id="26" name="Shape 24"/>
+          <p:cNvSpPr/>
+          <p:nvPr/>
+        </p:nvSpPr>
+        <p:spPr>
+          <a:xfrm>
+            <a:off x="6976872" y="4526280"/>
+            <a:ext cx="1632204" cy="502920"/>
           </a:xfrm>
           <a:prstGeom prst="roundRect">
             <a:avLst>
@@ -9199,26 +9184,26 @@
       </p:sp>
       <p:sp>
         <p:nvSpPr>
-          <p:cNvPr id="23" name="Text 21"/>
-          <p:cNvSpPr/>
-          <p:nvPr/>
-        </p:nvSpPr>
-        <p:spPr>
-          <a:xfrm>
-            <a:off x="5737860" y="4526280"/>
-            <a:ext cx="768096" cy="502920"/>
-          </a:xfrm>
-          <a:prstGeom prst="rect">
-            <a:avLst/>
-          </a:prstGeom>
-          <a:noFill/>
-          <a:ln/>
-        </p:spPr>
-        <p:txBody>
-          <a:bodyPr wrap="square" lIns="0" tIns="0" rIns="0" bIns="0" rtlCol="0" anchor="ctr"/>
-          <a:lstStyle/>
-          <a:p>
-            <a:pPr algn="ctr" indent="0" marL="0">
+          <p:cNvPr id="27" name="Text 25"/>
+          <p:cNvSpPr/>
+          <p:nvPr/>
+        </p:nvSpPr>
+        <p:spPr>
+          <a:xfrm>
+            <a:off x="6976872" y="4526280"/>
+            <a:ext cx="1632204" cy="502920"/>
+          </a:xfrm>
+          <a:prstGeom prst="rect">
+            <a:avLst/>
+          </a:prstGeom>
+          <a:noFill/>
+          <a:ln/>
+        </p:spPr>
+        <p:txBody>
+          <a:bodyPr wrap="square" lIns="0" tIns="0" rIns="0" bIns="0" rtlCol="0" anchor="ctr"/>
+          <a:lstStyle/>
+          <a:p>
+            <a:pPr marL="0" indent="0" algn="ctr">
               <a:buNone/>
             </a:pPr>
             <a:r>
@@ -9230,7 +9215,7 @@
                 <a:ea typeface="Microsoft JhengHei" pitchFamily="34" charset="-122"/>
                 <a:cs typeface="Microsoft JhengHei" pitchFamily="34" charset="-120"/>
               </a:rPr>
-              <a:t>Oura</a:t>
+              <a:t>TrainingPeaks</a:t>
             </a:r>
             <a:endParaRPr lang="en-US" sz="1300" dirty="0"/>
           </a:p>
@@ -9238,14 +9223,14 @@
       </p:sp>
       <p:sp>
         <p:nvSpPr>
-          <p:cNvPr id="24" name="Shape 22"/>
-          <p:cNvSpPr/>
-          <p:nvPr/>
-        </p:nvSpPr>
-        <p:spPr>
-          <a:xfrm>
-            <a:off x="6688836" y="4526280"/>
-            <a:ext cx="960120" cy="502920"/>
+          <p:cNvPr id="28" name="Shape 26"/>
+          <p:cNvSpPr/>
+          <p:nvPr/>
+        </p:nvSpPr>
+        <p:spPr>
+          <a:xfrm>
+            <a:off x="8791956" y="4526280"/>
+            <a:ext cx="1824228" cy="502920"/>
           </a:xfrm>
           <a:prstGeom prst="roundRect">
             <a:avLst>
@@ -9260,26 +9245,26 @@
       </p:sp>
       <p:sp>
         <p:nvSpPr>
-          <p:cNvPr id="25" name="Text 23"/>
-          <p:cNvSpPr/>
-          <p:nvPr/>
-        </p:nvSpPr>
-        <p:spPr>
-          <a:xfrm>
-            <a:off x="6688836" y="4526280"/>
-            <a:ext cx="960120" cy="502920"/>
-          </a:xfrm>
-          <a:prstGeom prst="rect">
-            <a:avLst/>
-          </a:prstGeom>
-          <a:noFill/>
-          <a:ln/>
-        </p:spPr>
-        <p:txBody>
-          <a:bodyPr wrap="square" lIns="0" tIns="0" rIns="0" bIns="0" rtlCol="0" anchor="ctr"/>
-          <a:lstStyle/>
-          <a:p>
-            <a:pPr algn="ctr" indent="0" marL="0">
+          <p:cNvPr id="29" name="Text 27"/>
+          <p:cNvSpPr/>
+          <p:nvPr/>
+        </p:nvSpPr>
+        <p:spPr>
+          <a:xfrm>
+            <a:off x="8791956" y="4526280"/>
+            <a:ext cx="1824228" cy="502920"/>
+          </a:xfrm>
+          <a:prstGeom prst="rect">
+            <a:avLst/>
+          </a:prstGeom>
+          <a:noFill/>
+          <a:ln/>
+        </p:spPr>
+        <p:txBody>
+          <a:bodyPr wrap="square" lIns="0" tIns="0" rIns="0" bIns="0" rtlCol="0" anchor="ctr"/>
+          <a:lstStyle/>
+          <a:p>
+            <a:pPr marL="0" indent="0" algn="ctr">
               <a:buNone/>
             </a:pPr>
             <a:r>
@@ -9291,7 +9276,7 @@
                 <a:ea typeface="Microsoft JhengHei" pitchFamily="34" charset="-122"/>
                 <a:cs typeface="Microsoft JhengHei" pitchFamily="34" charset="-120"/>
               </a:rPr>
-              <a:t>Fitbit</a:t>
+              <a:t>Google Calendar</a:t>
             </a:r>
             <a:endParaRPr lang="en-US" sz="1300" dirty="0"/>
           </a:p>
@@ -9299,14 +9284,14 @@
       </p:sp>
       <p:sp>
         <p:nvSpPr>
-          <p:cNvPr id="26" name="Shape 24"/>
-          <p:cNvSpPr/>
-          <p:nvPr/>
-        </p:nvSpPr>
-        <p:spPr>
-          <a:xfrm>
-            <a:off x="7831836" y="4526280"/>
-            <a:ext cx="1632204" cy="502920"/>
+          <p:cNvPr id="30" name="Shape 28"/>
+          <p:cNvSpPr/>
+          <p:nvPr/>
+        </p:nvSpPr>
+        <p:spPr>
+          <a:xfrm>
+            <a:off x="4690872" y="4526280"/>
+            <a:ext cx="960120" cy="502920"/>
           </a:xfrm>
           <a:prstGeom prst="roundRect">
             <a:avLst>
@@ -9321,26 +9306,26 @@
       </p:sp>
       <p:sp>
         <p:nvSpPr>
-          <p:cNvPr id="27" name="Text 25"/>
-          <p:cNvSpPr/>
-          <p:nvPr/>
-        </p:nvSpPr>
-        <p:spPr>
-          <a:xfrm>
-            <a:off x="7831836" y="4526280"/>
-            <a:ext cx="1632204" cy="502920"/>
-          </a:xfrm>
-          <a:prstGeom prst="rect">
-            <a:avLst/>
-          </a:prstGeom>
-          <a:noFill/>
-          <a:ln/>
-        </p:spPr>
-        <p:txBody>
-          <a:bodyPr wrap="square" lIns="0" tIns="0" rIns="0" bIns="0" rtlCol="0" anchor="ctr"/>
-          <a:lstStyle/>
-          <a:p>
-            <a:pPr algn="ctr" indent="0" marL="0">
+          <p:cNvPr id="31" name="Text 29"/>
+          <p:cNvSpPr/>
+          <p:nvPr/>
+        </p:nvSpPr>
+        <p:spPr>
+          <a:xfrm>
+            <a:off x="4690872" y="4526280"/>
+            <a:ext cx="960120" cy="502920"/>
+          </a:xfrm>
+          <a:prstGeom prst="rect">
+            <a:avLst/>
+          </a:prstGeom>
+          <a:noFill/>
+          <a:ln/>
+        </p:spPr>
+        <p:txBody>
+          <a:bodyPr wrap="square" lIns="0" tIns="0" rIns="0" bIns="0" rtlCol="0" anchor="ctr"/>
+          <a:lstStyle/>
+          <a:p>
+            <a:pPr marL="0" indent="0" algn="ctr">
               <a:buNone/>
             </a:pPr>
             <a:r>
@@ -9352,7 +9337,7 @@
                 <a:ea typeface="Microsoft JhengHei" pitchFamily="34" charset="-122"/>
                 <a:cs typeface="Microsoft JhengHei" pitchFamily="34" charset="-120"/>
               </a:rPr>
-              <a:t>TrainingPeaks</a:t>
+              <a:t>Notion</a:t>
             </a:r>
             <a:endParaRPr lang="en-US" sz="1300" dirty="0"/>
           </a:p>
@@ -9360,159 +9345,37 @@
       </p:sp>
       <p:sp>
         <p:nvSpPr>
-          <p:cNvPr id="28" name="Shape 26"/>
-          <p:cNvSpPr/>
-          <p:nvPr/>
-        </p:nvSpPr>
-        <p:spPr>
-          <a:xfrm>
-            <a:off x="9646920" y="4526280"/>
-            <a:ext cx="1824228" cy="502920"/>
-          </a:xfrm>
-          <a:prstGeom prst="roundRect">
-            <a:avLst>
-              <a:gd name="adj" fmla="val 49091"/>
-            </a:avLst>
-          </a:prstGeom>
-          <a:solidFill>
-            <a:srgbClr val="F3F4F7"/>
-          </a:solidFill>
-          <a:ln/>
-        </p:spPr>
-      </p:sp>
-      <p:sp>
-        <p:nvSpPr>
-          <p:cNvPr id="29" name="Text 27"/>
-          <p:cNvSpPr/>
-          <p:nvPr/>
-        </p:nvSpPr>
-        <p:spPr>
-          <a:xfrm>
-            <a:off x="9646920" y="4526280"/>
-            <a:ext cx="1824228" cy="502920"/>
-          </a:xfrm>
-          <a:prstGeom prst="rect">
-            <a:avLst/>
-          </a:prstGeom>
-          <a:noFill/>
-          <a:ln/>
-        </p:spPr>
-        <p:txBody>
-          <a:bodyPr wrap="square" lIns="0" tIns="0" rIns="0" bIns="0" rtlCol="0" anchor="ctr"/>
-          <a:lstStyle/>
-          <a:p>
-            <a:pPr algn="ctr" indent="0" marL="0">
-              <a:buNone/>
-            </a:pPr>
-            <a:r>
-              <a:rPr lang="en-US" sz="1300" dirty="0">
-                <a:solidFill>
-                  <a:srgbClr val="2C313D"/>
+          <p:cNvPr id="32" name="Text 30"/>
+          <p:cNvSpPr/>
+          <p:nvPr/>
+        </p:nvSpPr>
+        <p:spPr>
+          <a:xfrm>
+            <a:off x="685800" y="5806440"/>
+            <a:ext cx="9601200" cy="365760"/>
+          </a:xfrm>
+          <a:prstGeom prst="rect">
+            <a:avLst/>
+          </a:prstGeom>
+          <a:noFill/>
+          <a:ln/>
+        </p:spPr>
+        <p:txBody>
+          <a:bodyPr wrap="square" lIns="0" tIns="0" rIns="0" bIns="0" rtlCol="0" anchor="ctr"/>
+          <a:lstStyle/>
+          <a:p>
+            <a:pPr marL="0" indent="0">
+              <a:buNone/>
+            </a:pPr>
+            <a:r>
+              <a:rPr lang="en-US" sz="1400" i="1" dirty="0">
+                <a:solidFill>
+                  <a:srgbClr val="6E7687"/>
                 </a:solidFill>
                 <a:latin typeface="Microsoft JhengHei" pitchFamily="34" charset="0"/>
                 <a:ea typeface="Microsoft JhengHei" pitchFamily="34" charset="-122"/>
                 <a:cs typeface="Microsoft JhengHei" pitchFamily="34" charset="-120"/>
               </a:rPr>
-              <a:t>Google Calendar</a:t>
-            </a:r>
-            <a:endParaRPr lang="en-US" sz="1300" dirty="0"/>
-          </a:p>
-        </p:txBody>
-      </p:sp>
-      <p:sp>
-        <p:nvSpPr>
-          <p:cNvPr id="30" name="Shape 28"/>
-          <p:cNvSpPr/>
-          <p:nvPr/>
-        </p:nvSpPr>
-        <p:spPr>
-          <a:xfrm>
-            <a:off x="685800" y="5221224"/>
-            <a:ext cx="960120" cy="502920"/>
-          </a:xfrm>
-          <a:prstGeom prst="roundRect">
-            <a:avLst>
-              <a:gd name="adj" fmla="val 49091"/>
-            </a:avLst>
-          </a:prstGeom>
-          <a:solidFill>
-            <a:srgbClr val="F3F4F7"/>
-          </a:solidFill>
-          <a:ln/>
-        </p:spPr>
-      </p:sp>
-      <p:sp>
-        <p:nvSpPr>
-          <p:cNvPr id="31" name="Text 29"/>
-          <p:cNvSpPr/>
-          <p:nvPr/>
-        </p:nvSpPr>
-        <p:spPr>
-          <a:xfrm>
-            <a:off x="685800" y="5221224"/>
-            <a:ext cx="960120" cy="502920"/>
-          </a:xfrm>
-          <a:prstGeom prst="rect">
-            <a:avLst/>
-          </a:prstGeom>
-          <a:noFill/>
-          <a:ln/>
-        </p:spPr>
-        <p:txBody>
-          <a:bodyPr wrap="square" lIns="0" tIns="0" rIns="0" bIns="0" rtlCol="0" anchor="ctr"/>
-          <a:lstStyle/>
-          <a:p>
-            <a:pPr algn="ctr" indent="0" marL="0">
-              <a:buNone/>
-            </a:pPr>
-            <a:r>
-              <a:rPr lang="en-US" sz="1300" dirty="0">
-                <a:solidFill>
-                  <a:srgbClr val="2C313D"/>
-                </a:solidFill>
-                <a:latin typeface="Microsoft JhengHei" pitchFamily="34" charset="0"/>
-                <a:ea typeface="Microsoft JhengHei" pitchFamily="34" charset="-122"/>
-                <a:cs typeface="Microsoft JhengHei" pitchFamily="34" charset="-120"/>
-              </a:rPr>
-              <a:t>Notion</a:t>
-            </a:r>
-            <a:endParaRPr lang="en-US" sz="1300" dirty="0"/>
-          </a:p>
-        </p:txBody>
-      </p:sp>
-      <p:sp>
-        <p:nvSpPr>
-          <p:cNvPr id="32" name="Text 30"/>
-          <p:cNvSpPr/>
-          <p:nvPr/>
-        </p:nvSpPr>
-        <p:spPr>
-          <a:xfrm>
-            <a:off x="685800" y="5806440"/>
-            <a:ext cx="9601200" cy="365760"/>
-          </a:xfrm>
-          <a:prstGeom prst="rect">
-            <a:avLst/>
-          </a:prstGeom>
-          <a:noFill/>
-          <a:ln/>
-        </p:spPr>
-        <p:txBody>
-          <a:bodyPr wrap="square" lIns="0" tIns="0" rIns="0" bIns="0" rtlCol="0" anchor="ctr"/>
-          <a:lstStyle/>
-          <a:p>
-            <a:pPr indent="0" marL="0">
-              <a:buNone/>
-            </a:pPr>
-            <a:r>
-              <a:rPr lang="en-US" sz="1400" i="1" dirty="0">
-                <a:solidFill>
-                  <a:srgbClr val="6E7687"/>
-                </a:solidFill>
-                <a:latin typeface="Microsoft JhengHei" pitchFamily="34" charset="0"/>
-                <a:ea typeface="Microsoft JhengHei" pitchFamily="34" charset="-122"/>
-                <a:cs typeface="Microsoft JhengHei" pitchFamily="34" charset="-120"/>
-              </a:rPr>
               <a:t>新增一家資料源,不需要動到上面任何一層。</a:t>
             </a:r>
             <a:endParaRPr lang="en-US" sz="1400" dirty="0"/>
@@ -9540,7 +9403,7 @@
           <a:bodyPr wrap="square" lIns="0" tIns="0" rIns="0" bIns="0" rtlCol="0" anchor="ctr"/>
           <a:lstStyle/>
           <a:p>
-            <a:pPr algn="r" indent="0" marL="0">
+            <a:pPr marL="0" indent="0" algn="r">
               <a:buNone/>
             </a:pPr>
             <a:r>
@@ -9574,6 +9437,7 @@
         <a:solidFill>
           <a:srgbClr val="FFFFFF"/>
         </a:solidFill>
+        <a:effectLst/>
       </p:bgPr>
     </p:bg>
     <p:spTree>
@@ -9631,11 +9495,11 @@
           <a:bodyPr wrap="square" lIns="0" tIns="0" rIns="0" bIns="0" rtlCol="0" anchor="ctr"/>
           <a:lstStyle/>
           <a:p>
-            <a:pPr indent="0" marL="0">
-              <a:buNone/>
-            </a:pPr>
-            <a:r>
-              <a:rPr lang="en-US" sz="1200" b="1" spc="200" kern="0" dirty="0">
+            <a:pPr marL="0" indent="0">
+              <a:buNone/>
+            </a:pPr>
+            <a:r>
+              <a:rPr lang="en-US" sz="1200" b="1" kern="0" spc="200" dirty="0">
                 <a:solidFill>
                   <a:srgbClr val="6E7687"/>
                 </a:solidFill>
@@ -9670,7 +9534,7 @@
           <a:bodyPr wrap="square" lIns="0" tIns="0" rIns="0" bIns="0" rtlCol="0" anchor="ctr"/>
           <a:lstStyle/>
           <a:p>
-            <a:pPr indent="0" marL="0">
+            <a:pPr marL="0" indent="0">
               <a:buNone/>
             </a:pPr>
             <a:r>
@@ -9709,7 +9573,7 @@
           <a:bodyPr wrap="square" lIns="0" tIns="0" rIns="0" bIns="0" rtlCol="0" anchor="t"/>
           <a:lstStyle/>
           <a:p>
-            <a:pPr indent="0" marL="0">
+            <a:pPr marL="0" indent="0">
               <a:lnSpc>
                 <a:spcPts val="3200"/>
               </a:lnSpc>
@@ -9793,7 +9657,7 @@
           <a:bodyPr wrap="square" lIns="0" tIns="0" rIns="0" bIns="0" rtlCol="0" anchor="ctr"/>
           <a:lstStyle/>
           <a:p>
-            <a:pPr indent="0" marL="0">
+            <a:pPr marL="0" indent="0">
               <a:buNone/>
             </a:pPr>
             <a:r>
@@ -9832,7 +9696,7 @@
           <a:bodyPr wrap="square" lIns="0" tIns="0" rIns="0" bIns="0" rtlCol="0" anchor="t"/>
           <a:lstStyle/>
           <a:p>
-            <a:pPr indent="0" marL="0">
+            <a:pPr marL="0" indent="0">
               <a:lnSpc>
                 <a:spcPts val="1400"/>
               </a:lnSpc>
@@ -9852,7 +9716,7 @@
             <a:endParaRPr lang="en-US" sz="950" dirty="0"/>
           </a:p>
           <a:p>
-            <a:pPr indent="0" marL="0">
+            <a:pPr marL="0" indent="0">
               <a:lnSpc>
                 <a:spcPts val="1400"/>
               </a:lnSpc>
@@ -9936,7 +9800,7 @@
           <a:bodyPr wrap="square" lIns="0" tIns="0" rIns="0" bIns="0" rtlCol="0" anchor="ctr"/>
           <a:lstStyle/>
           <a:p>
-            <a:pPr indent="0" marL="0">
+            <a:pPr marL="0" indent="0">
               <a:buNone/>
             </a:pPr>
             <a:r>
@@ -9975,7 +9839,7 @@
           <a:bodyPr wrap="square" lIns="0" tIns="0" rIns="0" bIns="0" rtlCol="0" anchor="t"/>
           <a:lstStyle/>
           <a:p>
-            <a:pPr indent="0" marL="0">
+            <a:pPr marL="0" indent="0">
               <a:lnSpc>
                 <a:spcPts val="1400"/>
               </a:lnSpc>
@@ -9995,7 +9859,7 @@
             <a:endParaRPr lang="en-US" sz="950" dirty="0"/>
           </a:p>
           <a:p>
-            <a:pPr indent="0" marL="0">
+            <a:pPr marL="0" indent="0">
               <a:lnSpc>
                 <a:spcPts val="1400"/>
               </a:lnSpc>
@@ -10079,7 +9943,7 @@
           <a:bodyPr wrap="square" lIns="0" tIns="0" rIns="0" bIns="0" rtlCol="0" anchor="ctr"/>
           <a:lstStyle/>
           <a:p>
-            <a:pPr indent="0" marL="0">
+            <a:pPr marL="0" indent="0">
               <a:buNone/>
             </a:pPr>
             <a:r>
@@ -10118,7 +9982,7 @@
           <a:bodyPr wrap="square" lIns="0" tIns="0" rIns="0" bIns="0" rtlCol="0" anchor="t"/>
           <a:lstStyle/>
           <a:p>
-            <a:pPr indent="0" marL="0">
+            <a:pPr marL="0" indent="0">
               <a:lnSpc>
                 <a:spcPts val="1400"/>
               </a:lnSpc>
@@ -10138,7 +10002,7 @@
             <a:endParaRPr lang="en-US" sz="950" dirty="0"/>
           </a:p>
           <a:p>
-            <a:pPr indent="0" marL="0">
+            <a:pPr marL="0" indent="0">
               <a:lnSpc>
                 <a:spcPts val="1400"/>
               </a:lnSpc>
@@ -10222,7 +10086,7 @@
           <a:bodyPr wrap="square" lIns="0" tIns="0" rIns="0" bIns="0" rtlCol="0" anchor="ctr"/>
           <a:lstStyle/>
           <a:p>
-            <a:pPr indent="0" marL="0">
+            <a:pPr marL="0" indent="0">
               <a:buNone/>
             </a:pPr>
             <a:r>
@@ -10261,7 +10125,7 @@
           <a:bodyPr wrap="square" lIns="0" tIns="0" rIns="0" bIns="0" rtlCol="0" anchor="t"/>
           <a:lstStyle/>
           <a:p>
-            <a:pPr indent="0" marL="0">
+            <a:pPr marL="0" indent="0">
               <a:lnSpc>
                 <a:spcPts val="1400"/>
               </a:lnSpc>
@@ -10281,7 +10145,7 @@
             <a:endParaRPr lang="en-US" sz="950" dirty="0"/>
           </a:p>
           <a:p>
-            <a:pPr indent="0" marL="0">
+            <a:pPr marL="0" indent="0">
               <a:lnSpc>
                 <a:spcPts val="1400"/>
               </a:lnSpc>
@@ -10365,7 +10229,7 @@
           <a:bodyPr wrap="square" lIns="0" tIns="0" rIns="0" bIns="0" rtlCol="0" anchor="ctr"/>
           <a:lstStyle/>
           <a:p>
-            <a:pPr indent="0" marL="0">
+            <a:pPr marL="0" indent="0">
               <a:buNone/>
             </a:pPr>
             <a:r>
@@ -10404,7 +10268,7 @@
           <a:bodyPr wrap="square" lIns="0" tIns="0" rIns="0" bIns="0" rtlCol="0" anchor="t"/>
           <a:lstStyle/>
           <a:p>
-            <a:pPr indent="0" marL="0">
+            <a:pPr marL="0" indent="0">
               <a:lnSpc>
                 <a:spcPts val="1400"/>
               </a:lnSpc>
@@ -10424,7 +10288,7 @@
             <a:endParaRPr lang="en-US" sz="950" dirty="0"/>
           </a:p>
           <a:p>
-            <a:pPr indent="0" marL="0">
+            <a:pPr marL="0" indent="0">
               <a:lnSpc>
                 <a:spcPts val="1400"/>
               </a:lnSpc>
@@ -10508,7 +10372,7 @@
           <a:bodyPr wrap="square" lIns="0" tIns="0" rIns="0" bIns="0" rtlCol="0" anchor="ctr"/>
           <a:lstStyle/>
           <a:p>
-            <a:pPr indent="0" marL="0">
+            <a:pPr marL="0" indent="0">
               <a:buNone/>
             </a:pPr>
             <a:r>
@@ -10547,7 +10411,7 @@
           <a:bodyPr wrap="square" lIns="0" tIns="0" rIns="0" bIns="0" rtlCol="0" anchor="t"/>
           <a:lstStyle/>
           <a:p>
-            <a:pPr indent="0" marL="0">
+            <a:pPr marL="0" indent="0">
               <a:lnSpc>
                 <a:spcPts val="1400"/>
               </a:lnSpc>
@@ -10567,7 +10431,7 @@
             <a:endParaRPr lang="en-US" sz="950" dirty="0"/>
           </a:p>
           <a:p>
-            <a:pPr indent="0" marL="0">
+            <a:pPr marL="0" indent="0">
               <a:lnSpc>
                 <a:spcPts val="1400"/>
               </a:lnSpc>
@@ -10651,7 +10515,7 @@
           <a:bodyPr wrap="square" lIns="0" tIns="0" rIns="0" bIns="0" rtlCol="0" anchor="ctr"/>
           <a:lstStyle/>
           <a:p>
-            <a:pPr indent="0" marL="0">
+            <a:pPr marL="0" indent="0">
               <a:buNone/>
             </a:pPr>
             <a:r>
@@ -10690,7 +10554,7 @@
           <a:bodyPr wrap="square" lIns="0" tIns="0" rIns="0" bIns="0" rtlCol="0" anchor="t"/>
           <a:lstStyle/>
           <a:p>
-            <a:pPr indent="0" marL="0">
+            <a:pPr marL="0" indent="0">
               <a:lnSpc>
                 <a:spcPts val="1400"/>
               </a:lnSpc>
@@ -10710,7 +10574,7 @@
             <a:endParaRPr lang="en-US" sz="950" dirty="0"/>
           </a:p>
           <a:p>
-            <a:pPr indent="0" marL="0">
+            <a:pPr marL="0" indent="0">
               <a:lnSpc>
                 <a:spcPts val="1400"/>
               </a:lnSpc>
@@ -10794,7 +10658,7 @@
           <a:bodyPr wrap="square" lIns="0" tIns="0" rIns="0" bIns="0" rtlCol="0" anchor="ctr"/>
           <a:lstStyle/>
           <a:p>
-            <a:pPr indent="0" marL="0">
+            <a:pPr marL="0" indent="0">
               <a:buNone/>
             </a:pPr>
             <a:r>
@@ -10833,7 +10697,7 @@
           <a:bodyPr wrap="square" lIns="0" tIns="0" rIns="0" bIns="0" rtlCol="0" anchor="t"/>
           <a:lstStyle/>
           <a:p>
-            <a:pPr indent="0" marL="0">
+            <a:pPr marL="0" indent="0">
               <a:lnSpc>
                 <a:spcPts val="1400"/>
               </a:lnSpc>
@@ -10853,7 +10717,7 @@
             <a:endParaRPr lang="en-US" sz="950" dirty="0"/>
           </a:p>
           <a:p>
-            <a:pPr indent="0" marL="0">
+            <a:pPr marL="0" indent="0">
               <a:lnSpc>
                 <a:spcPts val="1400"/>
               </a:lnSpc>
@@ -10937,7 +10801,7 @@
           <a:bodyPr wrap="square" lIns="0" tIns="0" rIns="0" bIns="0" rtlCol="0" anchor="ctr"/>
           <a:lstStyle/>
           <a:p>
-            <a:pPr indent="0" marL="0">
+            <a:pPr marL="0" indent="0">
               <a:buNone/>
             </a:pPr>
             <a:r>
@@ -10976,7 +10840,7 @@
           <a:bodyPr wrap="square" lIns="0" tIns="0" rIns="0" bIns="0" rtlCol="0" anchor="t"/>
           <a:lstStyle/>
           <a:p>
-            <a:pPr indent="0" marL="0">
+            <a:pPr marL="0" indent="0">
               <a:lnSpc>
                 <a:spcPts val="1400"/>
               </a:lnSpc>
@@ -10996,7 +10860,7 @@
             <a:endParaRPr lang="en-US" sz="950" dirty="0"/>
           </a:p>
           <a:p>
-            <a:pPr indent="0" marL="0">
+            <a:pPr marL="0" indent="0">
               <a:lnSpc>
                 <a:spcPts val="1400"/>
               </a:lnSpc>
@@ -11080,7 +10944,7 @@
           <a:bodyPr wrap="square" lIns="0" tIns="0" rIns="0" bIns="0" rtlCol="0" anchor="ctr"/>
           <a:lstStyle/>
           <a:p>
-            <a:pPr indent="0" marL="0">
+            <a:pPr marL="0" indent="0">
               <a:buNone/>
             </a:pPr>
             <a:r>
@@ -11119,7 +10983,7 @@
           <a:bodyPr wrap="square" lIns="0" tIns="0" rIns="0" bIns="0" rtlCol="0" anchor="t"/>
           <a:lstStyle/>
           <a:p>
-            <a:pPr indent="0" marL="0">
+            <a:pPr marL="0" indent="0">
               <a:lnSpc>
                 <a:spcPts val="1400"/>
               </a:lnSpc>
@@ -11139,7 +11003,7 @@
             <a:endParaRPr lang="en-US" sz="950" dirty="0"/>
           </a:p>
           <a:p>
-            <a:pPr indent="0" marL="0">
+            <a:pPr marL="0" indent="0">
               <a:lnSpc>
                 <a:spcPts val="1400"/>
               </a:lnSpc>
@@ -11181,7 +11045,7 @@
           <a:bodyPr wrap="square" lIns="0" tIns="0" rIns="0" bIns="0" rtlCol="0" anchor="ctr"/>
           <a:lstStyle/>
           <a:p>
-            <a:pPr algn="r" indent="0" marL="0">
+            <a:pPr marL="0" indent="0" algn="r">
               <a:buNone/>
             </a:pPr>
             <a:r>
@@ -11215,6 +11079,7 @@
         <a:solidFill>
           <a:srgbClr val="FFFFFF"/>
         </a:solidFill>
+        <a:effectLst/>
       </p:bgPr>
     </p:bg>
     <p:spTree>
@@ -11272,11 +11137,11 @@
           <a:bodyPr wrap="square" lIns="0" tIns="0" rIns="0" bIns="0" rtlCol="0" anchor="ctr"/>
           <a:lstStyle/>
           <a:p>
-            <a:pPr indent="0" marL="0">
-              <a:buNone/>
-            </a:pPr>
-            <a:r>
-              <a:rPr lang="en-US" sz="1200" b="1" spc="200" kern="0" dirty="0">
+            <a:pPr marL="0" indent="0">
+              <a:buNone/>
+            </a:pPr>
+            <a:r>
+              <a:rPr lang="en-US" sz="1200" b="1" kern="0" spc="200" dirty="0">
                 <a:solidFill>
                   <a:srgbClr val="6E7687"/>
                 </a:solidFill>
@@ -11311,7 +11176,7 @@
           <a:bodyPr wrap="square" lIns="0" tIns="0" rIns="0" bIns="0" rtlCol="0" anchor="ctr"/>
           <a:lstStyle/>
           <a:p>
-            <a:pPr indent="0" marL="0">
+            <a:pPr marL="0" indent="0">
               <a:buNone/>
             </a:pPr>
             <a:r>
@@ -11350,7 +11215,7 @@
           <a:bodyPr wrap="square" lIns="0" tIns="0" rIns="0" bIns="0" rtlCol="0" anchor="t"/>
           <a:lstStyle/>
           <a:p>
-            <a:pPr indent="0" marL="0">
+            <a:pPr marL="0" indent="0">
               <a:lnSpc>
                 <a:spcPts val="3200"/>
               </a:lnSpc>
@@ -11434,7 +11299,7 @@
           <a:bodyPr wrap="square" lIns="0" tIns="0" rIns="0" bIns="0" rtlCol="0" anchor="ctr"/>
           <a:lstStyle/>
           <a:p>
-            <a:pPr indent="0" marL="0">
+            <a:pPr marL="0" indent="0">
               <a:buNone/>
             </a:pPr>
             <a:r>
@@ -11473,7 +11338,7 @@
           <a:bodyPr wrap="square" lIns="0" tIns="0" rIns="0" bIns="0" rtlCol="0" anchor="ctr"/>
           <a:lstStyle/>
           <a:p>
-            <a:pPr indent="0" marL="0">
+            <a:pPr marL="0" indent="0">
               <a:buNone/>
             </a:pPr>
             <a:r>
@@ -11554,7 +11419,7 @@
           <a:bodyPr wrap="square" lIns="0" tIns="0" rIns="0" bIns="0" rtlCol="0" anchor="ctr"/>
           <a:lstStyle/>
           <a:p>
-            <a:pPr indent="0" marL="0">
+            <a:pPr marL="0" indent="0">
               <a:buNone/>
             </a:pPr>
             <a:r>
@@ -11593,7 +11458,7 @@
           <a:bodyPr wrap="square" lIns="0" tIns="0" rIns="0" bIns="0" rtlCol="0" anchor="ctr"/>
           <a:lstStyle/>
           <a:p>
-            <a:pPr indent="0" marL="0">
+            <a:pPr marL="0" indent="0">
               <a:buNone/>
             </a:pPr>
             <a:r>
@@ -11674,7 +11539,7 @@
           <a:bodyPr wrap="square" lIns="0" tIns="0" rIns="0" bIns="0" rtlCol="0" anchor="ctr"/>
           <a:lstStyle/>
           <a:p>
-            <a:pPr indent="0" marL="0">
+            <a:pPr marL="0" indent="0">
               <a:buNone/>
             </a:pPr>
             <a:r>
@@ -11713,7 +11578,7 @@
           <a:bodyPr wrap="square" lIns="0" tIns="0" rIns="0" bIns="0" rtlCol="0" anchor="ctr"/>
           <a:lstStyle/>
           <a:p>
-            <a:pPr indent="0" marL="0">
+            <a:pPr marL="0" indent="0">
               <a:buNone/>
             </a:pPr>
             <a:r>
@@ -11794,7 +11659,7 @@
           <a:bodyPr wrap="square" lIns="0" tIns="0" rIns="0" bIns="0" rtlCol="0" anchor="ctr"/>
           <a:lstStyle/>
           <a:p>
-            <a:pPr indent="0" marL="0">
+            <a:pPr marL="0" indent="0">
               <a:buNone/>
             </a:pPr>
             <a:r>
@@ -11833,7 +11698,7 @@
           <a:bodyPr wrap="square" lIns="0" tIns="0" rIns="0" bIns="0" rtlCol="0" anchor="ctr"/>
           <a:lstStyle/>
           <a:p>
-            <a:pPr indent="0" marL="0">
+            <a:pPr marL="0" indent="0">
               <a:buNone/>
             </a:pPr>
             <a:r>
@@ -11872,7 +11737,7 @@
           <a:bodyPr wrap="square" lIns="0" tIns="0" rIns="0" bIns="0" rtlCol="0" anchor="ctr"/>
           <a:lstStyle/>
           <a:p>
-            <a:pPr algn="r" indent="0" marL="0">
+            <a:pPr marL="0" indent="0" algn="r">
               <a:buNone/>
             </a:pPr>
             <a:r>
@@ -11906,6 +11771,7 @@
         <a:solidFill>
           <a:srgbClr val="FFFFFF"/>
         </a:solidFill>
+        <a:effectLst/>
       </p:bgPr>
     </p:bg>
     <p:spTree>
@@ -11963,11 +11829,11 @@
           <a:bodyPr wrap="square" lIns="0" tIns="0" rIns="0" bIns="0" rtlCol="0" anchor="ctr"/>
           <a:lstStyle/>
           <a:p>
-            <a:pPr indent="0" marL="0">
-              <a:buNone/>
-            </a:pPr>
-            <a:r>
-              <a:rPr lang="en-US" sz="1200" b="1" spc="200" kern="0" dirty="0">
+            <a:pPr marL="0" indent="0">
+              <a:buNone/>
+            </a:pPr>
+            <a:r>
+              <a:rPr lang="en-US" sz="1200" b="1" kern="0" spc="200" dirty="0">
                 <a:solidFill>
                   <a:srgbClr val="6E7687"/>
                 </a:solidFill>
@@ -12002,7 +11868,7 @@
           <a:bodyPr wrap="square" lIns="0" tIns="0" rIns="0" bIns="0" rtlCol="0" anchor="ctr"/>
           <a:lstStyle/>
           <a:p>
-            <a:pPr indent="0" marL="0">
+            <a:pPr marL="0" indent="0">
               <a:buNone/>
             </a:pPr>
             <a:r>
@@ -12041,7 +11907,7 @@
           <a:bodyPr wrap="square" lIns="0" tIns="0" rIns="0" bIns="0" rtlCol="0" anchor="t"/>
           <a:lstStyle/>
           <a:p>
-            <a:pPr indent="0" marL="0">
+            <a:pPr marL="0" indent="0">
               <a:lnSpc>
                 <a:spcPts val="3200"/>
               </a:lnSpc>
@@ -12125,7 +11991,7 @@
           <a:bodyPr wrap="square" lIns="0" tIns="0" rIns="0" bIns="0" rtlCol="0" anchor="ctr"/>
           <a:lstStyle/>
           <a:p>
-            <a:pPr algn="ctr" indent="0" marL="0">
+            <a:pPr marL="0" indent="0" algn="ctr">
               <a:buNone/>
             </a:pPr>
             <a:r>
@@ -12164,7 +12030,7 @@
           <a:bodyPr wrap="square" lIns="0" tIns="0" rIns="0" bIns="0" rtlCol="0" anchor="ctr"/>
           <a:lstStyle/>
           <a:p>
-            <a:pPr indent="0" marL="0">
+            <a:pPr marL="0" indent="0">
               <a:lnSpc>
                 <a:spcPts val="2000"/>
               </a:lnSpc>
@@ -12248,7 +12114,7 @@
           <a:bodyPr wrap="square" lIns="0" tIns="0" rIns="0" bIns="0" rtlCol="0" anchor="ctr"/>
           <a:lstStyle/>
           <a:p>
-            <a:pPr algn="ctr" indent="0" marL="0">
+            <a:pPr marL="0" indent="0" algn="ctr">
               <a:buNone/>
             </a:pPr>
             <a:r>
@@ -12287,7 +12153,7 @@
           <a:bodyPr wrap="square" lIns="0" tIns="0" rIns="0" bIns="0" rtlCol="0" anchor="ctr"/>
           <a:lstStyle/>
           <a:p>
-            <a:pPr indent="0" marL="0">
+            <a:pPr marL="0" indent="0">
               <a:lnSpc>
                 <a:spcPts val="2000"/>
               </a:lnSpc>
@@ -12371,7 +12237,7 @@
           <a:bodyPr wrap="square" lIns="0" tIns="0" rIns="0" bIns="0" rtlCol="0" anchor="ctr"/>
           <a:lstStyle/>
           <a:p>
-            <a:pPr algn="ctr" indent="0" marL="0">
+            <a:pPr marL="0" indent="0" algn="ctr">
               <a:buNone/>
             </a:pPr>
             <a:r>
@@ -12410,7 +12276,7 @@
           <a:bodyPr wrap="square" lIns="0" tIns="0" rIns="0" bIns="0" rtlCol="0" anchor="ctr"/>
           <a:lstStyle/>
           <a:p>
-            <a:pPr indent="0" marL="0">
+            <a:pPr marL="0" indent="0">
               <a:lnSpc>
                 <a:spcPts val="2000"/>
               </a:lnSpc>
@@ -12494,7 +12360,7 @@
           <a:bodyPr wrap="square" lIns="0" tIns="0" rIns="0" bIns="0" rtlCol="0" anchor="ctr"/>
           <a:lstStyle/>
           <a:p>
-            <a:pPr algn="ctr" indent="0" marL="0">
+            <a:pPr marL="0" indent="0" algn="ctr">
               <a:buNone/>
             </a:pPr>
             <a:r>
@@ -12533,7 +12399,7 @@
           <a:bodyPr wrap="square" lIns="0" tIns="0" rIns="0" bIns="0" rtlCol="0" anchor="ctr"/>
           <a:lstStyle/>
           <a:p>
-            <a:pPr indent="0" marL="0">
+            <a:pPr marL="0" indent="0">
               <a:lnSpc>
                 <a:spcPts val="2000"/>
               </a:lnSpc>
@@ -12617,7 +12483,7 @@
           <a:bodyPr wrap="square" lIns="0" tIns="0" rIns="0" bIns="0" rtlCol="0" anchor="ctr"/>
           <a:lstStyle/>
           <a:p>
-            <a:pPr algn="ctr" indent="0" marL="0">
+            <a:pPr marL="0" indent="0" algn="ctr">
               <a:buNone/>
             </a:pPr>
             <a:r>
@@ -12656,7 +12522,7 @@
           <a:bodyPr wrap="square" lIns="0" tIns="0" rIns="0" bIns="0" rtlCol="0" anchor="ctr"/>
           <a:lstStyle/>
           <a:p>
-            <a:pPr indent="0" marL="0">
+            <a:pPr marL="0" indent="0">
               <a:lnSpc>
                 <a:spcPts val="2000"/>
               </a:lnSpc>
@@ -12740,7 +12606,7 @@
           <a:bodyPr wrap="square" lIns="0" tIns="0" rIns="0" bIns="0" rtlCol="0" anchor="ctr"/>
           <a:lstStyle/>
           <a:p>
-            <a:pPr algn="ctr" indent="0" marL="0">
+            <a:pPr marL="0" indent="0" algn="ctr">
               <a:buNone/>
             </a:pPr>
             <a:r>
@@ -12779,7 +12645,7 @@
           <a:bodyPr wrap="square" lIns="0" tIns="0" rIns="0" bIns="0" rtlCol="0" anchor="ctr"/>
           <a:lstStyle/>
           <a:p>
-            <a:pPr indent="0" marL="0">
+            <a:pPr marL="0" indent="0">
               <a:lnSpc>
                 <a:spcPts val="2000"/>
               </a:lnSpc>
@@ -12821,7 +12687,7 @@
           <a:bodyPr wrap="square" lIns="0" tIns="0" rIns="0" bIns="0" rtlCol="0" anchor="ctr"/>
           <a:lstStyle/>
           <a:p>
-            <a:pPr algn="r" indent="0" marL="0">
+            <a:pPr marL="0" indent="0" algn="r">
               <a:buNone/>
             </a:pPr>
             <a:r>
@@ -12855,6 +12721,7 @@
         <a:solidFill>
           <a:srgbClr val="FFFFFF"/>
         </a:solidFill>
+        <a:effectLst/>
       </p:bgPr>
     </p:bg>
     <p:spTree>
@@ -12912,11 +12779,11 @@
           <a:bodyPr wrap="square" lIns="0" tIns="0" rIns="0" bIns="0" rtlCol="0" anchor="ctr"/>
           <a:lstStyle/>
           <a:p>
-            <a:pPr indent="0" marL="0">
-              <a:buNone/>
-            </a:pPr>
-            <a:r>
-              <a:rPr lang="en-US" sz="1200" b="1" spc="200" kern="0" dirty="0">
+            <a:pPr marL="0" indent="0">
+              <a:buNone/>
+            </a:pPr>
+            <a:r>
+              <a:rPr lang="en-US" sz="1200" b="1" kern="0" spc="200" dirty="0">
                 <a:solidFill>
                   <a:srgbClr val="6E7687"/>
                 </a:solidFill>
@@ -12951,7 +12818,7 @@
           <a:bodyPr wrap="square" lIns="0" tIns="0" rIns="0" bIns="0" rtlCol="0" anchor="ctr"/>
           <a:lstStyle/>
           <a:p>
-            <a:pPr indent="0" marL="0">
+            <a:pPr marL="0" indent="0">
               <a:buNone/>
             </a:pPr>
             <a:r>
@@ -12990,7 +12857,7 @@
           <a:bodyPr wrap="square" lIns="0" tIns="0" rIns="0" bIns="0" rtlCol="0" anchor="t"/>
           <a:lstStyle/>
           <a:p>
-            <a:pPr indent="0" marL="0">
+            <a:pPr marL="0" indent="0">
               <a:lnSpc>
                 <a:spcPts val="3200"/>
               </a:lnSpc>
@@ -13054,7 +12921,7 @@
           <a:bodyPr wrap="square" lIns="0" tIns="0" rIns="0" bIns="0" rtlCol="0" anchor="ctr"/>
           <a:lstStyle/>
           <a:p>
-            <a:pPr indent="0" marL="0">
+            <a:pPr marL="0" indent="0">
               <a:buNone/>
             </a:pPr>
             <a:r>
@@ -13093,7 +12960,7 @@
           <a:bodyPr wrap="square" lIns="0" tIns="0" rIns="0" bIns="0" rtlCol="0" anchor="ctr"/>
           <a:lstStyle/>
           <a:p>
-            <a:pPr indent="0" marL="0">
+            <a:pPr marL="0" indent="0">
               <a:buNone/>
             </a:pPr>
             <a:r>
@@ -13132,7 +12999,7 @@
           <a:bodyPr wrap="square" lIns="0" tIns="0" rIns="0" bIns="0" rtlCol="0" anchor="t"/>
           <a:lstStyle/>
           <a:p>
-            <a:pPr indent="0" marL="0">
+            <a:pPr marL="0" indent="0">
               <a:lnSpc>
                 <a:spcPts val="1900"/>
               </a:lnSpc>
@@ -13196,7 +13063,7 @@
           <a:bodyPr wrap="square" lIns="0" tIns="0" rIns="0" bIns="0" rtlCol="0" anchor="ctr"/>
           <a:lstStyle/>
           <a:p>
-            <a:pPr indent="0" marL="0">
+            <a:pPr marL="0" indent="0">
               <a:buNone/>
             </a:pPr>
             <a:r>
@@ -13235,7 +13102,7 @@
           <a:bodyPr wrap="square" lIns="0" tIns="0" rIns="0" bIns="0" rtlCol="0" anchor="ctr"/>
           <a:lstStyle/>
           <a:p>
-            <a:pPr indent="0" marL="0">
+            <a:pPr marL="0" indent="0">
               <a:buNone/>
             </a:pPr>
             <a:r>
@@ -13274,7 +13141,7 @@
           <a:bodyPr wrap="square" lIns="0" tIns="0" rIns="0" bIns="0" rtlCol="0" anchor="t"/>
           <a:lstStyle/>
           <a:p>
-            <a:pPr indent="0" marL="0">
+            <a:pPr marL="0" indent="0">
               <a:lnSpc>
                 <a:spcPts val="1900"/>
               </a:lnSpc>
@@ -13338,7 +13205,7 @@
           <a:bodyPr wrap="square" lIns="0" tIns="0" rIns="0" bIns="0" rtlCol="0" anchor="ctr"/>
           <a:lstStyle/>
           <a:p>
-            <a:pPr indent="0" marL="0">
+            <a:pPr marL="0" indent="0">
               <a:buNone/>
             </a:pPr>
             <a:r>
@@ -13377,7 +13244,7 @@
           <a:bodyPr wrap="square" lIns="0" tIns="0" rIns="0" bIns="0" rtlCol="0" anchor="ctr"/>
           <a:lstStyle/>
           <a:p>
-            <a:pPr indent="0" marL="0">
+            <a:pPr marL="0" indent="0">
               <a:buNone/>
             </a:pPr>
             <a:r>
@@ -13416,7 +13283,7 @@
           <a:bodyPr wrap="square" lIns="0" tIns="0" rIns="0" bIns="0" rtlCol="0" anchor="t"/>
           <a:lstStyle/>
           <a:p>
-            <a:pPr indent="0" marL="0">
+            <a:pPr marL="0" indent="0">
               <a:lnSpc>
                 <a:spcPts val="1900"/>
               </a:lnSpc>
@@ -13458,7 +13325,7 @@
           <a:bodyPr wrap="square" lIns="0" tIns="0" rIns="0" bIns="0" rtlCol="0" anchor="ctr"/>
           <a:lstStyle/>
           <a:p>
-            <a:pPr algn="r" indent="0" marL="0">
+            <a:pPr marL="0" indent="0" algn="r">
               <a:buNone/>
             </a:pPr>
             <a:r>
@@ -13492,6 +13359,7 @@
         <a:solidFill>
           <a:srgbClr val="FFFFFF"/>
         </a:solidFill>
+        <a:effectLst/>
       </p:bgPr>
     </p:bg>
     <p:spTree>
@@ -13549,11 +13417,11 @@
           <a:bodyPr wrap="square" lIns="0" tIns="0" rIns="0" bIns="0" rtlCol="0" anchor="ctr"/>
           <a:lstStyle/>
           <a:p>
-            <a:pPr indent="0" marL="0">
-              <a:buNone/>
-            </a:pPr>
-            <a:r>
-              <a:rPr lang="en-US" sz="1200" b="1" spc="200" kern="0" dirty="0">
+            <a:pPr marL="0" indent="0">
+              <a:buNone/>
+            </a:pPr>
+            <a:r>
+              <a:rPr lang="en-US" sz="1200" b="1" kern="0" spc="200" dirty="0">
                 <a:solidFill>
                   <a:srgbClr val="6E7687"/>
                 </a:solidFill>
@@ -13610,7 +13478,7 @@
           <a:bodyPr wrap="square" lIns="0" tIns="0" rIns="0" bIns="0" rtlCol="0" anchor="ctr"/>
           <a:lstStyle/>
           <a:p>
-            <a:pPr indent="0" marL="0">
+            <a:pPr marL="0" indent="0">
               <a:buNone/>
             </a:pPr>
             <a:r>
@@ -13649,7 +13517,7 @@
           <a:bodyPr wrap="square" lIns="0" tIns="0" rIns="0" bIns="0" rtlCol="0" anchor="ctr"/>
           <a:lstStyle/>
           <a:p>
-            <a:pPr indent="0" marL="0">
+            <a:pPr marL="0" indent="0">
               <a:buNone/>
             </a:pPr>
             <a:r>
@@ -13730,7 +13598,7 @@
           <a:bodyPr wrap="square" lIns="0" tIns="0" rIns="0" bIns="0" rtlCol="0" anchor="ctr"/>
           <a:lstStyle/>
           <a:p>
-            <a:pPr indent="0" marL="0">
+            <a:pPr marL="0" indent="0">
               <a:buNone/>
             </a:pPr>
             <a:r>
@@ -13811,7 +13679,7 @@
           <a:bodyPr wrap="square" lIns="0" tIns="0" rIns="0" bIns="0" rtlCol="0" anchor="ctr"/>
           <a:lstStyle/>
           <a:p>
-            <a:pPr indent="0" marL="0">
+            <a:pPr marL="0" indent="0">
               <a:buNone/>
             </a:pPr>
             <a:r>
@@ -13892,7 +13760,7 @@
           <a:bodyPr wrap="square" lIns="0" tIns="0" rIns="0" bIns="0" rtlCol="0" anchor="ctr"/>
           <a:lstStyle/>
           <a:p>
-            <a:pPr indent="0" marL="0">
+            <a:pPr marL="0" indent="0">
               <a:buNone/>
             </a:pPr>
             <a:r>
@@ -13931,7 +13799,7 @@
           <a:bodyPr wrap="square" lIns="0" tIns="0" rIns="0" bIns="0" rtlCol="0" anchor="ctr"/>
           <a:lstStyle/>
           <a:p>
-            <a:pPr indent="0" marL="0">
+            <a:pPr marL="0" indent="0">
               <a:buNone/>
             </a:pPr>
             <a:r>
@@ -13992,7 +13860,7 @@
           <a:bodyPr wrap="square" lIns="0" tIns="0" rIns="0" bIns="0" rtlCol="0" anchor="ctr"/>
           <a:lstStyle/>
           <a:p>
-            <a:pPr indent="0" marL="0">
+            <a:pPr marL="0" indent="0">
               <a:buNone/>
             </a:pPr>
             <a:r>
@@ -14031,7 +13899,7 @@
           <a:bodyPr wrap="square" lIns="0" tIns="0" rIns="0" bIns="0" rtlCol="0" anchor="ctr"/>
           <a:lstStyle/>
           <a:p>
-            <a:pPr indent="0" marL="0">
+            <a:pPr marL="0" indent="0">
               <a:buNone/>
             </a:pPr>
             <a:r>
@@ -14070,7 +13938,7 @@
           <a:bodyPr wrap="square" lIns="0" tIns="0" rIns="0" bIns="0" rtlCol="0" anchor="ctr"/>
           <a:lstStyle/>
           <a:p>
-            <a:pPr indent="0" marL="0">
+            <a:pPr marL="0" indent="0">
               <a:buNone/>
             </a:pPr>
             <a:r>
@@ -14109,7 +13977,7 @@
           <a:bodyPr wrap="square" lIns="0" tIns="0" rIns="0" bIns="0" rtlCol="0" anchor="ctr"/>
           <a:lstStyle/>
           <a:p>
-            <a:pPr algn="r" indent="0" marL="0">
+            <a:pPr marL="0" indent="0" algn="r">
               <a:buNone/>
             </a:pPr>
             <a:r>
@@ -14143,6 +14011,7 @@
         <a:solidFill>
           <a:srgbClr val="FFFFFF"/>
         </a:solidFill>
+        <a:effectLst/>
       </p:bgPr>
     </p:bg>
     <p:spTree>
@@ -14200,11 +14069,11 @@
           <a:bodyPr wrap="square" lIns="0" tIns="0" rIns="0" bIns="0" rtlCol="0" anchor="ctr"/>
           <a:lstStyle/>
           <a:p>
-            <a:pPr indent="0" marL="0">
-              <a:buNone/>
-            </a:pPr>
-            <a:r>
-              <a:rPr lang="en-US" sz="1200" b="1" spc="200" kern="0" dirty="0">
+            <a:pPr marL="0" indent="0">
+              <a:buNone/>
+            </a:pPr>
+            <a:r>
+              <a:rPr lang="en-US" sz="1200" b="1" kern="0" spc="200" dirty="0">
                 <a:solidFill>
                   <a:srgbClr val="6E7687"/>
                 </a:solidFill>
@@ -14261,7 +14130,7 @@
           <a:bodyPr wrap="square" lIns="0" tIns="0" rIns="0" bIns="0" rtlCol="0" anchor="ctr"/>
           <a:lstStyle/>
           <a:p>
-            <a:pPr indent="0" marL="0">
+            <a:pPr marL="0" indent="0">
               <a:buNone/>
             </a:pPr>
             <a:r>
@@ -14300,7 +14169,7 @@
           <a:bodyPr wrap="square" lIns="0" tIns="0" rIns="0" bIns="0" rtlCol="0" anchor="ctr"/>
           <a:lstStyle/>
           <a:p>
-            <a:pPr indent="0" marL="0">
+            <a:pPr marL="0" indent="0">
               <a:buNone/>
             </a:pPr>
             <a:r>
@@ -14381,7 +14250,7 @@
           <a:bodyPr wrap="square" lIns="0" tIns="0" rIns="0" bIns="0" rtlCol="0" anchor="ctr"/>
           <a:lstStyle/>
           <a:p>
-            <a:pPr indent="0" marL="0">
+            <a:pPr marL="0" indent="0">
               <a:buNone/>
             </a:pPr>
             <a:r>
@@ -14462,7 +14331,7 @@
           <a:bodyPr wrap="square" lIns="0" tIns="0" rIns="0" bIns="0" rtlCol="0" anchor="ctr"/>
           <a:lstStyle/>
           <a:p>
-            <a:pPr indent="0" marL="0">
+            <a:pPr marL="0" indent="0">
               <a:buNone/>
             </a:pPr>
             <a:r>
@@ -14543,7 +14412,7 @@
           <a:bodyPr wrap="square" lIns="0" tIns="0" rIns="0" bIns="0" rtlCol="0" anchor="ctr"/>
           <a:lstStyle/>
           <a:p>
-            <a:pPr indent="0" marL="0">
+            <a:pPr marL="0" indent="0">
               <a:buNone/>
             </a:pPr>
             <a:r>
@@ -14582,7 +14451,7 @@
           <a:bodyPr wrap="square" lIns="0" tIns="0" rIns="0" bIns="0" rtlCol="0" anchor="ctr"/>
           <a:lstStyle/>
           <a:p>
-            <a:pPr indent="0" marL="0">
+            <a:pPr marL="0" indent="0">
               <a:buNone/>
             </a:pPr>
             <a:r>
@@ -14643,7 +14512,7 @@
           <a:bodyPr wrap="square" lIns="0" tIns="0" rIns="0" bIns="0" rtlCol="0" anchor="ctr"/>
           <a:lstStyle/>
           <a:p>
-            <a:pPr indent="0" marL="0">
+            <a:pPr marL="0" indent="0">
               <a:buNone/>
             </a:pPr>
             <a:r>
@@ -14682,7 +14551,7 @@
           <a:bodyPr wrap="square" lIns="0" tIns="0" rIns="0" bIns="0" rtlCol="0" anchor="ctr"/>
           <a:lstStyle/>
           <a:p>
-            <a:pPr indent="0" marL="0">
+            <a:pPr marL="0" indent="0">
               <a:buNone/>
             </a:pPr>
             <a:r>
@@ -14721,7 +14590,7 @@
           <a:bodyPr wrap="square" lIns="0" tIns="0" rIns="0" bIns="0" rtlCol="0" anchor="ctr"/>
           <a:lstStyle/>
           <a:p>
-            <a:pPr indent="0" marL="0">
+            <a:pPr marL="0" indent="0">
               <a:buNone/>
             </a:pPr>
             <a:r>
@@ -14760,7 +14629,7 @@
           <a:bodyPr wrap="square" lIns="0" tIns="0" rIns="0" bIns="0" rtlCol="0" anchor="ctr"/>
           <a:lstStyle/>
           <a:p>
-            <a:pPr algn="r" indent="0" marL="0">
+            <a:pPr marL="0" indent="0" algn="r">
               <a:buNone/>
             </a:pPr>
             <a:r>
@@ -14794,6 +14663,7 @@
         <a:solidFill>
           <a:srgbClr val="FFFFFF"/>
         </a:solidFill>
+        <a:effectLst/>
       </p:bgPr>
     </p:bg>
     <p:spTree>
@@ -14851,11 +14721,11 @@
           <a:bodyPr wrap="square" lIns="0" tIns="0" rIns="0" bIns="0" rtlCol="0" anchor="ctr"/>
           <a:lstStyle/>
           <a:p>
-            <a:pPr indent="0" marL="0">
-              <a:buNone/>
-            </a:pPr>
-            <a:r>
-              <a:rPr lang="en-US" sz="1200" b="1" spc="200" kern="0" dirty="0">
+            <a:pPr marL="0" indent="0">
+              <a:buNone/>
+            </a:pPr>
+            <a:r>
+              <a:rPr lang="en-US" sz="1200" b="1" kern="0" spc="200" dirty="0">
                 <a:solidFill>
                   <a:srgbClr val="6E7687"/>
                 </a:solidFill>
@@ -14912,7 +14782,7 @@
           <a:bodyPr wrap="square" lIns="0" tIns="0" rIns="0" bIns="0" rtlCol="0" anchor="ctr"/>
           <a:lstStyle/>
           <a:p>
-            <a:pPr indent="0" marL="0">
+            <a:pPr marL="0" indent="0">
               <a:buNone/>
             </a:pPr>
             <a:r>
@@ -14951,7 +14821,7 @@
           <a:bodyPr wrap="square" lIns="0" tIns="0" rIns="0" bIns="0" rtlCol="0" anchor="ctr"/>
           <a:lstStyle/>
           <a:p>
-            <a:pPr indent="0" marL="0">
+            <a:pPr marL="0" indent="0">
               <a:buNone/>
             </a:pPr>
             <a:r>
@@ -15032,7 +14902,7 @@
           <a:bodyPr wrap="square" lIns="0" tIns="0" rIns="0" bIns="0" rtlCol="0" anchor="ctr"/>
           <a:lstStyle/>
           <a:p>
-            <a:pPr indent="0" marL="0">
+            <a:pPr marL="0" indent="0">
               <a:buNone/>
             </a:pPr>
             <a:r>
@@ -15113,7 +14983,7 @@
           <a:bodyPr wrap="square" lIns="0" tIns="0" rIns="0" bIns="0" rtlCol="0" anchor="ctr"/>
           <a:lstStyle/>
           <a:p>
-            <a:pPr indent="0" marL="0">
+            <a:pPr marL="0" indent="0">
               <a:buNone/>
             </a:pPr>
             <a:r>
@@ -15194,7 +15064,7 @@
           <a:bodyPr wrap="square" lIns="0" tIns="0" rIns="0" bIns="0" rtlCol="0" anchor="ctr"/>
           <a:lstStyle/>
           <a:p>
-            <a:pPr indent="0" marL="0">
+            <a:pPr marL="0" indent="0">
               <a:buNone/>
             </a:pPr>
             <a:r>
@@ -15233,7 +15103,7 @@
           <a:bodyPr wrap="square" lIns="0" tIns="0" rIns="0" bIns="0" rtlCol="0" anchor="ctr"/>
           <a:lstStyle/>
           <a:p>
-            <a:pPr indent="0" marL="0">
+            <a:pPr marL="0" indent="0">
               <a:buNone/>
             </a:pPr>
             <a:r>
@@ -15294,7 +15164,7 @@
           <a:bodyPr wrap="square" lIns="0" tIns="0" rIns="0" bIns="0" rtlCol="0" anchor="ctr"/>
           <a:lstStyle/>
           <a:p>
-            <a:pPr indent="0" marL="0">
+            <a:pPr marL="0" indent="0">
               <a:buNone/>
             </a:pPr>
             <a:r>
@@ -15333,7 +15203,7 @@
           <a:bodyPr wrap="square" lIns="0" tIns="0" rIns="0" bIns="0" rtlCol="0" anchor="ctr"/>
           <a:lstStyle/>
           <a:p>
-            <a:pPr indent="0" marL="0">
+            <a:pPr marL="0" indent="0">
               <a:buNone/>
             </a:pPr>
             <a:r>
@@ -15372,7 +15242,7 @@
           <a:bodyPr wrap="square" lIns="0" tIns="0" rIns="0" bIns="0" rtlCol="0" anchor="ctr"/>
           <a:lstStyle/>
           <a:p>
-            <a:pPr algn="r" indent="0" marL="0">
+            <a:pPr marL="0" indent="0" algn="r">
               <a:buNone/>
             </a:pPr>
             <a:r>
@@ -15406,6 +15276,7 @@
         <a:solidFill>
           <a:srgbClr val="FFFFFF"/>
         </a:solidFill>
+        <a:effectLst/>
       </p:bgPr>
     </p:bg>
     <p:spTree>
@@ -15463,11 +15334,11 @@
           <a:bodyPr wrap="square" lIns="0" tIns="0" rIns="0" bIns="0" rtlCol="0" anchor="ctr"/>
           <a:lstStyle/>
           <a:p>
-            <a:pPr indent="0" marL="0">
-              <a:buNone/>
-            </a:pPr>
-            <a:r>
-              <a:rPr lang="en-US" sz="1200" b="1" spc="200" kern="0" dirty="0">
+            <a:pPr marL="0" indent="0">
+              <a:buNone/>
+            </a:pPr>
+            <a:r>
+              <a:rPr lang="en-US" sz="1200" b="1" kern="0" spc="200" dirty="0">
                 <a:solidFill>
                   <a:srgbClr val="6E7687"/>
                 </a:solidFill>
@@ -15524,7 +15395,7 @@
           <a:bodyPr wrap="square" lIns="0" tIns="0" rIns="0" bIns="0" rtlCol="0" anchor="ctr"/>
           <a:lstStyle/>
           <a:p>
-            <a:pPr indent="0" marL="0">
+            <a:pPr marL="0" indent="0">
               <a:buNone/>
             </a:pPr>
             <a:r>
@@ -15563,7 +15434,7 @@
           <a:bodyPr wrap="square" lIns="0" tIns="0" rIns="0" bIns="0" rtlCol="0" anchor="ctr"/>
           <a:lstStyle/>
           <a:p>
-            <a:pPr indent="0" marL="0">
+            <a:pPr marL="0" indent="0">
               <a:buNone/>
             </a:pPr>
             <a:r>
@@ -15644,7 +15515,7 @@
           <a:bodyPr wrap="square" lIns="0" tIns="0" rIns="0" bIns="0" rtlCol="0" anchor="ctr"/>
           <a:lstStyle/>
           <a:p>
-            <a:pPr indent="0" marL="0">
+            <a:pPr marL="0" indent="0">
               <a:buNone/>
             </a:pPr>
             <a:r>
@@ -15725,7 +15596,7 @@
           <a:bodyPr wrap="square" lIns="0" tIns="0" rIns="0" bIns="0" rtlCol="0" anchor="ctr"/>
           <a:lstStyle/>
           <a:p>
-            <a:pPr indent="0" marL="0">
+            <a:pPr marL="0" indent="0">
               <a:buNone/>
             </a:pPr>
             <a:r>
@@ -15806,7 +15677,7 @@
           <a:bodyPr wrap="square" lIns="0" tIns="0" rIns="0" bIns="0" rtlCol="0" anchor="ctr"/>
           <a:lstStyle/>
           <a:p>
-            <a:pPr indent="0" marL="0">
+            <a:pPr marL="0" indent="0">
               <a:buNone/>
             </a:pPr>
             <a:r>
@@ -15845,7 +15716,7 @@
           <a:bodyPr wrap="square" lIns="0" tIns="0" rIns="0" bIns="0" rtlCol="0" anchor="ctr"/>
           <a:lstStyle/>
           <a:p>
-            <a:pPr indent="0" marL="0">
+            <a:pPr marL="0" indent="0">
               <a:buNone/>
             </a:pPr>
             <a:r>
@@ -15906,7 +15777,7 @@
           <a:bodyPr wrap="square" lIns="0" tIns="0" rIns="0" bIns="0" rtlCol="0" anchor="ctr"/>
           <a:lstStyle/>
           <a:p>
-            <a:pPr indent="0" marL="0">
+            <a:pPr marL="0" indent="0">
               <a:buNone/>
             </a:pPr>
             <a:r>
@@ -15945,7 +15816,7 @@
           <a:bodyPr wrap="square" lIns="0" tIns="0" rIns="0" bIns="0" rtlCol="0" anchor="ctr"/>
           <a:lstStyle/>
           <a:p>
-            <a:pPr indent="0" marL="0">
+            <a:pPr marL="0" indent="0">
               <a:buNone/>
             </a:pPr>
             <a:r>
@@ -15984,7 +15855,7 @@
           <a:bodyPr wrap="square" lIns="0" tIns="0" rIns="0" bIns="0" rtlCol="0" anchor="ctr"/>
           <a:lstStyle/>
           <a:p>
-            <a:pPr indent="0" marL="0">
+            <a:pPr marL="0" indent="0">
               <a:buNone/>
             </a:pPr>
             <a:r>
@@ -16023,7 +15894,7 @@
           <a:bodyPr wrap="square" lIns="0" tIns="0" rIns="0" bIns="0" rtlCol="0" anchor="ctr"/>
           <a:lstStyle/>
           <a:p>
-            <a:pPr algn="r" indent="0" marL="0">
+            <a:pPr marL="0" indent="0" algn="r">
               <a:buNone/>
             </a:pPr>
             <a:r>
@@ -16057,6 +15928,7 @@
         <a:solidFill>
           <a:srgbClr val="FFFFFF"/>
         </a:solidFill>
+        <a:effectLst/>
       </p:bgPr>
     </p:bg>
     <p:spTree>
@@ -16114,11 +15986,11 @@
           <a:bodyPr wrap="square" lIns="0" tIns="0" rIns="0" bIns="0" rtlCol="0" anchor="ctr"/>
           <a:lstStyle/>
           <a:p>
-            <a:pPr indent="0" marL="0">
-              <a:buNone/>
-            </a:pPr>
-            <a:r>
-              <a:rPr lang="en-US" sz="1200" b="1" spc="200" kern="0" dirty="0">
+            <a:pPr marL="0" indent="0">
+              <a:buNone/>
+            </a:pPr>
+            <a:r>
+              <a:rPr lang="en-US" sz="1200" b="1" kern="0" spc="200" dirty="0">
                 <a:solidFill>
                   <a:srgbClr val="6E7687"/>
                 </a:solidFill>
@@ -16175,7 +16047,7 @@
           <a:bodyPr wrap="square" lIns="0" tIns="0" rIns="0" bIns="0" rtlCol="0" anchor="ctr"/>
           <a:lstStyle/>
           <a:p>
-            <a:pPr indent="0" marL="0">
+            <a:pPr marL="0" indent="0">
               <a:buNone/>
             </a:pPr>
             <a:r>
@@ -16214,7 +16086,7 @@
           <a:bodyPr wrap="square" lIns="0" tIns="0" rIns="0" bIns="0" rtlCol="0" anchor="ctr"/>
           <a:lstStyle/>
           <a:p>
-            <a:pPr indent="0" marL="0">
+            <a:pPr marL="0" indent="0">
               <a:buNone/>
             </a:pPr>
             <a:r>
@@ -16295,7 +16167,7 @@
           <a:bodyPr wrap="square" lIns="0" tIns="0" rIns="0" bIns="0" rtlCol="0" anchor="ctr"/>
           <a:lstStyle/>
           <a:p>
-            <a:pPr indent="0" marL="0">
+            <a:pPr marL="0" indent="0">
               <a:buNone/>
             </a:pPr>
             <a:r>
@@ -16376,7 +16248,7 @@
           <a:bodyPr wrap="square" lIns="0" tIns="0" rIns="0" bIns="0" rtlCol="0" anchor="ctr"/>
           <a:lstStyle/>
           <a:p>
-            <a:pPr indent="0" marL="0">
+            <a:pPr marL="0" indent="0">
               <a:buNone/>
             </a:pPr>
             <a:r>
@@ -16457,7 +16329,7 @@
           <a:bodyPr wrap="square" lIns="0" tIns="0" rIns="0" bIns="0" rtlCol="0" anchor="ctr"/>
           <a:lstStyle/>
           <a:p>
-            <a:pPr indent="0" marL="0">
+            <a:pPr marL="0" indent="0">
               <a:buNone/>
             </a:pPr>
             <a:r>
@@ -16496,7 +16368,7 @@
           <a:bodyPr wrap="square" lIns="0" tIns="0" rIns="0" bIns="0" rtlCol="0" anchor="ctr"/>
           <a:lstStyle/>
           <a:p>
-            <a:pPr indent="0" marL="0">
+            <a:pPr marL="0" indent="0">
               <a:buNone/>
             </a:pPr>
             <a:r>
@@ -16557,7 +16429,7 @@
           <a:bodyPr wrap="square" lIns="0" tIns="0" rIns="0" bIns="0" rtlCol="0" anchor="ctr"/>
           <a:lstStyle/>
           <a:p>
-            <a:pPr indent="0" marL="0">
+            <a:pPr marL="0" indent="0">
               <a:buNone/>
             </a:pPr>
             <a:r>
@@ -16596,7 +16468,7 @@
           <a:bodyPr wrap="square" lIns="0" tIns="0" rIns="0" bIns="0" rtlCol="0" anchor="ctr"/>
           <a:lstStyle/>
           <a:p>
-            <a:pPr indent="0" marL="0">
+            <a:pPr marL="0" indent="0">
               <a:buNone/>
             </a:pPr>
             <a:r>
@@ -16635,7 +16507,7 @@
           <a:bodyPr wrap="square" lIns="0" tIns="0" rIns="0" bIns="0" rtlCol="0" anchor="ctr"/>
           <a:lstStyle/>
           <a:p>
-            <a:pPr algn="r" indent="0" marL="0">
+            <a:pPr marL="0" indent="0" algn="r">
               <a:buNone/>
             </a:pPr>
             <a:r>
@@ -16669,6 +16541,7 @@
         <a:solidFill>
           <a:srgbClr val="FFFFFF"/>
         </a:solidFill>
+        <a:effectLst/>
       </p:bgPr>
     </p:bg>
     <p:spTree>
@@ -16726,11 +16599,11 @@
           <a:bodyPr wrap="square" lIns="0" tIns="0" rIns="0" bIns="0" rtlCol="0" anchor="ctr"/>
           <a:lstStyle/>
           <a:p>
-            <a:pPr indent="0" marL="0">
-              <a:buNone/>
-            </a:pPr>
-            <a:r>
-              <a:rPr lang="en-US" sz="1200" b="1" spc="200" kern="0" dirty="0">
+            <a:pPr marL="0" indent="0">
+              <a:buNone/>
+            </a:pPr>
+            <a:r>
+              <a:rPr lang="en-US" sz="1200" b="1" kern="0" spc="200" dirty="0">
                 <a:solidFill>
                   <a:srgbClr val="6E7687"/>
                 </a:solidFill>
@@ -16787,7 +16660,7 @@
           <a:bodyPr wrap="square" lIns="0" tIns="0" rIns="0" bIns="0" rtlCol="0" anchor="ctr"/>
           <a:lstStyle/>
           <a:p>
-            <a:pPr indent="0" marL="0">
+            <a:pPr marL="0" indent="0">
               <a:buNone/>
             </a:pPr>
             <a:r>
@@ -16826,7 +16699,7 @@
           <a:bodyPr wrap="square" lIns="0" tIns="0" rIns="0" bIns="0" rtlCol="0" anchor="ctr"/>
           <a:lstStyle/>
           <a:p>
-            <a:pPr indent="0" marL="0">
+            <a:pPr marL="0" indent="0">
               <a:buNone/>
             </a:pPr>
             <a:r>
@@ -16907,7 +16780,7 @@
           <a:bodyPr wrap="square" lIns="0" tIns="0" rIns="0" bIns="0" rtlCol="0" anchor="ctr"/>
           <a:lstStyle/>
           <a:p>
-            <a:pPr indent="0" marL="0">
+            <a:pPr marL="0" indent="0">
               <a:buNone/>
             </a:pPr>
             <a:r>
@@ -16988,7 +16861,7 @@
           <a:bodyPr wrap="square" lIns="0" tIns="0" rIns="0" bIns="0" rtlCol="0" anchor="ctr"/>
           <a:lstStyle/>
           <a:p>
-            <a:pPr indent="0" marL="0">
+            <a:pPr marL="0" indent="0">
               <a:buNone/>
             </a:pPr>
             <a:r>
@@ -17069,7 +16942,7 @@
           <a:bodyPr wrap="square" lIns="0" tIns="0" rIns="0" bIns="0" rtlCol="0" anchor="ctr"/>
           <a:lstStyle/>
           <a:p>
-            <a:pPr indent="0" marL="0">
+            <a:pPr marL="0" indent="0">
               <a:buNone/>
             </a:pPr>
             <a:r>
@@ -17108,7 +16981,7 @@
           <a:bodyPr wrap="square" lIns="0" tIns="0" rIns="0" bIns="0" rtlCol="0" anchor="ctr"/>
           <a:lstStyle/>
           <a:p>
-            <a:pPr indent="0" marL="0">
+            <a:pPr marL="0" indent="0">
               <a:buNone/>
             </a:pPr>
             <a:r>
@@ -17169,7 +17042,7 @@
           <a:bodyPr wrap="square" lIns="0" tIns="0" rIns="0" bIns="0" rtlCol="0" anchor="ctr"/>
           <a:lstStyle/>
           <a:p>
-            <a:pPr indent="0" marL="0">
+            <a:pPr marL="0" indent="0">
               <a:buNone/>
             </a:pPr>
             <a:r>
@@ -17208,7 +17081,7 @@
           <a:bodyPr wrap="square" lIns="0" tIns="0" rIns="0" bIns="0" rtlCol="0" anchor="ctr"/>
           <a:lstStyle/>
           <a:p>
-            <a:pPr indent="0" marL="0">
+            <a:pPr marL="0" indent="0">
               <a:buNone/>
             </a:pPr>
             <a:r>
@@ -17247,7 +17120,7 @@
           <a:bodyPr wrap="square" lIns="0" tIns="0" rIns="0" bIns="0" rtlCol="0" anchor="ctr"/>
           <a:lstStyle/>
           <a:p>
-            <a:pPr algn="r" indent="0" marL="0">
+            <a:pPr marL="0" indent="0" algn="r">
               <a:buNone/>
             </a:pPr>
             <a:r>
@@ -17281,6 +17154,7 @@
         <a:solidFill>
           <a:srgbClr val="10131A"/>
         </a:solidFill>
+        <a:effectLst/>
       </p:bgPr>
     </p:bg>
     <p:spTree>
@@ -17338,11 +17212,11 @@
           <a:bodyPr wrap="square" lIns="0" tIns="0" rIns="0" bIns="0" rtlCol="0" anchor="ctr"/>
           <a:lstStyle/>
           <a:p>
-            <a:pPr indent="0" marL="0">
-              <a:buNone/>
-            </a:pPr>
-            <a:r>
-              <a:rPr lang="en-US" sz="1200" b="1" spc="200" kern="0" dirty="0">
+            <a:pPr marL="0" indent="0">
+              <a:buNone/>
+            </a:pPr>
+            <a:r>
+              <a:rPr lang="en-US" sz="1200" b="1" kern="0" spc="200" dirty="0">
                 <a:solidFill>
                   <a:srgbClr val="8A93A6"/>
                 </a:solidFill>
@@ -17377,7 +17251,7 @@
           <a:bodyPr wrap="square" lIns="0" tIns="0" rIns="0" bIns="0" rtlCol="0" anchor="ctr"/>
           <a:lstStyle/>
           <a:p>
-            <a:pPr indent="0" marL="0">
+            <a:pPr marL="0" indent="0">
               <a:buNone/>
             </a:pPr>
             <a:r>
@@ -17416,7 +17290,7 @@
           <a:bodyPr wrap="square" lIns="0" tIns="0" rIns="0" bIns="0" rtlCol="0" anchor="t"/>
           <a:lstStyle/>
           <a:p>
-            <a:pPr indent="0" marL="0">
+            <a:pPr marL="0" indent="0">
               <a:lnSpc>
                 <a:spcPts val="3200"/>
               </a:lnSpc>
@@ -17480,7 +17354,7 @@
           <a:bodyPr wrap="square" lIns="0" tIns="0" rIns="0" bIns="0" rtlCol="0" anchor="ctr"/>
           <a:lstStyle/>
           <a:p>
-            <a:pPr indent="0" marL="0">
+            <a:pPr marL="0" indent="0">
               <a:buNone/>
             </a:pPr>
             <a:r>
@@ -17519,7 +17393,7 @@
           <a:bodyPr wrap="square" lIns="0" tIns="0" rIns="0" bIns="0" rtlCol="0" anchor="t"/>
           <a:lstStyle/>
           <a:p>
-            <a:pPr indent="0" marL="0">
+            <a:pPr marL="0" indent="0">
               <a:lnSpc>
                 <a:spcPts val="2600"/>
               </a:lnSpc>
@@ -17583,7 +17457,7 @@
           <a:bodyPr wrap="square" lIns="0" tIns="0" rIns="0" bIns="0" rtlCol="0" anchor="ctr"/>
           <a:lstStyle/>
           <a:p>
-            <a:pPr indent="0" marL="0">
+            <a:pPr marL="0" indent="0">
               <a:buNone/>
             </a:pPr>
             <a:r>
@@ -17622,7 +17496,7 @@
           <a:bodyPr wrap="square" lIns="0" tIns="0" rIns="0" bIns="0" rtlCol="0" anchor="t"/>
           <a:lstStyle/>
           <a:p>
-            <a:pPr indent="0" marL="0">
+            <a:pPr marL="0" indent="0">
               <a:lnSpc>
                 <a:spcPts val="2600"/>
               </a:lnSpc>
@@ -17664,7 +17538,7 @@
           <a:bodyPr wrap="square" lIns="0" tIns="0" rIns="0" bIns="0" rtlCol="0" anchor="ctr"/>
           <a:lstStyle/>
           <a:p>
-            <a:pPr indent="0" marL="0">
+            <a:pPr marL="0" indent="0">
               <a:buNone/>
             </a:pPr>
             <a:r>
@@ -17703,7 +17577,7 @@
           <a:bodyPr wrap="square" lIns="0" tIns="0" rIns="0" bIns="0" rtlCol="0" anchor="ctr"/>
           <a:lstStyle/>
           <a:p>
-            <a:pPr algn="r" indent="0" marL="0">
+            <a:pPr marL="0" indent="0" algn="r">
               <a:buNone/>
             </a:pPr>
             <a:r>
@@ -17737,6 +17611,7 @@
         <a:solidFill>
           <a:srgbClr val="FFFFFF"/>
         </a:solidFill>
+        <a:effectLst/>
       </p:bgPr>
     </p:bg>
     <p:spTree>
@@ -17794,11 +17669,11 @@
           <a:bodyPr wrap="square" lIns="0" tIns="0" rIns="0" bIns="0" rtlCol="0" anchor="ctr"/>
           <a:lstStyle/>
           <a:p>
-            <a:pPr indent="0" marL="0">
-              <a:buNone/>
-            </a:pPr>
-            <a:r>
-              <a:rPr lang="en-US" sz="1200" b="1" spc="200" kern="0" dirty="0">
+            <a:pPr marL="0" indent="0">
+              <a:buNone/>
+            </a:pPr>
+            <a:r>
+              <a:rPr lang="en-US" sz="1200" b="1" kern="0" spc="200" dirty="0">
                 <a:solidFill>
                   <a:srgbClr val="6E7687"/>
                 </a:solidFill>
@@ -17833,7 +17708,7 @@
           <a:bodyPr wrap="square" lIns="0" tIns="0" rIns="0" bIns="0" rtlCol="0" anchor="ctr"/>
           <a:lstStyle/>
           <a:p>
-            <a:pPr indent="0" marL="0">
+            <a:pPr marL="0" indent="0">
               <a:buNone/>
             </a:pPr>
             <a:r>
@@ -17872,7 +17747,7 @@
           <a:bodyPr wrap="square" lIns="0" tIns="0" rIns="0" bIns="0" rtlCol="0" anchor="t"/>
           <a:lstStyle/>
           <a:p>
-            <a:pPr indent="0" marL="0">
+            <a:pPr marL="0" indent="0">
               <a:lnSpc>
                 <a:spcPts val="3200"/>
               </a:lnSpc>
@@ -17956,7 +17831,7 @@
           <a:bodyPr wrap="square" lIns="0" tIns="0" rIns="0" bIns="0" rtlCol="0" anchor="ctr"/>
           <a:lstStyle/>
           <a:p>
-            <a:pPr algn="ctr" indent="0" marL="0">
+            <a:pPr marL="0" indent="0" algn="ctr">
               <a:buNone/>
             </a:pPr>
             <a:r>
@@ -17995,7 +17870,7 @@
           <a:bodyPr wrap="square" lIns="0" tIns="0" rIns="0" bIns="0" rtlCol="0" anchor="ctr"/>
           <a:lstStyle/>
           <a:p>
-            <a:pPr indent="0" marL="0">
+            <a:pPr marL="0" indent="0">
               <a:buNone/>
             </a:pPr>
             <a:r>
@@ -18034,7 +17909,7 @@
           <a:bodyPr wrap="square" lIns="0" tIns="0" rIns="0" bIns="0" rtlCol="0" anchor="ctr"/>
           <a:lstStyle/>
           <a:p>
-            <a:pPr indent="0" marL="0">
+            <a:pPr marL="0" indent="0">
               <a:buNone/>
             </a:pPr>
             <a:r>
@@ -18096,7 +17971,7 @@
           <a:bodyPr wrap="square" lIns="0" tIns="0" rIns="0" bIns="0" rtlCol="0" anchor="ctr"/>
           <a:lstStyle/>
           <a:p>
-            <a:pPr indent="0" marL="0">
+            <a:pPr marL="0" indent="0">
               <a:buNone/>
             </a:pPr>
             <a:r>
@@ -18177,7 +18052,7 @@
           <a:bodyPr wrap="square" lIns="0" tIns="0" rIns="0" bIns="0" rtlCol="0" anchor="ctr"/>
           <a:lstStyle/>
           <a:p>
-            <a:pPr algn="ctr" indent="0" marL="0">
+            <a:pPr marL="0" indent="0" algn="ctr">
               <a:buNone/>
             </a:pPr>
             <a:r>
@@ -18216,7 +18091,7 @@
           <a:bodyPr wrap="square" lIns="0" tIns="0" rIns="0" bIns="0" rtlCol="0" anchor="ctr"/>
           <a:lstStyle/>
           <a:p>
-            <a:pPr indent="0" marL="0">
+            <a:pPr marL="0" indent="0">
               <a:buNone/>
             </a:pPr>
             <a:r>
@@ -18255,7 +18130,7 @@
           <a:bodyPr wrap="square" lIns="0" tIns="0" rIns="0" bIns="0" rtlCol="0" anchor="ctr"/>
           <a:lstStyle/>
           <a:p>
-            <a:pPr indent="0" marL="0">
+            <a:pPr marL="0" indent="0">
               <a:buNone/>
             </a:pPr>
             <a:r>
@@ -18317,7 +18192,7 @@
           <a:bodyPr wrap="square" lIns="0" tIns="0" rIns="0" bIns="0" rtlCol="0" anchor="ctr"/>
           <a:lstStyle/>
           <a:p>
-            <a:pPr indent="0" marL="0">
+            <a:pPr marL="0" indent="0">
               <a:buNone/>
             </a:pPr>
             <a:r>
@@ -18398,7 +18273,7 @@
           <a:bodyPr wrap="square" lIns="0" tIns="0" rIns="0" bIns="0" rtlCol="0" anchor="ctr"/>
           <a:lstStyle/>
           <a:p>
-            <a:pPr algn="ctr" indent="0" marL="0">
+            <a:pPr marL="0" indent="0" algn="ctr">
               <a:buNone/>
             </a:pPr>
             <a:r>
@@ -18437,7 +18312,7 @@
           <a:bodyPr wrap="square" lIns="0" tIns="0" rIns="0" bIns="0" rtlCol="0" anchor="ctr"/>
           <a:lstStyle/>
           <a:p>
-            <a:pPr indent="0" marL="0">
+            <a:pPr marL="0" indent="0">
               <a:buNone/>
             </a:pPr>
             <a:r>
@@ -18476,7 +18351,7 @@
           <a:bodyPr wrap="square" lIns="0" tIns="0" rIns="0" bIns="0" rtlCol="0" anchor="ctr"/>
           <a:lstStyle/>
           <a:p>
-            <a:pPr indent="0" marL="0">
+            <a:pPr marL="0" indent="0">
               <a:buNone/>
             </a:pPr>
             <a:r>
@@ -18538,7 +18413,7 @@
           <a:bodyPr wrap="square" lIns="0" tIns="0" rIns="0" bIns="0" rtlCol="0" anchor="ctr"/>
           <a:lstStyle/>
           <a:p>
-            <a:pPr indent="0" marL="0">
+            <a:pPr marL="0" indent="0">
               <a:buNone/>
             </a:pPr>
             <a:r>
@@ -18619,7 +18494,7 @@
           <a:bodyPr wrap="square" lIns="0" tIns="0" rIns="0" bIns="0" rtlCol="0" anchor="ctr"/>
           <a:lstStyle/>
           <a:p>
-            <a:pPr algn="ctr" indent="0" marL="0">
+            <a:pPr marL="0" indent="0" algn="ctr">
               <a:buNone/>
             </a:pPr>
             <a:r>
@@ -18658,7 +18533,7 @@
           <a:bodyPr wrap="square" lIns="0" tIns="0" rIns="0" bIns="0" rtlCol="0" anchor="ctr"/>
           <a:lstStyle/>
           <a:p>
-            <a:pPr indent="0" marL="0">
+            <a:pPr marL="0" indent="0">
               <a:buNone/>
             </a:pPr>
             <a:r>
@@ -18697,7 +18572,7 @@
           <a:bodyPr wrap="square" lIns="0" tIns="0" rIns="0" bIns="0" rtlCol="0" anchor="ctr"/>
           <a:lstStyle/>
           <a:p>
-            <a:pPr indent="0" marL="0">
+            <a:pPr marL="0" indent="0">
               <a:buNone/>
             </a:pPr>
             <a:r>
@@ -18759,7 +18634,7 @@
           <a:bodyPr wrap="square" lIns="0" tIns="0" rIns="0" bIns="0" rtlCol="0" anchor="ctr"/>
           <a:lstStyle/>
           <a:p>
-            <a:pPr indent="0" marL="0">
+            <a:pPr marL="0" indent="0">
               <a:buNone/>
             </a:pPr>
             <a:r>
@@ -18840,7 +18715,7 @@
           <a:bodyPr wrap="square" lIns="0" tIns="0" rIns="0" bIns="0" rtlCol="0" anchor="ctr"/>
           <a:lstStyle/>
           <a:p>
-            <a:pPr algn="ctr" indent="0" marL="0">
+            <a:pPr marL="0" indent="0" algn="ctr">
               <a:buNone/>
             </a:pPr>
             <a:r>
@@ -18879,7 +18754,7 @@
           <a:bodyPr wrap="square" lIns="0" tIns="0" rIns="0" bIns="0" rtlCol="0" anchor="ctr"/>
           <a:lstStyle/>
           <a:p>
-            <a:pPr indent="0" marL="0">
+            <a:pPr marL="0" indent="0">
               <a:buNone/>
             </a:pPr>
             <a:r>
@@ -18918,7 +18793,7 @@
           <a:bodyPr wrap="square" lIns="0" tIns="0" rIns="0" bIns="0" rtlCol="0" anchor="ctr"/>
           <a:lstStyle/>
           <a:p>
-            <a:pPr indent="0" marL="0">
+            <a:pPr marL="0" indent="0">
               <a:buNone/>
             </a:pPr>
             <a:r>
@@ -18980,7 +18855,7 @@
           <a:bodyPr wrap="square" lIns="0" tIns="0" rIns="0" bIns="0" rtlCol="0" anchor="ctr"/>
           <a:lstStyle/>
           <a:p>
-            <a:pPr indent="0" marL="0">
+            <a:pPr marL="0" indent="0">
               <a:buNone/>
             </a:pPr>
             <a:r>
@@ -19061,7 +18936,7 @@
           <a:bodyPr wrap="square" lIns="0" tIns="0" rIns="0" bIns="0" rtlCol="0" anchor="ctr"/>
           <a:lstStyle/>
           <a:p>
-            <a:pPr algn="ctr" indent="0" marL="0">
+            <a:pPr marL="0" indent="0" algn="ctr">
               <a:buNone/>
             </a:pPr>
             <a:r>
@@ -19100,7 +18975,7 @@
           <a:bodyPr wrap="square" lIns="0" tIns="0" rIns="0" bIns="0" rtlCol="0" anchor="ctr"/>
           <a:lstStyle/>
           <a:p>
-            <a:pPr indent="0" marL="0">
+            <a:pPr marL="0" indent="0">
               <a:buNone/>
             </a:pPr>
             <a:r>
@@ -19139,7 +19014,7 @@
           <a:bodyPr wrap="square" lIns="0" tIns="0" rIns="0" bIns="0" rtlCol="0" anchor="ctr"/>
           <a:lstStyle/>
           <a:p>
-            <a:pPr indent="0" marL="0">
+            <a:pPr marL="0" indent="0">
               <a:buNone/>
             </a:pPr>
             <a:r>
@@ -19201,7 +19076,7 @@
           <a:bodyPr wrap="square" lIns="0" tIns="0" rIns="0" bIns="0" rtlCol="0" anchor="ctr"/>
           <a:lstStyle/>
           <a:p>
-            <a:pPr indent="0" marL="0">
+            <a:pPr marL="0" indent="0">
               <a:buNone/>
             </a:pPr>
             <a:r>
@@ -19282,7 +19157,7 @@
           <a:bodyPr wrap="square" lIns="0" tIns="0" rIns="0" bIns="0" rtlCol="0" anchor="ctr"/>
           <a:lstStyle/>
           <a:p>
-            <a:pPr algn="ctr" indent="0" marL="0">
+            <a:pPr marL="0" indent="0" algn="ctr">
               <a:buNone/>
             </a:pPr>
             <a:r>
@@ -19321,7 +19196,7 @@
           <a:bodyPr wrap="square" lIns="0" tIns="0" rIns="0" bIns="0" rtlCol="0" anchor="ctr"/>
           <a:lstStyle/>
           <a:p>
-            <a:pPr indent="0" marL="0">
+            <a:pPr marL="0" indent="0">
               <a:buNone/>
             </a:pPr>
             <a:r>
@@ -19360,7 +19235,7 @@
           <a:bodyPr wrap="square" lIns="0" tIns="0" rIns="0" bIns="0" rtlCol="0" anchor="ctr"/>
           <a:lstStyle/>
           <a:p>
-            <a:pPr indent="0" marL="0">
+            <a:pPr marL="0" indent="0">
               <a:buNone/>
             </a:pPr>
             <a:r>
@@ -19422,7 +19297,7 @@
           <a:bodyPr wrap="square" lIns="0" tIns="0" rIns="0" bIns="0" rtlCol="0" anchor="ctr"/>
           <a:lstStyle/>
           <a:p>
-            <a:pPr indent="0" marL="0">
+            <a:pPr marL="0" indent="0">
               <a:buNone/>
             </a:pPr>
             <a:r>
@@ -19503,7 +19378,7 @@
           <a:bodyPr wrap="square" lIns="0" tIns="0" rIns="0" bIns="0" rtlCol="0" anchor="ctr"/>
           <a:lstStyle/>
           <a:p>
-            <a:pPr algn="ctr" indent="0" marL="0">
+            <a:pPr marL="0" indent="0" algn="ctr">
               <a:buNone/>
             </a:pPr>
             <a:r>
@@ -19542,7 +19417,7 @@
           <a:bodyPr wrap="square" lIns="0" tIns="0" rIns="0" bIns="0" rtlCol="0" anchor="ctr"/>
           <a:lstStyle/>
           <a:p>
-            <a:pPr indent="0" marL="0">
+            <a:pPr marL="0" indent="0">
               <a:buNone/>
             </a:pPr>
             <a:r>
@@ -19581,7 +19456,7 @@
           <a:bodyPr wrap="square" lIns="0" tIns="0" rIns="0" bIns="0" rtlCol="0" anchor="ctr"/>
           <a:lstStyle/>
           <a:p>
-            <a:pPr indent="0" marL="0">
+            <a:pPr marL="0" indent="0">
               <a:buNone/>
             </a:pPr>
             <a:r>
@@ -19643,7 +19518,7 @@
           <a:bodyPr wrap="square" lIns="0" tIns="0" rIns="0" bIns="0" rtlCol="0" anchor="ctr"/>
           <a:lstStyle/>
           <a:p>
-            <a:pPr indent="0" marL="0">
+            <a:pPr marL="0" indent="0">
               <a:buNone/>
             </a:pPr>
             <a:r>
@@ -19724,7 +19599,7 @@
           <a:bodyPr wrap="square" lIns="0" tIns="0" rIns="0" bIns="0" rtlCol="0" anchor="ctr"/>
           <a:lstStyle/>
           <a:p>
-            <a:pPr algn="ctr" indent="0" marL="0">
+            <a:pPr marL="0" indent="0" algn="ctr">
               <a:buNone/>
             </a:pPr>
             <a:r>
@@ -19763,7 +19638,7 @@
           <a:bodyPr wrap="square" lIns="0" tIns="0" rIns="0" bIns="0" rtlCol="0" anchor="ctr"/>
           <a:lstStyle/>
           <a:p>
-            <a:pPr indent="0" marL="0">
+            <a:pPr marL="0" indent="0">
               <a:buNone/>
             </a:pPr>
             <a:r>
@@ -19802,7 +19677,7 @@
           <a:bodyPr wrap="square" lIns="0" tIns="0" rIns="0" bIns="0" rtlCol="0" anchor="ctr"/>
           <a:lstStyle/>
           <a:p>
-            <a:pPr indent="0" marL="0">
+            <a:pPr marL="0" indent="0">
               <a:buNone/>
             </a:pPr>
             <a:r>
@@ -19864,7 +19739,7 @@
           <a:bodyPr wrap="square" lIns="0" tIns="0" rIns="0" bIns="0" rtlCol="0" anchor="ctr"/>
           <a:lstStyle/>
           <a:p>
-            <a:pPr indent="0" marL="0">
+            <a:pPr marL="0" indent="0">
               <a:buNone/>
             </a:pPr>
             <a:r>
@@ -19903,7 +19778,7 @@
           <a:bodyPr wrap="square" lIns="0" tIns="0" rIns="0" bIns="0" rtlCol="0" anchor="ctr"/>
           <a:lstStyle/>
           <a:p>
-            <a:pPr algn="r" indent="0" marL="0">
+            <a:pPr marL="0" indent="0" algn="r">
               <a:buNone/>
             </a:pPr>
             <a:r>
@@ -19937,6 +19812,7 @@
         <a:solidFill>
           <a:srgbClr val="FFFFFF"/>
         </a:solidFill>
+        <a:effectLst/>
       </p:bgPr>
     </p:bg>
     <p:spTree>
@@ -19994,11 +19870,11 @@
           <a:bodyPr wrap="square" lIns="0" tIns="0" rIns="0" bIns="0" rtlCol="0" anchor="ctr"/>
           <a:lstStyle/>
           <a:p>
-            <a:pPr indent="0" marL="0">
-              <a:buNone/>
-            </a:pPr>
-            <a:r>
-              <a:rPr lang="en-US" sz="1200" b="1" spc="200" kern="0" dirty="0">
+            <a:pPr marL="0" indent="0">
+              <a:buNone/>
+            </a:pPr>
+            <a:r>
+              <a:rPr lang="en-US" sz="1200" b="1" kern="0" spc="200" dirty="0">
                 <a:solidFill>
                   <a:srgbClr val="6E7687"/>
                 </a:solidFill>
@@ -20033,7 +19909,7 @@
           <a:bodyPr wrap="square" lIns="0" tIns="0" rIns="0" bIns="0" rtlCol="0" anchor="ctr"/>
           <a:lstStyle/>
           <a:p>
-            <a:pPr indent="0" marL="0">
+            <a:pPr marL="0" indent="0">
               <a:buNone/>
             </a:pPr>
             <a:r>
@@ -20072,7 +19948,7 @@
           <a:bodyPr wrap="square" lIns="0" tIns="0" rIns="0" bIns="0" rtlCol="0" anchor="t"/>
           <a:lstStyle/>
           <a:p>
-            <a:pPr indent="0" marL="0">
+            <a:pPr marL="0" indent="0">
               <a:lnSpc>
                 <a:spcPts val="3200"/>
               </a:lnSpc>
@@ -20136,7 +20012,7 @@
           <a:bodyPr wrap="square" lIns="0" tIns="0" rIns="0" bIns="0" rtlCol="0" anchor="ctr"/>
           <a:lstStyle/>
           <a:p>
-            <a:pPr indent="0" marL="0">
+            <a:pPr marL="0" indent="0">
               <a:buNone/>
             </a:pPr>
             <a:r>
@@ -20175,7 +20051,7 @@
           <a:bodyPr wrap="square" lIns="0" tIns="0" rIns="0" bIns="0" rtlCol="0" anchor="t"/>
           <a:lstStyle/>
           <a:p>
-            <a:pPr indent="0" marL="0">
+            <a:pPr marL="0" indent="0">
               <a:lnSpc>
                 <a:spcPts val="2100"/>
               </a:lnSpc>
@@ -20239,7 +20115,7 @@
           <a:bodyPr wrap="square" lIns="0" tIns="0" rIns="0" bIns="0" rtlCol="0" anchor="ctr"/>
           <a:lstStyle/>
           <a:p>
-            <a:pPr indent="0" marL="0">
+            <a:pPr marL="0" indent="0">
               <a:buNone/>
             </a:pPr>
             <a:r>
@@ -20278,7 +20154,7 @@
           <a:bodyPr wrap="square" lIns="0" tIns="0" rIns="0" bIns="0" rtlCol="0" anchor="t"/>
           <a:lstStyle/>
           <a:p>
-            <a:pPr indent="0" marL="0">
+            <a:pPr marL="0" indent="0">
               <a:lnSpc>
                 <a:spcPts val="2100"/>
               </a:lnSpc>
@@ -20342,7 +20218,7 @@
           <a:bodyPr wrap="square" lIns="0" tIns="0" rIns="0" bIns="0" rtlCol="0" anchor="ctr"/>
           <a:lstStyle/>
           <a:p>
-            <a:pPr indent="0" marL="0">
+            <a:pPr marL="0" indent="0">
               <a:buNone/>
             </a:pPr>
             <a:r>
@@ -20381,7 +20257,7 @@
           <a:bodyPr wrap="square" lIns="0" tIns="0" rIns="0" bIns="0" rtlCol="0" anchor="t"/>
           <a:lstStyle/>
           <a:p>
-            <a:pPr indent="0" marL="0">
+            <a:pPr marL="0" indent="0">
               <a:lnSpc>
                 <a:spcPts val="2100"/>
               </a:lnSpc>
@@ -20401,7 +20277,7 @@
             <a:endParaRPr lang="en-US" sz="1400" dirty="0"/>
           </a:p>
           <a:p>
-            <a:pPr indent="0" marL="0">
+            <a:pPr marL="0" indent="0">
               <a:lnSpc>
                 <a:spcPts val="2100"/>
               </a:lnSpc>
@@ -20443,7 +20319,7 @@
           <a:bodyPr wrap="square" lIns="0" tIns="0" rIns="0" bIns="0" rtlCol="0" anchor="ctr"/>
           <a:lstStyle/>
           <a:p>
-            <a:pPr indent="0" marL="0">
+            <a:pPr marL="0" indent="0">
               <a:buNone/>
             </a:pPr>
             <a:r>
@@ -20482,7 +20358,7 @@
           <a:bodyPr wrap="square" lIns="0" tIns="0" rIns="0" bIns="0" rtlCol="0" anchor="ctr"/>
           <a:lstStyle/>
           <a:p>
-            <a:pPr algn="r" indent="0" marL="0">
+            <a:pPr marL="0" indent="0" algn="r">
               <a:buNone/>
             </a:pPr>
             <a:r>
@@ -20516,6 +20392,7 @@
         <a:solidFill>
           <a:srgbClr val="10131A"/>
         </a:solidFill>
+        <a:effectLst/>
       </p:bgPr>
     </p:bg>
     <p:spTree>
@@ -20595,11 +20472,11 @@
           <a:bodyPr wrap="square" lIns="0" tIns="0" rIns="0" bIns="0" rtlCol="0" anchor="ctr"/>
           <a:lstStyle/>
           <a:p>
-            <a:pPr indent="0" marL="0">
-              <a:buNone/>
-            </a:pPr>
-            <a:r>
-              <a:rPr lang="en-US" sz="1200" b="1" spc="200" kern="0" dirty="0">
+            <a:pPr marL="0" indent="0">
+              <a:buNone/>
+            </a:pPr>
+            <a:r>
+              <a:rPr lang="en-US" sz="1200" b="1" kern="0" spc="200" dirty="0">
                 <a:solidFill>
                   <a:srgbClr val="8A93A6"/>
                 </a:solidFill>
@@ -20634,7 +20511,7 @@
           <a:bodyPr wrap="square" lIns="0" tIns="0" rIns="0" bIns="0" rtlCol="0" anchor="t"/>
           <a:lstStyle/>
           <a:p>
-            <a:pPr indent="0" marL="0">
+            <a:pPr marL="0" indent="0">
               <a:lnSpc>
                 <a:spcPts val="5200"/>
               </a:lnSpc>
@@ -20654,7 +20531,7 @@
             <a:endParaRPr lang="en-US" sz="3300" dirty="0"/>
           </a:p>
           <a:p>
-            <a:pPr indent="0" marL="0">
+            <a:pPr marL="0" indent="0">
               <a:lnSpc>
                 <a:spcPts val="5200"/>
               </a:lnSpc>
@@ -20674,7 +20551,7 @@
             <a:endParaRPr lang="en-US" sz="3300" dirty="0"/>
           </a:p>
           <a:p>
-            <a:pPr indent="0" marL="0">
+            <a:pPr marL="0" indent="0">
               <a:lnSpc>
                 <a:spcPts val="5200"/>
               </a:lnSpc>
@@ -20739,7 +20616,7 @@
           <a:bodyPr wrap="square" lIns="0" tIns="0" rIns="0" bIns="0" rtlCol="0" anchor="ctr"/>
           <a:lstStyle/>
           <a:p>
-            <a:pPr indent="0" marL="0">
+            <a:pPr marL="0" indent="0">
               <a:buNone/>
             </a:pPr>
             <a:r>
@@ -20778,7 +20655,7 @@
           <a:bodyPr wrap="square" lIns="0" tIns="0" rIns="0" bIns="0" rtlCol="0" anchor="ctr"/>
           <a:lstStyle/>
           <a:p>
-            <a:pPr indent="0" marL="0">
+            <a:pPr marL="0" indent="0">
               <a:buNone/>
             </a:pPr>
             <a:r>
@@ -20812,6 +20689,7 @@
         <a:solidFill>
           <a:srgbClr val="FFFFFF"/>
         </a:solidFill>
+        <a:effectLst/>
       </p:bgPr>
     </p:bg>
     <p:spTree>
@@ -20869,11 +20747,11 @@
           <a:bodyPr wrap="square" lIns="0" tIns="0" rIns="0" bIns="0" rtlCol="0" anchor="ctr"/>
           <a:lstStyle/>
           <a:p>
-            <a:pPr indent="0" marL="0">
-              <a:buNone/>
-            </a:pPr>
-            <a:r>
-              <a:rPr lang="en-US" sz="1200" b="1" spc="200" kern="0" dirty="0">
+            <a:pPr marL="0" indent="0">
+              <a:buNone/>
+            </a:pPr>
+            <a:r>
+              <a:rPr lang="en-US" sz="1200" b="1" kern="0" spc="200" dirty="0">
                 <a:solidFill>
                   <a:srgbClr val="6E7687"/>
                 </a:solidFill>
@@ -20908,7 +20786,7 @@
           <a:bodyPr wrap="square" lIns="0" tIns="0" rIns="0" bIns="0" rtlCol="0" anchor="ctr"/>
           <a:lstStyle/>
           <a:p>
-            <a:pPr indent="0" marL="0">
+            <a:pPr marL="0" indent="0">
               <a:buNone/>
             </a:pPr>
             <a:r>
@@ -20947,7 +20825,7 @@
           <a:bodyPr wrap="square" lIns="0" tIns="0" rIns="0" bIns="0" rtlCol="0" anchor="t"/>
           <a:lstStyle/>
           <a:p>
-            <a:pPr indent="0" marL="0">
+            <a:pPr marL="0" indent="0">
               <a:lnSpc>
                 <a:spcPts val="3200"/>
               </a:lnSpc>
@@ -21011,7 +20889,7 @@
           <a:bodyPr wrap="square" lIns="0" tIns="0" rIns="0" bIns="0" rtlCol="0" anchor="ctr"/>
           <a:lstStyle/>
           <a:p>
-            <a:pPr indent="0" marL="0">
+            <a:pPr marL="0" indent="0">
               <a:buNone/>
             </a:pPr>
             <a:r>
@@ -21050,7 +20928,7 @@
           <a:bodyPr wrap="square" lIns="0" tIns="0" rIns="0" bIns="0" rtlCol="0" anchor="t"/>
           <a:lstStyle/>
           <a:p>
-            <a:pPr indent="0" marL="0">
+            <a:pPr marL="0" indent="0">
               <a:lnSpc>
                 <a:spcPts val="1900"/>
               </a:lnSpc>
@@ -21114,7 +20992,7 @@
           <a:bodyPr wrap="square" lIns="0" tIns="0" rIns="0" bIns="0" rtlCol="0" anchor="ctr"/>
           <a:lstStyle/>
           <a:p>
-            <a:pPr indent="0" marL="0">
+            <a:pPr marL="0" indent="0">
               <a:buNone/>
             </a:pPr>
             <a:r>
@@ -21153,7 +21031,7 @@
           <a:bodyPr wrap="square" lIns="0" tIns="0" rIns="0" bIns="0" rtlCol="0" anchor="t"/>
           <a:lstStyle/>
           <a:p>
-            <a:pPr indent="0" marL="0">
+            <a:pPr marL="0" indent="0">
               <a:lnSpc>
                 <a:spcPts val="1900"/>
               </a:lnSpc>
@@ -21217,7 +21095,7 @@
           <a:bodyPr wrap="square" lIns="0" tIns="0" rIns="0" bIns="0" rtlCol="0" anchor="ctr"/>
           <a:lstStyle/>
           <a:p>
-            <a:pPr indent="0" marL="0">
+            <a:pPr marL="0" indent="0">
               <a:buNone/>
             </a:pPr>
             <a:r>
@@ -21256,7 +21134,7 @@
           <a:bodyPr wrap="square" lIns="0" tIns="0" rIns="0" bIns="0" rtlCol="0" anchor="t"/>
           <a:lstStyle/>
           <a:p>
-            <a:pPr indent="0" marL="0">
+            <a:pPr marL="0" indent="0">
               <a:lnSpc>
                 <a:spcPts val="1900"/>
               </a:lnSpc>
@@ -21320,7 +21198,7 @@
           <a:bodyPr wrap="square" lIns="0" tIns="0" rIns="0" bIns="0" rtlCol="0" anchor="ctr"/>
           <a:lstStyle/>
           <a:p>
-            <a:pPr indent="0" marL="0">
+            <a:pPr marL="0" indent="0">
               <a:buNone/>
             </a:pPr>
             <a:r>
@@ -21359,7 +21237,7 @@
           <a:bodyPr wrap="square" lIns="0" tIns="0" rIns="0" bIns="0" rtlCol="0" anchor="t"/>
           <a:lstStyle/>
           <a:p>
-            <a:pPr indent="0" marL="0">
+            <a:pPr marL="0" indent="0">
               <a:lnSpc>
                 <a:spcPts val="1900"/>
               </a:lnSpc>
@@ -21401,7 +21279,7 @@
           <a:bodyPr wrap="square" lIns="0" tIns="0" rIns="0" bIns="0" rtlCol="0" anchor="ctr"/>
           <a:lstStyle/>
           <a:p>
-            <a:pPr indent="0" marL="0">
+            <a:pPr marL="0" indent="0">
               <a:buNone/>
             </a:pPr>
             <a:r>
@@ -21440,7 +21318,7 @@
           <a:bodyPr wrap="square" lIns="0" tIns="0" rIns="0" bIns="0" rtlCol="0" anchor="ctr"/>
           <a:lstStyle/>
           <a:p>
-            <a:pPr algn="r" indent="0" marL="0">
+            <a:pPr marL="0" indent="0" algn="r">
               <a:buNone/>
             </a:pPr>
             <a:r>
@@ -21474,6 +21352,7 @@
         <a:solidFill>
           <a:srgbClr val="FFFFFF"/>
         </a:solidFill>
+        <a:effectLst/>
       </p:bgPr>
     </p:bg>
     <p:spTree>
@@ -21531,11 +21410,11 @@
           <a:bodyPr wrap="square" lIns="0" tIns="0" rIns="0" bIns="0" rtlCol="0" anchor="ctr"/>
           <a:lstStyle/>
           <a:p>
-            <a:pPr indent="0" marL="0">
-              <a:buNone/>
-            </a:pPr>
-            <a:r>
-              <a:rPr lang="en-US" sz="1200" b="1" spc="200" kern="0" dirty="0">
+            <a:pPr marL="0" indent="0">
+              <a:buNone/>
+            </a:pPr>
+            <a:r>
+              <a:rPr lang="en-US" sz="1200" b="1" kern="0" spc="200" dirty="0">
                 <a:solidFill>
                   <a:srgbClr val="6E7687"/>
                 </a:solidFill>
@@ -21570,7 +21449,7 @@
           <a:bodyPr wrap="square" lIns="0" tIns="0" rIns="0" bIns="0" rtlCol="0" anchor="ctr"/>
           <a:lstStyle/>
           <a:p>
-            <a:pPr indent="0" marL="0">
+            <a:pPr marL="0" indent="0">
               <a:buNone/>
             </a:pPr>
             <a:r>
@@ -21609,7 +21488,7 @@
           <a:bodyPr wrap="square" lIns="0" tIns="0" rIns="0" bIns="0" rtlCol="0" anchor="t"/>
           <a:lstStyle/>
           <a:p>
-            <a:pPr indent="0" marL="0">
+            <a:pPr marL="0" indent="0">
               <a:lnSpc>
                 <a:spcPts val="3200"/>
               </a:lnSpc>
@@ -21673,7 +21552,7 @@
           <a:bodyPr wrap="square" lIns="0" tIns="0" rIns="0" bIns="0" rtlCol="0" anchor="ctr"/>
           <a:lstStyle/>
           <a:p>
-            <a:pPr indent="0" marL="0">
+            <a:pPr marL="0" indent="0">
               <a:buNone/>
             </a:pPr>
             <a:r>
@@ -21712,7 +21591,7 @@
           <a:bodyPr wrap="square" lIns="0" tIns="0" rIns="0" bIns="0" rtlCol="0" anchor="ctr"/>
           <a:lstStyle/>
           <a:p>
-            <a:pPr indent="0" marL="0">
+            <a:pPr marL="0" indent="0">
               <a:buNone/>
             </a:pPr>
             <a:r>
@@ -21774,7 +21653,7 @@
           <a:bodyPr wrap="square" lIns="0" tIns="0" rIns="0" bIns="0" rtlCol="0" anchor="ctr"/>
           <a:lstStyle/>
           <a:p>
-            <a:pPr indent="0" marL="0">
+            <a:pPr marL="0" indent="0">
               <a:buNone/>
             </a:pPr>
             <a:r>
@@ -21835,7 +21714,7 @@
           <a:bodyPr wrap="square" lIns="0" tIns="0" rIns="0" bIns="0" rtlCol="0" anchor="ctr"/>
           <a:lstStyle/>
           <a:p>
-            <a:pPr indent="0" marL="0">
+            <a:pPr marL="0" indent="0">
               <a:buNone/>
             </a:pPr>
             <a:r>
@@ -21874,7 +21753,7 @@
           <a:bodyPr wrap="square" lIns="0" tIns="0" rIns="0" bIns="0" rtlCol="0" anchor="ctr"/>
           <a:lstStyle/>
           <a:p>
-            <a:pPr indent="0" marL="0">
+            <a:pPr marL="0" indent="0">
               <a:buNone/>
             </a:pPr>
             <a:r>
@@ -21936,7 +21815,7 @@
           <a:bodyPr wrap="square" lIns="0" tIns="0" rIns="0" bIns="0" rtlCol="0" anchor="ctr"/>
           <a:lstStyle/>
           <a:p>
-            <a:pPr indent="0" marL="0">
+            <a:pPr marL="0" indent="0">
               <a:buNone/>
             </a:pPr>
             <a:r>
@@ -21997,7 +21876,7 @@
           <a:bodyPr wrap="square" lIns="0" tIns="0" rIns="0" bIns="0" rtlCol="0" anchor="ctr"/>
           <a:lstStyle/>
           <a:p>
-            <a:pPr indent="0" marL="0">
+            <a:pPr marL="0" indent="0">
               <a:buNone/>
             </a:pPr>
             <a:r>
@@ -22036,7 +21915,7 @@
           <a:bodyPr wrap="square" lIns="0" tIns="0" rIns="0" bIns="0" rtlCol="0" anchor="ctr"/>
           <a:lstStyle/>
           <a:p>
-            <a:pPr indent="0" marL="0">
+            <a:pPr marL="0" indent="0">
               <a:buNone/>
             </a:pPr>
             <a:r>
@@ -22098,7 +21977,7 @@
           <a:bodyPr wrap="square" lIns="0" tIns="0" rIns="0" bIns="0" rtlCol="0" anchor="ctr"/>
           <a:lstStyle/>
           <a:p>
-            <a:pPr indent="0" marL="0">
+            <a:pPr marL="0" indent="0">
               <a:buNone/>
             </a:pPr>
             <a:r>
@@ -22137,7 +22016,7 @@
           <a:bodyPr wrap="square" lIns="0" tIns="0" rIns="0" bIns="0" rtlCol="0" anchor="ctr"/>
           <a:lstStyle/>
           <a:p>
-            <a:pPr algn="r" indent="0" marL="0">
+            <a:pPr marL="0" indent="0" algn="r">
               <a:buNone/>
             </a:pPr>
             <a:r>
@@ -22171,6 +22050,7 @@
         <a:solidFill>
           <a:srgbClr val="10131A"/>
         </a:solidFill>
+        <a:effectLst/>
       </p:bgPr>
     </p:bg>
     <p:spTree>
@@ -22228,11 +22108,11 @@
           <a:bodyPr wrap="square" lIns="0" tIns="0" rIns="0" bIns="0" rtlCol="0" anchor="ctr"/>
           <a:lstStyle/>
           <a:p>
-            <a:pPr indent="0" marL="0">
-              <a:buNone/>
-            </a:pPr>
-            <a:r>
-              <a:rPr lang="en-US" sz="1200" b="1" spc="200" kern="0" dirty="0">
+            <a:pPr marL="0" indent="0">
+              <a:buNone/>
+            </a:pPr>
+            <a:r>
+              <a:rPr lang="en-US" sz="1200" b="1" kern="0" spc="200" dirty="0">
                 <a:solidFill>
                   <a:srgbClr val="8A93A6"/>
                 </a:solidFill>
@@ -22267,7 +22147,7 @@
           <a:bodyPr wrap="square" lIns="0" tIns="0" rIns="0" bIns="0" rtlCol="0" anchor="ctr"/>
           <a:lstStyle/>
           <a:p>
-            <a:pPr indent="0" marL="0">
+            <a:pPr marL="0" indent="0">
               <a:buNone/>
             </a:pPr>
             <a:r>
@@ -22306,7 +22186,7 @@
           <a:bodyPr wrap="square" lIns="0" tIns="0" rIns="0" bIns="0" rtlCol="0" anchor="t"/>
           <a:lstStyle/>
           <a:p>
-            <a:pPr indent="0" marL="0">
+            <a:pPr marL="0" indent="0">
               <a:lnSpc>
                 <a:spcPts val="3200"/>
               </a:lnSpc>
@@ -22370,7 +22250,7 @@
           <a:bodyPr wrap="square" lIns="0" tIns="0" rIns="0" bIns="0" rtlCol="0" anchor="ctr"/>
           <a:lstStyle/>
           <a:p>
-            <a:pPr indent="0" marL="0">
+            <a:pPr marL="0" indent="0">
               <a:buNone/>
             </a:pPr>
             <a:r>
@@ -22409,7 +22289,7 @@
           <a:bodyPr wrap="square" lIns="0" tIns="0" rIns="0" bIns="0" rtlCol="0" anchor="ctr"/>
           <a:lstStyle/>
           <a:p>
-            <a:pPr indent="0" marL="0">
+            <a:pPr marL="0" indent="0">
               <a:buNone/>
             </a:pPr>
             <a:r>
@@ -22448,7 +22328,7 @@
           <a:bodyPr wrap="square" lIns="0" tIns="0" rIns="0" bIns="0" rtlCol="0" anchor="ctr"/>
           <a:lstStyle/>
           <a:p>
-            <a:pPr indent="0" marL="0">
+            <a:pPr marL="0" indent="0">
               <a:buNone/>
             </a:pPr>
             <a:r>
@@ -22487,7 +22367,7 @@
           <a:bodyPr wrap="square" lIns="0" tIns="0" rIns="0" bIns="0" rtlCol="0" anchor="ctr"/>
           <a:lstStyle/>
           <a:p>
-            <a:pPr algn="r" indent="0" marL="0">
+            <a:pPr marL="0" indent="0" algn="r">
               <a:buNone/>
             </a:pPr>
             <a:r>
@@ -22521,6 +22401,7 @@
         <a:solidFill>
           <a:srgbClr val="FFFFFF"/>
         </a:solidFill>
+        <a:effectLst/>
       </p:bgPr>
     </p:bg>
     <p:spTree>
@@ -22578,11 +22459,11 @@
           <a:bodyPr wrap="square" lIns="0" tIns="0" rIns="0" bIns="0" rtlCol="0" anchor="ctr"/>
           <a:lstStyle/>
           <a:p>
-            <a:pPr indent="0" marL="0">
-              <a:buNone/>
-            </a:pPr>
-            <a:r>
-              <a:rPr lang="en-US" sz="1200" b="1" spc="200" kern="0" dirty="0">
+            <a:pPr marL="0" indent="0">
+              <a:buNone/>
+            </a:pPr>
+            <a:r>
+              <a:rPr lang="en-US" sz="1200" b="1" kern="0" spc="200" dirty="0">
                 <a:solidFill>
                   <a:srgbClr val="6E7687"/>
                 </a:solidFill>
@@ -22617,7 +22498,7 @@
           <a:bodyPr wrap="square" lIns="0" tIns="0" rIns="0" bIns="0" rtlCol="0" anchor="ctr"/>
           <a:lstStyle/>
           <a:p>
-            <a:pPr indent="0" marL="0">
+            <a:pPr marL="0" indent="0">
               <a:buNone/>
             </a:pPr>
             <a:r>
@@ -22656,7 +22537,7 @@
           <a:bodyPr wrap="square" lIns="0" tIns="0" rIns="0" bIns="0" rtlCol="0" anchor="t"/>
           <a:lstStyle/>
           <a:p>
-            <a:pPr indent="0" marL="0">
+            <a:pPr marL="0" indent="0">
               <a:lnSpc>
                 <a:spcPts val="3200"/>
               </a:lnSpc>
@@ -22720,7 +22601,7 @@
           <a:bodyPr wrap="square" lIns="0" tIns="0" rIns="0" bIns="0" rtlCol="0" anchor="ctr"/>
           <a:lstStyle/>
           <a:p>
-            <a:pPr indent="0" marL="0">
+            <a:pPr marL="0" indent="0">
               <a:buNone/>
             </a:pPr>
             <a:r>
@@ -22759,7 +22640,7 @@
           <a:bodyPr wrap="square" lIns="0" tIns="0" rIns="0" bIns="0" rtlCol="0" anchor="ctr"/>
           <a:lstStyle/>
           <a:p>
-            <a:pPr indent="0" marL="0">
+            <a:pPr marL="0" indent="0">
               <a:buNone/>
             </a:pPr>
             <a:r>
@@ -22820,7 +22701,7 @@
           <a:bodyPr wrap="square" lIns="0" tIns="0" rIns="0" bIns="0" rtlCol="0" anchor="ctr"/>
           <a:lstStyle/>
           <a:p>
-            <a:pPr indent="0" marL="0">
+            <a:pPr marL="0" indent="0">
               <a:buNone/>
             </a:pPr>
             <a:r>
@@ -22859,7 +22740,7 @@
           <a:bodyPr wrap="square" lIns="0" tIns="0" rIns="0" bIns="0" rtlCol="0" anchor="ctr"/>
           <a:lstStyle/>
           <a:p>
-            <a:pPr indent="0" marL="0">
+            <a:pPr marL="0" indent="0">
               <a:buNone/>
             </a:pPr>
             <a:r>
@@ -22898,7 +22779,7 @@
           <a:bodyPr wrap="square" lIns="0" tIns="0" rIns="0" bIns="0" rtlCol="0" anchor="ctr"/>
           <a:lstStyle/>
           <a:p>
-            <a:pPr algn="r" indent="0" marL="0">
+            <a:pPr marL="0" indent="0" algn="r">
               <a:buNone/>
             </a:pPr>
             <a:r>
@@ -22932,6 +22813,7 @@
         <a:solidFill>
           <a:srgbClr val="10131A"/>
         </a:solidFill>
+        <a:effectLst/>
       </p:bgPr>
     </p:bg>
     <p:spTree>
@@ -22989,11 +22871,11 @@
           <a:bodyPr wrap="square" lIns="0" tIns="0" rIns="0" bIns="0" rtlCol="0" anchor="ctr"/>
           <a:lstStyle/>
           <a:p>
-            <a:pPr indent="0" marL="0">
-              <a:buNone/>
-            </a:pPr>
-            <a:r>
-              <a:rPr lang="en-US" sz="1200" b="1" spc="200" kern="0" dirty="0">
+            <a:pPr marL="0" indent="0">
+              <a:buNone/>
+            </a:pPr>
+            <a:r>
+              <a:rPr lang="en-US" sz="1200" b="1" kern="0" spc="200" dirty="0">
                 <a:solidFill>
                   <a:srgbClr val="8A93A6"/>
                 </a:solidFill>
@@ -23028,7 +22910,7 @@
           <a:bodyPr wrap="square" lIns="0" tIns="0" rIns="0" bIns="0" rtlCol="0" anchor="ctr"/>
           <a:lstStyle/>
           <a:p>
-            <a:pPr indent="0" marL="0">
+            <a:pPr marL="0" indent="0">
               <a:buNone/>
             </a:pPr>
             <a:r>
@@ -23067,7 +22949,7 @@
           <a:bodyPr wrap="square" lIns="0" tIns="0" rIns="0" bIns="0" rtlCol="0" anchor="t"/>
           <a:lstStyle/>
           <a:p>
-            <a:pPr indent="0" marL="0">
+            <a:pPr marL="0" indent="0">
               <a:lnSpc>
                 <a:spcPts val="3200"/>
               </a:lnSpc>
@@ -23131,7 +23013,7 @@
           <a:bodyPr wrap="square" lIns="0" tIns="0" rIns="0" bIns="0" rtlCol="0" anchor="t"/>
           <a:lstStyle/>
           <a:p>
-            <a:pPr indent="0" marL="0">
+            <a:pPr marL="0" indent="0">
               <a:lnSpc>
                 <a:spcPts val="1900"/>
               </a:lnSpc>
@@ -23151,7 +23033,7 @@
             <a:endParaRPr lang="en-US" sz="1250" dirty="0"/>
           </a:p>
           <a:p>
-            <a:pPr indent="0" marL="0">
+            <a:pPr marL="0" indent="0">
               <a:lnSpc>
                 <a:spcPts val="1900"/>
               </a:lnSpc>
@@ -23171,7 +23053,7 @@
             <a:endParaRPr lang="en-US" sz="1250" dirty="0"/>
           </a:p>
           <a:p>
-            <a:pPr indent="0" marL="0">
+            <a:pPr marL="0" indent="0">
               <a:lnSpc>
                 <a:spcPts val="1900"/>
               </a:lnSpc>
@@ -23191,7 +23073,7 @@
             <a:endParaRPr lang="en-US" sz="1250" dirty="0"/>
           </a:p>
           <a:p>
-            <a:pPr indent="0" marL="0">
+            <a:pPr marL="0" indent="0">
               <a:lnSpc>
                 <a:spcPts val="1900"/>
               </a:lnSpc>
@@ -23211,7 +23093,7 @@
             <a:endParaRPr lang="en-US" sz="1250" dirty="0"/>
           </a:p>
           <a:p>
-            <a:pPr indent="0" marL="0">
+            <a:pPr marL="0" indent="0">
               <a:lnSpc>
                 <a:spcPts val="1900"/>
               </a:lnSpc>
@@ -23231,7 +23113,7 @@
             <a:endParaRPr lang="en-US" sz="1250" dirty="0"/>
           </a:p>
           <a:p>
-            <a:pPr indent="0" marL="0">
+            <a:pPr marL="0" indent="0">
               <a:lnSpc>
                 <a:spcPts val="1900"/>
               </a:lnSpc>
@@ -23251,7 +23133,7 @@
             <a:endParaRPr lang="en-US" sz="1250" dirty="0"/>
           </a:p>
           <a:p>
-            <a:pPr indent="0" marL="0">
+            <a:pPr marL="0" indent="0">
               <a:lnSpc>
                 <a:spcPts val="1900"/>
               </a:lnSpc>
@@ -23315,7 +23197,7 @@
           <a:bodyPr wrap="square" lIns="0" tIns="0" rIns="0" bIns="0" rtlCol="0" anchor="t"/>
           <a:lstStyle/>
           <a:p>
-            <a:pPr indent="0" marL="0">
+            <a:pPr marL="0" indent="0">
               <a:lnSpc>
                 <a:spcPts val="1900"/>
               </a:lnSpc>
@@ -23335,7 +23217,7 @@
             <a:endParaRPr lang="en-US" sz="1250" dirty="0"/>
           </a:p>
           <a:p>
-            <a:pPr indent="0" marL="0">
+            <a:pPr marL="0" indent="0">
               <a:lnSpc>
                 <a:spcPts val="1900"/>
               </a:lnSpc>
@@ -23355,7 +23237,7 @@
             <a:endParaRPr lang="en-US" sz="1250" dirty="0"/>
           </a:p>
           <a:p>
-            <a:pPr indent="0" marL="0">
+            <a:pPr marL="0" indent="0">
               <a:lnSpc>
                 <a:spcPts val="1900"/>
               </a:lnSpc>
@@ -23375,7 +23257,7 @@
             <a:endParaRPr lang="en-US" sz="1250" dirty="0"/>
           </a:p>
           <a:p>
-            <a:pPr indent="0" marL="0">
+            <a:pPr marL="0" indent="0">
               <a:lnSpc>
                 <a:spcPts val="1900"/>
               </a:lnSpc>
@@ -23395,7 +23277,7 @@
             <a:endParaRPr lang="en-US" sz="1250" dirty="0"/>
           </a:p>
           <a:p>
-            <a:pPr indent="0" marL="0">
+            <a:pPr marL="0" indent="0">
               <a:lnSpc>
                 <a:spcPts val="1900"/>
               </a:lnSpc>
@@ -23404,7 +23286,7 @@
             <a:endParaRPr lang="en-US" sz="1250" dirty="0"/>
           </a:p>
           <a:p>
-            <a:pPr indent="0" marL="0">
+            <a:pPr marL="0" indent="0">
               <a:lnSpc>
                 <a:spcPts val="1900"/>
               </a:lnSpc>
@@ -23424,7 +23306,7 @@
             <a:endParaRPr lang="en-US" sz="1250" dirty="0"/>
           </a:p>
           <a:p>
-            <a:pPr indent="0" marL="0">
+            <a:pPr marL="0" indent="0">
               <a:lnSpc>
                 <a:spcPts val="1900"/>
               </a:lnSpc>
@@ -23444,7 +23326,7 @@
             <a:endParaRPr lang="en-US" sz="1250" dirty="0"/>
           </a:p>
           <a:p>
-            <a:pPr indent="0" marL="0">
+            <a:pPr marL="0" indent="0">
               <a:lnSpc>
                 <a:spcPts val="1900"/>
               </a:lnSpc>
@@ -23486,7 +23368,7 @@
           <a:bodyPr wrap="square" lIns="0" tIns="0" rIns="0" bIns="0" rtlCol="0" anchor="ctr"/>
           <a:lstStyle/>
           <a:p>
-            <a:pPr algn="r" indent="0" marL="0">
+            <a:pPr marL="0" indent="0" algn="r">
               <a:buNone/>
             </a:pPr>
             <a:r>
@@ -23520,6 +23402,7 @@
         <a:solidFill>
           <a:srgbClr val="FFFFFF"/>
         </a:solidFill>
+        <a:effectLst/>
       </p:bgPr>
     </p:bg>
     <p:spTree>
@@ -23577,11 +23460,11 @@
           <a:bodyPr wrap="square" lIns="0" tIns="0" rIns="0" bIns="0" rtlCol="0" anchor="ctr"/>
           <a:lstStyle/>
           <a:p>
-            <a:pPr indent="0" marL="0">
-              <a:buNone/>
-            </a:pPr>
-            <a:r>
-              <a:rPr lang="en-US" sz="1200" b="1" spc="200" kern="0" dirty="0">
+            <a:pPr marL="0" indent="0">
+              <a:buNone/>
+            </a:pPr>
+            <a:r>
+              <a:rPr lang="en-US" sz="1200" b="1" kern="0" spc="200" dirty="0">
                 <a:solidFill>
                   <a:srgbClr val="6E7687"/>
                 </a:solidFill>
@@ -23616,7 +23499,7 @@
           <a:bodyPr wrap="square" lIns="0" tIns="0" rIns="0" bIns="0" rtlCol="0" anchor="ctr"/>
           <a:lstStyle/>
           <a:p>
-            <a:pPr indent="0" marL="0">
+            <a:pPr marL="0" indent="0">
               <a:buNone/>
             </a:pPr>
             <a:r>
@@ -23655,7 +23538,7 @@
           <a:bodyPr wrap="square" lIns="0" tIns="0" rIns="0" bIns="0" rtlCol="0" anchor="t"/>
           <a:lstStyle/>
           <a:p>
-            <a:pPr indent="0" marL="0">
+            <a:pPr marL="0" indent="0">
               <a:lnSpc>
                 <a:spcPts val="3200"/>
               </a:lnSpc>
@@ -23739,7 +23622,7 @@
           <a:bodyPr wrap="square" lIns="0" tIns="0" rIns="0" bIns="0" rtlCol="0" anchor="ctr"/>
           <a:lstStyle/>
           <a:p>
-            <a:pPr indent="0" marL="0">
+            <a:pPr marL="0" indent="0">
               <a:buNone/>
             </a:pPr>
             <a:r>
@@ -23778,7 +23661,7 @@
           <a:bodyPr wrap="square" lIns="0" tIns="0" rIns="0" bIns="0" rtlCol="0" anchor="ctr"/>
           <a:lstStyle/>
           <a:p>
-            <a:pPr indent="0" marL="0">
+            <a:pPr marL="0" indent="0">
               <a:buNone/>
             </a:pPr>
             <a:r>
@@ -23859,7 +23742,7 @@
           <a:bodyPr wrap="square" lIns="0" tIns="0" rIns="0" bIns="0" rtlCol="0" anchor="ctr"/>
           <a:lstStyle/>
           <a:p>
-            <a:pPr indent="0" marL="0">
+            <a:pPr marL="0" indent="0">
               <a:buNone/>
             </a:pPr>
             <a:r>
@@ -23898,7 +23781,7 @@
           <a:bodyPr wrap="square" lIns="0" tIns="0" rIns="0" bIns="0" rtlCol="0" anchor="ctr"/>
           <a:lstStyle/>
           <a:p>
-            <a:pPr indent="0" marL="0">
+            <a:pPr marL="0" indent="0">
               <a:buNone/>
             </a:pPr>
             <a:r>
@@ -23979,7 +23862,7 @@
           <a:bodyPr wrap="square" lIns="0" tIns="0" rIns="0" bIns="0" rtlCol="0" anchor="ctr"/>
           <a:lstStyle/>
           <a:p>
-            <a:pPr indent="0" marL="0">
+            <a:pPr marL="0" indent="0">
               <a:buNone/>
             </a:pPr>
             <a:r>
@@ -24018,7 +23901,7 @@
           <a:bodyPr wrap="square" lIns="0" tIns="0" rIns="0" bIns="0" rtlCol="0" anchor="ctr"/>
           <a:lstStyle/>
           <a:p>
-            <a:pPr indent="0" marL="0">
+            <a:pPr marL="0" indent="0">
               <a:buNone/>
             </a:pPr>
             <a:r>
@@ -24099,7 +23982,7 @@
           <a:bodyPr wrap="square" lIns="0" tIns="0" rIns="0" bIns="0" rtlCol="0" anchor="ctr"/>
           <a:lstStyle/>
           <a:p>
-            <a:pPr indent="0" marL="0">
+            <a:pPr marL="0" indent="0">
               <a:buNone/>
             </a:pPr>
             <a:r>
@@ -24138,7 +24021,7 @@
           <a:bodyPr wrap="square" lIns="0" tIns="0" rIns="0" bIns="0" rtlCol="0" anchor="ctr"/>
           <a:lstStyle/>
           <a:p>
-            <a:pPr indent="0" marL="0">
+            <a:pPr marL="0" indent="0">
               <a:buNone/>
             </a:pPr>
             <a:r>
@@ -24177,7 +24060,7 @@
           <a:bodyPr wrap="square" lIns="0" tIns="0" rIns="0" bIns="0" rtlCol="0" anchor="ctr"/>
           <a:lstStyle/>
           <a:p>
-            <a:pPr algn="r" indent="0" marL="0">
+            <a:pPr marL="0" indent="0" algn="r">
               <a:buNone/>
             </a:pPr>
             <a:r>
@@ -24211,6 +24094,7 @@
         <a:solidFill>
           <a:srgbClr val="10131A"/>
         </a:solidFill>
+        <a:effectLst/>
       </p:bgPr>
     </p:bg>
     <p:spTree>
@@ -24268,11 +24152,11 @@
           <a:bodyPr wrap="square" lIns="0" tIns="0" rIns="0" bIns="0" rtlCol="0" anchor="ctr"/>
           <a:lstStyle/>
           <a:p>
-            <a:pPr indent="0" marL="0">
-              <a:buNone/>
-            </a:pPr>
-            <a:r>
-              <a:rPr lang="en-US" sz="1200" b="1" spc="200" kern="0" dirty="0">
+            <a:pPr marL="0" indent="0">
+              <a:buNone/>
+            </a:pPr>
+            <a:r>
+              <a:rPr lang="en-US" sz="1200" b="1" kern="0" spc="200" dirty="0">
                 <a:solidFill>
                   <a:srgbClr val="8A93A6"/>
                 </a:solidFill>
@@ -24307,7 +24191,7 @@
           <a:bodyPr wrap="square" lIns="0" tIns="0" rIns="0" bIns="0" rtlCol="0" anchor="ctr"/>
           <a:lstStyle/>
           <a:p>
-            <a:pPr indent="0" marL="0">
+            <a:pPr marL="0" indent="0">
               <a:buNone/>
             </a:pPr>
             <a:r>
@@ -24346,7 +24230,7 @@
           <a:bodyPr wrap="square" lIns="0" tIns="0" rIns="0" bIns="0" rtlCol="0" anchor="t"/>
           <a:lstStyle/>
           <a:p>
-            <a:pPr indent="0" marL="0">
+            <a:pPr marL="0" indent="0">
               <a:lnSpc>
                 <a:spcPts val="3200"/>
               </a:lnSpc>
@@ -24410,7 +24294,7 @@
           <a:bodyPr wrap="square" lIns="0" tIns="0" rIns="0" bIns="0" rtlCol="0" anchor="ctr"/>
           <a:lstStyle/>
           <a:p>
-            <a:pPr algn="ctr" indent="0" marL="0">
+            <a:pPr marL="0" indent="0" algn="ctr">
               <a:buNone/>
             </a:pPr>
             <a:r>
@@ -24449,7 +24333,7 @@
           <a:bodyPr wrap="square" lIns="0" tIns="0" rIns="0" bIns="0" rtlCol="0" anchor="ctr"/>
           <a:lstStyle/>
           <a:p>
-            <a:pPr algn="ctr" indent="0" marL="0">
+            <a:pPr marL="0" indent="0" algn="ctr">
               <a:buNone/>
             </a:pPr>
             <a:r>
@@ -24510,7 +24394,7 @@
           <a:bodyPr wrap="square" lIns="0" tIns="0" rIns="0" bIns="0" rtlCol="0" anchor="ctr"/>
           <a:lstStyle/>
           <a:p>
-            <a:pPr algn="ctr" indent="0" marL="0">
+            <a:pPr marL="0" indent="0" algn="ctr">
               <a:buNone/>
             </a:pPr>
             <a:r>
@@ -24549,7 +24433,7 @@
           <a:bodyPr wrap="square" lIns="0" tIns="0" rIns="0" bIns="0" rtlCol="0" anchor="ctr"/>
           <a:lstStyle/>
           <a:p>
-            <a:pPr algn="ctr" indent="0" marL="0">
+            <a:pPr marL="0" indent="0" algn="ctr">
               <a:buNone/>
             </a:pPr>
             <a:r>
@@ -24610,7 +24494,7 @@
           <a:bodyPr wrap="square" lIns="0" tIns="0" rIns="0" bIns="0" rtlCol="0" anchor="ctr"/>
           <a:lstStyle/>
           <a:p>
-            <a:pPr algn="ctr" indent="0" marL="0">
+            <a:pPr marL="0" indent="0" algn="ctr">
               <a:buNone/>
             </a:pPr>
             <a:r>
@@ -24649,7 +24533,7 @@
           <a:bodyPr wrap="square" lIns="0" tIns="0" rIns="0" bIns="0" rtlCol="0" anchor="ctr"/>
           <a:lstStyle/>
           <a:p>
-            <a:pPr algn="ctr" indent="0" marL="0">
+            <a:pPr marL="0" indent="0" algn="ctr">
               <a:buNone/>
             </a:pPr>
             <a:r>
@@ -24710,7 +24594,7 @@
           <a:bodyPr wrap="square" lIns="0" tIns="0" rIns="0" bIns="0" rtlCol="0" anchor="ctr"/>
           <a:lstStyle/>
           <a:p>
-            <a:pPr algn="ctr" indent="0" marL="0">
+            <a:pPr marL="0" indent="0" algn="ctr">
               <a:buNone/>
             </a:pPr>
             <a:r>
@@ -24749,7 +24633,7 @@
           <a:bodyPr wrap="square" lIns="0" tIns="0" rIns="0" bIns="0" rtlCol="0" anchor="ctr"/>
           <a:lstStyle/>
           <a:p>
-            <a:pPr algn="ctr" indent="0" marL="0">
+            <a:pPr marL="0" indent="0" algn="ctr">
               <a:buNone/>
             </a:pPr>
             <a:r>
@@ -24810,7 +24694,7 @@
           <a:bodyPr wrap="square" lIns="0" tIns="0" rIns="0" bIns="0" rtlCol="0" anchor="ctr"/>
           <a:lstStyle/>
           <a:p>
-            <a:pPr algn="ctr" indent="0" marL="0">
+            <a:pPr marL="0" indent="0" algn="ctr">
               <a:buNone/>
             </a:pPr>
             <a:r>
@@ -24849,7 +24733,7 @@
           <a:bodyPr wrap="square" lIns="0" tIns="0" rIns="0" bIns="0" rtlCol="0" anchor="ctr"/>
           <a:lstStyle/>
           <a:p>
-            <a:pPr algn="ctr" indent="0" marL="0">
+            <a:pPr marL="0" indent="0" algn="ctr">
               <a:buNone/>
             </a:pPr>
             <a:r>
@@ -24910,7 +24794,7 @@
           <a:bodyPr wrap="square" lIns="0" tIns="0" rIns="0" bIns="0" rtlCol="0" anchor="ctr"/>
           <a:lstStyle/>
           <a:p>
-            <a:pPr algn="ctr" indent="0" marL="0">
+            <a:pPr marL="0" indent="0" algn="ctr">
               <a:buNone/>
             </a:pPr>
             <a:r>
@@ -24971,7 +24855,7 @@
           <a:bodyPr wrap="square" lIns="0" tIns="0" rIns="0" bIns="0" rtlCol="0" anchor="ctr"/>
           <a:lstStyle/>
           <a:p>
-            <a:pPr indent="0" marL="0">
+            <a:pPr marL="0" indent="0">
               <a:buNone/>
             </a:pPr>
             <a:r>
@@ -25010,7 +24894,7 @@
           <a:bodyPr wrap="square" lIns="0" tIns="0" rIns="0" bIns="0" rtlCol="0" anchor="ctr"/>
           <a:lstStyle/>
           <a:p>
-            <a:pPr indent="0" marL="0">
+            <a:pPr marL="0" indent="0">
               <a:buNone/>
             </a:pPr>
             <a:r>
@@ -25071,7 +24955,7 @@
           <a:bodyPr wrap="square" lIns="0" tIns="0" rIns="0" bIns="0" rtlCol="0" anchor="ctr"/>
           <a:lstStyle/>
           <a:p>
-            <a:pPr indent="0" marL="0">
+            <a:pPr marL="0" indent="0">
               <a:buNone/>
             </a:pPr>
             <a:r>
@@ -25110,7 +24994,7 @@
           <a:bodyPr wrap="square" lIns="0" tIns="0" rIns="0" bIns="0" rtlCol="0" anchor="ctr"/>
           <a:lstStyle/>
           <a:p>
-            <a:pPr indent="0" marL="0">
+            <a:pPr marL="0" indent="0">
               <a:buNone/>
             </a:pPr>
             <a:r>
@@ -25149,7 +25033,7 @@
           <a:bodyPr wrap="square" lIns="0" tIns="0" rIns="0" bIns="0" rtlCol="0" anchor="ctr"/>
           <a:lstStyle/>
           <a:p>
-            <a:pPr algn="r" indent="0" marL="0">
+            <a:pPr marL="0" indent="0" algn="r">
               <a:buNone/>
             </a:pPr>
             <a:r>
@@ -25468,4 +25352,299 @@
     </a:ext>
   </a:extLst>
 </a:theme>
+</file>
+
+<file path=ppt/theme/theme2.xml><?xml version="1.0" encoding="utf-8"?>
+<a:theme xmlns:a="http://schemas.openxmlformats.org/drawingml/2006/main" name="Office 佈景主題">
+  <a:themeElements>
+    <a:clrScheme name="Office">
+      <a:dk1>
+        <a:sysClr val="windowText" lastClr="000000"/>
+      </a:dk1>
+      <a:lt1>
+        <a:sysClr val="window" lastClr="FFFFFF"/>
+      </a:lt1>
+      <a:dk2>
+        <a:srgbClr val="44546A"/>
+      </a:dk2>
+      <a:lt2>
+        <a:srgbClr val="E7E6E6"/>
+      </a:lt2>
+      <a:accent1>
+        <a:srgbClr val="4472C4"/>
+      </a:accent1>
+      <a:accent2>
+        <a:srgbClr val="ED7D31"/>
+      </a:accent2>
+      <a:accent3>
+        <a:srgbClr val="A5A5A5"/>
+      </a:accent3>
+      <a:accent4>
+        <a:srgbClr val="FFC000"/>
+      </a:accent4>
+      <a:accent5>
+        <a:srgbClr val="5B9BD5"/>
+      </a:accent5>
+      <a:accent6>
+        <a:srgbClr val="70AD47"/>
+      </a:accent6>
+      <a:hlink>
+        <a:srgbClr val="0563C1"/>
+      </a:hlink>
+      <a:folHlink>
+        <a:srgbClr val="954F72"/>
+      </a:folHlink>
+    </a:clrScheme>
+    <a:fontScheme name="Office">
+      <a:majorFont>
+        <a:latin typeface="Calibri Light" panose="020F0302020204030204"/>
+        <a:ea typeface=""/>
+        <a:cs typeface=""/>
+        <a:font script="Jpan" typeface="游ゴシック Light"/>
+        <a:font script="Hang" typeface="맑은 고딕"/>
+        <a:font script="Hans" typeface="等线 Light"/>
+        <a:font script="Hant" typeface="新細明體"/>
+        <a:font script="Arab" typeface="Times New Roman"/>
+        <a:font script="Hebr" typeface="Times New Roman"/>
+        <a:font script="Thai" typeface="Angsana New"/>
+        <a:font script="Ethi" typeface="Nyala"/>
+        <a:font script="Beng" typeface="Vrinda"/>
+        <a:font script="Gujr" typeface="Shruti"/>
+        <a:font script="Khmr" typeface="MoolBoran"/>
+        <a:font script="Knda" typeface="Tunga"/>
+        <a:font script="Guru" typeface="Raavi"/>
+        <a:font script="Cans" typeface="Euphemia"/>
+        <a:font script="Cher" typeface="Plantagenet Cherokee"/>
+        <a:font script="Yiii" typeface="Microsoft Yi Baiti"/>
+        <a:font script="Tibt" typeface="Microsoft Himalaya"/>
+        <a:font script="Thaa" typeface="MV Boli"/>
+        <a:font script="Deva" typeface="Mangal"/>
+        <a:font script="Telu" typeface="Gautami"/>
+        <a:font script="Taml" typeface="Latha"/>
+        <a:font script="Syrc" typeface="Estrangelo Edessa"/>
+        <a:font script="Orya" typeface="Kalinga"/>
+        <a:font script="Mlym" typeface="Kartika"/>
+        <a:font script="Laoo" typeface="DokChampa"/>
+        <a:font script="Sinh" typeface="Iskoola Pota"/>
+        <a:font script="Mong" typeface="Mongolian Baiti"/>
+        <a:font script="Viet" typeface="Times New Roman"/>
+        <a:font script="Uigh" typeface="Microsoft Uighur"/>
+        <a:font script="Geor" typeface="Sylfaen"/>
+        <a:font script="Armn" typeface="Arial"/>
+        <a:font script="Bugi" typeface="Leelawadee UI"/>
+        <a:font script="Bopo" typeface="Microsoft JhengHei"/>
+        <a:font script="Java" typeface="Javanese Text"/>
+        <a:font script="Lisu" typeface="Segoe UI"/>
+        <a:font script="Mymr" typeface="Myanmar Text"/>
+        <a:font script="Nkoo" typeface="Ebrima"/>
+        <a:font script="Olck" typeface="Nirmala UI"/>
+        <a:font script="Osma" typeface="Ebrima"/>
+        <a:font script="Phag" typeface="Phagspa"/>
+        <a:font script="Syrn" typeface="Estrangelo Edessa"/>
+        <a:font script="Syrj" typeface="Estrangelo Edessa"/>
+        <a:font script="Syre" typeface="Estrangelo Edessa"/>
+        <a:font script="Sora" typeface="Nirmala UI"/>
+        <a:font script="Tale" typeface="Microsoft Tai Le"/>
+        <a:font script="Talu" typeface="Microsoft New Tai Lue"/>
+        <a:font script="Tfng" typeface="Ebrima"/>
+      </a:majorFont>
+      <a:minorFont>
+        <a:latin typeface="Calibri" panose="020F0502020204030204"/>
+        <a:ea typeface=""/>
+        <a:cs typeface=""/>
+        <a:font script="Jpan" typeface="游ゴシック"/>
+        <a:font script="Hang" typeface="맑은 고딕"/>
+        <a:font script="Hans" typeface="等线"/>
+        <a:font script="Hant" typeface="新細明體"/>
+        <a:font script="Arab" typeface="Arial"/>
+        <a:font script="Hebr" typeface="Arial"/>
+        <a:font script="Thai" typeface="Cordia New"/>
+        <a:font script="Ethi" typeface="Nyala"/>
+        <a:font script="Beng" typeface="Vrinda"/>
+        <a:font script="Gujr" typeface="Shruti"/>
+        <a:font script="Khmr" typeface="DaunPenh"/>
+        <a:font script="Knda" typeface="Tunga"/>
+        <a:font script="Guru" typeface="Raavi"/>
+        <a:font script="Cans" typeface="Euphemia"/>
+        <a:font script="Cher" typeface="Plantagenet Cherokee"/>
+        <a:font script="Yiii" typeface="Microsoft Yi Baiti"/>
+        <a:font script="Tibt" typeface="Microsoft Himalaya"/>
+        <a:font script="Thaa" typeface="MV Boli"/>
+        <a:font script="Deva" typeface="Mangal"/>
+        <a:font script="Telu" typeface="Gautami"/>
+        <a:font script="Taml" typeface="Latha"/>
+        <a:font script="Syrc" typeface="Estrangelo Edessa"/>
+        <a:font script="Orya" typeface="Kalinga"/>
+        <a:font script="Mlym" typeface="Kartika"/>
+        <a:font script="Laoo" typeface="DokChampa"/>
+        <a:font script="Sinh" typeface="Iskoola Pota"/>
+        <a:font script="Mong" typeface="Mongolian Baiti"/>
+        <a:font script="Viet" typeface="Arial"/>
+        <a:font script="Uigh" typeface="Microsoft Uighur"/>
+        <a:font script="Geor" typeface="Sylfaen"/>
+        <a:font script="Armn" typeface="Arial"/>
+        <a:font script="Bugi" typeface="Leelawadee UI"/>
+        <a:font script="Bopo" typeface="Microsoft JhengHei"/>
+        <a:font script="Java" typeface="Javanese Text"/>
+        <a:font script="Lisu" typeface="Segoe UI"/>
+        <a:font script="Mymr" typeface="Myanmar Text"/>
+        <a:font script="Nkoo" typeface="Ebrima"/>
+        <a:font script="Olck" typeface="Nirmala UI"/>
+        <a:font script="Osma" typeface="Ebrima"/>
+        <a:font script="Phag" typeface="Phagspa"/>
+        <a:font script="Syrn" typeface="Estrangelo Edessa"/>
+        <a:font script="Syrj" typeface="Estrangelo Edessa"/>
+        <a:font script="Syre" typeface="Estrangelo Edessa"/>
+        <a:font script="Sora" typeface="Nirmala UI"/>
+        <a:font script="Tale" typeface="Microsoft Tai Le"/>
+        <a:font script="Talu" typeface="Microsoft New Tai Lue"/>
+        <a:font script="Tfng" typeface="Ebrima"/>
+      </a:minorFont>
+    </a:fontScheme>
+    <a:fmtScheme name="Office">
+      <a:fillStyleLst>
+        <a:solidFill>
+          <a:schemeClr val="phClr"/>
+        </a:solidFill>
+        <a:gradFill rotWithShape="1">
+          <a:gsLst>
+            <a:gs pos="0">
+              <a:schemeClr val="phClr">
+                <a:lumMod val="110000"/>
+                <a:satMod val="105000"/>
+                <a:tint val="67000"/>
+              </a:schemeClr>
+            </a:gs>
+            <a:gs pos="50000">
+              <a:schemeClr val="phClr">
+                <a:lumMod val="105000"/>
+                <a:satMod val="103000"/>
+                <a:tint val="73000"/>
+              </a:schemeClr>
+            </a:gs>
+            <a:gs pos="100000">
+              <a:schemeClr val="phClr">
+                <a:lumMod val="105000"/>
+                <a:satMod val="109000"/>
+                <a:tint val="81000"/>
+              </a:schemeClr>
+            </a:gs>
+          </a:gsLst>
+          <a:lin ang="5400000" scaled="0"/>
+        </a:gradFill>
+        <a:gradFill rotWithShape="1">
+          <a:gsLst>
+            <a:gs pos="0">
+              <a:schemeClr val="phClr">
+                <a:satMod val="103000"/>
+                <a:lumMod val="102000"/>
+                <a:tint val="94000"/>
+              </a:schemeClr>
+            </a:gs>
+            <a:gs pos="50000">
+              <a:schemeClr val="phClr">
+                <a:satMod val="110000"/>
+                <a:lumMod val="100000"/>
+                <a:shade val="100000"/>
+              </a:schemeClr>
+            </a:gs>
+            <a:gs pos="100000">
+              <a:schemeClr val="phClr">
+                <a:lumMod val="99000"/>
+                <a:satMod val="120000"/>
+                <a:shade val="78000"/>
+              </a:schemeClr>
+            </a:gs>
+          </a:gsLst>
+          <a:lin ang="5400000" scaled="0"/>
+        </a:gradFill>
+      </a:fillStyleLst>
+      <a:lnStyleLst>
+        <a:ln w="6350" cap="flat" cmpd="sng" algn="ctr">
+          <a:solidFill>
+            <a:schemeClr val="phClr"/>
+          </a:solidFill>
+          <a:prstDash val="solid"/>
+          <a:miter lim="800000"/>
+        </a:ln>
+        <a:ln w="12700" cap="flat" cmpd="sng" algn="ctr">
+          <a:solidFill>
+            <a:schemeClr val="phClr"/>
+          </a:solidFill>
+          <a:prstDash val="solid"/>
+          <a:miter lim="800000"/>
+        </a:ln>
+        <a:ln w="19050" cap="flat" cmpd="sng" algn="ctr">
+          <a:solidFill>
+            <a:schemeClr val="phClr"/>
+          </a:solidFill>
+          <a:prstDash val="solid"/>
+          <a:miter lim="800000"/>
+        </a:ln>
+      </a:lnStyleLst>
+      <a:effectStyleLst>
+        <a:effectStyle>
+          <a:effectLst/>
+        </a:effectStyle>
+        <a:effectStyle>
+          <a:effectLst/>
+        </a:effectStyle>
+        <a:effectStyle>
+          <a:effectLst>
+            <a:outerShdw blurRad="57150" dist="19050" dir="5400000" algn="ctr" rotWithShape="0">
+              <a:srgbClr val="000000">
+                <a:alpha val="63000"/>
+              </a:srgbClr>
+            </a:outerShdw>
+          </a:effectLst>
+        </a:effectStyle>
+      </a:effectStyleLst>
+      <a:bgFillStyleLst>
+        <a:solidFill>
+          <a:schemeClr val="phClr"/>
+        </a:solidFill>
+        <a:solidFill>
+          <a:schemeClr val="phClr">
+            <a:tint val="95000"/>
+            <a:satMod val="170000"/>
+          </a:schemeClr>
+        </a:solidFill>
+        <a:gradFill rotWithShape="1">
+          <a:gsLst>
+            <a:gs pos="0">
+              <a:schemeClr val="phClr">
+                <a:tint val="93000"/>
+                <a:satMod val="150000"/>
+                <a:shade val="98000"/>
+                <a:lumMod val="102000"/>
+              </a:schemeClr>
+            </a:gs>
+            <a:gs pos="50000">
+              <a:schemeClr val="phClr">
+                <a:tint val="98000"/>
+                <a:satMod val="130000"/>
+                <a:shade val="90000"/>
+                <a:lumMod val="103000"/>
+              </a:schemeClr>
+            </a:gs>
+            <a:gs pos="100000">
+              <a:schemeClr val="phClr">
+                <a:shade val="63000"/>
+                <a:satMod val="120000"/>
+              </a:schemeClr>
+            </a:gs>
+          </a:gsLst>
+          <a:lin ang="5400000" scaled="0"/>
+        </a:gradFill>
+      </a:bgFillStyleLst>
+    </a:fmtScheme>
+  </a:themeElements>
+  <a:objectDefaults/>
+  <a:extraClrSchemeLst/>
+  <a:extLst>
+    <a:ext uri="{05A4C25C-085E-4340-85A3-A5531E510DB2}">
+      <thm15:themeFamily xmlns:thm15="http://schemas.microsoft.com/office/thememl/2012/main" name="Office Theme" id="{62F939B6-93AF-4DB8-9C6B-D6C7DFDC589F}" vid="{4A3C46E8-61CC-4603-A589-7422A47A8E4A}"/>
+    </a:ext>
+  </a:extLst>
+</a:theme>
 </file>
--- a/docs/Fitness-MCP-Product-Vision.pptx
+++ b/docs/Fitness-MCP-Product-Vision.pptx
@@ -9388,7 +9388,7 @@
                 <a:ea typeface="Microsoft JhengHei" pitchFamily="34" charset="-122"/>
                 <a:cs typeface="Microsoft JhengHei" pitchFamily="34" charset="-120"/>
               </a:rPr>
-              <a:t>統一單位與時間軸,但廠商自己算好的 readiness 不重算 —— 裝置在手腕上。</a:t>
+              <a:t>統一單位與時間軸,廠商算好的分數不重算;每筆讀數還帶著是哪台裝置寫的。</a:t>
             </a:r>
             <a:endParaRPr lang="en-US" sz="2000" dirty="0"/>
           </a:p>
@@ -20106,7 +20106,7 @@
                 <a:ea typeface="Microsoft JhengHei" pitchFamily="34" charset="-122"/>
                 <a:cs typeface="Microsoft JhengHei" pitchFamily="34" charset="-120"/>
               </a:rPr>
-              <a:t>Apple Health／Garmin／Strava</a:t>
+              <a:t>Apple Health／Garmin／Google／Strava</a:t>
             </a:r>
             <a:endParaRPr lang="en-US" sz="1050" dirty="0"/>
           </a:p>
@@ -20168,7 +20168,7 @@
                 <a:ea typeface="Microsoft JhengHei" pitchFamily="34" charset="-122"/>
                 <a:cs typeface="Microsoft JhengHei" pitchFamily="34" charset="-120"/>
               </a:rPr>
-              <a:t>現況  3 家 parser,registry 6 家</a:t>
+              <a:t>現況  4 家 parser,registry 6 家</a:t>
             </a:r>
             <a:endParaRPr lang="en-US" sz="1000" dirty="0"/>
           </a:p>
@@ -20389,7 +20389,7 @@
                 <a:ea typeface="Microsoft JhengHei" pitchFamily="34" charset="-122"/>
                 <a:cs typeface="Microsoft JhengHei" pitchFamily="34" charset="-120"/>
               </a:rPr>
-              <a:t>現況  252 tests、20 golden cases 全綠</a:t>
+              <a:t>現況  300 tests、20 golden cases 全綠</a:t>
             </a:r>
             <a:endParaRPr lang="en-US" sz="1000" dirty="0"/>
           </a:p>
@@ -21211,7 +21211,7 @@
                 <a:ea typeface="Microsoft JhengHei" pitchFamily="34" charset="-122"/>
                 <a:cs typeface="Microsoft JhengHei" pitchFamily="34" charset="-120"/>
               </a:rPr>
-              <a:t>HTTPS /mcp 與隱私政策</a:t>
+              <a:t>HTTPS /mcp —— 手機場景的前提</a:t>
             </a:r>
             <a:endParaRPr lang="en-US" sz="1050" dirty="0"/>
           </a:p>
@@ -21273,7 +21273,7 @@
                 <a:ea typeface="Microsoft JhengHei" pitchFamily="34" charset="-122"/>
                 <a:cs typeface="Microsoft JhengHei" pitchFamily="34" charset="-120"/>
               </a:rPr>
-              <a:t>待做  上架的必要條件</a:t>
+              <a:t>待做  桌機上架不需要它</a:t>
             </a:r>
             <a:endParaRPr lang="en-US" sz="1000" dirty="0"/>
           </a:p>
@@ -22852,7 +22852,7 @@
                 <a:ea typeface="Microsoft JhengHei" pitchFamily="34" charset="-122"/>
                 <a:cs typeface="Microsoft JhengHei" pitchFamily="34" charset="-120"/>
               </a:rPr>
-              <a:t>下一步:補完 OAuth 與遠端部署,並開始 Phase 2 的 local engine</a:t>
+              <a:t>下一步:送出 desktop extension 上架審查;遠端與 Phase 2 接在後面</a:t>
             </a:r>
             <a:endParaRPr lang="en-US" sz="1250" dirty="0"/>
           </a:p>

--- a/docs/Fitness-MCP-Product-Vision.pptx
+++ b/docs/Fitness-MCP-Product-Vision.pptx
@@ -3244,6 +3244,10 @@
           </a:solidFill>
           <a:ln/>
         </p:spPr>
+        <p:txBody>
+          <a:bodyPr/>
+          <a:p/>
+        </p:txBody>
       </p:sp>
       <p:sp>
         <p:nvSpPr>
@@ -3266,6 +3270,10 @@
           </a:solidFill>
           <a:ln/>
         </p:spPr>
+        <p:txBody>
+          <a:bodyPr/>
+          <a:p/>
+        </p:txBody>
       </p:sp>
       <p:sp>
         <p:nvSpPr>
@@ -3286,6 +3294,10 @@
           </a:solidFill>
           <a:ln/>
         </p:spPr>
+        <p:txBody>
+          <a:bodyPr/>
+          <a:p/>
+        </p:txBody>
       </p:sp>
       <p:sp>
         <p:nvSpPr>
@@ -3362,7 +3374,7 @@
                 <a:ea typeface="Arial" pitchFamily="34" charset="-122"/>
                 <a:cs typeface="Arial" pitchFamily="34" charset="-120"/>
               </a:rPr>
-              <a:t>Evidra</a:t>
+              <a:t>Pacevera</a:t>
             </a:r>
             <a:endParaRPr lang="en-US" sz="5000" dirty="0"/>
           </a:p>
@@ -3452,6 +3464,10 @@
             <a:prstDash val="solid"/>
           </a:ln>
         </p:spPr>
+        <p:txBody>
+          <a:bodyPr/>
+          <a:p/>
+        </p:txBody>
       </p:sp>
       <p:sp>
         <p:nvSpPr>
@@ -3544,6 +3560,10 @@
           </a:solidFill>
           <a:ln/>
         </p:spPr>
+        <p:txBody>
+          <a:bodyPr/>
+          <a:p/>
+        </p:txBody>
       </p:sp>
       <p:sp>
         <p:nvSpPr>
@@ -3686,6 +3706,10 @@
           </a:solidFill>
           <a:ln/>
         </p:spPr>
+        <p:txBody>
+          <a:bodyPr/>
+          <a:p/>
+        </p:txBody>
       </p:sp>
       <p:sp>
         <p:nvSpPr>
@@ -3786,6 +3810,10 @@
           </a:solidFill>
           <a:ln/>
         </p:spPr>
+        <p:txBody>
+          <a:bodyPr/>
+          <a:p/>
+        </p:txBody>
       </p:sp>
       <p:sp>
         <p:nvSpPr>
@@ -3956,6 +3984,10 @@
           </a:solidFill>
           <a:ln/>
         </p:spPr>
+        <p:txBody>
+          <a:bodyPr/>
+          <a:p/>
+        </p:txBody>
       </p:sp>
       <p:sp>
         <p:nvSpPr>
@@ -4098,6 +4130,10 @@
           </a:solidFill>
           <a:ln/>
         </p:spPr>
+        <p:txBody>
+          <a:bodyPr/>
+          <a:p/>
+        </p:txBody>
       </p:sp>
       <p:sp>
         <p:nvSpPr>
@@ -4198,6 +4234,10 @@
           </a:solidFill>
           <a:ln/>
         </p:spPr>
+        <p:txBody>
+          <a:bodyPr/>
+          <a:p/>
+        </p:txBody>
       </p:sp>
       <p:sp>
         <p:nvSpPr>
@@ -4298,6 +4338,10 @@
           </a:solidFill>
           <a:ln/>
         </p:spPr>
+        <p:txBody>
+          <a:bodyPr/>
+          <a:p/>
+        </p:txBody>
       </p:sp>
       <p:sp>
         <p:nvSpPr>
@@ -4398,6 +4442,10 @@
           </a:solidFill>
           <a:ln/>
         </p:spPr>
+        <p:txBody>
+          <a:bodyPr/>
+          <a:p/>
+        </p:txBody>
       </p:sp>
       <p:sp>
         <p:nvSpPr>
@@ -4498,6 +4546,10 @@
           </a:solidFill>
           <a:ln/>
         </p:spPr>
+        <p:txBody>
+          <a:bodyPr/>
+          <a:p/>
+        </p:txBody>
       </p:sp>
       <p:sp>
         <p:nvSpPr>
@@ -4598,6 +4650,10 @@
           </a:solidFill>
           <a:ln/>
         </p:spPr>
+        <p:txBody>
+          <a:bodyPr/>
+          <a:p/>
+        </p:txBody>
       </p:sp>
       <p:sp>
         <p:nvSpPr>
@@ -4659,6 +4715,10 @@
           </a:solidFill>
           <a:ln/>
         </p:spPr>
+        <p:txBody>
+          <a:bodyPr/>
+          <a:p/>
+        </p:txBody>
       </p:sp>
       <p:sp>
         <p:nvSpPr>
@@ -4759,6 +4819,10 @@
           </a:solidFill>
           <a:ln/>
         </p:spPr>
+        <p:txBody>
+          <a:bodyPr/>
+          <a:p/>
+        </p:txBody>
       </p:sp>
       <p:sp>
         <p:nvSpPr>
@@ -4929,6 +4993,10 @@
           </a:solidFill>
           <a:ln/>
         </p:spPr>
+        <p:txBody>
+          <a:bodyPr/>
+          <a:p/>
+        </p:txBody>
       </p:sp>
       <p:sp>
         <p:nvSpPr>
@@ -5071,6 +5139,10 @@
           </a:solidFill>
           <a:ln/>
         </p:spPr>
+        <p:txBody>
+          <a:bodyPr/>
+          <a:p/>
+        </p:txBody>
       </p:sp>
       <p:sp>
         <p:nvSpPr>
@@ -5195,6 +5267,10 @@
           </a:solidFill>
           <a:ln/>
         </p:spPr>
+        <p:txBody>
+          <a:bodyPr/>
+          <a:p/>
+        </p:txBody>
       </p:sp>
       <p:sp>
         <p:nvSpPr>
@@ -5215,6 +5291,10 @@
           </a:solidFill>
           <a:ln/>
         </p:spPr>
+        <p:txBody>
+          <a:bodyPr/>
+          <a:p/>
+        </p:txBody>
       </p:sp>
       <p:sp>
         <p:nvSpPr>
@@ -5315,6 +5395,10 @@
           </a:solidFill>
           <a:ln/>
         </p:spPr>
+        <p:txBody>
+          <a:bodyPr/>
+          <a:p/>
+        </p:txBody>
       </p:sp>
       <p:sp>
         <p:nvSpPr>
@@ -5335,6 +5419,10 @@
           </a:solidFill>
           <a:ln/>
         </p:spPr>
+        <p:txBody>
+          <a:bodyPr/>
+          <a:p/>
+        </p:txBody>
       </p:sp>
       <p:sp>
         <p:nvSpPr>
@@ -5435,6 +5523,10 @@
           </a:solidFill>
           <a:ln/>
         </p:spPr>
+        <p:txBody>
+          <a:bodyPr/>
+          <a:p/>
+        </p:txBody>
       </p:sp>
       <p:sp>
         <p:nvSpPr>
@@ -5455,6 +5547,10 @@
           </a:solidFill>
           <a:ln/>
         </p:spPr>
+        <p:txBody>
+          <a:bodyPr/>
+          <a:p/>
+        </p:txBody>
       </p:sp>
       <p:sp>
         <p:nvSpPr>
@@ -5664,6 +5760,10 @@
           </a:solidFill>
           <a:ln/>
         </p:spPr>
+        <p:txBody>
+          <a:bodyPr/>
+          <a:p/>
+        </p:txBody>
       </p:sp>
       <p:sp>
         <p:nvSpPr>
@@ -5806,6 +5906,10 @@
           </a:solidFill>
           <a:ln/>
         </p:spPr>
+        <p:txBody>
+          <a:bodyPr/>
+          <a:p/>
+        </p:txBody>
       </p:sp>
       <p:sp>
         <p:nvSpPr>
@@ -5867,6 +5971,10 @@
           </a:solidFill>
           <a:ln/>
         </p:spPr>
+        <p:txBody>
+          <a:bodyPr/>
+          <a:p/>
+        </p:txBody>
       </p:sp>
       <p:sp>
         <p:nvSpPr>
@@ -5928,6 +6036,10 @@
           </a:solidFill>
           <a:ln/>
         </p:spPr>
+        <p:txBody>
+          <a:bodyPr/>
+          <a:p/>
+        </p:txBody>
       </p:sp>
       <p:sp>
         <p:nvSpPr>
@@ -5989,6 +6101,10 @@
           </a:solidFill>
           <a:ln/>
         </p:spPr>
+        <p:txBody>
+          <a:bodyPr/>
+          <a:p/>
+        </p:txBody>
       </p:sp>
       <p:sp>
         <p:nvSpPr>
@@ -6050,6 +6166,10 @@
           </a:solidFill>
           <a:ln/>
         </p:spPr>
+        <p:txBody>
+          <a:bodyPr/>
+          <a:p/>
+        </p:txBody>
       </p:sp>
       <p:sp>
         <p:nvSpPr>
@@ -6150,6 +6270,10 @@
           </a:solidFill>
           <a:ln/>
         </p:spPr>
+        <p:txBody>
+          <a:bodyPr/>
+          <a:p/>
+        </p:txBody>
       </p:sp>
       <p:sp>
         <p:nvSpPr>
@@ -6273,6 +6397,10 @@
           </a:solidFill>
           <a:ln/>
         </p:spPr>
+        <p:txBody>
+          <a:bodyPr/>
+          <a:p/>
+        </p:txBody>
       </p:sp>
       <p:sp>
         <p:nvSpPr>
@@ -6506,6 +6634,10 @@
           </a:solidFill>
           <a:ln/>
         </p:spPr>
+        <p:txBody>
+          <a:bodyPr/>
+          <a:p/>
+        </p:txBody>
       </p:sp>
       <p:sp>
         <p:nvSpPr>
@@ -6648,6 +6780,10 @@
           </a:solidFill>
           <a:ln/>
         </p:spPr>
+        <p:txBody>
+          <a:bodyPr/>
+          <a:p/>
+        </p:txBody>
       </p:sp>
       <p:sp>
         <p:nvSpPr>
@@ -6668,6 +6804,10 @@
           </a:solidFill>
           <a:ln/>
         </p:spPr>
+        <p:txBody>
+          <a:bodyPr/>
+          <a:p/>
+        </p:txBody>
       </p:sp>
       <p:sp>
         <p:nvSpPr>
@@ -6871,6 +7011,10 @@
           </a:solidFill>
           <a:ln/>
         </p:spPr>
+        <p:txBody>
+          <a:bodyPr/>
+          <a:p/>
+        </p:txBody>
       </p:sp>
       <p:sp>
         <p:nvSpPr>
@@ -6891,6 +7035,10 @@
           </a:solidFill>
           <a:ln/>
         </p:spPr>
+        <p:txBody>
+          <a:bodyPr/>
+          <a:p/>
+        </p:txBody>
       </p:sp>
       <p:sp>
         <p:nvSpPr>
@@ -7094,6 +7242,10 @@
           </a:solidFill>
           <a:ln/>
         </p:spPr>
+        <p:txBody>
+          <a:bodyPr/>
+          <a:p/>
+        </p:txBody>
       </p:sp>
       <p:sp>
         <p:nvSpPr>
@@ -7114,6 +7266,10 @@
           </a:solidFill>
           <a:ln/>
         </p:spPr>
+        <p:txBody>
+          <a:bodyPr/>
+          <a:p/>
+        </p:txBody>
       </p:sp>
       <p:sp>
         <p:nvSpPr>
@@ -7297,6 +7453,10 @@
           </a:solidFill>
           <a:ln/>
         </p:spPr>
+        <p:txBody>
+          <a:bodyPr/>
+          <a:p/>
+        </p:txBody>
       </p:sp>
       <p:sp>
         <p:nvSpPr>
@@ -7317,6 +7477,10 @@
           </a:solidFill>
           <a:ln/>
         </p:spPr>
+        <p:txBody>
+          <a:bodyPr/>
+          <a:p/>
+        </p:txBody>
       </p:sp>
       <p:sp>
         <p:nvSpPr>
@@ -7550,6 +7714,10 @@
           </a:solidFill>
           <a:ln/>
         </p:spPr>
+        <p:txBody>
+          <a:bodyPr/>
+          <a:p/>
+        </p:txBody>
       </p:sp>
       <p:sp>
         <p:nvSpPr>
@@ -7692,6 +7860,10 @@
           </a:solidFill>
           <a:ln/>
         </p:spPr>
+        <p:txBody>
+          <a:bodyPr/>
+          <a:p/>
+        </p:txBody>
       </p:sp>
       <p:sp>
         <p:nvSpPr>
@@ -7792,6 +7964,10 @@
           </a:solidFill>
           <a:ln/>
         </p:spPr>
+        <p:txBody>
+          <a:bodyPr/>
+          <a:p/>
+        </p:txBody>
       </p:sp>
       <p:sp>
         <p:nvSpPr>
@@ -7853,6 +8029,10 @@
           </a:solidFill>
           <a:ln/>
         </p:spPr>
+        <p:txBody>
+          <a:bodyPr/>
+          <a:p/>
+        </p:txBody>
       </p:sp>
       <p:sp>
         <p:nvSpPr>
@@ -7953,6 +8133,10 @@
           </a:solidFill>
           <a:ln/>
         </p:spPr>
+        <p:txBody>
+          <a:bodyPr/>
+          <a:p/>
+        </p:txBody>
       </p:sp>
       <p:sp>
         <p:nvSpPr>
@@ -8014,6 +8198,10 @@
           </a:solidFill>
           <a:ln/>
         </p:spPr>
+        <p:txBody>
+          <a:bodyPr/>
+          <a:p/>
+        </p:txBody>
       </p:sp>
       <p:sp>
         <p:nvSpPr>
@@ -8114,6 +8302,10 @@
           </a:solidFill>
           <a:ln/>
         </p:spPr>
+        <p:txBody>
+          <a:bodyPr/>
+          <a:p/>
+        </p:txBody>
       </p:sp>
       <p:sp>
         <p:nvSpPr>
@@ -8284,6 +8476,10 @@
           </a:solidFill>
           <a:ln/>
         </p:spPr>
+        <p:txBody>
+          <a:bodyPr/>
+          <a:p/>
+        </p:txBody>
       </p:sp>
       <p:sp>
         <p:nvSpPr>
@@ -8426,6 +8622,10 @@
           </a:solidFill>
           <a:ln/>
         </p:spPr>
+        <p:txBody>
+          <a:bodyPr/>
+          <a:p/>
+        </p:txBody>
       </p:sp>
       <p:sp>
         <p:nvSpPr>
@@ -8776,6 +8976,10 @@
           </a:solidFill>
           <a:ln/>
         </p:spPr>
+        <p:txBody>
+          <a:bodyPr/>
+          <a:p/>
+        </p:txBody>
       </p:sp>
       <p:sp>
         <p:nvSpPr>
@@ -8876,6 +9080,10 @@
           </a:solidFill>
           <a:ln/>
         </p:spPr>
+        <p:txBody>
+          <a:bodyPr/>
+          <a:p/>
+        </p:txBody>
       </p:sp>
       <p:sp>
         <p:nvSpPr>
@@ -8898,6 +9106,10 @@
           </a:solidFill>
           <a:ln/>
         </p:spPr>
+        <p:txBody>
+          <a:bodyPr/>
+          <a:p/>
+        </p:txBody>
       </p:sp>
       <p:sp>
         <p:nvSpPr>
@@ -8998,6 +9210,10 @@
           </a:solidFill>
           <a:ln/>
         </p:spPr>
+        <p:txBody>
+          <a:bodyPr/>
+          <a:p/>
+        </p:txBody>
       </p:sp>
       <p:sp>
         <p:nvSpPr>
@@ -9020,6 +9236,10 @@
           </a:solidFill>
           <a:ln/>
         </p:spPr>
+        <p:txBody>
+          <a:bodyPr/>
+          <a:p/>
+        </p:txBody>
       </p:sp>
       <p:sp>
         <p:nvSpPr>
@@ -9120,6 +9340,10 @@
           </a:solidFill>
           <a:ln/>
         </p:spPr>
+        <p:txBody>
+          <a:bodyPr/>
+          <a:p/>
+        </p:txBody>
       </p:sp>
       <p:sp>
         <p:nvSpPr>
@@ -9142,6 +9366,10 @@
           </a:solidFill>
           <a:ln/>
         </p:spPr>
+        <p:txBody>
+          <a:bodyPr/>
+          <a:p/>
+        </p:txBody>
       </p:sp>
       <p:sp>
         <p:nvSpPr>
@@ -9273,6 +9501,10 @@
           </a:solidFill>
           <a:ln/>
         </p:spPr>
+        <p:txBody>
+          <a:bodyPr/>
+          <a:p/>
+        </p:txBody>
       </p:sp>
       <p:sp>
         <p:nvSpPr>
@@ -9415,6 +9647,10 @@
           </a:solidFill>
           <a:ln/>
         </p:spPr>
+        <p:txBody>
+          <a:bodyPr/>
+          <a:p/>
+        </p:txBody>
       </p:sp>
       <p:sp>
         <p:nvSpPr>
@@ -9617,6 +9853,10 @@
           </a:solidFill>
           <a:ln/>
         </p:spPr>
+        <p:txBody>
+          <a:bodyPr/>
+          <a:p/>
+        </p:txBody>
       </p:sp>
       <p:sp>
         <p:nvSpPr>
@@ -9819,6 +10059,10 @@
           </a:solidFill>
           <a:ln/>
         </p:spPr>
+        <p:txBody>
+          <a:bodyPr/>
+          <a:p/>
+        </p:txBody>
       </p:sp>
       <p:sp>
         <p:nvSpPr>
@@ -10032,6 +10276,10 @@
           </a:solidFill>
           <a:ln/>
         </p:spPr>
+        <p:txBody>
+          <a:bodyPr/>
+          <a:p/>
+        </p:txBody>
       </p:sp>
       <p:sp>
         <p:nvSpPr>
@@ -10174,6 +10422,10 @@
           </a:solidFill>
           <a:ln/>
         </p:spPr>
+        <p:txBody>
+          <a:bodyPr/>
+          <a:p/>
+        </p:txBody>
       </p:sp>
       <p:sp>
         <p:nvSpPr>
@@ -10235,6 +10487,10 @@
           </a:solidFill>
           <a:ln/>
         </p:spPr>
+        <p:txBody>
+          <a:bodyPr/>
+          <a:p/>
+        </p:txBody>
       </p:sp>
       <p:sp>
         <p:nvSpPr>
@@ -10296,6 +10552,10 @@
           </a:solidFill>
           <a:ln/>
         </p:spPr>
+        <p:txBody>
+          <a:bodyPr/>
+          <a:p/>
+        </p:txBody>
       </p:sp>
       <p:sp>
         <p:nvSpPr>
@@ -10357,6 +10617,10 @@
           </a:solidFill>
           <a:ln/>
         </p:spPr>
+        <p:txBody>
+          <a:bodyPr/>
+          <a:p/>
+        </p:txBody>
       </p:sp>
       <p:sp>
         <p:nvSpPr>
@@ -10418,6 +10682,10 @@
           </a:solidFill>
           <a:ln/>
         </p:spPr>
+        <p:txBody>
+          <a:bodyPr/>
+          <a:p/>
+        </p:txBody>
       </p:sp>
       <p:sp>
         <p:nvSpPr>
@@ -10479,6 +10747,10 @@
           </a:solidFill>
           <a:ln/>
         </p:spPr>
+        <p:txBody>
+          <a:bodyPr/>
+          <a:p/>
+        </p:txBody>
       </p:sp>
       <p:sp>
         <p:nvSpPr>
@@ -10540,6 +10812,10 @@
           </a:solidFill>
           <a:ln/>
         </p:spPr>
+        <p:txBody>
+          <a:bodyPr/>
+          <a:p/>
+        </p:txBody>
       </p:sp>
       <p:sp>
         <p:nvSpPr>
@@ -10601,6 +10877,10 @@
           </a:solidFill>
           <a:ln/>
         </p:spPr>
+        <p:txBody>
+          <a:bodyPr/>
+          <a:p/>
+        </p:txBody>
       </p:sp>
       <p:sp>
         <p:nvSpPr>
@@ -10662,6 +10942,10 @@
           </a:solidFill>
           <a:ln/>
         </p:spPr>
+        <p:txBody>
+          <a:bodyPr/>
+          <a:p/>
+        </p:txBody>
       </p:sp>
       <p:sp>
         <p:nvSpPr>
@@ -10723,6 +11007,10 @@
           </a:solidFill>
           <a:ln/>
         </p:spPr>
+        <p:txBody>
+          <a:bodyPr/>
+          <a:p/>
+        </p:txBody>
       </p:sp>
       <p:sp>
         <p:nvSpPr>
@@ -10784,6 +11072,10 @@
           </a:solidFill>
           <a:ln/>
         </p:spPr>
+        <p:txBody>
+          <a:bodyPr/>
+          <a:p/>
+        </p:txBody>
       </p:sp>
       <p:sp>
         <p:nvSpPr>
@@ -10954,6 +11246,10 @@
           </a:solidFill>
           <a:ln/>
         </p:spPr>
+        <p:txBody>
+          <a:bodyPr/>
+          <a:p/>
+        </p:txBody>
       </p:sp>
       <p:sp>
         <p:nvSpPr>
@@ -11096,6 +11392,10 @@
           </a:solidFill>
           <a:ln/>
         </p:spPr>
+        <p:txBody>
+          <a:bodyPr/>
+          <a:p/>
+        </p:txBody>
       </p:sp>
       <p:sp>
         <p:nvSpPr>
@@ -11116,6 +11416,10 @@
           </a:solidFill>
           <a:ln/>
         </p:spPr>
+        <p:txBody>
+          <a:bodyPr/>
+          <a:p/>
+        </p:txBody>
       </p:sp>
       <p:sp>
         <p:nvSpPr>
@@ -11239,6 +11543,10 @@
           </a:solidFill>
           <a:ln/>
         </p:spPr>
+        <p:txBody>
+          <a:bodyPr/>
+          <a:p/>
+        </p:txBody>
       </p:sp>
       <p:sp>
         <p:nvSpPr>
@@ -11259,6 +11567,10 @@
           </a:solidFill>
           <a:ln/>
         </p:spPr>
+        <p:txBody>
+          <a:bodyPr/>
+          <a:p/>
+        </p:txBody>
       </p:sp>
       <p:sp>
         <p:nvSpPr>
@@ -11382,6 +11694,10 @@
           </a:solidFill>
           <a:ln/>
         </p:spPr>
+        <p:txBody>
+          <a:bodyPr/>
+          <a:p/>
+        </p:txBody>
       </p:sp>
       <p:sp>
         <p:nvSpPr>
@@ -11402,6 +11718,10 @@
           </a:solidFill>
           <a:ln/>
         </p:spPr>
+        <p:txBody>
+          <a:bodyPr/>
+          <a:p/>
+        </p:txBody>
       </p:sp>
       <p:sp>
         <p:nvSpPr>
@@ -11525,6 +11845,10 @@
           </a:solidFill>
           <a:ln/>
         </p:spPr>
+        <p:txBody>
+          <a:bodyPr/>
+          <a:p/>
+        </p:txBody>
       </p:sp>
       <p:sp>
         <p:nvSpPr>
@@ -11545,6 +11869,10 @@
           </a:solidFill>
           <a:ln/>
         </p:spPr>
+        <p:txBody>
+          <a:bodyPr/>
+          <a:p/>
+        </p:txBody>
       </p:sp>
       <p:sp>
         <p:nvSpPr>
@@ -11668,6 +11996,10 @@
           </a:solidFill>
           <a:ln/>
         </p:spPr>
+        <p:txBody>
+          <a:bodyPr/>
+          <a:p/>
+        </p:txBody>
       </p:sp>
       <p:sp>
         <p:nvSpPr>
@@ -11688,6 +12020,10 @@
           </a:solidFill>
           <a:ln/>
         </p:spPr>
+        <p:txBody>
+          <a:bodyPr/>
+          <a:p/>
+        </p:txBody>
       </p:sp>
       <p:sp>
         <p:nvSpPr>
@@ -11811,6 +12147,10 @@
           </a:solidFill>
           <a:ln/>
         </p:spPr>
+        <p:txBody>
+          <a:bodyPr/>
+          <a:p/>
+        </p:txBody>
       </p:sp>
       <p:sp>
         <p:nvSpPr>
@@ -11831,6 +12171,10 @@
           </a:solidFill>
           <a:ln/>
         </p:spPr>
+        <p:txBody>
+          <a:bodyPr/>
+          <a:p/>
+        </p:txBody>
       </p:sp>
       <p:sp>
         <p:nvSpPr>
@@ -12024,6 +12368,10 @@
           </a:solidFill>
           <a:ln/>
         </p:spPr>
+        <p:txBody>
+          <a:bodyPr/>
+          <a:p/>
+        </p:txBody>
       </p:sp>
       <p:sp>
         <p:nvSpPr>
@@ -12166,6 +12514,10 @@
           </a:solidFill>
           <a:ln/>
         </p:spPr>
+        <p:txBody>
+          <a:bodyPr/>
+          <a:p/>
+        </p:txBody>
       </p:sp>
       <p:sp>
         <p:nvSpPr>
@@ -12308,6 +12660,10 @@
           </a:solidFill>
           <a:ln/>
         </p:spPr>
+        <p:txBody>
+          <a:bodyPr/>
+          <a:p/>
+        </p:txBody>
       </p:sp>
       <p:sp>
         <p:nvSpPr>
@@ -12450,6 +12806,10 @@
           </a:solidFill>
           <a:ln/>
         </p:spPr>
+        <p:txBody>
+          <a:bodyPr/>
+          <a:p/>
+        </p:txBody>
       </p:sp>
       <p:sp>
         <p:nvSpPr>
@@ -12662,6 +13022,10 @@
           </a:solidFill>
           <a:ln/>
         </p:spPr>
+        <p:txBody>
+          <a:bodyPr/>
+          <a:p/>
+        </p:txBody>
       </p:sp>
       <p:sp>
         <p:nvSpPr>
@@ -12723,6 +13087,10 @@
           </a:solidFill>
           <a:ln/>
         </p:spPr>
+        <p:txBody>
+          <a:bodyPr/>
+          <a:p/>
+        </p:txBody>
       </p:sp>
       <p:sp>
         <p:nvSpPr>
@@ -12823,6 +13191,10 @@
           </a:solidFill>
           <a:ln/>
         </p:spPr>
+        <p:txBody>
+          <a:bodyPr/>
+          <a:p/>
+        </p:txBody>
       </p:sp>
       <p:sp>
         <p:nvSpPr>
@@ -12843,6 +13215,10 @@
           </a:solidFill>
           <a:ln/>
         </p:spPr>
+        <p:txBody>
+          <a:bodyPr/>
+          <a:p/>
+        </p:txBody>
       </p:sp>
       <p:sp>
         <p:nvSpPr>
@@ -12904,6 +13280,10 @@
           </a:solidFill>
           <a:ln/>
         </p:spPr>
+        <p:txBody>
+          <a:bodyPr/>
+          <a:p/>
+        </p:txBody>
       </p:sp>
       <p:sp>
         <p:nvSpPr>
@@ -12924,6 +13304,10 @@
           </a:solidFill>
           <a:ln/>
         </p:spPr>
+        <p:txBody>
+          <a:bodyPr/>
+          <a:p/>
+        </p:txBody>
       </p:sp>
       <p:sp>
         <p:nvSpPr>
@@ -12985,6 +13369,10 @@
           </a:solidFill>
           <a:ln/>
         </p:spPr>
+        <p:txBody>
+          <a:bodyPr/>
+          <a:p/>
+        </p:txBody>
       </p:sp>
       <p:sp>
         <p:nvSpPr>
@@ -13005,6 +13393,10 @@
           </a:solidFill>
           <a:ln/>
         </p:spPr>
+        <p:txBody>
+          <a:bodyPr/>
+          <a:p/>
+        </p:txBody>
       </p:sp>
       <p:sp>
         <p:nvSpPr>
@@ -13105,6 +13497,10 @@
           </a:solidFill>
           <a:ln/>
         </p:spPr>
+        <p:txBody>
+          <a:bodyPr/>
+          <a:p/>
+        </p:txBody>
       </p:sp>
       <p:sp>
         <p:nvSpPr>
@@ -13275,6 +13671,10 @@
           </a:solidFill>
           <a:ln/>
         </p:spPr>
+        <p:txBody>
+          <a:bodyPr/>
+          <a:p/>
+        </p:txBody>
       </p:sp>
       <p:sp>
         <p:nvSpPr>
@@ -13348,7 +13748,7 @@
                 <a:ea typeface="Microsoft JhengHei" pitchFamily="34" charset="-122"/>
                 <a:cs typeface="Microsoft JhengHei" pitchFamily="34" charset="-120"/>
               </a:rPr>
-              <a:t>兩種部署,一條界線</a:t>
+              <a:t>三種部署,一條資料界線</a:t>
             </a:r>
             <a:endParaRPr lang="en-US" sz="3400" dirty="0"/>
           </a:p>
@@ -13417,6 +13817,10 @@
           </a:solidFill>
           <a:ln/>
         </p:spPr>
+        <p:txBody>
+          <a:bodyPr/>
+          <a:p/>
+        </p:txBody>
       </p:sp>
       <p:sp>
         <p:nvSpPr>
@@ -13437,6 +13841,10 @@
           </a:solidFill>
           <a:ln/>
         </p:spPr>
+        <p:txBody>
+          <a:bodyPr/>
+          <a:p/>
+        </p:txBody>
       </p:sp>
       <p:sp>
         <p:nvSpPr>
@@ -13471,7 +13879,7 @@
                 <a:ea typeface="Arial" pitchFamily="34" charset="-122"/>
                 <a:cs typeface="Arial" pitchFamily="34" charset="-120"/>
               </a:rPr>
-              <a:t>Phase 1 · Hosted</a:t>
+              <a:t>Hosted remote</a:t>
             </a:r>
             <a:endParaRPr lang="en-US" sz="1600" dirty="0"/>
           </a:p>
@@ -13537,6 +13945,10 @@
           </a:solidFill>
           <a:ln/>
         </p:spPr>
+        <p:txBody>
+          <a:bodyPr/>
+          <a:p/>
+        </p:txBody>
       </p:sp>
       <p:sp>
         <p:nvSpPr>
@@ -13557,6 +13969,10 @@
           </a:solidFill>
           <a:ln/>
         </p:spPr>
+        <p:txBody>
+          <a:bodyPr/>
+          <a:p/>
+        </p:txBody>
       </p:sp>
       <p:sp>
         <p:nvSpPr>
@@ -13591,7 +14007,7 @@
                 <a:ea typeface="Arial" pitchFamily="34" charset="-122"/>
                 <a:cs typeface="Arial" pitchFamily="34" charset="-120"/>
               </a:rPr>
-              <a:t>Phase 1 的界線</a:t>
+              <a:t>Hosted 的界線</a:t>
             </a:r>
             <a:endParaRPr lang="en-US" sz="1600" dirty="0"/>
           </a:p>
@@ -13657,6 +14073,10 @@
           </a:solidFill>
           <a:ln/>
         </p:spPr>
+        <p:txBody>
+          <a:bodyPr/>
+          <a:p/>
+        </p:txBody>
       </p:sp>
       <p:sp>
         <p:nvSpPr>
@@ -13677,6 +14097,10 @@
           </a:solidFill>
           <a:ln/>
         </p:spPr>
+        <p:txBody>
+          <a:bodyPr/>
+          <a:p/>
+        </p:txBody>
       </p:sp>
       <p:sp>
         <p:nvSpPr>
@@ -13711,7 +14135,7 @@
                 <a:ea typeface="Arial" pitchFamily="34" charset="-122"/>
                 <a:cs typeface="Arial" pitchFamily="34" charset="-120"/>
               </a:rPr>
-              <a:t>Phase 2 · 使用者環境</a:t>
+              <a:t>Local / private</a:t>
             </a:r>
             <a:endParaRPr lang="en-US" sz="1600" dirty="0"/>
           </a:p>
@@ -13777,6 +14201,10 @@
           </a:solidFill>
           <a:ln/>
         </p:spPr>
+        <p:txBody>
+          <a:bodyPr/>
+          <a:p/>
+        </p:txBody>
       </p:sp>
       <p:sp>
         <p:nvSpPr>
@@ -13797,6 +14225,10 @@
           </a:solidFill>
           <a:ln/>
         </p:spPr>
+        <p:txBody>
+          <a:bodyPr/>
+          <a:p/>
+        </p:txBody>
       </p:sp>
       <p:sp>
         <p:nvSpPr>
@@ -13831,7 +14263,7 @@
                 <a:ea typeface="Arial" pitchFamily="34" charset="-122"/>
                 <a:cs typeface="Arial" pitchFamily="34" charset="-120"/>
               </a:rPr>
-              <a:t>Phase 2 是主線</a:t>
+              <a:t>Private data plane</a:t>
             </a:r>
             <a:endParaRPr lang="en-US" sz="1600" dirty="0"/>
           </a:p>
@@ -13870,7 +14302,7 @@
                 <a:ea typeface="Microsoft JhengHei" pitchFamily="34" charset="-122"/>
                 <a:cs typeface="Microsoft JhengHei" pitchFamily="34" charset="-120"/>
               </a:rPr>
-              <a:t>只有它能做到 Claude 也看不見原始資料</a:t>
+              <a:t>只有 user-controlled private 能做到原始資料不離開控制邊界</a:t>
             </a:r>
             <a:endParaRPr lang="en-US" sz="1300" dirty="0"/>
           </a:p>
@@ -13967,6 +14399,10 @@
           </a:solidFill>
           <a:ln/>
         </p:spPr>
+        <p:txBody>
+          <a:bodyPr/>
+          <a:p/>
+        </p:txBody>
       </p:sp>
       <p:sp>
         <p:nvSpPr>
@@ -14109,6 +14545,10 @@
           </a:solidFill>
           <a:ln/>
         </p:spPr>
+        <p:txBody>
+          <a:bodyPr/>
+          <a:p/>
+        </p:txBody>
       </p:sp>
       <p:sp>
         <p:nvSpPr>
@@ -14129,6 +14569,10 @@
           </a:solidFill>
           <a:ln/>
         </p:spPr>
+        <p:txBody>
+          <a:bodyPr/>
+          <a:p/>
+        </p:txBody>
       </p:sp>
       <p:sp>
         <p:nvSpPr>
@@ -14232,6 +14676,10 @@
           </a:solidFill>
           <a:ln/>
         </p:spPr>
+        <p:txBody>
+          <a:bodyPr/>
+          <a:p/>
+        </p:txBody>
       </p:sp>
       <p:sp>
         <p:nvSpPr>
@@ -14252,6 +14700,10 @@
           </a:solidFill>
           <a:ln/>
         </p:spPr>
+        <p:txBody>
+          <a:bodyPr/>
+          <a:p/>
+        </p:txBody>
       </p:sp>
       <p:sp>
         <p:nvSpPr>
@@ -14355,6 +14807,10 @@
           </a:solidFill>
           <a:ln/>
         </p:spPr>
+        <p:txBody>
+          <a:bodyPr/>
+          <a:p/>
+        </p:txBody>
       </p:sp>
       <p:sp>
         <p:nvSpPr>
@@ -14375,6 +14831,10 @@
           </a:solidFill>
           <a:ln/>
         </p:spPr>
+        <p:txBody>
+          <a:bodyPr/>
+          <a:p/>
+        </p:txBody>
       </p:sp>
       <p:sp>
         <p:nvSpPr>
@@ -14478,6 +14938,10 @@
           </a:solidFill>
           <a:ln/>
         </p:spPr>
+        <p:txBody>
+          <a:bodyPr/>
+          <a:p/>
+        </p:txBody>
       </p:sp>
       <p:sp>
         <p:nvSpPr>
@@ -14498,6 +14962,10 @@
           </a:solidFill>
           <a:ln/>
         </p:spPr>
+        <p:txBody>
+          <a:bodyPr/>
+          <a:p/>
+        </p:txBody>
       </p:sp>
       <p:sp>
         <p:nvSpPr>
@@ -14601,6 +15069,10 @@
           </a:solidFill>
           <a:ln/>
         </p:spPr>
+        <p:txBody>
+          <a:bodyPr/>
+          <a:p/>
+        </p:txBody>
       </p:sp>
       <p:sp>
         <p:nvSpPr>
@@ -14621,6 +15093,10 @@
           </a:solidFill>
           <a:ln/>
         </p:spPr>
+        <p:txBody>
+          <a:bodyPr/>
+          <a:p/>
+        </p:txBody>
       </p:sp>
       <p:sp>
         <p:nvSpPr>
@@ -14724,6 +15200,10 @@
           </a:solidFill>
           <a:ln/>
         </p:spPr>
+        <p:txBody>
+          <a:bodyPr/>
+          <a:p/>
+        </p:txBody>
       </p:sp>
       <p:sp>
         <p:nvSpPr>
@@ -14744,6 +15224,10 @@
           </a:solidFill>
           <a:ln/>
         </p:spPr>
+        <p:txBody>
+          <a:bodyPr/>
+          <a:p/>
+        </p:txBody>
       </p:sp>
       <p:sp>
         <p:nvSpPr>
@@ -14917,6 +15401,10 @@
           </a:solidFill>
           <a:ln/>
         </p:spPr>
+        <p:txBody>
+          <a:bodyPr/>
+          <a:p/>
+        </p:txBody>
       </p:sp>
       <p:sp>
         <p:nvSpPr>
@@ -14978,6 +15466,10 @@
           </a:solidFill>
           <a:ln/>
         </p:spPr>
+        <p:txBody>
+          <a:bodyPr/>
+          <a:p/>
+        </p:txBody>
       </p:sp>
       <p:sp>
         <p:nvSpPr>
@@ -15078,6 +15570,10 @@
           </a:solidFill>
           <a:ln/>
         </p:spPr>
+        <p:txBody>
+          <a:bodyPr/>
+          <a:p/>
+        </p:txBody>
       </p:sp>
       <p:sp>
         <p:nvSpPr>
@@ -15098,6 +15594,10 @@
           </a:solidFill>
           <a:ln/>
         </p:spPr>
+        <p:txBody>
+          <a:bodyPr/>
+          <a:p/>
+        </p:txBody>
       </p:sp>
       <p:sp>
         <p:nvSpPr>
@@ -15159,6 +15659,10 @@
           </a:solidFill>
           <a:ln/>
         </p:spPr>
+        <p:txBody>
+          <a:bodyPr/>
+          <a:p/>
+        </p:txBody>
       </p:sp>
       <p:sp>
         <p:nvSpPr>
@@ -15179,6 +15683,10 @@
           </a:solidFill>
           <a:ln/>
         </p:spPr>
+        <p:txBody>
+          <a:bodyPr/>
+          <a:p/>
+        </p:txBody>
       </p:sp>
       <p:sp>
         <p:nvSpPr>
@@ -15240,6 +15748,10 @@
           </a:solidFill>
           <a:ln/>
         </p:spPr>
+        <p:txBody>
+          <a:bodyPr/>
+          <a:p/>
+        </p:txBody>
       </p:sp>
       <p:sp>
         <p:nvSpPr>
@@ -15260,6 +15772,10 @@
           </a:solidFill>
           <a:ln/>
         </p:spPr>
+        <p:txBody>
+          <a:bodyPr/>
+          <a:p/>
+        </p:txBody>
       </p:sp>
       <p:sp>
         <p:nvSpPr>
@@ -15360,6 +15876,10 @@
           </a:solidFill>
           <a:ln/>
         </p:spPr>
+        <p:txBody>
+          <a:bodyPr/>
+          <a:p/>
+        </p:txBody>
       </p:sp>
       <p:sp>
         <p:nvSpPr>
@@ -15569,6 +16089,10 @@
           </a:solidFill>
           <a:ln/>
         </p:spPr>
+        <p:txBody>
+          <a:bodyPr/>
+          <a:p/>
+        </p:txBody>
       </p:sp>
       <p:sp>
         <p:nvSpPr>
@@ -15630,6 +16154,10 @@
           </a:solidFill>
           <a:ln/>
         </p:spPr>
+        <p:txBody>
+          <a:bodyPr/>
+          <a:p/>
+        </p:txBody>
       </p:sp>
       <p:sp>
         <p:nvSpPr>
@@ -15730,6 +16258,10 @@
           </a:solidFill>
           <a:ln/>
         </p:spPr>
+        <p:txBody>
+          <a:bodyPr/>
+          <a:p/>
+        </p:txBody>
       </p:sp>
       <p:sp>
         <p:nvSpPr>
@@ -15750,6 +16282,10 @@
           </a:solidFill>
           <a:ln/>
         </p:spPr>
+        <p:txBody>
+          <a:bodyPr/>
+          <a:p/>
+        </p:txBody>
       </p:sp>
       <p:sp>
         <p:nvSpPr>
@@ -15811,6 +16347,10 @@
           </a:solidFill>
           <a:ln/>
         </p:spPr>
+        <p:txBody>
+          <a:bodyPr/>
+          <a:p/>
+        </p:txBody>
       </p:sp>
       <p:sp>
         <p:nvSpPr>
@@ -15831,6 +16371,10 @@
           </a:solidFill>
           <a:ln/>
         </p:spPr>
+        <p:txBody>
+          <a:bodyPr/>
+          <a:p/>
+        </p:txBody>
       </p:sp>
       <p:sp>
         <p:nvSpPr>
@@ -15892,6 +16436,10 @@
           </a:solidFill>
           <a:ln/>
         </p:spPr>
+        <p:txBody>
+          <a:bodyPr/>
+          <a:p/>
+        </p:txBody>
       </p:sp>
       <p:sp>
         <p:nvSpPr>
@@ -15912,6 +16460,10 @@
           </a:solidFill>
           <a:ln/>
         </p:spPr>
+        <p:txBody>
+          <a:bodyPr/>
+          <a:p/>
+        </p:txBody>
       </p:sp>
       <p:sp>
         <p:nvSpPr>
@@ -16012,6 +16564,10 @@
           </a:solidFill>
           <a:ln/>
         </p:spPr>
+        <p:txBody>
+          <a:bodyPr/>
+          <a:p/>
+        </p:txBody>
       </p:sp>
       <p:sp>
         <p:nvSpPr>
@@ -16221,6 +16777,10 @@
           </a:solidFill>
           <a:ln/>
         </p:spPr>
+        <p:txBody>
+          <a:bodyPr/>
+          <a:p/>
+        </p:txBody>
       </p:sp>
       <p:sp>
         <p:nvSpPr>
@@ -16282,6 +16842,10 @@
           </a:solidFill>
           <a:ln/>
         </p:spPr>
+        <p:txBody>
+          <a:bodyPr/>
+          <a:p/>
+        </p:txBody>
       </p:sp>
       <p:sp>
         <p:nvSpPr>
@@ -16382,6 +16946,10 @@
           </a:solidFill>
           <a:ln/>
         </p:spPr>
+        <p:txBody>
+          <a:bodyPr/>
+          <a:p/>
+        </p:txBody>
       </p:sp>
       <p:sp>
         <p:nvSpPr>
@@ -16402,6 +16970,10 @@
           </a:solidFill>
           <a:ln/>
         </p:spPr>
+        <p:txBody>
+          <a:bodyPr/>
+          <a:p/>
+        </p:txBody>
       </p:sp>
       <p:sp>
         <p:nvSpPr>
@@ -16463,6 +17035,10 @@
           </a:solidFill>
           <a:ln/>
         </p:spPr>
+        <p:txBody>
+          <a:bodyPr/>
+          <a:p/>
+        </p:txBody>
       </p:sp>
       <p:sp>
         <p:nvSpPr>
@@ -16483,6 +17059,10 @@
           </a:solidFill>
           <a:ln/>
         </p:spPr>
+        <p:txBody>
+          <a:bodyPr/>
+          <a:p/>
+        </p:txBody>
       </p:sp>
       <p:sp>
         <p:nvSpPr>
@@ -16544,6 +17124,10 @@
           </a:solidFill>
           <a:ln/>
         </p:spPr>
+        <p:txBody>
+          <a:bodyPr/>
+          <a:p/>
+        </p:txBody>
       </p:sp>
       <p:sp>
         <p:nvSpPr>
@@ -16564,6 +17148,10 @@
           </a:solidFill>
           <a:ln/>
         </p:spPr>
+        <p:txBody>
+          <a:bodyPr/>
+          <a:p/>
+        </p:txBody>
       </p:sp>
       <p:sp>
         <p:nvSpPr>
@@ -16664,6 +17252,10 @@
           </a:solidFill>
           <a:ln/>
         </p:spPr>
+        <p:txBody>
+          <a:bodyPr/>
+          <a:p/>
+        </p:txBody>
       </p:sp>
       <p:sp>
         <p:nvSpPr>
@@ -16834,6 +17426,10 @@
           </a:solidFill>
           <a:ln/>
         </p:spPr>
+        <p:txBody>
+          <a:bodyPr/>
+          <a:p/>
+        </p:txBody>
       </p:sp>
       <p:sp>
         <p:nvSpPr>
@@ -16895,6 +17491,10 @@
           </a:solidFill>
           <a:ln/>
         </p:spPr>
+        <p:txBody>
+          <a:bodyPr/>
+          <a:p/>
+        </p:txBody>
       </p:sp>
       <p:sp>
         <p:nvSpPr>
@@ -16995,6 +17595,10 @@
           </a:solidFill>
           <a:ln/>
         </p:spPr>
+        <p:txBody>
+          <a:bodyPr/>
+          <a:p/>
+        </p:txBody>
       </p:sp>
       <p:sp>
         <p:nvSpPr>
@@ -17015,6 +17619,10 @@
           </a:solidFill>
           <a:ln/>
         </p:spPr>
+        <p:txBody>
+          <a:bodyPr/>
+          <a:p/>
+        </p:txBody>
       </p:sp>
       <p:sp>
         <p:nvSpPr>
@@ -17076,6 +17684,10 @@
           </a:solidFill>
           <a:ln/>
         </p:spPr>
+        <p:txBody>
+          <a:bodyPr/>
+          <a:p/>
+        </p:txBody>
       </p:sp>
       <p:sp>
         <p:nvSpPr>
@@ -17096,6 +17708,10 @@
           </a:solidFill>
           <a:ln/>
         </p:spPr>
+        <p:txBody>
+          <a:bodyPr/>
+          <a:p/>
+        </p:txBody>
       </p:sp>
       <p:sp>
         <p:nvSpPr>
@@ -17157,6 +17773,10 @@
           </a:solidFill>
           <a:ln/>
         </p:spPr>
+        <p:txBody>
+          <a:bodyPr/>
+          <a:p/>
+        </p:txBody>
       </p:sp>
       <p:sp>
         <p:nvSpPr>
@@ -17177,6 +17797,10 @@
           </a:solidFill>
           <a:ln/>
         </p:spPr>
+        <p:txBody>
+          <a:bodyPr/>
+          <a:p/>
+        </p:txBody>
       </p:sp>
       <p:sp>
         <p:nvSpPr>
@@ -17277,6 +17901,10 @@
           </a:solidFill>
           <a:ln/>
         </p:spPr>
+        <p:txBody>
+          <a:bodyPr/>
+          <a:p/>
+        </p:txBody>
       </p:sp>
       <p:sp>
         <p:nvSpPr>
@@ -17486,6 +18114,10 @@
           </a:solidFill>
           <a:ln/>
         </p:spPr>
+        <p:txBody>
+          <a:bodyPr/>
+          <a:p/>
+        </p:txBody>
       </p:sp>
       <p:sp>
         <p:nvSpPr>
@@ -17547,6 +18179,10 @@
           </a:solidFill>
           <a:ln/>
         </p:spPr>
+        <p:txBody>
+          <a:bodyPr/>
+          <a:p/>
+        </p:txBody>
       </p:sp>
       <p:sp>
         <p:nvSpPr>
@@ -17647,6 +18283,10 @@
           </a:solidFill>
           <a:ln/>
         </p:spPr>
+        <p:txBody>
+          <a:bodyPr/>
+          <a:p/>
+        </p:txBody>
       </p:sp>
       <p:sp>
         <p:nvSpPr>
@@ -17667,6 +18307,10 @@
           </a:solidFill>
           <a:ln/>
         </p:spPr>
+        <p:txBody>
+          <a:bodyPr/>
+          <a:p/>
+        </p:txBody>
       </p:sp>
       <p:sp>
         <p:nvSpPr>
@@ -17728,6 +18372,10 @@
           </a:solidFill>
           <a:ln/>
         </p:spPr>
+        <p:txBody>
+          <a:bodyPr/>
+          <a:p/>
+        </p:txBody>
       </p:sp>
       <p:sp>
         <p:nvSpPr>
@@ -17748,6 +18396,10 @@
           </a:solidFill>
           <a:ln/>
         </p:spPr>
+        <p:txBody>
+          <a:bodyPr/>
+          <a:p/>
+        </p:txBody>
       </p:sp>
       <p:sp>
         <p:nvSpPr>
@@ -17809,6 +18461,10 @@
           </a:solidFill>
           <a:ln/>
         </p:spPr>
+        <p:txBody>
+          <a:bodyPr/>
+          <a:p/>
+        </p:txBody>
       </p:sp>
       <p:sp>
         <p:nvSpPr>
@@ -17829,6 +18485,10 @@
           </a:solidFill>
           <a:ln/>
         </p:spPr>
+        <p:txBody>
+          <a:bodyPr/>
+          <a:p/>
+        </p:txBody>
       </p:sp>
       <p:sp>
         <p:nvSpPr>
@@ -17929,6 +18589,10 @@
           </a:solidFill>
           <a:ln/>
         </p:spPr>
+        <p:txBody>
+          <a:bodyPr/>
+          <a:p/>
+        </p:txBody>
       </p:sp>
       <p:sp>
         <p:nvSpPr>
@@ -18099,6 +18763,10 @@
           </a:solidFill>
           <a:ln/>
         </p:spPr>
+        <p:txBody>
+          <a:bodyPr/>
+          <a:p/>
+        </p:txBody>
       </p:sp>
       <p:sp>
         <p:nvSpPr>
@@ -18160,6 +18828,10 @@
           </a:solidFill>
           <a:ln/>
         </p:spPr>
+        <p:txBody>
+          <a:bodyPr/>
+          <a:p/>
+        </p:txBody>
       </p:sp>
       <p:sp>
         <p:nvSpPr>
@@ -18260,6 +18932,10 @@
           </a:solidFill>
           <a:ln/>
         </p:spPr>
+        <p:txBody>
+          <a:bodyPr/>
+          <a:p/>
+        </p:txBody>
       </p:sp>
       <p:sp>
         <p:nvSpPr>
@@ -18280,6 +18956,10 @@
           </a:solidFill>
           <a:ln/>
         </p:spPr>
+        <p:txBody>
+          <a:bodyPr/>
+          <a:p/>
+        </p:txBody>
       </p:sp>
       <p:sp>
         <p:nvSpPr>
@@ -18341,6 +19021,10 @@
           </a:solidFill>
           <a:ln/>
         </p:spPr>
+        <p:txBody>
+          <a:bodyPr/>
+          <a:p/>
+        </p:txBody>
       </p:sp>
       <p:sp>
         <p:nvSpPr>
@@ -18361,6 +19045,10 @@
           </a:solidFill>
           <a:ln/>
         </p:spPr>
+        <p:txBody>
+          <a:bodyPr/>
+          <a:p/>
+        </p:txBody>
       </p:sp>
       <p:sp>
         <p:nvSpPr>
@@ -18422,6 +19110,10 @@
           </a:solidFill>
           <a:ln/>
         </p:spPr>
+        <p:txBody>
+          <a:bodyPr/>
+          <a:p/>
+        </p:txBody>
       </p:sp>
       <p:sp>
         <p:nvSpPr>
@@ -18442,6 +19134,10 @@
           </a:solidFill>
           <a:ln/>
         </p:spPr>
+        <p:txBody>
+          <a:bodyPr/>
+          <a:p/>
+        </p:txBody>
       </p:sp>
       <p:sp>
         <p:nvSpPr>
@@ -18542,6 +19238,10 @@
           </a:solidFill>
           <a:ln/>
         </p:spPr>
+        <p:txBody>
+          <a:bodyPr/>
+          <a:p/>
+        </p:txBody>
       </p:sp>
       <p:sp>
         <p:nvSpPr>
@@ -18712,6 +19412,10 @@
           </a:solidFill>
           <a:ln/>
         </p:spPr>
+        <p:txBody>
+          <a:bodyPr/>
+          <a:p/>
+        </p:txBody>
       </p:sp>
       <p:sp>
         <p:nvSpPr>
@@ -18854,6 +19558,10 @@
           </a:solidFill>
           <a:ln/>
         </p:spPr>
+        <p:txBody>
+          <a:bodyPr/>
+          <a:p/>
+        </p:txBody>
       </p:sp>
       <p:sp>
         <p:nvSpPr>
@@ -18957,6 +19665,10 @@
           </a:solidFill>
           <a:ln/>
         </p:spPr>
+        <p:txBody>
+          <a:bodyPr/>
+          <a:p/>
+        </p:txBody>
       </p:sp>
       <p:sp>
         <p:nvSpPr>
@@ -19169,6 +19881,10 @@
           </a:solidFill>
           <a:ln/>
         </p:spPr>
+        <p:txBody>
+          <a:bodyPr/>
+          <a:p/>
+        </p:txBody>
       </p:sp>
       <p:sp>
         <p:nvSpPr>
@@ -19311,6 +20027,10 @@
           </a:solidFill>
           <a:ln/>
         </p:spPr>
+        <p:txBody>
+          <a:bodyPr/>
+          <a:p/>
+        </p:txBody>
       </p:sp>
       <p:sp>
         <p:nvSpPr>
@@ -19414,6 +20134,10 @@
           </a:solidFill>
           <a:ln/>
         </p:spPr>
+        <p:txBody>
+          <a:bodyPr/>
+          <a:p/>
+        </p:txBody>
       </p:sp>
       <p:sp>
         <p:nvSpPr>
@@ -19517,6 +20241,10 @@
           </a:solidFill>
           <a:ln/>
         </p:spPr>
+        <p:txBody>
+          <a:bodyPr/>
+          <a:p/>
+        </p:txBody>
       </p:sp>
       <p:sp>
         <p:nvSpPr>
@@ -19620,6 +20348,10 @@
           </a:solidFill>
           <a:ln/>
         </p:spPr>
+        <p:txBody>
+          <a:bodyPr/>
+          <a:p/>
+        </p:txBody>
       </p:sp>
       <p:sp>
         <p:nvSpPr>
@@ -19832,6 +20564,10 @@
           </a:solidFill>
           <a:ln/>
         </p:spPr>
+        <p:txBody>
+          <a:bodyPr/>
+          <a:p/>
+        </p:txBody>
       </p:sp>
       <p:sp>
         <p:nvSpPr>
@@ -19974,6 +20710,10 @@
           </a:solidFill>
           <a:ln/>
         </p:spPr>
+        <p:txBody>
+          <a:bodyPr/>
+          <a:p/>
+        </p:txBody>
       </p:sp>
       <p:sp>
         <p:nvSpPr>
@@ -19994,6 +20734,10 @@
           </a:solidFill>
           <a:ln/>
         </p:spPr>
+        <p:txBody>
+          <a:bodyPr/>
+          <a:p/>
+        </p:txBody>
       </p:sp>
       <p:sp>
         <p:nvSpPr>
@@ -20106,7 +20850,7 @@
                 <a:ea typeface="Microsoft JhengHei" pitchFamily="34" charset="-122"/>
                 <a:cs typeface="Microsoft JhengHei" pitchFamily="34" charset="-120"/>
               </a:rPr>
-              <a:t>Apple Health／Garmin／Google／Strava</a:t>
+              <a:t>Apple Health／Garmin／Google／Strava／Oura／WHOOP／Oura／WHOOP</a:t>
             </a:r>
             <a:endParaRPr lang="en-US" sz="1050" dirty="0"/>
           </a:p>
@@ -20134,6 +20878,10 @@
             <a:prstDash val="solid"/>
           </a:ln>
         </p:spPr>
+        <p:txBody>
+          <a:bodyPr/>
+          <a:p/>
+        </p:txBody>
       </p:sp>
       <p:sp>
         <p:nvSpPr>
@@ -20168,7 +20916,7 @@
                 <a:ea typeface="Microsoft JhengHei" pitchFamily="34" charset="-122"/>
                 <a:cs typeface="Microsoft JhengHei" pitchFamily="34" charset="-120"/>
               </a:rPr>
-              <a:t>現況  4 家 parser,registry 6 家</a:t>
+              <a:t>現況  6 家 parser,registry 6 家（8 種方言）</a:t>
             </a:r>
             <a:endParaRPr lang="en-US" sz="1000" dirty="0"/>
           </a:p>
@@ -20195,6 +20943,10 @@
           </a:solidFill>
           <a:ln/>
         </p:spPr>
+        <p:txBody>
+          <a:bodyPr/>
+          <a:p/>
+        </p:txBody>
       </p:sp>
       <p:sp>
         <p:nvSpPr>
@@ -20215,6 +20967,10 @@
           </a:solidFill>
           <a:ln/>
         </p:spPr>
+        <p:txBody>
+          <a:bodyPr/>
+          <a:p/>
+        </p:txBody>
       </p:sp>
       <p:sp>
         <p:nvSpPr>
@@ -20355,6 +21111,10 @@
             <a:prstDash val="solid"/>
           </a:ln>
         </p:spPr>
+        <p:txBody>
+          <a:bodyPr/>
+          <a:p/>
+        </p:txBody>
       </p:sp>
       <p:sp>
         <p:nvSpPr>
@@ -20389,7 +21149,7 @@
                 <a:ea typeface="Microsoft JhengHei" pitchFamily="34" charset="-122"/>
                 <a:cs typeface="Microsoft JhengHei" pitchFamily="34" charset="-120"/>
               </a:rPr>
-              <a:t>現況  300 tests、20 golden cases 全綠</a:t>
+              <a:t>現況  470 tests、20 golden cases 全綠</a:t>
             </a:r>
             <a:endParaRPr lang="en-US" sz="1000" dirty="0"/>
           </a:p>
@@ -20416,6 +21176,10 @@
           </a:solidFill>
           <a:ln/>
         </p:spPr>
+        <p:txBody>
+          <a:bodyPr/>
+          <a:p/>
+        </p:txBody>
       </p:sp>
       <p:sp>
         <p:nvSpPr>
@@ -20436,6 +21200,10 @@
           </a:solidFill>
           <a:ln/>
         </p:spPr>
+        <p:txBody>
+          <a:bodyPr/>
+          <a:p/>
+        </p:txBody>
       </p:sp>
       <p:sp>
         <p:nvSpPr>
@@ -20576,6 +21344,10 @@
             <a:prstDash val="solid"/>
           </a:ln>
         </p:spPr>
+        <p:txBody>
+          <a:bodyPr/>
+          <a:p/>
+        </p:txBody>
       </p:sp>
       <p:sp>
         <p:nvSpPr>
@@ -20637,6 +21409,10 @@
           </a:solidFill>
           <a:ln/>
         </p:spPr>
+        <p:txBody>
+          <a:bodyPr/>
+          <a:p/>
+        </p:txBody>
       </p:sp>
       <p:sp>
         <p:nvSpPr>
@@ -20657,6 +21433,10 @@
           </a:solidFill>
           <a:ln/>
         </p:spPr>
+        <p:txBody>
+          <a:bodyPr/>
+          <a:p/>
+        </p:txBody>
       </p:sp>
       <p:sp>
         <p:nvSpPr>
@@ -20797,6 +21577,10 @@
             <a:prstDash val="solid"/>
           </a:ln>
         </p:spPr>
+        <p:txBody>
+          <a:bodyPr/>
+          <a:p/>
+        </p:txBody>
       </p:sp>
       <p:sp>
         <p:nvSpPr>
@@ -20858,6 +21642,10 @@
           </a:solidFill>
           <a:ln/>
         </p:spPr>
+        <p:txBody>
+          <a:bodyPr/>
+          <a:p/>
+        </p:txBody>
       </p:sp>
       <p:sp>
         <p:nvSpPr>
@@ -20878,6 +21666,10 @@
           </a:solidFill>
           <a:ln/>
         </p:spPr>
+        <p:txBody>
+          <a:bodyPr/>
+          <a:p/>
+        </p:txBody>
       </p:sp>
       <p:sp>
         <p:nvSpPr>
@@ -21018,6 +21810,10 @@
             <a:prstDash val="solid"/>
           </a:ln>
         </p:spPr>
+        <p:txBody>
+          <a:bodyPr/>
+          <a:p/>
+        </p:txBody>
       </p:sp>
       <p:sp>
         <p:nvSpPr>
@@ -21052,7 +21848,7 @@
                 <a:ea typeface="Microsoft JhengHei" pitchFamily="34" charset="-122"/>
                 <a:cs typeface="Microsoft JhengHei" pitchFamily="34" charset="-120"/>
               </a:rPr>
-              <a:t>待做  驗證器未填,沒有 AS</a:t>
+              <a:t>現況  private-development adapter；待做 production authorization server</a:t>
             </a:r>
             <a:endParaRPr lang="en-US" sz="1000" dirty="0"/>
           </a:p>
@@ -21079,6 +21875,10 @@
           </a:solidFill>
           <a:ln/>
         </p:spPr>
+        <p:txBody>
+          <a:bodyPr/>
+          <a:p/>
+        </p:txBody>
       </p:sp>
       <p:sp>
         <p:nvSpPr>
@@ -21099,6 +21899,10 @@
           </a:solidFill>
           <a:ln/>
         </p:spPr>
+        <p:txBody>
+          <a:bodyPr/>
+          <a:p/>
+        </p:txBody>
       </p:sp>
       <p:sp>
         <p:nvSpPr>
@@ -21239,6 +22043,10 @@
             <a:prstDash val="solid"/>
           </a:ln>
         </p:spPr>
+        <p:txBody>
+          <a:bodyPr/>
+          <a:p/>
+        </p:txBody>
       </p:sp>
       <p:sp>
         <p:nvSpPr>
@@ -21300,6 +22108,10 @@
           </a:solidFill>
           <a:ln/>
         </p:spPr>
+        <p:txBody>
+          <a:bodyPr/>
+          <a:p/>
+        </p:txBody>
       </p:sp>
       <p:sp>
         <p:nvSpPr>
@@ -21320,6 +22132,10 @@
           </a:solidFill>
           <a:ln/>
         </p:spPr>
+        <p:txBody>
+          <a:bodyPr/>
+          <a:p/>
+        </p:txBody>
       </p:sp>
       <p:sp>
         <p:nvSpPr>
@@ -21393,7 +22209,7 @@
                 <a:ea typeface="Microsoft JhengHei" pitchFamily="34" charset="-122"/>
                 <a:cs typeface="Microsoft JhengHei" pitchFamily="34" charset="-120"/>
               </a:rPr>
-              <a:t>Phase 2 local engine</a:t>
+              <a:t>User-controlled private engine</a:t>
             </a:r>
             <a:endParaRPr lang="en-US" sz="1300" dirty="0"/>
           </a:p>
@@ -21460,6 +22276,10 @@
             <a:prstDash val="solid"/>
           </a:ln>
         </p:spPr>
+        <p:txBody>
+          <a:bodyPr/>
+          <a:p/>
+        </p:txBody>
       </p:sp>
       <p:sp>
         <p:nvSpPr>
@@ -21494,7 +22314,7 @@
                 <a:ea typeface="Microsoft JhengHei" pitchFamily="34" charset="-122"/>
                 <a:cs typeface="Microsoft JhengHei" pitchFamily="34" charset="-120"/>
               </a:rPr>
-              <a:t>待做  一行程式都沒有</a:t>
+              <a:t>待做  local bundle／持久層／connector 權限</a:t>
             </a:r>
             <a:endParaRPr lang="en-US" sz="1000" dirty="0"/>
           </a:p>
@@ -21521,6 +22341,10 @@
           </a:solidFill>
           <a:ln/>
         </p:spPr>
+        <p:txBody>
+          <a:bodyPr/>
+          <a:p/>
+        </p:txBody>
       </p:sp>
       <p:sp>
         <p:nvSpPr>
@@ -21541,6 +22365,10 @@
           </a:solidFill>
           <a:ln/>
         </p:spPr>
+        <p:txBody>
+          <a:bodyPr/>
+          <a:p/>
+        </p:txBody>
       </p:sp>
       <p:sp>
         <p:nvSpPr>
@@ -21681,6 +22509,10 @@
             <a:prstDash val="solid"/>
           </a:ln>
         </p:spPr>
+        <p:txBody>
+          <a:bodyPr/>
+          <a:p/>
+        </p:txBody>
       </p:sp>
       <p:sp>
         <p:nvSpPr>
@@ -21742,6 +22574,10 @@
           </a:solidFill>
           <a:ln/>
         </p:spPr>
+        <p:txBody>
+          <a:bodyPr/>
+          <a:p/>
+        </p:txBody>
       </p:sp>
       <p:sp>
         <p:nvSpPr>
@@ -21762,6 +22598,10 @@
           </a:solidFill>
           <a:ln/>
         </p:spPr>
+        <p:txBody>
+          <a:bodyPr/>
+          <a:p/>
+        </p:txBody>
       </p:sp>
       <p:sp>
         <p:nvSpPr>
@@ -21902,6 +22742,10 @@
             <a:prstDash val="solid"/>
           </a:ln>
         </p:spPr>
+        <p:txBody>
+          <a:bodyPr/>
+          <a:p/>
+        </p:txBody>
       </p:sp>
       <p:sp>
         <p:nvSpPr>
@@ -22033,6 +22877,10 @@
           </a:solidFill>
           <a:ln/>
         </p:spPr>
+        <p:txBody>
+          <a:bodyPr/>
+          <a:p/>
+        </p:txBody>
       </p:sp>
       <p:sp>
         <p:nvSpPr>
@@ -22148,7 +22996,7 @@
                 <a:ea typeface="Microsoft JhengHei" pitchFamily="34" charset="-122"/>
                 <a:cs typeface="Microsoft JhengHei" pitchFamily="34" charset="-120"/>
               </a:rPr>
-              <a:t>我們要的是運動領域的同一個位置:資料整合 + AI 規劃 + MCP 的基礎層。</a:t>
+              <a:t>我們要的是運動領域的決策基礎層:證據、規則與可追溯的 from → to。</a:t>
             </a:r>
             <a:endParaRPr lang="en-US" sz="2000" dirty="0"/>
           </a:p>
@@ -22175,6 +23023,10 @@
           </a:solidFill>
           <a:ln/>
         </p:spPr>
+        <p:txBody>
+          <a:bodyPr/>
+          <a:p/>
+        </p:txBody>
       </p:sp>
       <p:sp>
         <p:nvSpPr>
@@ -22278,6 +23130,10 @@
           </a:solidFill>
           <a:ln/>
         </p:spPr>
+        <p:txBody>
+          <a:bodyPr/>
+          <a:p/>
+        </p:txBody>
       </p:sp>
       <p:sp>
         <p:nvSpPr>
@@ -22381,6 +23237,10 @@
           </a:solidFill>
           <a:ln/>
         </p:spPr>
+        <p:txBody>
+          <a:bodyPr/>
+          <a:p/>
+        </p:txBody>
       </p:sp>
       <p:sp>
         <p:nvSpPr>
@@ -22477,7 +23337,7 @@
                 <a:ea typeface="Microsoft JhengHei" pitchFamily="34" charset="-122"/>
                 <a:cs typeface="Microsoft JhengHei" pitchFamily="34" charset="-120"/>
               </a:rPr>
-              <a:t>Intelligence Layer</a:t>
+              <a:t>Decision Layer</a:t>
             </a:r>
             <a:endParaRPr lang="en-US" sz="1400" dirty="0"/>
           </a:p>
@@ -22516,7 +23376,7 @@
                 <a:ea typeface="Microsoft JhengHei" pitchFamily="34" charset="-122"/>
                 <a:cs typeface="Microsoft JhengHei" pitchFamily="34" charset="-120"/>
               </a:rPr>
-              <a:t>上層可以換成 AR 眼鏡,底層可以換掉任何一家裝置商 —— 中間這一層不用動。</a:t>
+              <a:t>上層可以換成任何 AI host,底層可以換掉任何一家裝置商 —— 中間的決策層不用動。</a:t>
             </a:r>
             <a:endParaRPr lang="en-US" sz="1250" dirty="0"/>
           </a:p>
@@ -22615,6 +23475,10 @@
           </a:solidFill>
           <a:ln/>
         </p:spPr>
+        <p:txBody>
+          <a:bodyPr/>
+          <a:p/>
+        </p:txBody>
       </p:sp>
       <p:sp>
         <p:nvSpPr>
@@ -22635,6 +23499,10 @@
           </a:solidFill>
           <a:ln/>
         </p:spPr>
+        <p:txBody>
+          <a:bodyPr/>
+          <a:p/>
+        </p:txBody>
       </p:sp>
       <p:sp>
         <p:nvSpPr>
@@ -22779,6 +23647,10 @@
             <a:prstDash val="solid"/>
           </a:ln>
         </p:spPr>
+        <p:txBody>
+          <a:bodyPr/>
+          <a:p/>
+        </p:txBody>
       </p:sp>
       <p:sp>
         <p:nvSpPr>
@@ -22813,7 +23685,7 @@
                 <a:ea typeface="Arial" pitchFamily="34" charset="-122"/>
                 <a:cs typeface="Arial" pitchFamily="34" charset="-120"/>
               </a:rPr>
-              <a:t>Evidra — Fitness Decision Engine</a:t>
+              <a:t>Pacevera — Fitness Decision Engine</a:t>
             </a:r>
             <a:endParaRPr lang="en-US" sz="1600" dirty="0"/>
           </a:p>
@@ -22852,7 +23724,7 @@
                 <a:ea typeface="Microsoft JhengHei" pitchFamily="34" charset="-122"/>
                 <a:cs typeface="Microsoft JhengHei" pitchFamily="34" charset="-120"/>
               </a:rPr>
-              <a:t>下一步:送出 desktop extension 上架審查;遠端與 Phase 2 接在後面</a:t>
+              <a:t>下一步:先完成 P0 隱私契約與 P1 local private engine;remote 是後續 access channel,企業私有部署再後續</a:t>
             </a:r>
             <a:endParaRPr lang="en-US" sz="1250" dirty="0"/>
           </a:p>
@@ -22910,6 +23782,10 @@
           </a:solidFill>
           <a:ln/>
         </p:spPr>
+        <p:txBody>
+          <a:bodyPr/>
+          <a:p/>
+        </p:txBody>
       </p:sp>
       <p:sp>
         <p:nvSpPr>
@@ -23052,6 +23928,10 @@
           </a:solidFill>
           <a:ln/>
         </p:spPr>
+        <p:txBody>
+          <a:bodyPr/>
+          <a:p/>
+        </p:txBody>
       </p:sp>
       <p:sp>
         <p:nvSpPr>
@@ -23153,6 +24033,10 @@
             <a:prstDash val="solid"/>
           </a:ln>
         </p:spPr>
+        <p:txBody>
+          <a:bodyPr/>
+          <a:p/>
+        </p:txBody>
       </p:sp>
       <p:sp>
         <p:nvSpPr>
@@ -23214,6 +24098,10 @@
           </a:solidFill>
           <a:ln/>
         </p:spPr>
+        <p:txBody>
+          <a:bodyPr/>
+          <a:p/>
+        </p:txBody>
       </p:sp>
       <p:sp>
         <p:nvSpPr>
@@ -23315,6 +24203,10 @@
             <a:prstDash val="solid"/>
           </a:ln>
         </p:spPr>
+        <p:txBody>
+          <a:bodyPr/>
+          <a:p/>
+        </p:txBody>
       </p:sp>
       <p:sp>
         <p:nvSpPr>
@@ -23376,6 +24268,10 @@
           </a:solidFill>
           <a:ln/>
         </p:spPr>
+        <p:txBody>
+          <a:bodyPr/>
+          <a:p/>
+        </p:txBody>
       </p:sp>
       <p:sp>
         <p:nvSpPr>
@@ -23477,6 +24373,10 @@
             <a:prstDash val="solid"/>
           </a:ln>
         </p:spPr>
+        <p:txBody>
+          <a:bodyPr/>
+          <a:p/>
+        </p:txBody>
       </p:sp>
       <p:sp>
         <p:nvSpPr>
@@ -23608,6 +24508,10 @@
           </a:solidFill>
           <a:ln/>
         </p:spPr>
+        <p:txBody>
+          <a:bodyPr/>
+          <a:p/>
+        </p:txBody>
       </p:sp>
       <p:sp>
         <p:nvSpPr>
@@ -23750,6 +24654,10 @@
           </a:solidFill>
           <a:ln/>
         </p:spPr>
+        <p:txBody>
+          <a:bodyPr/>
+          <a:p/>
+        </p:txBody>
       </p:sp>
       <p:sp>
         <p:nvSpPr>
@@ -23959,6 +24867,10 @@
           </a:solidFill>
           <a:ln/>
         </p:spPr>
+        <p:txBody>
+          <a:bodyPr/>
+          <a:p/>
+        </p:txBody>
       </p:sp>
       <p:sp>
         <p:nvSpPr>
@@ -24101,6 +25013,10 @@
           </a:solidFill>
           <a:ln/>
         </p:spPr>
+        <p:txBody>
+          <a:bodyPr/>
+          <a:p/>
+        </p:txBody>
       </p:sp>
       <p:sp>
         <p:nvSpPr>
@@ -24204,6 +25120,10 @@
           </a:solidFill>
           <a:ln/>
         </p:spPr>
+        <p:txBody>
+          <a:bodyPr/>
+          <a:p/>
+        </p:txBody>
       </p:sp>
       <p:sp>
         <p:nvSpPr>
@@ -24416,6 +25336,10 @@
           </a:solidFill>
           <a:ln/>
         </p:spPr>
+        <p:txBody>
+          <a:bodyPr/>
+          <a:p/>
+        </p:txBody>
       </p:sp>
       <p:sp>
         <p:nvSpPr>
@@ -24558,6 +25482,10 @@
           </a:solidFill>
           <a:ln/>
         </p:spPr>
+        <p:txBody>
+          <a:bodyPr/>
+          <a:p/>
+        </p:txBody>
       </p:sp>
       <p:sp>
         <p:nvSpPr>
@@ -24658,6 +25586,10 @@
           </a:solidFill>
           <a:ln/>
         </p:spPr>
+        <p:txBody>
+          <a:bodyPr/>
+          <a:p/>
+        </p:txBody>
       </p:sp>
       <p:sp>
         <p:nvSpPr>
@@ -24828,6 +25760,10 @@
           </a:solidFill>
           <a:ln/>
         </p:spPr>
+        <p:txBody>
+          <a:bodyPr/>
+          <a:p/>
+        </p:txBody>
       </p:sp>
       <p:sp>
         <p:nvSpPr>
@@ -24970,6 +25906,10 @@
           </a:solidFill>
           <a:ln/>
         </p:spPr>
+        <p:txBody>
+          <a:bodyPr/>
+          <a:p/>
+        </p:txBody>
       </p:sp>
       <p:sp>
         <p:nvSpPr>
@@ -25154,6 +26094,10 @@
           </a:solidFill>
           <a:ln/>
         </p:spPr>
+        <p:txBody>
+          <a:bodyPr/>
+          <a:p/>
+        </p:txBody>
       </p:sp>
       <p:sp>
         <p:nvSpPr>
@@ -25417,6 +26361,10 @@
           </a:solidFill>
           <a:ln/>
         </p:spPr>
+        <p:txBody>
+          <a:bodyPr/>
+          <a:p/>
+        </p:txBody>
       </p:sp>
       <p:sp>
         <p:nvSpPr>
@@ -25559,6 +26507,10 @@
           </a:solidFill>
           <a:ln/>
         </p:spPr>
+        <p:txBody>
+          <a:bodyPr/>
+          <a:p/>
+        </p:txBody>
       </p:sp>
       <p:sp>
         <p:nvSpPr>
@@ -25579,6 +26531,10 @@
           </a:solidFill>
           <a:ln/>
         </p:spPr>
+        <p:txBody>
+          <a:bodyPr/>
+          <a:p/>
+        </p:txBody>
       </p:sp>
       <p:sp>
         <p:nvSpPr>
@@ -25679,6 +26635,10 @@
           </a:solidFill>
           <a:ln/>
         </p:spPr>
+        <p:txBody>
+          <a:bodyPr/>
+          <a:p/>
+        </p:txBody>
       </p:sp>
       <p:sp>
         <p:nvSpPr>
@@ -25699,6 +26659,10 @@
           </a:solidFill>
           <a:ln/>
         </p:spPr>
+        <p:txBody>
+          <a:bodyPr/>
+          <a:p/>
+        </p:txBody>
       </p:sp>
       <p:sp>
         <p:nvSpPr>
@@ -25799,6 +26763,10 @@
           </a:solidFill>
           <a:ln/>
         </p:spPr>
+        <p:txBody>
+          <a:bodyPr/>
+          <a:p/>
+        </p:txBody>
       </p:sp>
       <p:sp>
         <p:nvSpPr>
@@ -25819,6 +26787,10 @@
           </a:solidFill>
           <a:ln/>
         </p:spPr>
+        <p:txBody>
+          <a:bodyPr/>
+          <a:p/>
+        </p:txBody>
       </p:sp>
       <p:sp>
         <p:nvSpPr>
@@ -25919,6 +26891,10 @@
           </a:solidFill>
           <a:ln/>
         </p:spPr>
+        <p:txBody>
+          <a:bodyPr/>
+          <a:p/>
+        </p:txBody>
       </p:sp>
       <p:sp>
         <p:nvSpPr>
@@ -25939,6 +26915,10 @@
           </a:solidFill>
           <a:ln/>
         </p:spPr>
+        <p:txBody>
+          <a:bodyPr/>
+          <a:p/>
+        </p:txBody>
       </p:sp>
       <p:sp>
         <p:nvSpPr>

--- a/docs/Fitness-MCP-Product-Vision.pptx
+++ b/docs/Fitness-MCP-Product-Vision.pptx
@@ -3436,7 +3436,7 @@
                 <a:ea typeface="Microsoft JhengHei" pitchFamily="34" charset="-122"/>
                 <a:cs typeface="Microsoft JhengHei" pitchFamily="34" charset="-120"/>
               </a:rPr>
-              <a:t>讓任何 AI 都能做出可重現的訓練決策 —— 而不必看見你完整的原始健康資料。</a:t>
+              <a:t>讓你熟悉的 AI 根據連續 Evidence 做出可重現的訓練決策 —— 健康歷史仍由你控制。</a:t>
             </a:r>
             <a:endParaRPr lang="en-US" sz="1900" dirty="0"/>
           </a:p>
@@ -3502,7 +3502,7 @@
                 <a:ea typeface="Microsoft JhengHei" pitchFamily="34" charset="-122"/>
                 <a:cs typeface="Microsoft JhengHei" pitchFamily="34" charset="-120"/>
               </a:rPr>
-              <a:t>核心概念 · 核心功能 · 應用情境</a:t>
+              <a:t>產品終局 · v0.4.2 → v0.5.0 · Phase 0–4</a:t>
             </a:r>
             <a:endParaRPr lang="en-US" sz="1300" dirty="0"/>
           </a:p>
@@ -10395,7 +10395,7 @@
                 <a:ea typeface="Microsoft JhengHei" pitchFamily="34" charset="-122"/>
                 <a:cs typeface="Microsoft JhengHei" pitchFamily="34" charset="-120"/>
               </a:rPr>
-              <a:t>OAuth 與同步在 Phase 2 的使用者環境執行,hosted 不持有 refresh token。</a:t>
+              <a:t>Phase 2 在使用者控制環境完成授權、同步、正規化與撤銷;hosted 不持有 provider token。</a:t>
             </a:r>
             <a:endParaRPr lang="en-US" sz="2000" dirty="0"/>
           </a:p>
@@ -10590,7 +10590,7 @@
                 <a:ea typeface="Arial" pitchFamily="34" charset="-122"/>
                 <a:cs typeface="Arial" pitchFamily="34" charset="-120"/>
               </a:rPr>
-              <a:t>Webhook</a:t>
+              <a:t>Revoke</a:t>
             </a:r>
             <a:endParaRPr lang="en-US" sz="1900" dirty="0"/>
           </a:p>
@@ -10915,7 +10915,7 @@
                 <a:ea typeface="Microsoft JhengHei" pitchFamily="34" charset="-122"/>
                 <a:cs typeface="Microsoft JhengHei" pitchFamily="34" charset="-120"/>
               </a:rPr>
-              <a:t>Fitbit</a:t>
+              <a:t>Oura</a:t>
             </a:r>
             <a:endParaRPr lang="en-US" sz="1300" dirty="0"/>
           </a:p>
@@ -10980,7 +10980,7 @@
                 <a:ea typeface="Microsoft JhengHei" pitchFamily="34" charset="-122"/>
                 <a:cs typeface="Microsoft JhengHei" pitchFamily="34" charset="-120"/>
               </a:rPr>
-              <a:t>TrainingPeaks</a:t>
+              <a:t>WHOOP</a:t>
             </a:r>
             <a:endParaRPr lang="en-US" sz="1300" dirty="0"/>
           </a:p>
@@ -11045,7 +11045,7 @@
                 <a:ea typeface="Microsoft JhengHei" pitchFamily="34" charset="-122"/>
                 <a:cs typeface="Microsoft JhengHei" pitchFamily="34" charset="-120"/>
               </a:rPr>
-              <a:t>Google Calendar</a:t>
+              <a:t>Manual / CSV</a:t>
             </a:r>
             <a:endParaRPr lang="en-US" sz="1300" dirty="0"/>
           </a:p>
@@ -11110,7 +11110,7 @@
                 <a:ea typeface="Microsoft JhengHei" pitchFamily="34" charset="-122"/>
                 <a:cs typeface="Microsoft JhengHei" pitchFamily="34" charset="-120"/>
               </a:rPr>
-              <a:t>Notion</a:t>
+              <a:t>Google Health</a:t>
             </a:r>
             <a:endParaRPr lang="en-US" sz="1300" dirty="0"/>
           </a:p>
@@ -11149,7 +11149,7 @@
                 <a:ea typeface="Microsoft JhengHei" pitchFamily="34" charset="-122"/>
                 <a:cs typeface="Microsoft JhengHei" pitchFamily="34" charset="-120"/>
               </a:rPr>
-              <a:t>新增一家資料源不用動上層;而在 Phase 1,這一層根本不在我們這邊。</a:t>
+              <a:t>目前 6 家 parser;Oura／WHOOP 尚待真實去識別化 fixture。新增來源不改 Decision Engine。</a:t>
             </a:r>
             <a:endParaRPr lang="en-US" sz="1400" dirty="0"/>
           </a:p>
@@ -11323,7 +11323,7 @@
                 <a:ea typeface="Microsoft JhengHei" pitchFamily="34" charset="-122"/>
                 <a:cs typeface="Microsoft JhengHei" pitchFamily="34" charset="-120"/>
               </a:rPr>
-              <a:t>對外開放的六個 tool</a:t>
+              <a:t>v0.5.0 規劃的十個 public tools</a:t>
             </a:r>
             <a:endParaRPr lang="en-US" sz="3400" dirty="0"/>
           </a:p>
@@ -11365,7 +11365,7 @@
                 <a:ea typeface="Microsoft JhengHei" pitchFamily="34" charset="-122"/>
                 <a:cs typeface="Microsoft JhengHei" pitchFamily="34" charset="-120"/>
               </a:rPr>
-              <a:t>這就是產品的能力清單 —— 任何支援 MCP 的客戶端都能直接呼叫。</a:t>
+              <a:t>v0.4.2 已公開 6 個;v0.5.0 整合完成後新增 workout 與 coverage／trace／outcome。</a:t>
             </a:r>
             <a:endParaRPr lang="en-US" sz="2000" dirty="0"/>
           </a:p>
@@ -11454,7 +11454,8 @@
                 <a:ea typeface="Arial" pitchFamily="34" charset="-122"/>
                 <a:cs typeface="Arial" pitchFamily="34" charset="-120"/>
               </a:rPr>
-              <a:t>assess_fitness_state</a:t>
+              <a:t>assess_fitness_state
+get_evidence_coverage</a:t>
             </a:r>
             <a:endParaRPr lang="en-US" sz="1350" dirty="0"/>
           </a:p>
@@ -11496,7 +11497,7 @@
                 <a:ea typeface="Arial" pitchFamily="34" charset="-122"/>
                 <a:cs typeface="Arial" pitchFamily="34" charset="-120"/>
               </a:rPr>
-              <a:t>從證據算出當前狀態</a:t>
+              <a:t>狀態與訊號覆蓋</a:t>
             </a:r>
             <a:endParaRPr lang="en-US" sz="950" dirty="0"/>
           </a:p>
@@ -11605,7 +11606,8 @@
                 <a:ea typeface="Arial" pitchFamily="34" charset="-122"/>
                 <a:cs typeface="Arial" pitchFamily="34" charset="-120"/>
               </a:rPr>
-              <a:t>decide_session</a:t>
+              <a:t>decide_session
+explain_decision</a:t>
             </a:r>
             <a:endParaRPr lang="en-US" sz="1350" dirty="0"/>
           </a:p>
@@ -11647,7 +11649,7 @@
                 <a:ea typeface="Arial" pitchFamily="34" charset="-122"/>
                 <a:cs typeface="Arial" pitchFamily="34" charset="-120"/>
               </a:rPr>
-              <a:t>今天的課表要不要改,改成什麼</a:t>
+              <a:t>決策與版本化 trace</a:t>
             </a:r>
             <a:endParaRPr lang="en-US" sz="950" dirty="0"/>
           </a:p>
@@ -11907,7 +11909,8 @@
                 <a:ea typeface="Arial" pitchFamily="34" charset="-122"/>
                 <a:cs typeface="Arial" pitchFamily="34" charset="-120"/>
               </a:rPr>
-              <a:t>generate_plan</a:t>
+              <a:t>generate_plan
+generate_workout</a:t>
             </a:r>
             <a:endParaRPr lang="en-US" sz="1350" dirty="0"/>
           </a:p>
@@ -11949,7 +11952,7 @@
                 <a:ea typeface="Arial" pitchFamily="34" charset="-122"/>
                 <a:cs typeface="Arial" pitchFamily="34" charset="-120"/>
               </a:rPr>
-              <a:t>產生多週期計畫</a:t>
+              <a:t>多週計畫與單次 workout</a:t>
             </a:r>
             <a:endParaRPr lang="en-US" sz="950" dirty="0"/>
           </a:p>
@@ -12209,7 +12212,8 @@
                 <a:ea typeface="Arial" pitchFamily="34" charset="-122"/>
                 <a:cs typeface="Arial" pitchFamily="34" charset="-120"/>
               </a:rPr>
-              <a:t>commit_adjust_plan</a:t>
+              <a:t>commit_adjust_plan
+submit_outcome</a:t>
             </a:r>
             <a:endParaRPr lang="en-US" sz="1350" dirty="0"/>
           </a:p>
@@ -12251,7 +12255,7 @@
                 <a:ea typeface="Arial" pitchFamily="34" charset="-122"/>
                 <a:cs typeface="Arial" pitchFamily="34" charset="-120"/>
               </a:rPr>
-              <a:t>兩階段提交,寫回計畫</a:t>
+              <a:t>提交計畫與結果回報</a:t>
             </a:r>
             <a:endParaRPr lang="en-US" sz="950" dirty="0"/>
           </a:p>
@@ -12487,7 +12491,7 @@
                 <a:ea typeface="Microsoft JhengHei" pitchFamily="34" charset="-122"/>
                 <a:cs typeface="Microsoft JhengHei" pitchFamily="34" charset="-120"/>
               </a:rPr>
-              <a:t>先講清楚我們在蓋什麼,再講它能做什麼,最後用真實情境驗收。</a:t>
+              <a:t>先看產品終局,再看已交付能力,最後用真實情境與 roadmap 驗收。</a:t>
             </a:r>
             <a:endParaRPr lang="en-US" sz="2000" dirty="0"/>
           </a:p>
@@ -12779,7 +12783,7 @@
                 <a:ea typeface="Microsoft JhengHei" pitchFamily="34" charset="-122"/>
                 <a:cs typeface="Microsoft JhengHei" pitchFamily="34" charset="-120"/>
               </a:rPr>
-              <a:t>六個 tool,以及背後那個不呼叫模型的決策引擎</a:t>
+              <a:t>目前 6 tools、下一版 10 tools,以及版本化的 Engine 與 Rule Packages</a:t>
             </a:r>
             <a:endParaRPr lang="en-US" sz="1250" dirty="0"/>
           </a:p>
@@ -12925,7 +12929,7 @@
                 <a:ea typeface="Microsoft JhengHei" pitchFamily="34" charset="-122"/>
                 <a:cs typeface="Microsoft JhengHei" pitchFamily="34" charset="-120"/>
               </a:rPr>
-              <a:t>六個使用者真的會問的問題,以及每一題打到哪幾層</a:t>
+              <a:t>六個真實問題,以及從 v0.5.0 到 private engine 的交付順序</a:t>
             </a:r>
             <a:endParaRPr lang="en-US" sz="1250" dirty="0"/>
           </a:p>
@@ -13748,7 +13752,7 @@
                 <a:ea typeface="Microsoft JhengHei" pitchFamily="34" charset="-122"/>
                 <a:cs typeface="Microsoft JhengHei" pitchFamily="34" charset="-120"/>
               </a:rPr>
-              <a:t>三種部署,一條資料界線</a:t>
+              <a:t>三種部署,三句不同的隱私承諾</a:t>
             </a:r>
             <a:endParaRPr lang="en-US" sz="3400" dirty="0"/>
           </a:p>
@@ -13790,7 +13794,7 @@
                 <a:ea typeface="Microsoft JhengHei" pitchFamily="34" charset="-122"/>
                 <a:cs typeface="Microsoft JhengHei" pitchFamily="34" charset="-120"/>
               </a:rPr>
-              <a:t>同一套 domain package,差別只在 Evidence 在哪裡被處理。</a:t>
+              <a:t>同一顆 Engine 與 Rule Packages;差別是 Evidence、token、state 與計算由誰控制。</a:t>
             </a:r>
             <a:endParaRPr lang="en-US" sz="2000" dirty="0"/>
           </a:p>
@@ -13879,7 +13883,7 @@
                 <a:ea typeface="Arial" pitchFamily="34" charset="-122"/>
                 <a:cs typeface="Arial" pitchFamily="34" charset="-120"/>
               </a:rPr>
-              <a:t>Hosted remote</a:t>
+              <a:t>Local desktop</a:t>
             </a:r>
             <a:endParaRPr lang="en-US" sz="1600" dirty="0"/>
           </a:p>
@@ -13918,7 +13922,7 @@
                 <a:ea typeface="Microsoft JhengHei" pitchFamily="34" charset="-122"/>
                 <a:cs typeface="Microsoft JhengHei" pitchFamily="34" charset="-120"/>
               </a:rPr>
-              <a:t>短暫處理最小化 Evidence,永遠無狀態</a:t>
+              <a:t>今天可用:本機 MCPB 與手動／匯出 Evidence</a:t>
             </a:r>
             <a:endParaRPr lang="en-US" sz="1300" dirty="0"/>
           </a:p>
@@ -14007,7 +14011,7 @@
                 <a:ea typeface="Arial" pitchFamily="34" charset="-122"/>
                 <a:cs typeface="Arial" pitchFamily="34" charset="-120"/>
               </a:rPr>
-              <a:t>Hosted 的界線</a:t>
+              <a:t>User-controlled private</a:t>
             </a:r>
             <a:endParaRPr lang="en-US" sz="1600" dirty="0"/>
           </a:p>
@@ -14046,7 +14050,7 @@
                 <a:ea typeface="Microsoft JhengHei" pitchFamily="34" charset="-122"/>
                 <a:cs typeface="Microsoft JhengHei" pitchFamily="34" charset="-120"/>
               </a:rPr>
-              <a:t>不直連供應商、不持有 refresh token</a:t>
+              <a:t>Phase 2:connectors、state、plan、decision 都在你的環境</a:t>
             </a:r>
             <a:endParaRPr lang="en-US" sz="1300" dirty="0"/>
           </a:p>
@@ -14135,7 +14139,7 @@
                 <a:ea typeface="Arial" pitchFamily="34" charset="-122"/>
                 <a:cs typeface="Arial" pitchFamily="34" charset="-120"/>
               </a:rPr>
-              <a:t>Local / private</a:t>
+              <a:t>Controlled mobile</a:t>
             </a:r>
             <a:endParaRPr lang="en-US" sz="1600" dirty="0"/>
           </a:p>
@@ -14174,7 +14178,7 @@
                 <a:ea typeface="Microsoft JhengHei" pitchFamily="34" charset="-122"/>
                 <a:cs typeface="Microsoft JhengHei" pitchFamily="34" charset="-120"/>
               </a:rPr>
-              <a:t>connectors 與計算都在你的機器上跑</a:t>
+              <a:t>Phase 3:pairing／tunnel 先連回 private engine</a:t>
             </a:r>
             <a:endParaRPr lang="en-US" sz="1300" dirty="0"/>
           </a:p>
@@ -14263,7 +14267,7 @@
                 <a:ea typeface="Arial" pitchFamily="34" charset="-122"/>
                 <a:cs typeface="Arial" pitchFamily="34" charset="-120"/>
               </a:rPr>
-              <a:t>Private data plane</a:t>
+              <a:t>Hosted remote</a:t>
             </a:r>
             <a:endParaRPr lang="en-US" sz="1600" dirty="0"/>
           </a:p>
@@ -14302,7 +14306,7 @@
                 <a:ea typeface="Microsoft JhengHei" pitchFamily="34" charset="-122"/>
                 <a:cs typeface="Microsoft JhengHei" pitchFamily="34" charset="-120"/>
               </a:rPr>
-              <a:t>只有 user-controlled private 能做到原始資料不離開控制邊界</a:t>
+              <a:t>只承諾最小化、transient、不留存;目前 Blocked</a:t>
             </a:r>
             <a:endParaRPr lang="en-US" sz="1300" dirty="0"/>
           </a:p>
@@ -20641,7 +20645,7 @@
                 <a:ea typeface="Microsoft JhengHei" pitchFamily="34" charset="-122"/>
                 <a:cs typeface="Microsoft JhengHei" pitchFamily="34" charset="-120"/>
               </a:rPr>
-              <a:t>現況與待做,一張表講完</a:t>
+              <a:t>從已發行版本倒推下一階段</a:t>
             </a:r>
             <a:endParaRPr lang="en-US" sz="3400" dirty="0"/>
           </a:p>
@@ -20683,7 +20687,7 @@
                 <a:ea typeface="Microsoft JhengHei" pitchFamily="34" charset="-122"/>
                 <a:cs typeface="Microsoft JhengHei" pitchFamily="34" charset="-120"/>
               </a:rPr>
-              <a:t>已完成的附查證數字;待做的不寫沒有出處的驗收門檻。</a:t>
+              <a:t>先關閉 v0.5.0,再用產品頁驗證市場,之後進入 private engine、mobile 與 team。</a:t>
             </a:r>
             <a:endParaRPr lang="en-US" sz="2000" dirty="0"/>
           </a:p>
@@ -20811,7 +20815,7 @@
                 <a:ea typeface="Microsoft JhengHei" pitchFamily="34" charset="-122"/>
                 <a:cs typeface="Microsoft JhengHei" pitchFamily="34" charset="-120"/>
               </a:rPr>
-              <a:t>資料標準化</a:t>
+              <a:t>已發行 v0.4.2</a:t>
             </a:r>
             <a:endParaRPr lang="en-US" sz="1300" dirty="0"/>
           </a:p>
@@ -20850,7 +20854,7 @@
                 <a:ea typeface="Microsoft JhengHei" pitchFamily="34" charset="-122"/>
                 <a:cs typeface="Microsoft JhengHei" pitchFamily="34" charset="-120"/>
               </a:rPr>
-              <a:t>Apple Health／Garmin／Google／Strava／Oura／WHOOP／Oura／WHOOP</a:t>
+              <a:t>Desktop MCPB · 6 public tools</a:t>
             </a:r>
             <a:endParaRPr lang="en-US" sz="1050" dirty="0"/>
           </a:p>
@@ -20916,7 +20920,7 @@
                 <a:ea typeface="Microsoft JhengHei" pitchFamily="34" charset="-122"/>
                 <a:cs typeface="Microsoft JhengHei" pitchFamily="34" charset="-120"/>
               </a:rPr>
-              <a:t>現況  6 家 parser,registry 6 家（8 種方言）</a:t>
+              <a:t>Engine 1.6.0 · legacy Library 1.4.0</a:t>
             </a:r>
             <a:endParaRPr lang="en-US" sz="1000" dirty="0"/>
           </a:p>
@@ -21044,7 +21048,7 @@
                 <a:ea typeface="Microsoft JhengHei" pitchFamily="34" charset="-122"/>
                 <a:cs typeface="Microsoft JhengHei" pitchFamily="34" charset="-120"/>
               </a:rPr>
-              <a:t>確定性計算</a:t>
+              <a:t>main 已完成</a:t>
             </a:r>
             <a:endParaRPr lang="en-US" sz="1300" dirty="0"/>
           </a:p>
@@ -21083,7 +21087,7 @@
                 <a:ea typeface="Microsoft JhengHei" pitchFamily="34" charset="-122"/>
                 <a:cs typeface="Microsoft JhengHei" pitchFamily="34" charset="-120"/>
               </a:rPr>
-              <a:t>ACWR／ATL／CTL／TSB 與分肌群疲勞</a:t>
+              <a:t>trace／outcome／continuity／package lifecycle</a:t>
             </a:r>
             <a:endParaRPr lang="en-US" sz="1050" dirty="0"/>
           </a:p>
@@ -21149,7 +21153,7 @@
                 <a:ea typeface="Microsoft JhengHei" pitchFamily="34" charset="-122"/>
                 <a:cs typeface="Microsoft JhengHei" pitchFamily="34" charset="-120"/>
               </a:rPr>
-              <a:t>現況  470 tests、20 golden cases 全綠</a:t>
+              <a:t>graph viewer · harness · regression gate</a:t>
             </a:r>
             <a:endParaRPr lang="en-US" sz="1000" dirty="0"/>
           </a:p>
@@ -21277,7 +21281,7 @@
                 <a:ea typeface="Microsoft JhengHei" pitchFamily="34" charset="-122"/>
                 <a:cs typeface="Microsoft JhengHei" pitchFamily="34" charset="-120"/>
               </a:rPr>
-              <a:t>六個對外 tool</a:t>
+              <a:t>下一版 v0.5.0</a:t>
             </a:r>
             <a:endParaRPr lang="en-US" sz="1300" dirty="0"/>
           </a:p>
@@ -21316,7 +21320,7 @@
                 <a:ea typeface="Microsoft JhengHei" pitchFamily="34" charset="-122"/>
                 <a:cs typeface="Microsoft JhengHei" pitchFamily="34" charset="-120"/>
               </a:rPr>
-              <a:t>assess／decide／plan 三類</a:t>
+              <a:t>10 tools · Engine 1.6.0</a:t>
             </a:r>
             <a:endParaRPr lang="en-US" sz="1050" dirty="0"/>
           </a:p>
@@ -21382,7 +21386,7 @@
                 <a:ea typeface="Microsoft JhengHei" pitchFamily="34" charset="-122"/>
                 <a:cs typeface="Microsoft JhengHei" pitchFamily="34" charset="-120"/>
               </a:rPr>
-              <a:t>現況  單次決策 0.443 ms</a:t>
+              <a:t>base_rules 1.1.0 · planned</a:t>
             </a:r>
             <a:endParaRPr lang="en-US" sz="1000" dirty="0"/>
           </a:p>
@@ -21510,7 +21514,7 @@
                 <a:ea typeface="Microsoft JhengHei" pitchFamily="34" charset="-122"/>
                 <a:cs typeface="Microsoft JhengHei" pitchFamily="34" charset="-120"/>
               </a:rPr>
-              <a:t>Transport</a:t>
+              <a:t>Phase 0</a:t>
             </a:r>
             <a:endParaRPr lang="en-US" sz="1300" dirty="0"/>
           </a:p>
@@ -21549,7 +21553,7 @@
                 <a:ea typeface="Microsoft JhengHei" pitchFamily="34" charset="-122"/>
                 <a:cs typeface="Microsoft JhengHei" pitchFamily="34" charset="-120"/>
               </a:rPr>
-              <a:t>stdio 與 Streamable HTTP</a:t>
+              <a:t>整合 workout／防注入與 privacy</a:t>
             </a:r>
             <a:endParaRPr lang="en-US" sz="1050" dirty="0"/>
           </a:p>
@@ -21615,7 +21619,7 @@
                 <a:ea typeface="Microsoft JhengHei" pitchFamily="34" charset="-122"/>
                 <a:cs typeface="Microsoft JhengHei" pitchFamily="34" charset="-120"/>
               </a:rPr>
-              <a:t>現況  兩種都通</a:t>
+              <a:t>pack · gates · publish</a:t>
             </a:r>
             <a:endParaRPr lang="en-US" sz="1000" dirty="0"/>
           </a:p>
@@ -21743,7 +21747,7 @@
                 <a:ea typeface="Microsoft JhengHei" pitchFamily="34" charset="-122"/>
                 <a:cs typeface="Microsoft JhengHei" pitchFamily="34" charset="-120"/>
               </a:rPr>
-              <a:t>OAuth Resource Server</a:t>
+              <a:t>Phase 1</a:t>
             </a:r>
             <a:endParaRPr lang="en-US" sz="1300" dirty="0"/>
           </a:p>
@@ -21782,7 +21786,7 @@
                 <a:ea typeface="Microsoft JhengHei" pitchFamily="34" charset="-122"/>
                 <a:cs typeface="Microsoft JhengHei" pitchFamily="34" charset="-120"/>
               </a:rPr>
-              <a:t>簽章驗證、issuer、audience、scope</a:t>
+              <a:t>pacevera.com 產品頁與真實 demo</a:t>
             </a:r>
             <a:endParaRPr lang="en-US" sz="1050" dirty="0"/>
           </a:p>
@@ -21848,7 +21852,7 @@
                 <a:ea typeface="Microsoft JhengHei" pitchFamily="34" charset="-122"/>
                 <a:cs typeface="Microsoft JhengHei" pitchFamily="34" charset="-120"/>
               </a:rPr>
-              <a:t>現況  private-development adapter；待做 production authorization server</a:t>
+              <a:t>3–5 interviews · activation／retention</a:t>
             </a:r>
             <a:endParaRPr lang="en-US" sz="1000" dirty="0"/>
           </a:p>
@@ -21976,7 +21980,7 @@
                 <a:ea typeface="Microsoft JhengHei" pitchFamily="34" charset="-122"/>
                 <a:cs typeface="Microsoft JhengHei" pitchFamily="34" charset="-120"/>
               </a:rPr>
-              <a:t>遠端部署</a:t>
+              <a:t>Phase 2</a:t>
             </a:r>
             <a:endParaRPr lang="en-US" sz="1300" dirty="0"/>
           </a:p>
@@ -22015,7 +22019,7 @@
                 <a:ea typeface="Microsoft JhengHei" pitchFamily="34" charset="-122"/>
                 <a:cs typeface="Microsoft JhengHei" pitchFamily="34" charset="-120"/>
               </a:rPr>
-              <a:t>HTTPS /mcp —— 手機場景的前提</a:t>
+              <a:t>Local private engine MVP</a:t>
             </a:r>
             <a:endParaRPr lang="en-US" sz="1050" dirty="0"/>
           </a:p>
@@ -22081,7 +22085,7 @@
                 <a:ea typeface="Microsoft JhengHei" pitchFamily="34" charset="-122"/>
                 <a:cs typeface="Microsoft JhengHei" pitchFamily="34" charset="-120"/>
               </a:rPr>
-              <a:t>待做  桌機上架不需要它</a:t>
+              <a:t>repository · connectors · continuity</a:t>
             </a:r>
             <a:endParaRPr lang="en-US" sz="1000" dirty="0"/>
           </a:p>
@@ -22209,7 +22213,7 @@
                 <a:ea typeface="Microsoft JhengHei" pitchFamily="34" charset="-122"/>
                 <a:cs typeface="Microsoft JhengHei" pitchFamily="34" charset="-120"/>
               </a:rPr>
-              <a:t>User-controlled private engine</a:t>
+              <a:t>Phase 3</a:t>
             </a:r>
             <a:endParaRPr lang="en-US" sz="1300" dirty="0"/>
           </a:p>
@@ -22248,7 +22252,7 @@
                 <a:ea typeface="Microsoft JhengHei" pitchFamily="34" charset="-122"/>
                 <a:cs typeface="Microsoft JhengHei" pitchFamily="34" charset="-120"/>
               </a:rPr>
-              <a:t>connectors 與計算搬進使用者環境</a:t>
+              <a:t>Controlled mobile · cross-host</a:t>
             </a:r>
             <a:endParaRPr lang="en-US" sz="1050" dirty="0"/>
           </a:p>
@@ -22314,7 +22318,7 @@
                 <a:ea typeface="Microsoft JhengHei" pitchFamily="34" charset="-122"/>
                 <a:cs typeface="Microsoft JhengHei" pitchFamily="34" charset="-120"/>
               </a:rPr>
-              <a:t>待做  local bundle／持久層／connector 權限</a:t>
+              <a:t>hosted remote 維持 Blocked</a:t>
             </a:r>
             <a:endParaRPr lang="en-US" sz="1000" dirty="0"/>
           </a:p>
@@ -22442,7 +22446,7 @@
                 <a:ea typeface="Microsoft JhengHei" pitchFamily="34" charset="-122"/>
                 <a:cs typeface="Microsoft JhengHei" pitchFamily="34" charset="-120"/>
               </a:rPr>
-              <a:t>計畫的持久層</a:t>
+              <a:t>Phase 4</a:t>
             </a:r>
             <a:endParaRPr lang="en-US" sz="1300" dirty="0"/>
           </a:p>
@@ -22481,7 +22485,7 @@
                 <a:ea typeface="Microsoft JhengHei" pitchFamily="34" charset="-122"/>
                 <a:cs typeface="Microsoft JhengHei" pitchFamily="34" charset="-120"/>
               </a:rPr>
-              <a:t>plan 與 planned workout 的表</a:t>
+              <a:t>Team／Enterprise · REST／SDK</a:t>
             </a:r>
             <a:endParaRPr lang="en-US" sz="1050" dirty="0"/>
           </a:p>
@@ -22547,7 +22551,7 @@
                 <a:ea typeface="Microsoft JhengHei" pitchFamily="34" charset="-122"/>
                 <a:cs typeface="Microsoft JhengHei" pitchFamily="34" charset="-120"/>
               </a:rPr>
-              <a:t>待做  列在 Future Migrations</a:t>
+              <a:t>governance · private deployment · pilot</a:t>
             </a:r>
             <a:endParaRPr lang="en-US" sz="1000" dirty="0"/>
           </a:p>
@@ -22675,7 +22679,7 @@
                 <a:ea typeface="Microsoft JhengHei" pitchFamily="34" charset="-122"/>
                 <a:cs typeface="Microsoft JhengHei" pitchFamily="34" charset="-120"/>
               </a:rPr>
-              <a:t>協定升級</a:t>
+              <a:t>Remote GO gate</a:t>
             </a:r>
             <a:endParaRPr lang="en-US" sz="1300" dirty="0"/>
           </a:p>
@@ -22714,7 +22718,7 @@
                 <a:ea typeface="Microsoft JhengHei" pitchFamily="34" charset="-122"/>
                 <a:cs typeface="Microsoft JhengHei" pitchFamily="34" charset="-120"/>
               </a:rPr>
-              <a:t>2025-06-18 → 2026-07-28</a:t>
+              <a:t>auth · HTTPS · redaction · privacy · E2E</a:t>
             </a:r>
             <a:endParaRPr lang="en-US" sz="1050" dirty="0"/>
           </a:p>
@@ -22780,7 +22784,7 @@
                 <a:ea typeface="Microsoft JhengHei" pitchFamily="34" charset="-122"/>
                 <a:cs typeface="Microsoft JhengHei" pitchFamily="34" charset="-120"/>
               </a:rPr>
-              <a:t>待做  走 dual-era,不直接切</a:t>
+              <a:t>全部成立且有付費需求才 GO</a:t>
             </a:r>
             <a:endParaRPr lang="en-US" sz="1000" dirty="0"/>
           </a:p>
@@ -23599,7 +23603,7 @@
                 <a:ea typeface="Microsoft JhengHei" pitchFamily="34" charset="-122"/>
                 <a:cs typeface="Microsoft JhengHei" pitchFamily="34" charset="-120"/>
               </a:rPr>
-              <a:t>是那個可重現的判斷,</a:t>
+              <a:t>是連續 Evidence → 可追溯 Decision,</a:t>
             </a:r>
             <a:endParaRPr lang="en-US" sz="3300" dirty="0"/>
           </a:p>
@@ -23619,7 +23623,7 @@
                 <a:ea typeface="Microsoft JhengHei" pitchFamily="34" charset="-122"/>
                 <a:cs typeface="Microsoft JhengHei" pitchFamily="34" charset="-120"/>
               </a:rPr>
-              <a:t>不是被保存下來的資料。</a:t>
+              <a:t>而資料始終由使用者控制。</a:t>
             </a:r>
             <a:endParaRPr lang="en-US" sz="3300" dirty="0"/>
           </a:p>
@@ -23724,7 +23728,7 @@
                 <a:ea typeface="Microsoft JhengHei" pitchFamily="34" charset="-122"/>
                 <a:cs typeface="Microsoft JhengHei" pitchFamily="34" charset="-120"/>
               </a:rPr>
-              <a:t>下一步:先完成 P0 隱私契約與 P1 local private engine;remote 是後續 access channel,企業私有部署再後續</a:t>
+              <a:t>下一步:先發布 v0.5.0 → pacevera.com 驗證 → local private engine;remote 仍是後續 access channel</a:t>
             </a:r>
             <a:endParaRPr lang="en-US" sz="1250" dirty="0"/>
           </a:p>
@@ -24944,7 +24948,7 @@
                 <a:ea typeface="Microsoft JhengHei" pitchFamily="34" charset="-122"/>
                 <a:cs typeface="Microsoft JhengHei" pitchFamily="34" charset="-120"/>
               </a:rPr>
-              <a:t>使用者要教練能力,不要交出原始資料</a:t>
+              <a:t>使用者要連續的決策能力,不要再交出健康歷史</a:t>
             </a:r>
             <a:endParaRPr lang="en-US" sz="3400" dirty="0"/>
           </a:p>
@@ -24986,7 +24990,7 @@
                 <a:ea typeface="Microsoft JhengHei" pitchFamily="34" charset="-122"/>
                 <a:cs typeface="Microsoft JhengHei" pitchFamily="34" charset="-120"/>
               </a:rPr>
-              <a:t>host 當大腦與對話介面,Fitness MCP 當背後的運動科學計算與安全判斷引擎。</a:t>
+              <a:t>AI host 負責理解與表達;Pacevera 在使用者控制的資料邊界內負責計算、仲裁與追溯。</a:t>
             </a:r>
             <a:endParaRPr lang="en-US" sz="2000" dirty="0"/>
           </a:p>
@@ -25093,7 +25097,7 @@
                 <a:ea typeface="Microsoft JhengHei" pitchFamily="34" charset="-122"/>
                 <a:cs typeface="Microsoft JhengHei" pitchFamily="34" charset="-120"/>
               </a:rPr>
-              <a:t>AI 的教練能力:今天能不能練、該練哪裡、為什麼</a:t>
+              <a:t>今天照不照原課表、具體改成什麼、為什麼、缺什麼</a:t>
             </a:r>
             <a:endParaRPr lang="en-US" sz="1700" dirty="0"/>
           </a:p>
@@ -25200,7 +25204,7 @@
                 <a:ea typeface="Microsoft JhengHei" pitchFamily="34" charset="-122"/>
                 <a:cs typeface="Microsoft JhengHei" pitchFamily="34" charset="-120"/>
               </a:rPr>
-              <a:t>Claude 和我們的 hosted MCP 看見完整的原始健康資料</a:t>
+              <a:t>每個 AI host 或 Pacevera hosted service 各自保存完整健康歷史</a:t>
             </a:r>
             <a:endParaRPr lang="en-US" sz="1700" dirty="0"/>
           </a:p>
@@ -25239,7 +25243,7 @@
                 <a:ea typeface="Microsoft JhengHei" pitchFamily="34" charset="-122"/>
                 <a:cs typeface="Microsoft JhengHei" pitchFamily="34" charset="-120"/>
               </a:rPr>
-              <a:t>收最小化證據、算完不留 —— 這是產品的前提,不是附加的隱私功能。</a:t>
+              <a:t>Local／private 保存 state;hosted 只做最小化 transient processing。兩者不能共用同一句隱私承諾。</a:t>
             </a:r>
             <a:endParaRPr lang="en-US" sz="1800" dirty="0"/>
           </a:p>
@@ -25413,7 +25417,7 @@
                 <a:ea typeface="Microsoft JhengHei" pitchFamily="34" charset="-122"/>
                 <a:cs typeface="Microsoft JhengHei" pitchFamily="34" charset="-120"/>
               </a:rPr>
-              <a:t>關鍵設計:我們什麼都不留</a:t>
+              <a:t>關鍵設計:資料由使用者控制</a:t>
             </a:r>
             <a:endParaRPr lang="en-US" sz="3400" dirty="0"/>
           </a:p>
@@ -25455,7 +25459,7 @@
                 <a:ea typeface="Microsoft JhengHei" pitchFamily="34" charset="-122"/>
                 <a:cs typeface="Microsoft JhengHei" pitchFamily="34" charset="-120"/>
               </a:rPr>
-              <a:t>最小化 Evidence 進來,算出決策就丟掉 —— hosted 這端不寫任何一張表。</a:t>
+              <a:t>Local／private 可保存可重算的 state、plan 與 decision history;hosted 不保存 raw Evidence。</a:t>
             </a:r>
             <a:endParaRPr lang="en-US" sz="2000" dirty="0"/>
           </a:p>
@@ -25520,7 +25524,7 @@
                 <a:ea typeface="Microsoft JhengHei" pitchFamily="34" charset="-122"/>
                 <a:cs typeface="Microsoft JhengHei" pitchFamily="34" charset="-120"/>
               </a:rPr>
-              <a:t>呼叫端送進來的</a:t>
+              <a:t>使用者控制環境保存</a:t>
             </a:r>
             <a:endParaRPr lang="en-US" sz="1300" dirty="0"/>
           </a:p>
@@ -25559,7 +25563,7 @@
                 <a:ea typeface="Microsoft JhengHei" pitchFamily="34" charset="-122"/>
                 <a:cs typeface="Microsoft JhengHei" pitchFamily="34" charset="-120"/>
               </a:rPr>
-              <a:t>HRV 42ms · 睡眠 5h20m · 昨日 TSS 148</a:t>
+              <a:t>Raw Evidence · provider token · longitudinal state · plan</a:t>
             </a:r>
             <a:endParaRPr lang="en-US" sz="1800" dirty="0"/>
           </a:p>
@@ -25624,7 +25628,7 @@
                 <a:ea typeface="Microsoft JhengHei" pitchFamily="34" charset="-122"/>
                 <a:cs typeface="Microsoft JhengHei" pitchFamily="34" charset="-120"/>
               </a:rPr>
-              <a:t>我們算完回傳的</a:t>
+              <a:t>AI host 最小化取得</a:t>
             </a:r>
             <a:endParaRPr lang="en-US" sz="1300" dirty="0"/>
           </a:p>
@@ -25663,7 +25667,7 @@
                 <a:ea typeface="Microsoft JhengHei" pitchFamily="34" charset="-122"/>
                 <a:cs typeface="Microsoft JhengHei" pitchFamily="34" charset="-120"/>
               </a:rPr>
-              <a:t>Intervals → Zone 2 · ACWR 1.52 · 急性負荷偏快</a:t>
+              <a:t>Decision from → to · reason · missing signals · versioned trace</a:t>
             </a:r>
             <a:endParaRPr lang="en-US" sz="1800" dirty="0"/>
           </a:p>
@@ -26438,7 +26442,7 @@
                 <a:ea typeface="Microsoft JhengHei" pitchFamily="34" charset="-122"/>
                 <a:cs typeface="Microsoft JhengHei" pitchFamily="34" charset="-120"/>
               </a:rPr>
-              <a:t>四層架構:原始資料停在界線之外</a:t>
+              <a:t>四層架構:資料邊界與決策責任分開</a:t>
             </a:r>
             <a:endParaRPr lang="en-US" sz="3400" dirty="0"/>
           </a:p>
@@ -26480,7 +26484,7 @@
                 <a:ea typeface="Microsoft JhengHei" pitchFamily="34" charset="-122"/>
                 <a:cs typeface="Microsoft JhengHei" pitchFamily="34" charset="-120"/>
               </a:rPr>
-              <a:t>每一層只做一件事;最下面那一層,hosted MCP 不直接連。</a:t>
+              <a:t>AI 可替換、Decision Engine 可重現、Evidence 與 token 留在 user-controlled boundary。</a:t>
             </a:r>
             <a:endParaRPr lang="en-US" sz="2000" dirty="0"/>
           </a:p>
@@ -26569,7 +26573,7 @@
                 <a:ea typeface="Arial" pitchFamily="34" charset="-122"/>
                 <a:cs typeface="Arial" pitchFamily="34" charset="-120"/>
               </a:rPr>
-              <a:t>Client Layer</a:t>
+              <a:t>AI / Client Layer</a:t>
             </a:r>
             <a:endParaRPr lang="en-US" sz="1500" dirty="0"/>
           </a:p>
@@ -26608,7 +26612,7 @@
                 <a:ea typeface="Microsoft JhengHei" pitchFamily="34" charset="-122"/>
                 <a:cs typeface="Microsoft JhengHei" pitchFamily="34" charset="-120"/>
               </a:rPr>
-              <a:t>ChatGPT · Claude · Gemini · Cursor · Web · Mobile App · Apple Watch · Voice</a:t>
+              <a:t>Claude · ChatGPT · Gemini · Web · Mobile · Team systems</a:t>
             </a:r>
             <a:endParaRPr lang="en-US" sz="1250" dirty="0"/>
           </a:p>
@@ -26697,7 +26701,7 @@
                 <a:ea typeface="Arial" pitchFamily="34" charset="-122"/>
                 <a:cs typeface="Arial" pitchFamily="34" charset="-120"/>
               </a:rPr>
-              <a:t>MCP Layer</a:t>
+              <a:t>Pacevera Interface</a:t>
             </a:r>
             <a:endParaRPr lang="en-US" sz="1500" dirty="0"/>
           </a:p>
@@ -26736,7 +26740,7 @@
                 <a:ea typeface="Microsoft JhengHei" pitchFamily="34" charset="-122"/>
                 <a:cs typeface="Microsoft JhengHei" pitchFamily="34" charset="-120"/>
               </a:rPr>
-              <a:t>Fitness MCP —— 六個 tool,確定性計算,無狀態</a:t>
+              <a:t>Desktop MCPB · private MCP · hosted remote · future REST / SDK</a:t>
             </a:r>
             <a:endParaRPr lang="en-US" sz="1250" dirty="0"/>
           </a:p>
@@ -26825,7 +26829,7 @@
                 <a:ea typeface="Arial" pitchFamily="34" charset="-122"/>
                 <a:cs typeface="Arial" pitchFamily="34" charset="-120"/>
               </a:rPr>
-              <a:t>Service Layer</a:t>
+              <a:t>Decision Infrastructure</a:t>
             </a:r>
             <a:endParaRPr lang="en-US" sz="1500" dirty="0"/>
           </a:p>
@@ -26864,7 +26868,7 @@
                 <a:ea typeface="Microsoft JhengHei" pitchFamily="34" charset="-122"/>
                 <a:cs typeface="Microsoft JhengHei" pitchFamily="34" charset="-120"/>
               </a:rPr>
-              <a:t>Semantic Engine · Training Load · Decision Engine · Planning · Knowledge Graph</a:t>
+              <a:t>Semantic State · Decision Engine · Rule Packages · Decision Graph</a:t>
             </a:r>
             <a:endParaRPr lang="en-US" sz="1250" dirty="0"/>
           </a:p>
@@ -26953,7 +26957,7 @@
                 <a:ea typeface="Arial" pitchFamily="34" charset="-122"/>
                 <a:cs typeface="Arial" pitchFamily="34" charset="-120"/>
               </a:rPr>
-              <a:t>Evidence 來源</a:t>
+              <a:t>User-controlled Evidence</a:t>
             </a:r>
             <a:endParaRPr lang="en-US" sz="1500" dirty="0"/>
           </a:p>
@@ -26992,7 +26996,7 @@
                 <a:ea typeface="Microsoft JhengHei" pitchFamily="34" charset="-122"/>
                 <a:cs typeface="Microsoft JhengHei" pitchFamily="34" charset="-120"/>
               </a:rPr>
-              <a:t>Apple Health · Garmin · Strava —— 由 host 或使用者的 gateway 解析,不經過我們</a:t>
+              <a:t>Local connectors · provider tokens · raw history · plans · outcomes</a:t>
             </a:r>
             <a:endParaRPr lang="en-US" sz="1250" dirty="0"/>
           </a:p>

--- a/docs/Fitness-MCP-Product-Vision.pptx
+++ b/docs/Fitness-MCP-Product-Vision.pptx
@@ -3204,7 +3204,7 @@
     <p:bg>
       <p:bgPr>
         <a:solidFill>
-          <a:srgbClr val="10131A"/>
+          <a:srgbClr val="111B30"/>
         </a:solidFill>
         <a:effectLst/>
       </p:bgPr>
@@ -3238,7 +3238,7 @@
             <a:avLst/>
           </a:prstGeom>
           <a:solidFill>
-            <a:srgbClr val="F96167">
+            <a:srgbClr val="157554">
               <a:alpha val="12000"/>
             </a:srgbClr>
           </a:solidFill>
@@ -3264,7 +3264,7 @@
             <a:avLst/>
           </a:prstGeom>
           <a:solidFill>
-            <a:srgbClr val="1FB6A6">
+            <a:srgbClr val="157554">
               <a:alpha val="12000"/>
             </a:srgbClr>
           </a:solidFill>
@@ -3290,7 +3290,7 @@
             <a:avLst/>
           </a:prstGeom>
           <a:solidFill>
-            <a:srgbClr val="F96167"/>
+            <a:srgbClr val="157554"/>
           </a:solidFill>
           <a:ln/>
         </p:spPr>
@@ -3326,9 +3326,9 @@
             <a:r>
               <a:rPr lang="en-US" sz="1300" b="1" kern="0" spc="300" dirty="0">
                 <a:solidFill>
-                  <a:srgbClr val="8A93A6"/>
-                </a:solidFill>
-                <a:latin typeface="Arial" pitchFamily="34" charset="0"/>
+                  <a:srgbClr val="9FAEBE"/>
+                </a:solidFill>
+                <a:latin typeface="STHeiti" pitchFamily="34" charset="0"/>
                 <a:ea typeface="Arial" pitchFamily="34" charset="-122"/>
                 <a:cs typeface="Arial" pitchFamily="34" charset="-120"/>
               </a:rPr>
@@ -3368,9 +3368,9 @@
             <a:r>
               <a:rPr lang="en-US" sz="5000" b="1" dirty="0">
                 <a:solidFill>
-                  <a:srgbClr val="FFFFFF"/>
-                </a:solidFill>
-                <a:latin typeface="Arial" pitchFamily="34" charset="0"/>
+                  <a:srgbClr val="FAF9F5"/>
+                </a:solidFill>
+                <a:latin typeface="STHeiti" pitchFamily="34" charset="0"/>
                 <a:ea typeface="Arial" pitchFamily="34" charset="-122"/>
                 <a:cs typeface="Arial" pitchFamily="34" charset="-120"/>
               </a:rPr>
@@ -3388,9 +3388,9 @@
             <a:r>
               <a:rPr lang="en-US" sz="5000" b="1" dirty="0">
                 <a:solidFill>
-                  <a:srgbClr val="FFFFFF"/>
-                </a:solidFill>
-                <a:latin typeface="Arial" pitchFamily="34" charset="0"/>
+                  <a:srgbClr val="FAF9F5"/>
+                </a:solidFill>
+                <a:latin typeface="STHeiti" pitchFamily="34" charset="0"/>
                 <a:ea typeface="Arial" pitchFamily="34" charset="-122"/>
                 <a:cs typeface="Arial" pitchFamily="34" charset="-120"/>
               </a:rPr>
@@ -3421,24 +3421,15 @@
           <a:bodyPr wrap="square" lIns="0" tIns="0" rIns="0" bIns="0" rtlCol="0" anchor="t"/>
           <a:lstStyle/>
           <a:p>
-            <a:pPr marL="0" indent="0">
-              <a:lnSpc>
-                <a:spcPts val="3000"/>
-              </a:lnSpc>
-              <a:buNone/>
-            </a:pPr>
-            <a:r>
-              <a:rPr lang="en-US" sz="1900" dirty="0">
-                <a:solidFill>
-                  <a:srgbClr val="C3C9D6"/>
-                </a:solidFill>
-                <a:latin typeface="Microsoft JhengHei" pitchFamily="34" charset="0"/>
-                <a:ea typeface="Microsoft JhengHei" pitchFamily="34" charset="-122"/>
-                <a:cs typeface="Microsoft JhengHei" pitchFamily="34" charset="-120"/>
-              </a:rPr>
-              <a:t>讓你熟悉的 AI 根據連續 Evidence 做出可重現的訓練決策 —— 健康歷史仍由你控制。</a:t>
-            </a:r>
-            <a:endParaRPr lang="en-US" sz="1900" dirty="0"/>
+            <a:r>
+              <a:rPr>
+                <a:solidFill>
+                  <a:srgbClr val="FAF9F5"/>
+                </a:solidFill>
+                <a:latin typeface="STHeiti"/>
+              </a:rPr>
+              <a:t>把 Evidence 轉成今天可執行、可追溯的訓練變更。健康歷史仍由你控制。</a:t>
+            </a:r>
           </a:p>
         </p:txBody>
       </p:sp>
@@ -3490,21 +3481,15 @@
           <a:bodyPr wrap="square" lIns="0" tIns="0" rIns="0" bIns="0" rtlCol="0" anchor="ctr"/>
           <a:lstStyle/>
           <a:p>
-            <a:pPr marL="0" indent="0">
-              <a:buNone/>
-            </a:pPr>
-            <a:r>
-              <a:rPr lang="en-US" sz="1300" dirty="0">
-                <a:solidFill>
-                  <a:srgbClr val="7C8497"/>
-                </a:solidFill>
-                <a:latin typeface="Microsoft JhengHei" pitchFamily="34" charset="0"/>
-                <a:ea typeface="Microsoft JhengHei" pitchFamily="34" charset="-122"/>
-                <a:cs typeface="Microsoft JhengHei" pitchFamily="34" charset="-120"/>
-              </a:rPr>
-              <a:t>產品終局 · v0.4.2 → v0.5.0 · Phase 0–4</a:t>
-            </a:r>
-            <a:endParaRPr lang="en-US" sz="1300" dirty="0"/>
+            <a:r>
+              <a:rPr>
+                <a:solidFill>
+                  <a:srgbClr val="FAF9F5"/>
+                </a:solidFill>
+                <a:latin typeface="STHeiti"/>
+              </a:rPr>
+              <a:t>Public preview · Desktop MCPB · v0.5.0 → local private engine</a:t>
+            </a:r>
           </a:p>
         </p:txBody>
       </p:sp>
@@ -3522,7 +3507,7 @@
     <p:bg>
       <p:bgPr>
         <a:solidFill>
-          <a:srgbClr val="FFFFFF"/>
+          <a:srgbClr val="F0EEE6"/>
         </a:solidFill>
         <a:effectLst/>
       </p:bgPr>
@@ -3556,7 +3541,7 @@
             <a:avLst/>
           </a:prstGeom>
           <a:solidFill>
-            <a:srgbClr val="F96167"/>
+            <a:srgbClr val="157554"/>
           </a:solidFill>
           <a:ln/>
         </p:spPr>
@@ -3592,9 +3577,9 @@
             <a:r>
               <a:rPr lang="en-US" sz="1200" b="1" kern="0" spc="200" dirty="0">
                 <a:solidFill>
-                  <a:srgbClr val="6E7687"/>
-                </a:solidFill>
-                <a:latin typeface="Arial" pitchFamily="34" charset="0"/>
+                  <a:srgbClr val="68645C"/>
+                </a:solidFill>
+                <a:latin typeface="STHeiti" pitchFamily="34" charset="0"/>
                 <a:ea typeface="Arial" pitchFamily="34" charset="-122"/>
                 <a:cs typeface="Arial" pitchFamily="34" charset="-120"/>
               </a:rPr>
@@ -3625,21 +3610,15 @@
           <a:bodyPr wrap="square" lIns="0" tIns="0" rIns="0" bIns="0" rtlCol="0" anchor="ctr"/>
           <a:lstStyle/>
           <a:p>
-            <a:pPr marL="0" indent="0">
-              <a:buNone/>
-            </a:pPr>
-            <a:r>
-              <a:rPr lang="en-US" sz="3400" b="1" dirty="0">
-                <a:solidFill>
-                  <a:srgbClr val="10131A"/>
-                </a:solidFill>
-                <a:latin typeface="Microsoft JhengHei" pitchFamily="34" charset="0"/>
-                <a:ea typeface="Microsoft JhengHei" pitchFamily="34" charset="-122"/>
-                <a:cs typeface="Microsoft JhengHei" pitchFamily="34" charset="-120"/>
-              </a:rPr>
-              <a:t>我們給的是決策,不是建議</a:t>
-            </a:r>
-            <a:endParaRPr lang="en-US" sz="3400" dirty="0"/>
+            <a:r>
+              <a:rPr>
+                <a:solidFill>
+                  <a:srgbClr val="1F1E1D"/>
+                </a:solidFill>
+                <a:latin typeface="STHeiti"/>
+              </a:rPr>
+              <a:t>我們給的是決策，不是建議</a:t>
+            </a:r>
           </a:p>
         </p:txBody>
       </p:sp>
@@ -3673,9 +3652,9 @@
             <a:r>
               <a:rPr lang="en-US" sz="2000" dirty="0">
                 <a:solidFill>
-                  <a:srgbClr val="353A46"/>
-                </a:solidFill>
-                <a:latin typeface="Microsoft JhengHei" pitchFamily="34" charset="0"/>
+                  <a:srgbClr val="1F1E1D"/>
+                </a:solidFill>
+                <a:latin typeface="STHeiti" pitchFamily="34" charset="0"/>
                 <a:ea typeface="Microsoft JhengHei" pitchFamily="34" charset="-122"/>
                 <a:cs typeface="Microsoft JhengHei" pitchFamily="34" charset="-120"/>
               </a:rPr>
@@ -3702,7 +3681,7 @@
             </a:avLst>
           </a:prstGeom>
           <a:solidFill>
-            <a:srgbClr val="F3F4F7"/>
+            <a:srgbClr val="E9E3D6"/>
           </a:solidFill>
           <a:ln/>
         </p:spPr>
@@ -3740,7 +3719,7 @@
                 <a:solidFill>
                   <a:srgbClr val="9AA1B0"/>
                 </a:solidFill>
-                <a:latin typeface="Microsoft JhengHei" pitchFamily="34" charset="0"/>
+                <a:latin typeface="STHeiti" pitchFamily="34" charset="0"/>
                 <a:ea typeface="Microsoft JhengHei" pitchFamily="34" charset="-122"/>
                 <a:cs typeface="Microsoft JhengHei" pitchFamily="34" charset="-120"/>
               </a:rPr>
@@ -3777,9 +3756,9 @@
             <a:r>
               <a:rPr lang="en-US" sz="1800" b="1" dirty="0">
                 <a:solidFill>
-                  <a:srgbClr val="3A4050"/>
-                </a:solidFill>
-                <a:latin typeface="Microsoft JhengHei" pitchFamily="34" charset="0"/>
+                  <a:srgbClr val="DAD2C3"/>
+                </a:solidFill>
+                <a:latin typeface="STHeiti" pitchFamily="34" charset="0"/>
                 <a:ea typeface="Microsoft JhengHei" pitchFamily="34" charset="-122"/>
                 <a:cs typeface="Microsoft JhengHei" pitchFamily="34" charset="-120"/>
               </a:rPr>
@@ -3806,7 +3785,7 @@
             </a:avLst>
           </a:prstGeom>
           <a:solidFill>
-            <a:srgbClr val="10131A"/>
+            <a:srgbClr val="111B30"/>
           </a:solidFill>
           <a:ln/>
         </p:spPr>
@@ -3842,9 +3821,9 @@
             <a:r>
               <a:rPr lang="en-US" sz="1300" b="1" dirty="0">
                 <a:solidFill>
-                  <a:srgbClr val="F96167"/>
-                </a:solidFill>
-                <a:latin typeface="Microsoft JhengHei" pitchFamily="34" charset="0"/>
+                  <a:srgbClr val="157554"/>
+                </a:solidFill>
+                <a:latin typeface="STHeiti" pitchFamily="34" charset="0"/>
                 <a:ea typeface="Microsoft JhengHei" pitchFamily="34" charset="-122"/>
                 <a:cs typeface="Microsoft JhengHei" pitchFamily="34" charset="-120"/>
               </a:rPr>
@@ -3881,9 +3860,9 @@
             <a:r>
               <a:rPr lang="en-US" sz="1800" b="1" dirty="0">
                 <a:solidFill>
-                  <a:srgbClr val="FFFFFF"/>
-                </a:solidFill>
-                <a:latin typeface="Microsoft JhengHei" pitchFamily="34" charset="0"/>
+                  <a:srgbClr val="1F1E1D"/>
+                </a:solidFill>
+                <a:latin typeface="STHeiti" pitchFamily="34" charset="0"/>
                 <a:ea typeface="Microsoft JhengHei" pitchFamily="34" charset="-122"/>
                 <a:cs typeface="Microsoft JhengHei" pitchFamily="34" charset="-120"/>
               </a:rPr>
@@ -3920,9 +3899,9 @@
             <a:r>
               <a:rPr lang="en-US" sz="1100" dirty="0">
                 <a:solidFill>
-                  <a:srgbClr val="A8AEBC"/>
-                </a:solidFill>
-                <a:latin typeface="Arial" pitchFamily="34" charset="0"/>
+                  <a:srgbClr val="9DA89F"/>
+                </a:solidFill>
+                <a:latin typeface="STHeiti" pitchFamily="34" charset="0"/>
                 <a:ea typeface="Arial" pitchFamily="34" charset="-122"/>
                 <a:cs typeface="Arial" pitchFamily="34" charset="-120"/>
               </a:rPr>
@@ -3946,7 +3925,7 @@
     <p:bg>
       <p:bgPr>
         <a:solidFill>
-          <a:srgbClr val="10131A"/>
+          <a:srgbClr val="111B30"/>
         </a:solidFill>
         <a:effectLst/>
       </p:bgPr>
@@ -3980,7 +3959,7 @@
             <a:avLst/>
           </a:prstGeom>
           <a:solidFill>
-            <a:srgbClr val="F96167"/>
+            <a:srgbClr val="157554"/>
           </a:solidFill>
           <a:ln/>
         </p:spPr>
@@ -4016,9 +3995,9 @@
             <a:r>
               <a:rPr lang="en-US" sz="1200" b="1" kern="0" spc="200" dirty="0">
                 <a:solidFill>
-                  <a:srgbClr val="8A93A6"/>
-                </a:solidFill>
-                <a:latin typeface="Arial" pitchFamily="34" charset="0"/>
+                  <a:srgbClr val="9FAEBE"/>
+                </a:solidFill>
+                <a:latin typeface="STHeiti" pitchFamily="34" charset="0"/>
                 <a:ea typeface="Arial" pitchFamily="34" charset="-122"/>
                 <a:cs typeface="Arial" pitchFamily="34" charset="-120"/>
               </a:rPr>
@@ -4055,9 +4034,9 @@
             <a:r>
               <a:rPr lang="en-US" sz="3400" b="1" dirty="0">
                 <a:solidFill>
-                  <a:srgbClr val="FFFFFF"/>
-                </a:solidFill>
-                <a:latin typeface="Microsoft JhengHei" pitchFamily="34" charset="0"/>
+                  <a:srgbClr val="FAF9F5"/>
+                </a:solidFill>
+                <a:latin typeface="STHeiti" pitchFamily="34" charset="0"/>
                 <a:ea typeface="Microsoft JhengHei" pitchFamily="34" charset="-122"/>
                 <a:cs typeface="Microsoft JhengHei" pitchFamily="34" charset="-120"/>
               </a:rPr>
@@ -4099,7 +4078,7 @@
                 <a:solidFill>
                   <a:srgbClr val="D6DAE4"/>
                 </a:solidFill>
-                <a:latin typeface="Microsoft JhengHei" pitchFamily="34" charset="0"/>
+                <a:latin typeface="STHeiti" pitchFamily="34" charset="0"/>
                 <a:ea typeface="Microsoft JhengHei" pitchFamily="34" charset="-122"/>
                 <a:cs typeface="Microsoft JhengHei" pitchFamily="34" charset="-120"/>
               </a:rPr>
@@ -4126,7 +4105,7 @@
             </a:avLst>
           </a:prstGeom>
           <a:solidFill>
-            <a:srgbClr val="F96167"/>
+            <a:srgbClr val="157554"/>
           </a:solidFill>
           <a:ln/>
         </p:spPr>
@@ -4162,9 +4141,9 @@
             <a:r>
               <a:rPr lang="en-US" sz="1100" b="1" dirty="0">
                 <a:solidFill>
-                  <a:srgbClr val="FFFFFF"/>
-                </a:solidFill>
-                <a:latin typeface="Arial" pitchFamily="34" charset="0"/>
+                  <a:srgbClr val="FAF9F5"/>
+                </a:solidFill>
+                <a:latin typeface="STHeiti" pitchFamily="34" charset="0"/>
                 <a:ea typeface="Arial" pitchFamily="34" charset="-122"/>
                 <a:cs typeface="Arial" pitchFamily="34" charset="-120"/>
               </a:rPr>
@@ -4203,7 +4182,7 @@
                 <a:solidFill>
                   <a:srgbClr val="5A6376"/>
                 </a:solidFill>
-                <a:latin typeface="Arial" pitchFamily="34" charset="0"/>
+                <a:latin typeface="STHeiti" pitchFamily="34" charset="0"/>
                 <a:ea typeface="Arial" pitchFamily="34" charset="-122"/>
                 <a:cs typeface="Arial" pitchFamily="34" charset="-120"/>
               </a:rPr>
@@ -4230,7 +4209,7 @@
             </a:avLst>
           </a:prstGeom>
           <a:solidFill>
-            <a:srgbClr val="1B1F2B"/>
+            <a:srgbClr val="1E2A40"/>
           </a:solidFill>
           <a:ln/>
         </p:spPr>
@@ -4260,21 +4239,15 @@
           <a:bodyPr wrap="square" lIns="0" tIns="0" rIns="0" bIns="0" rtlCol="0" anchor="ctr"/>
           <a:lstStyle/>
           <a:p>
-            <a:pPr marL="0" indent="0" algn="ctr">
-              <a:buNone/>
-            </a:pPr>
-            <a:r>
-              <a:rPr lang="en-US" sz="1100" b="1" dirty="0">
-                <a:solidFill>
-                  <a:srgbClr val="FFFFFF"/>
-                </a:solidFill>
-                <a:latin typeface="Arial" pitchFamily="34" charset="0"/>
-                <a:ea typeface="Arial" pitchFamily="34" charset="-122"/>
-                <a:cs typeface="Arial" pitchFamily="34" charset="-120"/>
-              </a:rPr>
-              <a:t>Fitness MCP</a:t>
-            </a:r>
-            <a:endParaRPr lang="en-US" sz="1100" dirty="0"/>
+            <a:r>
+              <a:rPr>
+                <a:solidFill>
+                  <a:srgbClr val="FAF9F5"/>
+                </a:solidFill>
+                <a:latin typeface="STHeiti"/>
+              </a:rPr>
+              <a:t>Pacevera</a:t>
+            </a:r>
           </a:p>
         </p:txBody>
       </p:sp>
@@ -4307,7 +4280,7 @@
                 <a:solidFill>
                   <a:srgbClr val="5A6376"/>
                 </a:solidFill>
-                <a:latin typeface="Arial" pitchFamily="34" charset="0"/>
+                <a:latin typeface="STHeiti" pitchFamily="34" charset="0"/>
                 <a:ea typeface="Arial" pitchFamily="34" charset="-122"/>
                 <a:cs typeface="Arial" pitchFamily="34" charset="-120"/>
               </a:rPr>
@@ -4334,7 +4307,7 @@
             </a:avLst>
           </a:prstGeom>
           <a:solidFill>
-            <a:srgbClr val="1B1F2B"/>
+            <a:srgbClr val="1E2A40"/>
           </a:solidFill>
           <a:ln/>
         </p:spPr>
@@ -4370,9 +4343,9 @@
             <a:r>
               <a:rPr lang="en-US" sz="1100" b="1" dirty="0">
                 <a:solidFill>
-                  <a:srgbClr val="FFFFFF"/>
-                </a:solidFill>
-                <a:latin typeface="Arial" pitchFamily="34" charset="0"/>
+                  <a:srgbClr val="FAF9F5"/>
+                </a:solidFill>
+                <a:latin typeface="STHeiti" pitchFamily="34" charset="0"/>
                 <a:ea typeface="Arial" pitchFamily="34" charset="-122"/>
                 <a:cs typeface="Arial" pitchFamily="34" charset="-120"/>
               </a:rPr>
@@ -4411,7 +4384,7 @@
                 <a:solidFill>
                   <a:srgbClr val="5A6376"/>
                 </a:solidFill>
-                <a:latin typeface="Arial" pitchFamily="34" charset="0"/>
+                <a:latin typeface="STHeiti" pitchFamily="34" charset="0"/>
                 <a:ea typeface="Arial" pitchFamily="34" charset="-122"/>
                 <a:cs typeface="Arial" pitchFamily="34" charset="-120"/>
               </a:rPr>
@@ -4438,7 +4411,7 @@
             </a:avLst>
           </a:prstGeom>
           <a:solidFill>
-            <a:srgbClr val="1B1F2B"/>
+            <a:srgbClr val="1E2A40"/>
           </a:solidFill>
           <a:ln/>
         </p:spPr>
@@ -4474,9 +4447,9 @@
             <a:r>
               <a:rPr lang="en-US" sz="1100" b="1" dirty="0">
                 <a:solidFill>
-                  <a:srgbClr val="FFFFFF"/>
-                </a:solidFill>
-                <a:latin typeface="Arial" pitchFamily="34" charset="0"/>
+                  <a:srgbClr val="FAF9F5"/>
+                </a:solidFill>
+                <a:latin typeface="STHeiti" pitchFamily="34" charset="0"/>
                 <a:ea typeface="Arial" pitchFamily="34" charset="-122"/>
                 <a:cs typeface="Arial" pitchFamily="34" charset="-120"/>
               </a:rPr>
@@ -4515,7 +4488,7 @@
                 <a:solidFill>
                   <a:srgbClr val="5A6376"/>
                 </a:solidFill>
-                <a:latin typeface="Arial" pitchFamily="34" charset="0"/>
+                <a:latin typeface="STHeiti" pitchFamily="34" charset="0"/>
                 <a:ea typeface="Arial" pitchFamily="34" charset="-122"/>
                 <a:cs typeface="Arial" pitchFamily="34" charset="-120"/>
               </a:rPr>
@@ -4542,7 +4515,7 @@
             </a:avLst>
           </a:prstGeom>
           <a:solidFill>
-            <a:srgbClr val="1B1F2B"/>
+            <a:srgbClr val="1E2A40"/>
           </a:solidFill>
           <a:ln/>
         </p:spPr>
@@ -4578,9 +4551,9 @@
             <a:r>
               <a:rPr lang="en-US" sz="1100" b="1" dirty="0">
                 <a:solidFill>
-                  <a:srgbClr val="FFFFFF"/>
-                </a:solidFill>
-                <a:latin typeface="Arial" pitchFamily="34" charset="0"/>
+                  <a:srgbClr val="FAF9F5"/>
+                </a:solidFill>
+                <a:latin typeface="STHeiti" pitchFamily="34" charset="0"/>
                 <a:ea typeface="Arial" pitchFamily="34" charset="-122"/>
                 <a:cs typeface="Arial" pitchFamily="34" charset="-120"/>
               </a:rPr>
@@ -4619,7 +4592,7 @@
                 <a:solidFill>
                   <a:srgbClr val="5A6376"/>
                 </a:solidFill>
-                <a:latin typeface="Arial" pitchFamily="34" charset="0"/>
+                <a:latin typeface="STHeiti" pitchFamily="34" charset="0"/>
                 <a:ea typeface="Arial" pitchFamily="34" charset="-122"/>
                 <a:cs typeface="Arial" pitchFamily="34" charset="-120"/>
               </a:rPr>
@@ -4646,7 +4619,7 @@
             </a:avLst>
           </a:prstGeom>
           <a:solidFill>
-            <a:srgbClr val="1B1F2B"/>
+            <a:srgbClr val="1E2A40"/>
           </a:solidFill>
           <a:ln/>
         </p:spPr>
@@ -4682,9 +4655,9 @@
             <a:r>
               <a:rPr lang="en-US" sz="1100" b="1" dirty="0">
                 <a:solidFill>
-                  <a:srgbClr val="FFFFFF"/>
-                </a:solidFill>
-                <a:latin typeface="Arial" pitchFamily="34" charset="0"/>
+                  <a:srgbClr val="FAF9F5"/>
+                </a:solidFill>
+                <a:latin typeface="STHeiti" pitchFamily="34" charset="0"/>
                 <a:ea typeface="Arial" pitchFamily="34" charset="-122"/>
                 <a:cs typeface="Arial" pitchFamily="34" charset="-120"/>
               </a:rPr>
@@ -4711,7 +4684,7 @@
             </a:avLst>
           </a:prstGeom>
           <a:solidFill>
-            <a:srgbClr val="1B1F2B"/>
+            <a:srgbClr val="1E2A40"/>
           </a:solidFill>
           <a:ln/>
         </p:spPr>
@@ -4747,9 +4720,9 @@
             <a:r>
               <a:rPr lang="en-US" sz="1300" b="1" dirty="0">
                 <a:solidFill>
-                  <a:srgbClr val="1FB6A6"/>
-                </a:solidFill>
-                <a:latin typeface="Microsoft JhengHei" pitchFamily="34" charset="0"/>
+                  <a:srgbClr val="49D993"/>
+                </a:solidFill>
+                <a:latin typeface="STHeiti" pitchFamily="34" charset="0"/>
                 <a:ea typeface="Microsoft JhengHei" pitchFamily="34" charset="-122"/>
                 <a:cs typeface="Microsoft JhengHei" pitchFamily="34" charset="-120"/>
               </a:rPr>
@@ -4786,9 +4759,9 @@
             <a:r>
               <a:rPr lang="en-US" sz="1300" dirty="0">
                 <a:solidFill>
-                  <a:srgbClr val="CFD4DF"/>
-                </a:solidFill>
-                <a:latin typeface="Microsoft JhengHei" pitchFamily="34" charset="0"/>
+                  <a:srgbClr val="C9D0C8"/>
+                </a:solidFill>
+                <a:latin typeface="STHeiti" pitchFamily="34" charset="0"/>
                 <a:ea typeface="Microsoft JhengHei" pitchFamily="34" charset="-122"/>
                 <a:cs typeface="Microsoft JhengHei" pitchFamily="34" charset="-120"/>
               </a:rPr>
@@ -4815,7 +4788,7 @@
             </a:avLst>
           </a:prstGeom>
           <a:solidFill>
-            <a:srgbClr val="1B1F2B"/>
+            <a:srgbClr val="1E2A40"/>
           </a:solidFill>
           <a:ln/>
         </p:spPr>
@@ -4851,9 +4824,9 @@
             <a:r>
               <a:rPr lang="en-US" sz="1300" b="1" dirty="0">
                 <a:solidFill>
-                  <a:srgbClr val="F96167"/>
-                </a:solidFill>
-                <a:latin typeface="Microsoft JhengHei" pitchFamily="34" charset="0"/>
+                  <a:srgbClr val="49D993"/>
+                </a:solidFill>
+                <a:latin typeface="STHeiti" pitchFamily="34" charset="0"/>
                 <a:ea typeface="Microsoft JhengHei" pitchFamily="34" charset="-122"/>
                 <a:cs typeface="Microsoft JhengHei" pitchFamily="34" charset="-120"/>
               </a:rPr>
@@ -4890,9 +4863,9 @@
             <a:r>
               <a:rPr lang="en-US" sz="1300" dirty="0">
                 <a:solidFill>
-                  <a:srgbClr val="CFD4DF"/>
-                </a:solidFill>
-                <a:latin typeface="Microsoft JhengHei" pitchFamily="34" charset="0"/>
+                  <a:srgbClr val="C9D0C8"/>
+                </a:solidFill>
+                <a:latin typeface="STHeiti" pitchFamily="34" charset="0"/>
                 <a:ea typeface="Microsoft JhengHei" pitchFamily="34" charset="-122"/>
                 <a:cs typeface="Microsoft JhengHei" pitchFamily="34" charset="-120"/>
               </a:rPr>
@@ -4929,9 +4902,9 @@
             <a:r>
               <a:rPr lang="en-US" sz="1100" dirty="0">
                 <a:solidFill>
-                  <a:srgbClr val="A8AEBC"/>
-                </a:solidFill>
-                <a:latin typeface="Arial" pitchFamily="34" charset="0"/>
+                  <a:srgbClr val="9DA89F"/>
+                </a:solidFill>
+                <a:latin typeface="STHeiti" pitchFamily="34" charset="0"/>
                 <a:ea typeface="Arial" pitchFamily="34" charset="-122"/>
                 <a:cs typeface="Arial" pitchFamily="34" charset="-120"/>
               </a:rPr>
@@ -4955,7 +4928,7 @@
     <p:bg>
       <p:bgPr>
         <a:solidFill>
-          <a:srgbClr val="FFFFFF"/>
+          <a:srgbClr val="F0EEE6"/>
         </a:solidFill>
         <a:effectLst/>
       </p:bgPr>
@@ -4989,7 +4962,7 @@
             <a:avLst/>
           </a:prstGeom>
           <a:solidFill>
-            <a:srgbClr val="F96167"/>
+            <a:srgbClr val="157554"/>
           </a:solidFill>
           <a:ln/>
         </p:spPr>
@@ -5025,9 +4998,9 @@
             <a:r>
               <a:rPr lang="en-US" sz="1200" b="1" kern="0" spc="200" dirty="0">
                 <a:solidFill>
-                  <a:srgbClr val="6E7687"/>
-                </a:solidFill>
-                <a:latin typeface="Arial" pitchFamily="34" charset="0"/>
+                  <a:srgbClr val="68645C"/>
+                </a:solidFill>
+                <a:latin typeface="STHeiti" pitchFamily="34" charset="0"/>
                 <a:ea typeface="Arial" pitchFamily="34" charset="-122"/>
                 <a:cs typeface="Arial" pitchFamily="34" charset="-120"/>
               </a:rPr>
@@ -5058,21 +5031,15 @@
           <a:bodyPr wrap="square" lIns="0" tIns="0" rIns="0" bIns="0" rtlCol="0" anchor="ctr"/>
           <a:lstStyle/>
           <a:p>
-            <a:pPr marL="0" indent="0">
-              <a:buNone/>
-            </a:pPr>
-            <a:r>
-              <a:rPr lang="en-US" sz="3400" b="1" dirty="0">
-                <a:solidFill>
-                  <a:srgbClr val="10131A"/>
-                </a:solidFill>
-                <a:latin typeface="Microsoft JhengHei" pitchFamily="34" charset="0"/>
-                <a:ea typeface="Microsoft JhengHei" pitchFamily="34" charset="-122"/>
-                <a:cs typeface="Microsoft JhengHei" pitchFamily="34" charset="-120"/>
-              </a:rPr>
-              <a:t>決策引擎不是一個模型</a:t>
-            </a:r>
-            <a:endParaRPr lang="en-US" sz="3400" dirty="0"/>
+            <a:r>
+              <a:rPr>
+                <a:solidFill>
+                  <a:srgbClr val="1F1E1D"/>
+                </a:solidFill>
+                <a:latin typeface="STHeiti"/>
+              </a:rPr>
+              <a:t>先對齊 Evidence，再用規則做決策</a:t>
+            </a:r>
           </a:p>
         </p:txBody>
       </p:sp>
@@ -5106,9 +5073,9 @@
             <a:r>
               <a:rPr lang="en-US" sz="2000" dirty="0">
                 <a:solidFill>
-                  <a:srgbClr val="353A46"/>
-                </a:solidFill>
-                <a:latin typeface="Microsoft JhengHei" pitchFamily="34" charset="0"/>
+                  <a:srgbClr val="1F1E1D"/>
+                </a:solidFill>
+                <a:latin typeface="STHeiti" pitchFamily="34" charset="0"/>
                 <a:ea typeface="Microsoft JhengHei" pitchFamily="34" charset="-122"/>
                 <a:cs typeface="Microsoft JhengHei" pitchFamily="34" charset="-120"/>
               </a:rPr>
@@ -5135,7 +5102,7 @@
             </a:avLst>
           </a:prstGeom>
           <a:solidFill>
-            <a:srgbClr val="10131A"/>
+            <a:srgbClr val="111B30"/>
           </a:solidFill>
           <a:ln/>
         </p:spPr>
@@ -5174,9 +5141,9 @@
             <a:r>
               <a:rPr lang="en-US" sz="1400" b="1" dirty="0">
                 <a:solidFill>
-                  <a:srgbClr val="9EEBD8"/>
-                </a:solidFill>
-                <a:latin typeface="Courier New" pitchFamily="34" charset="0"/>
+                  <a:srgbClr val="157554"/>
+                </a:solidFill>
+                <a:latin typeface="STHeiti" pitchFamily="34" charset="0"/>
                 <a:ea typeface="Courier New" pitchFamily="34" charset="-122"/>
                 <a:cs typeface="Courier New" pitchFamily="34" charset="-120"/>
               </a:rPr>
@@ -5194,9 +5161,9 @@
             <a:r>
               <a:rPr lang="en-US" sz="1400" b="1" dirty="0">
                 <a:solidFill>
-                  <a:srgbClr val="9EEBD8"/>
-                </a:solidFill>
-                <a:latin typeface="Courier New" pitchFamily="34" charset="0"/>
+                  <a:srgbClr val="157554"/>
+                </a:solidFill>
+                <a:latin typeface="STHeiti" pitchFamily="34" charset="0"/>
                 <a:ea typeface="Courier New" pitchFamily="34" charset="-122"/>
                 <a:cs typeface="Courier New" pitchFamily="34" charset="-120"/>
               </a:rPr>
@@ -5214,9 +5181,9 @@
             <a:r>
               <a:rPr lang="en-US" sz="1400" b="1" dirty="0">
                 <a:solidFill>
-                  <a:srgbClr val="9EEBD8"/>
-                </a:solidFill>
-                <a:latin typeface="Courier New" pitchFamily="34" charset="0"/>
+                  <a:srgbClr val="157554"/>
+                </a:solidFill>
+                <a:latin typeface="STHeiti" pitchFamily="34" charset="0"/>
                 <a:ea typeface="Courier New" pitchFamily="34" charset="-122"/>
                 <a:cs typeface="Courier New" pitchFamily="34" charset="-120"/>
               </a:rPr>
@@ -5234,9 +5201,9 @@
             <a:r>
               <a:rPr lang="en-US" sz="1400" b="1" dirty="0">
                 <a:solidFill>
-                  <a:srgbClr val="9EEBD8"/>
-                </a:solidFill>
-                <a:latin typeface="Courier New" pitchFamily="34" charset="0"/>
+                  <a:srgbClr val="157554"/>
+                </a:solidFill>
+                <a:latin typeface="STHeiti" pitchFamily="34" charset="0"/>
                 <a:ea typeface="Courier New" pitchFamily="34" charset="-122"/>
                 <a:cs typeface="Courier New" pitchFamily="34" charset="-120"/>
               </a:rPr>
@@ -5263,7 +5230,7 @@
             </a:avLst>
           </a:prstGeom>
           <a:solidFill>
-            <a:srgbClr val="F3F4F7"/>
+            <a:srgbClr val="E9E3D6"/>
           </a:solidFill>
           <a:ln/>
         </p:spPr>
@@ -5287,7 +5254,7 @@
             <a:avLst/>
           </a:prstGeom>
           <a:solidFill>
-            <a:srgbClr val="1FB6A6"/>
+            <a:srgbClr val="157554"/>
           </a:solidFill>
           <a:ln/>
         </p:spPr>
@@ -5323,9 +5290,9 @@
             <a:r>
               <a:rPr lang="en-US" sz="1300" b="1" dirty="0">
                 <a:solidFill>
-                  <a:srgbClr val="10131A"/>
-                </a:solidFill>
-                <a:latin typeface="Arial" pitchFamily="34" charset="0"/>
+                  <a:srgbClr val="1F1E1D"/>
+                </a:solidFill>
+                <a:latin typeface="STHeiti" pitchFamily="34" charset="0"/>
                 <a:ea typeface="Arial" pitchFamily="34" charset="-122"/>
                 <a:cs typeface="Arial" pitchFamily="34" charset="-120"/>
               </a:rPr>
@@ -5362,9 +5329,9 @@
             <a:r>
               <a:rPr lang="en-US" sz="1250" dirty="0">
                 <a:solidFill>
-                  <a:srgbClr val="6E7687"/>
-                </a:solidFill>
-                <a:latin typeface="Microsoft JhengHei" pitchFamily="34" charset="0"/>
+                  <a:srgbClr val="68645C"/>
+                </a:solidFill>
+                <a:latin typeface="STHeiti" pitchFamily="34" charset="0"/>
                 <a:ea typeface="Microsoft JhengHei" pitchFamily="34" charset="-122"/>
                 <a:cs typeface="Microsoft JhengHei" pitchFamily="34" charset="-120"/>
               </a:rPr>
@@ -5391,7 +5358,7 @@
             </a:avLst>
           </a:prstGeom>
           <a:solidFill>
-            <a:srgbClr val="F3F4F7"/>
+            <a:srgbClr val="E9E3D6"/>
           </a:solidFill>
           <a:ln/>
         </p:spPr>
@@ -5415,7 +5382,7 @@
             <a:avLst/>
           </a:prstGeom>
           <a:solidFill>
-            <a:srgbClr val="4A5568"/>
+            <a:srgbClr val="34445E"/>
           </a:solidFill>
           <a:ln/>
         </p:spPr>
@@ -5451,9 +5418,9 @@
             <a:r>
               <a:rPr lang="en-US" sz="1300" b="1" dirty="0">
                 <a:solidFill>
-                  <a:srgbClr val="10131A"/>
-                </a:solidFill>
-                <a:latin typeface="Arial" pitchFamily="34" charset="0"/>
+                  <a:srgbClr val="1F1E1D"/>
+                </a:solidFill>
+                <a:latin typeface="STHeiti" pitchFamily="34" charset="0"/>
                 <a:ea typeface="Arial" pitchFamily="34" charset="-122"/>
                 <a:cs typeface="Arial" pitchFamily="34" charset="-120"/>
               </a:rPr>
@@ -5490,9 +5457,9 @@
             <a:r>
               <a:rPr lang="en-US" sz="1250" dirty="0">
                 <a:solidFill>
-                  <a:srgbClr val="6E7687"/>
-                </a:solidFill>
-                <a:latin typeface="Microsoft JhengHei" pitchFamily="34" charset="0"/>
+                  <a:srgbClr val="68645C"/>
+                </a:solidFill>
+                <a:latin typeface="STHeiti" pitchFamily="34" charset="0"/>
                 <a:ea typeface="Microsoft JhengHei" pitchFamily="34" charset="-122"/>
                 <a:cs typeface="Microsoft JhengHei" pitchFamily="34" charset="-120"/>
               </a:rPr>
@@ -5519,7 +5486,7 @@
             </a:avLst>
           </a:prstGeom>
           <a:solidFill>
-            <a:srgbClr val="F3F4F7"/>
+            <a:srgbClr val="E9E3D6"/>
           </a:solidFill>
           <a:ln/>
         </p:spPr>
@@ -5543,7 +5510,7 @@
             <a:avLst/>
           </a:prstGeom>
           <a:solidFill>
-            <a:srgbClr val="F96167"/>
+            <a:srgbClr val="157554"/>
           </a:solidFill>
           <a:ln/>
         </p:spPr>
@@ -5579,9 +5546,9 @@
             <a:r>
               <a:rPr lang="en-US" sz="1300" b="1" dirty="0">
                 <a:solidFill>
-                  <a:srgbClr val="10131A"/>
-                </a:solidFill>
-                <a:latin typeface="Arial" pitchFamily="34" charset="0"/>
+                  <a:srgbClr val="1F1E1D"/>
+                </a:solidFill>
+                <a:latin typeface="STHeiti" pitchFamily="34" charset="0"/>
                 <a:ea typeface="Arial" pitchFamily="34" charset="-122"/>
                 <a:cs typeface="Arial" pitchFamily="34" charset="-120"/>
               </a:rPr>
@@ -5618,9 +5585,9 @@
             <a:r>
               <a:rPr lang="en-US" sz="1250" dirty="0">
                 <a:solidFill>
-                  <a:srgbClr val="6E7687"/>
-                </a:solidFill>
-                <a:latin typeface="Microsoft JhengHei" pitchFamily="34" charset="0"/>
+                  <a:srgbClr val="68645C"/>
+                </a:solidFill>
+                <a:latin typeface="STHeiti" pitchFamily="34" charset="0"/>
                 <a:ea typeface="Microsoft JhengHei" pitchFamily="34" charset="-122"/>
                 <a:cs typeface="Microsoft JhengHei" pitchFamily="34" charset="-120"/>
               </a:rPr>
@@ -5657,9 +5624,9 @@
             <a:r>
               <a:rPr lang="en-US" sz="1500" i="1" dirty="0">
                 <a:solidFill>
-                  <a:srgbClr val="6E7687"/>
-                </a:solidFill>
-                <a:latin typeface="Microsoft JhengHei" pitchFamily="34" charset="0"/>
+                  <a:srgbClr val="68645C"/>
+                </a:solidFill>
+                <a:latin typeface="STHeiti" pitchFamily="34" charset="0"/>
                 <a:ea typeface="Microsoft JhengHei" pitchFamily="34" charset="-122"/>
                 <a:cs typeface="Microsoft JhengHei" pitchFamily="34" charset="-120"/>
               </a:rPr>
@@ -5696,9 +5663,9 @@
             <a:r>
               <a:rPr lang="en-US" sz="1100" dirty="0">
                 <a:solidFill>
-                  <a:srgbClr val="A8AEBC"/>
-                </a:solidFill>
-                <a:latin typeface="Arial" pitchFamily="34" charset="0"/>
+                  <a:srgbClr val="9DA89F"/>
+                </a:solidFill>
+                <a:latin typeface="STHeiti" pitchFamily="34" charset="0"/>
                 <a:ea typeface="Arial" pitchFamily="34" charset="-122"/>
                 <a:cs typeface="Arial" pitchFamily="34" charset="-120"/>
               </a:rPr>
@@ -5722,7 +5689,7 @@
     <p:bg>
       <p:bgPr>
         <a:solidFill>
-          <a:srgbClr val="10131A"/>
+          <a:srgbClr val="111B30"/>
         </a:solidFill>
         <a:effectLst/>
       </p:bgPr>
@@ -5756,7 +5723,7 @@
             <a:avLst/>
           </a:prstGeom>
           <a:solidFill>
-            <a:srgbClr val="F96167"/>
+            <a:srgbClr val="157554"/>
           </a:solidFill>
           <a:ln/>
         </p:spPr>
@@ -5792,9 +5759,9 @@
             <a:r>
               <a:rPr lang="en-US" sz="1200" b="1" kern="0" spc="200" dirty="0">
                 <a:solidFill>
-                  <a:srgbClr val="8A93A6"/>
-                </a:solidFill>
-                <a:latin typeface="Arial" pitchFamily="34" charset="0"/>
+                  <a:srgbClr val="9FAEBE"/>
+                </a:solidFill>
+                <a:latin typeface="STHeiti" pitchFamily="34" charset="0"/>
                 <a:ea typeface="Arial" pitchFamily="34" charset="-122"/>
                 <a:cs typeface="Arial" pitchFamily="34" charset="-120"/>
               </a:rPr>
@@ -5825,21 +5792,15 @@
           <a:bodyPr wrap="square" lIns="0" tIns="0" rIns="0" bIns="0" rtlCol="0" anchor="ctr"/>
           <a:lstStyle/>
           <a:p>
-            <a:pPr marL="0" indent="0">
-              <a:buNone/>
-            </a:pPr>
-            <a:r>
-              <a:rPr lang="en-US" sz="3400" b="1" dirty="0">
-                <a:solidFill>
-                  <a:srgbClr val="FFFFFF"/>
-                </a:solidFill>
-                <a:latin typeface="Microsoft JhengHei" pitchFamily="34" charset="0"/>
-                <a:ea typeface="Microsoft JhengHei" pitchFamily="34" charset="-122"/>
-                <a:cs typeface="Microsoft JhengHei" pitchFamily="34" charset="-120"/>
-              </a:rPr>
-              <a:t>Planning Engine 是整個產品最大的價值</a:t>
-            </a:r>
-            <a:endParaRPr lang="en-US" sz="3400" dirty="0"/>
+            <a:r>
+              <a:rPr>
+                <a:solidFill>
+                  <a:srgbClr val="FAF9F5"/>
+                </a:solidFill>
+                <a:latin typeface="STHeiti"/>
+              </a:rPr>
+              <a:t>從計畫到今天：改動要能執行</a:t>
+            </a:r>
           </a:p>
         </p:txBody>
       </p:sp>
@@ -5875,7 +5836,7 @@
                 <a:solidFill>
                   <a:srgbClr val="D6DAE4"/>
                 </a:solidFill>
-                <a:latin typeface="Microsoft JhengHei" pitchFamily="34" charset="0"/>
+                <a:latin typeface="STHeiti" pitchFamily="34" charset="0"/>
                 <a:ea typeface="Microsoft JhengHei" pitchFamily="34" charset="-122"/>
                 <a:cs typeface="Microsoft JhengHei" pitchFamily="34" charset="-120"/>
               </a:rPr>
@@ -5902,7 +5863,7 @@
             </a:avLst>
           </a:prstGeom>
           <a:solidFill>
-            <a:srgbClr val="1B1F2B"/>
+            <a:srgbClr val="1E2A40"/>
           </a:solidFill>
           <a:ln/>
         </p:spPr>
@@ -5938,9 +5899,9 @@
             <a:r>
               <a:rPr lang="en-US" sz="1300" b="1" dirty="0">
                 <a:solidFill>
-                  <a:srgbClr val="CFD4DF"/>
-                </a:solidFill>
-                <a:latin typeface="Arial" pitchFamily="34" charset="0"/>
+                  <a:srgbClr val="C9D0C8"/>
+                </a:solidFill>
+                <a:latin typeface="STHeiti" pitchFamily="34" charset="0"/>
                 <a:ea typeface="Arial" pitchFamily="34" charset="-122"/>
                 <a:cs typeface="Arial" pitchFamily="34" charset="-120"/>
               </a:rPr>
@@ -5967,7 +5928,7 @@
             </a:avLst>
           </a:prstGeom>
           <a:solidFill>
-            <a:srgbClr val="1B1F2B"/>
+            <a:srgbClr val="1E2A40"/>
           </a:solidFill>
           <a:ln/>
         </p:spPr>
@@ -6003,9 +5964,9 @@
             <a:r>
               <a:rPr lang="en-US" sz="1300" b="1" dirty="0">
                 <a:solidFill>
-                  <a:srgbClr val="CFD4DF"/>
-                </a:solidFill>
-                <a:latin typeface="Arial" pitchFamily="34" charset="0"/>
+                  <a:srgbClr val="C9D0C8"/>
+                </a:solidFill>
+                <a:latin typeface="STHeiti" pitchFamily="34" charset="0"/>
                 <a:ea typeface="Arial" pitchFamily="34" charset="-122"/>
                 <a:cs typeface="Arial" pitchFamily="34" charset="-120"/>
               </a:rPr>
@@ -6032,7 +5993,7 @@
             </a:avLst>
           </a:prstGeom>
           <a:solidFill>
-            <a:srgbClr val="1B1F2B"/>
+            <a:srgbClr val="1E2A40"/>
           </a:solidFill>
           <a:ln/>
         </p:spPr>
@@ -6068,9 +6029,9 @@
             <a:r>
               <a:rPr lang="en-US" sz="1300" b="1" dirty="0">
                 <a:solidFill>
-                  <a:srgbClr val="CFD4DF"/>
-                </a:solidFill>
-                <a:latin typeface="Arial" pitchFamily="34" charset="0"/>
+                  <a:srgbClr val="C9D0C8"/>
+                </a:solidFill>
+                <a:latin typeface="STHeiti" pitchFamily="34" charset="0"/>
                 <a:ea typeface="Arial" pitchFamily="34" charset="-122"/>
                 <a:cs typeface="Arial" pitchFamily="34" charset="-120"/>
               </a:rPr>
@@ -6097,7 +6058,7 @@
             </a:avLst>
           </a:prstGeom>
           <a:solidFill>
-            <a:srgbClr val="1B1F2B"/>
+            <a:srgbClr val="1E2A40"/>
           </a:solidFill>
           <a:ln/>
         </p:spPr>
@@ -6133,9 +6094,9 @@
             <a:r>
               <a:rPr lang="en-US" sz="1300" b="1" dirty="0">
                 <a:solidFill>
-                  <a:srgbClr val="CFD4DF"/>
-                </a:solidFill>
-                <a:latin typeface="Arial" pitchFamily="34" charset="0"/>
+                  <a:srgbClr val="C9D0C8"/>
+                </a:solidFill>
+                <a:latin typeface="STHeiti" pitchFamily="34" charset="0"/>
                 <a:ea typeface="Arial" pitchFamily="34" charset="-122"/>
                 <a:cs typeface="Arial" pitchFamily="34" charset="-120"/>
               </a:rPr>
@@ -6162,7 +6123,7 @@
             </a:avLst>
           </a:prstGeom>
           <a:solidFill>
-            <a:srgbClr val="1B1F2B"/>
+            <a:srgbClr val="1E2A40"/>
           </a:solidFill>
           <a:ln/>
         </p:spPr>
@@ -6198,9 +6159,9 @@
             <a:r>
               <a:rPr lang="en-US" sz="1300" b="1" dirty="0">
                 <a:solidFill>
-                  <a:srgbClr val="CFD4DF"/>
-                </a:solidFill>
-                <a:latin typeface="Arial" pitchFamily="34" charset="0"/>
+                  <a:srgbClr val="C9D0C8"/>
+                </a:solidFill>
+                <a:latin typeface="STHeiti" pitchFamily="34" charset="0"/>
                 <a:ea typeface="Arial" pitchFamily="34" charset="-122"/>
                 <a:cs typeface="Arial" pitchFamily="34" charset="-120"/>
               </a:rPr>
@@ -6239,7 +6200,7 @@
                 <a:solidFill>
                   <a:srgbClr val="5A6376"/>
                 </a:solidFill>
-                <a:latin typeface="Arial" pitchFamily="34" charset="0"/>
+                <a:latin typeface="STHeiti" pitchFamily="34" charset="0"/>
                 <a:ea typeface="Arial" pitchFamily="34" charset="-122"/>
                 <a:cs typeface="Arial" pitchFamily="34" charset="-120"/>
               </a:rPr>
@@ -6266,7 +6227,7 @@
             </a:avLst>
           </a:prstGeom>
           <a:solidFill>
-            <a:srgbClr val="1B1F2B"/>
+            <a:srgbClr val="1E2A40"/>
           </a:solidFill>
           <a:ln/>
         </p:spPr>
@@ -6305,9 +6266,9 @@
             <a:r>
               <a:rPr lang="en-US" sz="2000" b="1" dirty="0">
                 <a:solidFill>
-                  <a:srgbClr val="1FB6A6"/>
-                </a:solidFill>
-                <a:latin typeface="Arial" pitchFamily="34" charset="0"/>
+                  <a:srgbClr val="49D993"/>
+                </a:solidFill>
+                <a:latin typeface="STHeiti" pitchFamily="34" charset="0"/>
                 <a:ea typeface="Arial" pitchFamily="34" charset="-122"/>
                 <a:cs typeface="Arial" pitchFamily="34" charset="-120"/>
               </a:rPr>
@@ -6325,9 +6286,9 @@
             <a:r>
               <a:rPr lang="en-US" sz="2000" b="1" dirty="0">
                 <a:solidFill>
-                  <a:srgbClr val="1FB6A6"/>
-                </a:solidFill>
-                <a:latin typeface="Arial" pitchFamily="34" charset="0"/>
+                  <a:srgbClr val="49D993"/>
+                </a:solidFill>
+                <a:latin typeface="STHeiti" pitchFamily="34" charset="0"/>
                 <a:ea typeface="Arial" pitchFamily="34" charset="-122"/>
                 <a:cs typeface="Arial" pitchFamily="34" charset="-120"/>
               </a:rPr>
@@ -6366,7 +6327,7 @@
                 <a:solidFill>
                   <a:srgbClr val="5A6376"/>
                 </a:solidFill>
-                <a:latin typeface="Arial" pitchFamily="34" charset="0"/>
+                <a:latin typeface="STHeiti" pitchFamily="34" charset="0"/>
                 <a:ea typeface="Arial" pitchFamily="34" charset="-122"/>
                 <a:cs typeface="Arial" pitchFamily="34" charset="-120"/>
               </a:rPr>
@@ -6393,7 +6354,7 @@
             </a:avLst>
           </a:prstGeom>
           <a:solidFill>
-            <a:srgbClr val="F96167"/>
+            <a:srgbClr val="157554"/>
           </a:solidFill>
           <a:ln/>
         </p:spPr>
@@ -6429,9 +6390,9 @@
             <a:r>
               <a:rPr lang="en-US" sz="1700" b="1" dirty="0">
                 <a:solidFill>
-                  <a:srgbClr val="FFFFFF"/>
-                </a:solidFill>
-                <a:latin typeface="Microsoft JhengHei" pitchFamily="34" charset="0"/>
+                  <a:srgbClr val="FAF9F5"/>
+                </a:solidFill>
+                <a:latin typeface="STHeiti" pitchFamily="34" charset="0"/>
                 <a:ea typeface="Microsoft JhengHei" pitchFamily="34" charset="-122"/>
                 <a:cs typeface="Microsoft JhengHei" pitchFamily="34" charset="-120"/>
               </a:rPr>
@@ -6471,9 +6432,9 @@
             <a:r>
               <a:rPr lang="en-US" sz="1300" dirty="0">
                 <a:solidFill>
-                  <a:srgbClr val="FFE3E4"/>
-                </a:solidFill>
-                <a:latin typeface="Microsoft JhengHei" pitchFamily="34" charset="0"/>
+                  <a:srgbClr val="FFE0C4"/>
+                </a:solidFill>
+                <a:latin typeface="STHeiti" pitchFamily="34" charset="0"/>
                 <a:ea typeface="Microsoft JhengHei" pitchFamily="34" charset="-122"/>
                 <a:cs typeface="Microsoft JhengHei" pitchFamily="34" charset="-120"/>
               </a:rPr>
@@ -6491,9 +6452,9 @@
             <a:r>
               <a:rPr lang="en-US" sz="1300" dirty="0">
                 <a:solidFill>
-                  <a:srgbClr val="FFE3E4"/>
-                </a:solidFill>
-                <a:latin typeface="Microsoft JhengHei" pitchFamily="34" charset="0"/>
+                  <a:srgbClr val="FFE0C4"/>
+                </a:solidFill>
+                <a:latin typeface="STHeiti" pitchFamily="34" charset="0"/>
                 <a:ea typeface="Microsoft JhengHei" pitchFamily="34" charset="-122"/>
                 <a:cs typeface="Microsoft JhengHei" pitchFamily="34" charset="-120"/>
               </a:rPr>
@@ -6511,9 +6472,9 @@
             <a:r>
               <a:rPr lang="en-US" sz="1300" dirty="0">
                 <a:solidFill>
-                  <a:srgbClr val="FFE3E4"/>
-                </a:solidFill>
-                <a:latin typeface="Microsoft JhengHei" pitchFamily="34" charset="0"/>
+                  <a:srgbClr val="FFE0C4"/>
+                </a:solidFill>
+                <a:latin typeface="STHeiti" pitchFamily="34" charset="0"/>
                 <a:ea typeface="Microsoft JhengHei" pitchFamily="34" charset="-122"/>
                 <a:cs typeface="Microsoft JhengHei" pitchFamily="34" charset="-120"/>
               </a:rPr>
@@ -6531,9 +6492,9 @@
             <a:r>
               <a:rPr lang="en-US" sz="1300" dirty="0">
                 <a:solidFill>
-                  <a:srgbClr val="FFE3E4"/>
-                </a:solidFill>
-                <a:latin typeface="Microsoft JhengHei" pitchFamily="34" charset="0"/>
+                  <a:srgbClr val="FFE0C4"/>
+                </a:solidFill>
+                <a:latin typeface="STHeiti" pitchFamily="34" charset="0"/>
                 <a:ea typeface="Microsoft JhengHei" pitchFamily="34" charset="-122"/>
                 <a:cs typeface="Microsoft JhengHei" pitchFamily="34" charset="-120"/>
               </a:rPr>
@@ -6570,9 +6531,9 @@
             <a:r>
               <a:rPr lang="en-US" sz="1100" dirty="0">
                 <a:solidFill>
-                  <a:srgbClr val="A8AEBC"/>
-                </a:solidFill>
-                <a:latin typeface="Arial" pitchFamily="34" charset="0"/>
+                  <a:srgbClr val="9DA89F"/>
+                </a:solidFill>
+                <a:latin typeface="STHeiti" pitchFamily="34" charset="0"/>
                 <a:ea typeface="Arial" pitchFamily="34" charset="-122"/>
                 <a:cs typeface="Arial" pitchFamily="34" charset="-120"/>
               </a:rPr>
@@ -6596,7 +6557,7 @@
     <p:bg>
       <p:bgPr>
         <a:solidFill>
-          <a:srgbClr val="FFFFFF"/>
+          <a:srgbClr val="F0EEE6"/>
         </a:solidFill>
         <a:effectLst/>
       </p:bgPr>
@@ -6630,7 +6591,7 @@
             <a:avLst/>
           </a:prstGeom>
           <a:solidFill>
-            <a:srgbClr val="F96167"/>
+            <a:srgbClr val="157554"/>
           </a:solidFill>
           <a:ln/>
         </p:spPr>
@@ -6666,9 +6627,9 @@
             <a:r>
               <a:rPr lang="en-US" sz="1200" b="1" kern="0" spc="200" dirty="0">
                 <a:solidFill>
-                  <a:srgbClr val="6E7687"/>
-                </a:solidFill>
-                <a:latin typeface="Arial" pitchFamily="34" charset="0"/>
+                  <a:srgbClr val="68645C"/>
+                </a:solidFill>
+                <a:latin typeface="STHeiti" pitchFamily="34" charset="0"/>
                 <a:ea typeface="Arial" pitchFamily="34" charset="-122"/>
                 <a:cs typeface="Arial" pitchFamily="34" charset="-120"/>
               </a:rPr>
@@ -6705,9 +6666,9 @@
             <a:r>
               <a:rPr lang="en-US" sz="3400" b="1" dirty="0">
                 <a:solidFill>
-                  <a:srgbClr val="10131A"/>
-                </a:solidFill>
-                <a:latin typeface="Microsoft JhengHei" pitchFamily="34" charset="0"/>
+                  <a:srgbClr val="1F1E1D"/>
+                </a:solidFill>
+                <a:latin typeface="STHeiti" pitchFamily="34" charset="0"/>
                 <a:ea typeface="Microsoft JhengHei" pitchFamily="34" charset="-122"/>
                 <a:cs typeface="Microsoft JhengHei" pitchFamily="34" charset="-120"/>
               </a:rPr>
@@ -6747,9 +6708,9 @@
             <a:r>
               <a:rPr lang="en-US" sz="2000" dirty="0">
                 <a:solidFill>
-                  <a:srgbClr val="353A46"/>
-                </a:solidFill>
-                <a:latin typeface="Microsoft JhengHei" pitchFamily="34" charset="0"/>
+                  <a:srgbClr val="1F1E1D"/>
+                </a:solidFill>
+                <a:latin typeface="STHeiti" pitchFamily="34" charset="0"/>
                 <a:ea typeface="Microsoft JhengHei" pitchFamily="34" charset="-122"/>
                 <a:cs typeface="Microsoft JhengHei" pitchFamily="34" charset="-120"/>
               </a:rPr>
@@ -6776,7 +6737,7 @@
             </a:avLst>
           </a:prstGeom>
           <a:solidFill>
-            <a:srgbClr val="F3F4F7"/>
+            <a:srgbClr val="E9E3D6"/>
           </a:solidFill>
           <a:ln/>
         </p:spPr>
@@ -6800,7 +6761,7 @@
             <a:avLst/>
           </a:prstGeom>
           <a:solidFill>
-            <a:srgbClr val="F96167"/>
+            <a:srgbClr val="157554"/>
           </a:solidFill>
           <a:ln/>
         </p:spPr>
@@ -6836,9 +6797,9 @@
             <a:r>
               <a:rPr lang="en-US" sz="1600" b="1" dirty="0">
                 <a:solidFill>
-                  <a:srgbClr val="10131A"/>
-                </a:solidFill>
-                <a:latin typeface="Arial" pitchFamily="34" charset="0"/>
+                  <a:srgbClr val="1F1E1D"/>
+                </a:solidFill>
+                <a:latin typeface="STHeiti" pitchFamily="34" charset="0"/>
                 <a:ea typeface="Arial" pitchFamily="34" charset="-122"/>
                 <a:cs typeface="Arial" pitchFamily="34" charset="-120"/>
               </a:rPr>
@@ -6878,9 +6839,9 @@
             <a:r>
               <a:rPr lang="en-US" sz="1150" dirty="0">
                 <a:solidFill>
-                  <a:srgbClr val="6E7687"/>
-                </a:solidFill>
-                <a:latin typeface="Arial" pitchFamily="34" charset="0"/>
+                  <a:srgbClr val="68645C"/>
+                </a:solidFill>
+                <a:latin typeface="STHeiti" pitchFamily="34" charset="0"/>
                 <a:ea typeface="Arial" pitchFamily="34" charset="-122"/>
                 <a:cs typeface="Arial" pitchFamily="34" charset="-120"/>
               </a:rPr>
@@ -6898,9 +6859,9 @@
             <a:r>
               <a:rPr lang="en-US" sz="1150" dirty="0">
                 <a:solidFill>
-                  <a:srgbClr val="6E7687"/>
-                </a:solidFill>
-                <a:latin typeface="Arial" pitchFamily="34" charset="0"/>
+                  <a:srgbClr val="68645C"/>
+                </a:solidFill>
+                <a:latin typeface="STHeiti" pitchFamily="34" charset="0"/>
                 <a:ea typeface="Arial" pitchFamily="34" charset="-122"/>
                 <a:cs typeface="Arial" pitchFamily="34" charset="-120"/>
               </a:rPr>
@@ -6918,9 +6879,9 @@
             <a:r>
               <a:rPr lang="en-US" sz="1150" dirty="0">
                 <a:solidFill>
-                  <a:srgbClr val="6E7687"/>
-                </a:solidFill>
-                <a:latin typeface="Arial" pitchFamily="34" charset="0"/>
+                  <a:srgbClr val="68645C"/>
+                </a:solidFill>
+                <a:latin typeface="STHeiti" pitchFamily="34" charset="0"/>
                 <a:ea typeface="Arial" pitchFamily="34" charset="-122"/>
                 <a:cs typeface="Arial" pitchFamily="34" charset="-120"/>
               </a:rPr>
@@ -6938,9 +6899,9 @@
             <a:r>
               <a:rPr lang="en-US" sz="1150" dirty="0">
                 <a:solidFill>
-                  <a:srgbClr val="6E7687"/>
-                </a:solidFill>
-                <a:latin typeface="Arial" pitchFamily="34" charset="0"/>
+                  <a:srgbClr val="68645C"/>
+                </a:solidFill>
+                <a:latin typeface="STHeiti" pitchFamily="34" charset="0"/>
                 <a:ea typeface="Arial" pitchFamily="34" charset="-122"/>
                 <a:cs typeface="Arial" pitchFamily="34" charset="-120"/>
               </a:rPr>
@@ -6958,9 +6919,9 @@
             <a:r>
               <a:rPr lang="en-US" sz="1150" dirty="0">
                 <a:solidFill>
-                  <a:srgbClr val="6E7687"/>
-                </a:solidFill>
-                <a:latin typeface="Arial" pitchFamily="34" charset="0"/>
+                  <a:srgbClr val="68645C"/>
+                </a:solidFill>
+                <a:latin typeface="STHeiti" pitchFamily="34" charset="0"/>
                 <a:ea typeface="Arial" pitchFamily="34" charset="-122"/>
                 <a:cs typeface="Arial" pitchFamily="34" charset="-120"/>
               </a:rPr>
@@ -6978,9 +6939,9 @@
             <a:r>
               <a:rPr lang="en-US" sz="1150" dirty="0">
                 <a:solidFill>
-                  <a:srgbClr val="6E7687"/>
-                </a:solidFill>
-                <a:latin typeface="Arial" pitchFamily="34" charset="0"/>
+                  <a:srgbClr val="68645C"/>
+                </a:solidFill>
+                <a:latin typeface="STHeiti" pitchFamily="34" charset="0"/>
                 <a:ea typeface="Arial" pitchFamily="34" charset="-122"/>
                 <a:cs typeface="Arial" pitchFamily="34" charset="-120"/>
               </a:rPr>
@@ -7007,7 +6968,7 @@
             </a:avLst>
           </a:prstGeom>
           <a:solidFill>
-            <a:srgbClr val="F3F4F7"/>
+            <a:srgbClr val="E9E3D6"/>
           </a:solidFill>
           <a:ln/>
         </p:spPr>
@@ -7031,7 +6992,7 @@
             <a:avLst/>
           </a:prstGeom>
           <a:solidFill>
-            <a:srgbClr val="1FB6A6"/>
+            <a:srgbClr val="157554"/>
           </a:solidFill>
           <a:ln/>
         </p:spPr>
@@ -7067,9 +7028,9 @@
             <a:r>
               <a:rPr lang="en-US" sz="1600" b="1" dirty="0">
                 <a:solidFill>
-                  <a:srgbClr val="10131A"/>
-                </a:solidFill>
-                <a:latin typeface="Arial" pitchFamily="34" charset="0"/>
+                  <a:srgbClr val="1F1E1D"/>
+                </a:solidFill>
+                <a:latin typeface="STHeiti" pitchFamily="34" charset="0"/>
                 <a:ea typeface="Arial" pitchFamily="34" charset="-122"/>
                 <a:cs typeface="Arial" pitchFamily="34" charset="-120"/>
               </a:rPr>
@@ -7109,9 +7070,9 @@
             <a:r>
               <a:rPr lang="en-US" sz="1150" dirty="0">
                 <a:solidFill>
-                  <a:srgbClr val="6E7687"/>
-                </a:solidFill>
-                <a:latin typeface="Arial" pitchFamily="34" charset="0"/>
+                  <a:srgbClr val="68645C"/>
+                </a:solidFill>
+                <a:latin typeface="STHeiti" pitchFamily="34" charset="0"/>
                 <a:ea typeface="Arial" pitchFamily="34" charset="-122"/>
                 <a:cs typeface="Arial" pitchFamily="34" charset="-120"/>
               </a:rPr>
@@ -7129,9 +7090,9 @@
             <a:r>
               <a:rPr lang="en-US" sz="1150" dirty="0">
                 <a:solidFill>
-                  <a:srgbClr val="6E7687"/>
-                </a:solidFill>
-                <a:latin typeface="Arial" pitchFamily="34" charset="0"/>
+                  <a:srgbClr val="68645C"/>
+                </a:solidFill>
+                <a:latin typeface="STHeiti" pitchFamily="34" charset="0"/>
                 <a:ea typeface="Arial" pitchFamily="34" charset="-122"/>
                 <a:cs typeface="Arial" pitchFamily="34" charset="-120"/>
               </a:rPr>
@@ -7149,9 +7110,9 @@
             <a:r>
               <a:rPr lang="en-US" sz="1150" dirty="0">
                 <a:solidFill>
-                  <a:srgbClr val="6E7687"/>
-                </a:solidFill>
-                <a:latin typeface="Arial" pitchFamily="34" charset="0"/>
+                  <a:srgbClr val="68645C"/>
+                </a:solidFill>
+                <a:latin typeface="STHeiti" pitchFamily="34" charset="0"/>
                 <a:ea typeface="Arial" pitchFamily="34" charset="-122"/>
                 <a:cs typeface="Arial" pitchFamily="34" charset="-120"/>
               </a:rPr>
@@ -7169,9 +7130,9 @@
             <a:r>
               <a:rPr lang="en-US" sz="1150" dirty="0">
                 <a:solidFill>
-                  <a:srgbClr val="6E7687"/>
-                </a:solidFill>
-                <a:latin typeface="Arial" pitchFamily="34" charset="0"/>
+                  <a:srgbClr val="68645C"/>
+                </a:solidFill>
+                <a:latin typeface="STHeiti" pitchFamily="34" charset="0"/>
                 <a:ea typeface="Arial" pitchFamily="34" charset="-122"/>
                 <a:cs typeface="Arial" pitchFamily="34" charset="-120"/>
               </a:rPr>
@@ -7189,9 +7150,9 @@
             <a:r>
               <a:rPr lang="en-US" sz="1150" dirty="0">
                 <a:solidFill>
-                  <a:srgbClr val="6E7687"/>
-                </a:solidFill>
-                <a:latin typeface="Arial" pitchFamily="34" charset="0"/>
+                  <a:srgbClr val="68645C"/>
+                </a:solidFill>
+                <a:latin typeface="STHeiti" pitchFamily="34" charset="0"/>
                 <a:ea typeface="Arial" pitchFamily="34" charset="-122"/>
                 <a:cs typeface="Arial" pitchFamily="34" charset="-120"/>
               </a:rPr>
@@ -7209,9 +7170,9 @@
             <a:r>
               <a:rPr lang="en-US" sz="1150" dirty="0">
                 <a:solidFill>
-                  <a:srgbClr val="6E7687"/>
-                </a:solidFill>
-                <a:latin typeface="Arial" pitchFamily="34" charset="0"/>
+                  <a:srgbClr val="68645C"/>
+                </a:solidFill>
+                <a:latin typeface="STHeiti" pitchFamily="34" charset="0"/>
                 <a:ea typeface="Arial" pitchFamily="34" charset="-122"/>
                 <a:cs typeface="Arial" pitchFamily="34" charset="-120"/>
               </a:rPr>
@@ -7238,7 +7199,7 @@
             </a:avLst>
           </a:prstGeom>
           <a:solidFill>
-            <a:srgbClr val="F3F4F7"/>
+            <a:srgbClr val="E9E3D6"/>
           </a:solidFill>
           <a:ln/>
         </p:spPr>
@@ -7262,7 +7223,7 @@
             <a:avLst/>
           </a:prstGeom>
           <a:solidFill>
-            <a:srgbClr val="10131A"/>
+            <a:srgbClr val="111B30"/>
           </a:solidFill>
           <a:ln/>
         </p:spPr>
@@ -7298,9 +7259,9 @@
             <a:r>
               <a:rPr lang="en-US" sz="1600" b="1" dirty="0">
                 <a:solidFill>
-                  <a:srgbClr val="10131A"/>
-                </a:solidFill>
-                <a:latin typeface="Arial" pitchFamily="34" charset="0"/>
+                  <a:srgbClr val="1F1E1D"/>
+                </a:solidFill>
+                <a:latin typeface="STHeiti" pitchFamily="34" charset="0"/>
                 <a:ea typeface="Arial" pitchFamily="34" charset="-122"/>
                 <a:cs typeface="Arial" pitchFamily="34" charset="-120"/>
               </a:rPr>
@@ -7340,9 +7301,9 @@
             <a:r>
               <a:rPr lang="en-US" sz="1150" dirty="0">
                 <a:solidFill>
-                  <a:srgbClr val="6E7687"/>
-                </a:solidFill>
-                <a:latin typeface="Arial" pitchFamily="34" charset="0"/>
+                  <a:srgbClr val="68645C"/>
+                </a:solidFill>
+                <a:latin typeface="STHeiti" pitchFamily="34" charset="0"/>
                 <a:ea typeface="Arial" pitchFamily="34" charset="-122"/>
                 <a:cs typeface="Arial" pitchFamily="34" charset="-120"/>
               </a:rPr>
@@ -7360,9 +7321,9 @@
             <a:r>
               <a:rPr lang="en-US" sz="1150" dirty="0">
                 <a:solidFill>
-                  <a:srgbClr val="6E7687"/>
-                </a:solidFill>
-                <a:latin typeface="Arial" pitchFamily="34" charset="0"/>
+                  <a:srgbClr val="68645C"/>
+                </a:solidFill>
+                <a:latin typeface="STHeiti" pitchFamily="34" charset="0"/>
                 <a:ea typeface="Arial" pitchFamily="34" charset="-122"/>
                 <a:cs typeface="Arial" pitchFamily="34" charset="-120"/>
               </a:rPr>
@@ -7380,9 +7341,9 @@
             <a:r>
               <a:rPr lang="en-US" sz="1150" dirty="0">
                 <a:solidFill>
-                  <a:srgbClr val="6E7687"/>
-                </a:solidFill>
-                <a:latin typeface="Arial" pitchFamily="34" charset="0"/>
+                  <a:srgbClr val="68645C"/>
+                </a:solidFill>
+                <a:latin typeface="STHeiti" pitchFamily="34" charset="0"/>
                 <a:ea typeface="Arial" pitchFamily="34" charset="-122"/>
                 <a:cs typeface="Arial" pitchFamily="34" charset="-120"/>
               </a:rPr>
@@ -7400,9 +7361,9 @@
             <a:r>
               <a:rPr lang="en-US" sz="1150" dirty="0">
                 <a:solidFill>
-                  <a:srgbClr val="6E7687"/>
-                </a:solidFill>
-                <a:latin typeface="Arial" pitchFamily="34" charset="0"/>
+                  <a:srgbClr val="68645C"/>
+                </a:solidFill>
+                <a:latin typeface="STHeiti" pitchFamily="34" charset="0"/>
                 <a:ea typeface="Arial" pitchFamily="34" charset="-122"/>
                 <a:cs typeface="Arial" pitchFamily="34" charset="-120"/>
               </a:rPr>
@@ -7420,9 +7381,9 @@
             <a:r>
               <a:rPr lang="en-US" sz="1150" dirty="0">
                 <a:solidFill>
-                  <a:srgbClr val="6E7687"/>
-                </a:solidFill>
-                <a:latin typeface="Arial" pitchFamily="34" charset="0"/>
+                  <a:srgbClr val="68645C"/>
+                </a:solidFill>
+                <a:latin typeface="STHeiti" pitchFamily="34" charset="0"/>
                 <a:ea typeface="Arial" pitchFamily="34" charset="-122"/>
                 <a:cs typeface="Arial" pitchFamily="34" charset="-120"/>
               </a:rPr>
@@ -7449,7 +7410,7 @@
             </a:avLst>
           </a:prstGeom>
           <a:solidFill>
-            <a:srgbClr val="F3F4F7"/>
+            <a:srgbClr val="E9E3D6"/>
           </a:solidFill>
           <a:ln/>
         </p:spPr>
@@ -7473,7 +7434,7 @@
             <a:avLst/>
           </a:prstGeom>
           <a:solidFill>
-            <a:srgbClr val="4A5568"/>
+            <a:srgbClr val="34445E"/>
           </a:solidFill>
           <a:ln/>
         </p:spPr>
@@ -7509,9 +7470,9 @@
             <a:r>
               <a:rPr lang="en-US" sz="1600" b="1" dirty="0">
                 <a:solidFill>
-                  <a:srgbClr val="10131A"/>
-                </a:solidFill>
-                <a:latin typeface="Arial" pitchFamily="34" charset="0"/>
+                  <a:srgbClr val="1F1E1D"/>
+                </a:solidFill>
+                <a:latin typeface="STHeiti" pitchFamily="34" charset="0"/>
                 <a:ea typeface="Arial" pitchFamily="34" charset="-122"/>
                 <a:cs typeface="Arial" pitchFamily="34" charset="-120"/>
               </a:rPr>
@@ -7551,9 +7512,9 @@
             <a:r>
               <a:rPr lang="en-US" sz="1150" dirty="0">
                 <a:solidFill>
-                  <a:srgbClr val="6E7687"/>
-                </a:solidFill>
-                <a:latin typeface="Arial" pitchFamily="34" charset="0"/>
+                  <a:srgbClr val="68645C"/>
+                </a:solidFill>
+                <a:latin typeface="STHeiti" pitchFamily="34" charset="0"/>
                 <a:ea typeface="Arial" pitchFamily="34" charset="-122"/>
                 <a:cs typeface="Arial" pitchFamily="34" charset="-120"/>
               </a:rPr>
@@ -7571,9 +7532,9 @@
             <a:r>
               <a:rPr lang="en-US" sz="1150" dirty="0">
                 <a:solidFill>
-                  <a:srgbClr val="6E7687"/>
-                </a:solidFill>
-                <a:latin typeface="Arial" pitchFamily="34" charset="0"/>
+                  <a:srgbClr val="68645C"/>
+                </a:solidFill>
+                <a:latin typeface="STHeiti" pitchFamily="34" charset="0"/>
                 <a:ea typeface="Arial" pitchFamily="34" charset="-122"/>
                 <a:cs typeface="Arial" pitchFamily="34" charset="-120"/>
               </a:rPr>
@@ -7591,9 +7552,9 @@
             <a:r>
               <a:rPr lang="en-US" sz="1150" dirty="0">
                 <a:solidFill>
-                  <a:srgbClr val="6E7687"/>
-                </a:solidFill>
-                <a:latin typeface="Arial" pitchFamily="34" charset="0"/>
+                  <a:srgbClr val="68645C"/>
+                </a:solidFill>
+                <a:latin typeface="STHeiti" pitchFamily="34" charset="0"/>
                 <a:ea typeface="Arial" pitchFamily="34" charset="-122"/>
                 <a:cs typeface="Arial" pitchFamily="34" charset="-120"/>
               </a:rPr>
@@ -7611,9 +7572,9 @@
             <a:r>
               <a:rPr lang="en-US" sz="1150" dirty="0">
                 <a:solidFill>
-                  <a:srgbClr val="6E7687"/>
-                </a:solidFill>
-                <a:latin typeface="Arial" pitchFamily="34" charset="0"/>
+                  <a:srgbClr val="68645C"/>
+                </a:solidFill>
+                <a:latin typeface="STHeiti" pitchFamily="34" charset="0"/>
                 <a:ea typeface="Arial" pitchFamily="34" charset="-122"/>
                 <a:cs typeface="Arial" pitchFamily="34" charset="-120"/>
               </a:rPr>
@@ -7650,9 +7611,9 @@
             <a:r>
               <a:rPr lang="en-US" sz="1100" dirty="0">
                 <a:solidFill>
-                  <a:srgbClr val="A8AEBC"/>
-                </a:solidFill>
-                <a:latin typeface="Arial" pitchFamily="34" charset="0"/>
+                  <a:srgbClr val="9DA89F"/>
+                </a:solidFill>
+                <a:latin typeface="STHeiti" pitchFamily="34" charset="0"/>
                 <a:ea typeface="Arial" pitchFamily="34" charset="-122"/>
                 <a:cs typeface="Arial" pitchFamily="34" charset="-120"/>
               </a:rPr>
@@ -7676,7 +7637,7 @@
     <p:bg>
       <p:bgPr>
         <a:solidFill>
-          <a:srgbClr val="FFFFFF"/>
+          <a:srgbClr val="F0EEE6"/>
         </a:solidFill>
         <a:effectLst/>
       </p:bgPr>
@@ -7710,7 +7671,7 @@
             <a:avLst/>
           </a:prstGeom>
           <a:solidFill>
-            <a:srgbClr val="F96167"/>
+            <a:srgbClr val="157554"/>
           </a:solidFill>
           <a:ln/>
         </p:spPr>
@@ -7746,9 +7707,9 @@
             <a:r>
               <a:rPr lang="en-US" sz="1200" b="1" kern="0" spc="200" dirty="0">
                 <a:solidFill>
-                  <a:srgbClr val="6E7687"/>
-                </a:solidFill>
-                <a:latin typeface="Arial" pitchFamily="34" charset="0"/>
+                  <a:srgbClr val="68645C"/>
+                </a:solidFill>
+                <a:latin typeface="STHeiti" pitchFamily="34" charset="0"/>
                 <a:ea typeface="Arial" pitchFamily="34" charset="-122"/>
                 <a:cs typeface="Arial" pitchFamily="34" charset="-120"/>
               </a:rPr>
@@ -7785,9 +7746,9 @@
             <a:r>
               <a:rPr lang="en-US" sz="3400" b="1" dirty="0">
                 <a:solidFill>
-                  <a:srgbClr val="10131A"/>
-                </a:solidFill>
-                <a:latin typeface="Microsoft JhengHei" pitchFamily="34" charset="0"/>
+                  <a:srgbClr val="1F1E1D"/>
+                </a:solidFill>
+                <a:latin typeface="STHeiti" pitchFamily="34" charset="0"/>
                 <a:ea typeface="Microsoft JhengHei" pitchFamily="34" charset="-122"/>
                 <a:cs typeface="Microsoft JhengHei" pitchFamily="34" charset="-120"/>
               </a:rPr>
@@ -7827,9 +7788,9 @@
             <a:r>
               <a:rPr lang="en-US" sz="2000" dirty="0">
                 <a:solidFill>
-                  <a:srgbClr val="353A46"/>
-                </a:solidFill>
-                <a:latin typeface="Microsoft JhengHei" pitchFamily="34" charset="0"/>
+                  <a:srgbClr val="1F1E1D"/>
+                </a:solidFill>
+                <a:latin typeface="STHeiti" pitchFamily="34" charset="0"/>
                 <a:ea typeface="Microsoft JhengHei" pitchFamily="34" charset="-122"/>
                 <a:cs typeface="Microsoft JhengHei" pitchFamily="34" charset="-120"/>
               </a:rPr>
@@ -7856,7 +7817,7 @@
             </a:avLst>
           </a:prstGeom>
           <a:solidFill>
-            <a:srgbClr val="F3F4F7"/>
+            <a:srgbClr val="E9E3D6"/>
           </a:solidFill>
           <a:ln/>
         </p:spPr>
@@ -7892,9 +7853,9 @@
             <a:r>
               <a:rPr lang="en-US" sz="1400" b="1" dirty="0">
                 <a:solidFill>
-                  <a:srgbClr val="10131A"/>
-                </a:solidFill>
-                <a:latin typeface="Arial" pitchFamily="34" charset="0"/>
+                  <a:srgbClr val="1F1E1D"/>
+                </a:solidFill>
+                <a:latin typeface="STHeiti" pitchFamily="34" charset="0"/>
                 <a:ea typeface="Arial" pitchFamily="34" charset="-122"/>
                 <a:cs typeface="Arial" pitchFamily="34" charset="-120"/>
               </a:rPr>
@@ -7931,9 +7892,9 @@
             <a:r>
               <a:rPr lang="en-US" sz="1150" b="1" dirty="0">
                 <a:solidFill>
-                  <a:srgbClr val="F96167"/>
-                </a:solidFill>
-                <a:latin typeface="Arial" pitchFamily="34" charset="0"/>
+                  <a:srgbClr val="157554"/>
+                </a:solidFill>
+                <a:latin typeface="STHeiti" pitchFamily="34" charset="0"/>
                 <a:ea typeface="Arial" pitchFamily="34" charset="-122"/>
                 <a:cs typeface="Arial" pitchFamily="34" charset="-120"/>
               </a:rPr>
@@ -7960,7 +7921,7 @@
             </a:avLst>
           </a:prstGeom>
           <a:solidFill>
-            <a:srgbClr val="F3F4F7"/>
+            <a:srgbClr val="E9E3D6"/>
           </a:solidFill>
           <a:ln/>
         </p:spPr>
@@ -7996,9 +7957,9 @@
             <a:r>
               <a:rPr lang="en-US" sz="1400" b="1" dirty="0">
                 <a:solidFill>
-                  <a:srgbClr val="10131A"/>
-                </a:solidFill>
-                <a:latin typeface="Arial" pitchFamily="34" charset="0"/>
+                  <a:srgbClr val="1F1E1D"/>
+                </a:solidFill>
+                <a:latin typeface="STHeiti" pitchFamily="34" charset="0"/>
                 <a:ea typeface="Arial" pitchFamily="34" charset="-122"/>
                 <a:cs typeface="Arial" pitchFamily="34" charset="-120"/>
               </a:rPr>
@@ -8025,7 +7986,7 @@
             </a:avLst>
           </a:prstGeom>
           <a:solidFill>
-            <a:srgbClr val="F3F4F7"/>
+            <a:srgbClr val="E9E3D6"/>
           </a:solidFill>
           <a:ln/>
         </p:spPr>
@@ -8061,9 +8022,9 @@
             <a:r>
               <a:rPr lang="en-US" sz="1400" b="1" dirty="0">
                 <a:solidFill>
-                  <a:srgbClr val="10131A"/>
-                </a:solidFill>
-                <a:latin typeface="Arial" pitchFamily="34" charset="0"/>
+                  <a:srgbClr val="1F1E1D"/>
+                </a:solidFill>
+                <a:latin typeface="STHeiti" pitchFamily="34" charset="0"/>
                 <a:ea typeface="Arial" pitchFamily="34" charset="-122"/>
                 <a:cs typeface="Arial" pitchFamily="34" charset="-120"/>
               </a:rPr>
@@ -8100,9 +8061,9 @@
             <a:r>
               <a:rPr lang="en-US" sz="1150" b="1" dirty="0">
                 <a:solidFill>
-                  <a:srgbClr val="F96167"/>
-                </a:solidFill>
-                <a:latin typeface="Arial" pitchFamily="34" charset="0"/>
+                  <a:srgbClr val="157554"/>
+                </a:solidFill>
+                <a:latin typeface="STHeiti" pitchFamily="34" charset="0"/>
                 <a:ea typeface="Arial" pitchFamily="34" charset="-122"/>
                 <a:cs typeface="Arial" pitchFamily="34" charset="-120"/>
               </a:rPr>
@@ -8129,7 +8090,7 @@
             </a:avLst>
           </a:prstGeom>
           <a:solidFill>
-            <a:srgbClr val="F3F4F7"/>
+            <a:srgbClr val="E9E3D6"/>
           </a:solidFill>
           <a:ln/>
         </p:spPr>
@@ -8165,9 +8126,9 @@
             <a:r>
               <a:rPr lang="en-US" sz="1400" b="1" dirty="0">
                 <a:solidFill>
-                  <a:srgbClr val="10131A"/>
-                </a:solidFill>
-                <a:latin typeface="Arial" pitchFamily="34" charset="0"/>
+                  <a:srgbClr val="1F1E1D"/>
+                </a:solidFill>
+                <a:latin typeface="STHeiti" pitchFamily="34" charset="0"/>
                 <a:ea typeface="Arial" pitchFamily="34" charset="-122"/>
                 <a:cs typeface="Arial" pitchFamily="34" charset="-120"/>
               </a:rPr>
@@ -8194,7 +8155,7 @@
             </a:avLst>
           </a:prstGeom>
           <a:solidFill>
-            <a:srgbClr val="F3F4F7"/>
+            <a:srgbClr val="E9E3D6"/>
           </a:solidFill>
           <a:ln/>
         </p:spPr>
@@ -8230,9 +8191,9 @@
             <a:r>
               <a:rPr lang="en-US" sz="1400" b="1" dirty="0">
                 <a:solidFill>
-                  <a:srgbClr val="10131A"/>
-                </a:solidFill>
-                <a:latin typeface="Arial" pitchFamily="34" charset="0"/>
+                  <a:srgbClr val="1F1E1D"/>
+                </a:solidFill>
+                <a:latin typeface="STHeiti" pitchFamily="34" charset="0"/>
                 <a:ea typeface="Arial" pitchFamily="34" charset="-122"/>
                 <a:cs typeface="Arial" pitchFamily="34" charset="-120"/>
               </a:rPr>
@@ -8269,9 +8230,9 @@
             <a:r>
               <a:rPr lang="en-US" sz="1150" b="1" dirty="0">
                 <a:solidFill>
-                  <a:srgbClr val="F96167"/>
-                </a:solidFill>
-                <a:latin typeface="Arial" pitchFamily="34" charset="0"/>
+                  <a:srgbClr val="157554"/>
+                </a:solidFill>
+                <a:latin typeface="STHeiti" pitchFamily="34" charset="0"/>
                 <a:ea typeface="Arial" pitchFamily="34" charset="-122"/>
                 <a:cs typeface="Arial" pitchFamily="34" charset="-120"/>
               </a:rPr>
@@ -8298,7 +8259,7 @@
             </a:avLst>
           </a:prstGeom>
           <a:solidFill>
-            <a:srgbClr val="F3F4F7"/>
+            <a:srgbClr val="E9E3D6"/>
           </a:solidFill>
           <a:ln/>
         </p:spPr>
@@ -8334,9 +8295,9 @@
             <a:r>
               <a:rPr lang="en-US" sz="1400" b="1" dirty="0">
                 <a:solidFill>
-                  <a:srgbClr val="10131A"/>
-                </a:solidFill>
-                <a:latin typeface="Arial" pitchFamily="34" charset="0"/>
+                  <a:srgbClr val="1F1E1D"/>
+                </a:solidFill>
+                <a:latin typeface="STHeiti" pitchFamily="34" charset="0"/>
                 <a:ea typeface="Arial" pitchFamily="34" charset="-122"/>
                 <a:cs typeface="Arial" pitchFamily="34" charset="-120"/>
               </a:rPr>
@@ -8373,9 +8334,9 @@
             <a:r>
               <a:rPr lang="en-US" sz="1250" dirty="0">
                 <a:solidFill>
-                  <a:srgbClr val="6E7687"/>
-                </a:solidFill>
-                <a:latin typeface="Microsoft JhengHei" pitchFamily="34" charset="0"/>
+                  <a:srgbClr val="68645C"/>
+                </a:solidFill>
+                <a:latin typeface="STHeiti" pitchFamily="34" charset="0"/>
                 <a:ea typeface="Microsoft JhengHei" pitchFamily="34" charset="-122"/>
                 <a:cs typeface="Microsoft JhengHei" pitchFamily="34" charset="-120"/>
               </a:rPr>
@@ -8412,9 +8373,9 @@
             <a:r>
               <a:rPr lang="en-US" sz="1100" dirty="0">
                 <a:solidFill>
-                  <a:srgbClr val="A8AEBC"/>
-                </a:solidFill>
-                <a:latin typeface="Arial" pitchFamily="34" charset="0"/>
+                  <a:srgbClr val="9DA89F"/>
+                </a:solidFill>
+                <a:latin typeface="STHeiti" pitchFamily="34" charset="0"/>
                 <a:ea typeface="Arial" pitchFamily="34" charset="-122"/>
                 <a:cs typeface="Arial" pitchFamily="34" charset="-120"/>
               </a:rPr>
@@ -8438,7 +8399,7 @@
     <p:bg>
       <p:bgPr>
         <a:solidFill>
-          <a:srgbClr val="10131A"/>
+          <a:srgbClr val="111B30"/>
         </a:solidFill>
         <a:effectLst/>
       </p:bgPr>
@@ -8472,7 +8433,7 @@
             <a:avLst/>
           </a:prstGeom>
           <a:solidFill>
-            <a:srgbClr val="F96167"/>
+            <a:srgbClr val="157554"/>
           </a:solidFill>
           <a:ln/>
         </p:spPr>
@@ -8508,9 +8469,9 @@
             <a:r>
               <a:rPr lang="en-US" sz="1200" b="1" kern="0" spc="200" dirty="0">
                 <a:solidFill>
-                  <a:srgbClr val="8A93A6"/>
-                </a:solidFill>
-                <a:latin typeface="Arial" pitchFamily="34" charset="0"/>
+                  <a:srgbClr val="9FAEBE"/>
+                </a:solidFill>
+                <a:latin typeface="STHeiti" pitchFamily="34" charset="0"/>
                 <a:ea typeface="Arial" pitchFamily="34" charset="-122"/>
                 <a:cs typeface="Arial" pitchFamily="34" charset="-120"/>
               </a:rPr>
@@ -8547,9 +8508,9 @@
             <a:r>
               <a:rPr lang="en-US" sz="3400" b="1" dirty="0">
                 <a:solidFill>
-                  <a:srgbClr val="FFFFFF"/>
-                </a:solidFill>
-                <a:latin typeface="Microsoft JhengHei" pitchFamily="34" charset="0"/>
+                  <a:srgbClr val="FAF9F5"/>
+                </a:solidFill>
+                <a:latin typeface="STHeiti" pitchFamily="34" charset="0"/>
                 <a:ea typeface="Microsoft JhengHei" pitchFamily="34" charset="-122"/>
                 <a:cs typeface="Microsoft JhengHei" pitchFamily="34" charset="-120"/>
               </a:rPr>
@@ -8591,7 +8552,7 @@
                 <a:solidFill>
                   <a:srgbClr val="D6DAE4"/>
                 </a:solidFill>
-                <a:latin typeface="Microsoft JhengHei" pitchFamily="34" charset="0"/>
+                <a:latin typeface="STHeiti" pitchFamily="34" charset="0"/>
                 <a:ea typeface="Microsoft JhengHei" pitchFamily="34" charset="-122"/>
                 <a:cs typeface="Microsoft JhengHei" pitchFamily="34" charset="-120"/>
               </a:rPr>
@@ -8618,7 +8579,7 @@
             </a:avLst>
           </a:prstGeom>
           <a:solidFill>
-            <a:srgbClr val="1B1F2B"/>
+            <a:srgbClr val="1E2A40"/>
           </a:solidFill>
           <a:ln/>
         </p:spPr>
@@ -8654,9 +8615,9 @@
             <a:r>
               <a:rPr lang="en-US" sz="1300" b="1" dirty="0">
                 <a:solidFill>
-                  <a:srgbClr val="1FB6A6"/>
-                </a:solidFill>
-                <a:latin typeface="Microsoft JhengHei" pitchFamily="34" charset="0"/>
+                  <a:srgbClr val="49D993"/>
+                </a:solidFill>
+                <a:latin typeface="STHeiti" pitchFamily="34" charset="0"/>
                 <a:ea typeface="Microsoft JhengHei" pitchFamily="34" charset="-122"/>
                 <a:cs typeface="Microsoft JhengHei" pitchFamily="34" charset="-120"/>
               </a:rPr>
@@ -8696,9 +8657,9 @@
             <a:r>
               <a:rPr lang="en-US" sz="1500" b="1" dirty="0">
                 <a:solidFill>
-                  <a:srgbClr val="CFD4DF"/>
-                </a:solidFill>
-                <a:latin typeface="Arial" pitchFamily="34" charset="0"/>
+                  <a:srgbClr val="C9D0C8"/>
+                </a:solidFill>
+                <a:latin typeface="STHeiti" pitchFamily="34" charset="0"/>
                 <a:ea typeface="Arial" pitchFamily="34" charset="-122"/>
                 <a:cs typeface="Arial" pitchFamily="34" charset="-120"/>
               </a:rPr>
@@ -8719,9 +8680,9 @@
             <a:r>
               <a:rPr lang="en-US" sz="1500" b="1" dirty="0">
                 <a:solidFill>
-                  <a:srgbClr val="CFD4DF"/>
-                </a:solidFill>
-                <a:latin typeface="Arial" pitchFamily="34" charset="0"/>
+                  <a:srgbClr val="C9D0C8"/>
+                </a:solidFill>
+                <a:latin typeface="STHeiti" pitchFamily="34" charset="0"/>
                 <a:ea typeface="Arial" pitchFamily="34" charset="-122"/>
                 <a:cs typeface="Arial" pitchFamily="34" charset="-120"/>
               </a:rPr>
@@ -8730,11 +8691,9 @@
             <a:r>
               <a:rPr lang="zh-TW" altLang="en" sz="1200" b="1" dirty="0">
                 <a:solidFill>
-                  <a:schemeClr val="bg1">
-                    <a:lumMod val="75000"/>
-                  </a:schemeClr>
-                </a:solidFill>
-                <a:latin typeface="Microsoft JhengHei" panose="020B0604030504040204" pitchFamily="34" charset="-120"/>
+                  <a:srgbClr val="FAF9F5"/>
+                </a:solidFill>
+                <a:latin typeface="STHeiti" panose="020B0604030504040204" pitchFamily="34" charset="-120"/>
                 <a:ea typeface="Microsoft JhengHei" panose="020B0604030504040204" pitchFamily="34" charset="-120"/>
               </a:rPr>
               <a:t>（</a:t>
@@ -8742,11 +8701,9 @@
             <a:r>
               <a:rPr lang="en" altLang="zh-TW" sz="1200" b="1" dirty="0">
                 <a:solidFill>
-                  <a:schemeClr val="bg1">
-                    <a:lumMod val="75000"/>
-                  </a:schemeClr>
-                </a:solidFill>
-                <a:latin typeface="Microsoft JhengHei" panose="020B0604030504040204" pitchFamily="34" charset="-120"/>
+                  <a:srgbClr val="FAF9F5"/>
+                </a:solidFill>
+                <a:latin typeface="STHeiti" panose="020B0604030504040204" pitchFamily="34" charset="-120"/>
                 <a:ea typeface="Microsoft JhengHei" panose="020B0604030504040204" pitchFamily="34" charset="-120"/>
               </a:rPr>
               <a:t>Acute Training Load</a:t>
@@ -8754,11 +8711,9 @@
             <a:r>
               <a:rPr lang="zh-TW" altLang="en" sz="1200" b="1" dirty="0">
                 <a:solidFill>
-                  <a:schemeClr val="bg1">
-                    <a:lumMod val="75000"/>
-                  </a:schemeClr>
-                </a:solidFill>
-                <a:latin typeface="Microsoft JhengHei" panose="020B0604030504040204" pitchFamily="34" charset="-120"/>
+                  <a:srgbClr val="FAF9F5"/>
+                </a:solidFill>
+                <a:latin typeface="STHeiti" panose="020B0604030504040204" pitchFamily="34" charset="-120"/>
                 <a:ea typeface="Microsoft JhengHei" panose="020B0604030504040204" pitchFamily="34" charset="-120"/>
               </a:rPr>
               <a:t>）</a:t>
@@ -8768,11 +8723,9 @@
             <a:r>
               <a:rPr lang="zh-TW" altLang="en-US" sz="1200" b="1" dirty="0">
                 <a:solidFill>
-                  <a:schemeClr val="bg1">
-                    <a:lumMod val="75000"/>
-                  </a:schemeClr>
-                </a:solidFill>
-                <a:latin typeface="Microsoft JhengHei" panose="020B0604030504040204" pitchFamily="34" charset="-120"/>
+                  <a:srgbClr val="FAF9F5"/>
+                </a:solidFill>
+                <a:latin typeface="STHeiti" panose="020B0604030504040204" pitchFamily="34" charset="-120"/>
                 <a:ea typeface="Microsoft JhengHei" panose="020B0604030504040204" pitchFamily="34" charset="-120"/>
               </a:rPr>
               <a:t>急性訓練負荷（短期疲勞）</a:t>
@@ -8791,9 +8744,9 @@
             <a:r>
               <a:rPr lang="en-US" sz="1500" b="1" dirty="0">
                 <a:solidFill>
-                  <a:srgbClr val="CFD4DF"/>
-                </a:solidFill>
-                <a:latin typeface="Arial" pitchFamily="34" charset="0"/>
+                  <a:srgbClr val="C9D0C8"/>
+                </a:solidFill>
+                <a:latin typeface="STHeiti" pitchFamily="34" charset="0"/>
                 <a:ea typeface="Arial" pitchFamily="34" charset="-122"/>
                 <a:cs typeface="Arial" pitchFamily="34" charset="-120"/>
               </a:rPr>
@@ -8802,11 +8755,9 @@
             <a:r>
               <a:rPr lang="zh-TW" altLang="en" sz="1200" b="1" dirty="0">
                 <a:solidFill>
-                  <a:schemeClr val="bg1">
-                    <a:lumMod val="75000"/>
-                  </a:schemeClr>
-                </a:solidFill>
-                <a:latin typeface="Microsoft JhengHei" panose="020B0604030504040204" pitchFamily="34" charset="-120"/>
+                  <a:srgbClr val="FAF9F5"/>
+                </a:solidFill>
+                <a:latin typeface="STHeiti" panose="020B0604030504040204" pitchFamily="34" charset="-120"/>
                 <a:ea typeface="Microsoft JhengHei" panose="020B0604030504040204" pitchFamily="34" charset="-120"/>
               </a:rPr>
               <a:t>（</a:t>
@@ -8814,11 +8765,9 @@
             <a:r>
               <a:rPr lang="en" altLang="zh-TW" sz="1200" b="1" dirty="0">
                 <a:solidFill>
-                  <a:schemeClr val="bg1">
-                    <a:lumMod val="75000"/>
-                  </a:schemeClr>
-                </a:solidFill>
-                <a:latin typeface="Microsoft JhengHei" panose="020B0604030504040204" pitchFamily="34" charset="-120"/>
+                  <a:srgbClr val="FAF9F5"/>
+                </a:solidFill>
+                <a:latin typeface="STHeiti" panose="020B0604030504040204" pitchFamily="34" charset="-120"/>
                 <a:ea typeface="Microsoft JhengHei" panose="020B0604030504040204" pitchFamily="34" charset="-120"/>
               </a:rPr>
               <a:t>Chronic Training Load</a:t>
@@ -8826,11 +8775,9 @@
             <a:r>
               <a:rPr lang="zh-TW" altLang="en" sz="1200" b="1" dirty="0">
                 <a:solidFill>
-                  <a:schemeClr val="bg1">
-                    <a:lumMod val="75000"/>
-                  </a:schemeClr>
-                </a:solidFill>
-                <a:latin typeface="Microsoft JhengHei" panose="020B0604030504040204" pitchFamily="34" charset="-120"/>
+                  <a:srgbClr val="FAF9F5"/>
+                </a:solidFill>
+                <a:latin typeface="STHeiti" panose="020B0604030504040204" pitchFamily="34" charset="-120"/>
                 <a:ea typeface="Microsoft JhengHei" panose="020B0604030504040204" pitchFamily="34" charset="-120"/>
               </a:rPr>
               <a:t>）</a:t>
@@ -8840,11 +8787,9 @@
             <a:r>
               <a:rPr lang="zh-TW" altLang="en-US" sz="1200" b="1" dirty="0">
                 <a:solidFill>
-                  <a:schemeClr val="bg1">
-                    <a:lumMod val="75000"/>
-                  </a:schemeClr>
-                </a:solidFill>
-                <a:latin typeface="Microsoft JhengHei" panose="020B0604030504040204" pitchFamily="34" charset="-120"/>
+                  <a:srgbClr val="FAF9F5"/>
+                </a:solidFill>
+                <a:latin typeface="STHeiti" panose="020B0604030504040204" pitchFamily="34" charset="-120"/>
                 <a:ea typeface="Microsoft JhengHei" panose="020B0604030504040204" pitchFamily="34" charset="-120"/>
               </a:rPr>
               <a:t>慢性訓練負荷（長期體能）</a:t>
@@ -8863,9 +8808,9 @@
             <a:r>
               <a:rPr lang="en-US" sz="1500" b="1" dirty="0">
                 <a:solidFill>
-                  <a:srgbClr val="CFD4DF"/>
-                </a:solidFill>
-                <a:latin typeface="Arial" pitchFamily="34" charset="0"/>
+                  <a:srgbClr val="C9D0C8"/>
+                </a:solidFill>
+                <a:latin typeface="STHeiti" pitchFamily="34" charset="0"/>
                 <a:ea typeface="Arial" pitchFamily="34" charset="-122"/>
                 <a:cs typeface="Arial" pitchFamily="34" charset="-120"/>
               </a:rPr>
@@ -8874,11 +8819,9 @@
             <a:r>
               <a:rPr lang="en-US" sz="1500" b="1" dirty="0">
                 <a:solidFill>
-                  <a:schemeClr val="bg1">
-                    <a:lumMod val="75000"/>
-                  </a:schemeClr>
-                </a:solidFill>
-                <a:latin typeface="Arial" pitchFamily="34" charset="0"/>
+                  <a:srgbClr val="FAF9F5"/>
+                </a:solidFill>
+                <a:latin typeface="STHeiti" pitchFamily="34" charset="0"/>
                 <a:ea typeface="Microsoft JhengHei" panose="020B0604030504040204" pitchFamily="34" charset="-120"/>
                 <a:cs typeface="Arial" pitchFamily="34" charset="-120"/>
               </a:rPr>
@@ -8887,11 +8830,9 @@
             <a:r>
               <a:rPr lang="zh-TW" altLang="en-US" sz="1500" b="1" dirty="0">
                 <a:solidFill>
-                  <a:schemeClr val="bg1">
-                    <a:lumMod val="75000"/>
-                  </a:schemeClr>
-                </a:solidFill>
-                <a:latin typeface="Arial" pitchFamily="34" charset="0"/>
+                  <a:srgbClr val="FAF9F5"/>
+                </a:solidFill>
+                <a:latin typeface="STHeiti" pitchFamily="34" charset="0"/>
                 <a:ea typeface="Microsoft JhengHei" panose="020B0604030504040204" pitchFamily="34" charset="-120"/>
                 <a:cs typeface="Arial" pitchFamily="34" charset="-120"/>
               </a:rPr>
@@ -8900,11 +8841,9 @@
             <a:r>
               <a:rPr lang="zh-TW" altLang="en-US" sz="1200" b="1" dirty="0">
                 <a:solidFill>
-                  <a:schemeClr val="bg1">
-                    <a:lumMod val="75000"/>
-                  </a:schemeClr>
-                </a:solidFill>
-                <a:latin typeface="Arial" pitchFamily="34" charset="0"/>
+                  <a:srgbClr val="FAF9F5"/>
+                </a:solidFill>
+                <a:latin typeface="STHeiti" pitchFamily="34" charset="0"/>
                 <a:ea typeface="Microsoft JhengHei" panose="020B0604030504040204" pitchFamily="34" charset="-120"/>
                 <a:cs typeface="Arial" pitchFamily="34" charset="-120"/>
               </a:rPr>
@@ -8913,20 +8852,18 @@
             <a:r>
               <a:rPr lang="en" altLang="zh-TW" sz="1200" b="1" dirty="0">
                 <a:solidFill>
-                  <a:schemeClr val="bg1">
-                    <a:lumMod val="75000"/>
-                  </a:schemeClr>
-                </a:solidFill>
+                  <a:srgbClr val="FAF9F5"/>
+                </a:solidFill>
+                <a:latin typeface="STHeiti"/>
               </a:rPr>
               <a:t>Training Stress Balance</a:t>
             </a:r>
             <a:r>
               <a:rPr lang="zh-TW" altLang="en" sz="1200" b="1" dirty="0">
                 <a:solidFill>
-                  <a:schemeClr val="bg1">
-                    <a:lumMod val="75000"/>
-                  </a:schemeClr>
-                </a:solidFill>
+                  <a:srgbClr val="FAF9F5"/>
+                </a:solidFill>
+                <a:latin typeface="STHeiti"/>
               </a:rPr>
               <a:t>）</a:t>
             </a:r>
@@ -8935,10 +8872,9 @@
             <a:r>
               <a:rPr lang="zh-TW" altLang="en-US" sz="1200" b="1" dirty="0">
                 <a:solidFill>
-                  <a:schemeClr val="bg1">
-                    <a:lumMod val="75000"/>
-                  </a:schemeClr>
-                </a:solidFill>
+                  <a:srgbClr val="FAF9F5"/>
+                </a:solidFill>
+                <a:latin typeface="STHeiti"/>
               </a:rPr>
               <a:t>訓練壓力平衡（恢復程度）</a:t>
             </a:r>
@@ -8972,7 +8908,7 @@
             </a:avLst>
           </a:prstGeom>
           <a:solidFill>
-            <a:srgbClr val="1B1F2B"/>
+            <a:srgbClr val="1E2A40"/>
           </a:solidFill>
           <a:ln/>
         </p:spPr>
@@ -9008,9 +8944,9 @@
             <a:r>
               <a:rPr lang="en-US" sz="1300" b="1" dirty="0">
                 <a:solidFill>
-                  <a:srgbClr val="F96167"/>
-                </a:solidFill>
-                <a:latin typeface="Microsoft JhengHei" pitchFamily="34" charset="0"/>
+                  <a:srgbClr val="49D993"/>
+                </a:solidFill>
+                <a:latin typeface="STHeiti" pitchFamily="34" charset="0"/>
                 <a:ea typeface="Microsoft JhengHei" pitchFamily="34" charset="-122"/>
                 <a:cs typeface="Microsoft JhengHei" pitchFamily="34" charset="-120"/>
               </a:rPr>
@@ -9047,9 +8983,9 @@
             <a:r>
               <a:rPr lang="en-US" sz="1300" dirty="0">
                 <a:solidFill>
-                  <a:srgbClr val="CFD4DF"/>
-                </a:solidFill>
-                <a:latin typeface="Arial" pitchFamily="34" charset="0"/>
+                  <a:srgbClr val="C9D0C8"/>
+                </a:solidFill>
+                <a:latin typeface="STHeiti" pitchFamily="34" charset="0"/>
                 <a:ea typeface="Arial" pitchFamily="34" charset="-122"/>
                 <a:cs typeface="Arial" pitchFamily="34" charset="-120"/>
               </a:rPr>
@@ -9076,7 +9012,7 @@
             </a:avLst>
           </a:prstGeom>
           <a:solidFill>
-            <a:srgbClr val="2C3242"/>
+            <a:srgbClr val="34445E"/>
           </a:solidFill>
           <a:ln/>
         </p:spPr>
@@ -9102,7 +9038,7 @@
             </a:avLst>
           </a:prstGeom>
           <a:solidFill>
-            <a:srgbClr val="F96167"/>
+            <a:srgbClr val="157554"/>
           </a:solidFill>
           <a:ln/>
         </p:spPr>
@@ -9138,9 +9074,9 @@
             <a:r>
               <a:rPr lang="en-US" sz="1300" b="1" dirty="0">
                 <a:solidFill>
-                  <a:srgbClr val="CFD4DF"/>
-                </a:solidFill>
-                <a:latin typeface="Arial" pitchFamily="34" charset="0"/>
+                  <a:srgbClr val="C9D0C8"/>
+                </a:solidFill>
+                <a:latin typeface="STHeiti" pitchFamily="34" charset="0"/>
                 <a:ea typeface="Arial" pitchFamily="34" charset="-122"/>
                 <a:cs typeface="Arial" pitchFamily="34" charset="-120"/>
               </a:rPr>
@@ -9177,9 +9113,9 @@
             <a:r>
               <a:rPr lang="en-US" sz="1300" dirty="0">
                 <a:solidFill>
-                  <a:srgbClr val="CFD4DF"/>
-                </a:solidFill>
-                <a:latin typeface="Arial" pitchFamily="34" charset="0"/>
+                  <a:srgbClr val="C9D0C8"/>
+                </a:solidFill>
+                <a:latin typeface="STHeiti" pitchFamily="34" charset="0"/>
                 <a:ea typeface="Arial" pitchFamily="34" charset="-122"/>
                 <a:cs typeface="Arial" pitchFamily="34" charset="-120"/>
               </a:rPr>
@@ -9206,7 +9142,7 @@
             </a:avLst>
           </a:prstGeom>
           <a:solidFill>
-            <a:srgbClr val="2C3242"/>
+            <a:srgbClr val="34445E"/>
           </a:solidFill>
           <a:ln/>
         </p:spPr>
@@ -9232,7 +9168,7 @@
             </a:avLst>
           </a:prstGeom>
           <a:solidFill>
-            <a:srgbClr val="8A93A6"/>
+            <a:srgbClr val="68645C"/>
           </a:solidFill>
           <a:ln/>
         </p:spPr>
@@ -9268,9 +9204,9 @@
             <a:r>
               <a:rPr lang="en-US" sz="1300" b="1" dirty="0">
                 <a:solidFill>
-                  <a:srgbClr val="CFD4DF"/>
-                </a:solidFill>
-                <a:latin typeface="Arial" pitchFamily="34" charset="0"/>
+                  <a:srgbClr val="C9D0C8"/>
+                </a:solidFill>
+                <a:latin typeface="STHeiti" pitchFamily="34" charset="0"/>
                 <a:ea typeface="Arial" pitchFamily="34" charset="-122"/>
                 <a:cs typeface="Arial" pitchFamily="34" charset="-120"/>
               </a:rPr>
@@ -9307,9 +9243,9 @@
             <a:r>
               <a:rPr lang="en-US" sz="1300" dirty="0">
                 <a:solidFill>
-                  <a:srgbClr val="CFD4DF"/>
-                </a:solidFill>
-                <a:latin typeface="Arial" pitchFamily="34" charset="0"/>
+                  <a:srgbClr val="C9D0C8"/>
+                </a:solidFill>
+                <a:latin typeface="STHeiti" pitchFamily="34" charset="0"/>
                 <a:ea typeface="Arial" pitchFamily="34" charset="-122"/>
                 <a:cs typeface="Arial" pitchFamily="34" charset="-120"/>
               </a:rPr>
@@ -9336,7 +9272,7 @@
             </a:avLst>
           </a:prstGeom>
           <a:solidFill>
-            <a:srgbClr val="2C3242"/>
+            <a:srgbClr val="34445E"/>
           </a:solidFill>
           <a:ln/>
         </p:spPr>
@@ -9362,7 +9298,7 @@
             </a:avLst>
           </a:prstGeom>
           <a:solidFill>
-            <a:srgbClr val="1FB6A6"/>
+            <a:srgbClr val="157554"/>
           </a:solidFill>
           <a:ln/>
         </p:spPr>
@@ -9398,9 +9334,9 @@
             <a:r>
               <a:rPr lang="en-US" sz="1300" b="1" dirty="0">
                 <a:solidFill>
-                  <a:srgbClr val="CFD4DF"/>
-                </a:solidFill>
-                <a:latin typeface="Arial" pitchFamily="34" charset="0"/>
+                  <a:srgbClr val="C9D0C8"/>
+                </a:solidFill>
+                <a:latin typeface="STHeiti" pitchFamily="34" charset="0"/>
                 <a:ea typeface="Arial" pitchFamily="34" charset="-122"/>
                 <a:cs typeface="Arial" pitchFamily="34" charset="-120"/>
               </a:rPr>
@@ -9437,9 +9373,9 @@
             <a:r>
               <a:rPr lang="en-US" sz="1100" dirty="0">
                 <a:solidFill>
-                  <a:srgbClr val="A8AEBC"/>
-                </a:solidFill>
-                <a:latin typeface="Arial" pitchFamily="34" charset="0"/>
+                  <a:srgbClr val="9DA89F"/>
+                </a:solidFill>
+                <a:latin typeface="STHeiti" pitchFamily="34" charset="0"/>
                 <a:ea typeface="Arial" pitchFamily="34" charset="-122"/>
                 <a:cs typeface="Arial" pitchFamily="34" charset="-120"/>
               </a:rPr>
@@ -9463,7 +9399,7 @@
     <p:bg>
       <p:bgPr>
         <a:solidFill>
-          <a:srgbClr val="FFFFFF"/>
+          <a:srgbClr val="F0EEE6"/>
         </a:solidFill>
         <a:effectLst/>
       </p:bgPr>
@@ -9497,7 +9433,7 @@
             <a:avLst/>
           </a:prstGeom>
           <a:solidFill>
-            <a:srgbClr val="F96167"/>
+            <a:srgbClr val="157554"/>
           </a:solidFill>
           <a:ln/>
         </p:spPr>
@@ -9533,9 +9469,9 @@
             <a:r>
               <a:rPr lang="en-US" sz="1200" b="1" kern="0" spc="200" dirty="0">
                 <a:solidFill>
-                  <a:srgbClr val="6E7687"/>
-                </a:solidFill>
-                <a:latin typeface="Arial" pitchFamily="34" charset="0"/>
+                  <a:srgbClr val="68645C"/>
+                </a:solidFill>
+                <a:latin typeface="STHeiti" pitchFamily="34" charset="0"/>
                 <a:ea typeface="Arial" pitchFamily="34" charset="-122"/>
                 <a:cs typeface="Arial" pitchFamily="34" charset="-120"/>
               </a:rPr>
@@ -9566,21 +9502,15 @@
           <a:bodyPr wrap="square" lIns="0" tIns="0" rIns="0" bIns="0" rtlCol="0" anchor="ctr"/>
           <a:lstStyle/>
           <a:p>
-            <a:pPr marL="0" indent="0">
-              <a:buNone/>
-            </a:pPr>
-            <a:r>
-              <a:rPr lang="en-US" sz="3400" b="1" dirty="0">
-                <a:solidFill>
-                  <a:srgbClr val="10131A"/>
-                </a:solidFill>
-                <a:latin typeface="Microsoft JhengHei" pitchFamily="34" charset="0"/>
-                <a:ea typeface="Microsoft JhengHei" pitchFamily="34" charset="-122"/>
-                <a:cs typeface="Microsoft JhengHei" pitchFamily="34" charset="-120"/>
-              </a:rPr>
-              <a:t>各家指標對齊,廠商算好的分數直接收</a:t>
-            </a:r>
-            <a:endParaRPr lang="en-US" sz="3400" dirty="0"/>
+            <a:r>
+              <a:rPr>
+                <a:solidFill>
+                  <a:srgbClr val="1F1E1D"/>
+                </a:solidFill>
+                <a:latin typeface="STHeiti"/>
+              </a:rPr>
+              <a:t>把不同來源對齊成同一套語彙</a:t>
+            </a:r>
           </a:p>
         </p:txBody>
       </p:sp>
@@ -9614,9 +9544,9 @@
             <a:r>
               <a:rPr lang="en-US" sz="2000" dirty="0">
                 <a:solidFill>
-                  <a:srgbClr val="353A46"/>
-                </a:solidFill>
-                <a:latin typeface="Microsoft JhengHei" pitchFamily="34" charset="0"/>
+                  <a:srgbClr val="1F1E1D"/>
+                </a:solidFill>
+                <a:latin typeface="STHeiti" pitchFamily="34" charset="0"/>
                 <a:ea typeface="Microsoft JhengHei" pitchFamily="34" charset="-122"/>
                 <a:cs typeface="Microsoft JhengHei" pitchFamily="34" charset="-120"/>
               </a:rPr>
@@ -9643,7 +9573,7 @@
             </a:avLst>
           </a:prstGeom>
           <a:solidFill>
-            <a:srgbClr val="F3F4F7"/>
+            <a:srgbClr val="E9E3D6"/>
           </a:solidFill>
           <a:ln/>
         </p:spPr>
@@ -9679,9 +9609,9 @@
             <a:r>
               <a:rPr lang="en-US" sz="1300" b="1" dirty="0">
                 <a:solidFill>
-                  <a:srgbClr val="6E7687"/>
-                </a:solidFill>
-                <a:latin typeface="Microsoft JhengHei" pitchFamily="34" charset="0"/>
+                  <a:srgbClr val="68645C"/>
+                </a:solidFill>
+                <a:latin typeface="STHeiti" pitchFamily="34" charset="0"/>
                 <a:ea typeface="Microsoft JhengHei" pitchFamily="34" charset="-122"/>
                 <a:cs typeface="Microsoft JhengHei" pitchFamily="34" charset="-120"/>
               </a:rPr>
@@ -9721,9 +9651,9 @@
             <a:r>
               <a:rPr lang="en-US" sz="1500" dirty="0">
                 <a:solidFill>
-                  <a:srgbClr val="3A4050"/>
-                </a:solidFill>
-                <a:latin typeface="Arial" pitchFamily="34" charset="0"/>
+                  <a:srgbClr val="DAD2C3"/>
+                </a:solidFill>
+                <a:latin typeface="STHeiti" pitchFamily="34" charset="0"/>
                 <a:ea typeface="Arial" pitchFamily="34" charset="-122"/>
                 <a:cs typeface="Arial" pitchFamily="34" charset="-120"/>
               </a:rPr>
@@ -9741,9 +9671,9 @@
             <a:r>
               <a:rPr lang="en-US" sz="1500" dirty="0">
                 <a:solidFill>
-                  <a:srgbClr val="3A4050"/>
-                </a:solidFill>
-                <a:latin typeface="Arial" pitchFamily="34" charset="0"/>
+                  <a:srgbClr val="DAD2C3"/>
+                </a:solidFill>
+                <a:latin typeface="STHeiti" pitchFamily="34" charset="0"/>
                 <a:ea typeface="Arial" pitchFamily="34" charset="-122"/>
                 <a:cs typeface="Arial" pitchFamily="34" charset="-120"/>
               </a:rPr>
@@ -9761,9 +9691,9 @@
             <a:r>
               <a:rPr lang="en-US" sz="1500" dirty="0">
                 <a:solidFill>
-                  <a:srgbClr val="3A4050"/>
-                </a:solidFill>
-                <a:latin typeface="Arial" pitchFamily="34" charset="0"/>
+                  <a:srgbClr val="DAD2C3"/>
+                </a:solidFill>
+                <a:latin typeface="STHeiti" pitchFamily="34" charset="0"/>
                 <a:ea typeface="Arial" pitchFamily="34" charset="-122"/>
                 <a:cs typeface="Arial" pitchFamily="34" charset="-120"/>
               </a:rPr>
@@ -9781,9 +9711,9 @@
             <a:r>
               <a:rPr lang="en-US" sz="1500" dirty="0">
                 <a:solidFill>
-                  <a:srgbClr val="3A4050"/>
-                </a:solidFill>
-                <a:latin typeface="Arial" pitchFamily="34" charset="0"/>
+                  <a:srgbClr val="DAD2C3"/>
+                </a:solidFill>
+                <a:latin typeface="STHeiti" pitchFamily="34" charset="0"/>
                 <a:ea typeface="Arial" pitchFamily="34" charset="-122"/>
                 <a:cs typeface="Arial" pitchFamily="34" charset="-120"/>
               </a:rPr>
@@ -9822,7 +9752,7 @@
                 <a:solidFill>
                   <a:srgbClr val="AFB5C2"/>
                 </a:solidFill>
-                <a:latin typeface="Arial" pitchFamily="34" charset="0"/>
+                <a:latin typeface="STHeiti" pitchFamily="34" charset="0"/>
                 <a:ea typeface="Arial" pitchFamily="34" charset="-122"/>
                 <a:cs typeface="Arial" pitchFamily="34" charset="-120"/>
               </a:rPr>
@@ -9849,7 +9779,7 @@
             </a:avLst>
           </a:prstGeom>
           <a:solidFill>
-            <a:srgbClr val="F3F4F7"/>
+            <a:srgbClr val="E9E3D6"/>
           </a:solidFill>
           <a:ln/>
         </p:spPr>
@@ -9885,9 +9815,9 @@
             <a:r>
               <a:rPr lang="en-US" sz="1300" b="1" dirty="0">
                 <a:solidFill>
-                  <a:srgbClr val="1FB6A6"/>
-                </a:solidFill>
-                <a:latin typeface="Arial" pitchFamily="34" charset="0"/>
+                  <a:srgbClr val="157554"/>
+                </a:solidFill>
+                <a:latin typeface="STHeiti" pitchFamily="34" charset="0"/>
                 <a:ea typeface="Arial" pitchFamily="34" charset="-122"/>
                 <a:cs typeface="Arial" pitchFamily="34" charset="-120"/>
               </a:rPr>
@@ -9927,9 +9857,9 @@
             <a:r>
               <a:rPr lang="en-US" sz="1400" dirty="0">
                 <a:solidFill>
-                  <a:srgbClr val="3A4050"/>
-                </a:solidFill>
-                <a:latin typeface="Microsoft JhengHei" pitchFamily="34" charset="0"/>
+                  <a:srgbClr val="DAD2C3"/>
+                </a:solidFill>
+                <a:latin typeface="STHeiti" pitchFamily="34" charset="0"/>
                 <a:ea typeface="Microsoft JhengHei" pitchFamily="34" charset="-122"/>
                 <a:cs typeface="Microsoft JhengHei" pitchFamily="34" charset="-120"/>
               </a:rPr>
@@ -9947,9 +9877,9 @@
             <a:r>
               <a:rPr lang="en-US" sz="1400" dirty="0">
                 <a:solidFill>
-                  <a:srgbClr val="3A4050"/>
-                </a:solidFill>
-                <a:latin typeface="Microsoft JhengHei" pitchFamily="34" charset="0"/>
+                  <a:srgbClr val="DAD2C3"/>
+                </a:solidFill>
+                <a:latin typeface="STHeiti" pitchFamily="34" charset="0"/>
                 <a:ea typeface="Microsoft JhengHei" pitchFamily="34" charset="-122"/>
                 <a:cs typeface="Microsoft JhengHei" pitchFamily="34" charset="-120"/>
               </a:rPr>
@@ -9967,9 +9897,9 @@
             <a:r>
               <a:rPr lang="en-US" sz="1400" dirty="0">
                 <a:solidFill>
-                  <a:srgbClr val="3A4050"/>
-                </a:solidFill>
-                <a:latin typeface="Microsoft JhengHei" pitchFamily="34" charset="0"/>
+                  <a:srgbClr val="DAD2C3"/>
+                </a:solidFill>
+                <a:latin typeface="STHeiti" pitchFamily="34" charset="0"/>
                 <a:ea typeface="Microsoft JhengHei" pitchFamily="34" charset="-122"/>
                 <a:cs typeface="Microsoft JhengHei" pitchFamily="34" charset="-120"/>
               </a:rPr>
@@ -9987,9 +9917,9 @@
             <a:r>
               <a:rPr lang="en-US" sz="1400" dirty="0">
                 <a:solidFill>
-                  <a:srgbClr val="3A4050"/>
-                </a:solidFill>
-                <a:latin typeface="Microsoft JhengHei" pitchFamily="34" charset="0"/>
+                  <a:srgbClr val="DAD2C3"/>
+                </a:solidFill>
+                <a:latin typeface="STHeiti" pitchFamily="34" charset="0"/>
                 <a:ea typeface="Microsoft JhengHei" pitchFamily="34" charset="-122"/>
                 <a:cs typeface="Microsoft JhengHei" pitchFamily="34" charset="-120"/>
               </a:rPr>
@@ -10028,7 +9958,7 @@
                 <a:solidFill>
                   <a:srgbClr val="AFB5C2"/>
                 </a:solidFill>
-                <a:latin typeface="Arial" pitchFamily="34" charset="0"/>
+                <a:latin typeface="STHeiti" pitchFamily="34" charset="0"/>
                 <a:ea typeface="Arial" pitchFamily="34" charset="-122"/>
                 <a:cs typeface="Arial" pitchFamily="34" charset="-120"/>
               </a:rPr>
@@ -10055,7 +9985,7 @@
             </a:avLst>
           </a:prstGeom>
           <a:solidFill>
-            <a:srgbClr val="10131A"/>
+            <a:srgbClr val="111B30"/>
           </a:solidFill>
           <a:ln/>
         </p:spPr>
@@ -10091,9 +10021,9 @@
             <a:r>
               <a:rPr lang="en-US" sz="1300" b="1" dirty="0">
                 <a:solidFill>
-                  <a:srgbClr val="F96167"/>
-                </a:solidFill>
-                <a:latin typeface="Microsoft JhengHei" pitchFamily="34" charset="0"/>
+                  <a:srgbClr val="157554"/>
+                </a:solidFill>
+                <a:latin typeface="STHeiti" pitchFamily="34" charset="0"/>
                 <a:ea typeface="Microsoft JhengHei" pitchFamily="34" charset="-122"/>
                 <a:cs typeface="Microsoft JhengHei" pitchFamily="34" charset="-120"/>
               </a:rPr>
@@ -10133,9 +10063,9 @@
             <a:r>
               <a:rPr lang="en-US" sz="1800" b="1" dirty="0">
                 <a:solidFill>
-                  <a:srgbClr val="FFFFFF"/>
-                </a:solidFill>
-                <a:latin typeface="Arial" pitchFamily="34" charset="0"/>
+                  <a:srgbClr val="1F1E1D"/>
+                </a:solidFill>
+                <a:latin typeface="STHeiti" pitchFamily="34" charset="0"/>
                 <a:ea typeface="Arial" pitchFamily="34" charset="-122"/>
                 <a:cs typeface="Arial" pitchFamily="34" charset="-120"/>
               </a:rPr>
@@ -10153,9 +10083,9 @@
             <a:r>
               <a:rPr lang="en-US" sz="1800" b="1" dirty="0">
                 <a:solidFill>
-                  <a:srgbClr val="FFFFFF"/>
-                </a:solidFill>
-                <a:latin typeface="Arial" pitchFamily="34" charset="0"/>
+                  <a:srgbClr val="1F1E1D"/>
+                </a:solidFill>
+                <a:latin typeface="STHeiti" pitchFamily="34" charset="0"/>
                 <a:ea typeface="Arial" pitchFamily="34" charset="-122"/>
                 <a:cs typeface="Arial" pitchFamily="34" charset="-120"/>
               </a:rPr>
@@ -10173,9 +10103,9 @@
             <a:r>
               <a:rPr lang="en-US" sz="1800" b="1" dirty="0">
                 <a:solidFill>
-                  <a:srgbClr val="FFFFFF"/>
-                </a:solidFill>
-                <a:latin typeface="Arial" pitchFamily="34" charset="0"/>
+                  <a:srgbClr val="1F1E1D"/>
+                </a:solidFill>
+                <a:latin typeface="STHeiti" pitchFamily="34" charset="0"/>
                 <a:ea typeface="Arial" pitchFamily="34" charset="-122"/>
                 <a:cs typeface="Arial" pitchFamily="34" charset="-120"/>
               </a:rPr>
@@ -10212,9 +10142,9 @@
             <a:r>
               <a:rPr lang="en-US" sz="1100" dirty="0">
                 <a:solidFill>
-                  <a:srgbClr val="A8AEBC"/>
-                </a:solidFill>
-                <a:latin typeface="Arial" pitchFamily="34" charset="0"/>
+                  <a:srgbClr val="9DA89F"/>
+                </a:solidFill>
+                <a:latin typeface="STHeiti" pitchFamily="34" charset="0"/>
                 <a:ea typeface="Arial" pitchFamily="34" charset="-122"/>
                 <a:cs typeface="Arial" pitchFamily="34" charset="-120"/>
               </a:rPr>
@@ -10238,7 +10168,7 @@
     <p:bg>
       <p:bgPr>
         <a:solidFill>
-          <a:srgbClr val="FFFFFF"/>
+          <a:srgbClr val="F0EEE6"/>
         </a:solidFill>
         <a:effectLst/>
       </p:bgPr>
@@ -10272,7 +10202,7 @@
             <a:avLst/>
           </a:prstGeom>
           <a:solidFill>
-            <a:srgbClr val="F96167"/>
+            <a:srgbClr val="157554"/>
           </a:solidFill>
           <a:ln/>
         </p:spPr>
@@ -10308,9 +10238,9 @@
             <a:r>
               <a:rPr lang="en-US" sz="1200" b="1" kern="0" spc="200" dirty="0">
                 <a:solidFill>
-                  <a:srgbClr val="6E7687"/>
-                </a:solidFill>
-                <a:latin typeface="Arial" pitchFamily="34" charset="0"/>
+                  <a:srgbClr val="68645C"/>
+                </a:solidFill>
+                <a:latin typeface="STHeiti" pitchFamily="34" charset="0"/>
                 <a:ea typeface="Arial" pitchFamily="34" charset="-122"/>
                 <a:cs typeface="Arial" pitchFamily="34" charset="-120"/>
               </a:rPr>
@@ -10341,21 +10271,15 @@
           <a:bodyPr wrap="square" lIns="0" tIns="0" rIns="0" bIns="0" rtlCol="0" anchor="ctr"/>
           <a:lstStyle/>
           <a:p>
-            <a:pPr marL="0" indent="0">
-              <a:buNone/>
-            </a:pPr>
-            <a:r>
-              <a:rPr lang="en-US" sz="3400" b="1" dirty="0">
-                <a:solidFill>
-                  <a:srgbClr val="10131A"/>
-                </a:solidFill>
-                <a:latin typeface="Microsoft JhengHei" pitchFamily="34" charset="0"/>
-                <a:ea typeface="Microsoft JhengHei" pitchFamily="34" charset="-122"/>
-                <a:cs typeface="Microsoft JhengHei" pitchFamily="34" charset="-120"/>
-              </a:rPr>
-              <a:t>Connector 跑在你的環境,不在我們的</a:t>
-            </a:r>
-            <a:endParaRPr lang="en-US" sz="3400" dirty="0"/>
+            <a:r>
+              <a:rPr>
+                <a:solidFill>
+                  <a:srgbClr val="1F1E1D"/>
+                </a:solidFill>
+                <a:latin typeface="STHeiti"/>
+              </a:rPr>
+              <a:t>Connector 跑在你的環境</a:t>
+            </a:r>
           </a:p>
         </p:txBody>
       </p:sp>
@@ -10389,9 +10313,9 @@
             <a:r>
               <a:rPr lang="en-US" sz="2000" dirty="0">
                 <a:solidFill>
-                  <a:srgbClr val="353A46"/>
-                </a:solidFill>
-                <a:latin typeface="Microsoft JhengHei" pitchFamily="34" charset="0"/>
+                  <a:srgbClr val="1F1E1D"/>
+                </a:solidFill>
+                <a:latin typeface="STHeiti" pitchFamily="34" charset="0"/>
                 <a:ea typeface="Microsoft JhengHei" pitchFamily="34" charset="-122"/>
                 <a:cs typeface="Microsoft JhengHei" pitchFamily="34" charset="-120"/>
               </a:rPr>
@@ -10418,7 +10342,7 @@
             </a:avLst>
           </a:prstGeom>
           <a:solidFill>
-            <a:srgbClr val="10131A"/>
+            <a:srgbClr val="111B30"/>
           </a:solidFill>
           <a:ln/>
         </p:spPr>
@@ -10454,9 +10378,9 @@
             <a:r>
               <a:rPr lang="en-US" sz="1900" b="1" dirty="0">
                 <a:solidFill>
-                  <a:srgbClr val="FFFFFF"/>
-                </a:solidFill>
-                <a:latin typeface="Arial" pitchFamily="34" charset="0"/>
+                  <a:srgbClr val="1F1E1D"/>
+                </a:solidFill>
+                <a:latin typeface="STHeiti" pitchFamily="34" charset="0"/>
                 <a:ea typeface="Arial" pitchFamily="34" charset="-122"/>
                 <a:cs typeface="Arial" pitchFamily="34" charset="-120"/>
               </a:rPr>
@@ -10483,7 +10407,7 @@
             </a:avLst>
           </a:prstGeom>
           <a:solidFill>
-            <a:srgbClr val="10131A"/>
+            <a:srgbClr val="111B30"/>
           </a:solidFill>
           <a:ln/>
         </p:spPr>
@@ -10519,9 +10443,9 @@
             <a:r>
               <a:rPr lang="en-US" sz="1900" b="1" dirty="0">
                 <a:solidFill>
-                  <a:srgbClr val="FFFFFF"/>
-                </a:solidFill>
-                <a:latin typeface="Arial" pitchFamily="34" charset="0"/>
+                  <a:srgbClr val="1F1E1D"/>
+                </a:solidFill>
+                <a:latin typeface="STHeiti" pitchFamily="34" charset="0"/>
                 <a:ea typeface="Arial" pitchFamily="34" charset="-122"/>
                 <a:cs typeface="Arial" pitchFamily="34" charset="-120"/>
               </a:rPr>
@@ -10548,7 +10472,7 @@
             </a:avLst>
           </a:prstGeom>
           <a:solidFill>
-            <a:srgbClr val="10131A"/>
+            <a:srgbClr val="111B30"/>
           </a:solidFill>
           <a:ln/>
         </p:spPr>
@@ -10584,9 +10508,9 @@
             <a:r>
               <a:rPr lang="en-US" sz="1900" b="1" dirty="0">
                 <a:solidFill>
-                  <a:srgbClr val="FFFFFF"/>
-                </a:solidFill>
-                <a:latin typeface="Arial" pitchFamily="34" charset="0"/>
+                  <a:srgbClr val="1F1E1D"/>
+                </a:solidFill>
+                <a:latin typeface="STHeiti" pitchFamily="34" charset="0"/>
                 <a:ea typeface="Arial" pitchFamily="34" charset="-122"/>
                 <a:cs typeface="Arial" pitchFamily="34" charset="-120"/>
               </a:rPr>
@@ -10613,7 +10537,7 @@
             </a:avLst>
           </a:prstGeom>
           <a:solidFill>
-            <a:srgbClr val="10131A"/>
+            <a:srgbClr val="111B30"/>
           </a:solidFill>
           <a:ln/>
         </p:spPr>
@@ -10649,9 +10573,9 @@
             <a:r>
               <a:rPr lang="en-US" sz="1900" b="1" dirty="0">
                 <a:solidFill>
-                  <a:srgbClr val="FFFFFF"/>
-                </a:solidFill>
-                <a:latin typeface="Arial" pitchFamily="34" charset="0"/>
+                  <a:srgbClr val="1F1E1D"/>
+                </a:solidFill>
+                <a:latin typeface="STHeiti" pitchFamily="34" charset="0"/>
                 <a:ea typeface="Arial" pitchFamily="34" charset="-122"/>
                 <a:cs typeface="Arial" pitchFamily="34" charset="-120"/>
               </a:rPr>
@@ -10678,7 +10602,7 @@
             </a:avLst>
           </a:prstGeom>
           <a:solidFill>
-            <a:srgbClr val="F3F4F7"/>
+            <a:srgbClr val="E9E3D6"/>
           </a:solidFill>
           <a:ln/>
         </p:spPr>
@@ -10714,9 +10638,9 @@
             <a:r>
               <a:rPr lang="en-US" sz="1300" dirty="0">
                 <a:solidFill>
-                  <a:srgbClr val="2C313D"/>
-                </a:solidFill>
-                <a:latin typeface="Microsoft JhengHei" pitchFamily="34" charset="0"/>
+                  <a:srgbClr val="1F1E1D"/>
+                </a:solidFill>
+                <a:latin typeface="STHeiti" pitchFamily="34" charset="0"/>
                 <a:ea typeface="Microsoft JhengHei" pitchFamily="34" charset="-122"/>
                 <a:cs typeface="Microsoft JhengHei" pitchFamily="34" charset="-120"/>
               </a:rPr>
@@ -10743,7 +10667,7 @@
             </a:avLst>
           </a:prstGeom>
           <a:solidFill>
-            <a:srgbClr val="F3F4F7"/>
+            <a:srgbClr val="E9E3D6"/>
           </a:solidFill>
           <a:ln/>
         </p:spPr>
@@ -10779,9 +10703,9 @@
             <a:r>
               <a:rPr lang="en-US" sz="1300" dirty="0">
                 <a:solidFill>
-                  <a:srgbClr val="2C313D"/>
-                </a:solidFill>
-                <a:latin typeface="Microsoft JhengHei" pitchFamily="34" charset="0"/>
+                  <a:srgbClr val="1F1E1D"/>
+                </a:solidFill>
+                <a:latin typeface="STHeiti" pitchFamily="34" charset="0"/>
                 <a:ea typeface="Microsoft JhengHei" pitchFamily="34" charset="-122"/>
                 <a:cs typeface="Microsoft JhengHei" pitchFamily="34" charset="-120"/>
               </a:rPr>
@@ -10808,7 +10732,7 @@
             </a:avLst>
           </a:prstGeom>
           <a:solidFill>
-            <a:srgbClr val="F3F4F7"/>
+            <a:srgbClr val="E9E3D6"/>
           </a:solidFill>
           <a:ln/>
         </p:spPr>
@@ -10844,9 +10768,9 @@
             <a:r>
               <a:rPr lang="en-US" sz="1300" dirty="0">
                 <a:solidFill>
-                  <a:srgbClr val="2C313D"/>
-                </a:solidFill>
-                <a:latin typeface="Microsoft JhengHei" pitchFamily="34" charset="0"/>
+                  <a:srgbClr val="1F1E1D"/>
+                </a:solidFill>
+                <a:latin typeface="STHeiti" pitchFamily="34" charset="0"/>
                 <a:ea typeface="Microsoft JhengHei" pitchFamily="34" charset="-122"/>
                 <a:cs typeface="Microsoft JhengHei" pitchFamily="34" charset="-120"/>
               </a:rPr>
@@ -10873,7 +10797,7 @@
             </a:avLst>
           </a:prstGeom>
           <a:solidFill>
-            <a:srgbClr val="F3F4F7"/>
+            <a:srgbClr val="E9E3D6"/>
           </a:solidFill>
           <a:ln/>
         </p:spPr>
@@ -10909,9 +10833,9 @@
             <a:r>
               <a:rPr lang="en-US" sz="1300" dirty="0">
                 <a:solidFill>
-                  <a:srgbClr val="2C313D"/>
-                </a:solidFill>
-                <a:latin typeface="Microsoft JhengHei" pitchFamily="34" charset="0"/>
+                  <a:srgbClr val="1F1E1D"/>
+                </a:solidFill>
+                <a:latin typeface="STHeiti" pitchFamily="34" charset="0"/>
                 <a:ea typeface="Microsoft JhengHei" pitchFamily="34" charset="-122"/>
                 <a:cs typeface="Microsoft JhengHei" pitchFamily="34" charset="-120"/>
               </a:rPr>
@@ -10938,7 +10862,7 @@
             </a:avLst>
           </a:prstGeom>
           <a:solidFill>
-            <a:srgbClr val="F3F4F7"/>
+            <a:srgbClr val="E9E3D6"/>
           </a:solidFill>
           <a:ln/>
         </p:spPr>
@@ -10974,9 +10898,9 @@
             <a:r>
               <a:rPr lang="en-US" sz="1300" dirty="0">
                 <a:solidFill>
-                  <a:srgbClr val="2C313D"/>
-                </a:solidFill>
-                <a:latin typeface="Microsoft JhengHei" pitchFamily="34" charset="0"/>
+                  <a:srgbClr val="1F1E1D"/>
+                </a:solidFill>
+                <a:latin typeface="STHeiti" pitchFamily="34" charset="0"/>
                 <a:ea typeface="Microsoft JhengHei" pitchFamily="34" charset="-122"/>
                 <a:cs typeface="Microsoft JhengHei" pitchFamily="34" charset="-120"/>
               </a:rPr>
@@ -11003,7 +10927,7 @@
             </a:avLst>
           </a:prstGeom>
           <a:solidFill>
-            <a:srgbClr val="F3F4F7"/>
+            <a:srgbClr val="E9E3D6"/>
           </a:solidFill>
           <a:ln/>
         </p:spPr>
@@ -11039,9 +10963,9 @@
             <a:r>
               <a:rPr lang="en-US" sz="1300" dirty="0">
                 <a:solidFill>
-                  <a:srgbClr val="2C313D"/>
-                </a:solidFill>
-                <a:latin typeface="Microsoft JhengHei" pitchFamily="34" charset="0"/>
+                  <a:srgbClr val="1F1E1D"/>
+                </a:solidFill>
+                <a:latin typeface="STHeiti" pitchFamily="34" charset="0"/>
                 <a:ea typeface="Microsoft JhengHei" pitchFamily="34" charset="-122"/>
                 <a:cs typeface="Microsoft JhengHei" pitchFamily="34" charset="-120"/>
               </a:rPr>
@@ -11068,7 +10992,7 @@
             </a:avLst>
           </a:prstGeom>
           <a:solidFill>
-            <a:srgbClr val="F3F4F7"/>
+            <a:srgbClr val="E9E3D6"/>
           </a:solidFill>
           <a:ln/>
         </p:spPr>
@@ -11104,9 +11028,9 @@
             <a:r>
               <a:rPr lang="en-US" sz="1300" dirty="0">
                 <a:solidFill>
-                  <a:srgbClr val="2C313D"/>
-                </a:solidFill>
-                <a:latin typeface="Microsoft JhengHei" pitchFamily="34" charset="0"/>
+                  <a:srgbClr val="1F1E1D"/>
+                </a:solidFill>
+                <a:latin typeface="STHeiti" pitchFamily="34" charset="0"/>
                 <a:ea typeface="Microsoft JhengHei" pitchFamily="34" charset="-122"/>
                 <a:cs typeface="Microsoft JhengHei" pitchFamily="34" charset="-120"/>
               </a:rPr>
@@ -11143,9 +11067,9 @@
             <a:r>
               <a:rPr lang="en-US" sz="1400" i="1" dirty="0">
                 <a:solidFill>
-                  <a:srgbClr val="6E7687"/>
-                </a:solidFill>
-                <a:latin typeface="Microsoft JhengHei" pitchFamily="34" charset="0"/>
+                  <a:srgbClr val="68645C"/>
+                </a:solidFill>
+                <a:latin typeface="STHeiti" pitchFamily="34" charset="0"/>
                 <a:ea typeface="Microsoft JhengHei" pitchFamily="34" charset="-122"/>
                 <a:cs typeface="Microsoft JhengHei" pitchFamily="34" charset="-120"/>
               </a:rPr>
@@ -11182,9 +11106,9 @@
             <a:r>
               <a:rPr lang="en-US" sz="1100" dirty="0">
                 <a:solidFill>
-                  <a:srgbClr val="A8AEBC"/>
-                </a:solidFill>
-                <a:latin typeface="Arial" pitchFamily="34" charset="0"/>
+                  <a:srgbClr val="9DA89F"/>
+                </a:solidFill>
+                <a:latin typeface="STHeiti" pitchFamily="34" charset="0"/>
                 <a:ea typeface="Arial" pitchFamily="34" charset="-122"/>
                 <a:cs typeface="Arial" pitchFamily="34" charset="-120"/>
               </a:rPr>
@@ -11208,7 +11132,7 @@
     <p:bg>
       <p:bgPr>
         <a:solidFill>
-          <a:srgbClr val="FFFFFF"/>
+          <a:srgbClr val="F0EEE6"/>
         </a:solidFill>
         <a:effectLst/>
       </p:bgPr>
@@ -11242,7 +11166,7 @@
             <a:avLst/>
           </a:prstGeom>
           <a:solidFill>
-            <a:srgbClr val="F96167"/>
+            <a:srgbClr val="157554"/>
           </a:solidFill>
           <a:ln/>
         </p:spPr>
@@ -11278,9 +11202,9 @@
             <a:r>
               <a:rPr lang="en-US" sz="1200" b="1" kern="0" spc="200" dirty="0">
                 <a:solidFill>
-                  <a:srgbClr val="6E7687"/>
-                </a:solidFill>
-                <a:latin typeface="Arial" pitchFamily="34" charset="0"/>
+                  <a:srgbClr val="68645C"/>
+                </a:solidFill>
+                <a:latin typeface="STHeiti" pitchFamily="34" charset="0"/>
                 <a:ea typeface="Arial" pitchFamily="34" charset="-122"/>
                 <a:cs typeface="Arial" pitchFamily="34" charset="-120"/>
               </a:rPr>
@@ -11311,21 +11235,15 @@
           <a:bodyPr wrap="square" lIns="0" tIns="0" rIns="0" bIns="0" rtlCol="0" anchor="ctr"/>
           <a:lstStyle/>
           <a:p>
-            <a:pPr marL="0" indent="0">
-              <a:buNone/>
-            </a:pPr>
-            <a:r>
-              <a:rPr lang="en-US" sz="3400" b="1" dirty="0">
-                <a:solidFill>
-                  <a:srgbClr val="10131A"/>
-                </a:solidFill>
-                <a:latin typeface="Microsoft JhengHei" pitchFamily="34" charset="0"/>
-                <a:ea typeface="Microsoft JhengHei" pitchFamily="34" charset="-122"/>
-                <a:cs typeface="Microsoft JhengHei" pitchFamily="34" charset="-120"/>
-              </a:rPr>
-              <a:t>v0.5.0 規劃的十個 public tools</a:t>
-            </a:r>
-            <a:endParaRPr lang="en-US" sz="3400" dirty="0"/>
+            <a:r>
+              <a:rPr>
+                <a:solidFill>
+                  <a:srgbClr val="1F1E1D"/>
+                </a:solidFill>
+                <a:latin typeface="STHeiti"/>
+              </a:rPr>
+              <a:t>v0.5.0：把一個 decision loop 做完整</a:t>
+            </a:r>
           </a:p>
         </p:txBody>
       </p:sp>
@@ -11359,9 +11277,9 @@
             <a:r>
               <a:rPr lang="en-US" sz="2000" dirty="0">
                 <a:solidFill>
-                  <a:srgbClr val="353A46"/>
-                </a:solidFill>
-                <a:latin typeface="Microsoft JhengHei" pitchFamily="34" charset="0"/>
+                  <a:srgbClr val="1F1E1D"/>
+                </a:solidFill>
+                <a:latin typeface="STHeiti" pitchFamily="34" charset="0"/>
                 <a:ea typeface="Microsoft JhengHei" pitchFamily="34" charset="-122"/>
                 <a:cs typeface="Microsoft JhengHei" pitchFamily="34" charset="-120"/>
               </a:rPr>
@@ -11388,7 +11306,7 @@
             </a:avLst>
           </a:prstGeom>
           <a:solidFill>
-            <a:srgbClr val="F3F4F7"/>
+            <a:srgbClr val="E9E3D6"/>
           </a:solidFill>
           <a:ln/>
         </p:spPr>
@@ -11412,7 +11330,7 @@
             <a:avLst/>
           </a:prstGeom>
           <a:solidFill>
-            <a:srgbClr val="F96167"/>
+            <a:srgbClr val="157554"/>
           </a:solidFill>
           <a:ln/>
         </p:spPr>
@@ -11448,9 +11366,9 @@
             <a:r>
               <a:rPr lang="en-US" sz="1350" b="1" dirty="0">
                 <a:solidFill>
-                  <a:srgbClr val="10131A"/>
-                </a:solidFill>
-                <a:latin typeface="Arial" pitchFamily="34" charset="0"/>
+                  <a:srgbClr val="1F1E1D"/>
+                </a:solidFill>
+                <a:latin typeface="STHeiti" pitchFamily="34" charset="0"/>
                 <a:ea typeface="Arial" pitchFamily="34" charset="-122"/>
                 <a:cs typeface="Arial" pitchFamily="34" charset="-120"/>
               </a:rPr>
@@ -11491,9 +11409,9 @@
             <a:r>
               <a:rPr lang="en-US" sz="950" dirty="0">
                 <a:solidFill>
-                  <a:srgbClr val="6E7687"/>
-                </a:solidFill>
-                <a:latin typeface="Arial" pitchFamily="34" charset="0"/>
+                  <a:srgbClr val="68645C"/>
+                </a:solidFill>
+                <a:latin typeface="STHeiti" pitchFamily="34" charset="0"/>
                 <a:ea typeface="Arial" pitchFamily="34" charset="-122"/>
                 <a:cs typeface="Arial" pitchFamily="34" charset="-120"/>
               </a:rPr>
@@ -11511,9 +11429,9 @@
             <a:r>
               <a:rPr lang="en-US" sz="950" dirty="0">
                 <a:solidFill>
-                  <a:srgbClr val="6E7687"/>
-                </a:solidFill>
-                <a:latin typeface="Arial" pitchFamily="34" charset="0"/>
+                  <a:srgbClr val="68645C"/>
+                </a:solidFill>
+                <a:latin typeface="STHeiti" pitchFamily="34" charset="0"/>
                 <a:ea typeface="Arial" pitchFamily="34" charset="-122"/>
                 <a:cs typeface="Arial" pitchFamily="34" charset="-120"/>
               </a:rPr>
@@ -11540,7 +11458,7 @@
             </a:avLst>
           </a:prstGeom>
           <a:solidFill>
-            <a:srgbClr val="F3F4F7"/>
+            <a:srgbClr val="E9E3D6"/>
           </a:solidFill>
           <a:ln/>
         </p:spPr>
@@ -11564,7 +11482,7 @@
             <a:avLst/>
           </a:prstGeom>
           <a:solidFill>
-            <a:srgbClr val="1FB6A6"/>
+            <a:srgbClr val="157554"/>
           </a:solidFill>
           <a:ln/>
         </p:spPr>
@@ -11600,9 +11518,9 @@
             <a:r>
               <a:rPr lang="en-US" sz="1350" b="1" dirty="0">
                 <a:solidFill>
-                  <a:srgbClr val="10131A"/>
-                </a:solidFill>
-                <a:latin typeface="Arial" pitchFamily="34" charset="0"/>
+                  <a:srgbClr val="1F1E1D"/>
+                </a:solidFill>
+                <a:latin typeface="STHeiti" pitchFamily="34" charset="0"/>
                 <a:ea typeface="Arial" pitchFamily="34" charset="-122"/>
                 <a:cs typeface="Arial" pitchFamily="34" charset="-120"/>
               </a:rPr>
@@ -11643,9 +11561,9 @@
             <a:r>
               <a:rPr lang="en-US" sz="950" dirty="0">
                 <a:solidFill>
-                  <a:srgbClr val="6E7687"/>
-                </a:solidFill>
-                <a:latin typeface="Arial" pitchFamily="34" charset="0"/>
+                  <a:srgbClr val="68645C"/>
+                </a:solidFill>
+                <a:latin typeface="STHeiti" pitchFamily="34" charset="0"/>
                 <a:ea typeface="Arial" pitchFamily="34" charset="-122"/>
                 <a:cs typeface="Arial" pitchFamily="34" charset="-120"/>
               </a:rPr>
@@ -11663,9 +11581,9 @@
             <a:r>
               <a:rPr lang="en-US" sz="950" dirty="0">
                 <a:solidFill>
-                  <a:srgbClr val="6E7687"/>
-                </a:solidFill>
-                <a:latin typeface="Arial" pitchFamily="34" charset="0"/>
+                  <a:srgbClr val="68645C"/>
+                </a:solidFill>
+                <a:latin typeface="STHeiti" pitchFamily="34" charset="0"/>
                 <a:ea typeface="Arial" pitchFamily="34" charset="-122"/>
                 <a:cs typeface="Arial" pitchFamily="34" charset="-120"/>
               </a:rPr>
@@ -11692,7 +11610,7 @@
             </a:avLst>
           </a:prstGeom>
           <a:solidFill>
-            <a:srgbClr val="F3F4F7"/>
+            <a:srgbClr val="E9E3D6"/>
           </a:solidFill>
           <a:ln/>
         </p:spPr>
@@ -11716,7 +11634,7 @@
             <a:avLst/>
           </a:prstGeom>
           <a:solidFill>
-            <a:srgbClr val="10131A"/>
+            <a:srgbClr val="111B30"/>
           </a:solidFill>
           <a:ln/>
         </p:spPr>
@@ -11752,9 +11670,9 @@
             <a:r>
               <a:rPr lang="en-US" sz="1350" b="1" dirty="0">
                 <a:solidFill>
-                  <a:srgbClr val="10131A"/>
-                </a:solidFill>
-                <a:latin typeface="Arial" pitchFamily="34" charset="0"/>
+                  <a:srgbClr val="1F1E1D"/>
+                </a:solidFill>
+                <a:latin typeface="STHeiti" pitchFamily="34" charset="0"/>
                 <a:ea typeface="Arial" pitchFamily="34" charset="-122"/>
                 <a:cs typeface="Arial" pitchFamily="34" charset="-120"/>
               </a:rPr>
@@ -11794,9 +11712,9 @@
             <a:r>
               <a:rPr lang="en-US" sz="950" dirty="0">
                 <a:solidFill>
-                  <a:srgbClr val="6E7687"/>
-                </a:solidFill>
-                <a:latin typeface="Arial" pitchFamily="34" charset="0"/>
+                  <a:srgbClr val="68645C"/>
+                </a:solidFill>
+                <a:latin typeface="STHeiti" pitchFamily="34" charset="0"/>
                 <a:ea typeface="Arial" pitchFamily="34" charset="-122"/>
                 <a:cs typeface="Arial" pitchFamily="34" charset="-120"/>
               </a:rPr>
@@ -11814,9 +11732,9 @@
             <a:r>
               <a:rPr lang="en-US" sz="950" dirty="0">
                 <a:solidFill>
-                  <a:srgbClr val="6E7687"/>
-                </a:solidFill>
-                <a:latin typeface="Arial" pitchFamily="34" charset="0"/>
+                  <a:srgbClr val="68645C"/>
+                </a:solidFill>
+                <a:latin typeface="STHeiti" pitchFamily="34" charset="0"/>
                 <a:ea typeface="Arial" pitchFamily="34" charset="-122"/>
                 <a:cs typeface="Arial" pitchFamily="34" charset="-120"/>
               </a:rPr>
@@ -11843,7 +11761,7 @@
             </a:avLst>
           </a:prstGeom>
           <a:solidFill>
-            <a:srgbClr val="F3F4F7"/>
+            <a:srgbClr val="E9E3D6"/>
           </a:solidFill>
           <a:ln/>
         </p:spPr>
@@ -11867,7 +11785,7 @@
             <a:avLst/>
           </a:prstGeom>
           <a:solidFill>
-            <a:srgbClr val="4A5568"/>
+            <a:srgbClr val="34445E"/>
           </a:solidFill>
           <a:ln/>
         </p:spPr>
@@ -11903,9 +11821,9 @@
             <a:r>
               <a:rPr lang="en-US" sz="1350" b="1" dirty="0">
                 <a:solidFill>
-                  <a:srgbClr val="10131A"/>
-                </a:solidFill>
-                <a:latin typeface="Arial" pitchFamily="34" charset="0"/>
+                  <a:srgbClr val="1F1E1D"/>
+                </a:solidFill>
+                <a:latin typeface="STHeiti" pitchFamily="34" charset="0"/>
                 <a:ea typeface="Arial" pitchFamily="34" charset="-122"/>
                 <a:cs typeface="Arial" pitchFamily="34" charset="-120"/>
               </a:rPr>
@@ -11946,9 +11864,9 @@
             <a:r>
               <a:rPr lang="en-US" sz="950" dirty="0">
                 <a:solidFill>
-                  <a:srgbClr val="6E7687"/>
-                </a:solidFill>
-                <a:latin typeface="Arial" pitchFamily="34" charset="0"/>
+                  <a:srgbClr val="68645C"/>
+                </a:solidFill>
+                <a:latin typeface="STHeiti" pitchFamily="34" charset="0"/>
                 <a:ea typeface="Arial" pitchFamily="34" charset="-122"/>
                 <a:cs typeface="Arial" pitchFamily="34" charset="-120"/>
               </a:rPr>
@@ -11966,9 +11884,9 @@
             <a:r>
               <a:rPr lang="en-US" sz="950" dirty="0">
                 <a:solidFill>
-                  <a:srgbClr val="6E7687"/>
-                </a:solidFill>
-                <a:latin typeface="Arial" pitchFamily="34" charset="0"/>
+                  <a:srgbClr val="68645C"/>
+                </a:solidFill>
+                <a:latin typeface="STHeiti" pitchFamily="34" charset="0"/>
                 <a:ea typeface="Arial" pitchFamily="34" charset="-122"/>
                 <a:cs typeface="Arial" pitchFamily="34" charset="-120"/>
               </a:rPr>
@@ -11995,7 +11913,7 @@
             </a:avLst>
           </a:prstGeom>
           <a:solidFill>
-            <a:srgbClr val="F3F4F7"/>
+            <a:srgbClr val="E9E3D6"/>
           </a:solidFill>
           <a:ln/>
         </p:spPr>
@@ -12019,7 +11937,7 @@
             <a:avLst/>
           </a:prstGeom>
           <a:solidFill>
-            <a:srgbClr val="8A93A6"/>
+            <a:srgbClr val="68645C"/>
           </a:solidFill>
           <a:ln/>
         </p:spPr>
@@ -12055,9 +11973,9 @@
             <a:r>
               <a:rPr lang="en-US" sz="1350" b="1" dirty="0">
                 <a:solidFill>
-                  <a:srgbClr val="10131A"/>
-                </a:solidFill>
-                <a:latin typeface="Arial" pitchFamily="34" charset="0"/>
+                  <a:srgbClr val="1F1E1D"/>
+                </a:solidFill>
+                <a:latin typeface="STHeiti" pitchFamily="34" charset="0"/>
                 <a:ea typeface="Arial" pitchFamily="34" charset="-122"/>
                 <a:cs typeface="Arial" pitchFamily="34" charset="-120"/>
               </a:rPr>
@@ -12097,9 +12015,9 @@
             <a:r>
               <a:rPr lang="en-US" sz="950" dirty="0">
                 <a:solidFill>
-                  <a:srgbClr val="6E7687"/>
-                </a:solidFill>
-                <a:latin typeface="Arial" pitchFamily="34" charset="0"/>
+                  <a:srgbClr val="68645C"/>
+                </a:solidFill>
+                <a:latin typeface="STHeiti" pitchFamily="34" charset="0"/>
                 <a:ea typeface="Arial" pitchFamily="34" charset="-122"/>
                 <a:cs typeface="Arial" pitchFamily="34" charset="-120"/>
               </a:rPr>
@@ -12117,9 +12035,9 @@
             <a:r>
               <a:rPr lang="en-US" sz="950" dirty="0">
                 <a:solidFill>
-                  <a:srgbClr val="6E7687"/>
-                </a:solidFill>
-                <a:latin typeface="Arial" pitchFamily="34" charset="0"/>
+                  <a:srgbClr val="68645C"/>
+                </a:solidFill>
+                <a:latin typeface="STHeiti" pitchFamily="34" charset="0"/>
                 <a:ea typeface="Arial" pitchFamily="34" charset="-122"/>
                 <a:cs typeface="Arial" pitchFamily="34" charset="-120"/>
               </a:rPr>
@@ -12146,7 +12064,7 @@
             </a:avLst>
           </a:prstGeom>
           <a:solidFill>
-            <a:srgbClr val="F3F4F7"/>
+            <a:srgbClr val="E9E3D6"/>
           </a:solidFill>
           <a:ln/>
         </p:spPr>
@@ -12170,7 +12088,7 @@
             <a:avLst/>
           </a:prstGeom>
           <a:solidFill>
-            <a:srgbClr val="1FB6A6"/>
+            <a:srgbClr val="157554"/>
           </a:solidFill>
           <a:ln/>
         </p:spPr>
@@ -12206,9 +12124,9 @@
             <a:r>
               <a:rPr lang="en-US" sz="1350" b="1" dirty="0">
                 <a:solidFill>
-                  <a:srgbClr val="10131A"/>
-                </a:solidFill>
-                <a:latin typeface="Arial" pitchFamily="34" charset="0"/>
+                  <a:srgbClr val="1F1E1D"/>
+                </a:solidFill>
+                <a:latin typeface="STHeiti" pitchFamily="34" charset="0"/>
                 <a:ea typeface="Arial" pitchFamily="34" charset="-122"/>
                 <a:cs typeface="Arial" pitchFamily="34" charset="-120"/>
               </a:rPr>
@@ -12249,9 +12167,9 @@
             <a:r>
               <a:rPr lang="en-US" sz="950" dirty="0">
                 <a:solidFill>
-                  <a:srgbClr val="6E7687"/>
-                </a:solidFill>
-                <a:latin typeface="Arial" pitchFamily="34" charset="0"/>
+                  <a:srgbClr val="68645C"/>
+                </a:solidFill>
+                <a:latin typeface="STHeiti" pitchFamily="34" charset="0"/>
                 <a:ea typeface="Arial" pitchFamily="34" charset="-122"/>
                 <a:cs typeface="Arial" pitchFamily="34" charset="-120"/>
               </a:rPr>
@@ -12269,9 +12187,9 @@
             <a:r>
               <a:rPr lang="en-US" sz="950" dirty="0">
                 <a:solidFill>
-                  <a:srgbClr val="6E7687"/>
-                </a:solidFill>
-                <a:latin typeface="Arial" pitchFamily="34" charset="0"/>
+                  <a:srgbClr val="68645C"/>
+                </a:solidFill>
+                <a:latin typeface="STHeiti" pitchFamily="34" charset="0"/>
                 <a:ea typeface="Arial" pitchFamily="34" charset="-122"/>
                 <a:cs typeface="Arial" pitchFamily="34" charset="-120"/>
               </a:rPr>
@@ -12308,9 +12226,9 @@
             <a:r>
               <a:rPr lang="en-US" sz="1100" dirty="0">
                 <a:solidFill>
-                  <a:srgbClr val="A8AEBC"/>
-                </a:solidFill>
-                <a:latin typeface="Arial" pitchFamily="34" charset="0"/>
+                  <a:srgbClr val="9DA89F"/>
+                </a:solidFill>
+                <a:latin typeface="STHeiti" pitchFamily="34" charset="0"/>
                 <a:ea typeface="Arial" pitchFamily="34" charset="-122"/>
                 <a:cs typeface="Arial" pitchFamily="34" charset="-120"/>
               </a:rPr>
@@ -12334,7 +12252,7 @@
     <p:bg>
       <p:bgPr>
         <a:solidFill>
-          <a:srgbClr val="FFFFFF"/>
+          <a:srgbClr val="F0EEE6"/>
         </a:solidFill>
         <a:effectLst/>
       </p:bgPr>
@@ -12368,7 +12286,7 @@
             <a:avLst/>
           </a:prstGeom>
           <a:solidFill>
-            <a:srgbClr val="F96167"/>
+            <a:srgbClr val="157554"/>
           </a:solidFill>
           <a:ln/>
         </p:spPr>
@@ -12404,9 +12322,9 @@
             <a:r>
               <a:rPr lang="en-US" sz="1200" b="1" kern="0" spc="200" dirty="0">
                 <a:solidFill>
-                  <a:srgbClr val="6E7687"/>
-                </a:solidFill>
-                <a:latin typeface="Arial" pitchFamily="34" charset="0"/>
+                  <a:srgbClr val="68645C"/>
+                </a:solidFill>
+                <a:latin typeface="STHeiti" pitchFamily="34" charset="0"/>
                 <a:ea typeface="Arial" pitchFamily="34" charset="-122"/>
                 <a:cs typeface="Arial" pitchFamily="34" charset="-120"/>
               </a:rPr>
@@ -12443,9 +12361,9 @@
             <a:r>
               <a:rPr lang="en-US" sz="3400" b="1" dirty="0">
                 <a:solidFill>
-                  <a:srgbClr val="10131A"/>
-                </a:solidFill>
-                <a:latin typeface="Microsoft JhengHei" pitchFamily="34" charset="0"/>
+                  <a:srgbClr val="1F1E1D"/>
+                </a:solidFill>
+                <a:latin typeface="STHeiti" pitchFamily="34" charset="0"/>
                 <a:ea typeface="Microsoft JhengHei" pitchFamily="34" charset="-122"/>
                 <a:cs typeface="Microsoft JhengHei" pitchFamily="34" charset="-120"/>
               </a:rPr>
@@ -12476,24 +12394,15 @@
           <a:bodyPr wrap="square" lIns="0" tIns="0" rIns="0" bIns="0" rtlCol="0" anchor="t"/>
           <a:lstStyle/>
           <a:p>
-            <a:pPr marL="0" indent="0">
-              <a:lnSpc>
-                <a:spcPts val="3200"/>
-              </a:lnSpc>
-              <a:buNone/>
-            </a:pPr>
-            <a:r>
-              <a:rPr lang="en-US" sz="2000" dirty="0">
-                <a:solidFill>
-                  <a:srgbClr val="353A46"/>
-                </a:solidFill>
-                <a:latin typeface="Microsoft JhengHei" pitchFamily="34" charset="0"/>
-                <a:ea typeface="Microsoft JhengHei" pitchFamily="34" charset="-122"/>
-                <a:cs typeface="Microsoft JhengHei" pitchFamily="34" charset="-120"/>
-              </a:rPr>
-              <a:t>先看產品終局,再看已交付能力,最後用真實情境與 roadmap 驗收。</a:t>
-            </a:r>
-            <a:endParaRPr lang="en-US" sz="2000" dirty="0"/>
+            <a:r>
+              <a:rPr>
+                <a:solidFill>
+                  <a:srgbClr val="1F1E1D"/>
+                </a:solidFill>
+                <a:latin typeface="STHeiti"/>
+              </a:rPr>
+              <a:t>先看今天的決策，再看 evidence chain 與 privacy boundary，最後看產品驗證與 roadmap。</a:t>
+            </a:r>
           </a:p>
         </p:txBody>
       </p:sp>
@@ -12514,7 +12423,7 @@
             </a:avLst>
           </a:prstGeom>
           <a:solidFill>
-            <a:srgbClr val="F3F4F7"/>
+            <a:srgbClr val="E9E3D6"/>
           </a:solidFill>
           <a:ln/>
         </p:spPr>
@@ -12550,9 +12459,9 @@
             <a:r>
               <a:rPr lang="en-US" sz="2600" b="1" dirty="0">
                 <a:solidFill>
-                  <a:srgbClr val="F96167"/>
-                </a:solidFill>
-                <a:latin typeface="Arial" pitchFamily="34" charset="0"/>
+                  <a:srgbClr val="157554"/>
+                </a:solidFill>
+                <a:latin typeface="STHeiti" pitchFamily="34" charset="0"/>
                 <a:ea typeface="Arial" pitchFamily="34" charset="-122"/>
                 <a:cs typeface="Arial" pitchFamily="34" charset="-120"/>
               </a:rPr>
@@ -12589,9 +12498,9 @@
             <a:r>
               <a:rPr lang="en-US" sz="1800" b="1" dirty="0">
                 <a:solidFill>
-                  <a:srgbClr val="10131A"/>
-                </a:solidFill>
-                <a:latin typeface="Microsoft JhengHei" pitchFamily="34" charset="0"/>
+                  <a:srgbClr val="1F1E1D"/>
+                </a:solidFill>
+                <a:latin typeface="STHeiti" pitchFamily="34" charset="0"/>
                 <a:ea typeface="Microsoft JhengHei" pitchFamily="34" charset="-122"/>
                 <a:cs typeface="Microsoft JhengHei" pitchFamily="34" charset="-120"/>
               </a:rPr>
@@ -12622,24 +12531,15 @@
           <a:bodyPr wrap="square" lIns="0" tIns="0" rIns="0" bIns="0" rtlCol="0" anchor="t"/>
           <a:lstStyle/>
           <a:p>
-            <a:pPr marL="0" indent="0">
-              <a:lnSpc>
-                <a:spcPts val="1900"/>
-              </a:lnSpc>
-              <a:buNone/>
-            </a:pPr>
-            <a:r>
-              <a:rPr lang="en-US" sz="1250" dirty="0">
-                <a:solidFill>
-                  <a:srgbClr val="6E7687"/>
-                </a:solidFill>
-                <a:latin typeface="Microsoft JhengHei" pitchFamily="34" charset="0"/>
-                <a:ea typeface="Microsoft JhengHei" pitchFamily="34" charset="-122"/>
-                <a:cs typeface="Microsoft JhengHei" pitchFamily="34" charset="-120"/>
-              </a:rPr>
-              <a:t>我們蓋的不是 App,是一個確定性的訓練決策引擎</a:t>
-            </a:r>
-            <a:endParaRPr lang="en-US" sz="1250" dirty="0"/>
+            <a:r>
+              <a:rPr>
+                <a:solidFill>
+                  <a:srgbClr val="1F1E1D"/>
+                </a:solidFill>
+                <a:latin typeface="STHeiti"/>
+              </a:rPr>
+              <a:t>從原定課表到今天要做什麼</a:t>
+            </a:r>
           </a:p>
         </p:txBody>
       </p:sp>
@@ -12660,7 +12560,7 @@
             </a:avLst>
           </a:prstGeom>
           <a:solidFill>
-            <a:srgbClr val="F3F4F7"/>
+            <a:srgbClr val="E9E3D6"/>
           </a:solidFill>
           <a:ln/>
         </p:spPr>
@@ -12696,9 +12596,9 @@
             <a:r>
               <a:rPr lang="en-US" sz="2600" b="1" dirty="0">
                 <a:solidFill>
-                  <a:srgbClr val="1FB6A6"/>
-                </a:solidFill>
-                <a:latin typeface="Arial" pitchFamily="34" charset="0"/>
+                  <a:srgbClr val="157554"/>
+                </a:solidFill>
+                <a:latin typeface="STHeiti" pitchFamily="34" charset="0"/>
                 <a:ea typeface="Arial" pitchFamily="34" charset="-122"/>
                 <a:cs typeface="Arial" pitchFamily="34" charset="-120"/>
               </a:rPr>
@@ -12735,9 +12635,9 @@
             <a:r>
               <a:rPr lang="en-US" sz="1800" b="1" dirty="0">
                 <a:solidFill>
-                  <a:srgbClr val="10131A"/>
-                </a:solidFill>
-                <a:latin typeface="Microsoft JhengHei" pitchFamily="34" charset="0"/>
+                  <a:srgbClr val="1F1E1D"/>
+                </a:solidFill>
+                <a:latin typeface="STHeiti" pitchFamily="34" charset="0"/>
                 <a:ea typeface="Microsoft JhengHei" pitchFamily="34" charset="-122"/>
                 <a:cs typeface="Microsoft JhengHei" pitchFamily="34" charset="-120"/>
               </a:rPr>
@@ -12768,24 +12668,15 @@
           <a:bodyPr wrap="square" lIns="0" tIns="0" rIns="0" bIns="0" rtlCol="0" anchor="t"/>
           <a:lstStyle/>
           <a:p>
-            <a:pPr marL="0" indent="0">
-              <a:lnSpc>
-                <a:spcPts val="1900"/>
-              </a:lnSpc>
-              <a:buNone/>
-            </a:pPr>
-            <a:r>
-              <a:rPr lang="en-US" sz="1250" dirty="0">
-                <a:solidFill>
-                  <a:srgbClr val="6E7687"/>
-                </a:solidFill>
-                <a:latin typeface="Microsoft JhengHei" pitchFamily="34" charset="0"/>
-                <a:ea typeface="Microsoft JhengHei" pitchFamily="34" charset="-122"/>
-                <a:cs typeface="Microsoft JhengHei" pitchFamily="34" charset="-120"/>
-              </a:rPr>
-              <a:t>目前 6 tools、下一版 10 tools,以及版本化的 Engine 與 Rule Packages</a:t>
-            </a:r>
-            <a:endParaRPr lang="en-US" sz="1250" dirty="0"/>
+            <a:r>
+              <a:rPr>
+                <a:solidFill>
+                  <a:srgbClr val="1F1E1D"/>
+                </a:solidFill>
+                <a:latin typeface="STHeiti"/>
+              </a:rPr>
+              <a:t>證據、理由、缺失與信心都可檢查</a:t>
+            </a:r>
           </a:p>
         </p:txBody>
       </p:sp>
@@ -12806,7 +12697,7 @@
             </a:avLst>
           </a:prstGeom>
           <a:solidFill>
-            <a:srgbClr val="F3F4F7"/>
+            <a:srgbClr val="E9E3D6"/>
           </a:solidFill>
           <a:ln/>
         </p:spPr>
@@ -12842,9 +12733,9 @@
             <a:r>
               <a:rPr lang="en-US" sz="2600" b="1" dirty="0">
                 <a:solidFill>
-                  <a:srgbClr val="10131A"/>
-                </a:solidFill>
-                <a:latin typeface="Arial" pitchFamily="34" charset="0"/>
+                  <a:srgbClr val="1F1E1D"/>
+                </a:solidFill>
+                <a:latin typeface="STHeiti" pitchFamily="34" charset="0"/>
                 <a:ea typeface="Arial" pitchFamily="34" charset="-122"/>
                 <a:cs typeface="Arial" pitchFamily="34" charset="-120"/>
               </a:rPr>
@@ -12881,9 +12772,9 @@
             <a:r>
               <a:rPr lang="en-US" sz="1800" b="1" dirty="0">
                 <a:solidFill>
-                  <a:srgbClr val="10131A"/>
-                </a:solidFill>
-                <a:latin typeface="Microsoft JhengHei" pitchFamily="34" charset="0"/>
+                  <a:srgbClr val="1F1E1D"/>
+                </a:solidFill>
+                <a:latin typeface="STHeiti" pitchFamily="34" charset="0"/>
                 <a:ea typeface="Microsoft JhengHei" pitchFamily="34" charset="-122"/>
                 <a:cs typeface="Microsoft JhengHei" pitchFamily="34" charset="-120"/>
               </a:rPr>
@@ -12914,24 +12805,15 @@
           <a:bodyPr wrap="square" lIns="0" tIns="0" rIns="0" bIns="0" rtlCol="0" anchor="t"/>
           <a:lstStyle/>
           <a:p>
-            <a:pPr marL="0" indent="0">
-              <a:lnSpc>
-                <a:spcPts val="1900"/>
-              </a:lnSpc>
-              <a:buNone/>
-            </a:pPr>
-            <a:r>
-              <a:rPr lang="en-US" sz="1250" dirty="0">
-                <a:solidFill>
-                  <a:srgbClr val="6E7687"/>
-                </a:solidFill>
-                <a:latin typeface="Microsoft JhengHei" pitchFamily="34" charset="0"/>
-                <a:ea typeface="Microsoft JhengHei" pitchFamily="34" charset="-122"/>
-                <a:cs typeface="Microsoft JhengHei" pitchFamily="34" charset="-120"/>
-              </a:rPr>
-              <a:t>六個真實問題,以及從 v0.5.0 到 private engine 的交付順序</a:t>
-            </a:r>
-            <a:endParaRPr lang="en-US" sz="1250" dirty="0"/>
+            <a:r>
+              <a:rPr>
+                <a:solidFill>
+                  <a:srgbClr val="1F1E1D"/>
+                </a:solidFill>
+                <a:latin typeface="STHeiti"/>
+              </a:rPr>
+              <a:t>AI coach 可替換，健康歷史留在你的控制邊界</a:t>
+            </a:r>
           </a:p>
         </p:txBody>
       </p:sp>
@@ -12962,9 +12844,9 @@
             <a:r>
               <a:rPr lang="en-US" sz="1100" dirty="0">
                 <a:solidFill>
-                  <a:srgbClr val="A8AEBC"/>
-                </a:solidFill>
-                <a:latin typeface="Arial" pitchFamily="34" charset="0"/>
+                  <a:srgbClr val="9DA89F"/>
+                </a:solidFill>
+                <a:latin typeface="STHeiti" pitchFamily="34" charset="0"/>
                 <a:ea typeface="Arial" pitchFamily="34" charset="-122"/>
                 <a:cs typeface="Arial" pitchFamily="34" charset="-120"/>
               </a:rPr>
@@ -12988,7 +12870,7 @@
     <p:bg>
       <p:bgPr>
         <a:solidFill>
-          <a:srgbClr val="FFFFFF"/>
+          <a:srgbClr val="F0EEE6"/>
         </a:solidFill>
         <a:effectLst/>
       </p:bgPr>
@@ -13022,7 +12904,7 @@
             <a:avLst/>
           </a:prstGeom>
           <a:solidFill>
-            <a:srgbClr val="F96167"/>
+            <a:srgbClr val="157554"/>
           </a:solidFill>
           <a:ln/>
         </p:spPr>
@@ -13058,9 +12940,9 @@
             <a:r>
               <a:rPr lang="en-US" sz="1200" b="1" kern="0" spc="200" dirty="0">
                 <a:solidFill>
-                  <a:srgbClr val="6E7687"/>
-                </a:solidFill>
-                <a:latin typeface="Arial" pitchFamily="34" charset="0"/>
+                  <a:srgbClr val="68645C"/>
+                </a:solidFill>
+                <a:latin typeface="STHeiti" pitchFamily="34" charset="0"/>
                 <a:ea typeface="Arial" pitchFamily="34" charset="-122"/>
                 <a:cs typeface="Arial" pitchFamily="34" charset="-120"/>
               </a:rPr>
@@ -13087,7 +12969,7 @@
             </a:avLst>
           </a:prstGeom>
           <a:solidFill>
-            <a:srgbClr val="10131A"/>
+            <a:srgbClr val="111B30"/>
           </a:solidFill>
           <a:ln/>
         </p:spPr>
@@ -13123,9 +13005,9 @@
             <a:r>
               <a:rPr lang="en-US" sz="2400" b="1" dirty="0">
                 <a:solidFill>
-                  <a:srgbClr val="FFFFFF"/>
-                </a:solidFill>
-                <a:latin typeface="Microsoft JhengHei" pitchFamily="34" charset="0"/>
+                  <a:srgbClr val="1F1E1D"/>
+                </a:solidFill>
+                <a:latin typeface="STHeiti" pitchFamily="34" charset="0"/>
                 <a:ea typeface="Microsoft JhengHei" pitchFamily="34" charset="-122"/>
                 <a:cs typeface="Microsoft JhengHei" pitchFamily="34" charset="-120"/>
               </a:rPr>
@@ -13162,9 +13044,9 @@
             <a:r>
               <a:rPr lang="en-US" sz="1400" b="1" dirty="0">
                 <a:solidFill>
-                  <a:srgbClr val="6E7687"/>
-                </a:solidFill>
-                <a:latin typeface="Microsoft JhengHei" pitchFamily="34" charset="0"/>
+                  <a:srgbClr val="68645C"/>
+                </a:solidFill>
+                <a:latin typeface="STHeiti" pitchFamily="34" charset="0"/>
                 <a:ea typeface="Microsoft JhengHei" pitchFamily="34" charset="-122"/>
                 <a:cs typeface="Microsoft JhengHei" pitchFamily="34" charset="-120"/>
               </a:rPr>
@@ -13191,7 +13073,7 @@
             </a:avLst>
           </a:prstGeom>
           <a:solidFill>
-            <a:srgbClr val="F3F4F7"/>
+            <a:srgbClr val="E9E3D6"/>
           </a:solidFill>
           <a:ln/>
         </p:spPr>
@@ -13215,7 +13097,7 @@
             <a:avLst/>
           </a:prstGeom>
           <a:solidFill>
-            <a:srgbClr val="1FB6A6"/>
+            <a:srgbClr val="157554"/>
           </a:solidFill>
           <a:ln/>
         </p:spPr>
@@ -13251,9 +13133,9 @@
             <a:r>
               <a:rPr lang="en-US" sz="1350" dirty="0">
                 <a:solidFill>
-                  <a:srgbClr val="2C313D"/>
-                </a:solidFill>
-                <a:latin typeface="Microsoft JhengHei" pitchFamily="34" charset="0"/>
+                  <a:srgbClr val="1F1E1D"/>
+                </a:solidFill>
+                <a:latin typeface="STHeiti" pitchFamily="34" charset="0"/>
                 <a:ea typeface="Microsoft JhengHei" pitchFamily="34" charset="-122"/>
                 <a:cs typeface="Microsoft JhengHei" pitchFamily="34" charset="-120"/>
               </a:rPr>
@@ -13280,7 +13162,7 @@
             </a:avLst>
           </a:prstGeom>
           <a:solidFill>
-            <a:srgbClr val="F3F4F7"/>
+            <a:srgbClr val="E9E3D6"/>
           </a:solidFill>
           <a:ln/>
         </p:spPr>
@@ -13304,7 +13186,7 @@
             <a:avLst/>
           </a:prstGeom>
           <a:solidFill>
-            <a:srgbClr val="1FB6A6"/>
+            <a:srgbClr val="157554"/>
           </a:solidFill>
           <a:ln/>
         </p:spPr>
@@ -13340,9 +13222,9 @@
             <a:r>
               <a:rPr lang="en-US" sz="1350" dirty="0">
                 <a:solidFill>
-                  <a:srgbClr val="2C313D"/>
-                </a:solidFill>
-                <a:latin typeface="Microsoft JhengHei" pitchFamily="34" charset="0"/>
+                  <a:srgbClr val="1F1E1D"/>
+                </a:solidFill>
+                <a:latin typeface="STHeiti" pitchFamily="34" charset="0"/>
                 <a:ea typeface="Microsoft JhengHei" pitchFamily="34" charset="-122"/>
                 <a:cs typeface="Microsoft JhengHei" pitchFamily="34" charset="-120"/>
               </a:rPr>
@@ -13369,7 +13251,7 @@
             </a:avLst>
           </a:prstGeom>
           <a:solidFill>
-            <a:srgbClr val="F3F4F7"/>
+            <a:srgbClr val="E9E3D6"/>
           </a:solidFill>
           <a:ln/>
         </p:spPr>
@@ -13393,7 +13275,7 @@
             <a:avLst/>
           </a:prstGeom>
           <a:solidFill>
-            <a:srgbClr val="1FB6A6"/>
+            <a:srgbClr val="157554"/>
           </a:solidFill>
           <a:ln/>
         </p:spPr>
@@ -13429,9 +13311,9 @@
             <a:r>
               <a:rPr lang="en-US" sz="1350" dirty="0">
                 <a:solidFill>
-                  <a:srgbClr val="2C313D"/>
-                </a:solidFill>
-                <a:latin typeface="Microsoft JhengHei" pitchFamily="34" charset="0"/>
+                  <a:srgbClr val="1F1E1D"/>
+                </a:solidFill>
+                <a:latin typeface="STHeiti" pitchFamily="34" charset="0"/>
                 <a:ea typeface="Microsoft JhengHei" pitchFamily="34" charset="-122"/>
                 <a:cs typeface="Microsoft JhengHei" pitchFamily="34" charset="-120"/>
               </a:rPr>
@@ -13468,9 +13350,9 @@
             <a:r>
               <a:rPr lang="en-US" sz="1400" b="1" dirty="0">
                 <a:solidFill>
-                  <a:srgbClr val="F96167"/>
-                </a:solidFill>
-                <a:latin typeface="Microsoft JhengHei" pitchFamily="34" charset="0"/>
+                  <a:srgbClr val="157554"/>
+                </a:solidFill>
+                <a:latin typeface="STHeiti" pitchFamily="34" charset="0"/>
                 <a:ea typeface="Microsoft JhengHei" pitchFamily="34" charset="-122"/>
                 <a:cs typeface="Microsoft JhengHei" pitchFamily="34" charset="-120"/>
               </a:rPr>
@@ -13497,7 +13379,7 @@
             </a:avLst>
           </a:prstGeom>
           <a:solidFill>
-            <a:srgbClr val="10131A"/>
+            <a:srgbClr val="111B30"/>
           </a:solidFill>
           <a:ln/>
         </p:spPr>
@@ -13533,9 +13415,9 @@
             <a:r>
               <a:rPr lang="en-US" sz="1350" b="1" dirty="0">
                 <a:solidFill>
-                  <a:srgbClr val="CFD4DF"/>
-                </a:solidFill>
-                <a:latin typeface="Microsoft JhengHei" pitchFamily="34" charset="0"/>
+                  <a:srgbClr val="C9D0C8"/>
+                </a:solidFill>
+                <a:latin typeface="STHeiti" pitchFamily="34" charset="0"/>
                 <a:ea typeface="Microsoft JhengHei" pitchFamily="34" charset="-122"/>
                 <a:cs typeface="Microsoft JhengHei" pitchFamily="34" charset="-120"/>
               </a:rPr>
@@ -13572,9 +13454,9 @@
             <a:r>
               <a:rPr lang="en-US" sz="1350" b="1" dirty="0">
                 <a:solidFill>
-                  <a:srgbClr val="CFD4DF"/>
-                </a:solidFill>
-                <a:latin typeface="Microsoft JhengHei" pitchFamily="34" charset="0"/>
+                  <a:srgbClr val="C9D0C8"/>
+                </a:solidFill>
+                <a:latin typeface="STHeiti" pitchFamily="34" charset="0"/>
                 <a:ea typeface="Microsoft JhengHei" pitchFamily="34" charset="-122"/>
                 <a:cs typeface="Microsoft JhengHei" pitchFamily="34" charset="-120"/>
               </a:rPr>
@@ -13611,9 +13493,9 @@
             <a:r>
               <a:rPr lang="en-US" sz="1100" dirty="0">
                 <a:solidFill>
-                  <a:srgbClr val="A8AEBC"/>
-                </a:solidFill>
-                <a:latin typeface="Arial" pitchFamily="34" charset="0"/>
+                  <a:srgbClr val="9DA89F"/>
+                </a:solidFill>
+                <a:latin typeface="STHeiti" pitchFamily="34" charset="0"/>
                 <a:ea typeface="Arial" pitchFamily="34" charset="-122"/>
                 <a:cs typeface="Arial" pitchFamily="34" charset="-120"/>
               </a:rPr>
@@ -13637,7 +13519,7 @@
     <p:bg>
       <p:bgPr>
         <a:solidFill>
-          <a:srgbClr val="FFFFFF"/>
+          <a:srgbClr val="F0EEE6"/>
         </a:solidFill>
         <a:effectLst/>
       </p:bgPr>
@@ -13671,7 +13553,7 @@
             <a:avLst/>
           </a:prstGeom>
           <a:solidFill>
-            <a:srgbClr val="F96167"/>
+            <a:srgbClr val="157554"/>
           </a:solidFill>
           <a:ln/>
         </p:spPr>
@@ -13707,9 +13589,9 @@
             <a:r>
               <a:rPr lang="en-US" sz="1200" b="1" kern="0" spc="200" dirty="0">
                 <a:solidFill>
-                  <a:srgbClr val="6E7687"/>
-                </a:solidFill>
-                <a:latin typeface="Arial" pitchFamily="34" charset="0"/>
+                  <a:srgbClr val="68645C"/>
+                </a:solidFill>
+                <a:latin typeface="STHeiti" pitchFamily="34" charset="0"/>
                 <a:ea typeface="Arial" pitchFamily="34" charset="-122"/>
                 <a:cs typeface="Arial" pitchFamily="34" charset="-120"/>
               </a:rPr>
@@ -13740,21 +13622,15 @@
           <a:bodyPr wrap="square" lIns="0" tIns="0" rIns="0" bIns="0" rtlCol="0" anchor="ctr"/>
           <a:lstStyle/>
           <a:p>
-            <a:pPr marL="0" indent="0">
-              <a:buNone/>
-            </a:pPr>
-            <a:r>
-              <a:rPr lang="en-US" sz="3400" b="1" dirty="0">
-                <a:solidFill>
-                  <a:srgbClr val="10131A"/>
-                </a:solidFill>
-                <a:latin typeface="Microsoft JhengHei" pitchFamily="34" charset="0"/>
-                <a:ea typeface="Microsoft JhengHei" pitchFamily="34" charset="-122"/>
-                <a:cs typeface="Microsoft JhengHei" pitchFamily="34" charset="-120"/>
-              </a:rPr>
-              <a:t>三種部署,三句不同的隱私承諾</a:t>
-            </a:r>
-            <a:endParaRPr lang="en-US" sz="3400" dirty="0"/>
+            <a:r>
+              <a:rPr>
+                <a:solidFill>
+                  <a:srgbClr val="1F1E1D"/>
+                </a:solidFill>
+                <a:latin typeface="STHeiti"/>
+              </a:rPr>
+              <a:t>同一顆 engine，三種部署形態</a:t>
+            </a:r>
           </a:p>
         </p:txBody>
       </p:sp>
@@ -13788,9 +13664,9 @@
             <a:r>
               <a:rPr lang="en-US" sz="2000" dirty="0">
                 <a:solidFill>
-                  <a:srgbClr val="353A46"/>
-                </a:solidFill>
-                <a:latin typeface="Microsoft JhengHei" pitchFamily="34" charset="0"/>
+                  <a:srgbClr val="1F1E1D"/>
+                </a:solidFill>
+                <a:latin typeface="STHeiti" pitchFamily="34" charset="0"/>
                 <a:ea typeface="Microsoft JhengHei" pitchFamily="34" charset="-122"/>
                 <a:cs typeface="Microsoft JhengHei" pitchFamily="34" charset="-120"/>
               </a:rPr>
@@ -13817,7 +13693,7 @@
             </a:avLst>
           </a:prstGeom>
           <a:solidFill>
-            <a:srgbClr val="F3F4F7"/>
+            <a:srgbClr val="E9E3D6"/>
           </a:solidFill>
           <a:ln/>
         </p:spPr>
@@ -13841,7 +13717,7 @@
             <a:avLst/>
           </a:prstGeom>
           <a:solidFill>
-            <a:srgbClr val="1FB6A6"/>
+            <a:srgbClr val="157554"/>
           </a:solidFill>
           <a:ln/>
         </p:spPr>
@@ -13877,9 +13753,9 @@
             <a:r>
               <a:rPr lang="en-US" sz="1600" b="1" dirty="0">
                 <a:solidFill>
-                  <a:srgbClr val="10131A"/>
-                </a:solidFill>
-                <a:latin typeface="Arial" pitchFamily="34" charset="0"/>
+                  <a:srgbClr val="1F1E1D"/>
+                </a:solidFill>
+                <a:latin typeface="STHeiti" pitchFamily="34" charset="0"/>
                 <a:ea typeface="Arial" pitchFamily="34" charset="-122"/>
                 <a:cs typeface="Arial" pitchFamily="34" charset="-120"/>
               </a:rPr>
@@ -13916,9 +13792,9 @@
             <a:r>
               <a:rPr lang="en-US" sz="1300" dirty="0">
                 <a:solidFill>
-                  <a:srgbClr val="6E7687"/>
-                </a:solidFill>
-                <a:latin typeface="Microsoft JhengHei" pitchFamily="34" charset="0"/>
+                  <a:srgbClr val="68645C"/>
+                </a:solidFill>
+                <a:latin typeface="STHeiti" pitchFamily="34" charset="0"/>
                 <a:ea typeface="Microsoft JhengHei" pitchFamily="34" charset="-122"/>
                 <a:cs typeface="Microsoft JhengHei" pitchFamily="34" charset="-120"/>
               </a:rPr>
@@ -13945,7 +13821,7 @@
             </a:avLst>
           </a:prstGeom>
           <a:solidFill>
-            <a:srgbClr val="F3F4F7"/>
+            <a:srgbClr val="E9E3D6"/>
           </a:solidFill>
           <a:ln/>
         </p:spPr>
@@ -13969,7 +13845,7 @@
             <a:avLst/>
           </a:prstGeom>
           <a:solidFill>
-            <a:srgbClr val="10131A"/>
+            <a:srgbClr val="111B30"/>
           </a:solidFill>
           <a:ln/>
         </p:spPr>
@@ -14005,9 +13881,9 @@
             <a:r>
               <a:rPr lang="en-US" sz="1600" b="1" dirty="0">
                 <a:solidFill>
-                  <a:srgbClr val="10131A"/>
-                </a:solidFill>
-                <a:latin typeface="Arial" pitchFamily="34" charset="0"/>
+                  <a:srgbClr val="1F1E1D"/>
+                </a:solidFill>
+                <a:latin typeface="STHeiti" pitchFamily="34" charset="0"/>
                 <a:ea typeface="Arial" pitchFamily="34" charset="-122"/>
                 <a:cs typeface="Arial" pitchFamily="34" charset="-120"/>
               </a:rPr>
@@ -14044,9 +13920,9 @@
             <a:r>
               <a:rPr lang="en-US" sz="1300" dirty="0">
                 <a:solidFill>
-                  <a:srgbClr val="6E7687"/>
-                </a:solidFill>
-                <a:latin typeface="Microsoft JhengHei" pitchFamily="34" charset="0"/>
+                  <a:srgbClr val="68645C"/>
+                </a:solidFill>
+                <a:latin typeface="STHeiti" pitchFamily="34" charset="0"/>
                 <a:ea typeface="Microsoft JhengHei" pitchFamily="34" charset="-122"/>
                 <a:cs typeface="Microsoft JhengHei" pitchFamily="34" charset="-120"/>
               </a:rPr>
@@ -14073,7 +13949,7 @@
             </a:avLst>
           </a:prstGeom>
           <a:solidFill>
-            <a:srgbClr val="F3F4F7"/>
+            <a:srgbClr val="E9E3D6"/>
           </a:solidFill>
           <a:ln/>
         </p:spPr>
@@ -14097,7 +13973,7 @@
             <a:avLst/>
           </a:prstGeom>
           <a:solidFill>
-            <a:srgbClr val="4A5568"/>
+            <a:srgbClr val="34445E"/>
           </a:solidFill>
           <a:ln/>
         </p:spPr>
@@ -14133,9 +14009,9 @@
             <a:r>
               <a:rPr lang="en-US" sz="1600" b="1" dirty="0">
                 <a:solidFill>
-                  <a:srgbClr val="10131A"/>
-                </a:solidFill>
-                <a:latin typeface="Arial" pitchFamily="34" charset="0"/>
+                  <a:srgbClr val="1F1E1D"/>
+                </a:solidFill>
+                <a:latin typeface="STHeiti" pitchFamily="34" charset="0"/>
                 <a:ea typeface="Arial" pitchFamily="34" charset="-122"/>
                 <a:cs typeface="Arial" pitchFamily="34" charset="-120"/>
               </a:rPr>
@@ -14172,9 +14048,9 @@
             <a:r>
               <a:rPr lang="en-US" sz="1300" dirty="0">
                 <a:solidFill>
-                  <a:srgbClr val="6E7687"/>
-                </a:solidFill>
-                <a:latin typeface="Microsoft JhengHei" pitchFamily="34" charset="0"/>
+                  <a:srgbClr val="68645C"/>
+                </a:solidFill>
+                <a:latin typeface="STHeiti" pitchFamily="34" charset="0"/>
                 <a:ea typeface="Microsoft JhengHei" pitchFamily="34" charset="-122"/>
                 <a:cs typeface="Microsoft JhengHei" pitchFamily="34" charset="-120"/>
               </a:rPr>
@@ -14201,7 +14077,7 @@
             </a:avLst>
           </a:prstGeom>
           <a:solidFill>
-            <a:srgbClr val="F3F4F7"/>
+            <a:srgbClr val="E9E3D6"/>
           </a:solidFill>
           <a:ln/>
         </p:spPr>
@@ -14225,7 +14101,7 @@
             <a:avLst/>
           </a:prstGeom>
           <a:solidFill>
-            <a:srgbClr val="F96167"/>
+            <a:srgbClr val="157554"/>
           </a:solidFill>
           <a:ln/>
         </p:spPr>
@@ -14261,9 +14137,9 @@
             <a:r>
               <a:rPr lang="en-US" sz="1600" b="1" dirty="0">
                 <a:solidFill>
-                  <a:srgbClr val="10131A"/>
-                </a:solidFill>
-                <a:latin typeface="Arial" pitchFamily="34" charset="0"/>
+                  <a:srgbClr val="1F1E1D"/>
+                </a:solidFill>
+                <a:latin typeface="STHeiti" pitchFamily="34" charset="0"/>
                 <a:ea typeface="Arial" pitchFamily="34" charset="-122"/>
                 <a:cs typeface="Arial" pitchFamily="34" charset="-120"/>
               </a:rPr>
@@ -14300,9 +14176,9 @@
             <a:r>
               <a:rPr lang="en-US" sz="1300" dirty="0">
                 <a:solidFill>
-                  <a:srgbClr val="6E7687"/>
-                </a:solidFill>
-                <a:latin typeface="Microsoft JhengHei" pitchFamily="34" charset="0"/>
+                  <a:srgbClr val="68645C"/>
+                </a:solidFill>
+                <a:latin typeface="STHeiti" pitchFamily="34" charset="0"/>
                 <a:ea typeface="Microsoft JhengHei" pitchFamily="34" charset="-122"/>
                 <a:cs typeface="Microsoft JhengHei" pitchFamily="34" charset="-120"/>
               </a:rPr>
@@ -14339,9 +14215,9 @@
             <a:r>
               <a:rPr lang="en-US" sz="1100" dirty="0">
                 <a:solidFill>
-                  <a:srgbClr val="A8AEBC"/>
-                </a:solidFill>
-                <a:latin typeface="Arial" pitchFamily="34" charset="0"/>
+                  <a:srgbClr val="9DA89F"/>
+                </a:solidFill>
+                <a:latin typeface="STHeiti" pitchFamily="34" charset="0"/>
                 <a:ea typeface="Arial" pitchFamily="34" charset="-122"/>
                 <a:cs typeface="Arial" pitchFamily="34" charset="-120"/>
               </a:rPr>
@@ -14365,7 +14241,7 @@
     <p:bg>
       <p:bgPr>
         <a:solidFill>
-          <a:srgbClr val="FFFFFF"/>
+          <a:srgbClr val="F0EEE6"/>
         </a:solidFill>
         <a:effectLst/>
       </p:bgPr>
@@ -14399,7 +14275,7 @@
             <a:avLst/>
           </a:prstGeom>
           <a:solidFill>
-            <a:srgbClr val="F96167"/>
+            <a:srgbClr val="157554"/>
           </a:solidFill>
           <a:ln/>
         </p:spPr>
@@ -14435,9 +14311,9 @@
             <a:r>
               <a:rPr lang="en-US" sz="1200" b="1" kern="0" spc="200" dirty="0">
                 <a:solidFill>
-                  <a:srgbClr val="6E7687"/>
-                </a:solidFill>
-                <a:latin typeface="Arial" pitchFamily="34" charset="0"/>
+                  <a:srgbClr val="68645C"/>
+                </a:solidFill>
+                <a:latin typeface="STHeiti" pitchFamily="34" charset="0"/>
                 <a:ea typeface="Arial" pitchFamily="34" charset="-122"/>
                 <a:cs typeface="Arial" pitchFamily="34" charset="-120"/>
               </a:rPr>
@@ -14468,21 +14344,15 @@
           <a:bodyPr wrap="square" lIns="0" tIns="0" rIns="0" bIns="0" rtlCol="0" anchor="ctr"/>
           <a:lstStyle/>
           <a:p>
-            <a:pPr marL="0" indent="0">
-              <a:buNone/>
-            </a:pPr>
-            <a:r>
-              <a:rPr lang="en-US" sz="3400" b="1" dirty="0">
-                <a:solidFill>
-                  <a:srgbClr val="10131A"/>
-                </a:solidFill>
-                <a:latin typeface="Microsoft JhengHei" pitchFamily="34" charset="0"/>
-                <a:ea typeface="Microsoft JhengHei" pitchFamily="34" charset="-122"/>
-                <a:cs typeface="Microsoft JhengHei" pitchFamily="34" charset="-120"/>
-              </a:rPr>
-              <a:t>六個使用者真的會問的問題</a:t>
-            </a:r>
-            <a:endParaRPr lang="en-US" sz="3400" dirty="0"/>
+            <a:r>
+              <a:rPr>
+                <a:solidFill>
+                  <a:srgbClr val="1F1E1D"/>
+                </a:solidFill>
+                <a:latin typeface="STHeiti"/>
+              </a:rPr>
+              <a:t>六種使用者真的會問的問題</a:t>
+            </a:r>
           </a:p>
         </p:txBody>
       </p:sp>
@@ -14516,9 +14386,9 @@
             <a:r>
               <a:rPr lang="en-US" sz="2000" dirty="0">
                 <a:solidFill>
-                  <a:srgbClr val="353A46"/>
-                </a:solidFill>
-                <a:latin typeface="Microsoft JhengHei" pitchFamily="34" charset="0"/>
+                  <a:srgbClr val="1F1E1D"/>
+                </a:solidFill>
+                <a:latin typeface="STHeiti" pitchFamily="34" charset="0"/>
                 <a:ea typeface="Microsoft JhengHei" pitchFamily="34" charset="-122"/>
                 <a:cs typeface="Microsoft JhengHei" pitchFamily="34" charset="-120"/>
               </a:rPr>
@@ -14545,7 +14415,7 @@
             </a:avLst>
           </a:prstGeom>
           <a:solidFill>
-            <a:srgbClr val="F3F4F7"/>
+            <a:srgbClr val="E9E3D6"/>
           </a:solidFill>
           <a:ln/>
         </p:spPr>
@@ -14569,7 +14439,7 @@
             <a:avLst/>
           </a:prstGeom>
           <a:solidFill>
-            <a:srgbClr val="F96167"/>
+            <a:srgbClr val="157554"/>
           </a:solidFill>
           <a:ln/>
         </p:spPr>
@@ -14605,9 +14475,9 @@
             <a:r>
               <a:rPr lang="en-US" sz="1400" b="1" dirty="0">
                 <a:solidFill>
-                  <a:srgbClr val="FFFFFF"/>
-                </a:solidFill>
-                <a:latin typeface="Arial" pitchFamily="34" charset="0"/>
+                  <a:srgbClr val="1F1E1D"/>
+                </a:solidFill>
+                <a:latin typeface="STHeiti" pitchFamily="34" charset="0"/>
                 <a:ea typeface="Arial" pitchFamily="34" charset="-122"/>
                 <a:cs typeface="Arial" pitchFamily="34" charset="-120"/>
               </a:rPr>
@@ -14647,9 +14517,9 @@
             <a:r>
               <a:rPr lang="en-US" sz="1300" dirty="0">
                 <a:solidFill>
-                  <a:srgbClr val="2C313D"/>
-                </a:solidFill>
-                <a:latin typeface="Microsoft JhengHei" pitchFamily="34" charset="0"/>
+                  <a:srgbClr val="1F1E1D"/>
+                </a:solidFill>
+                <a:latin typeface="STHeiti" pitchFamily="34" charset="0"/>
                 <a:ea typeface="Microsoft JhengHei" pitchFamily="34" charset="-122"/>
                 <a:cs typeface="Microsoft JhengHei" pitchFamily="34" charset="-120"/>
               </a:rPr>
@@ -14676,7 +14546,7 @@
             </a:avLst>
           </a:prstGeom>
           <a:solidFill>
-            <a:srgbClr val="F3F4F7"/>
+            <a:srgbClr val="E9E3D6"/>
           </a:solidFill>
           <a:ln/>
         </p:spPr>
@@ -14700,7 +14570,7 @@
             <a:avLst/>
           </a:prstGeom>
           <a:solidFill>
-            <a:srgbClr val="F96167"/>
+            <a:srgbClr val="157554"/>
           </a:solidFill>
           <a:ln/>
         </p:spPr>
@@ -14736,9 +14606,9 @@
             <a:r>
               <a:rPr lang="en-US" sz="1400" b="1" dirty="0">
                 <a:solidFill>
-                  <a:srgbClr val="FFFFFF"/>
-                </a:solidFill>
-                <a:latin typeface="Arial" pitchFamily="34" charset="0"/>
+                  <a:srgbClr val="1F1E1D"/>
+                </a:solidFill>
+                <a:latin typeface="STHeiti" pitchFamily="34" charset="0"/>
                 <a:ea typeface="Arial" pitchFamily="34" charset="-122"/>
                 <a:cs typeface="Arial" pitchFamily="34" charset="-120"/>
               </a:rPr>
@@ -14778,9 +14648,9 @@
             <a:r>
               <a:rPr lang="en-US" sz="1300" dirty="0">
                 <a:solidFill>
-                  <a:srgbClr val="2C313D"/>
-                </a:solidFill>
-                <a:latin typeface="Microsoft JhengHei" pitchFamily="34" charset="0"/>
+                  <a:srgbClr val="1F1E1D"/>
+                </a:solidFill>
+                <a:latin typeface="STHeiti" pitchFamily="34" charset="0"/>
                 <a:ea typeface="Microsoft JhengHei" pitchFamily="34" charset="-122"/>
                 <a:cs typeface="Microsoft JhengHei" pitchFamily="34" charset="-120"/>
               </a:rPr>
@@ -14807,7 +14677,7 @@
             </a:avLst>
           </a:prstGeom>
           <a:solidFill>
-            <a:srgbClr val="F3F4F7"/>
+            <a:srgbClr val="E9E3D6"/>
           </a:solidFill>
           <a:ln/>
         </p:spPr>
@@ -14831,7 +14701,7 @@
             <a:avLst/>
           </a:prstGeom>
           <a:solidFill>
-            <a:srgbClr val="F96167"/>
+            <a:srgbClr val="157554"/>
           </a:solidFill>
           <a:ln/>
         </p:spPr>
@@ -14867,9 +14737,9 @@
             <a:r>
               <a:rPr lang="en-US" sz="1400" b="1" dirty="0">
                 <a:solidFill>
-                  <a:srgbClr val="FFFFFF"/>
-                </a:solidFill>
-                <a:latin typeface="Arial" pitchFamily="34" charset="0"/>
+                  <a:srgbClr val="1F1E1D"/>
+                </a:solidFill>
+                <a:latin typeface="STHeiti" pitchFamily="34" charset="0"/>
                 <a:ea typeface="Arial" pitchFamily="34" charset="-122"/>
                 <a:cs typeface="Arial" pitchFamily="34" charset="-120"/>
               </a:rPr>
@@ -14909,9 +14779,9 @@
             <a:r>
               <a:rPr lang="en-US" sz="1300" dirty="0">
                 <a:solidFill>
-                  <a:srgbClr val="2C313D"/>
-                </a:solidFill>
-                <a:latin typeface="Microsoft JhengHei" pitchFamily="34" charset="0"/>
+                  <a:srgbClr val="1F1E1D"/>
+                </a:solidFill>
+                <a:latin typeface="STHeiti" pitchFamily="34" charset="0"/>
                 <a:ea typeface="Microsoft JhengHei" pitchFamily="34" charset="-122"/>
                 <a:cs typeface="Microsoft JhengHei" pitchFamily="34" charset="-120"/>
               </a:rPr>
@@ -14938,7 +14808,7 @@
             </a:avLst>
           </a:prstGeom>
           <a:solidFill>
-            <a:srgbClr val="F3F4F7"/>
+            <a:srgbClr val="E9E3D6"/>
           </a:solidFill>
           <a:ln/>
         </p:spPr>
@@ -14962,7 +14832,7 @@
             <a:avLst/>
           </a:prstGeom>
           <a:solidFill>
-            <a:srgbClr val="F96167"/>
+            <a:srgbClr val="157554"/>
           </a:solidFill>
           <a:ln/>
         </p:spPr>
@@ -14998,9 +14868,9 @@
             <a:r>
               <a:rPr lang="en-US" sz="1400" b="1" dirty="0">
                 <a:solidFill>
-                  <a:srgbClr val="FFFFFF"/>
-                </a:solidFill>
-                <a:latin typeface="Arial" pitchFamily="34" charset="0"/>
+                  <a:srgbClr val="1F1E1D"/>
+                </a:solidFill>
+                <a:latin typeface="STHeiti" pitchFamily="34" charset="0"/>
                 <a:ea typeface="Arial" pitchFamily="34" charset="-122"/>
                 <a:cs typeface="Arial" pitchFamily="34" charset="-120"/>
               </a:rPr>
@@ -15040,9 +14910,9 @@
             <a:r>
               <a:rPr lang="en-US" sz="1300" dirty="0">
                 <a:solidFill>
-                  <a:srgbClr val="2C313D"/>
-                </a:solidFill>
-                <a:latin typeface="Microsoft JhengHei" pitchFamily="34" charset="0"/>
+                  <a:srgbClr val="1F1E1D"/>
+                </a:solidFill>
+                <a:latin typeface="STHeiti" pitchFamily="34" charset="0"/>
                 <a:ea typeface="Microsoft JhengHei" pitchFamily="34" charset="-122"/>
                 <a:cs typeface="Microsoft JhengHei" pitchFamily="34" charset="-120"/>
               </a:rPr>
@@ -15069,7 +14939,7 @@
             </a:avLst>
           </a:prstGeom>
           <a:solidFill>
-            <a:srgbClr val="F3F4F7"/>
+            <a:srgbClr val="E9E3D6"/>
           </a:solidFill>
           <a:ln/>
         </p:spPr>
@@ -15093,7 +14963,7 @@
             <a:avLst/>
           </a:prstGeom>
           <a:solidFill>
-            <a:srgbClr val="F96167"/>
+            <a:srgbClr val="157554"/>
           </a:solidFill>
           <a:ln/>
         </p:spPr>
@@ -15129,9 +14999,9 @@
             <a:r>
               <a:rPr lang="en-US" sz="1400" b="1" dirty="0">
                 <a:solidFill>
-                  <a:srgbClr val="FFFFFF"/>
-                </a:solidFill>
-                <a:latin typeface="Arial" pitchFamily="34" charset="0"/>
+                  <a:srgbClr val="1F1E1D"/>
+                </a:solidFill>
+                <a:latin typeface="STHeiti" pitchFamily="34" charset="0"/>
                 <a:ea typeface="Arial" pitchFamily="34" charset="-122"/>
                 <a:cs typeface="Arial" pitchFamily="34" charset="-120"/>
               </a:rPr>
@@ -15171,9 +15041,9 @@
             <a:r>
               <a:rPr lang="en-US" sz="1300" dirty="0">
                 <a:solidFill>
-                  <a:srgbClr val="2C313D"/>
-                </a:solidFill>
-                <a:latin typeface="Microsoft JhengHei" pitchFamily="34" charset="0"/>
+                  <a:srgbClr val="1F1E1D"/>
+                </a:solidFill>
+                <a:latin typeface="STHeiti" pitchFamily="34" charset="0"/>
                 <a:ea typeface="Microsoft JhengHei" pitchFamily="34" charset="-122"/>
                 <a:cs typeface="Microsoft JhengHei" pitchFamily="34" charset="-120"/>
               </a:rPr>
@@ -15200,7 +15070,7 @@
             </a:avLst>
           </a:prstGeom>
           <a:solidFill>
-            <a:srgbClr val="F3F4F7"/>
+            <a:srgbClr val="E9E3D6"/>
           </a:solidFill>
           <a:ln/>
         </p:spPr>
@@ -15224,7 +15094,7 @@
             <a:avLst/>
           </a:prstGeom>
           <a:solidFill>
-            <a:srgbClr val="F96167"/>
+            <a:srgbClr val="157554"/>
           </a:solidFill>
           <a:ln/>
         </p:spPr>
@@ -15260,9 +15130,9 @@
             <a:r>
               <a:rPr lang="en-US" sz="1400" b="1" dirty="0">
                 <a:solidFill>
-                  <a:srgbClr val="FFFFFF"/>
-                </a:solidFill>
-                <a:latin typeface="Arial" pitchFamily="34" charset="0"/>
+                  <a:srgbClr val="1F1E1D"/>
+                </a:solidFill>
+                <a:latin typeface="STHeiti" pitchFamily="34" charset="0"/>
                 <a:ea typeface="Arial" pitchFamily="34" charset="-122"/>
                 <a:cs typeface="Arial" pitchFamily="34" charset="-120"/>
               </a:rPr>
@@ -15302,9 +15172,9 @@
             <a:r>
               <a:rPr lang="en-US" sz="1300" dirty="0">
                 <a:solidFill>
-                  <a:srgbClr val="2C313D"/>
-                </a:solidFill>
-                <a:latin typeface="Microsoft JhengHei" pitchFamily="34" charset="0"/>
+                  <a:srgbClr val="1F1E1D"/>
+                </a:solidFill>
+                <a:latin typeface="STHeiti" pitchFamily="34" charset="0"/>
                 <a:ea typeface="Microsoft JhengHei" pitchFamily="34" charset="-122"/>
                 <a:cs typeface="Microsoft JhengHei" pitchFamily="34" charset="-120"/>
               </a:rPr>
@@ -15341,9 +15211,9 @@
             <a:r>
               <a:rPr lang="en-US" sz="1100" dirty="0">
                 <a:solidFill>
-                  <a:srgbClr val="A8AEBC"/>
-                </a:solidFill>
-                <a:latin typeface="Arial" pitchFamily="34" charset="0"/>
+                  <a:srgbClr val="9DA89F"/>
+                </a:solidFill>
+                <a:latin typeface="STHeiti" pitchFamily="34" charset="0"/>
                 <a:ea typeface="Arial" pitchFamily="34" charset="-122"/>
                 <a:cs typeface="Arial" pitchFamily="34" charset="-120"/>
               </a:rPr>
@@ -15367,7 +15237,7 @@
     <p:bg>
       <p:bgPr>
         <a:solidFill>
-          <a:srgbClr val="FFFFFF"/>
+          <a:srgbClr val="F0EEE6"/>
         </a:solidFill>
         <a:effectLst/>
       </p:bgPr>
@@ -15401,7 +15271,7 @@
             <a:avLst/>
           </a:prstGeom>
           <a:solidFill>
-            <a:srgbClr val="F96167"/>
+            <a:srgbClr val="157554"/>
           </a:solidFill>
           <a:ln/>
         </p:spPr>
@@ -15437,9 +15307,9 @@
             <a:r>
               <a:rPr lang="en-US" sz="1200" b="1" kern="0" spc="200" dirty="0">
                 <a:solidFill>
-                  <a:srgbClr val="6E7687"/>
-                </a:solidFill>
-                <a:latin typeface="Arial" pitchFamily="34" charset="0"/>
+                  <a:srgbClr val="68645C"/>
+                </a:solidFill>
+                <a:latin typeface="STHeiti" pitchFamily="34" charset="0"/>
                 <a:ea typeface="Arial" pitchFamily="34" charset="-122"/>
                 <a:cs typeface="Arial" pitchFamily="34" charset="-120"/>
               </a:rPr>
@@ -15466,7 +15336,7 @@
             </a:avLst>
           </a:prstGeom>
           <a:solidFill>
-            <a:srgbClr val="10131A"/>
+            <a:srgbClr val="111B30"/>
           </a:solidFill>
           <a:ln/>
         </p:spPr>
@@ -15502,9 +15372,9 @@
             <a:r>
               <a:rPr lang="en-US" sz="2400" b="1" dirty="0">
                 <a:solidFill>
-                  <a:srgbClr val="FFFFFF"/>
-                </a:solidFill>
-                <a:latin typeface="Microsoft JhengHei" pitchFamily="34" charset="0"/>
+                  <a:srgbClr val="1F1E1D"/>
+                </a:solidFill>
+                <a:latin typeface="STHeiti" pitchFamily="34" charset="0"/>
                 <a:ea typeface="Microsoft JhengHei" pitchFamily="34" charset="-122"/>
                 <a:cs typeface="Microsoft JhengHei" pitchFamily="34" charset="-120"/>
               </a:rPr>
@@ -15541,9 +15411,9 @@
             <a:r>
               <a:rPr lang="en-US" sz="1400" b="1" dirty="0">
                 <a:solidFill>
-                  <a:srgbClr val="6E7687"/>
-                </a:solidFill>
-                <a:latin typeface="Microsoft JhengHei" pitchFamily="34" charset="0"/>
+                  <a:srgbClr val="68645C"/>
+                </a:solidFill>
+                <a:latin typeface="STHeiti" pitchFamily="34" charset="0"/>
                 <a:ea typeface="Microsoft JhengHei" pitchFamily="34" charset="-122"/>
                 <a:cs typeface="Microsoft JhengHei" pitchFamily="34" charset="-120"/>
               </a:rPr>
@@ -15570,7 +15440,7 @@
             </a:avLst>
           </a:prstGeom>
           <a:solidFill>
-            <a:srgbClr val="F3F4F7"/>
+            <a:srgbClr val="E9E3D6"/>
           </a:solidFill>
           <a:ln/>
         </p:spPr>
@@ -15594,7 +15464,7 @@
             <a:avLst/>
           </a:prstGeom>
           <a:solidFill>
-            <a:srgbClr val="1FB6A6"/>
+            <a:srgbClr val="157554"/>
           </a:solidFill>
           <a:ln/>
         </p:spPr>
@@ -15630,9 +15500,9 @@
             <a:r>
               <a:rPr lang="en-US" sz="1350" dirty="0">
                 <a:solidFill>
-                  <a:srgbClr val="2C313D"/>
-                </a:solidFill>
-                <a:latin typeface="Microsoft JhengHei" pitchFamily="34" charset="0"/>
+                  <a:srgbClr val="1F1E1D"/>
+                </a:solidFill>
+                <a:latin typeface="STHeiti" pitchFamily="34" charset="0"/>
                 <a:ea typeface="Microsoft JhengHei" pitchFamily="34" charset="-122"/>
                 <a:cs typeface="Microsoft JhengHei" pitchFamily="34" charset="-120"/>
               </a:rPr>
@@ -15659,7 +15529,7 @@
             </a:avLst>
           </a:prstGeom>
           <a:solidFill>
-            <a:srgbClr val="F3F4F7"/>
+            <a:srgbClr val="E9E3D6"/>
           </a:solidFill>
           <a:ln/>
         </p:spPr>
@@ -15683,7 +15553,7 @@
             <a:avLst/>
           </a:prstGeom>
           <a:solidFill>
-            <a:srgbClr val="1FB6A6"/>
+            <a:srgbClr val="157554"/>
           </a:solidFill>
           <a:ln/>
         </p:spPr>
@@ -15719,9 +15589,9 @@
             <a:r>
               <a:rPr lang="en-US" sz="1350" dirty="0">
                 <a:solidFill>
-                  <a:srgbClr val="2C313D"/>
-                </a:solidFill>
-                <a:latin typeface="Microsoft JhengHei" pitchFamily="34" charset="0"/>
+                  <a:srgbClr val="1F1E1D"/>
+                </a:solidFill>
+                <a:latin typeface="STHeiti" pitchFamily="34" charset="0"/>
                 <a:ea typeface="Microsoft JhengHei" pitchFamily="34" charset="-122"/>
                 <a:cs typeface="Microsoft JhengHei" pitchFamily="34" charset="-120"/>
               </a:rPr>
@@ -15748,7 +15618,7 @@
             </a:avLst>
           </a:prstGeom>
           <a:solidFill>
-            <a:srgbClr val="F3F4F7"/>
+            <a:srgbClr val="E9E3D6"/>
           </a:solidFill>
           <a:ln/>
         </p:spPr>
@@ -15772,7 +15642,7 @@
             <a:avLst/>
           </a:prstGeom>
           <a:solidFill>
-            <a:srgbClr val="1FB6A6"/>
+            <a:srgbClr val="157554"/>
           </a:solidFill>
           <a:ln/>
         </p:spPr>
@@ -15808,9 +15678,9 @@
             <a:r>
               <a:rPr lang="en-US" sz="1350" dirty="0">
                 <a:solidFill>
-                  <a:srgbClr val="2C313D"/>
-                </a:solidFill>
-                <a:latin typeface="Microsoft JhengHei" pitchFamily="34" charset="0"/>
+                  <a:srgbClr val="1F1E1D"/>
+                </a:solidFill>
+                <a:latin typeface="STHeiti" pitchFamily="34" charset="0"/>
                 <a:ea typeface="Microsoft JhengHei" pitchFamily="34" charset="-122"/>
                 <a:cs typeface="Microsoft JhengHei" pitchFamily="34" charset="-120"/>
               </a:rPr>
@@ -15847,9 +15717,9 @@
             <a:r>
               <a:rPr lang="en-US" sz="1400" b="1" dirty="0">
                 <a:solidFill>
-                  <a:srgbClr val="F96167"/>
-                </a:solidFill>
-                <a:latin typeface="Microsoft JhengHei" pitchFamily="34" charset="0"/>
+                  <a:srgbClr val="157554"/>
+                </a:solidFill>
+                <a:latin typeface="STHeiti" pitchFamily="34" charset="0"/>
                 <a:ea typeface="Microsoft JhengHei" pitchFamily="34" charset="-122"/>
                 <a:cs typeface="Microsoft JhengHei" pitchFamily="34" charset="-120"/>
               </a:rPr>
@@ -15876,7 +15746,7 @@
             </a:avLst>
           </a:prstGeom>
           <a:solidFill>
-            <a:srgbClr val="10131A"/>
+            <a:srgbClr val="111B30"/>
           </a:solidFill>
           <a:ln/>
         </p:spPr>
@@ -15912,9 +15782,9 @@
             <a:r>
               <a:rPr lang="en-US" sz="1350" b="1" dirty="0">
                 <a:solidFill>
-                  <a:srgbClr val="CFD4DF"/>
-                </a:solidFill>
-                <a:latin typeface="Microsoft JhengHei" pitchFamily="34" charset="0"/>
+                  <a:srgbClr val="C9D0C8"/>
+                </a:solidFill>
+                <a:latin typeface="STHeiti" pitchFamily="34" charset="0"/>
                 <a:ea typeface="Microsoft JhengHei" pitchFamily="34" charset="-122"/>
                 <a:cs typeface="Microsoft JhengHei" pitchFamily="34" charset="-120"/>
               </a:rPr>
@@ -15951,9 +15821,9 @@
             <a:r>
               <a:rPr lang="en-US" sz="1350" b="1" dirty="0">
                 <a:solidFill>
-                  <a:srgbClr val="CFD4DF"/>
-                </a:solidFill>
-                <a:latin typeface="Microsoft JhengHei" pitchFamily="34" charset="0"/>
+                  <a:srgbClr val="C9D0C8"/>
+                </a:solidFill>
+                <a:latin typeface="STHeiti" pitchFamily="34" charset="0"/>
                 <a:ea typeface="Microsoft JhengHei" pitchFamily="34" charset="-122"/>
                 <a:cs typeface="Microsoft JhengHei" pitchFamily="34" charset="-120"/>
               </a:rPr>
@@ -15990,9 +15860,9 @@
             <a:r>
               <a:rPr lang="en-US" sz="1350" b="1" dirty="0">
                 <a:solidFill>
-                  <a:srgbClr val="CFD4DF"/>
-                </a:solidFill>
-                <a:latin typeface="Microsoft JhengHei" pitchFamily="34" charset="0"/>
+                  <a:srgbClr val="C9D0C8"/>
+                </a:solidFill>
+                <a:latin typeface="STHeiti" pitchFamily="34" charset="0"/>
                 <a:ea typeface="Microsoft JhengHei" pitchFamily="34" charset="-122"/>
                 <a:cs typeface="Microsoft JhengHei" pitchFamily="34" charset="-120"/>
               </a:rPr>
@@ -16029,9 +15899,9 @@
             <a:r>
               <a:rPr lang="en-US" sz="1100" dirty="0">
                 <a:solidFill>
-                  <a:srgbClr val="A8AEBC"/>
-                </a:solidFill>
-                <a:latin typeface="Arial" pitchFamily="34" charset="0"/>
+                  <a:srgbClr val="9DA89F"/>
+                </a:solidFill>
+                <a:latin typeface="STHeiti" pitchFamily="34" charset="0"/>
                 <a:ea typeface="Arial" pitchFamily="34" charset="-122"/>
                 <a:cs typeface="Arial" pitchFamily="34" charset="-120"/>
               </a:rPr>
@@ -16055,7 +15925,7 @@
     <p:bg>
       <p:bgPr>
         <a:solidFill>
-          <a:srgbClr val="FFFFFF"/>
+          <a:srgbClr val="F0EEE6"/>
         </a:solidFill>
         <a:effectLst/>
       </p:bgPr>
@@ -16089,7 +15959,7 @@
             <a:avLst/>
           </a:prstGeom>
           <a:solidFill>
-            <a:srgbClr val="F96167"/>
+            <a:srgbClr val="157554"/>
           </a:solidFill>
           <a:ln/>
         </p:spPr>
@@ -16125,9 +15995,9 @@
             <a:r>
               <a:rPr lang="en-US" sz="1200" b="1" kern="0" spc="200" dirty="0">
                 <a:solidFill>
-                  <a:srgbClr val="6E7687"/>
-                </a:solidFill>
-                <a:latin typeface="Arial" pitchFamily="34" charset="0"/>
+                  <a:srgbClr val="68645C"/>
+                </a:solidFill>
+                <a:latin typeface="STHeiti" pitchFamily="34" charset="0"/>
                 <a:ea typeface="Arial" pitchFamily="34" charset="-122"/>
                 <a:cs typeface="Arial" pitchFamily="34" charset="-120"/>
               </a:rPr>
@@ -16154,7 +16024,7 @@
             </a:avLst>
           </a:prstGeom>
           <a:solidFill>
-            <a:srgbClr val="10131A"/>
+            <a:srgbClr val="111B30"/>
           </a:solidFill>
           <a:ln/>
         </p:spPr>
@@ -16190,9 +16060,9 @@
             <a:r>
               <a:rPr lang="en-US" sz="2400" b="1" dirty="0">
                 <a:solidFill>
-                  <a:srgbClr val="FFFFFF"/>
-                </a:solidFill>
-                <a:latin typeface="Microsoft JhengHei" pitchFamily="34" charset="0"/>
+                  <a:srgbClr val="1F1E1D"/>
+                </a:solidFill>
+                <a:latin typeface="STHeiti" pitchFamily="34" charset="0"/>
                 <a:ea typeface="Microsoft JhengHei" pitchFamily="34" charset="-122"/>
                 <a:cs typeface="Microsoft JhengHei" pitchFamily="34" charset="-120"/>
               </a:rPr>
@@ -16229,9 +16099,9 @@
             <a:r>
               <a:rPr lang="en-US" sz="1400" b="1" dirty="0">
                 <a:solidFill>
-                  <a:srgbClr val="6E7687"/>
-                </a:solidFill>
-                <a:latin typeface="Microsoft JhengHei" pitchFamily="34" charset="0"/>
+                  <a:srgbClr val="68645C"/>
+                </a:solidFill>
+                <a:latin typeface="STHeiti" pitchFamily="34" charset="0"/>
                 <a:ea typeface="Microsoft JhengHei" pitchFamily="34" charset="-122"/>
                 <a:cs typeface="Microsoft JhengHei" pitchFamily="34" charset="-120"/>
               </a:rPr>
@@ -16258,7 +16128,7 @@
             </a:avLst>
           </a:prstGeom>
           <a:solidFill>
-            <a:srgbClr val="F3F4F7"/>
+            <a:srgbClr val="E9E3D6"/>
           </a:solidFill>
           <a:ln/>
         </p:spPr>
@@ -16282,7 +16152,7 @@
             <a:avLst/>
           </a:prstGeom>
           <a:solidFill>
-            <a:srgbClr val="1FB6A6"/>
+            <a:srgbClr val="157554"/>
           </a:solidFill>
           <a:ln/>
         </p:spPr>
@@ -16318,9 +16188,9 @@
             <a:r>
               <a:rPr lang="en-US" sz="1350" dirty="0">
                 <a:solidFill>
-                  <a:srgbClr val="2C313D"/>
-                </a:solidFill>
-                <a:latin typeface="Microsoft JhengHei" pitchFamily="34" charset="0"/>
+                  <a:srgbClr val="1F1E1D"/>
+                </a:solidFill>
+                <a:latin typeface="STHeiti" pitchFamily="34" charset="0"/>
                 <a:ea typeface="Microsoft JhengHei" pitchFamily="34" charset="-122"/>
                 <a:cs typeface="Microsoft JhengHei" pitchFamily="34" charset="-120"/>
               </a:rPr>
@@ -16347,7 +16217,7 @@
             </a:avLst>
           </a:prstGeom>
           <a:solidFill>
-            <a:srgbClr val="F3F4F7"/>
+            <a:srgbClr val="E9E3D6"/>
           </a:solidFill>
           <a:ln/>
         </p:spPr>
@@ -16371,7 +16241,7 @@
             <a:avLst/>
           </a:prstGeom>
           <a:solidFill>
-            <a:srgbClr val="1FB6A6"/>
+            <a:srgbClr val="157554"/>
           </a:solidFill>
           <a:ln/>
         </p:spPr>
@@ -16407,9 +16277,9 @@
             <a:r>
               <a:rPr lang="en-US" sz="1350" dirty="0">
                 <a:solidFill>
-                  <a:srgbClr val="2C313D"/>
-                </a:solidFill>
-                <a:latin typeface="Microsoft JhengHei" pitchFamily="34" charset="0"/>
+                  <a:srgbClr val="1F1E1D"/>
+                </a:solidFill>
+                <a:latin typeface="STHeiti" pitchFamily="34" charset="0"/>
                 <a:ea typeface="Microsoft JhengHei" pitchFamily="34" charset="-122"/>
                 <a:cs typeface="Microsoft JhengHei" pitchFamily="34" charset="-120"/>
               </a:rPr>
@@ -16436,7 +16306,7 @@
             </a:avLst>
           </a:prstGeom>
           <a:solidFill>
-            <a:srgbClr val="F3F4F7"/>
+            <a:srgbClr val="E9E3D6"/>
           </a:solidFill>
           <a:ln/>
         </p:spPr>
@@ -16460,7 +16330,7 @@
             <a:avLst/>
           </a:prstGeom>
           <a:solidFill>
-            <a:srgbClr val="1FB6A6"/>
+            <a:srgbClr val="157554"/>
           </a:solidFill>
           <a:ln/>
         </p:spPr>
@@ -16496,9 +16366,9 @@
             <a:r>
               <a:rPr lang="en-US" sz="1350" dirty="0">
                 <a:solidFill>
-                  <a:srgbClr val="2C313D"/>
-                </a:solidFill>
-                <a:latin typeface="Microsoft JhengHei" pitchFamily="34" charset="0"/>
+                  <a:srgbClr val="1F1E1D"/>
+                </a:solidFill>
+                <a:latin typeface="STHeiti" pitchFamily="34" charset="0"/>
                 <a:ea typeface="Microsoft JhengHei" pitchFamily="34" charset="-122"/>
                 <a:cs typeface="Microsoft JhengHei" pitchFamily="34" charset="-120"/>
               </a:rPr>
@@ -16535,9 +16405,9 @@
             <a:r>
               <a:rPr lang="en-US" sz="1400" b="1" dirty="0">
                 <a:solidFill>
-                  <a:srgbClr val="F96167"/>
-                </a:solidFill>
-                <a:latin typeface="Microsoft JhengHei" pitchFamily="34" charset="0"/>
+                  <a:srgbClr val="157554"/>
+                </a:solidFill>
+                <a:latin typeface="STHeiti" pitchFamily="34" charset="0"/>
                 <a:ea typeface="Microsoft JhengHei" pitchFamily="34" charset="-122"/>
                 <a:cs typeface="Microsoft JhengHei" pitchFamily="34" charset="-120"/>
               </a:rPr>
@@ -16564,7 +16434,7 @@
             </a:avLst>
           </a:prstGeom>
           <a:solidFill>
-            <a:srgbClr val="10131A"/>
+            <a:srgbClr val="111B30"/>
           </a:solidFill>
           <a:ln/>
         </p:spPr>
@@ -16600,9 +16470,9 @@
             <a:r>
               <a:rPr lang="en-US" sz="1350" b="1" dirty="0">
                 <a:solidFill>
-                  <a:srgbClr val="CFD4DF"/>
-                </a:solidFill>
-                <a:latin typeface="Microsoft JhengHei" pitchFamily="34" charset="0"/>
+                  <a:srgbClr val="C9D0C8"/>
+                </a:solidFill>
+                <a:latin typeface="STHeiti" pitchFamily="34" charset="0"/>
                 <a:ea typeface="Microsoft JhengHei" pitchFamily="34" charset="-122"/>
                 <a:cs typeface="Microsoft JhengHei" pitchFamily="34" charset="-120"/>
               </a:rPr>
@@ -16639,9 +16509,9 @@
             <a:r>
               <a:rPr lang="en-US" sz="1350" b="1" dirty="0">
                 <a:solidFill>
-                  <a:srgbClr val="CFD4DF"/>
-                </a:solidFill>
-                <a:latin typeface="Microsoft JhengHei" pitchFamily="34" charset="0"/>
+                  <a:srgbClr val="C9D0C8"/>
+                </a:solidFill>
+                <a:latin typeface="STHeiti" pitchFamily="34" charset="0"/>
                 <a:ea typeface="Microsoft JhengHei" pitchFamily="34" charset="-122"/>
                 <a:cs typeface="Microsoft JhengHei" pitchFamily="34" charset="-120"/>
               </a:rPr>
@@ -16678,9 +16548,9 @@
             <a:r>
               <a:rPr lang="en-US" sz="1350" b="1" dirty="0">
                 <a:solidFill>
-                  <a:srgbClr val="CFD4DF"/>
-                </a:solidFill>
-                <a:latin typeface="Microsoft JhengHei" pitchFamily="34" charset="0"/>
+                  <a:srgbClr val="C9D0C8"/>
+                </a:solidFill>
+                <a:latin typeface="STHeiti" pitchFamily="34" charset="0"/>
                 <a:ea typeface="Microsoft JhengHei" pitchFamily="34" charset="-122"/>
                 <a:cs typeface="Microsoft JhengHei" pitchFamily="34" charset="-120"/>
               </a:rPr>
@@ -16717,9 +16587,9 @@
             <a:r>
               <a:rPr lang="en-US" sz="1100" dirty="0">
                 <a:solidFill>
-                  <a:srgbClr val="A8AEBC"/>
-                </a:solidFill>
-                <a:latin typeface="Arial" pitchFamily="34" charset="0"/>
+                  <a:srgbClr val="9DA89F"/>
+                </a:solidFill>
+                <a:latin typeface="STHeiti" pitchFamily="34" charset="0"/>
                 <a:ea typeface="Arial" pitchFamily="34" charset="-122"/>
                 <a:cs typeface="Arial" pitchFamily="34" charset="-120"/>
               </a:rPr>
@@ -16743,7 +16613,7 @@
     <p:bg>
       <p:bgPr>
         <a:solidFill>
-          <a:srgbClr val="FFFFFF"/>
+          <a:srgbClr val="F0EEE6"/>
         </a:solidFill>
         <a:effectLst/>
       </p:bgPr>
@@ -16777,7 +16647,7 @@
             <a:avLst/>
           </a:prstGeom>
           <a:solidFill>
-            <a:srgbClr val="F96167"/>
+            <a:srgbClr val="157554"/>
           </a:solidFill>
           <a:ln/>
         </p:spPr>
@@ -16813,9 +16683,9 @@
             <a:r>
               <a:rPr lang="en-US" sz="1200" b="1" kern="0" spc="200" dirty="0">
                 <a:solidFill>
-                  <a:srgbClr val="6E7687"/>
-                </a:solidFill>
-                <a:latin typeface="Arial" pitchFamily="34" charset="0"/>
+                  <a:srgbClr val="68645C"/>
+                </a:solidFill>
+                <a:latin typeface="STHeiti" pitchFamily="34" charset="0"/>
                 <a:ea typeface="Arial" pitchFamily="34" charset="-122"/>
                 <a:cs typeface="Arial" pitchFamily="34" charset="-120"/>
               </a:rPr>
@@ -16842,7 +16712,7 @@
             </a:avLst>
           </a:prstGeom>
           <a:solidFill>
-            <a:srgbClr val="10131A"/>
+            <a:srgbClr val="111B30"/>
           </a:solidFill>
           <a:ln/>
         </p:spPr>
@@ -16878,9 +16748,9 @@
             <a:r>
               <a:rPr lang="en-US" sz="2400" b="1" dirty="0">
                 <a:solidFill>
-                  <a:srgbClr val="FFFFFF"/>
-                </a:solidFill>
-                <a:latin typeface="Microsoft JhengHei" pitchFamily="34" charset="0"/>
+                  <a:srgbClr val="1F1E1D"/>
+                </a:solidFill>
+                <a:latin typeface="STHeiti" pitchFamily="34" charset="0"/>
                 <a:ea typeface="Microsoft JhengHei" pitchFamily="34" charset="-122"/>
                 <a:cs typeface="Microsoft JhengHei" pitchFamily="34" charset="-120"/>
               </a:rPr>
@@ -16917,9 +16787,9 @@
             <a:r>
               <a:rPr lang="en-US" sz="1400" b="1" dirty="0">
                 <a:solidFill>
-                  <a:srgbClr val="6E7687"/>
-                </a:solidFill>
-                <a:latin typeface="Microsoft JhengHei" pitchFamily="34" charset="0"/>
+                  <a:srgbClr val="68645C"/>
+                </a:solidFill>
+                <a:latin typeface="STHeiti" pitchFamily="34" charset="0"/>
                 <a:ea typeface="Microsoft JhengHei" pitchFamily="34" charset="-122"/>
                 <a:cs typeface="Microsoft JhengHei" pitchFamily="34" charset="-120"/>
               </a:rPr>
@@ -16946,7 +16816,7 @@
             </a:avLst>
           </a:prstGeom>
           <a:solidFill>
-            <a:srgbClr val="F3F4F7"/>
+            <a:srgbClr val="E9E3D6"/>
           </a:solidFill>
           <a:ln/>
         </p:spPr>
@@ -16970,7 +16840,7 @@
             <a:avLst/>
           </a:prstGeom>
           <a:solidFill>
-            <a:srgbClr val="1FB6A6"/>
+            <a:srgbClr val="157554"/>
           </a:solidFill>
           <a:ln/>
         </p:spPr>
@@ -17006,9 +16876,9 @@
             <a:r>
               <a:rPr lang="en-US" sz="1350" dirty="0">
                 <a:solidFill>
-                  <a:srgbClr val="2C313D"/>
-                </a:solidFill>
-                <a:latin typeface="Microsoft JhengHei" pitchFamily="34" charset="0"/>
+                  <a:srgbClr val="1F1E1D"/>
+                </a:solidFill>
+                <a:latin typeface="STHeiti" pitchFamily="34" charset="0"/>
                 <a:ea typeface="Microsoft JhengHei" pitchFamily="34" charset="-122"/>
                 <a:cs typeface="Microsoft JhengHei" pitchFamily="34" charset="-120"/>
               </a:rPr>
@@ -17035,7 +16905,7 @@
             </a:avLst>
           </a:prstGeom>
           <a:solidFill>
-            <a:srgbClr val="F3F4F7"/>
+            <a:srgbClr val="E9E3D6"/>
           </a:solidFill>
           <a:ln/>
         </p:spPr>
@@ -17059,7 +16929,7 @@
             <a:avLst/>
           </a:prstGeom>
           <a:solidFill>
-            <a:srgbClr val="1FB6A6"/>
+            <a:srgbClr val="157554"/>
           </a:solidFill>
           <a:ln/>
         </p:spPr>
@@ -17095,9 +16965,9 @@
             <a:r>
               <a:rPr lang="en-US" sz="1350" dirty="0">
                 <a:solidFill>
-                  <a:srgbClr val="2C313D"/>
-                </a:solidFill>
-                <a:latin typeface="Microsoft JhengHei" pitchFamily="34" charset="0"/>
+                  <a:srgbClr val="1F1E1D"/>
+                </a:solidFill>
+                <a:latin typeface="STHeiti" pitchFamily="34" charset="0"/>
                 <a:ea typeface="Microsoft JhengHei" pitchFamily="34" charset="-122"/>
                 <a:cs typeface="Microsoft JhengHei" pitchFamily="34" charset="-120"/>
               </a:rPr>
@@ -17124,7 +16994,7 @@
             </a:avLst>
           </a:prstGeom>
           <a:solidFill>
-            <a:srgbClr val="F3F4F7"/>
+            <a:srgbClr val="E9E3D6"/>
           </a:solidFill>
           <a:ln/>
         </p:spPr>
@@ -17148,7 +17018,7 @@
             <a:avLst/>
           </a:prstGeom>
           <a:solidFill>
-            <a:srgbClr val="1FB6A6"/>
+            <a:srgbClr val="157554"/>
           </a:solidFill>
           <a:ln/>
         </p:spPr>
@@ -17184,9 +17054,9 @@
             <a:r>
               <a:rPr lang="en-US" sz="1350" dirty="0">
                 <a:solidFill>
-                  <a:srgbClr val="2C313D"/>
-                </a:solidFill>
-                <a:latin typeface="Microsoft JhengHei" pitchFamily="34" charset="0"/>
+                  <a:srgbClr val="1F1E1D"/>
+                </a:solidFill>
+                <a:latin typeface="STHeiti" pitchFamily="34" charset="0"/>
                 <a:ea typeface="Microsoft JhengHei" pitchFamily="34" charset="-122"/>
                 <a:cs typeface="Microsoft JhengHei" pitchFamily="34" charset="-120"/>
               </a:rPr>
@@ -17223,9 +17093,9 @@
             <a:r>
               <a:rPr lang="en-US" sz="1400" b="1" dirty="0">
                 <a:solidFill>
-                  <a:srgbClr val="F96167"/>
-                </a:solidFill>
-                <a:latin typeface="Microsoft JhengHei" pitchFamily="34" charset="0"/>
+                  <a:srgbClr val="157554"/>
+                </a:solidFill>
+                <a:latin typeface="STHeiti" pitchFamily="34" charset="0"/>
                 <a:ea typeface="Microsoft JhengHei" pitchFamily="34" charset="-122"/>
                 <a:cs typeface="Microsoft JhengHei" pitchFamily="34" charset="-120"/>
               </a:rPr>
@@ -17252,7 +17122,7 @@
             </a:avLst>
           </a:prstGeom>
           <a:solidFill>
-            <a:srgbClr val="10131A"/>
+            <a:srgbClr val="111B30"/>
           </a:solidFill>
           <a:ln/>
         </p:spPr>
@@ -17288,9 +17158,9 @@
             <a:r>
               <a:rPr lang="en-US" sz="1350" b="1" dirty="0">
                 <a:solidFill>
-                  <a:srgbClr val="CFD4DF"/>
-                </a:solidFill>
-                <a:latin typeface="Microsoft JhengHei" pitchFamily="34" charset="0"/>
+                  <a:srgbClr val="C9D0C8"/>
+                </a:solidFill>
+                <a:latin typeface="STHeiti" pitchFamily="34" charset="0"/>
                 <a:ea typeface="Microsoft JhengHei" pitchFamily="34" charset="-122"/>
                 <a:cs typeface="Microsoft JhengHei" pitchFamily="34" charset="-120"/>
               </a:rPr>
@@ -17327,9 +17197,9 @@
             <a:r>
               <a:rPr lang="en-US" sz="1350" b="1" dirty="0">
                 <a:solidFill>
-                  <a:srgbClr val="CFD4DF"/>
-                </a:solidFill>
-                <a:latin typeface="Microsoft JhengHei" pitchFamily="34" charset="0"/>
+                  <a:srgbClr val="C9D0C8"/>
+                </a:solidFill>
+                <a:latin typeface="STHeiti" pitchFamily="34" charset="0"/>
                 <a:ea typeface="Microsoft JhengHei" pitchFamily="34" charset="-122"/>
                 <a:cs typeface="Microsoft JhengHei" pitchFamily="34" charset="-120"/>
               </a:rPr>
@@ -17366,9 +17236,9 @@
             <a:r>
               <a:rPr lang="en-US" sz="1100" dirty="0">
                 <a:solidFill>
-                  <a:srgbClr val="A8AEBC"/>
-                </a:solidFill>
-                <a:latin typeface="Arial" pitchFamily="34" charset="0"/>
+                  <a:srgbClr val="9DA89F"/>
+                </a:solidFill>
+                <a:latin typeface="STHeiti" pitchFamily="34" charset="0"/>
                 <a:ea typeface="Arial" pitchFamily="34" charset="-122"/>
                 <a:cs typeface="Arial" pitchFamily="34" charset="-120"/>
               </a:rPr>
@@ -17392,7 +17262,7 @@
     <p:bg>
       <p:bgPr>
         <a:solidFill>
-          <a:srgbClr val="FFFFFF"/>
+          <a:srgbClr val="F0EEE6"/>
         </a:solidFill>
         <a:effectLst/>
       </p:bgPr>
@@ -17426,7 +17296,7 @@
             <a:avLst/>
           </a:prstGeom>
           <a:solidFill>
-            <a:srgbClr val="F96167"/>
+            <a:srgbClr val="157554"/>
           </a:solidFill>
           <a:ln/>
         </p:spPr>
@@ -17462,9 +17332,9 @@
             <a:r>
               <a:rPr lang="en-US" sz="1200" b="1" kern="0" spc="200" dirty="0">
                 <a:solidFill>
-                  <a:srgbClr val="6E7687"/>
-                </a:solidFill>
-                <a:latin typeface="Arial" pitchFamily="34" charset="0"/>
+                  <a:srgbClr val="68645C"/>
+                </a:solidFill>
+                <a:latin typeface="STHeiti" pitchFamily="34" charset="0"/>
                 <a:ea typeface="Arial" pitchFamily="34" charset="-122"/>
                 <a:cs typeface="Arial" pitchFamily="34" charset="-120"/>
               </a:rPr>
@@ -17491,7 +17361,7 @@
             </a:avLst>
           </a:prstGeom>
           <a:solidFill>
-            <a:srgbClr val="10131A"/>
+            <a:srgbClr val="111B30"/>
           </a:solidFill>
           <a:ln/>
         </p:spPr>
@@ -17527,9 +17397,9 @@
             <a:r>
               <a:rPr lang="en-US" sz="2400" b="1" dirty="0">
                 <a:solidFill>
-                  <a:srgbClr val="FFFFFF"/>
-                </a:solidFill>
-                <a:latin typeface="Microsoft JhengHei" pitchFamily="34" charset="0"/>
+                  <a:srgbClr val="1F1E1D"/>
+                </a:solidFill>
+                <a:latin typeface="STHeiti" pitchFamily="34" charset="0"/>
                 <a:ea typeface="Microsoft JhengHei" pitchFamily="34" charset="-122"/>
                 <a:cs typeface="Microsoft JhengHei" pitchFamily="34" charset="-120"/>
               </a:rPr>
@@ -17566,9 +17436,9 @@
             <a:r>
               <a:rPr lang="en-US" sz="1400" b="1" dirty="0">
                 <a:solidFill>
-                  <a:srgbClr val="6E7687"/>
-                </a:solidFill>
-                <a:latin typeface="Microsoft JhengHei" pitchFamily="34" charset="0"/>
+                  <a:srgbClr val="68645C"/>
+                </a:solidFill>
+                <a:latin typeface="STHeiti" pitchFamily="34" charset="0"/>
                 <a:ea typeface="Microsoft JhengHei" pitchFamily="34" charset="-122"/>
                 <a:cs typeface="Microsoft JhengHei" pitchFamily="34" charset="-120"/>
               </a:rPr>
@@ -17595,7 +17465,7 @@
             </a:avLst>
           </a:prstGeom>
           <a:solidFill>
-            <a:srgbClr val="F3F4F7"/>
+            <a:srgbClr val="E9E3D6"/>
           </a:solidFill>
           <a:ln/>
         </p:spPr>
@@ -17619,7 +17489,7 @@
             <a:avLst/>
           </a:prstGeom>
           <a:solidFill>
-            <a:srgbClr val="1FB6A6"/>
+            <a:srgbClr val="157554"/>
           </a:solidFill>
           <a:ln/>
         </p:spPr>
@@ -17655,9 +17525,9 @@
             <a:r>
               <a:rPr lang="en-US" sz="1350" dirty="0">
                 <a:solidFill>
-                  <a:srgbClr val="2C313D"/>
-                </a:solidFill>
-                <a:latin typeface="Microsoft JhengHei" pitchFamily="34" charset="0"/>
+                  <a:srgbClr val="1F1E1D"/>
+                </a:solidFill>
+                <a:latin typeface="STHeiti" pitchFamily="34" charset="0"/>
                 <a:ea typeface="Microsoft JhengHei" pitchFamily="34" charset="-122"/>
                 <a:cs typeface="Microsoft JhengHei" pitchFamily="34" charset="-120"/>
               </a:rPr>
@@ -17684,7 +17554,7 @@
             </a:avLst>
           </a:prstGeom>
           <a:solidFill>
-            <a:srgbClr val="F3F4F7"/>
+            <a:srgbClr val="E9E3D6"/>
           </a:solidFill>
           <a:ln/>
         </p:spPr>
@@ -17708,7 +17578,7 @@
             <a:avLst/>
           </a:prstGeom>
           <a:solidFill>
-            <a:srgbClr val="1FB6A6"/>
+            <a:srgbClr val="157554"/>
           </a:solidFill>
           <a:ln/>
         </p:spPr>
@@ -17744,9 +17614,9 @@
             <a:r>
               <a:rPr lang="en-US" sz="1350" dirty="0">
                 <a:solidFill>
-                  <a:srgbClr val="2C313D"/>
-                </a:solidFill>
-                <a:latin typeface="Microsoft JhengHei" pitchFamily="34" charset="0"/>
+                  <a:srgbClr val="1F1E1D"/>
+                </a:solidFill>
+                <a:latin typeface="STHeiti" pitchFamily="34" charset="0"/>
                 <a:ea typeface="Microsoft JhengHei" pitchFamily="34" charset="-122"/>
                 <a:cs typeface="Microsoft JhengHei" pitchFamily="34" charset="-120"/>
               </a:rPr>
@@ -17773,7 +17643,7 @@
             </a:avLst>
           </a:prstGeom>
           <a:solidFill>
-            <a:srgbClr val="F3F4F7"/>
+            <a:srgbClr val="E9E3D6"/>
           </a:solidFill>
           <a:ln/>
         </p:spPr>
@@ -17797,7 +17667,7 @@
             <a:avLst/>
           </a:prstGeom>
           <a:solidFill>
-            <a:srgbClr val="1FB6A6"/>
+            <a:srgbClr val="157554"/>
           </a:solidFill>
           <a:ln/>
         </p:spPr>
@@ -17833,9 +17703,9 @@
             <a:r>
               <a:rPr lang="en-US" sz="1350" dirty="0">
                 <a:solidFill>
-                  <a:srgbClr val="2C313D"/>
-                </a:solidFill>
-                <a:latin typeface="Microsoft JhengHei" pitchFamily="34" charset="0"/>
+                  <a:srgbClr val="1F1E1D"/>
+                </a:solidFill>
+                <a:latin typeface="STHeiti" pitchFamily="34" charset="0"/>
                 <a:ea typeface="Microsoft JhengHei" pitchFamily="34" charset="-122"/>
                 <a:cs typeface="Microsoft JhengHei" pitchFamily="34" charset="-120"/>
               </a:rPr>
@@ -17872,9 +17742,9 @@
             <a:r>
               <a:rPr lang="en-US" sz="1400" b="1" dirty="0">
                 <a:solidFill>
-                  <a:srgbClr val="F96167"/>
-                </a:solidFill>
-                <a:latin typeface="Microsoft JhengHei" pitchFamily="34" charset="0"/>
+                  <a:srgbClr val="157554"/>
+                </a:solidFill>
+                <a:latin typeface="STHeiti" pitchFamily="34" charset="0"/>
                 <a:ea typeface="Microsoft JhengHei" pitchFamily="34" charset="-122"/>
                 <a:cs typeface="Microsoft JhengHei" pitchFamily="34" charset="-120"/>
               </a:rPr>
@@ -17901,7 +17771,7 @@
             </a:avLst>
           </a:prstGeom>
           <a:solidFill>
-            <a:srgbClr val="10131A"/>
+            <a:srgbClr val="111B30"/>
           </a:solidFill>
           <a:ln/>
         </p:spPr>
@@ -17937,9 +17807,9 @@
             <a:r>
               <a:rPr lang="en-US" sz="1350" b="1" dirty="0">
                 <a:solidFill>
-                  <a:srgbClr val="CFD4DF"/>
-                </a:solidFill>
-                <a:latin typeface="Microsoft JhengHei" pitchFamily="34" charset="0"/>
+                  <a:srgbClr val="C9D0C8"/>
+                </a:solidFill>
+                <a:latin typeface="STHeiti" pitchFamily="34" charset="0"/>
                 <a:ea typeface="Microsoft JhengHei" pitchFamily="34" charset="-122"/>
                 <a:cs typeface="Microsoft JhengHei" pitchFamily="34" charset="-120"/>
               </a:rPr>
@@ -17976,9 +17846,9 @@
             <a:r>
               <a:rPr lang="en-US" sz="1350" b="1" dirty="0">
                 <a:solidFill>
-                  <a:srgbClr val="CFD4DF"/>
-                </a:solidFill>
-                <a:latin typeface="Microsoft JhengHei" pitchFamily="34" charset="0"/>
+                  <a:srgbClr val="C9D0C8"/>
+                </a:solidFill>
+                <a:latin typeface="STHeiti" pitchFamily="34" charset="0"/>
                 <a:ea typeface="Microsoft JhengHei" pitchFamily="34" charset="-122"/>
                 <a:cs typeface="Microsoft JhengHei" pitchFamily="34" charset="-120"/>
               </a:rPr>
@@ -18015,9 +17885,9 @@
             <a:r>
               <a:rPr lang="en-US" sz="1350" b="1" dirty="0">
                 <a:solidFill>
-                  <a:srgbClr val="CFD4DF"/>
-                </a:solidFill>
-                <a:latin typeface="Microsoft JhengHei" pitchFamily="34" charset="0"/>
+                  <a:srgbClr val="C9D0C8"/>
+                </a:solidFill>
+                <a:latin typeface="STHeiti" pitchFamily="34" charset="0"/>
                 <a:ea typeface="Microsoft JhengHei" pitchFamily="34" charset="-122"/>
                 <a:cs typeface="Microsoft JhengHei" pitchFamily="34" charset="-120"/>
               </a:rPr>
@@ -18054,9 +17924,9 @@
             <a:r>
               <a:rPr lang="en-US" sz="1100" dirty="0">
                 <a:solidFill>
-                  <a:srgbClr val="A8AEBC"/>
-                </a:solidFill>
-                <a:latin typeface="Arial" pitchFamily="34" charset="0"/>
+                  <a:srgbClr val="9DA89F"/>
+                </a:solidFill>
+                <a:latin typeface="STHeiti" pitchFamily="34" charset="0"/>
                 <a:ea typeface="Arial" pitchFamily="34" charset="-122"/>
                 <a:cs typeface="Arial" pitchFamily="34" charset="-120"/>
               </a:rPr>
@@ -18080,7 +17950,7 @@
     <p:bg>
       <p:bgPr>
         <a:solidFill>
-          <a:srgbClr val="FFFFFF"/>
+          <a:srgbClr val="F0EEE6"/>
         </a:solidFill>
         <a:effectLst/>
       </p:bgPr>
@@ -18114,7 +17984,7 @@
             <a:avLst/>
           </a:prstGeom>
           <a:solidFill>
-            <a:srgbClr val="F96167"/>
+            <a:srgbClr val="157554"/>
           </a:solidFill>
           <a:ln/>
         </p:spPr>
@@ -18150,9 +18020,9 @@
             <a:r>
               <a:rPr lang="en-US" sz="1200" b="1" kern="0" spc="200" dirty="0">
                 <a:solidFill>
-                  <a:srgbClr val="6E7687"/>
-                </a:solidFill>
-                <a:latin typeface="Arial" pitchFamily="34" charset="0"/>
+                  <a:srgbClr val="68645C"/>
+                </a:solidFill>
+                <a:latin typeface="STHeiti" pitchFamily="34" charset="0"/>
                 <a:ea typeface="Arial" pitchFamily="34" charset="-122"/>
                 <a:cs typeface="Arial" pitchFamily="34" charset="-120"/>
               </a:rPr>
@@ -18179,7 +18049,7 @@
             </a:avLst>
           </a:prstGeom>
           <a:solidFill>
-            <a:srgbClr val="10131A"/>
+            <a:srgbClr val="111B30"/>
           </a:solidFill>
           <a:ln/>
         </p:spPr>
@@ -18215,9 +18085,9 @@
             <a:r>
               <a:rPr lang="en-US" sz="2400" b="1" dirty="0">
                 <a:solidFill>
-                  <a:srgbClr val="FFFFFF"/>
-                </a:solidFill>
-                <a:latin typeface="Microsoft JhengHei" pitchFamily="34" charset="0"/>
+                  <a:srgbClr val="1F1E1D"/>
+                </a:solidFill>
+                <a:latin typeface="STHeiti" pitchFamily="34" charset="0"/>
                 <a:ea typeface="Microsoft JhengHei" pitchFamily="34" charset="-122"/>
                 <a:cs typeface="Microsoft JhengHei" pitchFamily="34" charset="-120"/>
               </a:rPr>
@@ -18254,9 +18124,9 @@
             <a:r>
               <a:rPr lang="en-US" sz="1400" b="1" dirty="0">
                 <a:solidFill>
-                  <a:srgbClr val="6E7687"/>
-                </a:solidFill>
-                <a:latin typeface="Microsoft JhengHei" pitchFamily="34" charset="0"/>
+                  <a:srgbClr val="68645C"/>
+                </a:solidFill>
+                <a:latin typeface="STHeiti" pitchFamily="34" charset="0"/>
                 <a:ea typeface="Microsoft JhengHei" pitchFamily="34" charset="-122"/>
                 <a:cs typeface="Microsoft JhengHei" pitchFamily="34" charset="-120"/>
               </a:rPr>
@@ -18283,7 +18153,7 @@
             </a:avLst>
           </a:prstGeom>
           <a:solidFill>
-            <a:srgbClr val="F3F4F7"/>
+            <a:srgbClr val="E9E3D6"/>
           </a:solidFill>
           <a:ln/>
         </p:spPr>
@@ -18307,7 +18177,7 @@
             <a:avLst/>
           </a:prstGeom>
           <a:solidFill>
-            <a:srgbClr val="1FB6A6"/>
+            <a:srgbClr val="157554"/>
           </a:solidFill>
           <a:ln/>
         </p:spPr>
@@ -18343,9 +18213,9 @@
             <a:r>
               <a:rPr lang="en-US" sz="1350" dirty="0">
                 <a:solidFill>
-                  <a:srgbClr val="2C313D"/>
-                </a:solidFill>
-                <a:latin typeface="Microsoft JhengHei" pitchFamily="34" charset="0"/>
+                  <a:srgbClr val="1F1E1D"/>
+                </a:solidFill>
+                <a:latin typeface="STHeiti" pitchFamily="34" charset="0"/>
                 <a:ea typeface="Microsoft JhengHei" pitchFamily="34" charset="-122"/>
                 <a:cs typeface="Microsoft JhengHei" pitchFamily="34" charset="-120"/>
               </a:rPr>
@@ -18372,7 +18242,7 @@
             </a:avLst>
           </a:prstGeom>
           <a:solidFill>
-            <a:srgbClr val="F3F4F7"/>
+            <a:srgbClr val="E9E3D6"/>
           </a:solidFill>
           <a:ln/>
         </p:spPr>
@@ -18396,7 +18266,7 @@
             <a:avLst/>
           </a:prstGeom>
           <a:solidFill>
-            <a:srgbClr val="1FB6A6"/>
+            <a:srgbClr val="157554"/>
           </a:solidFill>
           <a:ln/>
         </p:spPr>
@@ -18432,9 +18302,9 @@
             <a:r>
               <a:rPr lang="en-US" sz="1350" dirty="0">
                 <a:solidFill>
-                  <a:srgbClr val="2C313D"/>
-                </a:solidFill>
-                <a:latin typeface="Microsoft JhengHei" pitchFamily="34" charset="0"/>
+                  <a:srgbClr val="1F1E1D"/>
+                </a:solidFill>
+                <a:latin typeface="STHeiti" pitchFamily="34" charset="0"/>
                 <a:ea typeface="Microsoft JhengHei" pitchFamily="34" charset="-122"/>
                 <a:cs typeface="Microsoft JhengHei" pitchFamily="34" charset="-120"/>
               </a:rPr>
@@ -18461,7 +18331,7 @@
             </a:avLst>
           </a:prstGeom>
           <a:solidFill>
-            <a:srgbClr val="F3F4F7"/>
+            <a:srgbClr val="E9E3D6"/>
           </a:solidFill>
           <a:ln/>
         </p:spPr>
@@ -18485,7 +18355,7 @@
             <a:avLst/>
           </a:prstGeom>
           <a:solidFill>
-            <a:srgbClr val="1FB6A6"/>
+            <a:srgbClr val="157554"/>
           </a:solidFill>
           <a:ln/>
         </p:spPr>
@@ -18521,9 +18391,9 @@
             <a:r>
               <a:rPr lang="en-US" sz="1350" dirty="0">
                 <a:solidFill>
-                  <a:srgbClr val="2C313D"/>
-                </a:solidFill>
-                <a:latin typeface="Microsoft JhengHei" pitchFamily="34" charset="0"/>
+                  <a:srgbClr val="1F1E1D"/>
+                </a:solidFill>
+                <a:latin typeface="STHeiti" pitchFamily="34" charset="0"/>
                 <a:ea typeface="Microsoft JhengHei" pitchFamily="34" charset="-122"/>
                 <a:cs typeface="Microsoft JhengHei" pitchFamily="34" charset="-120"/>
               </a:rPr>
@@ -18560,9 +18430,9 @@
             <a:r>
               <a:rPr lang="en-US" sz="1400" b="1" dirty="0">
                 <a:solidFill>
-                  <a:srgbClr val="F96167"/>
-                </a:solidFill>
-                <a:latin typeface="Microsoft JhengHei" pitchFamily="34" charset="0"/>
+                  <a:srgbClr val="157554"/>
+                </a:solidFill>
+                <a:latin typeface="STHeiti" pitchFamily="34" charset="0"/>
                 <a:ea typeface="Microsoft JhengHei" pitchFamily="34" charset="-122"/>
                 <a:cs typeface="Microsoft JhengHei" pitchFamily="34" charset="-120"/>
               </a:rPr>
@@ -18589,7 +18459,7 @@
             </a:avLst>
           </a:prstGeom>
           <a:solidFill>
-            <a:srgbClr val="10131A"/>
+            <a:srgbClr val="111B30"/>
           </a:solidFill>
           <a:ln/>
         </p:spPr>
@@ -18625,9 +18495,9 @@
             <a:r>
               <a:rPr lang="en-US" sz="1350" b="1" dirty="0">
                 <a:solidFill>
-                  <a:srgbClr val="CFD4DF"/>
-                </a:solidFill>
-                <a:latin typeface="Microsoft JhengHei" pitchFamily="34" charset="0"/>
+                  <a:srgbClr val="C9D0C8"/>
+                </a:solidFill>
+                <a:latin typeface="STHeiti" pitchFamily="34" charset="0"/>
                 <a:ea typeface="Microsoft JhengHei" pitchFamily="34" charset="-122"/>
                 <a:cs typeface="Microsoft JhengHei" pitchFamily="34" charset="-120"/>
               </a:rPr>
@@ -18664,9 +18534,9 @@
             <a:r>
               <a:rPr lang="en-US" sz="1350" b="1" dirty="0">
                 <a:solidFill>
-                  <a:srgbClr val="CFD4DF"/>
-                </a:solidFill>
-                <a:latin typeface="Microsoft JhengHei" pitchFamily="34" charset="0"/>
+                  <a:srgbClr val="C9D0C8"/>
+                </a:solidFill>
+                <a:latin typeface="STHeiti" pitchFamily="34" charset="0"/>
                 <a:ea typeface="Microsoft JhengHei" pitchFamily="34" charset="-122"/>
                 <a:cs typeface="Microsoft JhengHei" pitchFamily="34" charset="-120"/>
               </a:rPr>
@@ -18703,9 +18573,9 @@
             <a:r>
               <a:rPr lang="en-US" sz="1100" dirty="0">
                 <a:solidFill>
-                  <a:srgbClr val="A8AEBC"/>
-                </a:solidFill>
-                <a:latin typeface="Arial" pitchFamily="34" charset="0"/>
+                  <a:srgbClr val="9DA89F"/>
+                </a:solidFill>
+                <a:latin typeface="STHeiti" pitchFamily="34" charset="0"/>
                 <a:ea typeface="Arial" pitchFamily="34" charset="-122"/>
                 <a:cs typeface="Arial" pitchFamily="34" charset="-120"/>
               </a:rPr>
@@ -18729,7 +18599,7 @@
     <p:bg>
       <p:bgPr>
         <a:solidFill>
-          <a:srgbClr val="FFFFFF"/>
+          <a:srgbClr val="F0EEE6"/>
         </a:solidFill>
         <a:effectLst/>
       </p:bgPr>
@@ -18763,7 +18633,7 @@
             <a:avLst/>
           </a:prstGeom>
           <a:solidFill>
-            <a:srgbClr val="F96167"/>
+            <a:srgbClr val="157554"/>
           </a:solidFill>
           <a:ln/>
         </p:spPr>
@@ -18799,9 +18669,9 @@
             <a:r>
               <a:rPr lang="en-US" sz="1200" b="1" kern="0" spc="200" dirty="0">
                 <a:solidFill>
-                  <a:srgbClr val="6E7687"/>
-                </a:solidFill>
-                <a:latin typeface="Arial" pitchFamily="34" charset="0"/>
+                  <a:srgbClr val="68645C"/>
+                </a:solidFill>
+                <a:latin typeface="STHeiti" pitchFamily="34" charset="0"/>
                 <a:ea typeface="Arial" pitchFamily="34" charset="-122"/>
                 <a:cs typeface="Arial" pitchFamily="34" charset="-120"/>
               </a:rPr>
@@ -18828,7 +18698,7 @@
             </a:avLst>
           </a:prstGeom>
           <a:solidFill>
-            <a:srgbClr val="10131A"/>
+            <a:srgbClr val="111B30"/>
           </a:solidFill>
           <a:ln/>
         </p:spPr>
@@ -18864,9 +18734,9 @@
             <a:r>
               <a:rPr lang="en-US" sz="2400" b="1" dirty="0">
                 <a:solidFill>
-                  <a:srgbClr val="FFFFFF"/>
-                </a:solidFill>
-                <a:latin typeface="Microsoft JhengHei" pitchFamily="34" charset="0"/>
+                  <a:srgbClr val="1F1E1D"/>
+                </a:solidFill>
+                <a:latin typeface="STHeiti" pitchFamily="34" charset="0"/>
                 <a:ea typeface="Microsoft JhengHei" pitchFamily="34" charset="-122"/>
                 <a:cs typeface="Microsoft JhengHei" pitchFamily="34" charset="-120"/>
               </a:rPr>
@@ -18903,9 +18773,9 @@
             <a:r>
               <a:rPr lang="en-US" sz="1400" b="1" dirty="0">
                 <a:solidFill>
-                  <a:srgbClr val="6E7687"/>
-                </a:solidFill>
-                <a:latin typeface="Microsoft JhengHei" pitchFamily="34" charset="0"/>
+                  <a:srgbClr val="68645C"/>
+                </a:solidFill>
+                <a:latin typeface="STHeiti" pitchFamily="34" charset="0"/>
                 <a:ea typeface="Microsoft JhengHei" pitchFamily="34" charset="-122"/>
                 <a:cs typeface="Microsoft JhengHei" pitchFamily="34" charset="-120"/>
               </a:rPr>
@@ -18932,7 +18802,7 @@
             </a:avLst>
           </a:prstGeom>
           <a:solidFill>
-            <a:srgbClr val="F3F4F7"/>
+            <a:srgbClr val="E9E3D6"/>
           </a:solidFill>
           <a:ln/>
         </p:spPr>
@@ -18956,7 +18826,7 @@
             <a:avLst/>
           </a:prstGeom>
           <a:solidFill>
-            <a:srgbClr val="1FB6A6"/>
+            <a:srgbClr val="157554"/>
           </a:solidFill>
           <a:ln/>
         </p:spPr>
@@ -18992,9 +18862,9 @@
             <a:r>
               <a:rPr lang="en-US" sz="1350" dirty="0">
                 <a:solidFill>
-                  <a:srgbClr val="2C313D"/>
-                </a:solidFill>
-                <a:latin typeface="Microsoft JhengHei" pitchFamily="34" charset="0"/>
+                  <a:srgbClr val="1F1E1D"/>
+                </a:solidFill>
+                <a:latin typeface="STHeiti" pitchFamily="34" charset="0"/>
                 <a:ea typeface="Microsoft JhengHei" pitchFamily="34" charset="-122"/>
                 <a:cs typeface="Microsoft JhengHei" pitchFamily="34" charset="-120"/>
               </a:rPr>
@@ -19021,7 +18891,7 @@
             </a:avLst>
           </a:prstGeom>
           <a:solidFill>
-            <a:srgbClr val="F3F4F7"/>
+            <a:srgbClr val="E9E3D6"/>
           </a:solidFill>
           <a:ln/>
         </p:spPr>
@@ -19045,7 +18915,7 @@
             <a:avLst/>
           </a:prstGeom>
           <a:solidFill>
-            <a:srgbClr val="1FB6A6"/>
+            <a:srgbClr val="157554"/>
           </a:solidFill>
           <a:ln/>
         </p:spPr>
@@ -19081,9 +18951,9 @@
             <a:r>
               <a:rPr lang="en-US" sz="1350" dirty="0">
                 <a:solidFill>
-                  <a:srgbClr val="2C313D"/>
-                </a:solidFill>
-                <a:latin typeface="Microsoft JhengHei" pitchFamily="34" charset="0"/>
+                  <a:srgbClr val="1F1E1D"/>
+                </a:solidFill>
+                <a:latin typeface="STHeiti" pitchFamily="34" charset="0"/>
                 <a:ea typeface="Microsoft JhengHei" pitchFamily="34" charset="-122"/>
                 <a:cs typeface="Microsoft JhengHei" pitchFamily="34" charset="-120"/>
               </a:rPr>
@@ -19110,7 +18980,7 @@
             </a:avLst>
           </a:prstGeom>
           <a:solidFill>
-            <a:srgbClr val="F3F4F7"/>
+            <a:srgbClr val="E9E3D6"/>
           </a:solidFill>
           <a:ln/>
         </p:spPr>
@@ -19134,7 +19004,7 @@
             <a:avLst/>
           </a:prstGeom>
           <a:solidFill>
-            <a:srgbClr val="1FB6A6"/>
+            <a:srgbClr val="157554"/>
           </a:solidFill>
           <a:ln/>
         </p:spPr>
@@ -19170,9 +19040,9 @@
             <a:r>
               <a:rPr lang="en-US" sz="1350" dirty="0">
                 <a:solidFill>
-                  <a:srgbClr val="2C313D"/>
-                </a:solidFill>
-                <a:latin typeface="Microsoft JhengHei" pitchFamily="34" charset="0"/>
+                  <a:srgbClr val="1F1E1D"/>
+                </a:solidFill>
+                <a:latin typeface="STHeiti" pitchFamily="34" charset="0"/>
                 <a:ea typeface="Microsoft JhengHei" pitchFamily="34" charset="-122"/>
                 <a:cs typeface="Microsoft JhengHei" pitchFamily="34" charset="-120"/>
               </a:rPr>
@@ -19209,9 +19079,9 @@
             <a:r>
               <a:rPr lang="en-US" sz="1400" b="1" dirty="0">
                 <a:solidFill>
-                  <a:srgbClr val="F96167"/>
-                </a:solidFill>
-                <a:latin typeface="Microsoft JhengHei" pitchFamily="34" charset="0"/>
+                  <a:srgbClr val="157554"/>
+                </a:solidFill>
+                <a:latin typeface="STHeiti" pitchFamily="34" charset="0"/>
                 <a:ea typeface="Microsoft JhengHei" pitchFamily="34" charset="-122"/>
                 <a:cs typeface="Microsoft JhengHei" pitchFamily="34" charset="-120"/>
               </a:rPr>
@@ -19238,7 +19108,7 @@
             </a:avLst>
           </a:prstGeom>
           <a:solidFill>
-            <a:srgbClr val="10131A"/>
+            <a:srgbClr val="111B30"/>
           </a:solidFill>
           <a:ln/>
         </p:spPr>
@@ -19274,9 +19144,9 @@
             <a:r>
               <a:rPr lang="en-US" sz="1350" b="1" dirty="0">
                 <a:solidFill>
-                  <a:srgbClr val="CFD4DF"/>
-                </a:solidFill>
-                <a:latin typeface="Microsoft JhengHei" pitchFamily="34" charset="0"/>
+                  <a:srgbClr val="C9D0C8"/>
+                </a:solidFill>
+                <a:latin typeface="STHeiti" pitchFamily="34" charset="0"/>
                 <a:ea typeface="Microsoft JhengHei" pitchFamily="34" charset="-122"/>
                 <a:cs typeface="Microsoft JhengHei" pitchFamily="34" charset="-120"/>
               </a:rPr>
@@ -19313,9 +19183,9 @@
             <a:r>
               <a:rPr lang="en-US" sz="1350" b="1" dirty="0">
                 <a:solidFill>
-                  <a:srgbClr val="CFD4DF"/>
-                </a:solidFill>
-                <a:latin typeface="Microsoft JhengHei" pitchFamily="34" charset="0"/>
+                  <a:srgbClr val="C9D0C8"/>
+                </a:solidFill>
+                <a:latin typeface="STHeiti" pitchFamily="34" charset="0"/>
                 <a:ea typeface="Microsoft JhengHei" pitchFamily="34" charset="-122"/>
                 <a:cs typeface="Microsoft JhengHei" pitchFamily="34" charset="-120"/>
               </a:rPr>
@@ -19352,9 +19222,9 @@
             <a:r>
               <a:rPr lang="en-US" sz="1100" dirty="0">
                 <a:solidFill>
-                  <a:srgbClr val="A8AEBC"/>
-                </a:solidFill>
-                <a:latin typeface="Arial" pitchFamily="34" charset="0"/>
+                  <a:srgbClr val="9DA89F"/>
+                </a:solidFill>
+                <a:latin typeface="STHeiti" pitchFamily="34" charset="0"/>
                 <a:ea typeface="Arial" pitchFamily="34" charset="-122"/>
                 <a:cs typeface="Arial" pitchFamily="34" charset="-120"/>
               </a:rPr>
@@ -19378,7 +19248,7 @@
     <p:bg>
       <p:bgPr>
         <a:solidFill>
-          <a:srgbClr val="10131A"/>
+          <a:srgbClr val="111B30"/>
         </a:solidFill>
         <a:effectLst/>
       </p:bgPr>
@@ -19412,7 +19282,7 @@
             <a:avLst/>
           </a:prstGeom>
           <a:solidFill>
-            <a:srgbClr val="F96167"/>
+            <a:srgbClr val="157554"/>
           </a:solidFill>
           <a:ln/>
         </p:spPr>
@@ -19448,9 +19318,9 @@
             <a:r>
               <a:rPr lang="en-US" sz="1200" b="1" kern="0" spc="200" dirty="0">
                 <a:solidFill>
-                  <a:srgbClr val="8A93A6"/>
-                </a:solidFill>
-                <a:latin typeface="Arial" pitchFamily="34" charset="0"/>
+                  <a:srgbClr val="9FAEBE"/>
+                </a:solidFill>
+                <a:latin typeface="STHeiti" pitchFamily="34" charset="0"/>
                 <a:ea typeface="Arial" pitchFamily="34" charset="-122"/>
                 <a:cs typeface="Arial" pitchFamily="34" charset="-120"/>
               </a:rPr>
@@ -19481,21 +19351,15 @@
           <a:bodyPr wrap="square" lIns="0" tIns="0" rIns="0" bIns="0" rtlCol="0" anchor="ctr"/>
           <a:lstStyle/>
           <a:p>
-            <a:pPr marL="0" indent="0">
-              <a:buNone/>
-            </a:pPr>
-            <a:r>
-              <a:rPr lang="en-US" sz="3400" b="1" dirty="0">
-                <a:solidFill>
-                  <a:srgbClr val="FFFFFF"/>
-                </a:solidFill>
-                <a:latin typeface="Microsoft JhengHei" pitchFamily="34" charset="0"/>
-                <a:ea typeface="Microsoft JhengHei" pitchFamily="34" charset="-122"/>
-                <a:cs typeface="Microsoft JhengHei" pitchFamily="34" charset="-120"/>
-              </a:rPr>
-              <a:t>六題的共通點:先有證據,才談決策</a:t>
-            </a:r>
-            <a:endParaRPr lang="en-US" sz="3400" dirty="0"/>
+            <a:r>
+              <a:rPr>
+                <a:solidFill>
+                  <a:srgbClr val="FAF9F5"/>
+                </a:solidFill>
+                <a:latin typeface="STHeiti"/>
+              </a:rPr>
+              <a:t>共通點：先有 Evidence，才談 Decision</a:t>
+            </a:r>
           </a:p>
         </p:txBody>
       </p:sp>
@@ -19531,7 +19395,7 @@
                 <a:solidFill>
                   <a:srgbClr val="D6DAE4"/>
                 </a:solidFill>
-                <a:latin typeface="Microsoft JhengHei" pitchFamily="34" charset="0"/>
+                <a:latin typeface="STHeiti" pitchFamily="34" charset="0"/>
                 <a:ea typeface="Microsoft JhengHei" pitchFamily="34" charset="-122"/>
                 <a:cs typeface="Microsoft JhengHei" pitchFamily="34" charset="-120"/>
               </a:rPr>
@@ -19558,7 +19422,7 @@
             </a:avLst>
           </a:prstGeom>
           <a:solidFill>
-            <a:srgbClr val="1B1F2B"/>
+            <a:srgbClr val="1E2A40"/>
           </a:solidFill>
           <a:ln/>
         </p:spPr>
@@ -19594,9 +19458,9 @@
             <a:r>
               <a:rPr lang="en-US" sz="1400" b="1" dirty="0">
                 <a:solidFill>
-                  <a:srgbClr val="8A93A6"/>
-                </a:solidFill>
-                <a:latin typeface="Microsoft JhengHei" pitchFamily="34" charset="0"/>
+                  <a:srgbClr val="9FAEBE"/>
+                </a:solidFill>
+                <a:latin typeface="STHeiti" pitchFamily="34" charset="0"/>
                 <a:ea typeface="Microsoft JhengHei" pitchFamily="34" charset="-122"/>
                 <a:cs typeface="Microsoft JhengHei" pitchFamily="34" charset="-120"/>
               </a:rPr>
@@ -19636,9 +19500,9 @@
             <a:r>
               <a:rPr lang="en-US" sz="1700" b="1" dirty="0">
                 <a:solidFill>
-                  <a:srgbClr val="FFFFFF"/>
-                </a:solidFill>
-                <a:latin typeface="Microsoft JhengHei" pitchFamily="34" charset="0"/>
+                  <a:srgbClr val="FAF9F5"/>
+                </a:solidFill>
+                <a:latin typeface="STHeiti" pitchFamily="34" charset="0"/>
                 <a:ea typeface="Microsoft JhengHei" pitchFamily="34" charset="-122"/>
                 <a:cs typeface="Microsoft JhengHei" pitchFamily="34" charset="-120"/>
               </a:rPr>
@@ -19665,7 +19529,7 @@
             </a:avLst>
           </a:prstGeom>
           <a:solidFill>
-            <a:srgbClr val="F96167"/>
+            <a:srgbClr val="157554"/>
           </a:solidFill>
           <a:ln/>
         </p:spPr>
@@ -19701,9 +19565,9 @@
             <a:r>
               <a:rPr lang="en-US" sz="1400" b="1" dirty="0">
                 <a:solidFill>
-                  <a:srgbClr val="FFE3E4"/>
-                </a:solidFill>
-                <a:latin typeface="Microsoft JhengHei" pitchFamily="34" charset="0"/>
+                  <a:srgbClr val="FFE0C4"/>
+                </a:solidFill>
+                <a:latin typeface="STHeiti" pitchFamily="34" charset="0"/>
                 <a:ea typeface="Microsoft JhengHei" pitchFamily="34" charset="-122"/>
                 <a:cs typeface="Microsoft JhengHei" pitchFamily="34" charset="-120"/>
               </a:rPr>
@@ -19743,9 +19607,9 @@
             <a:r>
               <a:rPr lang="en-US" sz="1700" b="1" dirty="0">
                 <a:solidFill>
-                  <a:srgbClr val="FFFFFF"/>
-                </a:solidFill>
-                <a:latin typeface="Microsoft JhengHei" pitchFamily="34" charset="0"/>
+                  <a:srgbClr val="FAF9F5"/>
+                </a:solidFill>
+                <a:latin typeface="STHeiti" pitchFamily="34" charset="0"/>
                 <a:ea typeface="Microsoft JhengHei" pitchFamily="34" charset="-122"/>
                 <a:cs typeface="Microsoft JhengHei" pitchFamily="34" charset="-120"/>
               </a:rPr>
@@ -19784,7 +19648,7 @@
                 <a:solidFill>
                   <a:srgbClr val="C3C9D6"/>
                 </a:solidFill>
-                <a:latin typeface="Microsoft JhengHei" pitchFamily="34" charset="0"/>
+                <a:latin typeface="STHeiti" pitchFamily="34" charset="0"/>
                 <a:ea typeface="Microsoft JhengHei" pitchFamily="34" charset="-122"/>
                 <a:cs typeface="Microsoft JhengHei" pitchFamily="34" charset="-120"/>
               </a:rPr>
@@ -19821,9 +19685,9 @@
             <a:r>
               <a:rPr lang="en-US" sz="1100" dirty="0">
                 <a:solidFill>
-                  <a:srgbClr val="A8AEBC"/>
-                </a:solidFill>
-                <a:latin typeface="Arial" pitchFamily="34" charset="0"/>
+                  <a:srgbClr val="9DA89F"/>
+                </a:solidFill>
+                <a:latin typeface="STHeiti" pitchFamily="34" charset="0"/>
                 <a:ea typeface="Arial" pitchFamily="34" charset="-122"/>
                 <a:cs typeface="Arial" pitchFamily="34" charset="-120"/>
               </a:rPr>
@@ -19847,7 +19711,7 @@
     <p:bg>
       <p:bgPr>
         <a:solidFill>
-          <a:srgbClr val="FFFFFF"/>
+          <a:srgbClr val="F0EEE6"/>
         </a:solidFill>
         <a:effectLst/>
       </p:bgPr>
@@ -19881,7 +19745,7 @@
             <a:avLst/>
           </a:prstGeom>
           <a:solidFill>
-            <a:srgbClr val="F96167"/>
+            <a:srgbClr val="157554"/>
           </a:solidFill>
           <a:ln/>
         </p:spPr>
@@ -19917,9 +19781,9 @@
             <a:r>
               <a:rPr lang="en-US" sz="1200" b="1" kern="0" spc="200" dirty="0">
                 <a:solidFill>
-                  <a:srgbClr val="6E7687"/>
-                </a:solidFill>
-                <a:latin typeface="Arial" pitchFamily="34" charset="0"/>
+                  <a:srgbClr val="68645C"/>
+                </a:solidFill>
+                <a:latin typeface="STHeiti" pitchFamily="34" charset="0"/>
                 <a:ea typeface="Arial" pitchFamily="34" charset="-122"/>
                 <a:cs typeface="Arial" pitchFamily="34" charset="-120"/>
               </a:rPr>
@@ -19950,21 +19814,15 @@
           <a:bodyPr wrap="square" lIns="0" tIns="0" rIns="0" bIns="0" rtlCol="0" anchor="ctr"/>
           <a:lstStyle/>
           <a:p>
-            <a:pPr marL="0" indent="0">
-              <a:buNone/>
-            </a:pPr>
-            <a:r>
-              <a:rPr lang="en-US" sz="3400" b="1" dirty="0">
-                <a:solidFill>
-                  <a:srgbClr val="10131A"/>
-                </a:solidFill>
-                <a:latin typeface="Microsoft JhengHei" pitchFamily="34" charset="0"/>
-                <a:ea typeface="Microsoft JhengHei" pitchFamily="34" charset="-122"/>
-                <a:cs typeface="Microsoft JhengHei" pitchFamily="34" charset="-120"/>
-              </a:rPr>
-              <a:t>身體是連續的,資料卻是被切開的</a:t>
-            </a:r>
-            <a:endParaRPr lang="en-US" sz="3400" dirty="0"/>
+            <a:r>
+              <a:rPr>
+                <a:solidFill>
+                  <a:srgbClr val="1F1E1D"/>
+                </a:solidFill>
+                <a:latin typeface="STHeiti"/>
+              </a:rPr>
+              <a:t>一般 AI 知道運動知識，卻不知道連續的你</a:t>
+            </a:r>
           </a:p>
         </p:txBody>
       </p:sp>
@@ -19998,9 +19856,9 @@
             <a:r>
               <a:rPr lang="en-US" sz="2000" dirty="0">
                 <a:solidFill>
-                  <a:srgbClr val="353A46"/>
-                </a:solidFill>
-                <a:latin typeface="Microsoft JhengHei" pitchFamily="34" charset="0"/>
+                  <a:srgbClr val="1F1E1D"/>
+                </a:solidFill>
+                <a:latin typeface="STHeiti" pitchFamily="34" charset="0"/>
                 <a:ea typeface="Microsoft JhengHei" pitchFamily="34" charset="-122"/>
                 <a:cs typeface="Microsoft JhengHei" pitchFamily="34" charset="-120"/>
               </a:rPr>
@@ -20027,7 +19885,7 @@
             </a:avLst>
           </a:prstGeom>
           <a:solidFill>
-            <a:srgbClr val="F3F4F7"/>
+            <a:srgbClr val="E9E3D6"/>
           </a:solidFill>
           <a:ln/>
         </p:spPr>
@@ -20063,9 +19921,9 @@
             <a:r>
               <a:rPr lang="en-US" sz="1450" b="1" dirty="0">
                 <a:solidFill>
-                  <a:srgbClr val="10131A"/>
-                </a:solidFill>
-                <a:latin typeface="Arial" pitchFamily="34" charset="0"/>
+                  <a:srgbClr val="1F1E1D"/>
+                </a:solidFill>
+                <a:latin typeface="STHeiti" pitchFamily="34" charset="0"/>
                 <a:ea typeface="Arial" pitchFamily="34" charset="-122"/>
                 <a:cs typeface="Arial" pitchFamily="34" charset="-120"/>
               </a:rPr>
@@ -20105,9 +19963,9 @@
             <a:r>
               <a:rPr lang="en-US" sz="1250" dirty="0">
                 <a:solidFill>
-                  <a:srgbClr val="6E7687"/>
-                </a:solidFill>
-                <a:latin typeface="Microsoft JhengHei" pitchFamily="34" charset="0"/>
+                  <a:srgbClr val="68645C"/>
+                </a:solidFill>
+                <a:latin typeface="STHeiti" pitchFamily="34" charset="0"/>
                 <a:ea typeface="Microsoft JhengHei" pitchFamily="34" charset="-122"/>
                 <a:cs typeface="Microsoft JhengHei" pitchFamily="34" charset="-120"/>
               </a:rPr>
@@ -20134,7 +19992,7 @@
             </a:avLst>
           </a:prstGeom>
           <a:solidFill>
-            <a:srgbClr val="F3F4F7"/>
+            <a:srgbClr val="E9E3D6"/>
           </a:solidFill>
           <a:ln/>
         </p:spPr>
@@ -20170,9 +20028,9 @@
             <a:r>
               <a:rPr lang="en-US" sz="1450" b="1" dirty="0">
                 <a:solidFill>
-                  <a:srgbClr val="10131A"/>
-                </a:solidFill>
-                <a:latin typeface="Arial" pitchFamily="34" charset="0"/>
+                  <a:srgbClr val="1F1E1D"/>
+                </a:solidFill>
+                <a:latin typeface="STHeiti" pitchFamily="34" charset="0"/>
                 <a:ea typeface="Arial" pitchFamily="34" charset="-122"/>
                 <a:cs typeface="Arial" pitchFamily="34" charset="-120"/>
               </a:rPr>
@@ -20212,9 +20070,9 @@
             <a:r>
               <a:rPr lang="en-US" sz="1250" dirty="0">
                 <a:solidFill>
-                  <a:srgbClr val="6E7687"/>
-                </a:solidFill>
-                <a:latin typeface="Microsoft JhengHei" pitchFamily="34" charset="0"/>
+                  <a:srgbClr val="68645C"/>
+                </a:solidFill>
+                <a:latin typeface="STHeiti" pitchFamily="34" charset="0"/>
                 <a:ea typeface="Microsoft JhengHei" pitchFamily="34" charset="-122"/>
                 <a:cs typeface="Microsoft JhengHei" pitchFamily="34" charset="-120"/>
               </a:rPr>
@@ -20241,7 +20099,7 @@
             </a:avLst>
           </a:prstGeom>
           <a:solidFill>
-            <a:srgbClr val="F3F4F7"/>
+            <a:srgbClr val="E9E3D6"/>
           </a:solidFill>
           <a:ln/>
         </p:spPr>
@@ -20277,9 +20135,9 @@
             <a:r>
               <a:rPr lang="en-US" sz="1450" b="1" dirty="0">
                 <a:solidFill>
-                  <a:srgbClr val="10131A"/>
-                </a:solidFill>
-                <a:latin typeface="Arial" pitchFamily="34" charset="0"/>
+                  <a:srgbClr val="1F1E1D"/>
+                </a:solidFill>
+                <a:latin typeface="STHeiti" pitchFamily="34" charset="0"/>
                 <a:ea typeface="Arial" pitchFamily="34" charset="-122"/>
                 <a:cs typeface="Arial" pitchFamily="34" charset="-120"/>
               </a:rPr>
@@ -20319,9 +20177,9 @@
             <a:r>
               <a:rPr lang="en-US" sz="1250" dirty="0">
                 <a:solidFill>
-                  <a:srgbClr val="6E7687"/>
-                </a:solidFill>
-                <a:latin typeface="Microsoft JhengHei" pitchFamily="34" charset="0"/>
+                  <a:srgbClr val="68645C"/>
+                </a:solidFill>
+                <a:latin typeface="STHeiti" pitchFamily="34" charset="0"/>
                 <a:ea typeface="Microsoft JhengHei" pitchFamily="34" charset="-122"/>
                 <a:cs typeface="Microsoft JhengHei" pitchFamily="34" charset="-120"/>
               </a:rPr>
@@ -20348,7 +20206,7 @@
             </a:avLst>
           </a:prstGeom>
           <a:solidFill>
-            <a:srgbClr val="10131A"/>
+            <a:srgbClr val="111B30"/>
           </a:solidFill>
           <a:ln/>
         </p:spPr>
@@ -20384,9 +20242,9 @@
             <a:r>
               <a:rPr lang="en-US" sz="1450" b="1" dirty="0">
                 <a:solidFill>
-                  <a:srgbClr val="F96167"/>
-                </a:solidFill>
-                <a:latin typeface="Arial" pitchFamily="34" charset="0"/>
+                  <a:srgbClr val="157554"/>
+                </a:solidFill>
+                <a:latin typeface="STHeiti" pitchFamily="34" charset="0"/>
                 <a:ea typeface="Arial" pitchFamily="34" charset="-122"/>
                 <a:cs typeface="Arial" pitchFamily="34" charset="-120"/>
               </a:rPr>
@@ -20428,7 +20286,7 @@
                 <a:solidFill>
                   <a:srgbClr val="9BA3B4"/>
                 </a:solidFill>
-                <a:latin typeface="Microsoft JhengHei" pitchFamily="34" charset="0"/>
+                <a:latin typeface="STHeiti" pitchFamily="34" charset="0"/>
                 <a:ea typeface="Microsoft JhengHei" pitchFamily="34" charset="-122"/>
                 <a:cs typeface="Microsoft JhengHei" pitchFamily="34" charset="-120"/>
               </a:rPr>
@@ -20465,9 +20323,9 @@
             <a:r>
               <a:rPr lang="en-US" sz="1600" i="1" dirty="0">
                 <a:solidFill>
-                  <a:srgbClr val="6E7687"/>
-                </a:solidFill>
-                <a:latin typeface="Microsoft JhengHei" pitchFamily="34" charset="0"/>
+                  <a:srgbClr val="68645C"/>
+                </a:solidFill>
+                <a:latin typeface="STHeiti" pitchFamily="34" charset="0"/>
                 <a:ea typeface="Microsoft JhengHei" pitchFamily="34" charset="-122"/>
                 <a:cs typeface="Microsoft JhengHei" pitchFamily="34" charset="-120"/>
               </a:rPr>
@@ -20504,9 +20362,9 @@
             <a:r>
               <a:rPr lang="en-US" sz="1100" dirty="0">
                 <a:solidFill>
-                  <a:srgbClr val="A8AEBC"/>
-                </a:solidFill>
-                <a:latin typeface="Arial" pitchFamily="34" charset="0"/>
+                  <a:srgbClr val="9DA89F"/>
+                </a:solidFill>
+                <a:latin typeface="STHeiti" pitchFamily="34" charset="0"/>
                 <a:ea typeface="Arial" pitchFamily="34" charset="-122"/>
                 <a:cs typeface="Arial" pitchFamily="34" charset="-120"/>
               </a:rPr>
@@ -20530,7 +20388,7 @@
     <p:bg>
       <p:bgPr>
         <a:solidFill>
-          <a:srgbClr val="FFFFFF"/>
+          <a:srgbClr val="F0EEE6"/>
         </a:solidFill>
         <a:effectLst/>
       </p:bgPr>
@@ -20564,7 +20422,7 @@
             <a:avLst/>
           </a:prstGeom>
           <a:solidFill>
-            <a:srgbClr val="F96167"/>
+            <a:srgbClr val="157554"/>
           </a:solidFill>
           <a:ln/>
         </p:spPr>
@@ -20600,9 +20458,9 @@
             <a:r>
               <a:rPr lang="en-US" sz="1200" b="1" kern="0" spc="200" dirty="0">
                 <a:solidFill>
-                  <a:srgbClr val="6E7687"/>
-                </a:solidFill>
-                <a:latin typeface="Arial" pitchFamily="34" charset="0"/>
+                  <a:srgbClr val="68645C"/>
+                </a:solidFill>
+                <a:latin typeface="STHeiti" pitchFamily="34" charset="0"/>
                 <a:ea typeface="Arial" pitchFamily="34" charset="-122"/>
                 <a:cs typeface="Arial" pitchFamily="34" charset="-120"/>
               </a:rPr>
@@ -20633,21 +20491,15 @@
           <a:bodyPr wrap="square" lIns="0" tIns="0" rIns="0" bIns="0" rtlCol="0" anchor="ctr"/>
           <a:lstStyle/>
           <a:p>
-            <a:pPr marL="0" indent="0">
-              <a:buNone/>
-            </a:pPr>
-            <a:r>
-              <a:rPr lang="en-US" sz="3400" b="1" dirty="0">
-                <a:solidFill>
-                  <a:srgbClr val="10131A"/>
-                </a:solidFill>
-                <a:latin typeface="Microsoft JhengHei" pitchFamily="34" charset="0"/>
-                <a:ea typeface="Microsoft JhengHei" pitchFamily="34" charset="-122"/>
-                <a:cs typeface="Microsoft JhengHei" pitchFamily="34" charset="-120"/>
-              </a:rPr>
-              <a:t>從已發行版本倒推下一階段</a:t>
-            </a:r>
-            <a:endParaRPr lang="en-US" sz="3400" dirty="0"/>
+            <a:r>
+              <a:rPr>
+                <a:solidFill>
+                  <a:srgbClr val="1F1E1D"/>
+                </a:solidFill>
+                <a:latin typeface="STHeiti"/>
+              </a:rPr>
+              <a:t>先用產品頁驗證，再進 private engine</a:t>
+            </a:r>
           </a:p>
         </p:txBody>
       </p:sp>
@@ -20681,9 +20533,9 @@
             <a:r>
               <a:rPr lang="en-US" sz="2000" dirty="0">
                 <a:solidFill>
-                  <a:srgbClr val="353A46"/>
-                </a:solidFill>
-                <a:latin typeface="Microsoft JhengHei" pitchFamily="34" charset="0"/>
+                  <a:srgbClr val="1F1E1D"/>
+                </a:solidFill>
+                <a:latin typeface="STHeiti" pitchFamily="34" charset="0"/>
                 <a:ea typeface="Microsoft JhengHei" pitchFamily="34" charset="-122"/>
                 <a:cs typeface="Microsoft JhengHei" pitchFamily="34" charset="-120"/>
               </a:rPr>
@@ -20710,7 +20562,7 @@
             </a:avLst>
           </a:prstGeom>
           <a:solidFill>
-            <a:srgbClr val="F3F4F7"/>
+            <a:srgbClr val="E9E3D6"/>
           </a:solidFill>
           <a:ln/>
         </p:spPr>
@@ -20734,7 +20586,7 @@
             <a:avLst/>
           </a:prstGeom>
           <a:solidFill>
-            <a:srgbClr val="8A93A6"/>
+            <a:srgbClr val="68645C"/>
           </a:solidFill>
           <a:ln/>
         </p:spPr>
@@ -20770,9 +20622,9 @@
             <a:r>
               <a:rPr lang="en-US" sz="1100" b="1" dirty="0">
                 <a:solidFill>
-                  <a:srgbClr val="FFFFFF"/>
-                </a:solidFill>
-                <a:latin typeface="Arial" pitchFamily="34" charset="0"/>
+                  <a:srgbClr val="1F1E1D"/>
+                </a:solidFill>
+                <a:latin typeface="STHeiti" pitchFamily="34" charset="0"/>
                 <a:ea typeface="Arial" pitchFamily="34" charset="-122"/>
                 <a:cs typeface="Arial" pitchFamily="34" charset="-120"/>
               </a:rPr>
@@ -20809,9 +20661,9 @@
             <a:r>
               <a:rPr lang="en-US" sz="1300" b="1" dirty="0">
                 <a:solidFill>
-                  <a:srgbClr val="10131A"/>
-                </a:solidFill>
-                <a:latin typeface="Microsoft JhengHei" pitchFamily="34" charset="0"/>
+                  <a:srgbClr val="1F1E1D"/>
+                </a:solidFill>
+                <a:latin typeface="STHeiti" pitchFamily="34" charset="0"/>
                 <a:ea typeface="Microsoft JhengHei" pitchFamily="34" charset="-122"/>
                 <a:cs typeface="Microsoft JhengHei" pitchFamily="34" charset="-120"/>
               </a:rPr>
@@ -20848,9 +20700,9 @@
             <a:r>
               <a:rPr lang="en-US" sz="1050" dirty="0">
                 <a:solidFill>
-                  <a:srgbClr val="6E7687"/>
-                </a:solidFill>
-                <a:latin typeface="Microsoft JhengHei" pitchFamily="34" charset="0"/>
+                  <a:srgbClr val="68645C"/>
+                </a:solidFill>
+                <a:latin typeface="STHeiti" pitchFamily="34" charset="0"/>
                 <a:ea typeface="Microsoft JhengHei" pitchFamily="34" charset="-122"/>
                 <a:cs typeface="Microsoft JhengHei" pitchFamily="34" charset="-120"/>
               </a:rPr>
@@ -20914,9 +20766,9 @@
             <a:r>
               <a:rPr lang="en-US" sz="1000" b="1" dirty="0">
                 <a:solidFill>
-                  <a:srgbClr val="8A93A6"/>
-                </a:solidFill>
-                <a:latin typeface="Microsoft JhengHei" pitchFamily="34" charset="0"/>
+                  <a:srgbClr val="68645C"/>
+                </a:solidFill>
+                <a:latin typeface="STHeiti" pitchFamily="34" charset="0"/>
                 <a:ea typeface="Microsoft JhengHei" pitchFamily="34" charset="-122"/>
                 <a:cs typeface="Microsoft JhengHei" pitchFamily="34" charset="-120"/>
               </a:rPr>
@@ -20943,7 +20795,7 @@
             </a:avLst>
           </a:prstGeom>
           <a:solidFill>
-            <a:srgbClr val="F3F4F7"/>
+            <a:srgbClr val="E9E3D6"/>
           </a:solidFill>
           <a:ln/>
         </p:spPr>
@@ -20967,7 +20819,7 @@
             <a:avLst/>
           </a:prstGeom>
           <a:solidFill>
-            <a:srgbClr val="F96167"/>
+            <a:srgbClr val="157554"/>
           </a:solidFill>
           <a:ln/>
         </p:spPr>
@@ -21003,9 +20855,9 @@
             <a:r>
               <a:rPr lang="en-US" sz="1100" b="1" dirty="0">
                 <a:solidFill>
-                  <a:srgbClr val="FFFFFF"/>
-                </a:solidFill>
-                <a:latin typeface="Arial" pitchFamily="34" charset="0"/>
+                  <a:srgbClr val="1F1E1D"/>
+                </a:solidFill>
+                <a:latin typeface="STHeiti" pitchFamily="34" charset="0"/>
                 <a:ea typeface="Arial" pitchFamily="34" charset="-122"/>
                 <a:cs typeface="Arial" pitchFamily="34" charset="-120"/>
               </a:rPr>
@@ -21042,9 +20894,9 @@
             <a:r>
               <a:rPr lang="en-US" sz="1300" b="1" dirty="0">
                 <a:solidFill>
-                  <a:srgbClr val="10131A"/>
-                </a:solidFill>
-                <a:latin typeface="Microsoft JhengHei" pitchFamily="34" charset="0"/>
+                  <a:srgbClr val="1F1E1D"/>
+                </a:solidFill>
+                <a:latin typeface="STHeiti" pitchFamily="34" charset="0"/>
                 <a:ea typeface="Microsoft JhengHei" pitchFamily="34" charset="-122"/>
                 <a:cs typeface="Microsoft JhengHei" pitchFamily="34" charset="-120"/>
               </a:rPr>
@@ -21081,9 +20933,9 @@
             <a:r>
               <a:rPr lang="en-US" sz="1050" dirty="0">
                 <a:solidFill>
-                  <a:srgbClr val="6E7687"/>
-                </a:solidFill>
-                <a:latin typeface="Microsoft JhengHei" pitchFamily="34" charset="0"/>
+                  <a:srgbClr val="68645C"/>
+                </a:solidFill>
+                <a:latin typeface="STHeiti" pitchFamily="34" charset="0"/>
                 <a:ea typeface="Microsoft JhengHei" pitchFamily="34" charset="-122"/>
                 <a:cs typeface="Microsoft JhengHei" pitchFamily="34" charset="-120"/>
               </a:rPr>
@@ -21147,9 +20999,9 @@
             <a:r>
               <a:rPr lang="en-US" sz="1000" b="1" dirty="0">
                 <a:solidFill>
-                  <a:srgbClr val="F96167"/>
-                </a:solidFill>
-                <a:latin typeface="Microsoft JhengHei" pitchFamily="34" charset="0"/>
+                  <a:srgbClr val="157554"/>
+                </a:solidFill>
+                <a:latin typeface="STHeiti" pitchFamily="34" charset="0"/>
                 <a:ea typeface="Microsoft JhengHei" pitchFamily="34" charset="-122"/>
                 <a:cs typeface="Microsoft JhengHei" pitchFamily="34" charset="-120"/>
               </a:rPr>
@@ -21176,7 +21028,7 @@
             </a:avLst>
           </a:prstGeom>
           <a:solidFill>
-            <a:srgbClr val="F3F4F7"/>
+            <a:srgbClr val="E9E3D6"/>
           </a:solidFill>
           <a:ln/>
         </p:spPr>
@@ -21200,7 +21052,7 @@
             <a:avLst/>
           </a:prstGeom>
           <a:solidFill>
-            <a:srgbClr val="1FB6A6"/>
+            <a:srgbClr val="157554"/>
           </a:solidFill>
           <a:ln/>
         </p:spPr>
@@ -21236,9 +21088,9 @@
             <a:r>
               <a:rPr lang="en-US" sz="1100" b="1" dirty="0">
                 <a:solidFill>
-                  <a:srgbClr val="FFFFFF"/>
-                </a:solidFill>
-                <a:latin typeface="Arial" pitchFamily="34" charset="0"/>
+                  <a:srgbClr val="1F1E1D"/>
+                </a:solidFill>
+                <a:latin typeface="STHeiti" pitchFamily="34" charset="0"/>
                 <a:ea typeface="Arial" pitchFamily="34" charset="-122"/>
                 <a:cs typeface="Arial" pitchFamily="34" charset="-120"/>
               </a:rPr>
@@ -21275,9 +21127,9 @@
             <a:r>
               <a:rPr lang="en-US" sz="1300" b="1" dirty="0">
                 <a:solidFill>
-                  <a:srgbClr val="10131A"/>
-                </a:solidFill>
-                <a:latin typeface="Microsoft JhengHei" pitchFamily="34" charset="0"/>
+                  <a:srgbClr val="1F1E1D"/>
+                </a:solidFill>
+                <a:latin typeface="STHeiti" pitchFamily="34" charset="0"/>
                 <a:ea typeface="Microsoft JhengHei" pitchFamily="34" charset="-122"/>
                 <a:cs typeface="Microsoft JhengHei" pitchFamily="34" charset="-120"/>
               </a:rPr>
@@ -21314,9 +21166,9 @@
             <a:r>
               <a:rPr lang="en-US" sz="1050" dirty="0">
                 <a:solidFill>
-                  <a:srgbClr val="6E7687"/>
-                </a:solidFill>
-                <a:latin typeface="Microsoft JhengHei" pitchFamily="34" charset="0"/>
+                  <a:srgbClr val="68645C"/>
+                </a:solidFill>
+                <a:latin typeface="STHeiti" pitchFamily="34" charset="0"/>
                 <a:ea typeface="Microsoft JhengHei" pitchFamily="34" charset="-122"/>
                 <a:cs typeface="Microsoft JhengHei" pitchFamily="34" charset="-120"/>
               </a:rPr>
@@ -21380,9 +21232,9 @@
             <a:r>
               <a:rPr lang="en-US" sz="1000" b="1" dirty="0">
                 <a:solidFill>
-                  <a:srgbClr val="1FB6A6"/>
-                </a:solidFill>
-                <a:latin typeface="Microsoft JhengHei" pitchFamily="34" charset="0"/>
+                  <a:srgbClr val="157554"/>
+                </a:solidFill>
+                <a:latin typeface="STHeiti" pitchFamily="34" charset="0"/>
                 <a:ea typeface="Microsoft JhengHei" pitchFamily="34" charset="-122"/>
                 <a:cs typeface="Microsoft JhengHei" pitchFamily="34" charset="-120"/>
               </a:rPr>
@@ -21409,7 +21261,7 @@
             </a:avLst>
           </a:prstGeom>
           <a:solidFill>
-            <a:srgbClr val="F3F4F7"/>
+            <a:srgbClr val="E9E3D6"/>
           </a:solidFill>
           <a:ln/>
         </p:spPr>
@@ -21433,7 +21285,7 @@
             <a:avLst/>
           </a:prstGeom>
           <a:solidFill>
-            <a:srgbClr val="10131A"/>
+            <a:srgbClr val="111B30"/>
           </a:solidFill>
           <a:ln/>
         </p:spPr>
@@ -21469,9 +21321,9 @@
             <a:r>
               <a:rPr lang="en-US" sz="1100" b="1" dirty="0">
                 <a:solidFill>
-                  <a:srgbClr val="FFFFFF"/>
-                </a:solidFill>
-                <a:latin typeface="Arial" pitchFamily="34" charset="0"/>
+                  <a:srgbClr val="1F1E1D"/>
+                </a:solidFill>
+                <a:latin typeface="STHeiti" pitchFamily="34" charset="0"/>
                 <a:ea typeface="Arial" pitchFamily="34" charset="-122"/>
                 <a:cs typeface="Arial" pitchFamily="34" charset="-120"/>
               </a:rPr>
@@ -21508,9 +21360,9 @@
             <a:r>
               <a:rPr lang="en-US" sz="1300" b="1" dirty="0">
                 <a:solidFill>
-                  <a:srgbClr val="10131A"/>
-                </a:solidFill>
-                <a:latin typeface="Microsoft JhengHei" pitchFamily="34" charset="0"/>
+                  <a:srgbClr val="1F1E1D"/>
+                </a:solidFill>
+                <a:latin typeface="STHeiti" pitchFamily="34" charset="0"/>
                 <a:ea typeface="Microsoft JhengHei" pitchFamily="34" charset="-122"/>
                 <a:cs typeface="Microsoft JhengHei" pitchFamily="34" charset="-120"/>
               </a:rPr>
@@ -21547,9 +21399,9 @@
             <a:r>
               <a:rPr lang="en-US" sz="1050" dirty="0">
                 <a:solidFill>
-                  <a:srgbClr val="6E7687"/>
-                </a:solidFill>
-                <a:latin typeface="Microsoft JhengHei" pitchFamily="34" charset="0"/>
+                  <a:srgbClr val="68645C"/>
+                </a:solidFill>
+                <a:latin typeface="STHeiti" pitchFamily="34" charset="0"/>
                 <a:ea typeface="Microsoft JhengHei" pitchFamily="34" charset="-122"/>
                 <a:cs typeface="Microsoft JhengHei" pitchFamily="34" charset="-120"/>
               </a:rPr>
@@ -21613,9 +21465,9 @@
             <a:r>
               <a:rPr lang="en-US" sz="1000" b="1" dirty="0">
                 <a:solidFill>
-                  <a:srgbClr val="10131A"/>
-                </a:solidFill>
-                <a:latin typeface="Microsoft JhengHei" pitchFamily="34" charset="0"/>
+                  <a:srgbClr val="1F1E1D"/>
+                </a:solidFill>
+                <a:latin typeface="STHeiti" pitchFamily="34" charset="0"/>
                 <a:ea typeface="Microsoft JhengHei" pitchFamily="34" charset="-122"/>
                 <a:cs typeface="Microsoft JhengHei" pitchFamily="34" charset="-120"/>
               </a:rPr>
@@ -21642,7 +21494,7 @@
             </a:avLst>
           </a:prstGeom>
           <a:solidFill>
-            <a:srgbClr val="F3F4F7"/>
+            <a:srgbClr val="E9E3D6"/>
           </a:solidFill>
           <a:ln/>
         </p:spPr>
@@ -21666,7 +21518,7 @@
             <a:avLst/>
           </a:prstGeom>
           <a:solidFill>
-            <a:srgbClr val="4A5568"/>
+            <a:srgbClr val="34445E"/>
           </a:solidFill>
           <a:ln/>
         </p:spPr>
@@ -21702,9 +21554,9 @@
             <a:r>
               <a:rPr lang="en-US" sz="1100" b="1" dirty="0">
                 <a:solidFill>
-                  <a:srgbClr val="FFFFFF"/>
-                </a:solidFill>
-                <a:latin typeface="Arial" pitchFamily="34" charset="0"/>
+                  <a:srgbClr val="1F1E1D"/>
+                </a:solidFill>
+                <a:latin typeface="STHeiti" pitchFamily="34" charset="0"/>
                 <a:ea typeface="Arial" pitchFamily="34" charset="-122"/>
                 <a:cs typeface="Arial" pitchFamily="34" charset="-120"/>
               </a:rPr>
@@ -21741,9 +21593,9 @@
             <a:r>
               <a:rPr lang="en-US" sz="1300" b="1" dirty="0">
                 <a:solidFill>
-                  <a:srgbClr val="10131A"/>
-                </a:solidFill>
-                <a:latin typeface="Microsoft JhengHei" pitchFamily="34" charset="0"/>
+                  <a:srgbClr val="1F1E1D"/>
+                </a:solidFill>
+                <a:latin typeface="STHeiti" pitchFamily="34" charset="0"/>
                 <a:ea typeface="Microsoft JhengHei" pitchFamily="34" charset="-122"/>
                 <a:cs typeface="Microsoft JhengHei" pitchFamily="34" charset="-120"/>
               </a:rPr>
@@ -21780,9 +21632,9 @@
             <a:r>
               <a:rPr lang="en-US" sz="1050" dirty="0">
                 <a:solidFill>
-                  <a:srgbClr val="6E7687"/>
-                </a:solidFill>
-                <a:latin typeface="Microsoft JhengHei" pitchFamily="34" charset="0"/>
+                  <a:srgbClr val="68645C"/>
+                </a:solidFill>
+                <a:latin typeface="STHeiti" pitchFamily="34" charset="0"/>
                 <a:ea typeface="Microsoft JhengHei" pitchFamily="34" charset="-122"/>
                 <a:cs typeface="Microsoft JhengHei" pitchFamily="34" charset="-120"/>
               </a:rPr>
@@ -21848,7 +21700,7 @@
                 <a:solidFill>
                   <a:srgbClr val="4A5568"/>
                 </a:solidFill>
-                <a:latin typeface="Microsoft JhengHei" pitchFamily="34" charset="0"/>
+                <a:latin typeface="STHeiti" pitchFamily="34" charset="0"/>
                 <a:ea typeface="Microsoft JhengHei" pitchFamily="34" charset="-122"/>
                 <a:cs typeface="Microsoft JhengHei" pitchFamily="34" charset="-120"/>
               </a:rPr>
@@ -21875,7 +21727,7 @@
             </a:avLst>
           </a:prstGeom>
           <a:solidFill>
-            <a:srgbClr val="F3F4F7"/>
+            <a:srgbClr val="E9E3D6"/>
           </a:solidFill>
           <a:ln/>
         </p:spPr>
@@ -21899,7 +21751,7 @@
             <a:avLst/>
           </a:prstGeom>
           <a:solidFill>
-            <a:srgbClr val="F96167"/>
+            <a:srgbClr val="157554"/>
           </a:solidFill>
           <a:ln/>
         </p:spPr>
@@ -21935,9 +21787,9 @@
             <a:r>
               <a:rPr lang="en-US" sz="1100" b="1" dirty="0">
                 <a:solidFill>
-                  <a:srgbClr val="FFFFFF"/>
-                </a:solidFill>
-                <a:latin typeface="Arial" pitchFamily="34" charset="0"/>
+                  <a:srgbClr val="1F1E1D"/>
+                </a:solidFill>
+                <a:latin typeface="STHeiti" pitchFamily="34" charset="0"/>
                 <a:ea typeface="Arial" pitchFamily="34" charset="-122"/>
                 <a:cs typeface="Arial" pitchFamily="34" charset="-120"/>
               </a:rPr>
@@ -21974,9 +21826,9 @@
             <a:r>
               <a:rPr lang="en-US" sz="1300" b="1" dirty="0">
                 <a:solidFill>
-                  <a:srgbClr val="10131A"/>
-                </a:solidFill>
-                <a:latin typeface="Microsoft JhengHei" pitchFamily="34" charset="0"/>
+                  <a:srgbClr val="1F1E1D"/>
+                </a:solidFill>
+                <a:latin typeface="STHeiti" pitchFamily="34" charset="0"/>
                 <a:ea typeface="Microsoft JhengHei" pitchFamily="34" charset="-122"/>
                 <a:cs typeface="Microsoft JhengHei" pitchFamily="34" charset="-120"/>
               </a:rPr>
@@ -22013,9 +21865,9 @@
             <a:r>
               <a:rPr lang="en-US" sz="1050" dirty="0">
                 <a:solidFill>
-                  <a:srgbClr val="6E7687"/>
-                </a:solidFill>
-                <a:latin typeface="Microsoft JhengHei" pitchFamily="34" charset="0"/>
+                  <a:srgbClr val="68645C"/>
+                </a:solidFill>
+                <a:latin typeface="STHeiti" pitchFamily="34" charset="0"/>
                 <a:ea typeface="Microsoft JhengHei" pitchFamily="34" charset="-122"/>
                 <a:cs typeface="Microsoft JhengHei" pitchFamily="34" charset="-120"/>
               </a:rPr>
@@ -22079,9 +21931,9 @@
             <a:r>
               <a:rPr lang="en-US" sz="1000" b="1" dirty="0">
                 <a:solidFill>
-                  <a:srgbClr val="F96167"/>
-                </a:solidFill>
-                <a:latin typeface="Microsoft JhengHei" pitchFamily="34" charset="0"/>
+                  <a:srgbClr val="157554"/>
+                </a:solidFill>
+                <a:latin typeface="STHeiti" pitchFamily="34" charset="0"/>
                 <a:ea typeface="Microsoft JhengHei" pitchFamily="34" charset="-122"/>
                 <a:cs typeface="Microsoft JhengHei" pitchFamily="34" charset="-120"/>
               </a:rPr>
@@ -22108,7 +21960,7 @@
             </a:avLst>
           </a:prstGeom>
           <a:solidFill>
-            <a:srgbClr val="F3F4F7"/>
+            <a:srgbClr val="E9E3D6"/>
           </a:solidFill>
           <a:ln/>
         </p:spPr>
@@ -22132,7 +21984,7 @@
             <a:avLst/>
           </a:prstGeom>
           <a:solidFill>
-            <a:srgbClr val="1FB6A6"/>
+            <a:srgbClr val="157554"/>
           </a:solidFill>
           <a:ln/>
         </p:spPr>
@@ -22168,9 +22020,9 @@
             <a:r>
               <a:rPr lang="en-US" sz="1100" b="1" dirty="0">
                 <a:solidFill>
-                  <a:srgbClr val="FFFFFF"/>
-                </a:solidFill>
-                <a:latin typeface="Arial" pitchFamily="34" charset="0"/>
+                  <a:srgbClr val="1F1E1D"/>
+                </a:solidFill>
+                <a:latin typeface="STHeiti" pitchFamily="34" charset="0"/>
                 <a:ea typeface="Arial" pitchFamily="34" charset="-122"/>
                 <a:cs typeface="Arial" pitchFamily="34" charset="-120"/>
               </a:rPr>
@@ -22207,9 +22059,9 @@
             <a:r>
               <a:rPr lang="en-US" sz="1300" b="1" dirty="0">
                 <a:solidFill>
-                  <a:srgbClr val="10131A"/>
-                </a:solidFill>
-                <a:latin typeface="Microsoft JhengHei" pitchFamily="34" charset="0"/>
+                  <a:srgbClr val="1F1E1D"/>
+                </a:solidFill>
+                <a:latin typeface="STHeiti" pitchFamily="34" charset="0"/>
                 <a:ea typeface="Microsoft JhengHei" pitchFamily="34" charset="-122"/>
                 <a:cs typeface="Microsoft JhengHei" pitchFamily="34" charset="-120"/>
               </a:rPr>
@@ -22246,9 +22098,9 @@
             <a:r>
               <a:rPr lang="en-US" sz="1050" dirty="0">
                 <a:solidFill>
-                  <a:srgbClr val="6E7687"/>
-                </a:solidFill>
-                <a:latin typeface="Microsoft JhengHei" pitchFamily="34" charset="0"/>
+                  <a:srgbClr val="68645C"/>
+                </a:solidFill>
+                <a:latin typeface="STHeiti" pitchFamily="34" charset="0"/>
                 <a:ea typeface="Microsoft JhengHei" pitchFamily="34" charset="-122"/>
                 <a:cs typeface="Microsoft JhengHei" pitchFamily="34" charset="-120"/>
               </a:rPr>
@@ -22312,9 +22164,9 @@
             <a:r>
               <a:rPr lang="en-US" sz="1000" b="1" dirty="0">
                 <a:solidFill>
-                  <a:srgbClr val="1FB6A6"/>
-                </a:solidFill>
-                <a:latin typeface="Microsoft JhengHei" pitchFamily="34" charset="0"/>
+                  <a:srgbClr val="157554"/>
+                </a:solidFill>
+                <a:latin typeface="STHeiti" pitchFamily="34" charset="0"/>
                 <a:ea typeface="Microsoft JhengHei" pitchFamily="34" charset="-122"/>
                 <a:cs typeface="Microsoft JhengHei" pitchFamily="34" charset="-120"/>
               </a:rPr>
@@ -22341,7 +22193,7 @@
             </a:avLst>
           </a:prstGeom>
           <a:solidFill>
-            <a:srgbClr val="F3F4F7"/>
+            <a:srgbClr val="E9E3D6"/>
           </a:solidFill>
           <a:ln/>
         </p:spPr>
@@ -22365,7 +22217,7 @@
             <a:avLst/>
           </a:prstGeom>
           <a:solidFill>
-            <a:srgbClr val="10131A"/>
+            <a:srgbClr val="111B30"/>
           </a:solidFill>
           <a:ln/>
         </p:spPr>
@@ -22401,9 +22253,9 @@
             <a:r>
               <a:rPr lang="en-US" sz="1100" b="1" dirty="0">
                 <a:solidFill>
-                  <a:srgbClr val="FFFFFF"/>
-                </a:solidFill>
-                <a:latin typeface="Arial" pitchFamily="34" charset="0"/>
+                  <a:srgbClr val="1F1E1D"/>
+                </a:solidFill>
+                <a:latin typeface="STHeiti" pitchFamily="34" charset="0"/>
                 <a:ea typeface="Arial" pitchFamily="34" charset="-122"/>
                 <a:cs typeface="Arial" pitchFamily="34" charset="-120"/>
               </a:rPr>
@@ -22440,9 +22292,9 @@
             <a:r>
               <a:rPr lang="en-US" sz="1300" b="1" dirty="0">
                 <a:solidFill>
-                  <a:srgbClr val="10131A"/>
-                </a:solidFill>
-                <a:latin typeface="Microsoft JhengHei" pitchFamily="34" charset="0"/>
+                  <a:srgbClr val="1F1E1D"/>
+                </a:solidFill>
+                <a:latin typeface="STHeiti" pitchFamily="34" charset="0"/>
                 <a:ea typeface="Microsoft JhengHei" pitchFamily="34" charset="-122"/>
                 <a:cs typeface="Microsoft JhengHei" pitchFamily="34" charset="-120"/>
               </a:rPr>
@@ -22479,9 +22331,9 @@
             <a:r>
               <a:rPr lang="en-US" sz="1050" dirty="0">
                 <a:solidFill>
-                  <a:srgbClr val="6E7687"/>
-                </a:solidFill>
-                <a:latin typeface="Microsoft JhengHei" pitchFamily="34" charset="0"/>
+                  <a:srgbClr val="68645C"/>
+                </a:solidFill>
+                <a:latin typeface="STHeiti" pitchFamily="34" charset="0"/>
                 <a:ea typeface="Microsoft JhengHei" pitchFamily="34" charset="-122"/>
                 <a:cs typeface="Microsoft JhengHei" pitchFamily="34" charset="-120"/>
               </a:rPr>
@@ -22545,9 +22397,9 @@
             <a:r>
               <a:rPr lang="en-US" sz="1000" b="1" dirty="0">
                 <a:solidFill>
-                  <a:srgbClr val="10131A"/>
-                </a:solidFill>
-                <a:latin typeface="Microsoft JhengHei" pitchFamily="34" charset="0"/>
+                  <a:srgbClr val="1F1E1D"/>
+                </a:solidFill>
+                <a:latin typeface="STHeiti" pitchFamily="34" charset="0"/>
                 <a:ea typeface="Microsoft JhengHei" pitchFamily="34" charset="-122"/>
                 <a:cs typeface="Microsoft JhengHei" pitchFamily="34" charset="-120"/>
               </a:rPr>
@@ -22574,7 +22426,7 @@
             </a:avLst>
           </a:prstGeom>
           <a:solidFill>
-            <a:srgbClr val="F3F4F7"/>
+            <a:srgbClr val="E9E3D6"/>
           </a:solidFill>
           <a:ln/>
         </p:spPr>
@@ -22598,7 +22450,7 @@
             <a:avLst/>
           </a:prstGeom>
           <a:solidFill>
-            <a:srgbClr val="4A5568"/>
+            <a:srgbClr val="34445E"/>
           </a:solidFill>
           <a:ln/>
         </p:spPr>
@@ -22634,9 +22486,9 @@
             <a:r>
               <a:rPr lang="en-US" sz="1100" b="1" dirty="0">
                 <a:solidFill>
-                  <a:srgbClr val="FFFFFF"/>
-                </a:solidFill>
-                <a:latin typeface="Arial" pitchFamily="34" charset="0"/>
+                  <a:srgbClr val="1F1E1D"/>
+                </a:solidFill>
+                <a:latin typeface="STHeiti" pitchFamily="34" charset="0"/>
                 <a:ea typeface="Arial" pitchFamily="34" charset="-122"/>
                 <a:cs typeface="Arial" pitchFamily="34" charset="-120"/>
               </a:rPr>
@@ -22673,9 +22525,9 @@
             <a:r>
               <a:rPr lang="en-US" sz="1300" b="1" dirty="0">
                 <a:solidFill>
-                  <a:srgbClr val="10131A"/>
-                </a:solidFill>
-                <a:latin typeface="Microsoft JhengHei" pitchFamily="34" charset="0"/>
+                  <a:srgbClr val="1F1E1D"/>
+                </a:solidFill>
+                <a:latin typeface="STHeiti" pitchFamily="34" charset="0"/>
                 <a:ea typeface="Microsoft JhengHei" pitchFamily="34" charset="-122"/>
                 <a:cs typeface="Microsoft JhengHei" pitchFamily="34" charset="-120"/>
               </a:rPr>
@@ -22712,9 +22564,9 @@
             <a:r>
               <a:rPr lang="en-US" sz="1050" dirty="0">
                 <a:solidFill>
-                  <a:srgbClr val="6E7687"/>
-                </a:solidFill>
-                <a:latin typeface="Microsoft JhengHei" pitchFamily="34" charset="0"/>
+                  <a:srgbClr val="68645C"/>
+                </a:solidFill>
+                <a:latin typeface="STHeiti" pitchFamily="34" charset="0"/>
                 <a:ea typeface="Microsoft JhengHei" pitchFamily="34" charset="-122"/>
                 <a:cs typeface="Microsoft JhengHei" pitchFamily="34" charset="-120"/>
               </a:rPr>
@@ -22780,7 +22632,7 @@
                 <a:solidFill>
                   <a:srgbClr val="4A5568"/>
                 </a:solidFill>
-                <a:latin typeface="Microsoft JhengHei" pitchFamily="34" charset="0"/>
+                <a:latin typeface="STHeiti" pitchFamily="34" charset="0"/>
                 <a:ea typeface="Microsoft JhengHei" pitchFamily="34" charset="-122"/>
                 <a:cs typeface="Microsoft JhengHei" pitchFamily="34" charset="-120"/>
               </a:rPr>
@@ -22817,9 +22669,9 @@
             <a:r>
               <a:rPr lang="en-US" sz="1100" dirty="0">
                 <a:solidFill>
-                  <a:srgbClr val="A8AEBC"/>
-                </a:solidFill>
-                <a:latin typeface="Arial" pitchFamily="34" charset="0"/>
+                  <a:srgbClr val="9DA89F"/>
+                </a:solidFill>
+                <a:latin typeface="STHeiti" pitchFamily="34" charset="0"/>
                 <a:ea typeface="Arial" pitchFamily="34" charset="-122"/>
                 <a:cs typeface="Arial" pitchFamily="34" charset="-120"/>
               </a:rPr>
@@ -22843,7 +22695,7 @@
     <p:bg>
       <p:bgPr>
         <a:solidFill>
-          <a:srgbClr val="FFFFFF"/>
+          <a:srgbClr val="F0EEE6"/>
         </a:solidFill>
         <a:effectLst/>
       </p:bgPr>
@@ -22877,7 +22729,7 @@
             <a:avLst/>
           </a:prstGeom>
           <a:solidFill>
-            <a:srgbClr val="F96167"/>
+            <a:srgbClr val="157554"/>
           </a:solidFill>
           <a:ln/>
         </p:spPr>
@@ -22913,9 +22765,9 @@
             <a:r>
               <a:rPr lang="en-US" sz="1200" b="1" kern="0" spc="200" dirty="0">
                 <a:solidFill>
-                  <a:srgbClr val="6E7687"/>
-                </a:solidFill>
-                <a:latin typeface="Arial" pitchFamily="34" charset="0"/>
+                  <a:srgbClr val="68645C"/>
+                </a:solidFill>
+                <a:latin typeface="STHeiti" pitchFamily="34" charset="0"/>
                 <a:ea typeface="Arial" pitchFamily="34" charset="-122"/>
                 <a:cs typeface="Arial" pitchFamily="34" charset="-120"/>
               </a:rPr>
@@ -22946,21 +22798,15 @@
           <a:bodyPr wrap="square" lIns="0" tIns="0" rIns="0" bIns="0" rtlCol="0" anchor="ctr"/>
           <a:lstStyle/>
           <a:p>
-            <a:pPr marL="0" indent="0">
-              <a:buNone/>
-            </a:pPr>
-            <a:r>
-              <a:rPr lang="en-US" sz="3400" b="1" dirty="0">
-                <a:solidFill>
-                  <a:srgbClr val="10131A"/>
-                </a:solidFill>
-                <a:latin typeface="Microsoft JhengHei" pitchFamily="34" charset="0"/>
-                <a:ea typeface="Microsoft JhengHei" pitchFamily="34" charset="-122"/>
-                <a:cs typeface="Microsoft JhengHei" pitchFamily="34" charset="-120"/>
-              </a:rPr>
-              <a:t>Plaid 之於金融,Stripe 之於支付</a:t>
-            </a:r>
-            <a:endParaRPr lang="en-US" sz="3400" dirty="0"/>
+            <a:r>
+              <a:rPr>
+                <a:solidFill>
+                  <a:srgbClr val="1F1E1D"/>
+                </a:solidFill>
+                <a:latin typeface="STHeiti"/>
+              </a:rPr>
+              <a:t>Pacevera 是 personal fitness decision layer</a:t>
+            </a:r>
           </a:p>
         </p:txBody>
       </p:sp>
@@ -22994,9 +22840,9 @@
             <a:r>
               <a:rPr lang="en-US" sz="2000" dirty="0">
                 <a:solidFill>
-                  <a:srgbClr val="353A46"/>
-                </a:solidFill>
-                <a:latin typeface="Microsoft JhengHei" pitchFamily="34" charset="0"/>
+                  <a:srgbClr val="1F1E1D"/>
+                </a:solidFill>
+                <a:latin typeface="STHeiti" pitchFamily="34" charset="0"/>
                 <a:ea typeface="Microsoft JhengHei" pitchFamily="34" charset="-122"/>
                 <a:cs typeface="Microsoft JhengHei" pitchFamily="34" charset="-120"/>
               </a:rPr>
@@ -23023,7 +22869,7 @@
             </a:avLst>
           </a:prstGeom>
           <a:solidFill>
-            <a:srgbClr val="F3F4F7"/>
+            <a:srgbClr val="E9E3D6"/>
           </a:solidFill>
           <a:ln/>
         </p:spPr>
@@ -23059,9 +22905,9 @@
             <a:r>
               <a:rPr lang="en-US" sz="2200" b="1" dirty="0">
                 <a:solidFill>
-                  <a:srgbClr val="3A4050"/>
-                </a:solidFill>
-                <a:latin typeface="Arial" pitchFamily="34" charset="0"/>
+                  <a:srgbClr val="DAD2C3"/>
+                </a:solidFill>
+                <a:latin typeface="STHeiti" pitchFamily="34" charset="0"/>
                 <a:ea typeface="Arial" pitchFamily="34" charset="-122"/>
                 <a:cs typeface="Arial" pitchFamily="34" charset="-120"/>
               </a:rPr>
@@ -23101,9 +22947,9 @@
             <a:r>
               <a:rPr lang="en-US" sz="1400" dirty="0">
                 <a:solidFill>
-                  <a:srgbClr val="6E7687"/>
-                </a:solidFill>
-                <a:latin typeface="Microsoft JhengHei" pitchFamily="34" charset="0"/>
+                  <a:srgbClr val="68645C"/>
+                </a:solidFill>
+                <a:latin typeface="STHeiti" pitchFamily="34" charset="0"/>
                 <a:ea typeface="Microsoft JhengHei" pitchFamily="34" charset="-122"/>
                 <a:cs typeface="Microsoft JhengHei" pitchFamily="34" charset="-120"/>
               </a:rPr>
@@ -23130,7 +22976,7 @@
             </a:avLst>
           </a:prstGeom>
           <a:solidFill>
-            <a:srgbClr val="F3F4F7"/>
+            <a:srgbClr val="E9E3D6"/>
           </a:solidFill>
           <a:ln/>
         </p:spPr>
@@ -23166,9 +23012,9 @@
             <a:r>
               <a:rPr lang="en-US" sz="2200" b="1" dirty="0">
                 <a:solidFill>
-                  <a:srgbClr val="3A4050"/>
-                </a:solidFill>
-                <a:latin typeface="Arial" pitchFamily="34" charset="0"/>
+                  <a:srgbClr val="DAD2C3"/>
+                </a:solidFill>
+                <a:latin typeface="STHeiti" pitchFamily="34" charset="0"/>
                 <a:ea typeface="Arial" pitchFamily="34" charset="-122"/>
                 <a:cs typeface="Arial" pitchFamily="34" charset="-120"/>
               </a:rPr>
@@ -23208,9 +23054,9 @@
             <a:r>
               <a:rPr lang="en-US" sz="1400" dirty="0">
                 <a:solidFill>
-                  <a:srgbClr val="6E7687"/>
-                </a:solidFill>
-                <a:latin typeface="Microsoft JhengHei" pitchFamily="34" charset="0"/>
+                  <a:srgbClr val="68645C"/>
+                </a:solidFill>
+                <a:latin typeface="STHeiti" pitchFamily="34" charset="0"/>
                 <a:ea typeface="Microsoft JhengHei" pitchFamily="34" charset="-122"/>
                 <a:cs typeface="Microsoft JhengHei" pitchFamily="34" charset="-120"/>
               </a:rPr>
@@ -23237,7 +23083,7 @@
             </a:avLst>
           </a:prstGeom>
           <a:solidFill>
-            <a:srgbClr val="10131A"/>
+            <a:srgbClr val="111B30"/>
           </a:solidFill>
           <a:ln/>
         </p:spPr>
@@ -23273,9 +23119,9 @@
             <a:r>
               <a:rPr lang="en-US" sz="2200" b="1" dirty="0">
                 <a:solidFill>
-                  <a:srgbClr val="F96167"/>
-                </a:solidFill>
-                <a:latin typeface="Arial" pitchFamily="34" charset="0"/>
+                  <a:srgbClr val="157554"/>
+                </a:solidFill>
+                <a:latin typeface="STHeiti" pitchFamily="34" charset="0"/>
                 <a:ea typeface="Arial" pitchFamily="34" charset="-122"/>
                 <a:cs typeface="Arial" pitchFamily="34" charset="-120"/>
               </a:rPr>
@@ -23317,7 +23163,7 @@
                 <a:solidFill>
                   <a:srgbClr val="D6DAE4"/>
                 </a:solidFill>
-                <a:latin typeface="Microsoft JhengHei" pitchFamily="34" charset="0"/>
+                <a:latin typeface="STHeiti" pitchFamily="34" charset="0"/>
                 <a:ea typeface="Microsoft JhengHei" pitchFamily="34" charset="-122"/>
                 <a:cs typeface="Microsoft JhengHei" pitchFamily="34" charset="-120"/>
               </a:rPr>
@@ -23337,7 +23183,7 @@
                 <a:solidFill>
                   <a:srgbClr val="D6DAE4"/>
                 </a:solidFill>
-                <a:latin typeface="Microsoft JhengHei" pitchFamily="34" charset="0"/>
+                <a:latin typeface="STHeiti" pitchFamily="34" charset="0"/>
                 <a:ea typeface="Microsoft JhengHei" pitchFamily="34" charset="-122"/>
                 <a:cs typeface="Microsoft JhengHei" pitchFamily="34" charset="-120"/>
               </a:rPr>
@@ -23374,9 +23220,9 @@
             <a:r>
               <a:rPr lang="en-US" sz="1250" i="1" dirty="0">
                 <a:solidFill>
-                  <a:srgbClr val="6E7687"/>
-                </a:solidFill>
-                <a:latin typeface="Microsoft JhengHei" pitchFamily="34" charset="0"/>
+                  <a:srgbClr val="68645C"/>
+                </a:solidFill>
+                <a:latin typeface="STHeiti" pitchFamily="34" charset="0"/>
                 <a:ea typeface="Microsoft JhengHei" pitchFamily="34" charset="-122"/>
                 <a:cs typeface="Microsoft JhengHei" pitchFamily="34" charset="-120"/>
               </a:rPr>
@@ -23413,9 +23259,9 @@
             <a:r>
               <a:rPr lang="en-US" sz="1100" dirty="0">
                 <a:solidFill>
-                  <a:srgbClr val="A8AEBC"/>
-                </a:solidFill>
-                <a:latin typeface="Arial" pitchFamily="34" charset="0"/>
+                  <a:srgbClr val="9DA89F"/>
+                </a:solidFill>
+                <a:latin typeface="STHeiti" pitchFamily="34" charset="0"/>
                 <a:ea typeface="Arial" pitchFamily="34" charset="-122"/>
                 <a:cs typeface="Arial" pitchFamily="34" charset="-120"/>
               </a:rPr>
@@ -23439,7 +23285,7 @@
     <p:bg>
       <p:bgPr>
         <a:solidFill>
-          <a:srgbClr val="10131A"/>
+          <a:srgbClr val="111B30"/>
         </a:solidFill>
         <a:effectLst/>
       </p:bgPr>
@@ -23473,7 +23319,7 @@
             <a:avLst/>
           </a:prstGeom>
           <a:solidFill>
-            <a:srgbClr val="F96167">
+            <a:srgbClr val="157554">
               <a:alpha val="12000"/>
             </a:srgbClr>
           </a:solidFill>
@@ -23499,7 +23345,7 @@
             <a:avLst/>
           </a:prstGeom>
           <a:solidFill>
-            <a:srgbClr val="F96167"/>
+            <a:srgbClr val="157554"/>
           </a:solidFill>
           <a:ln/>
         </p:spPr>
@@ -23535,9 +23381,9 @@
             <a:r>
               <a:rPr lang="en-US" sz="1200" b="1" kern="0" spc="200" dirty="0">
                 <a:solidFill>
-                  <a:srgbClr val="8A93A6"/>
-                </a:solidFill>
-                <a:latin typeface="Arial" pitchFamily="34" charset="0"/>
+                  <a:srgbClr val="9FAEBE"/>
+                </a:solidFill>
+                <a:latin typeface="STHeiti" pitchFamily="34" charset="0"/>
                 <a:ea typeface="Arial" pitchFamily="34" charset="-122"/>
                 <a:cs typeface="Arial" pitchFamily="34" charset="-120"/>
               </a:rPr>
@@ -23577,9 +23423,9 @@
             <a:r>
               <a:rPr lang="en-US" sz="3300" b="1" dirty="0">
                 <a:solidFill>
-                  <a:srgbClr val="FFFFFF"/>
-                </a:solidFill>
-                <a:latin typeface="Microsoft JhengHei" pitchFamily="34" charset="0"/>
+                  <a:srgbClr val="FAF9F5"/>
+                </a:solidFill>
+                <a:latin typeface="STHeiti" pitchFamily="34" charset="0"/>
                 <a:ea typeface="Microsoft JhengHei" pitchFamily="34" charset="-122"/>
                 <a:cs typeface="Microsoft JhengHei" pitchFamily="34" charset="-120"/>
               </a:rPr>
@@ -23597,9 +23443,9 @@
             <a:r>
               <a:rPr lang="en-US" sz="3300" b="1" dirty="0">
                 <a:solidFill>
-                  <a:srgbClr val="FFFFFF"/>
-                </a:solidFill>
-                <a:latin typeface="Microsoft JhengHei" pitchFamily="34" charset="0"/>
+                  <a:srgbClr val="FAF9F5"/>
+                </a:solidFill>
+                <a:latin typeface="STHeiti" pitchFamily="34" charset="0"/>
                 <a:ea typeface="Microsoft JhengHei" pitchFamily="34" charset="-122"/>
                 <a:cs typeface="Microsoft JhengHei" pitchFamily="34" charset="-120"/>
               </a:rPr>
@@ -23617,9 +23463,9 @@
             <a:r>
               <a:rPr lang="en-US" sz="3300" b="1" dirty="0">
                 <a:solidFill>
-                  <a:srgbClr val="FFFFFF"/>
-                </a:solidFill>
-                <a:latin typeface="Microsoft JhengHei" pitchFamily="34" charset="0"/>
+                  <a:srgbClr val="FAF9F5"/>
+                </a:solidFill>
+                <a:latin typeface="STHeiti" pitchFamily="34" charset="0"/>
                 <a:ea typeface="Microsoft JhengHei" pitchFamily="34" charset="-122"/>
                 <a:cs typeface="Microsoft JhengHei" pitchFamily="34" charset="-120"/>
               </a:rPr>
@@ -23685,7 +23531,7 @@
                 <a:solidFill>
                   <a:srgbClr val="C3C9D6"/>
                 </a:solidFill>
-                <a:latin typeface="Arial" pitchFamily="34" charset="0"/>
+                <a:latin typeface="STHeiti" pitchFamily="34" charset="0"/>
                 <a:ea typeface="Arial" pitchFamily="34" charset="-122"/>
                 <a:cs typeface="Arial" pitchFamily="34" charset="-120"/>
               </a:rPr>
@@ -23724,7 +23570,7 @@
                 <a:solidFill>
                   <a:srgbClr val="7C8497"/>
                 </a:solidFill>
-                <a:latin typeface="Microsoft JhengHei" pitchFamily="34" charset="0"/>
+                <a:latin typeface="STHeiti" pitchFamily="34" charset="0"/>
                 <a:ea typeface="Microsoft JhengHei" pitchFamily="34" charset="-122"/>
                 <a:cs typeface="Microsoft JhengHei" pitchFamily="34" charset="-120"/>
               </a:rPr>
@@ -23748,7 +23594,7 @@
     <p:bg>
       <p:bgPr>
         <a:solidFill>
-          <a:srgbClr val="FFFFFF"/>
+          <a:srgbClr val="F0EEE6"/>
         </a:solidFill>
         <a:effectLst/>
       </p:bgPr>
@@ -23782,7 +23628,7 @@
             <a:avLst/>
           </a:prstGeom>
           <a:solidFill>
-            <a:srgbClr val="F96167"/>
+            <a:srgbClr val="157554"/>
           </a:solidFill>
           <a:ln/>
         </p:spPr>
@@ -23818,9 +23664,9 @@
             <a:r>
               <a:rPr lang="en-US" sz="1200" b="1" kern="0" spc="200" dirty="0">
                 <a:solidFill>
-                  <a:srgbClr val="6E7687"/>
-                </a:solidFill>
-                <a:latin typeface="Arial" pitchFamily="34" charset="0"/>
+                  <a:srgbClr val="68645C"/>
+                </a:solidFill>
+                <a:latin typeface="STHeiti" pitchFamily="34" charset="0"/>
                 <a:ea typeface="Arial" pitchFamily="34" charset="-122"/>
                 <a:cs typeface="Arial" pitchFamily="34" charset="-120"/>
               </a:rPr>
@@ -23857,9 +23703,9 @@
             <a:r>
               <a:rPr lang="en-US" sz="3400" b="1" dirty="0">
                 <a:solidFill>
-                  <a:srgbClr val="10131A"/>
-                </a:solidFill>
-                <a:latin typeface="Microsoft JhengHei" pitchFamily="34" charset="0"/>
+                  <a:srgbClr val="1F1E1D"/>
+                </a:solidFill>
+                <a:latin typeface="STHeiti" pitchFamily="34" charset="0"/>
                 <a:ea typeface="Microsoft JhengHei" pitchFamily="34" charset="-122"/>
                 <a:cs typeface="Microsoft JhengHei" pitchFamily="34" charset="-120"/>
               </a:rPr>
@@ -23899,9 +23745,9 @@
             <a:r>
               <a:rPr lang="en-US" sz="2000" dirty="0">
                 <a:solidFill>
-                  <a:srgbClr val="353A46"/>
-                </a:solidFill>
-                <a:latin typeface="Microsoft JhengHei" pitchFamily="34" charset="0"/>
+                  <a:srgbClr val="1F1E1D"/>
+                </a:solidFill>
+                <a:latin typeface="STHeiti" pitchFamily="34" charset="0"/>
                 <a:ea typeface="Microsoft JhengHei" pitchFamily="34" charset="-122"/>
                 <a:cs typeface="Microsoft JhengHei" pitchFamily="34" charset="-120"/>
               </a:rPr>
@@ -23928,7 +23774,7 @@
             </a:avLst>
           </a:prstGeom>
           <a:solidFill>
-            <a:srgbClr val="F3F4F7"/>
+            <a:srgbClr val="E9E3D6"/>
           </a:solidFill>
           <a:ln/>
         </p:spPr>
@@ -23964,9 +23810,9 @@
             <a:r>
               <a:rPr lang="en-US" sz="1700" b="1" dirty="0">
                 <a:solidFill>
-                  <a:srgbClr val="10131A"/>
-                </a:solidFill>
-                <a:latin typeface="Arial" pitchFamily="34" charset="0"/>
+                  <a:srgbClr val="1F1E1D"/>
+                </a:solidFill>
+                <a:latin typeface="STHeiti" pitchFamily="34" charset="0"/>
                 <a:ea typeface="Arial" pitchFamily="34" charset="-122"/>
                 <a:cs typeface="Arial" pitchFamily="34" charset="-120"/>
               </a:rPr>
@@ -24003,9 +23849,9 @@
             <a:r>
               <a:rPr lang="en-US" sz="1300" dirty="0">
                 <a:solidFill>
-                  <a:srgbClr val="6E7687"/>
-                </a:solidFill>
-                <a:latin typeface="Microsoft JhengHei" pitchFamily="34" charset="0"/>
+                  <a:srgbClr val="68645C"/>
+                </a:solidFill>
+                <a:latin typeface="STHeiti" pitchFamily="34" charset="0"/>
                 <a:ea typeface="Microsoft JhengHei" pitchFamily="34" charset="-122"/>
                 <a:cs typeface="Microsoft JhengHei" pitchFamily="34" charset="-120"/>
               </a:rPr>
@@ -24069,9 +23915,9 @@
             <a:r>
               <a:rPr lang="en-US" sz="1500" b="1" dirty="0">
                 <a:solidFill>
-                  <a:srgbClr val="F96167"/>
-                </a:solidFill>
-                <a:latin typeface="Microsoft JhengHei" pitchFamily="34" charset="0"/>
+                  <a:srgbClr val="157554"/>
+                </a:solidFill>
+                <a:latin typeface="STHeiti" pitchFamily="34" charset="0"/>
                 <a:ea typeface="Microsoft JhengHei" pitchFamily="34" charset="-122"/>
                 <a:cs typeface="Microsoft JhengHei" pitchFamily="34" charset="-120"/>
               </a:rPr>
@@ -24098,7 +23944,7 @@
             </a:avLst>
           </a:prstGeom>
           <a:solidFill>
-            <a:srgbClr val="F3F4F7"/>
+            <a:srgbClr val="E9E3D6"/>
           </a:solidFill>
           <a:ln/>
         </p:spPr>
@@ -24134,9 +23980,9 @@
             <a:r>
               <a:rPr lang="en-US" sz="1700" b="1" dirty="0">
                 <a:solidFill>
-                  <a:srgbClr val="10131A"/>
-                </a:solidFill>
-                <a:latin typeface="Arial" pitchFamily="34" charset="0"/>
+                  <a:srgbClr val="1F1E1D"/>
+                </a:solidFill>
+                <a:latin typeface="STHeiti" pitchFamily="34" charset="0"/>
                 <a:ea typeface="Arial" pitchFamily="34" charset="-122"/>
                 <a:cs typeface="Arial" pitchFamily="34" charset="-120"/>
               </a:rPr>
@@ -24173,9 +24019,9 @@
             <a:r>
               <a:rPr lang="en-US" sz="1300" dirty="0">
                 <a:solidFill>
-                  <a:srgbClr val="6E7687"/>
-                </a:solidFill>
-                <a:latin typeface="Microsoft JhengHei" pitchFamily="34" charset="0"/>
+                  <a:srgbClr val="68645C"/>
+                </a:solidFill>
+                <a:latin typeface="STHeiti" pitchFamily="34" charset="0"/>
                 <a:ea typeface="Microsoft JhengHei" pitchFamily="34" charset="-122"/>
                 <a:cs typeface="Microsoft JhengHei" pitchFamily="34" charset="-120"/>
               </a:rPr>
@@ -24239,9 +24085,9 @@
             <a:r>
               <a:rPr lang="en-US" sz="1500" b="1" dirty="0">
                 <a:solidFill>
-                  <a:srgbClr val="F96167"/>
-                </a:solidFill>
-                <a:latin typeface="Microsoft JhengHei" pitchFamily="34" charset="0"/>
+                  <a:srgbClr val="157554"/>
+                </a:solidFill>
+                <a:latin typeface="STHeiti" pitchFamily="34" charset="0"/>
                 <a:ea typeface="Microsoft JhengHei" pitchFamily="34" charset="-122"/>
                 <a:cs typeface="Microsoft JhengHei" pitchFamily="34" charset="-120"/>
               </a:rPr>
@@ -24268,7 +24114,7 @@
             </a:avLst>
           </a:prstGeom>
           <a:solidFill>
-            <a:srgbClr val="F3F4F7"/>
+            <a:srgbClr val="E9E3D6"/>
           </a:solidFill>
           <a:ln/>
         </p:spPr>
@@ -24304,9 +24150,9 @@
             <a:r>
               <a:rPr lang="en-US" sz="1700" b="1" dirty="0">
                 <a:solidFill>
-                  <a:srgbClr val="10131A"/>
-                </a:solidFill>
-                <a:latin typeface="Arial" pitchFamily="34" charset="0"/>
+                  <a:srgbClr val="1F1E1D"/>
+                </a:solidFill>
+                <a:latin typeface="STHeiti" pitchFamily="34" charset="0"/>
                 <a:ea typeface="Arial" pitchFamily="34" charset="-122"/>
                 <a:cs typeface="Arial" pitchFamily="34" charset="-120"/>
               </a:rPr>
@@ -24343,9 +24189,9 @@
             <a:r>
               <a:rPr lang="en-US" sz="1300" dirty="0">
                 <a:solidFill>
-                  <a:srgbClr val="6E7687"/>
-                </a:solidFill>
-                <a:latin typeface="Microsoft JhengHei" pitchFamily="34" charset="0"/>
+                  <a:srgbClr val="68645C"/>
+                </a:solidFill>
+                <a:latin typeface="STHeiti" pitchFamily="34" charset="0"/>
                 <a:ea typeface="Microsoft JhengHei" pitchFamily="34" charset="-122"/>
                 <a:cs typeface="Microsoft JhengHei" pitchFamily="34" charset="-120"/>
               </a:rPr>
@@ -24409,9 +24255,9 @@
             <a:r>
               <a:rPr lang="en-US" sz="1500" b="1" dirty="0">
                 <a:solidFill>
-                  <a:srgbClr val="F96167"/>
-                </a:solidFill>
-                <a:latin typeface="Microsoft JhengHei" pitchFamily="34" charset="0"/>
+                  <a:srgbClr val="157554"/>
+                </a:solidFill>
+                <a:latin typeface="STHeiti" pitchFamily="34" charset="0"/>
                 <a:ea typeface="Microsoft JhengHei" pitchFamily="34" charset="-122"/>
                 <a:cs typeface="Microsoft JhengHei" pitchFamily="34" charset="-120"/>
               </a:rPr>
@@ -24448,9 +24294,9 @@
             <a:r>
               <a:rPr lang="en-US" sz="1100" dirty="0">
                 <a:solidFill>
-                  <a:srgbClr val="A8AEBC"/>
-                </a:solidFill>
-                <a:latin typeface="Arial" pitchFamily="34" charset="0"/>
+                  <a:srgbClr val="9DA89F"/>
+                </a:solidFill>
+                <a:latin typeface="STHeiti" pitchFamily="34" charset="0"/>
                 <a:ea typeface="Arial" pitchFamily="34" charset="-122"/>
                 <a:cs typeface="Arial" pitchFamily="34" charset="-120"/>
               </a:rPr>
@@ -24474,7 +24320,7 @@
     <p:bg>
       <p:bgPr>
         <a:solidFill>
-          <a:srgbClr val="10131A"/>
+          <a:srgbClr val="111B30"/>
         </a:solidFill>
         <a:effectLst/>
       </p:bgPr>
@@ -24508,7 +24354,7 @@
             <a:avLst/>
           </a:prstGeom>
           <a:solidFill>
-            <a:srgbClr val="F96167"/>
+            <a:srgbClr val="157554"/>
           </a:solidFill>
           <a:ln/>
         </p:spPr>
@@ -24544,9 +24390,9 @@
             <a:r>
               <a:rPr lang="en-US" sz="1200" b="1" kern="0" spc="200" dirty="0">
                 <a:solidFill>
-                  <a:srgbClr val="8A93A6"/>
-                </a:solidFill>
-                <a:latin typeface="Arial" pitchFamily="34" charset="0"/>
+                  <a:srgbClr val="9FAEBE"/>
+                </a:solidFill>
+                <a:latin typeface="STHeiti" pitchFamily="34" charset="0"/>
                 <a:ea typeface="Arial" pitchFamily="34" charset="-122"/>
                 <a:cs typeface="Arial" pitchFamily="34" charset="-120"/>
               </a:rPr>
@@ -24577,21 +24423,15 @@
           <a:bodyPr wrap="square" lIns="0" tIns="0" rIns="0" bIns="0" rtlCol="0" anchor="ctr"/>
           <a:lstStyle/>
           <a:p>
-            <a:pPr marL="0" indent="0">
-              <a:buNone/>
-            </a:pPr>
-            <a:r>
-              <a:rPr lang="en-US" sz="3400" b="1" dirty="0">
-                <a:solidFill>
-                  <a:srgbClr val="FFFFFF"/>
-                </a:solidFill>
-                <a:latin typeface="Microsoft JhengHei" pitchFamily="34" charset="0"/>
-                <a:ea typeface="Microsoft JhengHei" pitchFamily="34" charset="-122"/>
-                <a:cs typeface="Microsoft JhengHei" pitchFamily="34" charset="-120"/>
-              </a:rPr>
-              <a:t>我們要蓋的,是中間那一層</a:t>
-            </a:r>
-            <a:endParaRPr lang="en-US" sz="3400" dirty="0"/>
+            <a:r>
+              <a:rPr>
+                <a:solidFill>
+                  <a:srgbClr val="FAF9F5"/>
+                </a:solidFill>
+                <a:latin typeface="STHeiti"/>
+              </a:rPr>
+              <a:t>我們要蓋的是 AI coach 與今天決策之間的一層</a:t>
+            </a:r>
           </a:p>
         </p:txBody>
       </p:sp>
@@ -24627,7 +24467,7 @@
                 <a:solidFill>
                   <a:srgbClr val="D6DAE4"/>
                 </a:solidFill>
-                <a:latin typeface="Microsoft JhengHei" pitchFamily="34" charset="0"/>
+                <a:latin typeface="STHeiti" pitchFamily="34" charset="0"/>
                 <a:ea typeface="Microsoft JhengHei" pitchFamily="34" charset="-122"/>
                 <a:cs typeface="Microsoft JhengHei" pitchFamily="34" charset="-120"/>
               </a:rPr>
@@ -24654,7 +24494,7 @@
             </a:avLst>
           </a:prstGeom>
           <a:solidFill>
-            <a:srgbClr val="F96167"/>
+            <a:srgbClr val="157554"/>
           </a:solidFill>
           <a:ln/>
         </p:spPr>
@@ -24690,9 +24530,9 @@
             <a:r>
               <a:rPr lang="en-US" sz="3000" b="1" dirty="0">
                 <a:solidFill>
-                  <a:srgbClr val="FFFFFF"/>
-                </a:solidFill>
-                <a:latin typeface="Arial" pitchFamily="34" charset="0"/>
+                  <a:srgbClr val="FAF9F5"/>
+                </a:solidFill>
+                <a:latin typeface="STHeiti" pitchFamily="34" charset="0"/>
                 <a:ea typeface="Arial" pitchFamily="34" charset="-122"/>
                 <a:cs typeface="Arial" pitchFamily="34" charset="-120"/>
               </a:rPr>
@@ -24729,9 +24569,9 @@
             <a:r>
               <a:rPr lang="en-US" sz="1500" dirty="0">
                 <a:solidFill>
-                  <a:srgbClr val="FFE3E4"/>
-                </a:solidFill>
-                <a:latin typeface="Arial" pitchFamily="34" charset="0"/>
+                  <a:srgbClr val="FFE0C4"/>
+                </a:solidFill>
+                <a:latin typeface="STHeiti" pitchFamily="34" charset="0"/>
                 <a:ea typeface="Arial" pitchFamily="34" charset="-122"/>
                 <a:cs typeface="Arial" pitchFamily="34" charset="-120"/>
               </a:rPr>
@@ -24770,7 +24610,7 @@
                 <a:solidFill>
                   <a:srgbClr val="C3C9D6"/>
                 </a:solidFill>
-                <a:latin typeface="Microsoft JhengHei" pitchFamily="34" charset="0"/>
+                <a:latin typeface="STHeiti" pitchFamily="34" charset="0"/>
                 <a:ea typeface="Microsoft JhengHei" pitchFamily="34" charset="-122"/>
                 <a:cs typeface="Microsoft JhengHei" pitchFamily="34" charset="-120"/>
               </a:rPr>
@@ -24807,9 +24647,9 @@
             <a:r>
               <a:rPr lang="en-US" sz="1100" dirty="0">
                 <a:solidFill>
-                  <a:srgbClr val="A8AEBC"/>
-                </a:solidFill>
-                <a:latin typeface="Arial" pitchFamily="34" charset="0"/>
+                  <a:srgbClr val="9DA89F"/>
+                </a:solidFill>
+                <a:latin typeface="STHeiti" pitchFamily="34" charset="0"/>
                 <a:ea typeface="Arial" pitchFamily="34" charset="-122"/>
                 <a:cs typeface="Arial" pitchFamily="34" charset="-120"/>
               </a:rPr>
@@ -24833,7 +24673,7 @@
     <p:bg>
       <p:bgPr>
         <a:solidFill>
-          <a:srgbClr val="10131A"/>
+          <a:srgbClr val="111B30"/>
         </a:solidFill>
         <a:effectLst/>
       </p:bgPr>
@@ -24867,7 +24707,7 @@
             <a:avLst/>
           </a:prstGeom>
           <a:solidFill>
-            <a:srgbClr val="F96167"/>
+            <a:srgbClr val="157554"/>
           </a:solidFill>
           <a:ln/>
         </p:spPr>
@@ -24903,9 +24743,9 @@
             <a:r>
               <a:rPr lang="en-US" sz="1200" b="1" kern="0" spc="200" dirty="0">
                 <a:solidFill>
-                  <a:srgbClr val="8A93A6"/>
-                </a:solidFill>
-                <a:latin typeface="Arial" pitchFamily="34" charset="0"/>
+                  <a:srgbClr val="9FAEBE"/>
+                </a:solidFill>
+                <a:latin typeface="STHeiti" pitchFamily="34" charset="0"/>
                 <a:ea typeface="Arial" pitchFamily="34" charset="-122"/>
                 <a:cs typeface="Arial" pitchFamily="34" charset="-120"/>
               </a:rPr>
@@ -24936,21 +24776,15 @@
           <a:bodyPr wrap="square" lIns="0" tIns="0" rIns="0" bIns="0" rtlCol="0" anchor="ctr"/>
           <a:lstStyle/>
           <a:p>
-            <a:pPr marL="0" indent="0">
-              <a:buNone/>
-            </a:pPr>
-            <a:r>
-              <a:rPr lang="en-US" sz="3400" b="1" dirty="0">
-                <a:solidFill>
-                  <a:srgbClr val="FFFFFF"/>
-                </a:solidFill>
-                <a:latin typeface="Microsoft JhengHei" pitchFamily="34" charset="0"/>
-                <a:ea typeface="Microsoft JhengHei" pitchFamily="34" charset="-122"/>
-                <a:cs typeface="Microsoft JhengHei" pitchFamily="34" charset="-120"/>
-              </a:rPr>
-              <a:t>使用者要連續的決策能力,不要再交出健康歷史</a:t>
-            </a:r>
-            <a:endParaRPr lang="en-US" sz="3400" dirty="0"/>
+            <a:r>
+              <a:rPr>
+                <a:solidFill>
+                  <a:srgbClr val="FAF9F5"/>
+                </a:solidFill>
+                <a:latin typeface="STHeiti"/>
+              </a:rPr>
+              <a:t>Your AI can coach. Pacevera helps it decide.</a:t>
+            </a:r>
           </a:p>
         </p:txBody>
       </p:sp>
@@ -24986,7 +24820,7 @@
                 <a:solidFill>
                   <a:srgbClr val="D6DAE4"/>
                 </a:solidFill>
-                <a:latin typeface="Microsoft JhengHei" pitchFamily="34" charset="0"/>
+                <a:latin typeface="STHeiti" pitchFamily="34" charset="0"/>
                 <a:ea typeface="Microsoft JhengHei" pitchFamily="34" charset="-122"/>
                 <a:cs typeface="Microsoft JhengHei" pitchFamily="34" charset="-120"/>
               </a:rPr>
@@ -25013,7 +24847,7 @@
             </a:avLst>
           </a:prstGeom>
           <a:solidFill>
-            <a:srgbClr val="1B1F2B"/>
+            <a:srgbClr val="1E2A40"/>
           </a:solidFill>
           <a:ln/>
         </p:spPr>
@@ -25049,9 +24883,9 @@
             <a:r>
               <a:rPr lang="en-US" sz="1400" b="1" dirty="0">
                 <a:solidFill>
-                  <a:srgbClr val="8A93A6"/>
-                </a:solidFill>
-                <a:latin typeface="Microsoft JhengHei" pitchFamily="34" charset="0"/>
+                  <a:srgbClr val="9FAEBE"/>
+                </a:solidFill>
+                <a:latin typeface="STHeiti" pitchFamily="34" charset="0"/>
                 <a:ea typeface="Microsoft JhengHei" pitchFamily="34" charset="-122"/>
                 <a:cs typeface="Microsoft JhengHei" pitchFamily="34" charset="-120"/>
               </a:rPr>
@@ -25091,9 +24925,9 @@
             <a:r>
               <a:rPr lang="en-US" sz="1700" b="1" dirty="0">
                 <a:solidFill>
-                  <a:srgbClr val="FFFFFF"/>
-                </a:solidFill>
-                <a:latin typeface="Microsoft JhengHei" pitchFamily="34" charset="0"/>
+                  <a:srgbClr val="FAF9F5"/>
+                </a:solidFill>
+                <a:latin typeface="STHeiti" pitchFamily="34" charset="0"/>
                 <a:ea typeface="Microsoft JhengHei" pitchFamily="34" charset="-122"/>
                 <a:cs typeface="Microsoft JhengHei" pitchFamily="34" charset="-120"/>
               </a:rPr>
@@ -25120,7 +24954,7 @@
             </a:avLst>
           </a:prstGeom>
           <a:solidFill>
-            <a:srgbClr val="F96167"/>
+            <a:srgbClr val="157554"/>
           </a:solidFill>
           <a:ln/>
         </p:spPr>
@@ -25156,9 +24990,9 @@
             <a:r>
               <a:rPr lang="en-US" sz="1400" b="1" dirty="0">
                 <a:solidFill>
-                  <a:srgbClr val="FFE3E4"/>
-                </a:solidFill>
-                <a:latin typeface="Microsoft JhengHei" pitchFamily="34" charset="0"/>
+                  <a:srgbClr val="FFE0C4"/>
+                </a:solidFill>
+                <a:latin typeface="STHeiti" pitchFamily="34" charset="0"/>
                 <a:ea typeface="Microsoft JhengHei" pitchFamily="34" charset="-122"/>
                 <a:cs typeface="Microsoft JhengHei" pitchFamily="34" charset="-120"/>
               </a:rPr>
@@ -25198,9 +25032,9 @@
             <a:r>
               <a:rPr lang="en-US" sz="1700" b="1" dirty="0">
                 <a:solidFill>
-                  <a:srgbClr val="FFFFFF"/>
-                </a:solidFill>
-                <a:latin typeface="Microsoft JhengHei" pitchFamily="34" charset="0"/>
+                  <a:srgbClr val="FAF9F5"/>
+                </a:solidFill>
+                <a:latin typeface="STHeiti" pitchFamily="34" charset="0"/>
                 <a:ea typeface="Microsoft JhengHei" pitchFamily="34" charset="-122"/>
                 <a:cs typeface="Microsoft JhengHei" pitchFamily="34" charset="-120"/>
               </a:rPr>
@@ -25239,7 +25073,7 @@
                 <a:solidFill>
                   <a:srgbClr val="C3C9D6"/>
                 </a:solidFill>
-                <a:latin typeface="Microsoft JhengHei" pitchFamily="34" charset="0"/>
+                <a:latin typeface="STHeiti" pitchFamily="34" charset="0"/>
                 <a:ea typeface="Microsoft JhengHei" pitchFamily="34" charset="-122"/>
                 <a:cs typeface="Microsoft JhengHei" pitchFamily="34" charset="-120"/>
               </a:rPr>
@@ -25276,9 +25110,9 @@
             <a:r>
               <a:rPr lang="en-US" sz="1100" dirty="0">
                 <a:solidFill>
-                  <a:srgbClr val="A8AEBC"/>
-                </a:solidFill>
-                <a:latin typeface="Arial" pitchFamily="34" charset="0"/>
+                  <a:srgbClr val="9DA89F"/>
+                </a:solidFill>
+                <a:latin typeface="STHeiti" pitchFamily="34" charset="0"/>
                 <a:ea typeface="Arial" pitchFamily="34" charset="-122"/>
                 <a:cs typeface="Arial" pitchFamily="34" charset="-120"/>
               </a:rPr>
@@ -25302,7 +25136,7 @@
     <p:bg>
       <p:bgPr>
         <a:solidFill>
-          <a:srgbClr val="FFFFFF"/>
+          <a:srgbClr val="F0EEE6"/>
         </a:solidFill>
         <a:effectLst/>
       </p:bgPr>
@@ -25336,7 +25170,7 @@
             <a:avLst/>
           </a:prstGeom>
           <a:solidFill>
-            <a:srgbClr val="F96167"/>
+            <a:srgbClr val="157554"/>
           </a:solidFill>
           <a:ln/>
         </p:spPr>
@@ -25372,9 +25206,9 @@
             <a:r>
               <a:rPr lang="en-US" sz="1200" b="1" kern="0" spc="200" dirty="0">
                 <a:solidFill>
-                  <a:srgbClr val="6E7687"/>
-                </a:solidFill>
-                <a:latin typeface="Arial" pitchFamily="34" charset="0"/>
+                  <a:srgbClr val="68645C"/>
+                </a:solidFill>
+                <a:latin typeface="STHeiti" pitchFamily="34" charset="0"/>
                 <a:ea typeface="Arial" pitchFamily="34" charset="-122"/>
                 <a:cs typeface="Arial" pitchFamily="34" charset="-120"/>
               </a:rPr>
@@ -25405,21 +25239,15 @@
           <a:bodyPr wrap="square" lIns="0" tIns="0" rIns="0" bIns="0" rtlCol="0" anchor="ctr"/>
           <a:lstStyle/>
           <a:p>
-            <a:pPr marL="0" indent="0">
-              <a:buNone/>
-            </a:pPr>
-            <a:r>
-              <a:rPr lang="en-US" sz="3400" b="1" dirty="0">
-                <a:solidFill>
-                  <a:srgbClr val="10131A"/>
-                </a:solidFill>
-                <a:latin typeface="Microsoft JhengHei" pitchFamily="34" charset="0"/>
-                <a:ea typeface="Microsoft JhengHei" pitchFamily="34" charset="-122"/>
-                <a:cs typeface="Microsoft JhengHei" pitchFamily="34" charset="-120"/>
-              </a:rPr>
-              <a:t>關鍵設計:資料由使用者控制</a:t>
-            </a:r>
-            <a:endParaRPr lang="en-US" sz="3400" dirty="0"/>
+            <a:r>
+              <a:rPr>
+                <a:solidFill>
+                  <a:srgbClr val="1F1E1D"/>
+                </a:solidFill>
+                <a:latin typeface="STHeiti"/>
+              </a:rPr>
+              <a:t>Evidence 留在你的控制邊界</a:t>
+            </a:r>
           </a:p>
         </p:txBody>
       </p:sp>
@@ -25453,9 +25281,9 @@
             <a:r>
               <a:rPr lang="en-US" sz="2000" dirty="0">
                 <a:solidFill>
-                  <a:srgbClr val="353A46"/>
-                </a:solidFill>
-                <a:latin typeface="Microsoft JhengHei" pitchFamily="34" charset="0"/>
+                  <a:srgbClr val="1F1E1D"/>
+                </a:solidFill>
+                <a:latin typeface="STHeiti" pitchFamily="34" charset="0"/>
                 <a:ea typeface="Microsoft JhengHei" pitchFamily="34" charset="-122"/>
                 <a:cs typeface="Microsoft JhengHei" pitchFamily="34" charset="-120"/>
               </a:rPr>
@@ -25482,7 +25310,7 @@
             </a:avLst>
           </a:prstGeom>
           <a:solidFill>
-            <a:srgbClr val="F3F4F7"/>
+            <a:srgbClr val="E9E3D6"/>
           </a:solidFill>
           <a:ln/>
         </p:spPr>
@@ -25520,7 +25348,7 @@
                 <a:solidFill>
                   <a:srgbClr val="9AA1B0"/>
                 </a:solidFill>
-                <a:latin typeface="Microsoft JhengHei" pitchFamily="34" charset="0"/>
+                <a:latin typeface="STHeiti" pitchFamily="34" charset="0"/>
                 <a:ea typeface="Microsoft JhengHei" pitchFamily="34" charset="-122"/>
                 <a:cs typeface="Microsoft JhengHei" pitchFamily="34" charset="-120"/>
               </a:rPr>
@@ -25557,9 +25385,9 @@
             <a:r>
               <a:rPr lang="en-US" sz="1800" b="1" dirty="0">
                 <a:solidFill>
-                  <a:srgbClr val="3A4050"/>
-                </a:solidFill>
-                <a:latin typeface="Microsoft JhengHei" pitchFamily="34" charset="0"/>
+                  <a:srgbClr val="DAD2C3"/>
+                </a:solidFill>
+                <a:latin typeface="STHeiti" pitchFamily="34" charset="0"/>
                 <a:ea typeface="Microsoft JhengHei" pitchFamily="34" charset="-122"/>
                 <a:cs typeface="Microsoft JhengHei" pitchFamily="34" charset="-120"/>
               </a:rPr>
@@ -25586,7 +25414,7 @@
             </a:avLst>
           </a:prstGeom>
           <a:solidFill>
-            <a:srgbClr val="10131A"/>
+            <a:srgbClr val="111B30"/>
           </a:solidFill>
           <a:ln/>
         </p:spPr>
@@ -25622,9 +25450,9 @@
             <a:r>
               <a:rPr lang="en-US" sz="1300" b="1" dirty="0">
                 <a:solidFill>
-                  <a:srgbClr val="F96167"/>
-                </a:solidFill>
-                <a:latin typeface="Microsoft JhengHei" pitchFamily="34" charset="0"/>
+                  <a:srgbClr val="157554"/>
+                </a:solidFill>
+                <a:latin typeface="STHeiti" pitchFamily="34" charset="0"/>
                 <a:ea typeface="Microsoft JhengHei" pitchFamily="34" charset="-122"/>
                 <a:cs typeface="Microsoft JhengHei" pitchFamily="34" charset="-120"/>
               </a:rPr>
@@ -25661,9 +25489,9 @@
             <a:r>
               <a:rPr lang="en-US" sz="1800" b="1" dirty="0">
                 <a:solidFill>
-                  <a:srgbClr val="FFFFFF"/>
-                </a:solidFill>
-                <a:latin typeface="Microsoft JhengHei" pitchFamily="34" charset="0"/>
+                  <a:srgbClr val="1F1E1D"/>
+                </a:solidFill>
+                <a:latin typeface="STHeiti" pitchFamily="34" charset="0"/>
                 <a:ea typeface="Microsoft JhengHei" pitchFamily="34" charset="-122"/>
                 <a:cs typeface="Microsoft JhengHei" pitchFamily="34" charset="-120"/>
               </a:rPr>
@@ -25700,9 +25528,9 @@
             <a:r>
               <a:rPr lang="en-US" sz="1100" dirty="0">
                 <a:solidFill>
-                  <a:srgbClr val="A8AEBC"/>
-                </a:solidFill>
-                <a:latin typeface="Arial" pitchFamily="34" charset="0"/>
+                  <a:srgbClr val="9DA89F"/>
+                </a:solidFill>
+                <a:latin typeface="STHeiti" pitchFamily="34" charset="0"/>
                 <a:ea typeface="Arial" pitchFamily="34" charset="-122"/>
                 <a:cs typeface="Arial" pitchFamily="34" charset="-120"/>
               </a:rPr>
@@ -25726,7 +25554,7 @@
     <p:bg>
       <p:bgPr>
         <a:solidFill>
-          <a:srgbClr val="10131A"/>
+          <a:srgbClr val="111B30"/>
         </a:solidFill>
         <a:effectLst/>
       </p:bgPr>
@@ -25760,7 +25588,7 @@
             <a:avLst/>
           </a:prstGeom>
           <a:solidFill>
-            <a:srgbClr val="F96167"/>
+            <a:srgbClr val="157554"/>
           </a:solidFill>
           <a:ln/>
         </p:spPr>
@@ -25796,9 +25624,9 @@
             <a:r>
               <a:rPr lang="en-US" sz="1200" b="1" kern="0" spc="200" dirty="0">
                 <a:solidFill>
-                  <a:srgbClr val="8A93A6"/>
-                </a:solidFill>
-                <a:latin typeface="Arial" pitchFamily="34" charset="0"/>
+                  <a:srgbClr val="9FAEBE"/>
+                </a:solidFill>
+                <a:latin typeface="STHeiti" pitchFamily="34" charset="0"/>
                 <a:ea typeface="Arial" pitchFamily="34" charset="-122"/>
                 <a:cs typeface="Arial" pitchFamily="34" charset="-120"/>
               </a:rPr>
@@ -25829,21 +25657,15 @@
           <a:bodyPr wrap="square" lIns="0" tIns="0" rIns="0" bIns="0" rtlCol="0" anchor="ctr"/>
           <a:lstStyle/>
           <a:p>
-            <a:pPr marL="0" indent="0">
-              <a:buNone/>
-            </a:pPr>
-            <a:r>
-              <a:rPr lang="en-US" sz="3400" b="1" dirty="0">
-                <a:solidFill>
-                  <a:srgbClr val="FFFFFF"/>
-                </a:solidFill>
-                <a:latin typeface="Microsoft JhengHei" pitchFamily="34" charset="0"/>
-                <a:ea typeface="Microsoft JhengHei" pitchFamily="34" charset="-122"/>
-                <a:cs typeface="Microsoft JhengHei" pitchFamily="34" charset="-120"/>
-              </a:rPr>
-              <a:t>輸出具體長這樣</a:t>
-            </a:r>
-            <a:endParaRPr lang="en-US" sz="3400" dirty="0"/>
+            <a:r>
+              <a:rPr>
+                <a:solidFill>
+                  <a:srgbClr val="FAF9F5"/>
+                </a:solidFill>
+                <a:latin typeface="STHeiti"/>
+              </a:rPr>
+              <a:t>輸出不是分數，是今天的 change</a:t>
+            </a:r>
           </a:p>
         </p:txBody>
       </p:sp>
@@ -25879,7 +25701,7 @@
                 <a:solidFill>
                   <a:srgbClr val="D6DAE4"/>
                 </a:solidFill>
-                <a:latin typeface="Microsoft JhengHei" pitchFamily="34" charset="0"/>
+                <a:latin typeface="STHeiti" pitchFamily="34" charset="0"/>
                 <a:ea typeface="Microsoft JhengHei" pitchFamily="34" charset="-122"/>
                 <a:cs typeface="Microsoft JhengHei" pitchFamily="34" charset="-120"/>
               </a:rPr>
@@ -25906,7 +25728,7 @@
             </a:avLst>
           </a:prstGeom>
           <a:solidFill>
-            <a:srgbClr val="1B1F2B"/>
+            <a:srgbClr val="1E2A40"/>
           </a:solidFill>
           <a:ln/>
         </p:spPr>
@@ -25945,9 +25767,9 @@
             <a:r>
               <a:rPr lang="en-US" sz="1250" dirty="0">
                 <a:solidFill>
-                  <a:srgbClr val="9EEBD8"/>
-                </a:solidFill>
-                <a:latin typeface="Courier New" pitchFamily="34" charset="0"/>
+                  <a:srgbClr val="49D993"/>
+                </a:solidFill>
+                <a:latin typeface="STHeiti" pitchFamily="34" charset="0"/>
                 <a:ea typeface="Courier New" pitchFamily="34" charset="-122"/>
                 <a:cs typeface="Courier New" pitchFamily="34" charset="-120"/>
               </a:rPr>
@@ -25965,9 +25787,9 @@
             <a:r>
               <a:rPr lang="en-US" sz="1250" dirty="0">
                 <a:solidFill>
-                  <a:srgbClr val="9EEBD8"/>
-                </a:solidFill>
-                <a:latin typeface="Courier New" pitchFamily="34" charset="0"/>
+                  <a:srgbClr val="49D993"/>
+                </a:solidFill>
+                <a:latin typeface="STHeiti" pitchFamily="34" charset="0"/>
                 <a:ea typeface="Courier New" pitchFamily="34" charset="-122"/>
                 <a:cs typeface="Courier New" pitchFamily="34" charset="-120"/>
               </a:rPr>
@@ -25985,9 +25807,9 @@
             <a:r>
               <a:rPr lang="en-US" sz="1250" dirty="0">
                 <a:solidFill>
-                  <a:srgbClr val="9EEBD8"/>
-                </a:solidFill>
-                <a:latin typeface="Courier New" pitchFamily="34" charset="0"/>
+                  <a:srgbClr val="49D993"/>
+                </a:solidFill>
+                <a:latin typeface="STHeiti" pitchFamily="34" charset="0"/>
                 <a:ea typeface="Courier New" pitchFamily="34" charset="-122"/>
                 <a:cs typeface="Courier New" pitchFamily="34" charset="-120"/>
               </a:rPr>
@@ -26005,9 +25827,9 @@
             <a:r>
               <a:rPr lang="en-US" sz="1250" dirty="0">
                 <a:solidFill>
-                  <a:srgbClr val="9EEBD8"/>
-                </a:solidFill>
-                <a:latin typeface="Courier New" pitchFamily="34" charset="0"/>
+                  <a:srgbClr val="49D993"/>
+                </a:solidFill>
+                <a:latin typeface="STHeiti" pitchFamily="34" charset="0"/>
                 <a:ea typeface="Courier New" pitchFamily="34" charset="-122"/>
                 <a:cs typeface="Courier New" pitchFamily="34" charset="-120"/>
               </a:rPr>
@@ -26025,9 +25847,9 @@
             <a:r>
               <a:rPr lang="en-US" sz="1250" dirty="0">
                 <a:solidFill>
-                  <a:srgbClr val="9EEBD8"/>
-                </a:solidFill>
-                <a:latin typeface="Courier New" pitchFamily="34" charset="0"/>
+                  <a:srgbClr val="49D993"/>
+                </a:solidFill>
+                <a:latin typeface="STHeiti" pitchFamily="34" charset="0"/>
                 <a:ea typeface="Courier New" pitchFamily="34" charset="-122"/>
                 <a:cs typeface="Courier New" pitchFamily="34" charset="-120"/>
               </a:rPr>
@@ -26045,9 +25867,9 @@
             <a:r>
               <a:rPr lang="en-US" sz="1250" dirty="0">
                 <a:solidFill>
-                  <a:srgbClr val="9EEBD8"/>
-                </a:solidFill>
-                <a:latin typeface="Courier New" pitchFamily="34" charset="0"/>
+                  <a:srgbClr val="49D993"/>
+                </a:solidFill>
+                <a:latin typeface="STHeiti" pitchFamily="34" charset="0"/>
                 <a:ea typeface="Courier New" pitchFamily="34" charset="-122"/>
                 <a:cs typeface="Courier New" pitchFamily="34" charset="-120"/>
               </a:rPr>
@@ -26065,9 +25887,9 @@
             <a:r>
               <a:rPr lang="en-US" sz="1250" dirty="0">
                 <a:solidFill>
-                  <a:srgbClr val="9EEBD8"/>
-                </a:solidFill>
-                <a:latin typeface="Courier New" pitchFamily="34" charset="0"/>
+                  <a:srgbClr val="49D993"/>
+                </a:solidFill>
+                <a:latin typeface="STHeiti" pitchFamily="34" charset="0"/>
                 <a:ea typeface="Courier New" pitchFamily="34" charset="-122"/>
                 <a:cs typeface="Courier New" pitchFamily="34" charset="-120"/>
               </a:rPr>
@@ -26094,7 +25916,7 @@
             </a:avLst>
           </a:prstGeom>
           <a:solidFill>
-            <a:srgbClr val="1B1F2B"/>
+            <a:srgbClr val="1E2A40"/>
           </a:solidFill>
           <a:ln/>
         </p:spPr>
@@ -26133,9 +25955,9 @@
             <a:r>
               <a:rPr lang="en-US" sz="1250" dirty="0">
                 <a:solidFill>
-                  <a:srgbClr val="FFB3B6"/>
-                </a:solidFill>
-                <a:latin typeface="Courier New" pitchFamily="34" charset="0"/>
+                  <a:srgbClr val="ECAE4D"/>
+                </a:solidFill>
+                <a:latin typeface="STHeiti" pitchFamily="34" charset="0"/>
                 <a:ea typeface="Courier New" pitchFamily="34" charset="-122"/>
                 <a:cs typeface="Courier New" pitchFamily="34" charset="-120"/>
               </a:rPr>
@@ -26153,9 +25975,9 @@
             <a:r>
               <a:rPr lang="en-US" sz="1250" dirty="0">
                 <a:solidFill>
-                  <a:srgbClr val="FFB3B6"/>
-                </a:solidFill>
-                <a:latin typeface="Courier New" pitchFamily="34" charset="0"/>
+                  <a:srgbClr val="ECAE4D"/>
+                </a:solidFill>
+                <a:latin typeface="STHeiti" pitchFamily="34" charset="0"/>
                 <a:ea typeface="Courier New" pitchFamily="34" charset="-122"/>
                 <a:cs typeface="Courier New" pitchFamily="34" charset="-120"/>
               </a:rPr>
@@ -26173,9 +25995,9 @@
             <a:r>
               <a:rPr lang="en-US" sz="1250" dirty="0">
                 <a:solidFill>
-                  <a:srgbClr val="FFB3B6"/>
-                </a:solidFill>
-                <a:latin typeface="Courier New" pitchFamily="34" charset="0"/>
+                  <a:srgbClr val="ECAE4D"/>
+                </a:solidFill>
+                <a:latin typeface="STHeiti" pitchFamily="34" charset="0"/>
                 <a:ea typeface="Courier New" pitchFamily="34" charset="-122"/>
                 <a:cs typeface="Courier New" pitchFamily="34" charset="-120"/>
               </a:rPr>
@@ -26193,9 +26015,9 @@
             <a:r>
               <a:rPr lang="en-US" sz="1250" dirty="0">
                 <a:solidFill>
-                  <a:srgbClr val="FFB3B6"/>
-                </a:solidFill>
-                <a:latin typeface="Courier New" pitchFamily="34" charset="0"/>
+                  <a:srgbClr val="ECAE4D"/>
+                </a:solidFill>
+                <a:latin typeface="STHeiti" pitchFamily="34" charset="0"/>
                 <a:ea typeface="Courier New" pitchFamily="34" charset="-122"/>
                 <a:cs typeface="Courier New" pitchFamily="34" charset="-120"/>
               </a:rPr>
@@ -26222,9 +26044,9 @@
             <a:r>
               <a:rPr lang="en-US" sz="1250" dirty="0">
                 <a:solidFill>
-                  <a:srgbClr val="FFB3B6"/>
-                </a:solidFill>
-                <a:latin typeface="Courier New" pitchFamily="34" charset="0"/>
+                  <a:srgbClr val="ECAE4D"/>
+                </a:solidFill>
+                <a:latin typeface="STHeiti" pitchFamily="34" charset="0"/>
                 <a:ea typeface="Courier New" pitchFamily="34" charset="-122"/>
                 <a:cs typeface="Courier New" pitchFamily="34" charset="-120"/>
               </a:rPr>
@@ -26242,9 +26064,9 @@
             <a:r>
               <a:rPr lang="en-US" sz="1250" dirty="0">
                 <a:solidFill>
-                  <a:srgbClr val="FFB3B6"/>
-                </a:solidFill>
-                <a:latin typeface="Courier New" pitchFamily="34" charset="0"/>
+                  <a:srgbClr val="ECAE4D"/>
+                </a:solidFill>
+                <a:latin typeface="STHeiti" pitchFamily="34" charset="0"/>
                 <a:ea typeface="Courier New" pitchFamily="34" charset="-122"/>
                 <a:cs typeface="Courier New" pitchFamily="34" charset="-120"/>
               </a:rPr>
@@ -26262,9 +26084,9 @@
             <a:r>
               <a:rPr lang="en-US" sz="1250" dirty="0">
                 <a:solidFill>
-                  <a:srgbClr val="FFB3B6"/>
-                </a:solidFill>
-                <a:latin typeface="Courier New" pitchFamily="34" charset="0"/>
+                  <a:srgbClr val="ECAE4D"/>
+                </a:solidFill>
+                <a:latin typeface="STHeiti" pitchFamily="34" charset="0"/>
                 <a:ea typeface="Courier New" pitchFamily="34" charset="-122"/>
                 <a:cs typeface="Courier New" pitchFamily="34" charset="-120"/>
               </a:rPr>
@@ -26301,9 +26123,9 @@
             <a:r>
               <a:rPr lang="en-US" sz="1100" dirty="0">
                 <a:solidFill>
-                  <a:srgbClr val="A8AEBC"/>
-                </a:solidFill>
-                <a:latin typeface="Arial" pitchFamily="34" charset="0"/>
+                  <a:srgbClr val="9DA89F"/>
+                </a:solidFill>
+                <a:latin typeface="STHeiti" pitchFamily="34" charset="0"/>
                 <a:ea typeface="Arial" pitchFamily="34" charset="-122"/>
                 <a:cs typeface="Arial" pitchFamily="34" charset="-120"/>
               </a:rPr>
@@ -26327,7 +26149,7 @@
     <p:bg>
       <p:bgPr>
         <a:solidFill>
-          <a:srgbClr val="FFFFFF"/>
+          <a:srgbClr val="F0EEE6"/>
         </a:solidFill>
         <a:effectLst/>
       </p:bgPr>
@@ -26361,7 +26183,7 @@
             <a:avLst/>
           </a:prstGeom>
           <a:solidFill>
-            <a:srgbClr val="F96167"/>
+            <a:srgbClr val="157554"/>
           </a:solidFill>
           <a:ln/>
         </p:spPr>
@@ -26397,9 +26219,9 @@
             <a:r>
               <a:rPr lang="en-US" sz="1200" b="1" kern="0" spc="200" dirty="0">
                 <a:solidFill>
-                  <a:srgbClr val="6E7687"/>
-                </a:solidFill>
-                <a:latin typeface="Arial" pitchFamily="34" charset="0"/>
+                  <a:srgbClr val="68645C"/>
+                </a:solidFill>
+                <a:latin typeface="STHeiti" pitchFamily="34" charset="0"/>
                 <a:ea typeface="Arial" pitchFamily="34" charset="-122"/>
                 <a:cs typeface="Arial" pitchFamily="34" charset="-120"/>
               </a:rPr>
@@ -26436,9 +26258,9 @@
             <a:r>
               <a:rPr lang="en-US" sz="3400" b="1" dirty="0">
                 <a:solidFill>
-                  <a:srgbClr val="10131A"/>
-                </a:solidFill>
-                <a:latin typeface="Microsoft JhengHei" pitchFamily="34" charset="0"/>
+                  <a:srgbClr val="1F1E1D"/>
+                </a:solidFill>
+                <a:latin typeface="STHeiti" pitchFamily="34" charset="0"/>
                 <a:ea typeface="Microsoft JhengHei" pitchFamily="34" charset="-122"/>
                 <a:cs typeface="Microsoft JhengHei" pitchFamily="34" charset="-120"/>
               </a:rPr>
@@ -26478,9 +26300,9 @@
             <a:r>
               <a:rPr lang="en-US" sz="2000" dirty="0">
                 <a:solidFill>
-                  <a:srgbClr val="353A46"/>
-                </a:solidFill>
-                <a:latin typeface="Microsoft JhengHei" pitchFamily="34" charset="0"/>
+                  <a:srgbClr val="1F1E1D"/>
+                </a:solidFill>
+                <a:latin typeface="STHeiti" pitchFamily="34" charset="0"/>
                 <a:ea typeface="Microsoft JhengHei" pitchFamily="34" charset="-122"/>
                 <a:cs typeface="Microsoft JhengHei" pitchFamily="34" charset="-120"/>
               </a:rPr>
@@ -26507,7 +26329,7 @@
             </a:avLst>
           </a:prstGeom>
           <a:solidFill>
-            <a:srgbClr val="F3F4F7"/>
+            <a:srgbClr val="E9E3D6"/>
           </a:solidFill>
           <a:ln/>
         </p:spPr>
@@ -26531,7 +26353,7 @@
             <a:avLst/>
           </a:prstGeom>
           <a:solidFill>
-            <a:srgbClr val="F96167"/>
+            <a:srgbClr val="157554"/>
           </a:solidFill>
           <a:ln/>
         </p:spPr>
@@ -26567,9 +26389,9 @@
             <a:r>
               <a:rPr lang="en-US" sz="1500" b="1" dirty="0">
                 <a:solidFill>
-                  <a:srgbClr val="10131A"/>
-                </a:solidFill>
-                <a:latin typeface="Arial" pitchFamily="34" charset="0"/>
+                  <a:srgbClr val="1F1E1D"/>
+                </a:solidFill>
+                <a:latin typeface="STHeiti" pitchFamily="34" charset="0"/>
                 <a:ea typeface="Arial" pitchFamily="34" charset="-122"/>
                 <a:cs typeface="Arial" pitchFamily="34" charset="-120"/>
               </a:rPr>
@@ -26606,9 +26428,9 @@
             <a:r>
               <a:rPr lang="en-US" sz="1250" dirty="0">
                 <a:solidFill>
-                  <a:srgbClr val="6E7687"/>
-                </a:solidFill>
-                <a:latin typeface="Microsoft JhengHei" pitchFamily="34" charset="0"/>
+                  <a:srgbClr val="68645C"/>
+                </a:solidFill>
+                <a:latin typeface="STHeiti" pitchFamily="34" charset="0"/>
                 <a:ea typeface="Microsoft JhengHei" pitchFamily="34" charset="-122"/>
                 <a:cs typeface="Microsoft JhengHei" pitchFamily="34" charset="-120"/>
               </a:rPr>
@@ -26635,7 +26457,7 @@
             </a:avLst>
           </a:prstGeom>
           <a:solidFill>
-            <a:srgbClr val="F3F4F7"/>
+            <a:srgbClr val="E9E3D6"/>
           </a:solidFill>
           <a:ln/>
         </p:spPr>
@@ -26659,7 +26481,7 @@
             <a:avLst/>
           </a:prstGeom>
           <a:solidFill>
-            <a:srgbClr val="10131A"/>
+            <a:srgbClr val="111B30"/>
           </a:solidFill>
           <a:ln/>
         </p:spPr>
@@ -26695,9 +26517,9 @@
             <a:r>
               <a:rPr lang="en-US" sz="1500" b="1" dirty="0">
                 <a:solidFill>
-                  <a:srgbClr val="10131A"/>
-                </a:solidFill>
-                <a:latin typeface="Arial" pitchFamily="34" charset="0"/>
+                  <a:srgbClr val="1F1E1D"/>
+                </a:solidFill>
+                <a:latin typeface="STHeiti" pitchFamily="34" charset="0"/>
                 <a:ea typeface="Arial" pitchFamily="34" charset="-122"/>
                 <a:cs typeface="Arial" pitchFamily="34" charset="-120"/>
               </a:rPr>
@@ -26734,9 +26556,9 @@
             <a:r>
               <a:rPr lang="en-US" sz="1250" dirty="0">
                 <a:solidFill>
-                  <a:srgbClr val="6E7687"/>
-                </a:solidFill>
-                <a:latin typeface="Microsoft JhengHei" pitchFamily="34" charset="0"/>
+                  <a:srgbClr val="68645C"/>
+                </a:solidFill>
+                <a:latin typeface="STHeiti" pitchFamily="34" charset="0"/>
                 <a:ea typeface="Microsoft JhengHei" pitchFamily="34" charset="-122"/>
                 <a:cs typeface="Microsoft JhengHei" pitchFamily="34" charset="-120"/>
               </a:rPr>
@@ -26763,7 +26585,7 @@
             </a:avLst>
           </a:prstGeom>
           <a:solidFill>
-            <a:srgbClr val="F3F4F7"/>
+            <a:srgbClr val="E9E3D6"/>
           </a:solidFill>
           <a:ln/>
         </p:spPr>
@@ -26787,7 +26609,7 @@
             <a:avLst/>
           </a:prstGeom>
           <a:solidFill>
-            <a:srgbClr val="1FB6A6"/>
+            <a:srgbClr val="157554"/>
           </a:solidFill>
           <a:ln/>
         </p:spPr>
@@ -26823,9 +26645,9 @@
             <a:r>
               <a:rPr lang="en-US" sz="1500" b="1" dirty="0">
                 <a:solidFill>
-                  <a:srgbClr val="10131A"/>
-                </a:solidFill>
-                <a:latin typeface="Arial" pitchFamily="34" charset="0"/>
+                  <a:srgbClr val="1F1E1D"/>
+                </a:solidFill>
+                <a:latin typeface="STHeiti" pitchFamily="34" charset="0"/>
                 <a:ea typeface="Arial" pitchFamily="34" charset="-122"/>
                 <a:cs typeface="Arial" pitchFamily="34" charset="-120"/>
               </a:rPr>
@@ -26862,9 +26684,9 @@
             <a:r>
               <a:rPr lang="en-US" sz="1250" dirty="0">
                 <a:solidFill>
-                  <a:srgbClr val="6E7687"/>
-                </a:solidFill>
-                <a:latin typeface="Microsoft JhengHei" pitchFamily="34" charset="0"/>
+                  <a:srgbClr val="68645C"/>
+                </a:solidFill>
+                <a:latin typeface="STHeiti" pitchFamily="34" charset="0"/>
                 <a:ea typeface="Microsoft JhengHei" pitchFamily="34" charset="-122"/>
                 <a:cs typeface="Microsoft JhengHei" pitchFamily="34" charset="-120"/>
               </a:rPr>
@@ -26891,7 +26713,7 @@
             </a:avLst>
           </a:prstGeom>
           <a:solidFill>
-            <a:srgbClr val="F3F4F7"/>
+            <a:srgbClr val="E9E3D6"/>
           </a:solidFill>
           <a:ln/>
         </p:spPr>
@@ -26915,7 +26737,7 @@
             <a:avLst/>
           </a:prstGeom>
           <a:solidFill>
-            <a:srgbClr val="4A5568"/>
+            <a:srgbClr val="34445E"/>
           </a:solidFill>
           <a:ln/>
         </p:spPr>
@@ -26951,9 +26773,9 @@
             <a:r>
               <a:rPr lang="en-US" sz="1500" b="1" dirty="0">
                 <a:solidFill>
-                  <a:srgbClr val="10131A"/>
-                </a:solidFill>
-                <a:latin typeface="Arial" pitchFamily="34" charset="0"/>
+                  <a:srgbClr val="1F1E1D"/>
+                </a:solidFill>
+                <a:latin typeface="STHeiti" pitchFamily="34" charset="0"/>
                 <a:ea typeface="Arial" pitchFamily="34" charset="-122"/>
                 <a:cs typeface="Arial" pitchFamily="34" charset="-120"/>
               </a:rPr>
@@ -26990,9 +26812,9 @@
             <a:r>
               <a:rPr lang="en-US" sz="1250" dirty="0">
                 <a:solidFill>
-                  <a:srgbClr val="6E7687"/>
-                </a:solidFill>
-                <a:latin typeface="Microsoft JhengHei" pitchFamily="34" charset="0"/>
+                  <a:srgbClr val="68645C"/>
+                </a:solidFill>
+                <a:latin typeface="STHeiti" pitchFamily="34" charset="0"/>
                 <a:ea typeface="Microsoft JhengHei" pitchFamily="34" charset="-122"/>
                 <a:cs typeface="Microsoft JhengHei" pitchFamily="34" charset="-120"/>
               </a:rPr>
@@ -27029,9 +26851,9 @@
             <a:r>
               <a:rPr lang="en-US" sz="1100" dirty="0">
                 <a:solidFill>
-                  <a:srgbClr val="A8AEBC"/>
-                </a:solidFill>
-                <a:latin typeface="Arial" pitchFamily="34" charset="0"/>
+                  <a:srgbClr val="9DA89F"/>
+                </a:solidFill>
+                <a:latin typeface="STHeiti" pitchFamily="34" charset="0"/>
                 <a:ea typeface="Arial" pitchFamily="34" charset="-122"/>
                 <a:cs typeface="Arial" pitchFamily="34" charset="-120"/>
               </a:rPr>

--- a/docs/Fitness-MCP-Product-Vision.pptx
+++ b/docs/Fitness-MCP-Product-Vision.pptx
@@ -3328,9 +3328,9 @@
                 <a:solidFill>
                   <a:srgbClr val="9FAEBE"/>
                 </a:solidFill>
-                <a:latin typeface="STHeiti" pitchFamily="34" charset="0"/>
-                <a:ea typeface="Arial" pitchFamily="34" charset="-122"/>
-                <a:cs typeface="Arial" pitchFamily="34" charset="-120"/>
+                <a:latin typeface="Arial" pitchFamily="34" charset="0"/>
+                <a:ea typeface="Microsoft JhengHei" pitchFamily="34" charset="-122"/>
+                <a:cs typeface="Microsoft JhengHei" pitchFamily="34" charset="-120"/>
               </a:rPr>
               <a:t>PRODUCT VISION</a:t>
             </a:r>
@@ -3370,9 +3370,9 @@
                 <a:solidFill>
                   <a:srgbClr val="FAF9F5"/>
                 </a:solidFill>
-                <a:latin typeface="STHeiti" pitchFamily="34" charset="0"/>
-                <a:ea typeface="Arial" pitchFamily="34" charset="-122"/>
-                <a:cs typeface="Arial" pitchFamily="34" charset="-120"/>
+                <a:latin typeface="Arial" pitchFamily="34" charset="0"/>
+                <a:ea typeface="Microsoft JhengHei" pitchFamily="34" charset="-122"/>
+                <a:cs typeface="Microsoft JhengHei" pitchFamily="34" charset="-120"/>
               </a:rPr>
               <a:t>Pacevera</a:t>
             </a:r>
@@ -3390,9 +3390,9 @@
                 <a:solidFill>
                   <a:srgbClr val="FAF9F5"/>
                 </a:solidFill>
-                <a:latin typeface="STHeiti" pitchFamily="34" charset="0"/>
-                <a:ea typeface="Arial" pitchFamily="34" charset="-122"/>
-                <a:cs typeface="Arial" pitchFamily="34" charset="-120"/>
+                <a:latin typeface="Arial" pitchFamily="34" charset="0"/>
+                <a:ea typeface="Microsoft JhengHei" pitchFamily="34" charset="-122"/>
+                <a:cs typeface="Microsoft JhengHei" pitchFamily="34" charset="-120"/>
               </a:rPr>
               <a:t>Fitness Decision Engine</a:t>
             </a:r>
@@ -3426,7 +3426,9 @@
                 <a:solidFill>
                   <a:srgbClr val="FAF9F5"/>
                 </a:solidFill>
-                <a:latin typeface="STHeiti"/>
+                <a:latin typeface="Arial"/>
+                <a:ea typeface="Microsoft JhengHei"/>
+                <a:cs typeface="Microsoft JhengHei"/>
               </a:rPr>
               <a:t>把 Evidence 轉成今天可執行、可追溯的訓練變更。健康歷史仍由你控制。</a:t>
             </a:r>
@@ -3486,7 +3488,9 @@
                 <a:solidFill>
                   <a:srgbClr val="FAF9F5"/>
                 </a:solidFill>
-                <a:latin typeface="STHeiti"/>
+                <a:latin typeface="Arial"/>
+                <a:ea typeface="Microsoft JhengHei"/>
+                <a:cs typeface="Microsoft JhengHei"/>
               </a:rPr>
               <a:t>Public preview · Desktop MCPB · v0.5.0 → local private engine</a:t>
             </a:r>
@@ -3579,9 +3583,9 @@
                 <a:solidFill>
                   <a:srgbClr val="68645C"/>
                 </a:solidFill>
-                <a:latin typeface="STHeiti" pitchFamily="34" charset="0"/>
-                <a:ea typeface="Arial" pitchFamily="34" charset="-122"/>
-                <a:cs typeface="Arial" pitchFamily="34" charset="-120"/>
+                <a:latin typeface="Arial" pitchFamily="34" charset="0"/>
+                <a:ea typeface="Microsoft JhengHei" pitchFamily="34" charset="-122"/>
+                <a:cs typeface="Microsoft JhengHei" pitchFamily="34" charset="-120"/>
               </a:rPr>
               <a:t>PART 2 — 核心功能</a:t>
             </a:r>
@@ -3615,7 +3619,9 @@
                 <a:solidFill>
                   <a:srgbClr val="1F1E1D"/>
                 </a:solidFill>
-                <a:latin typeface="STHeiti"/>
+                <a:latin typeface="Arial"/>
+                <a:ea typeface="Microsoft JhengHei"/>
+                <a:cs typeface="Microsoft JhengHei"/>
               </a:rPr>
               <a:t>我們給的是決策，不是建議</a:t>
             </a:r>
@@ -3643,24 +3649,17 @@
           <a:bodyPr wrap="square" lIns="0" tIns="0" rIns="0" bIns="0" rtlCol="0" anchor="t"/>
           <a:lstStyle/>
           <a:p>
-            <a:pPr marL="0" indent="0">
-              <a:lnSpc>
-                <a:spcPts val="3200"/>
-              </a:lnSpc>
-              <a:buNone/>
-            </a:pPr>
-            <a:r>
-              <a:rPr lang="en-US" sz="2000" dirty="0">
+            <a:r>
+              <a:rPr>
                 <a:solidFill>
                   <a:srgbClr val="1F1E1D"/>
                 </a:solidFill>
-                <a:latin typeface="STHeiti" pitchFamily="34" charset="0"/>
-                <a:ea typeface="Microsoft JhengHei" pitchFamily="34" charset="-122"/>
-                <a:cs typeface="Microsoft JhengHei" pitchFamily="34" charset="-120"/>
-              </a:rPr>
-              <a:t>建議可以憑空發出;決策必須知道「今天原本要做什麼」,並寫成 from → to。</a:t>
-            </a:r>
-            <a:endParaRPr lang="en-US" sz="2000" dirty="0"/>
+                <a:latin typeface="Arial"/>
+                <a:ea typeface="Microsoft JhengHei"/>
+                <a:cs typeface="Microsoft JhengHei"/>
+              </a:rPr>
+              <a:t>建議可以憑空發出;決策必須知道「今天原本要做什麼」,並寫成「原定課表到今天執行」。</a:t>
+            </a:r>
           </a:p>
         </p:txBody>
       </p:sp>
@@ -3719,7 +3718,7 @@
                 <a:solidFill>
                   <a:srgbClr val="9AA1B0"/>
                 </a:solidFill>
-                <a:latin typeface="STHeiti" pitchFamily="34" charset="0"/>
+                <a:latin typeface="Arial" pitchFamily="34" charset="0"/>
                 <a:ea typeface="Microsoft JhengHei" pitchFamily="34" charset="-122"/>
                 <a:cs typeface="Microsoft JhengHei" pitchFamily="34" charset="-120"/>
               </a:rPr>
@@ -3756,9 +3755,9 @@
             <a:r>
               <a:rPr lang="en-US" sz="1800" b="1" dirty="0">
                 <a:solidFill>
-                  <a:srgbClr val="DAD2C3"/>
-                </a:solidFill>
-                <a:latin typeface="STHeiti" pitchFamily="34" charset="0"/>
+                  <a:srgbClr val="1F1E1D"/>
+                </a:solidFill>
+                <a:latin typeface="Arial" pitchFamily="34" charset="0"/>
                 <a:ea typeface="Microsoft JhengHei" pitchFamily="34" charset="-122"/>
                 <a:cs typeface="Microsoft JhengHei" pitchFamily="34" charset="-120"/>
               </a:rPr>
@@ -3823,7 +3822,7 @@
                 <a:solidFill>
                   <a:srgbClr val="157554"/>
                 </a:solidFill>
-                <a:latin typeface="STHeiti" pitchFamily="34" charset="0"/>
+                <a:latin typeface="Arial" pitchFamily="34" charset="0"/>
                 <a:ea typeface="Microsoft JhengHei" pitchFamily="34" charset="-122"/>
                 <a:cs typeface="Microsoft JhengHei" pitchFamily="34" charset="-120"/>
               </a:rPr>
@@ -3860,9 +3859,9 @@
             <a:r>
               <a:rPr lang="en-US" sz="1800" b="1" dirty="0">
                 <a:solidFill>
-                  <a:srgbClr val="1F1E1D"/>
-                </a:solidFill>
-                <a:latin typeface="STHeiti" pitchFamily="34" charset="0"/>
+                  <a:srgbClr val="FAF9F5"/>
+                </a:solidFill>
+                <a:latin typeface="Arial" pitchFamily="34" charset="0"/>
                 <a:ea typeface="Microsoft JhengHei" pitchFamily="34" charset="-122"/>
                 <a:cs typeface="Microsoft JhengHei" pitchFamily="34" charset="-120"/>
               </a:rPr>
@@ -3901,9 +3900,9 @@
                 <a:solidFill>
                   <a:srgbClr val="9DA89F"/>
                 </a:solidFill>
-                <a:latin typeface="STHeiti" pitchFamily="34" charset="0"/>
-                <a:ea typeface="Arial" pitchFamily="34" charset="-122"/>
-                <a:cs typeface="Arial" pitchFamily="34" charset="-120"/>
+                <a:latin typeface="Arial" pitchFamily="34" charset="0"/>
+                <a:ea typeface="Microsoft JhengHei" pitchFamily="34" charset="-122"/>
+                <a:cs typeface="Microsoft JhengHei" pitchFamily="34" charset="-120"/>
               </a:rPr>
               <a:t>10</a:t>
             </a:r>
@@ -3925,7 +3924,7 @@
     <p:bg>
       <p:bgPr>
         <a:solidFill>
-          <a:srgbClr val="111B30"/>
+          <a:srgbClr val="F0EEE6"/>
         </a:solidFill>
         <a:effectLst/>
       </p:bgPr>
@@ -3946,971 +3945,998 @@
       </p:grpSpPr>
       <p:sp>
         <p:nvSpPr>
-          <p:cNvPr id="2" name="Shape 0"/>
-          <p:cNvSpPr/>
-          <p:nvPr/>
-        </p:nvSpPr>
-        <p:spPr>
-          <a:xfrm>
-            <a:off x="685800" y="566928"/>
-            <a:ext cx="146304" cy="146304"/>
-          </a:xfrm>
-          <a:prstGeom prst="ellipse">
+          <p:cNvPr id="2" name="TextBox 1"/>
+          <p:cNvSpPr txBox="1"/>
+          <p:nvPr/>
+        </p:nvSpPr>
+        <p:spPr>
+          <a:xfrm>
+            <a:off x="713232" y="438912"/>
+            <a:ext cx="3291840" cy="228600"/>
+          </a:xfrm>
+          <a:prstGeom prst="rect">
+            <a:avLst/>
+          </a:prstGeom>
+          <a:noFill/>
+        </p:spPr>
+        <p:txBody>
+          <a:bodyPr wrap="none" lIns="0" rIns="0" tIns="0" bIns="0" anchor="ctr">
+            <a:spAutoFit/>
+          </a:bodyPr>
+          <a:lstStyle/>
+          <a:p>
+            <a:pPr algn="l"/>
+            <a:r>
+              <a:rPr sz="1000" b="1">
+                <a:solidFill>
+                  <a:srgbClr val="68645C"/>
+                </a:solidFill>
+                <a:latin typeface="Arial"/>
+                <a:ea typeface="Microsoft JhengHei"/>
+                <a:cs typeface="Microsoft JhengHei"/>
+              </a:rPr>
+              <a:t>PART 2 — CORE FUNCTION</a:t>
+            </a:r>
+          </a:p>
+        </p:txBody>
+      </p:sp>
+      <p:sp>
+        <p:nvSpPr>
+          <p:cNvPr id="3" name="TextBox 2"/>
+          <p:cNvSpPr txBox="1"/>
+          <p:nvPr/>
+        </p:nvSpPr>
+        <p:spPr>
+          <a:xfrm>
+            <a:off x="713232" y="786384"/>
+            <a:ext cx="8138160" cy="566928"/>
+          </a:xfrm>
+          <a:prstGeom prst="rect">
+            <a:avLst/>
+          </a:prstGeom>
+          <a:noFill/>
+        </p:spPr>
+        <p:txBody>
+          <a:bodyPr wrap="none" lIns="0" rIns="0" tIns="0" bIns="0" anchor="ctr">
+            <a:spAutoFit/>
+          </a:bodyPr>
+          <a:lstStyle/>
+          <a:p>
+            <a:pPr algn="l"/>
+            <a:r>
+              <a:rPr sz="3000" b="1">
+                <a:solidFill>
+                  <a:srgbClr val="1F1E1D"/>
+                </a:solidFill>
+                <a:latin typeface="Arial"/>
+                <a:ea typeface="Microsoft JhengHei"/>
+                <a:cs typeface="Microsoft JhengHei"/>
+              </a:rPr>
+              <a:t>AI can coach. Pacevera decides.</a:t>
+            </a:r>
+          </a:p>
+        </p:txBody>
+      </p:sp>
+      <p:sp>
+        <p:nvSpPr>
+          <p:cNvPr id="4" name="TextBox 3"/>
+          <p:cNvSpPr txBox="1"/>
+          <p:nvPr/>
+        </p:nvSpPr>
+        <p:spPr>
+          <a:xfrm>
+            <a:off x="713232" y="1417320"/>
+            <a:ext cx="9692640" cy="292608"/>
+          </a:xfrm>
+          <a:prstGeom prst="rect">
+            <a:avLst/>
+          </a:prstGeom>
+          <a:noFill/>
+        </p:spPr>
+        <p:txBody>
+          <a:bodyPr wrap="none" lIns="0" rIns="0" tIns="0" bIns="0" anchor="ctr">
+            <a:spAutoFit/>
+          </a:bodyPr>
+          <a:lstStyle/>
+          <a:p>
+            <a:pPr algn="l"/>
+            <a:r>
+              <a:rPr sz="1300" b="0">
+                <a:solidFill>
+                  <a:srgbClr val="68645C"/>
+                </a:solidFill>
+                <a:latin typeface="Arial"/>
+                <a:ea typeface="Microsoft JhengHei"/>
+                <a:cs typeface="Microsoft JhengHei"/>
+              </a:rPr>
+              <a:t>One natural-language question becomes an executable training change through evidence and deterministic rules.</a:t>
+            </a:r>
+          </a:p>
+        </p:txBody>
+      </p:sp>
+      <p:sp>
+        <p:nvSpPr>
+          <p:cNvPr id="5" name="TextBox 4"/>
+          <p:cNvSpPr txBox="1"/>
+          <p:nvPr/>
+        </p:nvSpPr>
+        <p:spPr>
+          <a:xfrm>
+            <a:off x="713232" y="1975104"/>
+            <a:ext cx="2103120" cy="182880"/>
+          </a:xfrm>
+          <a:prstGeom prst="rect">
+            <a:avLst/>
+          </a:prstGeom>
+          <a:noFill/>
+        </p:spPr>
+        <p:txBody>
+          <a:bodyPr wrap="none" lIns="0" rIns="0" tIns="0" bIns="0" anchor="ctr">
+            <a:spAutoFit/>
+          </a:bodyPr>
+          <a:lstStyle/>
+          <a:p>
+            <a:pPr algn="l"/>
+            <a:r>
+              <a:rPr sz="900" b="1">
+                <a:solidFill>
+                  <a:srgbClr val="157554"/>
+                </a:solidFill>
+                <a:latin typeface="Arial"/>
+                <a:ea typeface="Microsoft JhengHei"/>
+                <a:cs typeface="Microsoft JhengHei"/>
+              </a:rPr>
+              <a:t>ONE DECISION LOOP</a:t>
+            </a:r>
+          </a:p>
+        </p:txBody>
+      </p:sp>
+      <p:sp>
+        <p:nvSpPr>
+          <p:cNvPr id="6" name="Rounded Rectangle 5"/>
+          <p:cNvSpPr/>
+          <p:nvPr/>
+        </p:nvSpPr>
+        <p:spPr>
+          <a:xfrm>
+            <a:off x="713232" y="2331720"/>
+            <a:ext cx="2011680" cy="1234440"/>
+          </a:xfrm>
+          <a:prstGeom prst="roundRect">
             <a:avLst/>
           </a:prstGeom>
           <a:solidFill>
-            <a:srgbClr val="157554"/>
+            <a:srgbClr val="E9E3D6"/>
           </a:solidFill>
-          <a:ln/>
-        </p:spPr>
-        <p:txBody>
-          <a:bodyPr/>
-          <a:p/>
-        </p:txBody>
-      </p:sp>
-      <p:sp>
-        <p:nvSpPr>
-          <p:cNvPr id="3" name="Text 1"/>
-          <p:cNvSpPr/>
-          <p:nvPr/>
-        </p:nvSpPr>
-        <p:spPr>
-          <a:xfrm>
-            <a:off x="941832" y="484632"/>
-            <a:ext cx="8686800" cy="310896"/>
-          </a:xfrm>
-          <a:prstGeom prst="rect">
-            <a:avLst/>
-          </a:prstGeom>
-          <a:noFill/>
-          <a:ln/>
-        </p:spPr>
-        <p:txBody>
-          <a:bodyPr wrap="square" lIns="0" tIns="0" rIns="0" bIns="0" rtlCol="0" anchor="ctr"/>
-          <a:lstStyle/>
-          <a:p>
-            <a:pPr marL="0" indent="0">
-              <a:buNone/>
-            </a:pPr>
-            <a:r>
-              <a:rPr lang="en-US" sz="1200" b="1" kern="0" spc="200" dirty="0">
-                <a:solidFill>
-                  <a:srgbClr val="9FAEBE"/>
-                </a:solidFill>
-                <a:latin typeface="STHeiti" pitchFamily="34" charset="0"/>
-                <a:ea typeface="Arial" pitchFamily="34" charset="-122"/>
-                <a:cs typeface="Arial" pitchFamily="34" charset="-120"/>
-              </a:rPr>
-              <a:t>PART 2 — 核心功能</a:t>
-            </a:r>
-            <a:endParaRPr lang="en-US" sz="1200" dirty="0"/>
-          </a:p>
-        </p:txBody>
-      </p:sp>
-      <p:sp>
-        <p:nvSpPr>
-          <p:cNvPr id="4" name="Text 2"/>
-          <p:cNvSpPr/>
-          <p:nvPr/>
-        </p:nvSpPr>
-        <p:spPr>
-          <a:xfrm>
-            <a:off x="685800" y="914400"/>
-            <a:ext cx="10545775" cy="1207008"/>
-          </a:xfrm>
-          <a:prstGeom prst="rect">
-            <a:avLst/>
-          </a:prstGeom>
-          <a:noFill/>
-          <a:ln/>
-        </p:spPr>
-        <p:txBody>
-          <a:bodyPr wrap="square" lIns="0" tIns="0" rIns="0" bIns="0" rtlCol="0" anchor="ctr"/>
-          <a:lstStyle/>
-          <a:p>
-            <a:pPr marL="0" indent="0">
-              <a:buNone/>
-            </a:pPr>
-            <a:r>
-              <a:rPr lang="en-US" sz="3400" b="1" dirty="0">
-                <a:solidFill>
-                  <a:srgbClr val="FAF9F5"/>
-                </a:solidFill>
-                <a:latin typeface="STHeiti" pitchFamily="34" charset="0"/>
-                <a:ea typeface="Microsoft JhengHei" pitchFamily="34" charset="-122"/>
-                <a:cs typeface="Microsoft JhengHei" pitchFamily="34" charset="-120"/>
-              </a:rPr>
-              <a:t>LLM 是 Orchestrator,不做計算</a:t>
-            </a:r>
-            <a:endParaRPr lang="en-US" sz="3400" dirty="0"/>
-          </a:p>
-        </p:txBody>
-      </p:sp>
-      <p:sp>
-        <p:nvSpPr>
-          <p:cNvPr id="5" name="Text 3"/>
-          <p:cNvSpPr/>
-          <p:nvPr/>
-        </p:nvSpPr>
-        <p:spPr>
-          <a:xfrm>
-            <a:off x="685800" y="2240280"/>
-            <a:ext cx="10362895" cy="640080"/>
-          </a:xfrm>
-          <a:prstGeom prst="rect">
-            <a:avLst/>
-          </a:prstGeom>
-          <a:noFill/>
-          <a:ln/>
-        </p:spPr>
-        <p:txBody>
-          <a:bodyPr wrap="square" lIns="0" tIns="0" rIns="0" bIns="0" rtlCol="0" anchor="t"/>
-          <a:lstStyle/>
-          <a:p>
-            <a:pPr marL="0" indent="0">
-              <a:lnSpc>
-                <a:spcPts val="3200"/>
-              </a:lnSpc>
-              <a:buNone/>
-            </a:pPr>
-            <a:r>
-              <a:rPr lang="en-US" sz="2000" dirty="0">
-                <a:solidFill>
-                  <a:srgbClr val="D6DAE4"/>
-                </a:solidFill>
-                <a:latin typeface="STHeiti" pitchFamily="34" charset="0"/>
-                <a:ea typeface="Microsoft JhengHei" pitchFamily="34" charset="-122"/>
-                <a:cs typeface="Microsoft JhengHei" pitchFamily="34" charset="-120"/>
-              </a:rPr>
-              <a:t>恢復分數、訓練量、課表,全部由引擎決定;LLM 負責理解、呼叫、解釋與調整。</a:t>
-            </a:r>
-            <a:endParaRPr lang="en-US" sz="2000" dirty="0"/>
-          </a:p>
-        </p:txBody>
-      </p:sp>
-      <p:sp>
-        <p:nvSpPr>
-          <p:cNvPr id="6" name="Shape 4"/>
-          <p:cNvSpPr/>
-          <p:nvPr/>
-        </p:nvSpPr>
-        <p:spPr>
-          <a:xfrm>
-            <a:off x="685800" y="3383280"/>
-            <a:ext cx="1554480" cy="1051560"/>
+          <a:ln>
+            <a:noFill/>
+          </a:ln>
+        </p:spPr>
+        <p:style>
+          <a:lnRef idx="1">
+            <a:schemeClr val="accent1"/>
+          </a:lnRef>
+          <a:fillRef idx="3">
+            <a:schemeClr val="accent1"/>
+          </a:fillRef>
+          <a:effectRef idx="2">
+            <a:schemeClr val="accent1"/>
+          </a:effectRef>
+          <a:fontRef idx="minor">
+            <a:schemeClr val="lt1"/>
+          </a:fontRef>
+        </p:style>
+        <p:txBody>
+          <a:bodyPr rtlCol="0" anchor="ctr" lIns="164592" rIns="164592" tIns="109728" bIns="73152"/>
+          <a:lstStyle/>
+          <a:p>
+            <a:pPr algn="ctr"/>
+            <a:r>
+              <a:rPr sz="1700" b="1">
+                <a:solidFill>
+                  <a:srgbClr val="1F1E1D"/>
+                </a:solidFill>
+                <a:latin typeface="Arial"/>
+                <a:ea typeface="Microsoft JhengHei"/>
+                <a:cs typeface="Microsoft JhengHei"/>
+              </a:rPr>
+              <a:t>1  AI coach</a:t>
+            </a:r>
+          </a:p>
+          <a:p>
+            <a:pPr algn="ctr">
+              <a:spcBef>
+                <a:spcPts val="500"/>
+              </a:spcBef>
+            </a:pPr>
+            <a:r>
+              <a:rPr sz="1050">
+                <a:solidFill>
+                  <a:srgbClr val="68645C"/>
+                </a:solidFill>
+                <a:latin typeface="Arial"/>
+                <a:ea typeface="Microsoft JhengHei"/>
+                <a:cs typeface="Microsoft JhengHei"/>
+              </a:rPr>
+              <a:t>understand intent · call tools</a:t>
+            </a:r>
+          </a:p>
+        </p:txBody>
+      </p:sp>
+      <p:sp>
+        <p:nvSpPr>
+          <p:cNvPr id="7" name="TextBox 6"/>
+          <p:cNvSpPr txBox="1"/>
+          <p:nvPr/>
+        </p:nvSpPr>
+        <p:spPr>
+          <a:xfrm>
+            <a:off x="2798064" y="2706624"/>
+            <a:ext cx="320040" cy="320040"/>
+          </a:xfrm>
+          <a:prstGeom prst="rect">
+            <a:avLst/>
+          </a:prstGeom>
+          <a:noFill/>
+        </p:spPr>
+        <p:txBody>
+          <a:bodyPr wrap="none" lIns="0" rIns="0" tIns="0" bIns="0" anchor="ctr">
+            <a:spAutoFit/>
+          </a:bodyPr>
+          <a:lstStyle/>
+          <a:p>
+            <a:pPr algn="ctr"/>
+            <a:r>
+              <a:rPr sz="2200" b="1">
+                <a:solidFill>
+                  <a:srgbClr val="157554"/>
+                </a:solidFill>
+                <a:latin typeface="Arial"/>
+                <a:ea typeface="Microsoft JhengHei"/>
+                <a:cs typeface="Microsoft JhengHei"/>
+              </a:rPr>
+              <a:t>→</a:t>
+            </a:r>
+          </a:p>
+        </p:txBody>
+      </p:sp>
+      <p:sp>
+        <p:nvSpPr>
+          <p:cNvPr id="8" name="Rounded Rectangle 7"/>
+          <p:cNvSpPr/>
+          <p:nvPr/>
+        </p:nvSpPr>
+        <p:spPr>
+          <a:xfrm>
+            <a:off x="3136392" y="2331720"/>
+            <a:ext cx="2331720" cy="1234440"/>
           </a:xfrm>
           <a:prstGeom prst="roundRect">
-            <a:avLst>
-              <a:gd name="adj" fmla="val 8696"/>
-            </a:avLst>
+            <a:avLst/>
           </a:prstGeom>
           <a:solidFill>
-            <a:srgbClr val="157554"/>
+            <a:srgbClr val="111B30"/>
           </a:solidFill>
-          <a:ln/>
-        </p:spPr>
-        <p:txBody>
-          <a:bodyPr/>
-          <a:p/>
-        </p:txBody>
-      </p:sp>
-      <p:sp>
-        <p:nvSpPr>
-          <p:cNvPr id="7" name="Text 5"/>
-          <p:cNvSpPr/>
-          <p:nvPr/>
-        </p:nvSpPr>
-        <p:spPr>
-          <a:xfrm>
-            <a:off x="731520" y="3383280"/>
-            <a:ext cx="1463040" cy="1051560"/>
-          </a:xfrm>
-          <a:prstGeom prst="rect">
-            <a:avLst/>
-          </a:prstGeom>
-          <a:noFill/>
-          <a:ln/>
-        </p:spPr>
-        <p:txBody>
-          <a:bodyPr wrap="square" lIns="0" tIns="0" rIns="0" bIns="0" rtlCol="0" anchor="ctr"/>
-          <a:lstStyle/>
-          <a:p>
-            <a:pPr marL="0" indent="0" algn="ctr">
-              <a:buNone/>
-            </a:pPr>
-            <a:r>
-              <a:rPr lang="en-US" sz="1100" b="1" dirty="0">
-                <a:solidFill>
-                  <a:srgbClr val="FAF9F5"/>
-                </a:solidFill>
-                <a:latin typeface="STHeiti" pitchFamily="34" charset="0"/>
-                <a:ea typeface="Arial" pitchFamily="34" charset="-122"/>
-                <a:cs typeface="Arial" pitchFamily="34" charset="-120"/>
-              </a:rPr>
-              <a:t>LLM</a:t>
-            </a:r>
-            <a:endParaRPr lang="en-US" sz="1100" dirty="0"/>
-          </a:p>
-        </p:txBody>
-      </p:sp>
-      <p:sp>
-        <p:nvSpPr>
-          <p:cNvPr id="8" name="Text 6"/>
-          <p:cNvSpPr/>
-          <p:nvPr/>
-        </p:nvSpPr>
-        <p:spPr>
-          <a:xfrm>
-            <a:off x="2258568" y="3721608"/>
-            <a:ext cx="237744" cy="365760"/>
-          </a:xfrm>
-          <a:prstGeom prst="rect">
-            <a:avLst/>
-          </a:prstGeom>
-          <a:noFill/>
-          <a:ln/>
-        </p:spPr>
-        <p:txBody>
-          <a:bodyPr wrap="square" lIns="0" tIns="0" rIns="0" bIns="0" rtlCol="0" anchor="ctr"/>
-          <a:lstStyle/>
-          <a:p>
-            <a:pPr marL="0" indent="0" algn="ctr">
-              <a:buNone/>
-            </a:pPr>
-            <a:r>
-              <a:rPr lang="en-US" sz="1500" dirty="0">
-                <a:solidFill>
-                  <a:srgbClr val="5A6376"/>
-                </a:solidFill>
-                <a:latin typeface="STHeiti" pitchFamily="34" charset="0"/>
-                <a:ea typeface="Arial" pitchFamily="34" charset="-122"/>
-                <a:cs typeface="Arial" pitchFamily="34" charset="-120"/>
+          <a:ln>
+            <a:noFill/>
+          </a:ln>
+        </p:spPr>
+        <p:style>
+          <a:lnRef idx="1">
+            <a:schemeClr val="accent1"/>
+          </a:lnRef>
+          <a:fillRef idx="3">
+            <a:schemeClr val="accent1"/>
+          </a:fillRef>
+          <a:effectRef idx="2">
+            <a:schemeClr val="accent1"/>
+          </a:effectRef>
+          <a:fontRef idx="minor">
+            <a:schemeClr val="lt1"/>
+          </a:fontRef>
+        </p:style>
+        <p:txBody>
+          <a:bodyPr rtlCol="0" anchor="ctr" lIns="164592" rIns="164592" tIns="109728" bIns="73152"/>
+          <a:lstStyle/>
+          <a:p>
+            <a:pPr algn="ctr"/>
+            <a:r>
+              <a:rPr sz="2300" b="1">
+                <a:solidFill>
+                  <a:srgbClr val="49D993"/>
+                </a:solidFill>
+                <a:latin typeface="Arial"/>
+                <a:ea typeface="Microsoft JhengHei"/>
+                <a:cs typeface="Microsoft JhengHei"/>
+              </a:rPr>
+              <a:t>2  Pacevera</a:t>
+            </a:r>
+          </a:p>
+          <a:p>
+            <a:pPr algn="ctr">
+              <a:spcBef>
+                <a:spcPts val="500"/>
+              </a:spcBef>
+            </a:pPr>
+            <a:r>
+              <a:rPr sz="1050">
+                <a:solidFill>
+                  <a:srgbClr val="C9D0C8"/>
+                </a:solidFill>
+                <a:latin typeface="Arial"/>
+                <a:ea typeface="Microsoft JhengHei"/>
+                <a:cs typeface="Microsoft JhengHei"/>
+              </a:rPr>
+              <a:t>calculate · decide · trace</a:t>
+            </a:r>
+          </a:p>
+        </p:txBody>
+      </p:sp>
+      <p:sp>
+        <p:nvSpPr>
+          <p:cNvPr id="9" name="TextBox 8"/>
+          <p:cNvSpPr txBox="1"/>
+          <p:nvPr/>
+        </p:nvSpPr>
+        <p:spPr>
+          <a:xfrm>
+            <a:off x="5559552" y="2706624"/>
+            <a:ext cx="320040" cy="320040"/>
+          </a:xfrm>
+          <a:prstGeom prst="rect">
+            <a:avLst/>
+          </a:prstGeom>
+          <a:noFill/>
+        </p:spPr>
+        <p:txBody>
+          <a:bodyPr wrap="none" lIns="0" rIns="0" tIns="0" bIns="0" anchor="ctr">
+            <a:spAutoFit/>
+          </a:bodyPr>
+          <a:lstStyle/>
+          <a:p>
+            <a:pPr algn="ctr"/>
+            <a:r>
+              <a:rPr sz="2200" b="1">
+                <a:solidFill>
+                  <a:srgbClr val="157554"/>
+                </a:solidFill>
+                <a:latin typeface="Arial"/>
+                <a:ea typeface="Microsoft JhengHei"/>
+                <a:cs typeface="Microsoft JhengHei"/>
               </a:rPr>
               <a:t>→</a:t>
             </a:r>
-            <a:endParaRPr lang="en-US" sz="1500" dirty="0"/>
-          </a:p>
-        </p:txBody>
-      </p:sp>
-      <p:sp>
-        <p:nvSpPr>
-          <p:cNvPr id="9" name="Shape 7"/>
-          <p:cNvSpPr/>
-          <p:nvPr/>
-        </p:nvSpPr>
-        <p:spPr>
-          <a:xfrm>
-            <a:off x="2514600" y="3383280"/>
-            <a:ext cx="1554480" cy="1051560"/>
+          </a:p>
+        </p:txBody>
+      </p:sp>
+      <p:sp>
+        <p:nvSpPr>
+          <p:cNvPr id="10" name="Rounded Rectangle 9"/>
+          <p:cNvSpPr/>
+          <p:nvPr/>
+        </p:nvSpPr>
+        <p:spPr>
+          <a:xfrm>
+            <a:off x="5897880" y="2331720"/>
+            <a:ext cx="2148840" cy="1234440"/>
           </a:xfrm>
           <a:prstGeom prst="roundRect">
-            <a:avLst>
-              <a:gd name="adj" fmla="val 8696"/>
-            </a:avLst>
+            <a:avLst/>
           </a:prstGeom>
           <a:solidFill>
-            <a:srgbClr val="1E2A40"/>
+            <a:srgbClr val="E9E3D6"/>
           </a:solidFill>
-          <a:ln/>
-        </p:spPr>
-        <p:txBody>
-          <a:bodyPr/>
-          <a:p/>
-        </p:txBody>
-      </p:sp>
-      <p:sp>
-        <p:nvSpPr>
-          <p:cNvPr id="10" name="Text 8"/>
-          <p:cNvSpPr/>
-          <p:nvPr/>
-        </p:nvSpPr>
-        <p:spPr>
-          <a:xfrm>
-            <a:off x="2560320" y="3383280"/>
-            <a:ext cx="1463040" cy="1051560"/>
-          </a:xfrm>
-          <a:prstGeom prst="rect">
-            <a:avLst/>
-          </a:prstGeom>
-          <a:noFill/>
-          <a:ln/>
-        </p:spPr>
-        <p:txBody>
-          <a:bodyPr wrap="square" lIns="0" tIns="0" rIns="0" bIns="0" rtlCol="0" anchor="ctr"/>
-          <a:lstStyle/>
-          <a:p>
-            <a:r>
-              <a:rPr>
-                <a:solidFill>
-                  <a:srgbClr val="FAF9F5"/>
-                </a:solidFill>
-                <a:latin typeface="STHeiti"/>
-              </a:rPr>
-              <a:t>Pacevera</a:t>
-            </a:r>
-          </a:p>
-        </p:txBody>
-      </p:sp>
-      <p:sp>
-        <p:nvSpPr>
-          <p:cNvPr id="11" name="Text 9"/>
-          <p:cNvSpPr/>
-          <p:nvPr/>
-        </p:nvSpPr>
-        <p:spPr>
-          <a:xfrm>
-            <a:off x="4087368" y="3721608"/>
-            <a:ext cx="237744" cy="365760"/>
-          </a:xfrm>
-          <a:prstGeom prst="rect">
-            <a:avLst/>
-          </a:prstGeom>
-          <a:noFill/>
-          <a:ln/>
-        </p:spPr>
-        <p:txBody>
-          <a:bodyPr wrap="square" lIns="0" tIns="0" rIns="0" bIns="0" rtlCol="0" anchor="ctr"/>
-          <a:lstStyle/>
-          <a:p>
-            <a:pPr marL="0" indent="0" algn="ctr">
-              <a:buNone/>
-            </a:pPr>
-            <a:r>
-              <a:rPr lang="en-US" sz="1500" dirty="0">
-                <a:solidFill>
-                  <a:srgbClr val="5A6376"/>
-                </a:solidFill>
-                <a:latin typeface="STHeiti" pitchFamily="34" charset="0"/>
-                <a:ea typeface="Arial" pitchFamily="34" charset="-122"/>
-                <a:cs typeface="Arial" pitchFamily="34" charset="-120"/>
+          <a:ln>
+            <a:noFill/>
+          </a:ln>
+        </p:spPr>
+        <p:style>
+          <a:lnRef idx="1">
+            <a:schemeClr val="accent1"/>
+          </a:lnRef>
+          <a:fillRef idx="3">
+            <a:schemeClr val="accent1"/>
+          </a:fillRef>
+          <a:effectRef idx="2">
+            <a:schemeClr val="accent1"/>
+          </a:effectRef>
+          <a:fontRef idx="minor">
+            <a:schemeClr val="lt1"/>
+          </a:fontRef>
+        </p:style>
+        <p:txBody>
+          <a:bodyPr rtlCol="0" anchor="ctr" lIns="164592" rIns="164592" tIns="109728" bIns="73152"/>
+          <a:lstStyle/>
+          <a:p>
+            <a:pPr algn="ctr"/>
+            <a:r>
+              <a:rPr sz="1700" b="1">
+                <a:solidFill>
+                  <a:srgbClr val="1F1E1D"/>
+                </a:solidFill>
+                <a:latin typeface="Arial"/>
+                <a:ea typeface="Microsoft JhengHei"/>
+                <a:cs typeface="Microsoft JhengHei"/>
+              </a:rPr>
+              <a:t>3  Evidence + rules</a:t>
+            </a:r>
+          </a:p>
+          <a:p>
+            <a:pPr algn="ctr">
+              <a:spcBef>
+                <a:spcPts val="500"/>
+              </a:spcBef>
+            </a:pPr>
+            <a:r>
+              <a:rPr sz="1050">
+                <a:solidFill>
+                  <a:srgbClr val="68645C"/>
+                </a:solidFill>
+                <a:latin typeface="Arial"/>
+                <a:ea typeface="Microsoft JhengHei"/>
+                <a:cs typeface="Microsoft JhengHei"/>
+              </a:rPr>
+              <a:t>recovery · fatigue · load · plan</a:t>
+            </a:r>
+          </a:p>
+        </p:txBody>
+      </p:sp>
+      <p:sp>
+        <p:nvSpPr>
+          <p:cNvPr id="11" name="TextBox 10"/>
+          <p:cNvSpPr txBox="1"/>
+          <p:nvPr/>
+        </p:nvSpPr>
+        <p:spPr>
+          <a:xfrm>
+            <a:off x="8147304" y="2706624"/>
+            <a:ext cx="320040" cy="320040"/>
+          </a:xfrm>
+          <a:prstGeom prst="rect">
+            <a:avLst/>
+          </a:prstGeom>
+          <a:noFill/>
+        </p:spPr>
+        <p:txBody>
+          <a:bodyPr wrap="none" lIns="0" rIns="0" tIns="0" bIns="0" anchor="ctr">
+            <a:spAutoFit/>
+          </a:bodyPr>
+          <a:lstStyle/>
+          <a:p>
+            <a:pPr algn="ctr"/>
+            <a:r>
+              <a:rPr sz="2200" b="1">
+                <a:solidFill>
+                  <a:srgbClr val="157554"/>
+                </a:solidFill>
+                <a:latin typeface="Arial"/>
+                <a:ea typeface="Microsoft JhengHei"/>
+                <a:cs typeface="Microsoft JhengHei"/>
               </a:rPr>
               <a:t>→</a:t>
             </a:r>
-            <a:endParaRPr lang="en-US" sz="1500" dirty="0"/>
-          </a:p>
-        </p:txBody>
-      </p:sp>
-      <p:sp>
-        <p:nvSpPr>
-          <p:cNvPr id="12" name="Shape 10"/>
-          <p:cNvSpPr/>
-          <p:nvPr/>
-        </p:nvSpPr>
-        <p:spPr>
-          <a:xfrm>
-            <a:off x="4343400" y="3383280"/>
-            <a:ext cx="1554480" cy="1051560"/>
+          </a:p>
+        </p:txBody>
+      </p:sp>
+      <p:sp>
+        <p:nvSpPr>
+          <p:cNvPr id="12" name="Rounded Rectangle 11"/>
+          <p:cNvSpPr/>
+          <p:nvPr/>
+        </p:nvSpPr>
+        <p:spPr>
+          <a:xfrm>
+            <a:off x="8485632" y="2331720"/>
+            <a:ext cx="2971800" cy="1234440"/>
           </a:xfrm>
           <a:prstGeom prst="roundRect">
-            <a:avLst>
-              <a:gd name="adj" fmla="val 8696"/>
-            </a:avLst>
+            <a:avLst/>
           </a:prstGeom>
           <a:solidFill>
-            <a:srgbClr val="1E2A40"/>
+            <a:srgbClr val="E9E3D6"/>
           </a:solidFill>
-          <a:ln/>
-        </p:spPr>
-        <p:txBody>
-          <a:bodyPr/>
-          <a:p/>
-        </p:txBody>
-      </p:sp>
-      <p:sp>
-        <p:nvSpPr>
-          <p:cNvPr id="13" name="Text 11"/>
-          <p:cNvSpPr/>
-          <p:nvPr/>
-        </p:nvSpPr>
-        <p:spPr>
-          <a:xfrm>
-            <a:off x="4389120" y="3383280"/>
-            <a:ext cx="1463040" cy="1051560"/>
-          </a:xfrm>
-          <a:prstGeom prst="rect">
-            <a:avLst/>
-          </a:prstGeom>
-          <a:noFill/>
-          <a:ln/>
-        </p:spPr>
-        <p:txBody>
-          <a:bodyPr wrap="square" lIns="0" tIns="0" rIns="0" bIns="0" rtlCol="0" anchor="ctr"/>
-          <a:lstStyle/>
-          <a:p>
-            <a:pPr marL="0" indent="0" algn="ctr">
-              <a:buNone/>
-            </a:pPr>
-            <a:r>
-              <a:rPr lang="en-US" sz="1100" b="1" dirty="0">
-                <a:solidFill>
-                  <a:srgbClr val="FAF9F5"/>
-                </a:solidFill>
-                <a:latin typeface="STHeiti" pitchFamily="34" charset="0"/>
-                <a:ea typeface="Arial" pitchFamily="34" charset="-122"/>
-                <a:cs typeface="Arial" pitchFamily="34" charset="-120"/>
-              </a:rPr>
-              <a:t>Evidence</a:t>
-            </a:r>
-            <a:endParaRPr lang="en-US" sz="1100" dirty="0"/>
-          </a:p>
-        </p:txBody>
-      </p:sp>
-      <p:sp>
-        <p:nvSpPr>
-          <p:cNvPr id="14" name="Text 12"/>
-          <p:cNvSpPr/>
-          <p:nvPr/>
-        </p:nvSpPr>
-        <p:spPr>
-          <a:xfrm>
-            <a:off x="5916168" y="3721608"/>
-            <a:ext cx="237744" cy="365760"/>
-          </a:xfrm>
-          <a:prstGeom prst="rect">
-            <a:avLst/>
-          </a:prstGeom>
-          <a:noFill/>
-          <a:ln/>
-        </p:spPr>
-        <p:txBody>
-          <a:bodyPr wrap="square" lIns="0" tIns="0" rIns="0" bIns="0" rtlCol="0" anchor="ctr"/>
-          <a:lstStyle/>
-          <a:p>
-            <a:pPr marL="0" indent="0" algn="ctr">
-              <a:buNone/>
-            </a:pPr>
-            <a:r>
-              <a:rPr lang="en-US" sz="1500" dirty="0">
-                <a:solidFill>
-                  <a:srgbClr val="5A6376"/>
-                </a:solidFill>
-                <a:latin typeface="STHeiti" pitchFamily="34" charset="0"/>
-                <a:ea typeface="Arial" pitchFamily="34" charset="-122"/>
-                <a:cs typeface="Arial" pitchFamily="34" charset="-120"/>
-              </a:rPr>
-              <a:t>→</a:t>
-            </a:r>
-            <a:endParaRPr lang="en-US" sz="1500" dirty="0"/>
-          </a:p>
-        </p:txBody>
-      </p:sp>
-      <p:sp>
-        <p:nvSpPr>
-          <p:cNvPr id="15" name="Shape 13"/>
-          <p:cNvSpPr/>
-          <p:nvPr/>
-        </p:nvSpPr>
-        <p:spPr>
-          <a:xfrm>
-            <a:off x="6172200" y="3383280"/>
-            <a:ext cx="1554480" cy="1051560"/>
+          <a:ln>
+            <a:noFill/>
+          </a:ln>
+        </p:spPr>
+        <p:style>
+          <a:lnRef idx="1">
+            <a:schemeClr val="accent1"/>
+          </a:lnRef>
+          <a:fillRef idx="3">
+            <a:schemeClr val="accent1"/>
+          </a:fillRef>
+          <a:effectRef idx="2">
+            <a:schemeClr val="accent1"/>
+          </a:effectRef>
+          <a:fontRef idx="minor">
+            <a:schemeClr val="lt1"/>
+          </a:fontRef>
+        </p:style>
+        <p:txBody>
+          <a:bodyPr rtlCol="0" anchor="ctr" lIns="164592" rIns="164592" tIns="109728" bIns="73152"/>
+          <a:lstStyle/>
+          <a:p>
+            <a:pPr algn="ctr"/>
+            <a:r>
+              <a:rPr sz="1700" b="1">
+                <a:solidFill>
+                  <a:srgbClr val="1F1E1D"/>
+                </a:solidFill>
+                <a:latin typeface="Arial"/>
+                <a:ea typeface="Microsoft JhengHei"/>
+                <a:cs typeface="Microsoft JhengHei"/>
+              </a:rPr>
+              <a:t>4  Decision + reason</a:t>
+            </a:r>
+          </a:p>
+          <a:p>
+            <a:pPr algn="ctr">
+              <a:spcBef>
+                <a:spcPts val="500"/>
+              </a:spcBef>
+            </a:pPr>
+            <a:r>
+              <a:rPr sz="1050">
+                <a:solidFill>
+                  <a:srgbClr val="68645C"/>
+                </a:solidFill>
+                <a:latin typeface="Arial"/>
+                <a:ea typeface="Microsoft JhengHei"/>
+                <a:cs typeface="Microsoft JhengHei"/>
+              </a:rPr>
+              <a:t>keep · adjust · defer · change for today</a:t>
+            </a:r>
+          </a:p>
+        </p:txBody>
+      </p:sp>
+      <p:sp>
+        <p:nvSpPr>
+          <p:cNvPr id="13" name="Rounded Rectangle 12"/>
+          <p:cNvSpPr/>
+          <p:nvPr/>
+        </p:nvSpPr>
+        <p:spPr>
+          <a:xfrm>
+            <a:off x="713232" y="4005072"/>
+            <a:ext cx="10744200" cy="1261872"/>
           </a:xfrm>
           <a:prstGeom prst="roundRect">
-            <a:avLst>
-              <a:gd name="adj" fmla="val 8696"/>
-            </a:avLst>
+            <a:avLst/>
           </a:prstGeom>
           <a:solidFill>
-            <a:srgbClr val="1E2A40"/>
+            <a:srgbClr val="E9E3D6"/>
           </a:solidFill>
-          <a:ln/>
-        </p:spPr>
-        <p:txBody>
-          <a:bodyPr/>
-          <a:p/>
-        </p:txBody>
-      </p:sp>
-      <p:sp>
-        <p:nvSpPr>
-          <p:cNvPr id="16" name="Text 14"/>
-          <p:cNvSpPr/>
-          <p:nvPr/>
-        </p:nvSpPr>
-        <p:spPr>
-          <a:xfrm>
-            <a:off x="6217920" y="3383280"/>
-            <a:ext cx="1463040" cy="1051560"/>
-          </a:xfrm>
-          <a:prstGeom prst="rect">
-            <a:avLst/>
-          </a:prstGeom>
-          <a:noFill/>
-          <a:ln/>
-        </p:spPr>
-        <p:txBody>
-          <a:bodyPr wrap="square" lIns="0" tIns="0" rIns="0" bIns="0" rtlCol="0" anchor="ctr"/>
-          <a:lstStyle/>
-          <a:p>
-            <a:pPr marL="0" indent="0" algn="ctr">
-              <a:buNone/>
-            </a:pPr>
-            <a:r>
-              <a:rPr lang="en-US" sz="1100" b="1" dirty="0">
-                <a:solidFill>
-                  <a:srgbClr val="FAF9F5"/>
-                </a:solidFill>
-                <a:latin typeface="STHeiti" pitchFamily="34" charset="0"/>
-                <a:ea typeface="Arial" pitchFamily="34" charset="-122"/>
-                <a:cs typeface="Arial" pitchFamily="34" charset="-120"/>
-              </a:rPr>
-              <a:t>Training Load</a:t>
-            </a:r>
-            <a:endParaRPr lang="en-US" sz="1100" dirty="0"/>
-          </a:p>
-        </p:txBody>
-      </p:sp>
-      <p:sp>
-        <p:nvSpPr>
-          <p:cNvPr id="17" name="Text 15"/>
-          <p:cNvSpPr/>
-          <p:nvPr/>
-        </p:nvSpPr>
-        <p:spPr>
-          <a:xfrm>
-            <a:off x="7744968" y="3721608"/>
-            <a:ext cx="237744" cy="365760"/>
-          </a:xfrm>
-          <a:prstGeom prst="rect">
-            <a:avLst/>
-          </a:prstGeom>
-          <a:noFill/>
-          <a:ln/>
-        </p:spPr>
-        <p:txBody>
-          <a:bodyPr wrap="square" lIns="0" tIns="0" rIns="0" bIns="0" rtlCol="0" anchor="ctr"/>
-          <a:lstStyle/>
-          <a:p>
-            <a:pPr marL="0" indent="0" algn="ctr">
-              <a:buNone/>
-            </a:pPr>
-            <a:r>
-              <a:rPr lang="en-US" sz="1500" dirty="0">
-                <a:solidFill>
-                  <a:srgbClr val="5A6376"/>
-                </a:solidFill>
-                <a:latin typeface="STHeiti" pitchFamily="34" charset="0"/>
-                <a:ea typeface="Arial" pitchFamily="34" charset="-122"/>
-                <a:cs typeface="Arial" pitchFamily="34" charset="-120"/>
-              </a:rPr>
-              <a:t>→</a:t>
-            </a:r>
-            <a:endParaRPr lang="en-US" sz="1500" dirty="0"/>
-          </a:p>
-        </p:txBody>
-      </p:sp>
-      <p:sp>
-        <p:nvSpPr>
-          <p:cNvPr id="18" name="Shape 16"/>
-          <p:cNvSpPr/>
-          <p:nvPr/>
-        </p:nvSpPr>
-        <p:spPr>
-          <a:xfrm>
-            <a:off x="8001000" y="3383280"/>
-            <a:ext cx="1554480" cy="1051560"/>
-          </a:xfrm>
-          <a:prstGeom prst="roundRect">
-            <a:avLst>
-              <a:gd name="adj" fmla="val 8696"/>
-            </a:avLst>
-          </a:prstGeom>
-          <a:solidFill>
-            <a:srgbClr val="1E2A40"/>
-          </a:solidFill>
-          <a:ln/>
-        </p:spPr>
-        <p:txBody>
-          <a:bodyPr/>
-          <a:p/>
-        </p:txBody>
-      </p:sp>
-      <p:sp>
-        <p:nvSpPr>
-          <p:cNvPr id="19" name="Text 17"/>
-          <p:cNvSpPr/>
-          <p:nvPr/>
-        </p:nvSpPr>
-        <p:spPr>
-          <a:xfrm>
-            <a:off x="8046720" y="3383280"/>
-            <a:ext cx="1463040" cy="1051560"/>
-          </a:xfrm>
-          <a:prstGeom prst="rect">
-            <a:avLst/>
-          </a:prstGeom>
-          <a:noFill/>
-          <a:ln/>
-        </p:spPr>
-        <p:txBody>
-          <a:bodyPr wrap="square" lIns="0" tIns="0" rIns="0" bIns="0" rtlCol="0" anchor="ctr"/>
-          <a:lstStyle/>
-          <a:p>
-            <a:pPr marL="0" indent="0" algn="ctr">
-              <a:buNone/>
-            </a:pPr>
-            <a:r>
-              <a:rPr lang="en-US" sz="1100" b="1" dirty="0">
-                <a:solidFill>
-                  <a:srgbClr val="FAF9F5"/>
-                </a:solidFill>
-                <a:latin typeface="STHeiti" pitchFamily="34" charset="0"/>
-                <a:ea typeface="Arial" pitchFamily="34" charset="-122"/>
-                <a:cs typeface="Arial" pitchFamily="34" charset="-120"/>
-              </a:rPr>
-              <a:t>Decision Engine</a:t>
-            </a:r>
-            <a:endParaRPr lang="en-US" sz="1100" dirty="0"/>
-          </a:p>
-        </p:txBody>
-      </p:sp>
-      <p:sp>
-        <p:nvSpPr>
-          <p:cNvPr id="20" name="Text 18"/>
-          <p:cNvSpPr/>
-          <p:nvPr/>
-        </p:nvSpPr>
-        <p:spPr>
-          <a:xfrm>
-            <a:off x="9573768" y="3721608"/>
-            <a:ext cx="237744" cy="365760"/>
-          </a:xfrm>
-          <a:prstGeom prst="rect">
-            <a:avLst/>
-          </a:prstGeom>
-          <a:noFill/>
-          <a:ln/>
-        </p:spPr>
-        <p:txBody>
-          <a:bodyPr wrap="square" lIns="0" tIns="0" rIns="0" bIns="0" rtlCol="0" anchor="ctr"/>
-          <a:lstStyle/>
-          <a:p>
-            <a:pPr marL="0" indent="0" algn="ctr">
-              <a:buNone/>
-            </a:pPr>
-            <a:r>
-              <a:rPr lang="en-US" sz="1500" dirty="0">
-                <a:solidFill>
-                  <a:srgbClr val="5A6376"/>
-                </a:solidFill>
-                <a:latin typeface="STHeiti" pitchFamily="34" charset="0"/>
-                <a:ea typeface="Arial" pitchFamily="34" charset="-122"/>
-                <a:cs typeface="Arial" pitchFamily="34" charset="-120"/>
-              </a:rPr>
-              <a:t>→</a:t>
-            </a:r>
-            <a:endParaRPr lang="en-US" sz="1500" dirty="0"/>
-          </a:p>
-        </p:txBody>
-      </p:sp>
-      <p:sp>
-        <p:nvSpPr>
-          <p:cNvPr id="21" name="Shape 19"/>
-          <p:cNvSpPr/>
-          <p:nvPr/>
-        </p:nvSpPr>
-        <p:spPr>
-          <a:xfrm>
-            <a:off x="9829800" y="3383280"/>
-            <a:ext cx="1554480" cy="1051560"/>
-          </a:xfrm>
-          <a:prstGeom prst="roundRect">
-            <a:avLst>
-              <a:gd name="adj" fmla="val 8696"/>
-            </a:avLst>
-          </a:prstGeom>
-          <a:solidFill>
-            <a:srgbClr val="1E2A40"/>
-          </a:solidFill>
-          <a:ln/>
-        </p:spPr>
-        <p:txBody>
-          <a:bodyPr/>
-          <a:p/>
-        </p:txBody>
-      </p:sp>
-      <p:sp>
-        <p:nvSpPr>
-          <p:cNvPr id="22" name="Text 20"/>
-          <p:cNvSpPr/>
-          <p:nvPr/>
-        </p:nvSpPr>
-        <p:spPr>
-          <a:xfrm>
-            <a:off x="9875520" y="3383280"/>
-            <a:ext cx="1463040" cy="1051560"/>
-          </a:xfrm>
-          <a:prstGeom prst="rect">
-            <a:avLst/>
-          </a:prstGeom>
-          <a:noFill/>
-          <a:ln/>
-        </p:spPr>
-        <p:txBody>
-          <a:bodyPr wrap="square" lIns="0" tIns="0" rIns="0" bIns="0" rtlCol="0" anchor="ctr"/>
-          <a:lstStyle/>
-          <a:p>
-            <a:pPr marL="0" indent="0" algn="ctr">
-              <a:buNone/>
-            </a:pPr>
-            <a:r>
-              <a:rPr lang="en-US" sz="1100" b="1" dirty="0">
-                <a:solidFill>
-                  <a:srgbClr val="FAF9F5"/>
-                </a:solidFill>
-                <a:latin typeface="STHeiti" pitchFamily="34" charset="0"/>
-                <a:ea typeface="Arial" pitchFamily="34" charset="-122"/>
-                <a:cs typeface="Arial" pitchFamily="34" charset="-120"/>
-              </a:rPr>
-              <a:t>Decision + Reason</a:t>
-            </a:r>
-            <a:endParaRPr lang="en-US" sz="1100" dirty="0"/>
-          </a:p>
-        </p:txBody>
-      </p:sp>
-      <p:sp>
-        <p:nvSpPr>
-          <p:cNvPr id="23" name="Shape 21"/>
-          <p:cNvSpPr/>
-          <p:nvPr/>
-        </p:nvSpPr>
-        <p:spPr>
-          <a:xfrm>
-            <a:off x="685800" y="4754880"/>
-            <a:ext cx="5120640" cy="1143000"/>
-          </a:xfrm>
-          <a:prstGeom prst="roundRect">
-            <a:avLst>
-              <a:gd name="adj" fmla="val 9600"/>
-            </a:avLst>
-          </a:prstGeom>
-          <a:solidFill>
-            <a:srgbClr val="1E2A40"/>
-          </a:solidFill>
-          <a:ln/>
-        </p:spPr>
-        <p:txBody>
-          <a:bodyPr/>
-          <a:p/>
-        </p:txBody>
-      </p:sp>
-      <p:sp>
-        <p:nvSpPr>
-          <p:cNvPr id="24" name="Text 22"/>
-          <p:cNvSpPr/>
-          <p:nvPr/>
-        </p:nvSpPr>
-        <p:spPr>
-          <a:xfrm>
-            <a:off x="1051560" y="4919472"/>
-            <a:ext cx="4297680" cy="329184"/>
-          </a:xfrm>
-          <a:prstGeom prst="rect">
-            <a:avLst/>
-          </a:prstGeom>
-          <a:noFill/>
-          <a:ln/>
-        </p:spPr>
-        <p:txBody>
-          <a:bodyPr wrap="square" lIns="0" tIns="0" rIns="0" bIns="0" rtlCol="0" anchor="ctr"/>
-          <a:lstStyle/>
-          <a:p>
-            <a:pPr marL="0" indent="0">
-              <a:buNone/>
-            </a:pPr>
-            <a:r>
-              <a:rPr lang="en-US" sz="1300" b="1" dirty="0">
-                <a:solidFill>
-                  <a:srgbClr val="49D993"/>
-                </a:solidFill>
-                <a:latin typeface="STHeiti" pitchFamily="34" charset="0"/>
-                <a:ea typeface="Microsoft JhengHei" pitchFamily="34" charset="-122"/>
-                <a:cs typeface="Microsoft JhengHei" pitchFamily="34" charset="-120"/>
-              </a:rPr>
-              <a:t>LLM 做</a:t>
-            </a:r>
-            <a:endParaRPr lang="en-US" sz="1300" dirty="0"/>
-          </a:p>
-        </p:txBody>
-      </p:sp>
-      <p:sp>
-        <p:nvSpPr>
-          <p:cNvPr id="25" name="Text 23"/>
-          <p:cNvSpPr/>
-          <p:nvPr/>
-        </p:nvSpPr>
-        <p:spPr>
-          <a:xfrm>
-            <a:off x="1051560" y="5285232"/>
-            <a:ext cx="4480560" cy="411480"/>
-          </a:xfrm>
-          <a:prstGeom prst="rect">
-            <a:avLst/>
-          </a:prstGeom>
-          <a:noFill/>
-          <a:ln/>
-        </p:spPr>
-        <p:txBody>
-          <a:bodyPr wrap="square" lIns="0" tIns="0" rIns="0" bIns="0" rtlCol="0" anchor="ctr"/>
-          <a:lstStyle/>
-          <a:p>
-            <a:pPr marL="0" indent="0">
-              <a:buNone/>
-            </a:pPr>
-            <a:r>
-              <a:rPr lang="en-US" sz="1300" dirty="0">
-                <a:solidFill>
-                  <a:srgbClr val="C9D0C8"/>
-                </a:solidFill>
-                <a:latin typeface="STHeiti" pitchFamily="34" charset="0"/>
-                <a:ea typeface="Microsoft JhengHei" pitchFamily="34" charset="-122"/>
-                <a:cs typeface="Microsoft JhengHei" pitchFamily="34" charset="-120"/>
-              </a:rPr>
-              <a:t>理解語意 · 呼叫工具 · 解釋結果 · 依回饋調整</a:t>
-            </a:r>
-            <a:endParaRPr lang="en-US" sz="1300" dirty="0"/>
-          </a:p>
-        </p:txBody>
-      </p:sp>
-      <p:sp>
-        <p:nvSpPr>
-          <p:cNvPr id="26" name="Shape 24"/>
-          <p:cNvSpPr/>
-          <p:nvPr/>
-        </p:nvSpPr>
-        <p:spPr>
-          <a:xfrm>
-            <a:off x="6263640" y="4754880"/>
-            <a:ext cx="5120640" cy="1143000"/>
-          </a:xfrm>
-          <a:prstGeom prst="roundRect">
-            <a:avLst>
-              <a:gd name="adj" fmla="val 9600"/>
-            </a:avLst>
-          </a:prstGeom>
-          <a:solidFill>
-            <a:srgbClr val="1E2A40"/>
-          </a:solidFill>
-          <a:ln/>
-        </p:spPr>
-        <p:txBody>
-          <a:bodyPr/>
-          <a:p/>
-        </p:txBody>
-      </p:sp>
-      <p:sp>
-        <p:nvSpPr>
-          <p:cNvPr id="27" name="Text 25"/>
-          <p:cNvSpPr/>
-          <p:nvPr/>
-        </p:nvSpPr>
-        <p:spPr>
-          <a:xfrm>
-            <a:off x="6629400" y="4919472"/>
-            <a:ext cx="4297680" cy="329184"/>
-          </a:xfrm>
-          <a:prstGeom prst="rect">
-            <a:avLst/>
-          </a:prstGeom>
-          <a:noFill/>
-          <a:ln/>
-        </p:spPr>
-        <p:txBody>
-          <a:bodyPr wrap="square" lIns="0" tIns="0" rIns="0" bIns="0" rtlCol="0" anchor="ctr"/>
-          <a:lstStyle/>
-          <a:p>
-            <a:pPr marL="0" indent="0">
-              <a:buNone/>
-            </a:pPr>
-            <a:r>
-              <a:rPr lang="en-US" sz="1300" b="1" dirty="0">
-                <a:solidFill>
-                  <a:srgbClr val="49D993"/>
-                </a:solidFill>
-                <a:latin typeface="STHeiti" pitchFamily="34" charset="0"/>
-                <a:ea typeface="Microsoft JhengHei" pitchFamily="34" charset="-122"/>
-                <a:cs typeface="Microsoft JhengHei" pitchFamily="34" charset="-120"/>
-              </a:rPr>
-              <a:t>LLM 不做</a:t>
-            </a:r>
-            <a:endParaRPr lang="en-US" sz="1300" dirty="0"/>
-          </a:p>
-        </p:txBody>
-      </p:sp>
-      <p:sp>
-        <p:nvSpPr>
-          <p:cNvPr id="28" name="Text 26"/>
-          <p:cNvSpPr/>
-          <p:nvPr/>
-        </p:nvSpPr>
-        <p:spPr>
-          <a:xfrm>
-            <a:off x="6629400" y="5285232"/>
-            <a:ext cx="4480560" cy="411480"/>
-          </a:xfrm>
-          <a:prstGeom prst="rect">
-            <a:avLst/>
-          </a:prstGeom>
-          <a:noFill/>
-          <a:ln/>
-        </p:spPr>
-        <p:txBody>
-          <a:bodyPr wrap="square" lIns="0" tIns="0" rIns="0" bIns="0" rtlCol="0" anchor="ctr"/>
-          <a:lstStyle/>
-          <a:p>
-            <a:pPr marL="0" indent="0">
-              <a:buNone/>
-            </a:pPr>
-            <a:r>
-              <a:rPr lang="en-US" sz="1300" dirty="0">
-                <a:solidFill>
-                  <a:srgbClr val="C9D0C8"/>
-                </a:solidFill>
-                <a:latin typeface="STHeiti" pitchFamily="34" charset="0"/>
-                <a:ea typeface="Microsoft JhengHei" pitchFamily="34" charset="-122"/>
-                <a:cs typeface="Microsoft JhengHei" pitchFamily="34" charset="-120"/>
-              </a:rPr>
-              <a:t>算恢復分數 · 決定訓練量 · 憑空生成課表</a:t>
-            </a:r>
-            <a:endParaRPr lang="en-US" sz="1300" dirty="0"/>
-          </a:p>
-        </p:txBody>
-      </p:sp>
-      <p:sp>
-        <p:nvSpPr>
-          <p:cNvPr id="29" name="Text 27"/>
-          <p:cNvSpPr/>
-          <p:nvPr/>
-        </p:nvSpPr>
-        <p:spPr>
-          <a:xfrm>
-            <a:off x="10865815" y="6144768"/>
-            <a:ext cx="640080" cy="274320"/>
-          </a:xfrm>
-          <a:prstGeom prst="rect">
-            <a:avLst/>
-          </a:prstGeom>
-          <a:noFill/>
-          <a:ln/>
-        </p:spPr>
-        <p:txBody>
-          <a:bodyPr wrap="square" lIns="0" tIns="0" rIns="0" bIns="0" rtlCol="0" anchor="ctr"/>
-          <a:lstStyle/>
-          <a:p>
-            <a:pPr marL="0" indent="0" algn="r">
-              <a:buNone/>
-            </a:pPr>
-            <a:r>
-              <a:rPr lang="en-US" sz="1100" dirty="0">
-                <a:solidFill>
-                  <a:srgbClr val="9DA89F"/>
-                </a:solidFill>
-                <a:latin typeface="STHeiti" pitchFamily="34" charset="0"/>
-                <a:ea typeface="Arial" pitchFamily="34" charset="-122"/>
-                <a:cs typeface="Arial" pitchFamily="34" charset="-120"/>
+          <a:ln>
+            <a:noFill/>
+          </a:ln>
+        </p:spPr>
+        <p:style>
+          <a:lnRef idx="1">
+            <a:schemeClr val="accent1"/>
+          </a:lnRef>
+          <a:fillRef idx="3">
+            <a:schemeClr val="accent1"/>
+          </a:fillRef>
+          <a:effectRef idx="2">
+            <a:schemeClr val="accent1"/>
+          </a:effectRef>
+          <a:fontRef idx="minor">
+            <a:schemeClr val="lt1"/>
+          </a:fontRef>
+        </p:style>
+        <p:txBody>
+          <a:bodyPr rtlCol="0" anchor="ctr"/>
+          <a:lstStyle/>
+          <a:p>
+            <a:pPr algn="ctr"/>
+          </a:p>
+        </p:txBody>
+      </p:sp>
+      <p:sp>
+        <p:nvSpPr>
+          <p:cNvPr id="14" name="TextBox 13"/>
+          <p:cNvSpPr txBox="1"/>
+          <p:nvPr/>
+        </p:nvSpPr>
+        <p:spPr>
+          <a:xfrm>
+            <a:off x="932688" y="4224528"/>
+            <a:ext cx="2103120" cy="228600"/>
+          </a:xfrm>
+          <a:prstGeom prst="rect">
+            <a:avLst/>
+          </a:prstGeom>
+          <a:noFill/>
+        </p:spPr>
+        <p:txBody>
+          <a:bodyPr wrap="none" lIns="0" rIns="0" tIns="0" bIns="0" anchor="ctr">
+            <a:spAutoFit/>
+          </a:bodyPr>
+          <a:lstStyle/>
+          <a:p>
+            <a:pPr algn="l"/>
+            <a:r>
+              <a:rPr sz="1000" b="1">
+                <a:solidFill>
+                  <a:srgbClr val="157554"/>
+                </a:solidFill>
+                <a:latin typeface="Arial"/>
+                <a:ea typeface="Microsoft JhengHei"/>
+                <a:cs typeface="Microsoft JhengHei"/>
+              </a:rPr>
+              <a:t>PACEVERA RETURNS</a:t>
+            </a:r>
+          </a:p>
+        </p:txBody>
+      </p:sp>
+      <p:sp>
+        <p:nvSpPr>
+          <p:cNvPr id="15" name="TextBox 14"/>
+          <p:cNvSpPr txBox="1"/>
+          <p:nvPr/>
+        </p:nvSpPr>
+        <p:spPr>
+          <a:xfrm>
+            <a:off x="932688" y="4517136"/>
+            <a:ext cx="4389120" cy="384048"/>
+          </a:xfrm>
+          <a:prstGeom prst="rect">
+            <a:avLst/>
+          </a:prstGeom>
+          <a:noFill/>
+        </p:spPr>
+        <p:txBody>
+          <a:bodyPr wrap="none" lIns="0" rIns="0" tIns="0" bIns="0" anchor="ctr">
+            <a:spAutoFit/>
+          </a:bodyPr>
+          <a:lstStyle/>
+          <a:p>
+            <a:pPr algn="l"/>
+            <a:r>
+              <a:rPr sz="1500" b="1">
+                <a:solidFill>
+                  <a:srgbClr val="1F1E1D"/>
+                </a:solidFill>
+                <a:latin typeface="Arial"/>
+                <a:ea typeface="Microsoft JhengHei"/>
+                <a:cs typeface="Microsoft JhengHei"/>
+              </a:rPr>
+              <a:t>A change you can act on — with the evidence and limits attached.</a:t>
+            </a:r>
+          </a:p>
+        </p:txBody>
+      </p:sp>
+      <p:sp>
+        <p:nvSpPr>
+          <p:cNvPr id="16" name="TextBox 15"/>
+          <p:cNvSpPr txBox="1"/>
+          <p:nvPr/>
+        </p:nvSpPr>
+        <p:spPr>
+          <a:xfrm>
+            <a:off x="5806440" y="4224528"/>
+            <a:ext cx="1097280" cy="201168"/>
+          </a:xfrm>
+          <a:prstGeom prst="rect">
+            <a:avLst/>
+          </a:prstGeom>
+          <a:noFill/>
+        </p:spPr>
+        <p:txBody>
+          <a:bodyPr wrap="none" lIns="0" rIns="0" tIns="0" bIns="0" anchor="ctr">
+            <a:spAutoFit/>
+          </a:bodyPr>
+          <a:lstStyle/>
+          <a:p>
+            <a:pPr algn="l"/>
+            <a:r>
+              <a:rPr sz="900" b="1">
+                <a:solidFill>
+                  <a:srgbClr val="68645C"/>
+                </a:solidFill>
+                <a:latin typeface="Arial"/>
+                <a:ea typeface="Microsoft JhengHei"/>
+                <a:cs typeface="Microsoft JhengHei"/>
+              </a:rPr>
+              <a:t>planned → today</a:t>
+            </a:r>
+          </a:p>
+        </p:txBody>
+      </p:sp>
+      <p:sp>
+        <p:nvSpPr>
+          <p:cNvPr id="17" name="TextBox 16"/>
+          <p:cNvSpPr txBox="1"/>
+          <p:nvPr/>
+        </p:nvSpPr>
+        <p:spPr>
+          <a:xfrm>
+            <a:off x="7205472" y="4224528"/>
+            <a:ext cx="1143000" cy="201168"/>
+          </a:xfrm>
+          <a:prstGeom prst="rect">
+            <a:avLst/>
+          </a:prstGeom>
+          <a:noFill/>
+        </p:spPr>
+        <p:txBody>
+          <a:bodyPr wrap="none" lIns="0" rIns="0" tIns="0" bIns="0" anchor="ctr">
+            <a:spAutoFit/>
+          </a:bodyPr>
+          <a:lstStyle/>
+          <a:p>
+            <a:pPr algn="l"/>
+            <a:r>
+              <a:rPr sz="900" b="1">
+                <a:solidFill>
+                  <a:srgbClr val="68645C"/>
+                </a:solidFill>
+                <a:latin typeface="Arial"/>
+                <a:ea typeface="Microsoft JhengHei"/>
+                <a:cs typeface="Microsoft JhengHei"/>
+              </a:rPr>
+              <a:t>reason</a:t>
+            </a:r>
+          </a:p>
+        </p:txBody>
+      </p:sp>
+      <p:sp>
+        <p:nvSpPr>
+          <p:cNvPr id="18" name="TextBox 17"/>
+          <p:cNvSpPr txBox="1"/>
+          <p:nvPr/>
+        </p:nvSpPr>
+        <p:spPr>
+          <a:xfrm>
+            <a:off x="8732520" y="4224528"/>
+            <a:ext cx="1051560" cy="201168"/>
+          </a:xfrm>
+          <a:prstGeom prst="rect">
+            <a:avLst/>
+          </a:prstGeom>
+          <a:noFill/>
+        </p:spPr>
+        <p:txBody>
+          <a:bodyPr wrap="none" lIns="0" rIns="0" tIns="0" bIns="0" anchor="ctr">
+            <a:spAutoFit/>
+          </a:bodyPr>
+          <a:lstStyle/>
+          <a:p>
+            <a:pPr algn="l"/>
+            <a:r>
+              <a:rPr sz="900" b="1">
+                <a:solidFill>
+                  <a:srgbClr val="68645C"/>
+                </a:solidFill>
+                <a:latin typeface="Arial"/>
+                <a:ea typeface="Microsoft JhengHei"/>
+                <a:cs typeface="Microsoft JhengHei"/>
+              </a:rPr>
+              <a:t>missing</a:t>
+            </a:r>
+          </a:p>
+        </p:txBody>
+      </p:sp>
+      <p:sp>
+        <p:nvSpPr>
+          <p:cNvPr id="19" name="TextBox 18"/>
+          <p:cNvSpPr txBox="1"/>
+          <p:nvPr/>
+        </p:nvSpPr>
+        <p:spPr>
+          <a:xfrm>
+            <a:off x="10058400" y="4224528"/>
+            <a:ext cx="1097280" cy="201168"/>
+          </a:xfrm>
+          <a:prstGeom prst="rect">
+            <a:avLst/>
+          </a:prstGeom>
+          <a:noFill/>
+        </p:spPr>
+        <p:txBody>
+          <a:bodyPr wrap="none" lIns="0" rIns="0" tIns="0" bIns="0" anchor="ctr">
+            <a:spAutoFit/>
+          </a:bodyPr>
+          <a:lstStyle/>
+          <a:p>
+            <a:pPr algn="l"/>
+            <a:r>
+              <a:rPr sz="900" b="1">
+                <a:solidFill>
+                  <a:srgbClr val="68645C"/>
+                </a:solidFill>
+                <a:latin typeface="Arial"/>
+                <a:ea typeface="Microsoft JhengHei"/>
+                <a:cs typeface="Microsoft JhengHei"/>
+              </a:rPr>
+              <a:t>confidence</a:t>
+            </a:r>
+          </a:p>
+        </p:txBody>
+      </p:sp>
+      <p:sp>
+        <p:nvSpPr>
+          <p:cNvPr id="20" name="TextBox 19"/>
+          <p:cNvSpPr txBox="1"/>
+          <p:nvPr/>
+        </p:nvSpPr>
+        <p:spPr>
+          <a:xfrm>
+            <a:off x="5806440" y="4553712"/>
+            <a:ext cx="1143000" cy="384048"/>
+          </a:xfrm>
+          <a:prstGeom prst="rect">
+            <a:avLst/>
+          </a:prstGeom>
+          <a:noFill/>
+        </p:spPr>
+        <p:txBody>
+          <a:bodyPr wrap="none" lIns="0" rIns="0" tIns="0" bIns="0" anchor="ctr">
+            <a:spAutoFit/>
+          </a:bodyPr>
+          <a:lstStyle/>
+          <a:p>
+            <a:pPr algn="l"/>
+            <a:r>
+              <a:rPr sz="1000" b="1">
+                <a:solidFill>
+                  <a:srgbClr val="1F1E1D"/>
+                </a:solidFill>
+                <a:latin typeface="Arial"/>
+                <a:ea typeface="Microsoft JhengHei"/>
+                <a:cs typeface="Microsoft JhengHei"/>
+              </a:rPr>
+              <a:t>Tempo → Moderate</a:t>
+            </a:r>
+          </a:p>
+        </p:txBody>
+      </p:sp>
+      <p:sp>
+        <p:nvSpPr>
+          <p:cNvPr id="21" name="TextBox 20"/>
+          <p:cNvSpPr txBox="1"/>
+          <p:nvPr/>
+        </p:nvSpPr>
+        <p:spPr>
+          <a:xfrm>
+            <a:off x="7205472" y="4553712"/>
+            <a:ext cx="1234440" cy="384048"/>
+          </a:xfrm>
+          <a:prstGeom prst="rect">
+            <a:avLst/>
+          </a:prstGeom>
+          <a:noFill/>
+        </p:spPr>
+        <p:txBody>
+          <a:bodyPr wrap="none" lIns="0" rIns="0" tIns="0" bIns="0" anchor="ctr">
+            <a:spAutoFit/>
+          </a:bodyPr>
+          <a:lstStyle/>
+          <a:p>
+            <a:pPr algn="l"/>
+            <a:r>
+              <a:rPr sz="900" b="0">
+                <a:solidFill>
+                  <a:srgbClr val="1F1E1D"/>
+                </a:solidFill>
+                <a:latin typeface="Arial"/>
+                <a:ea typeface="Microsoft JhengHei"/>
+                <a:cs typeface="Microsoft JhengHei"/>
+              </a:rPr>
+              <a:t>readiness below threshold</a:t>
+            </a:r>
+          </a:p>
+        </p:txBody>
+      </p:sp>
+      <p:sp>
+        <p:nvSpPr>
+          <p:cNvPr id="22" name="TextBox 21"/>
+          <p:cNvSpPr txBox="1"/>
+          <p:nvPr/>
+        </p:nvSpPr>
+        <p:spPr>
+          <a:xfrm>
+            <a:off x="8732520" y="4553712"/>
+            <a:ext cx="822960" cy="274320"/>
+          </a:xfrm>
+          <a:prstGeom prst="rect">
+            <a:avLst/>
+          </a:prstGeom>
+          <a:noFill/>
+        </p:spPr>
+        <p:txBody>
+          <a:bodyPr wrap="none" lIns="0" rIns="0" tIns="0" bIns="0" anchor="ctr">
+            <a:spAutoFit/>
+          </a:bodyPr>
+          <a:lstStyle/>
+          <a:p>
+            <a:pPr algn="l"/>
+            <a:r>
+              <a:rPr sz="1000" b="0">
+                <a:solidFill>
+                  <a:srgbClr val="1F1E1D"/>
+                </a:solidFill>
+                <a:latin typeface="Arial"/>
+                <a:ea typeface="Microsoft JhengHei"/>
+                <a:cs typeface="Microsoft JhengHei"/>
+              </a:rPr>
+              <a:t>sleep</a:t>
+            </a:r>
+          </a:p>
+        </p:txBody>
+      </p:sp>
+      <p:sp>
+        <p:nvSpPr>
+          <p:cNvPr id="23" name="TextBox 22"/>
+          <p:cNvSpPr txBox="1"/>
+          <p:nvPr/>
+        </p:nvSpPr>
+        <p:spPr>
+          <a:xfrm>
+            <a:off x="10058400" y="4553712"/>
+            <a:ext cx="822960" cy="274320"/>
+          </a:xfrm>
+          <a:prstGeom prst="rect">
+            <a:avLst/>
+          </a:prstGeom>
+          <a:noFill/>
+        </p:spPr>
+        <p:txBody>
+          <a:bodyPr wrap="none" lIns="0" rIns="0" tIns="0" bIns="0" anchor="ctr">
+            <a:spAutoFit/>
+          </a:bodyPr>
+          <a:lstStyle/>
+          <a:p>
+            <a:pPr algn="l"/>
+            <a:r>
+              <a:rPr sz="1000" b="1">
+                <a:solidFill>
+                  <a:srgbClr val="157554"/>
+                </a:solidFill>
+                <a:latin typeface="Arial"/>
+                <a:ea typeface="Microsoft JhengHei"/>
+                <a:cs typeface="Microsoft JhengHei"/>
+              </a:rPr>
+              <a:t>medium</a:t>
+            </a:r>
+          </a:p>
+        </p:txBody>
+      </p:sp>
+      <p:sp>
+        <p:nvSpPr>
+          <p:cNvPr id="24" name="TextBox 23"/>
+          <p:cNvSpPr txBox="1"/>
+          <p:nvPr/>
+        </p:nvSpPr>
+        <p:spPr>
+          <a:xfrm>
+            <a:off x="11155680" y="6144768"/>
+            <a:ext cx="320040" cy="164592"/>
+          </a:xfrm>
+          <a:prstGeom prst="rect">
+            <a:avLst/>
+          </a:prstGeom>
+          <a:noFill/>
+        </p:spPr>
+        <p:txBody>
+          <a:bodyPr wrap="none" lIns="0" rIns="0" tIns="0" bIns="0" anchor="ctr">
+            <a:spAutoFit/>
+          </a:bodyPr>
+          <a:lstStyle/>
+          <a:p>
+            <a:pPr algn="r"/>
+            <a:r>
+              <a:rPr sz="900" b="0">
+                <a:solidFill>
+                  <a:srgbClr val="68645C"/>
+                </a:solidFill>
+                <a:latin typeface="Arial"/>
+                <a:ea typeface="Microsoft JhengHei"/>
+                <a:cs typeface="Microsoft JhengHei"/>
               </a:rPr>
               <a:t>11</a:t>
             </a:r>
-            <a:endParaRPr lang="en-US" sz="1100" dirty="0"/>
           </a:p>
         </p:txBody>
       </p:sp>
@@ -5000,9 +5026,9 @@
                 <a:solidFill>
                   <a:srgbClr val="68645C"/>
                 </a:solidFill>
-                <a:latin typeface="STHeiti" pitchFamily="34" charset="0"/>
-                <a:ea typeface="Arial" pitchFamily="34" charset="-122"/>
-                <a:cs typeface="Arial" pitchFamily="34" charset="-120"/>
+                <a:latin typeface="Arial" pitchFamily="34" charset="0"/>
+                <a:ea typeface="Microsoft JhengHei" pitchFamily="34" charset="-122"/>
+                <a:cs typeface="Microsoft JhengHei" pitchFamily="34" charset="-120"/>
               </a:rPr>
               <a:t>PART 2 — 核心功能</a:t>
             </a:r>
@@ -5036,7 +5062,9 @@
                 <a:solidFill>
                   <a:srgbClr val="1F1E1D"/>
                 </a:solidFill>
-                <a:latin typeface="STHeiti"/>
+                <a:latin typeface="Arial"/>
+                <a:ea typeface="Microsoft JhengHei"/>
+                <a:cs typeface="Microsoft JhengHei"/>
               </a:rPr>
               <a:t>先對齊 Evidence，再用規則做決策</a:t>
             </a:r>
@@ -5075,7 +5103,7 @@
                 <a:solidFill>
                   <a:srgbClr val="1F1E1D"/>
                 </a:solidFill>
-                <a:latin typeface="STHeiti" pitchFamily="34" charset="0"/>
+                <a:latin typeface="Arial" pitchFamily="34" charset="0"/>
                 <a:ea typeface="Microsoft JhengHei" pitchFamily="34" charset="-122"/>
                 <a:cs typeface="Microsoft JhengHei" pitchFamily="34" charset="-120"/>
               </a:rPr>
@@ -5143,9 +5171,9 @@
                 <a:solidFill>
                   <a:srgbClr val="157554"/>
                 </a:solidFill>
-                <a:latin typeface="STHeiti" pitchFamily="34" charset="0"/>
-                <a:ea typeface="Courier New" pitchFamily="34" charset="-122"/>
-                <a:cs typeface="Courier New" pitchFamily="34" charset="-120"/>
+                <a:latin typeface="Arial" pitchFamily="34" charset="0"/>
+                <a:ea typeface="Microsoft JhengHei" pitchFamily="34" charset="-122"/>
+                <a:cs typeface="Microsoft JhengHei" pitchFamily="34" charset="-120"/>
               </a:rPr>
               <a:t>IF  ACWR &gt; 1.40</a:t>
             </a:r>
@@ -5163,9 +5191,9 @@
                 <a:solidFill>
                   <a:srgbClr val="157554"/>
                 </a:solidFill>
-                <a:latin typeface="STHeiti" pitchFamily="34" charset="0"/>
-                <a:ea typeface="Courier New" pitchFamily="34" charset="-122"/>
-                <a:cs typeface="Courier New" pitchFamily="34" charset="-120"/>
+                <a:latin typeface="Arial" pitchFamily="34" charset="0"/>
+                <a:ea typeface="Microsoft JhengHei" pitchFamily="34" charset="-122"/>
+                <a:cs typeface="Microsoft JhengHei" pitchFamily="34" charset="-120"/>
               </a:rPr>
               <a:t>  + Sleep debt</a:t>
             </a:r>
@@ -5183,9 +5211,9 @@
                 <a:solidFill>
                   <a:srgbClr val="157554"/>
                 </a:solidFill>
-                <a:latin typeface="STHeiti" pitchFamily="34" charset="0"/>
-                <a:ea typeface="Courier New" pitchFamily="34" charset="-122"/>
-                <a:cs typeface="Courier New" pitchFamily="34" charset="-120"/>
+                <a:latin typeface="Arial" pitchFamily="34" charset="0"/>
+                <a:ea typeface="Microsoft JhengHei" pitchFamily="34" charset="-122"/>
+                <a:cs typeface="Microsoft JhengHei" pitchFamily="34" charset="-120"/>
               </a:rPr>
               <a:t>  + Yesterday leg</a:t>
             </a:r>
@@ -5203,9 +5231,9 @@
                 <a:solidFill>
                   <a:srgbClr val="157554"/>
                 </a:solidFill>
-                <a:latin typeface="STHeiti" pitchFamily="34" charset="0"/>
-                <a:ea typeface="Courier New" pitchFamily="34" charset="-122"/>
-                <a:cs typeface="Courier New" pitchFamily="34" charset="-120"/>
+                <a:latin typeface="Arial" pitchFamily="34" charset="0"/>
+                <a:ea typeface="Microsoft JhengHei" pitchFamily="34" charset="-122"/>
+                <a:cs typeface="Microsoft JhengHei" pitchFamily="34" charset="-120"/>
               </a:rPr>
               <a:t>→  Intervals → Zone 2</a:t>
             </a:r>
@@ -5292,9 +5320,9 @@
                 <a:solidFill>
                   <a:srgbClr val="1F1E1D"/>
                 </a:solidFill>
-                <a:latin typeface="STHeiti" pitchFamily="34" charset="0"/>
-                <a:ea typeface="Arial" pitchFamily="34" charset="-122"/>
-                <a:cs typeface="Arial" pitchFamily="34" charset="-120"/>
+                <a:latin typeface="Arial" pitchFamily="34" charset="0"/>
+                <a:ea typeface="Microsoft JhengHei" pitchFamily="34" charset="-122"/>
+                <a:cs typeface="Microsoft JhengHei" pitchFamily="34" charset="-120"/>
               </a:rPr>
               <a:t>Normalize</a:t>
             </a:r>
@@ -5331,7 +5359,7 @@
                 <a:solidFill>
                   <a:srgbClr val="68645C"/>
                 </a:solidFill>
-                <a:latin typeface="STHeiti" pitchFamily="34" charset="0"/>
+                <a:latin typeface="Arial" pitchFamily="34" charset="0"/>
                 <a:ea typeface="Microsoft JhengHei" pitchFamily="34" charset="-122"/>
                 <a:cs typeface="Microsoft JhengHei" pitchFamily="34" charset="-120"/>
               </a:rPr>
@@ -5420,9 +5448,9 @@
                 <a:solidFill>
                   <a:srgbClr val="1F1E1D"/>
                 </a:solidFill>
-                <a:latin typeface="STHeiti" pitchFamily="34" charset="0"/>
-                <a:ea typeface="Arial" pitchFamily="34" charset="-122"/>
-                <a:cs typeface="Arial" pitchFamily="34" charset="-120"/>
+                <a:latin typeface="Arial" pitchFamily="34" charset="0"/>
+                <a:ea typeface="Microsoft JhengHei" pitchFamily="34" charset="-122"/>
+                <a:cs typeface="Microsoft JhengHei" pitchFamily="34" charset="-120"/>
               </a:rPr>
               <a:t>Rule Engine</a:t>
             </a:r>
@@ -5459,7 +5487,7 @@
                 <a:solidFill>
                   <a:srgbClr val="68645C"/>
                 </a:solidFill>
-                <a:latin typeface="STHeiti" pitchFamily="34" charset="0"/>
+                <a:latin typeface="Arial" pitchFamily="34" charset="0"/>
                 <a:ea typeface="Microsoft JhengHei" pitchFamily="34" charset="-122"/>
                 <a:cs typeface="Microsoft JhengHei" pitchFamily="34" charset="-120"/>
               </a:rPr>
@@ -5548,9 +5576,9 @@
                 <a:solidFill>
                   <a:srgbClr val="1F1E1D"/>
                 </a:solidFill>
-                <a:latin typeface="STHeiti" pitchFamily="34" charset="0"/>
-                <a:ea typeface="Arial" pitchFamily="34" charset="-122"/>
-                <a:cs typeface="Arial" pitchFamily="34" charset="-120"/>
+                <a:latin typeface="Arial" pitchFamily="34" charset="0"/>
+                <a:ea typeface="Microsoft JhengHei" pitchFamily="34" charset="-122"/>
+                <a:cs typeface="Microsoft JhengHei" pitchFamily="34" charset="-120"/>
               </a:rPr>
               <a:t>Host LLM</a:t>
             </a:r>
@@ -5587,7 +5615,7 @@
                 <a:solidFill>
                   <a:srgbClr val="68645C"/>
                 </a:solidFill>
-                <a:latin typeface="STHeiti" pitchFamily="34" charset="0"/>
+                <a:latin typeface="Arial" pitchFamily="34" charset="0"/>
                 <a:ea typeface="Microsoft JhengHei" pitchFamily="34" charset="-122"/>
                 <a:cs typeface="Microsoft JhengHei" pitchFamily="34" charset="-120"/>
               </a:rPr>
@@ -5626,7 +5654,7 @@
                 <a:solidFill>
                   <a:srgbClr val="68645C"/>
                 </a:solidFill>
-                <a:latin typeface="STHeiti" pitchFamily="34" charset="0"/>
+                <a:latin typeface="Arial" pitchFamily="34" charset="0"/>
                 <a:ea typeface="Microsoft JhengHei" pitchFamily="34" charset="-122"/>
                 <a:cs typeface="Microsoft JhengHei" pitchFamily="34" charset="-120"/>
               </a:rPr>
@@ -5665,9 +5693,9 @@
                 <a:solidFill>
                   <a:srgbClr val="9DA89F"/>
                 </a:solidFill>
-                <a:latin typeface="STHeiti" pitchFamily="34" charset="0"/>
-                <a:ea typeface="Arial" pitchFamily="34" charset="-122"/>
-                <a:cs typeface="Arial" pitchFamily="34" charset="-120"/>
+                <a:latin typeface="Arial" pitchFamily="34" charset="0"/>
+                <a:ea typeface="Microsoft JhengHei" pitchFamily="34" charset="-122"/>
+                <a:cs typeface="Microsoft JhengHei" pitchFamily="34" charset="-120"/>
               </a:rPr>
               <a:t>12</a:t>
             </a:r>
@@ -5761,9 +5789,9 @@
                 <a:solidFill>
                   <a:srgbClr val="9FAEBE"/>
                 </a:solidFill>
-                <a:latin typeface="STHeiti" pitchFamily="34" charset="0"/>
-                <a:ea typeface="Arial" pitchFamily="34" charset="-122"/>
-                <a:cs typeface="Arial" pitchFamily="34" charset="-120"/>
+                <a:latin typeface="Arial" pitchFamily="34" charset="0"/>
+                <a:ea typeface="Microsoft JhengHei" pitchFamily="34" charset="-122"/>
+                <a:cs typeface="Microsoft JhengHei" pitchFamily="34" charset="-120"/>
               </a:rPr>
               <a:t>PART 2 — 核心功能</a:t>
             </a:r>
@@ -5797,7 +5825,9 @@
                 <a:solidFill>
                   <a:srgbClr val="FAF9F5"/>
                 </a:solidFill>
-                <a:latin typeface="STHeiti"/>
+                <a:latin typeface="Arial"/>
+                <a:ea typeface="Microsoft JhengHei"/>
+                <a:cs typeface="Microsoft JhengHei"/>
               </a:rPr>
               <a:t>從計畫到今天：改動要能執行</a:t>
             </a:r>
@@ -5836,7 +5866,7 @@
                 <a:solidFill>
                   <a:srgbClr val="D6DAE4"/>
                 </a:solidFill>
-                <a:latin typeface="STHeiti" pitchFamily="34" charset="0"/>
+                <a:latin typeface="Arial" pitchFamily="34" charset="0"/>
                 <a:ea typeface="Microsoft JhengHei" pitchFamily="34" charset="-122"/>
                 <a:cs typeface="Microsoft JhengHei" pitchFamily="34" charset="-120"/>
               </a:rPr>
@@ -5901,9 +5931,9 @@
                 <a:solidFill>
                   <a:srgbClr val="C9D0C8"/>
                 </a:solidFill>
-                <a:latin typeface="STHeiti" pitchFamily="34" charset="0"/>
-                <a:ea typeface="Arial" pitchFamily="34" charset="-122"/>
-                <a:cs typeface="Arial" pitchFamily="34" charset="-120"/>
+                <a:latin typeface="Arial" pitchFamily="34" charset="0"/>
+                <a:ea typeface="Microsoft JhengHei" pitchFamily="34" charset="-122"/>
+                <a:cs typeface="Microsoft JhengHei" pitchFamily="34" charset="-120"/>
               </a:rPr>
               <a:t>Goal</a:t>
             </a:r>
@@ -5966,9 +5996,9 @@
                 <a:solidFill>
                   <a:srgbClr val="C9D0C8"/>
                 </a:solidFill>
-                <a:latin typeface="STHeiti" pitchFamily="34" charset="0"/>
-                <a:ea typeface="Arial" pitchFamily="34" charset="-122"/>
-                <a:cs typeface="Arial" pitchFamily="34" charset="-120"/>
+                <a:latin typeface="Arial" pitchFamily="34" charset="0"/>
+                <a:ea typeface="Microsoft JhengHei" pitchFamily="34" charset="-122"/>
+                <a:cs typeface="Microsoft JhengHei" pitchFamily="34" charset="-120"/>
               </a:rPr>
               <a:t>History</a:t>
             </a:r>
@@ -6031,9 +6061,9 @@
                 <a:solidFill>
                   <a:srgbClr val="C9D0C8"/>
                 </a:solidFill>
-                <a:latin typeface="STHeiti" pitchFamily="34" charset="0"/>
-                <a:ea typeface="Arial" pitchFamily="34" charset="-122"/>
-                <a:cs typeface="Arial" pitchFamily="34" charset="-120"/>
+                <a:latin typeface="Arial" pitchFamily="34" charset="0"/>
+                <a:ea typeface="Microsoft JhengHei" pitchFamily="34" charset="-122"/>
+                <a:cs typeface="Microsoft JhengHei" pitchFamily="34" charset="-120"/>
               </a:rPr>
               <a:t>Time</a:t>
             </a:r>
@@ -6096,9 +6126,9 @@
                 <a:solidFill>
                   <a:srgbClr val="C9D0C8"/>
                 </a:solidFill>
-                <a:latin typeface="STHeiti" pitchFamily="34" charset="0"/>
-                <a:ea typeface="Arial" pitchFamily="34" charset="-122"/>
-                <a:cs typeface="Arial" pitchFamily="34" charset="-120"/>
+                <a:latin typeface="Arial" pitchFamily="34" charset="0"/>
+                <a:ea typeface="Microsoft JhengHei" pitchFamily="34" charset="-122"/>
+                <a:cs typeface="Microsoft JhengHei" pitchFamily="34" charset="-120"/>
               </a:rPr>
               <a:t>Equipment</a:t>
             </a:r>
@@ -6161,9 +6191,9 @@
                 <a:solidFill>
                   <a:srgbClr val="C9D0C8"/>
                 </a:solidFill>
-                <a:latin typeface="STHeiti" pitchFamily="34" charset="0"/>
-                <a:ea typeface="Arial" pitchFamily="34" charset="-122"/>
-                <a:cs typeface="Arial" pitchFamily="34" charset="-120"/>
+                <a:latin typeface="Arial" pitchFamily="34" charset="0"/>
+                <a:ea typeface="Microsoft JhengHei" pitchFamily="34" charset="-122"/>
+                <a:cs typeface="Microsoft JhengHei" pitchFamily="34" charset="-120"/>
               </a:rPr>
               <a:t>Recovery</a:t>
             </a:r>
@@ -6200,9 +6230,9 @@
                 <a:solidFill>
                   <a:srgbClr val="5A6376"/>
                 </a:solidFill>
-                <a:latin typeface="STHeiti" pitchFamily="34" charset="0"/>
-                <a:ea typeface="Arial" pitchFamily="34" charset="-122"/>
-                <a:cs typeface="Arial" pitchFamily="34" charset="-120"/>
+                <a:latin typeface="Arial" pitchFamily="34" charset="0"/>
+                <a:ea typeface="Microsoft JhengHei" pitchFamily="34" charset="-122"/>
+                <a:cs typeface="Microsoft JhengHei" pitchFamily="34" charset="-120"/>
               </a:rPr>
               <a:t>→</a:t>
             </a:r>
@@ -6268,9 +6298,9 @@
                 <a:solidFill>
                   <a:srgbClr val="49D993"/>
                 </a:solidFill>
-                <a:latin typeface="STHeiti" pitchFamily="34" charset="0"/>
-                <a:ea typeface="Arial" pitchFamily="34" charset="-122"/>
-                <a:cs typeface="Arial" pitchFamily="34" charset="-120"/>
+                <a:latin typeface="Arial" pitchFamily="34" charset="0"/>
+                <a:ea typeface="Microsoft JhengHei" pitchFamily="34" charset="-122"/>
+                <a:cs typeface="Microsoft JhengHei" pitchFamily="34" charset="-120"/>
               </a:rPr>
               <a:t>Planning</a:t>
             </a:r>
@@ -6288,9 +6318,9 @@
                 <a:solidFill>
                   <a:srgbClr val="49D993"/>
                 </a:solidFill>
-                <a:latin typeface="STHeiti" pitchFamily="34" charset="0"/>
-                <a:ea typeface="Arial" pitchFamily="34" charset="-122"/>
-                <a:cs typeface="Arial" pitchFamily="34" charset="-120"/>
+                <a:latin typeface="Arial" pitchFamily="34" charset="0"/>
+                <a:ea typeface="Microsoft JhengHei" pitchFamily="34" charset="-122"/>
+                <a:cs typeface="Microsoft JhengHei" pitchFamily="34" charset="-120"/>
               </a:rPr>
               <a:t>Engine</a:t>
             </a:r>
@@ -6327,9 +6357,9 @@
                 <a:solidFill>
                   <a:srgbClr val="5A6376"/>
                 </a:solidFill>
-                <a:latin typeface="STHeiti" pitchFamily="34" charset="0"/>
-                <a:ea typeface="Arial" pitchFamily="34" charset="-122"/>
-                <a:cs typeface="Arial" pitchFamily="34" charset="-120"/>
+                <a:latin typeface="Arial" pitchFamily="34" charset="0"/>
+                <a:ea typeface="Microsoft JhengHei" pitchFamily="34" charset="-122"/>
+                <a:cs typeface="Microsoft JhengHei" pitchFamily="34" charset="-120"/>
               </a:rPr>
               <a:t>→</a:t>
             </a:r>
@@ -6392,7 +6422,7 @@
                 <a:solidFill>
                   <a:srgbClr val="FAF9F5"/>
                 </a:solidFill>
-                <a:latin typeface="STHeiti" pitchFamily="34" charset="0"/>
+                <a:latin typeface="Arial" pitchFamily="34" charset="0"/>
                 <a:ea typeface="Microsoft JhengHei" pitchFamily="34" charset="-122"/>
                 <a:cs typeface="Microsoft JhengHei" pitchFamily="34" charset="-120"/>
               </a:rPr>
@@ -6434,7 +6464,7 @@
                 <a:solidFill>
                   <a:srgbClr val="FFE0C4"/>
                 </a:solidFill>
-                <a:latin typeface="STHeiti" pitchFamily="34" charset="0"/>
+                <a:latin typeface="Arial" pitchFamily="34" charset="0"/>
                 <a:ea typeface="Microsoft JhengHei" pitchFamily="34" charset="-122"/>
                 <a:cs typeface="Microsoft JhengHei" pitchFamily="34" charset="-120"/>
               </a:rPr>
@@ -6454,7 +6484,7 @@
                 <a:solidFill>
                   <a:srgbClr val="FFE0C4"/>
                 </a:solidFill>
-                <a:latin typeface="STHeiti" pitchFamily="34" charset="0"/>
+                <a:latin typeface="Arial" pitchFamily="34" charset="0"/>
                 <a:ea typeface="Microsoft JhengHei" pitchFamily="34" charset="-122"/>
                 <a:cs typeface="Microsoft JhengHei" pitchFamily="34" charset="-120"/>
               </a:rPr>
@@ -6474,7 +6504,7 @@
                 <a:solidFill>
                   <a:srgbClr val="FFE0C4"/>
                 </a:solidFill>
-                <a:latin typeface="STHeiti" pitchFamily="34" charset="0"/>
+                <a:latin typeface="Arial" pitchFamily="34" charset="0"/>
                 <a:ea typeface="Microsoft JhengHei" pitchFamily="34" charset="-122"/>
                 <a:cs typeface="Microsoft JhengHei" pitchFamily="34" charset="-120"/>
               </a:rPr>
@@ -6494,7 +6524,7 @@
                 <a:solidFill>
                   <a:srgbClr val="FFE0C4"/>
                 </a:solidFill>
-                <a:latin typeface="STHeiti" pitchFamily="34" charset="0"/>
+                <a:latin typeface="Arial" pitchFamily="34" charset="0"/>
                 <a:ea typeface="Microsoft JhengHei" pitchFamily="34" charset="-122"/>
                 <a:cs typeface="Microsoft JhengHei" pitchFamily="34" charset="-120"/>
               </a:rPr>
@@ -6533,9 +6563,9 @@
                 <a:solidFill>
                   <a:srgbClr val="9DA89F"/>
                 </a:solidFill>
-                <a:latin typeface="STHeiti" pitchFamily="34" charset="0"/>
-                <a:ea typeface="Arial" pitchFamily="34" charset="-122"/>
-                <a:cs typeface="Arial" pitchFamily="34" charset="-120"/>
+                <a:latin typeface="Arial" pitchFamily="34" charset="0"/>
+                <a:ea typeface="Microsoft JhengHei" pitchFamily="34" charset="-122"/>
+                <a:cs typeface="Microsoft JhengHei" pitchFamily="34" charset="-120"/>
               </a:rPr>
               <a:t>13</a:t>
             </a:r>
@@ -6629,9 +6659,9 @@
                 <a:solidFill>
                   <a:srgbClr val="68645C"/>
                 </a:solidFill>
-                <a:latin typeface="STHeiti" pitchFamily="34" charset="0"/>
-                <a:ea typeface="Arial" pitchFamily="34" charset="-122"/>
-                <a:cs typeface="Arial" pitchFamily="34" charset="-120"/>
+                <a:latin typeface="Arial" pitchFamily="34" charset="0"/>
+                <a:ea typeface="Microsoft JhengHei" pitchFamily="34" charset="-122"/>
+                <a:cs typeface="Microsoft JhengHei" pitchFamily="34" charset="-120"/>
               </a:rPr>
               <a:t>PART 2 — 核心功能</a:t>
             </a:r>
@@ -6668,7 +6698,7 @@
                 <a:solidFill>
                   <a:srgbClr val="1F1E1D"/>
                 </a:solidFill>
-                <a:latin typeface="STHeiti" pitchFamily="34" charset="0"/>
+                <a:latin typeface="Arial" pitchFamily="34" charset="0"/>
                 <a:ea typeface="Microsoft JhengHei" pitchFamily="34" charset="-122"/>
                 <a:cs typeface="Microsoft JhengHei" pitchFamily="34" charset="-120"/>
               </a:rPr>
@@ -6710,7 +6740,7 @@
                 <a:solidFill>
                   <a:srgbClr val="1F1E1D"/>
                 </a:solidFill>
-                <a:latin typeface="STHeiti" pitchFamily="34" charset="0"/>
+                <a:latin typeface="Arial" pitchFamily="34" charset="0"/>
                 <a:ea typeface="Microsoft JhengHei" pitchFamily="34" charset="-122"/>
                 <a:cs typeface="Microsoft JhengHei" pitchFamily="34" charset="-120"/>
               </a:rPr>
@@ -6799,9 +6829,9 @@
                 <a:solidFill>
                   <a:srgbClr val="1F1E1D"/>
                 </a:solidFill>
-                <a:latin typeface="STHeiti" pitchFamily="34" charset="0"/>
-                <a:ea typeface="Arial" pitchFamily="34" charset="-122"/>
-                <a:cs typeface="Arial" pitchFamily="34" charset="-120"/>
+                <a:latin typeface="Arial" pitchFamily="34" charset="0"/>
+                <a:ea typeface="Microsoft JhengHei" pitchFamily="34" charset="-122"/>
+                <a:cs typeface="Microsoft JhengHei" pitchFamily="34" charset="-120"/>
               </a:rPr>
               <a:t>User</a:t>
             </a:r>
@@ -6841,9 +6871,9 @@
                 <a:solidFill>
                   <a:srgbClr val="68645C"/>
                 </a:solidFill>
-                <a:latin typeface="STHeiti" pitchFamily="34" charset="0"/>
-                <a:ea typeface="Arial" pitchFamily="34" charset="-122"/>
-                <a:cs typeface="Arial" pitchFamily="34" charset="-120"/>
+                <a:latin typeface="Arial" pitchFamily="34" charset="0"/>
+                <a:ea typeface="Microsoft JhengHei" pitchFamily="34" charset="-122"/>
+                <a:cs typeface="Microsoft JhengHei" pitchFamily="34" charset="-120"/>
               </a:rPr>
               <a:t>Goal</a:t>
             </a:r>
@@ -6861,9 +6891,9 @@
                 <a:solidFill>
                   <a:srgbClr val="68645C"/>
                 </a:solidFill>
-                <a:latin typeface="STHeiti" pitchFamily="34" charset="0"/>
-                <a:ea typeface="Arial" pitchFamily="34" charset="-122"/>
-                <a:cs typeface="Arial" pitchFamily="34" charset="-120"/>
+                <a:latin typeface="Arial" pitchFamily="34" charset="0"/>
+                <a:ea typeface="Microsoft JhengHei" pitchFamily="34" charset="-122"/>
+                <a:cs typeface="Microsoft JhengHei" pitchFamily="34" charset="-120"/>
               </a:rPr>
               <a:t>Health</a:t>
             </a:r>
@@ -6881,9 +6911,9 @@
                 <a:solidFill>
                   <a:srgbClr val="68645C"/>
                 </a:solidFill>
-                <a:latin typeface="STHeiti" pitchFamily="34" charset="0"/>
-                <a:ea typeface="Arial" pitchFamily="34" charset="-122"/>
-                <a:cs typeface="Arial" pitchFamily="34" charset="-120"/>
+                <a:latin typeface="Arial" pitchFamily="34" charset="0"/>
+                <a:ea typeface="Microsoft JhengHei" pitchFamily="34" charset="-122"/>
+                <a:cs typeface="Microsoft JhengHei" pitchFamily="34" charset="-120"/>
               </a:rPr>
               <a:t>Recovery</a:t>
             </a:r>
@@ -6901,9 +6931,9 @@
                 <a:solidFill>
                   <a:srgbClr val="68645C"/>
                 </a:solidFill>
-                <a:latin typeface="STHeiti" pitchFamily="34" charset="0"/>
-                <a:ea typeface="Arial" pitchFamily="34" charset="-122"/>
-                <a:cs typeface="Arial" pitchFamily="34" charset="-120"/>
+                <a:latin typeface="Arial" pitchFamily="34" charset="0"/>
+                <a:ea typeface="Microsoft JhengHei" pitchFamily="34" charset="-122"/>
+                <a:cs typeface="Microsoft JhengHei" pitchFamily="34" charset="-120"/>
               </a:rPr>
               <a:t>Preference</a:t>
             </a:r>
@@ -6921,9 +6951,9 @@
                 <a:solidFill>
                   <a:srgbClr val="68645C"/>
                 </a:solidFill>
-                <a:latin typeface="STHeiti" pitchFamily="34" charset="0"/>
-                <a:ea typeface="Arial" pitchFamily="34" charset="-122"/>
-                <a:cs typeface="Arial" pitchFamily="34" charset="-120"/>
+                <a:latin typeface="Arial" pitchFamily="34" charset="0"/>
+                <a:ea typeface="Microsoft JhengHei" pitchFamily="34" charset="-122"/>
+                <a:cs typeface="Microsoft JhengHei" pitchFamily="34" charset="-120"/>
               </a:rPr>
               <a:t>Injury</a:t>
             </a:r>
@@ -6941,9 +6971,9 @@
                 <a:solidFill>
                   <a:srgbClr val="68645C"/>
                 </a:solidFill>
-                <a:latin typeface="STHeiti" pitchFamily="34" charset="0"/>
-                <a:ea typeface="Arial" pitchFamily="34" charset="-122"/>
-                <a:cs typeface="Arial" pitchFamily="34" charset="-120"/>
+                <a:latin typeface="Arial" pitchFamily="34" charset="0"/>
+                <a:ea typeface="Microsoft JhengHei" pitchFamily="34" charset="-122"/>
+                <a:cs typeface="Microsoft JhengHei" pitchFamily="34" charset="-120"/>
               </a:rPr>
               <a:t>Calendar</a:t>
             </a:r>
@@ -7030,9 +7060,9 @@
                 <a:solidFill>
                   <a:srgbClr val="1F1E1D"/>
                 </a:solidFill>
-                <a:latin typeface="STHeiti" pitchFamily="34" charset="0"/>
-                <a:ea typeface="Arial" pitchFamily="34" charset="-122"/>
-                <a:cs typeface="Arial" pitchFamily="34" charset="-120"/>
+                <a:latin typeface="Arial" pitchFamily="34" charset="0"/>
+                <a:ea typeface="Microsoft JhengHei" pitchFamily="34" charset="-122"/>
+                <a:cs typeface="Microsoft JhengHei" pitchFamily="34" charset="-120"/>
               </a:rPr>
               <a:t>Exercise</a:t>
             </a:r>
@@ -7072,9 +7102,9 @@
                 <a:solidFill>
                   <a:srgbClr val="68645C"/>
                 </a:solidFill>
-                <a:latin typeface="STHeiti" pitchFamily="34" charset="0"/>
-                <a:ea typeface="Arial" pitchFamily="34" charset="-122"/>
-                <a:cs typeface="Arial" pitchFamily="34" charset="-120"/>
+                <a:latin typeface="Arial" pitchFamily="34" charset="0"/>
+                <a:ea typeface="Microsoft JhengHei" pitchFamily="34" charset="-122"/>
+                <a:cs typeface="Microsoft JhengHei" pitchFamily="34" charset="-120"/>
               </a:rPr>
               <a:t>Muscle</a:t>
             </a:r>
@@ -7092,9 +7122,9 @@
                 <a:solidFill>
                   <a:srgbClr val="68645C"/>
                 </a:solidFill>
-                <a:latin typeface="STHeiti" pitchFamily="34" charset="0"/>
-                <a:ea typeface="Arial" pitchFamily="34" charset="-122"/>
-                <a:cs typeface="Arial" pitchFamily="34" charset="-120"/>
+                <a:latin typeface="Arial" pitchFamily="34" charset="0"/>
+                <a:ea typeface="Microsoft JhengHei" pitchFamily="34" charset="-122"/>
+                <a:cs typeface="Microsoft JhengHei" pitchFamily="34" charset="-120"/>
               </a:rPr>
               <a:t>Joint</a:t>
             </a:r>
@@ -7112,9 +7142,9 @@
                 <a:solidFill>
                   <a:srgbClr val="68645C"/>
                 </a:solidFill>
-                <a:latin typeface="STHeiti" pitchFamily="34" charset="0"/>
-                <a:ea typeface="Arial" pitchFamily="34" charset="-122"/>
-                <a:cs typeface="Arial" pitchFamily="34" charset="-120"/>
+                <a:latin typeface="Arial" pitchFamily="34" charset="0"/>
+                <a:ea typeface="Microsoft JhengHei" pitchFamily="34" charset="-122"/>
+                <a:cs typeface="Microsoft JhengHei" pitchFamily="34" charset="-120"/>
               </a:rPr>
               <a:t>Equipment</a:t>
             </a:r>
@@ -7132,9 +7162,9 @@
                 <a:solidFill>
                   <a:srgbClr val="68645C"/>
                 </a:solidFill>
-                <a:latin typeface="STHeiti" pitchFamily="34" charset="0"/>
-                <a:ea typeface="Arial" pitchFamily="34" charset="-122"/>
-                <a:cs typeface="Arial" pitchFamily="34" charset="-120"/>
+                <a:latin typeface="Arial" pitchFamily="34" charset="0"/>
+                <a:ea typeface="Microsoft JhengHei" pitchFamily="34" charset="-122"/>
+                <a:cs typeface="Microsoft JhengHei" pitchFamily="34" charset="-120"/>
               </a:rPr>
               <a:t>Movement Pattern</a:t>
             </a:r>
@@ -7152,9 +7182,9 @@
                 <a:solidFill>
                   <a:srgbClr val="68645C"/>
                 </a:solidFill>
-                <a:latin typeface="STHeiti" pitchFamily="34" charset="0"/>
-                <a:ea typeface="Arial" pitchFamily="34" charset="-122"/>
-                <a:cs typeface="Arial" pitchFamily="34" charset="-120"/>
+                <a:latin typeface="Arial" pitchFamily="34" charset="0"/>
+                <a:ea typeface="Microsoft JhengHei" pitchFamily="34" charset="-122"/>
+                <a:cs typeface="Microsoft JhengHei" pitchFamily="34" charset="-120"/>
               </a:rPr>
               <a:t>Risk</a:t>
             </a:r>
@@ -7172,9 +7202,9 @@
                 <a:solidFill>
                   <a:srgbClr val="68645C"/>
                 </a:solidFill>
-                <a:latin typeface="STHeiti" pitchFamily="34" charset="0"/>
-                <a:ea typeface="Arial" pitchFamily="34" charset="-122"/>
-                <a:cs typeface="Arial" pitchFamily="34" charset="-120"/>
+                <a:latin typeface="Arial" pitchFamily="34" charset="0"/>
+                <a:ea typeface="Microsoft JhengHei" pitchFamily="34" charset="-122"/>
+                <a:cs typeface="Microsoft JhengHei" pitchFamily="34" charset="-120"/>
               </a:rPr>
               <a:t>Variations</a:t>
             </a:r>
@@ -7261,9 +7291,9 @@
                 <a:solidFill>
                   <a:srgbClr val="1F1E1D"/>
                 </a:solidFill>
-                <a:latin typeface="STHeiti" pitchFamily="34" charset="0"/>
-                <a:ea typeface="Arial" pitchFamily="34" charset="-122"/>
-                <a:cs typeface="Arial" pitchFamily="34" charset="-120"/>
+                <a:latin typeface="Arial" pitchFamily="34" charset="0"/>
+                <a:ea typeface="Microsoft JhengHei" pitchFamily="34" charset="-122"/>
+                <a:cs typeface="Microsoft JhengHei" pitchFamily="34" charset="-120"/>
               </a:rPr>
               <a:t>Workout</a:t>
             </a:r>
@@ -7303,9 +7333,9 @@
                 <a:solidFill>
                   <a:srgbClr val="68645C"/>
                 </a:solidFill>
-                <a:latin typeface="STHeiti" pitchFamily="34" charset="0"/>
-                <a:ea typeface="Arial" pitchFamily="34" charset="-122"/>
-                <a:cs typeface="Arial" pitchFamily="34" charset="-120"/>
+                <a:latin typeface="Arial" pitchFamily="34" charset="0"/>
+                <a:ea typeface="Microsoft JhengHei" pitchFamily="34" charset="-122"/>
+                <a:cs typeface="Microsoft JhengHei" pitchFamily="34" charset="-120"/>
               </a:rPr>
               <a:t>Exercises</a:t>
             </a:r>
@@ -7323,9 +7353,9 @@
                 <a:solidFill>
                   <a:srgbClr val="68645C"/>
                 </a:solidFill>
-                <a:latin typeface="STHeiti" pitchFamily="34" charset="0"/>
-                <a:ea typeface="Arial" pitchFamily="34" charset="-122"/>
-                <a:cs typeface="Arial" pitchFamily="34" charset="-120"/>
+                <a:latin typeface="Arial" pitchFamily="34" charset="0"/>
+                <a:ea typeface="Microsoft JhengHei" pitchFamily="34" charset="-122"/>
+                <a:cs typeface="Microsoft JhengHei" pitchFamily="34" charset="-120"/>
               </a:rPr>
               <a:t>Volume</a:t>
             </a:r>
@@ -7343,9 +7373,9 @@
                 <a:solidFill>
                   <a:srgbClr val="68645C"/>
                 </a:solidFill>
-                <a:latin typeface="STHeiti" pitchFamily="34" charset="0"/>
-                <a:ea typeface="Arial" pitchFamily="34" charset="-122"/>
-                <a:cs typeface="Arial" pitchFamily="34" charset="-120"/>
+                <a:latin typeface="Arial" pitchFamily="34" charset="0"/>
+                <a:ea typeface="Microsoft JhengHei" pitchFamily="34" charset="-122"/>
+                <a:cs typeface="Microsoft JhengHei" pitchFamily="34" charset="-120"/>
               </a:rPr>
               <a:t>Intensity</a:t>
             </a:r>
@@ -7363,9 +7393,9 @@
                 <a:solidFill>
                   <a:srgbClr val="68645C"/>
                 </a:solidFill>
-                <a:latin typeface="STHeiti" pitchFamily="34" charset="0"/>
-                <a:ea typeface="Arial" pitchFamily="34" charset="-122"/>
-                <a:cs typeface="Arial" pitchFamily="34" charset="-120"/>
+                <a:latin typeface="Arial" pitchFamily="34" charset="0"/>
+                <a:ea typeface="Microsoft JhengHei" pitchFamily="34" charset="-122"/>
+                <a:cs typeface="Microsoft JhengHei" pitchFamily="34" charset="-120"/>
               </a:rPr>
               <a:t>Fatigue</a:t>
             </a:r>
@@ -7383,9 +7413,9 @@
                 <a:solidFill>
                   <a:srgbClr val="68645C"/>
                 </a:solidFill>
-                <a:latin typeface="STHeiti" pitchFamily="34" charset="0"/>
-                <a:ea typeface="Arial" pitchFamily="34" charset="-122"/>
-                <a:cs typeface="Arial" pitchFamily="34" charset="-120"/>
+                <a:latin typeface="Arial" pitchFamily="34" charset="0"/>
+                <a:ea typeface="Microsoft JhengHei" pitchFamily="34" charset="-122"/>
+                <a:cs typeface="Microsoft JhengHei" pitchFamily="34" charset="-120"/>
               </a:rPr>
               <a:t>Recovery Cost</a:t>
             </a:r>
@@ -7472,9 +7502,9 @@
                 <a:solidFill>
                   <a:srgbClr val="1F1E1D"/>
                 </a:solidFill>
-                <a:latin typeface="STHeiti" pitchFamily="34" charset="0"/>
-                <a:ea typeface="Arial" pitchFamily="34" charset="-122"/>
-                <a:cs typeface="Arial" pitchFamily="34" charset="-120"/>
+                <a:latin typeface="Arial" pitchFamily="34" charset="0"/>
+                <a:ea typeface="Microsoft JhengHei" pitchFamily="34" charset="-122"/>
+                <a:cs typeface="Microsoft JhengHei" pitchFamily="34" charset="-120"/>
               </a:rPr>
               <a:t>Program</a:t>
             </a:r>
@@ -7514,9 +7544,9 @@
                 <a:solidFill>
                   <a:srgbClr val="68645C"/>
                 </a:solidFill>
-                <a:latin typeface="STHeiti" pitchFamily="34" charset="0"/>
-                <a:ea typeface="Arial" pitchFamily="34" charset="-122"/>
-                <a:cs typeface="Arial" pitchFamily="34" charset="-120"/>
+                <a:latin typeface="Arial" pitchFamily="34" charset="0"/>
+                <a:ea typeface="Microsoft JhengHei" pitchFamily="34" charset="-122"/>
+                <a:cs typeface="Microsoft JhengHei" pitchFamily="34" charset="-120"/>
               </a:rPr>
               <a:t>Goal</a:t>
             </a:r>
@@ -7534,9 +7564,9 @@
                 <a:solidFill>
                   <a:srgbClr val="68645C"/>
                 </a:solidFill>
-                <a:latin typeface="STHeiti" pitchFamily="34" charset="0"/>
-                <a:ea typeface="Arial" pitchFamily="34" charset="-122"/>
-                <a:cs typeface="Arial" pitchFamily="34" charset="-120"/>
+                <a:latin typeface="Arial" pitchFamily="34" charset="0"/>
+                <a:ea typeface="Microsoft JhengHei" pitchFamily="34" charset="-122"/>
+                <a:cs typeface="Microsoft JhengHei" pitchFamily="34" charset="-120"/>
               </a:rPr>
               <a:t>Weeks</a:t>
             </a:r>
@@ -7554,9 +7584,9 @@
                 <a:solidFill>
                   <a:srgbClr val="68645C"/>
                 </a:solidFill>
-                <a:latin typeface="STHeiti" pitchFamily="34" charset="0"/>
-                <a:ea typeface="Arial" pitchFamily="34" charset="-122"/>
-                <a:cs typeface="Arial" pitchFamily="34" charset="-120"/>
+                <a:latin typeface="Arial" pitchFamily="34" charset="0"/>
+                <a:ea typeface="Microsoft JhengHei" pitchFamily="34" charset="-122"/>
+                <a:cs typeface="Microsoft JhengHei" pitchFamily="34" charset="-120"/>
               </a:rPr>
               <a:t>Periodization</a:t>
             </a:r>
@@ -7574,9 +7604,9 @@
                 <a:solidFill>
                   <a:srgbClr val="68645C"/>
                 </a:solidFill>
-                <a:latin typeface="STHeiti" pitchFamily="34" charset="0"/>
-                <a:ea typeface="Arial" pitchFamily="34" charset="-122"/>
-                <a:cs typeface="Arial" pitchFamily="34" charset="-120"/>
+                <a:latin typeface="Arial" pitchFamily="34" charset="0"/>
+                <a:ea typeface="Microsoft JhengHei" pitchFamily="34" charset="-122"/>
+                <a:cs typeface="Microsoft JhengHei" pitchFamily="34" charset="-120"/>
               </a:rPr>
               <a:t>Workouts</a:t>
             </a:r>
@@ -7613,9 +7643,9 @@
                 <a:solidFill>
                   <a:srgbClr val="9DA89F"/>
                 </a:solidFill>
-                <a:latin typeface="STHeiti" pitchFamily="34" charset="0"/>
-                <a:ea typeface="Arial" pitchFamily="34" charset="-122"/>
-                <a:cs typeface="Arial" pitchFamily="34" charset="-120"/>
+                <a:latin typeface="Arial" pitchFamily="34" charset="0"/>
+                <a:ea typeface="Microsoft JhengHei" pitchFamily="34" charset="-122"/>
+                <a:cs typeface="Microsoft JhengHei" pitchFamily="34" charset="-120"/>
               </a:rPr>
               <a:t>14</a:t>
             </a:r>
@@ -7709,9 +7739,9 @@
                 <a:solidFill>
                   <a:srgbClr val="68645C"/>
                 </a:solidFill>
-                <a:latin typeface="STHeiti" pitchFamily="34" charset="0"/>
-                <a:ea typeface="Arial" pitchFamily="34" charset="-122"/>
-                <a:cs typeface="Arial" pitchFamily="34" charset="-120"/>
+                <a:latin typeface="Arial" pitchFamily="34" charset="0"/>
+                <a:ea typeface="Microsoft JhengHei" pitchFamily="34" charset="-122"/>
+                <a:cs typeface="Microsoft JhengHei" pitchFamily="34" charset="-120"/>
               </a:rPr>
               <a:t>PART 2 — 核心功能</a:t>
             </a:r>
@@ -7748,7 +7778,7 @@
                 <a:solidFill>
                   <a:srgbClr val="1F1E1D"/>
                 </a:solidFill>
-                <a:latin typeface="STHeiti" pitchFamily="34" charset="0"/>
+                <a:latin typeface="Arial" pitchFamily="34" charset="0"/>
                 <a:ea typeface="Microsoft JhengHei" pitchFamily="34" charset="-122"/>
                 <a:cs typeface="Microsoft JhengHei" pitchFamily="34" charset="-120"/>
               </a:rPr>
@@ -7790,7 +7820,7 @@
                 <a:solidFill>
                   <a:srgbClr val="1F1E1D"/>
                 </a:solidFill>
-                <a:latin typeface="STHeiti" pitchFamily="34" charset="0"/>
+                <a:latin typeface="Arial" pitchFamily="34" charset="0"/>
                 <a:ea typeface="Microsoft JhengHei" pitchFamily="34" charset="-122"/>
                 <a:cs typeface="Microsoft JhengHei" pitchFamily="34" charset="-120"/>
               </a:rPr>
@@ -7855,9 +7885,9 @@
                 <a:solidFill>
                   <a:srgbClr val="1F1E1D"/>
                 </a:solidFill>
-                <a:latin typeface="STHeiti" pitchFamily="34" charset="0"/>
-                <a:ea typeface="Arial" pitchFamily="34" charset="-122"/>
-                <a:cs typeface="Arial" pitchFamily="34" charset="-120"/>
+                <a:latin typeface="Arial" pitchFamily="34" charset="0"/>
+                <a:ea typeface="Microsoft JhengHei" pitchFamily="34" charset="-122"/>
+                <a:cs typeface="Microsoft JhengHei" pitchFamily="34" charset="-120"/>
               </a:rPr>
               <a:t>Goblet Squat</a:t>
             </a:r>
@@ -7894,9 +7924,9 @@
                 <a:solidFill>
                   <a:srgbClr val="157554"/>
                 </a:solidFill>
-                <a:latin typeface="STHeiti" pitchFamily="34" charset="0"/>
-                <a:ea typeface="Arial" pitchFamily="34" charset="-122"/>
-                <a:cs typeface="Arial" pitchFamily="34" charset="-120"/>
+                <a:latin typeface="Arial" pitchFamily="34" charset="0"/>
+                <a:ea typeface="Microsoft JhengHei" pitchFamily="34" charset="-122"/>
+                <a:cs typeface="Microsoft JhengHei" pitchFamily="34" charset="-120"/>
               </a:rPr>
               <a:t>— IS_VARIANT_OF →</a:t>
             </a:r>
@@ -7959,9 +7989,9 @@
                 <a:solidFill>
                   <a:srgbClr val="1F1E1D"/>
                 </a:solidFill>
-                <a:latin typeface="STHeiti" pitchFamily="34" charset="0"/>
-                <a:ea typeface="Arial" pitchFamily="34" charset="-122"/>
-                <a:cs typeface="Arial" pitchFamily="34" charset="-120"/>
+                <a:latin typeface="Arial" pitchFamily="34" charset="0"/>
+                <a:ea typeface="Microsoft JhengHei" pitchFamily="34" charset="-122"/>
+                <a:cs typeface="Microsoft JhengHei" pitchFamily="34" charset="-120"/>
               </a:rPr>
               <a:t>Squat</a:t>
             </a:r>
@@ -8024,9 +8054,9 @@
                 <a:solidFill>
                   <a:srgbClr val="1F1E1D"/>
                 </a:solidFill>
-                <a:latin typeface="STHeiti" pitchFamily="34" charset="0"/>
-                <a:ea typeface="Arial" pitchFamily="34" charset="-122"/>
-                <a:cs typeface="Arial" pitchFamily="34" charset="-120"/>
+                <a:latin typeface="Arial" pitchFamily="34" charset="0"/>
+                <a:ea typeface="Microsoft JhengHei" pitchFamily="34" charset="-122"/>
+                <a:cs typeface="Microsoft JhengHei" pitchFamily="34" charset="-120"/>
               </a:rPr>
               <a:t>Back Squat</a:t>
             </a:r>
@@ -8063,9 +8093,9 @@
                 <a:solidFill>
                   <a:srgbClr val="157554"/>
                 </a:solidFill>
-                <a:latin typeface="STHeiti" pitchFamily="34" charset="0"/>
-                <a:ea typeface="Arial" pitchFamily="34" charset="-122"/>
-                <a:cs typeface="Arial" pitchFamily="34" charset="-120"/>
+                <a:latin typeface="Arial" pitchFamily="34" charset="0"/>
+                <a:ea typeface="Microsoft JhengHei" pitchFamily="34" charset="-122"/>
+                <a:cs typeface="Microsoft JhengHei" pitchFamily="34" charset="-120"/>
               </a:rPr>
               <a:t>— PROGRESSES_TO →</a:t>
             </a:r>
@@ -8128,9 +8158,9 @@
                 <a:solidFill>
                   <a:srgbClr val="1F1E1D"/>
                 </a:solidFill>
-                <a:latin typeface="STHeiti" pitchFamily="34" charset="0"/>
-                <a:ea typeface="Arial" pitchFamily="34" charset="-122"/>
-                <a:cs typeface="Arial" pitchFamily="34" charset="-120"/>
+                <a:latin typeface="Arial" pitchFamily="34" charset="0"/>
+                <a:ea typeface="Microsoft JhengHei" pitchFamily="34" charset="-122"/>
+                <a:cs typeface="Microsoft JhengHei" pitchFamily="34" charset="-120"/>
               </a:rPr>
               <a:t>Front Squat</a:t>
             </a:r>
@@ -8193,9 +8223,9 @@
                 <a:solidFill>
                   <a:srgbClr val="1F1E1D"/>
                 </a:solidFill>
-                <a:latin typeface="STHeiti" pitchFamily="34" charset="0"/>
-                <a:ea typeface="Arial" pitchFamily="34" charset="-122"/>
-                <a:cs typeface="Arial" pitchFamily="34" charset="-120"/>
+                <a:latin typeface="Arial" pitchFamily="34" charset="0"/>
+                <a:ea typeface="Microsoft JhengHei" pitchFamily="34" charset="-122"/>
+                <a:cs typeface="Microsoft JhengHei" pitchFamily="34" charset="-120"/>
               </a:rPr>
               <a:t>Split Squat</a:t>
             </a:r>
@@ -8232,9 +8262,9 @@
                 <a:solidFill>
                   <a:srgbClr val="157554"/>
                 </a:solidFill>
-                <a:latin typeface="STHeiti" pitchFamily="34" charset="0"/>
-                <a:ea typeface="Arial" pitchFamily="34" charset="-122"/>
-                <a:cs typeface="Arial" pitchFamily="34" charset="-120"/>
+                <a:latin typeface="Arial" pitchFamily="34" charset="0"/>
+                <a:ea typeface="Microsoft JhengHei" pitchFamily="34" charset="-122"/>
+                <a:cs typeface="Microsoft JhengHei" pitchFamily="34" charset="-120"/>
               </a:rPr>
               <a:t>— SIMILAR_TO →</a:t>
             </a:r>
@@ -8297,9 +8327,9 @@
                 <a:solidFill>
                   <a:srgbClr val="1F1E1D"/>
                 </a:solidFill>
-                <a:latin typeface="STHeiti" pitchFamily="34" charset="0"/>
-                <a:ea typeface="Arial" pitchFamily="34" charset="-122"/>
-                <a:cs typeface="Arial" pitchFamily="34" charset="-120"/>
+                <a:latin typeface="Arial" pitchFamily="34" charset="0"/>
+                <a:ea typeface="Microsoft JhengHei" pitchFamily="34" charset="-122"/>
+                <a:cs typeface="Microsoft JhengHei" pitchFamily="34" charset="-120"/>
               </a:rPr>
               <a:t>Lunge</a:t>
             </a:r>
@@ -8336,7 +8366,7 @@
                 <a:solidFill>
                   <a:srgbClr val="68645C"/>
                 </a:solidFill>
-                <a:latin typeface="STHeiti" pitchFamily="34" charset="0"/>
+                <a:latin typeface="Arial" pitchFamily="34" charset="0"/>
                 <a:ea typeface="Microsoft JhengHei" pitchFamily="34" charset="-122"/>
                 <a:cs typeface="Microsoft JhengHei" pitchFamily="34" charset="-120"/>
               </a:rPr>
@@ -8375,9 +8405,9 @@
                 <a:solidFill>
                   <a:srgbClr val="9DA89F"/>
                 </a:solidFill>
-                <a:latin typeface="STHeiti" pitchFamily="34" charset="0"/>
-                <a:ea typeface="Arial" pitchFamily="34" charset="-122"/>
-                <a:cs typeface="Arial" pitchFamily="34" charset="-120"/>
+                <a:latin typeface="Arial" pitchFamily="34" charset="0"/>
+                <a:ea typeface="Microsoft JhengHei" pitchFamily="34" charset="-122"/>
+                <a:cs typeface="Microsoft JhengHei" pitchFamily="34" charset="-120"/>
               </a:rPr>
               <a:t>15</a:t>
             </a:r>
@@ -8471,9 +8501,9 @@
                 <a:solidFill>
                   <a:srgbClr val="9FAEBE"/>
                 </a:solidFill>
-                <a:latin typeface="STHeiti" pitchFamily="34" charset="0"/>
-                <a:ea typeface="Arial" pitchFamily="34" charset="-122"/>
-                <a:cs typeface="Arial" pitchFamily="34" charset="-120"/>
+                <a:latin typeface="Arial" pitchFamily="34" charset="0"/>
+                <a:ea typeface="Microsoft JhengHei" pitchFamily="34" charset="-122"/>
+                <a:cs typeface="Microsoft JhengHei" pitchFamily="34" charset="-120"/>
               </a:rPr>
               <a:t>PART 2 — 核心功能</a:t>
             </a:r>
@@ -8510,7 +8540,7 @@
                 <a:solidFill>
                   <a:srgbClr val="FAF9F5"/>
                 </a:solidFill>
-                <a:latin typeface="STHeiti" pitchFamily="34" charset="0"/>
+                <a:latin typeface="Arial" pitchFamily="34" charset="0"/>
                 <a:ea typeface="Microsoft JhengHei" pitchFamily="34" charset="-122"/>
                 <a:cs typeface="Microsoft JhengHei" pitchFamily="34" charset="-120"/>
               </a:rPr>
@@ -8552,7 +8582,7 @@
                 <a:solidFill>
                   <a:srgbClr val="D6DAE4"/>
                 </a:solidFill>
-                <a:latin typeface="STHeiti" pitchFamily="34" charset="0"/>
+                <a:latin typeface="Arial" pitchFamily="34" charset="0"/>
                 <a:ea typeface="Microsoft JhengHei" pitchFamily="34" charset="-122"/>
                 <a:cs typeface="Microsoft JhengHei" pitchFamily="34" charset="-120"/>
               </a:rPr>
@@ -8617,7 +8647,7 @@
                 <a:solidFill>
                   <a:srgbClr val="49D993"/>
                 </a:solidFill>
-                <a:latin typeface="STHeiti" pitchFamily="34" charset="0"/>
+                <a:latin typeface="Arial" pitchFamily="34" charset="0"/>
                 <a:ea typeface="Microsoft JhengHei" pitchFamily="34" charset="-122"/>
                 <a:cs typeface="Microsoft JhengHei" pitchFamily="34" charset="-120"/>
               </a:rPr>
@@ -8659,9 +8689,9 @@
                 <a:solidFill>
                   <a:srgbClr val="C9D0C8"/>
                 </a:solidFill>
-                <a:latin typeface="STHeiti" pitchFamily="34" charset="0"/>
-                <a:ea typeface="Arial" pitchFamily="34" charset="-122"/>
-                <a:cs typeface="Arial" pitchFamily="34" charset="-120"/>
+                <a:latin typeface="Arial" pitchFamily="34" charset="0"/>
+                <a:ea typeface="Microsoft JhengHei" pitchFamily="34" charset="-122"/>
+                <a:cs typeface="Microsoft JhengHei" pitchFamily="34" charset="-120"/>
               </a:rPr>
               <a:t>Workout  →  Training Load</a:t>
             </a:r>
@@ -8682,9 +8712,9 @@
                 <a:solidFill>
                   <a:srgbClr val="C9D0C8"/>
                 </a:solidFill>
-                <a:latin typeface="STHeiti" pitchFamily="34" charset="0"/>
-                <a:ea typeface="Arial" pitchFamily="34" charset="-122"/>
-                <a:cs typeface="Arial" pitchFamily="34" charset="-120"/>
+                <a:latin typeface="Arial" pitchFamily="34" charset="0"/>
+                <a:ea typeface="Microsoft JhengHei" pitchFamily="34" charset="-122"/>
+                <a:cs typeface="Microsoft JhengHei" pitchFamily="34" charset="-120"/>
               </a:rPr>
               <a:t>ATL </a:t>
             </a:r>
@@ -8693,8 +8723,9 @@
                 <a:solidFill>
                   <a:srgbClr val="FAF9F5"/>
                 </a:solidFill>
-                <a:latin typeface="STHeiti" panose="020B0604030504040204" pitchFamily="34" charset="-120"/>
+                <a:latin typeface="Arial" panose="020B0604030504040204" pitchFamily="34" charset="-120"/>
                 <a:ea typeface="Microsoft JhengHei" panose="020B0604030504040204" pitchFamily="34" charset="-120"/>
+                <a:cs typeface="Microsoft JhengHei"/>
               </a:rPr>
               <a:t>（</a:t>
             </a:r>
@@ -8703,8 +8734,9 @@
                 <a:solidFill>
                   <a:srgbClr val="FAF9F5"/>
                 </a:solidFill>
-                <a:latin typeface="STHeiti" panose="020B0604030504040204" pitchFamily="34" charset="-120"/>
+                <a:latin typeface="Arial" panose="020B0604030504040204" pitchFamily="34" charset="-120"/>
                 <a:ea typeface="Microsoft JhengHei" panose="020B0604030504040204" pitchFamily="34" charset="-120"/>
+                <a:cs typeface="Microsoft JhengHei"/>
               </a:rPr>
               <a:t>Acute Training Load</a:t>
             </a:r>
@@ -8713,8 +8745,9 @@
                 <a:solidFill>
                   <a:srgbClr val="FAF9F5"/>
                 </a:solidFill>
-                <a:latin typeface="STHeiti" panose="020B0604030504040204" pitchFamily="34" charset="-120"/>
+                <a:latin typeface="Arial" panose="020B0604030504040204" pitchFamily="34" charset="-120"/>
                 <a:ea typeface="Microsoft JhengHei" panose="020B0604030504040204" pitchFamily="34" charset="-120"/>
+                <a:cs typeface="Microsoft JhengHei"/>
               </a:rPr>
               <a:t>）</a:t>
             </a:r>
@@ -8725,8 +8758,9 @@
                 <a:solidFill>
                   <a:srgbClr val="FAF9F5"/>
                 </a:solidFill>
-                <a:latin typeface="STHeiti" panose="020B0604030504040204" pitchFamily="34" charset="-120"/>
+                <a:latin typeface="Arial" panose="020B0604030504040204" pitchFamily="34" charset="-120"/>
                 <a:ea typeface="Microsoft JhengHei" panose="020B0604030504040204" pitchFamily="34" charset="-120"/>
+                <a:cs typeface="Microsoft JhengHei"/>
               </a:rPr>
               <a:t>急性訓練負荷（短期疲勞）</a:t>
             </a:r>
@@ -8746,9 +8780,9 @@
                 <a:solidFill>
                   <a:srgbClr val="C9D0C8"/>
                 </a:solidFill>
-                <a:latin typeface="STHeiti" pitchFamily="34" charset="0"/>
-                <a:ea typeface="Arial" pitchFamily="34" charset="-122"/>
-                <a:cs typeface="Arial" pitchFamily="34" charset="-120"/>
+                <a:latin typeface="Arial" pitchFamily="34" charset="0"/>
+                <a:ea typeface="Microsoft JhengHei" pitchFamily="34" charset="-122"/>
+                <a:cs typeface="Microsoft JhengHei" pitchFamily="34" charset="-120"/>
               </a:rPr>
               <a:t>→  CTL </a:t>
             </a:r>
@@ -8757,8 +8791,9 @@
                 <a:solidFill>
                   <a:srgbClr val="FAF9F5"/>
                 </a:solidFill>
-                <a:latin typeface="STHeiti" panose="020B0604030504040204" pitchFamily="34" charset="-120"/>
+                <a:latin typeface="Arial" panose="020B0604030504040204" pitchFamily="34" charset="-120"/>
                 <a:ea typeface="Microsoft JhengHei" panose="020B0604030504040204" pitchFamily="34" charset="-120"/>
+                <a:cs typeface="Microsoft JhengHei"/>
               </a:rPr>
               <a:t>（</a:t>
             </a:r>
@@ -8767,8 +8802,9 @@
                 <a:solidFill>
                   <a:srgbClr val="FAF9F5"/>
                 </a:solidFill>
-                <a:latin typeface="STHeiti" panose="020B0604030504040204" pitchFamily="34" charset="-120"/>
+                <a:latin typeface="Arial" panose="020B0604030504040204" pitchFamily="34" charset="-120"/>
                 <a:ea typeface="Microsoft JhengHei" panose="020B0604030504040204" pitchFamily="34" charset="-120"/>
+                <a:cs typeface="Microsoft JhengHei"/>
               </a:rPr>
               <a:t>Chronic Training Load</a:t>
             </a:r>
@@ -8777,8 +8813,9 @@
                 <a:solidFill>
                   <a:srgbClr val="FAF9F5"/>
                 </a:solidFill>
-                <a:latin typeface="STHeiti" panose="020B0604030504040204" pitchFamily="34" charset="-120"/>
+                <a:latin typeface="Arial" panose="020B0604030504040204" pitchFamily="34" charset="-120"/>
                 <a:ea typeface="Microsoft JhengHei" panose="020B0604030504040204" pitchFamily="34" charset="-120"/>
+                <a:cs typeface="Microsoft JhengHei"/>
               </a:rPr>
               <a:t>）</a:t>
             </a:r>
@@ -8789,8 +8826,9 @@
                 <a:solidFill>
                   <a:srgbClr val="FAF9F5"/>
                 </a:solidFill>
-                <a:latin typeface="STHeiti" panose="020B0604030504040204" pitchFamily="34" charset="-120"/>
+                <a:latin typeface="Arial" panose="020B0604030504040204" pitchFamily="34" charset="-120"/>
                 <a:ea typeface="Microsoft JhengHei" panose="020B0604030504040204" pitchFamily="34" charset="-120"/>
+                <a:cs typeface="Microsoft JhengHei"/>
               </a:rPr>
               <a:t>慢性訓練負荷（長期體能）</a:t>
             </a:r>
@@ -8810,9 +8848,9 @@
                 <a:solidFill>
                   <a:srgbClr val="C9D0C8"/>
                 </a:solidFill>
-                <a:latin typeface="STHeiti" pitchFamily="34" charset="0"/>
-                <a:ea typeface="Arial" pitchFamily="34" charset="-122"/>
-                <a:cs typeface="Arial" pitchFamily="34" charset="-120"/>
+                <a:latin typeface="Arial" pitchFamily="34" charset="0"/>
+                <a:ea typeface="Microsoft JhengHei" pitchFamily="34" charset="-122"/>
+                <a:cs typeface="Microsoft JhengHei" pitchFamily="34" charset="-120"/>
               </a:rPr>
               <a:t>→  </a:t>
             </a:r>
@@ -8821,9 +8859,9 @@
                 <a:solidFill>
                   <a:srgbClr val="FAF9F5"/>
                 </a:solidFill>
-                <a:latin typeface="STHeiti" pitchFamily="34" charset="0"/>
+                <a:latin typeface="Arial" pitchFamily="34" charset="0"/>
                 <a:ea typeface="Microsoft JhengHei" panose="020B0604030504040204" pitchFamily="34" charset="-120"/>
-                <a:cs typeface="Arial" pitchFamily="34" charset="-120"/>
+                <a:cs typeface="Microsoft JhengHei" pitchFamily="34" charset="-120"/>
               </a:rPr>
               <a:t>TSB</a:t>
             </a:r>
@@ -8832,9 +8870,9 @@
                 <a:solidFill>
                   <a:srgbClr val="FAF9F5"/>
                 </a:solidFill>
-                <a:latin typeface="STHeiti" pitchFamily="34" charset="0"/>
+                <a:latin typeface="Arial" pitchFamily="34" charset="0"/>
                 <a:ea typeface="Microsoft JhengHei" panose="020B0604030504040204" pitchFamily="34" charset="-120"/>
-                <a:cs typeface="Arial" pitchFamily="34" charset="-120"/>
+                <a:cs typeface="Microsoft JhengHei" pitchFamily="34" charset="-120"/>
               </a:rPr>
               <a:t>  </a:t>
             </a:r>
@@ -8843,9 +8881,9 @@
                 <a:solidFill>
                   <a:srgbClr val="FAF9F5"/>
                 </a:solidFill>
-                <a:latin typeface="STHeiti" pitchFamily="34" charset="0"/>
+                <a:latin typeface="Arial" pitchFamily="34" charset="0"/>
                 <a:ea typeface="Microsoft JhengHei" panose="020B0604030504040204" pitchFamily="34" charset="-120"/>
-                <a:cs typeface="Arial" pitchFamily="34" charset="-120"/>
+                <a:cs typeface="Microsoft JhengHei" pitchFamily="34" charset="-120"/>
               </a:rPr>
               <a:t>（</a:t>
             </a:r>
@@ -8854,7 +8892,9 @@
                 <a:solidFill>
                   <a:srgbClr val="FAF9F5"/>
                 </a:solidFill>
-                <a:latin typeface="STHeiti"/>
+                <a:latin typeface="Arial"/>
+                <a:ea typeface="Microsoft JhengHei"/>
+                <a:cs typeface="Microsoft JhengHei"/>
               </a:rPr>
               <a:t>Training Stress Balance</a:t>
             </a:r>
@@ -8863,7 +8903,9 @@
                 <a:solidFill>
                   <a:srgbClr val="FAF9F5"/>
                 </a:solidFill>
-                <a:latin typeface="STHeiti"/>
+                <a:latin typeface="Arial"/>
+                <a:ea typeface="Microsoft JhengHei"/>
+                <a:cs typeface="Microsoft JhengHei"/>
               </a:rPr>
               <a:t>）</a:t>
             </a:r>
@@ -8874,7 +8916,9 @@
                 <a:solidFill>
                   <a:srgbClr val="FAF9F5"/>
                 </a:solidFill>
-                <a:latin typeface="STHeiti"/>
+                <a:latin typeface="Arial"/>
+                <a:ea typeface="Microsoft JhengHei"/>
+                <a:cs typeface="Microsoft JhengHei"/>
               </a:rPr>
               <a:t>訓練壓力平衡（恢復程度）</a:t>
             </a:r>
@@ -8946,7 +8990,7 @@
                 <a:solidFill>
                   <a:srgbClr val="49D993"/>
                 </a:solidFill>
-                <a:latin typeface="STHeiti" pitchFamily="34" charset="0"/>
+                <a:latin typeface="Arial" pitchFamily="34" charset="0"/>
                 <a:ea typeface="Microsoft JhengHei" pitchFamily="34" charset="-122"/>
                 <a:cs typeface="Microsoft JhengHei" pitchFamily="34" charset="-120"/>
               </a:rPr>
@@ -8985,9 +9029,9 @@
                 <a:solidFill>
                   <a:srgbClr val="C9D0C8"/>
                 </a:solidFill>
-                <a:latin typeface="STHeiti" pitchFamily="34" charset="0"/>
-                <a:ea typeface="Arial" pitchFamily="34" charset="-122"/>
-                <a:cs typeface="Arial" pitchFamily="34" charset="-120"/>
+                <a:latin typeface="Arial" pitchFamily="34" charset="0"/>
+                <a:ea typeface="Microsoft JhengHei" pitchFamily="34" charset="-122"/>
+                <a:cs typeface="Microsoft JhengHei" pitchFamily="34" charset="-120"/>
               </a:rPr>
               <a:t>Chest</a:t>
             </a:r>
@@ -9076,9 +9120,9 @@
                 <a:solidFill>
                   <a:srgbClr val="C9D0C8"/>
                 </a:solidFill>
-                <a:latin typeface="STHeiti" pitchFamily="34" charset="0"/>
-                <a:ea typeface="Arial" pitchFamily="34" charset="-122"/>
-                <a:cs typeface="Arial" pitchFamily="34" charset="-120"/>
+                <a:latin typeface="Arial" pitchFamily="34" charset="0"/>
+                <a:ea typeface="Microsoft JhengHei" pitchFamily="34" charset="-122"/>
+                <a:cs typeface="Microsoft JhengHei" pitchFamily="34" charset="-120"/>
               </a:rPr>
               <a:t>80%</a:t>
             </a:r>
@@ -9115,9 +9159,9 @@
                 <a:solidFill>
                   <a:srgbClr val="C9D0C8"/>
                 </a:solidFill>
-                <a:latin typeface="STHeiti" pitchFamily="34" charset="0"/>
-                <a:ea typeface="Arial" pitchFamily="34" charset="-122"/>
-                <a:cs typeface="Arial" pitchFamily="34" charset="-120"/>
+                <a:latin typeface="Arial" pitchFamily="34" charset="0"/>
+                <a:ea typeface="Microsoft JhengHei" pitchFamily="34" charset="-122"/>
+                <a:cs typeface="Microsoft JhengHei" pitchFamily="34" charset="-120"/>
               </a:rPr>
               <a:t>Back</a:t>
             </a:r>
@@ -9206,9 +9250,9 @@
                 <a:solidFill>
                   <a:srgbClr val="C9D0C8"/>
                 </a:solidFill>
-                <a:latin typeface="STHeiti" pitchFamily="34" charset="0"/>
-                <a:ea typeface="Arial" pitchFamily="34" charset="-122"/>
-                <a:cs typeface="Arial" pitchFamily="34" charset="-120"/>
+                <a:latin typeface="Arial" pitchFamily="34" charset="0"/>
+                <a:ea typeface="Microsoft JhengHei" pitchFamily="34" charset="-122"/>
+                <a:cs typeface="Microsoft JhengHei" pitchFamily="34" charset="-120"/>
               </a:rPr>
               <a:t>60%</a:t>
             </a:r>
@@ -9245,9 +9289,9 @@
                 <a:solidFill>
                   <a:srgbClr val="C9D0C8"/>
                 </a:solidFill>
-                <a:latin typeface="STHeiti" pitchFamily="34" charset="0"/>
-                <a:ea typeface="Arial" pitchFamily="34" charset="-122"/>
-                <a:cs typeface="Arial" pitchFamily="34" charset="-120"/>
+                <a:latin typeface="Arial" pitchFamily="34" charset="0"/>
+                <a:ea typeface="Microsoft JhengHei" pitchFamily="34" charset="-122"/>
+                <a:cs typeface="Microsoft JhengHei" pitchFamily="34" charset="-120"/>
               </a:rPr>
               <a:t>Leg</a:t>
             </a:r>
@@ -9336,9 +9380,9 @@
                 <a:solidFill>
                   <a:srgbClr val="C9D0C8"/>
                 </a:solidFill>
-                <a:latin typeface="STHeiti" pitchFamily="34" charset="0"/>
-                <a:ea typeface="Arial" pitchFamily="34" charset="-122"/>
-                <a:cs typeface="Arial" pitchFamily="34" charset="-120"/>
+                <a:latin typeface="Arial" pitchFamily="34" charset="0"/>
+                <a:ea typeface="Microsoft JhengHei" pitchFamily="34" charset="-122"/>
+                <a:cs typeface="Microsoft JhengHei" pitchFamily="34" charset="-120"/>
               </a:rPr>
               <a:t>35%</a:t>
             </a:r>
@@ -9375,9 +9419,9 @@
                 <a:solidFill>
                   <a:srgbClr val="9DA89F"/>
                 </a:solidFill>
-                <a:latin typeface="STHeiti" pitchFamily="34" charset="0"/>
-                <a:ea typeface="Arial" pitchFamily="34" charset="-122"/>
-                <a:cs typeface="Arial" pitchFamily="34" charset="-120"/>
+                <a:latin typeface="Arial" pitchFamily="34" charset="0"/>
+                <a:ea typeface="Microsoft JhengHei" pitchFamily="34" charset="-122"/>
+                <a:cs typeface="Microsoft JhengHei" pitchFamily="34" charset="-120"/>
               </a:rPr>
               <a:t>16</a:t>
             </a:r>
@@ -9471,9 +9515,9 @@
                 <a:solidFill>
                   <a:srgbClr val="68645C"/>
                 </a:solidFill>
-                <a:latin typeface="STHeiti" pitchFamily="34" charset="0"/>
-                <a:ea typeface="Arial" pitchFamily="34" charset="-122"/>
-                <a:cs typeface="Arial" pitchFamily="34" charset="-120"/>
+                <a:latin typeface="Arial" pitchFamily="34" charset="0"/>
+                <a:ea typeface="Microsoft JhengHei" pitchFamily="34" charset="-122"/>
+                <a:cs typeface="Microsoft JhengHei" pitchFamily="34" charset="-120"/>
               </a:rPr>
               <a:t>PART 2 — 核心功能</a:t>
             </a:r>
@@ -9507,7 +9551,9 @@
                 <a:solidFill>
                   <a:srgbClr val="1F1E1D"/>
                 </a:solidFill>
-                <a:latin typeface="STHeiti"/>
+                <a:latin typeface="Arial"/>
+                <a:ea typeface="Microsoft JhengHei"/>
+                <a:cs typeface="Microsoft JhengHei"/>
               </a:rPr>
               <a:t>把不同來源對齊成同一套語彙</a:t>
             </a:r>
@@ -9546,7 +9592,7 @@
                 <a:solidFill>
                   <a:srgbClr val="1F1E1D"/>
                 </a:solidFill>
-                <a:latin typeface="STHeiti" pitchFamily="34" charset="0"/>
+                <a:latin typeface="Arial" pitchFamily="34" charset="0"/>
                 <a:ea typeface="Microsoft JhengHei" pitchFamily="34" charset="-122"/>
                 <a:cs typeface="Microsoft JhengHei" pitchFamily="34" charset="-120"/>
               </a:rPr>
@@ -9611,7 +9657,7 @@
                 <a:solidFill>
                   <a:srgbClr val="68645C"/>
                 </a:solidFill>
-                <a:latin typeface="STHeiti" pitchFamily="34" charset="0"/>
+                <a:latin typeface="Arial" pitchFamily="34" charset="0"/>
                 <a:ea typeface="Microsoft JhengHei" pitchFamily="34" charset="-122"/>
                 <a:cs typeface="Microsoft JhengHei" pitchFamily="34" charset="-120"/>
               </a:rPr>
@@ -9651,11 +9697,11 @@
             <a:r>
               <a:rPr lang="en-US" sz="1500" dirty="0">
                 <a:solidFill>
-                  <a:srgbClr val="DAD2C3"/>
-                </a:solidFill>
-                <a:latin typeface="STHeiti" pitchFamily="34" charset="0"/>
-                <a:ea typeface="Arial" pitchFamily="34" charset="-122"/>
-                <a:cs typeface="Arial" pitchFamily="34" charset="-120"/>
+                  <a:srgbClr val="1F1E1D"/>
+                </a:solidFill>
+                <a:latin typeface="Arial" pitchFamily="34" charset="0"/>
+                <a:ea typeface="Microsoft JhengHei" pitchFamily="34" charset="-122"/>
+                <a:cs typeface="Microsoft JhengHei" pitchFamily="34" charset="-120"/>
               </a:rPr>
               <a:t>Sleep</a:t>
             </a:r>
@@ -9671,11 +9717,11 @@
             <a:r>
               <a:rPr lang="en-US" sz="1500" dirty="0">
                 <a:solidFill>
-                  <a:srgbClr val="DAD2C3"/>
-                </a:solidFill>
-                <a:latin typeface="STHeiti" pitchFamily="34" charset="0"/>
-                <a:ea typeface="Arial" pitchFamily="34" charset="-122"/>
-                <a:cs typeface="Arial" pitchFamily="34" charset="-120"/>
+                  <a:srgbClr val="1F1E1D"/>
+                </a:solidFill>
+                <a:latin typeface="Arial" pitchFamily="34" charset="0"/>
+                <a:ea typeface="Microsoft JhengHei" pitchFamily="34" charset="-122"/>
+                <a:cs typeface="Microsoft JhengHei" pitchFamily="34" charset="-120"/>
               </a:rPr>
               <a:t>HRV</a:t>
             </a:r>
@@ -9691,11 +9737,11 @@
             <a:r>
               <a:rPr lang="en-US" sz="1500" dirty="0">
                 <a:solidFill>
-                  <a:srgbClr val="DAD2C3"/>
-                </a:solidFill>
-                <a:latin typeface="STHeiti" pitchFamily="34" charset="0"/>
-                <a:ea typeface="Arial" pitchFamily="34" charset="-122"/>
-                <a:cs typeface="Arial" pitchFamily="34" charset="-120"/>
+                  <a:srgbClr val="1F1E1D"/>
+                </a:solidFill>
+                <a:latin typeface="Arial" pitchFamily="34" charset="0"/>
+                <a:ea typeface="Microsoft JhengHei" pitchFamily="34" charset="-122"/>
+                <a:cs typeface="Microsoft JhengHei" pitchFamily="34" charset="-120"/>
               </a:rPr>
               <a:t>Heart Rate</a:t>
             </a:r>
@@ -9711,11 +9757,11 @@
             <a:r>
               <a:rPr lang="en-US" sz="1500" dirty="0">
                 <a:solidFill>
-                  <a:srgbClr val="DAD2C3"/>
-                </a:solidFill>
-                <a:latin typeface="STHeiti" pitchFamily="34" charset="0"/>
-                <a:ea typeface="Arial" pitchFamily="34" charset="-122"/>
-                <a:cs typeface="Arial" pitchFamily="34" charset="-120"/>
+                  <a:srgbClr val="1F1E1D"/>
+                </a:solidFill>
+                <a:latin typeface="Arial" pitchFamily="34" charset="0"/>
+                <a:ea typeface="Microsoft JhengHei" pitchFamily="34" charset="-122"/>
+                <a:cs typeface="Microsoft JhengHei" pitchFamily="34" charset="-120"/>
               </a:rPr>
               <a:t>Stress</a:t>
             </a:r>
@@ -9752,9 +9798,9 @@
                 <a:solidFill>
                   <a:srgbClr val="AFB5C2"/>
                 </a:solidFill>
-                <a:latin typeface="STHeiti" pitchFamily="34" charset="0"/>
-                <a:ea typeface="Arial" pitchFamily="34" charset="-122"/>
-                <a:cs typeface="Arial" pitchFamily="34" charset="-120"/>
+                <a:latin typeface="Arial" pitchFamily="34" charset="0"/>
+                <a:ea typeface="Microsoft JhengHei" pitchFamily="34" charset="-122"/>
+                <a:cs typeface="Microsoft JhengHei" pitchFamily="34" charset="-120"/>
               </a:rPr>
               <a:t>→</a:t>
             </a:r>
@@ -9817,9 +9863,9 @@
                 <a:solidFill>
                   <a:srgbClr val="157554"/>
                 </a:solidFill>
-                <a:latin typeface="STHeiti" pitchFamily="34" charset="0"/>
-                <a:ea typeface="Arial" pitchFamily="34" charset="-122"/>
-                <a:cs typeface="Arial" pitchFamily="34" charset="-120"/>
+                <a:latin typeface="Arial" pitchFamily="34" charset="0"/>
+                <a:ea typeface="Microsoft JhengHei" pitchFamily="34" charset="-122"/>
+                <a:cs typeface="Microsoft JhengHei" pitchFamily="34" charset="-120"/>
               </a:rPr>
               <a:t>Normalization</a:t>
             </a:r>
@@ -9857,9 +9903,9 @@
             <a:r>
               <a:rPr lang="en-US" sz="1400" dirty="0">
                 <a:solidFill>
-                  <a:srgbClr val="DAD2C3"/>
-                </a:solidFill>
-                <a:latin typeface="STHeiti" pitchFamily="34" charset="0"/>
+                  <a:srgbClr val="1F1E1D"/>
+                </a:solidFill>
+                <a:latin typeface="Arial" pitchFamily="34" charset="0"/>
                 <a:ea typeface="Microsoft JhengHei" pitchFamily="34" charset="-122"/>
                 <a:cs typeface="Microsoft JhengHei" pitchFamily="34" charset="-120"/>
               </a:rPr>
@@ -9877,9 +9923,9 @@
             <a:r>
               <a:rPr lang="en-US" sz="1400" dirty="0">
                 <a:solidFill>
-                  <a:srgbClr val="DAD2C3"/>
-                </a:solidFill>
-                <a:latin typeface="STHeiti" pitchFamily="34" charset="0"/>
+                  <a:srgbClr val="1F1E1D"/>
+                </a:solidFill>
+                <a:latin typeface="Arial" pitchFamily="34" charset="0"/>
                 <a:ea typeface="Microsoft JhengHei" pitchFamily="34" charset="-122"/>
                 <a:cs typeface="Microsoft JhengHei" pitchFamily="34" charset="-120"/>
               </a:rPr>
@@ -9897,9 +9943,9 @@
             <a:r>
               <a:rPr lang="en-US" sz="1400" dirty="0">
                 <a:solidFill>
-                  <a:srgbClr val="DAD2C3"/>
-                </a:solidFill>
-                <a:latin typeface="STHeiti" pitchFamily="34" charset="0"/>
+                  <a:srgbClr val="1F1E1D"/>
+                </a:solidFill>
+                <a:latin typeface="Arial" pitchFamily="34" charset="0"/>
                 <a:ea typeface="Microsoft JhengHei" pitchFamily="34" charset="-122"/>
                 <a:cs typeface="Microsoft JhengHei" pitchFamily="34" charset="-120"/>
               </a:rPr>
@@ -9917,9 +9963,9 @@
             <a:r>
               <a:rPr lang="en-US" sz="1400" dirty="0">
                 <a:solidFill>
-                  <a:srgbClr val="DAD2C3"/>
-                </a:solidFill>
-                <a:latin typeface="STHeiti" pitchFamily="34" charset="0"/>
+                  <a:srgbClr val="1F1E1D"/>
+                </a:solidFill>
+                <a:latin typeface="Arial" pitchFamily="34" charset="0"/>
                 <a:ea typeface="Microsoft JhengHei" pitchFamily="34" charset="-122"/>
                 <a:cs typeface="Microsoft JhengHei" pitchFamily="34" charset="-120"/>
               </a:rPr>
@@ -9958,9 +10004,9 @@
                 <a:solidFill>
                   <a:srgbClr val="AFB5C2"/>
                 </a:solidFill>
-                <a:latin typeface="STHeiti" pitchFamily="34" charset="0"/>
-                <a:ea typeface="Arial" pitchFamily="34" charset="-122"/>
-                <a:cs typeface="Arial" pitchFamily="34" charset="-120"/>
+                <a:latin typeface="Arial" pitchFamily="34" charset="0"/>
+                <a:ea typeface="Microsoft JhengHei" pitchFamily="34" charset="-122"/>
+                <a:cs typeface="Microsoft JhengHei" pitchFamily="34" charset="-120"/>
               </a:rPr>
               <a:t>→</a:t>
             </a:r>
@@ -10023,7 +10069,7 @@
                 <a:solidFill>
                   <a:srgbClr val="157554"/>
                 </a:solidFill>
-                <a:latin typeface="STHeiti" pitchFamily="34" charset="0"/>
+                <a:latin typeface="Arial" pitchFamily="34" charset="0"/>
                 <a:ea typeface="Microsoft JhengHei" pitchFamily="34" charset="-122"/>
                 <a:cs typeface="Microsoft JhengHei" pitchFamily="34" charset="-120"/>
               </a:rPr>
@@ -10063,11 +10109,11 @@
             <a:r>
               <a:rPr lang="en-US" sz="1800" b="1" dirty="0">
                 <a:solidFill>
-                  <a:srgbClr val="1F1E1D"/>
-                </a:solidFill>
-                <a:latin typeface="STHeiti" pitchFamily="34" charset="0"/>
-                <a:ea typeface="Arial" pitchFamily="34" charset="-122"/>
-                <a:cs typeface="Arial" pitchFamily="34" charset="-120"/>
+                  <a:srgbClr val="FAF9F5"/>
+                </a:solidFill>
+                <a:latin typeface="Arial" pitchFamily="34" charset="0"/>
+                <a:ea typeface="Microsoft JhengHei" pitchFamily="34" charset="-122"/>
+                <a:cs typeface="Microsoft JhengHei" pitchFamily="34" charset="-120"/>
               </a:rPr>
               <a:t>Recovery Score</a:t>
             </a:r>
@@ -10083,11 +10129,11 @@
             <a:r>
               <a:rPr lang="en-US" sz="1800" b="1" dirty="0">
                 <a:solidFill>
-                  <a:srgbClr val="1F1E1D"/>
-                </a:solidFill>
-                <a:latin typeface="STHeiti" pitchFamily="34" charset="0"/>
-                <a:ea typeface="Arial" pitchFamily="34" charset="-122"/>
-                <a:cs typeface="Arial" pitchFamily="34" charset="-120"/>
+                  <a:srgbClr val="FAF9F5"/>
+                </a:solidFill>
+                <a:latin typeface="Arial" pitchFamily="34" charset="0"/>
+                <a:ea typeface="Microsoft JhengHei" pitchFamily="34" charset="-122"/>
+                <a:cs typeface="Microsoft JhengHei" pitchFamily="34" charset="-120"/>
               </a:rPr>
               <a:t>Fatigue Score</a:t>
             </a:r>
@@ -10103,11 +10149,11 @@
             <a:r>
               <a:rPr lang="en-US" sz="1800" b="1" dirty="0">
                 <a:solidFill>
-                  <a:srgbClr val="1F1E1D"/>
-                </a:solidFill>
-                <a:latin typeface="STHeiti" pitchFamily="34" charset="0"/>
-                <a:ea typeface="Arial" pitchFamily="34" charset="-122"/>
-                <a:cs typeface="Arial" pitchFamily="34" charset="-120"/>
+                  <a:srgbClr val="FAF9F5"/>
+                </a:solidFill>
+                <a:latin typeface="Arial" pitchFamily="34" charset="0"/>
+                <a:ea typeface="Microsoft JhengHei" pitchFamily="34" charset="-122"/>
+                <a:cs typeface="Microsoft JhengHei" pitchFamily="34" charset="-120"/>
               </a:rPr>
               <a:t>Readiness Score</a:t>
             </a:r>
@@ -10144,9 +10190,9 @@
                 <a:solidFill>
                   <a:srgbClr val="9DA89F"/>
                 </a:solidFill>
-                <a:latin typeface="STHeiti" pitchFamily="34" charset="0"/>
-                <a:ea typeface="Arial" pitchFamily="34" charset="-122"/>
-                <a:cs typeface="Arial" pitchFamily="34" charset="-120"/>
+                <a:latin typeface="Arial" pitchFamily="34" charset="0"/>
+                <a:ea typeface="Microsoft JhengHei" pitchFamily="34" charset="-122"/>
+                <a:cs typeface="Microsoft JhengHei" pitchFamily="34" charset="-120"/>
               </a:rPr>
               <a:t>17</a:t>
             </a:r>
@@ -10240,9 +10286,9 @@
                 <a:solidFill>
                   <a:srgbClr val="68645C"/>
                 </a:solidFill>
-                <a:latin typeface="STHeiti" pitchFamily="34" charset="0"/>
-                <a:ea typeface="Arial" pitchFamily="34" charset="-122"/>
-                <a:cs typeface="Arial" pitchFamily="34" charset="-120"/>
+                <a:latin typeface="Arial" pitchFamily="34" charset="0"/>
+                <a:ea typeface="Microsoft JhengHei" pitchFamily="34" charset="-122"/>
+                <a:cs typeface="Microsoft JhengHei" pitchFamily="34" charset="-120"/>
               </a:rPr>
               <a:t>PART 2 — 核心功能</a:t>
             </a:r>
@@ -10276,7 +10322,9 @@
                 <a:solidFill>
                   <a:srgbClr val="1F1E1D"/>
                 </a:solidFill>
-                <a:latin typeface="STHeiti"/>
+                <a:latin typeface="Arial"/>
+                <a:ea typeface="Microsoft JhengHei"/>
+                <a:cs typeface="Microsoft JhengHei"/>
               </a:rPr>
               <a:t>Connector 跑在你的環境</a:t>
             </a:r>
@@ -10315,7 +10363,7 @@
                 <a:solidFill>
                   <a:srgbClr val="1F1E1D"/>
                 </a:solidFill>
-                <a:latin typeface="STHeiti" pitchFamily="34" charset="0"/>
+                <a:latin typeface="Arial" pitchFamily="34" charset="0"/>
                 <a:ea typeface="Microsoft JhengHei" pitchFamily="34" charset="-122"/>
                 <a:cs typeface="Microsoft JhengHei" pitchFamily="34" charset="-120"/>
               </a:rPr>
@@ -10380,9 +10428,9 @@
                 <a:solidFill>
                   <a:srgbClr val="1F1E1D"/>
                 </a:solidFill>
-                <a:latin typeface="STHeiti" pitchFamily="34" charset="0"/>
-                <a:ea typeface="Arial" pitchFamily="34" charset="-122"/>
-                <a:cs typeface="Arial" pitchFamily="34" charset="-120"/>
+                <a:latin typeface="Arial" pitchFamily="34" charset="0"/>
+                <a:ea typeface="Microsoft JhengHei" pitchFamily="34" charset="-122"/>
+                <a:cs typeface="Microsoft JhengHei" pitchFamily="34" charset="-120"/>
               </a:rPr>
               <a:t>OAuth</a:t>
             </a:r>
@@ -10445,9 +10493,9 @@
                 <a:solidFill>
                   <a:srgbClr val="1F1E1D"/>
                 </a:solidFill>
-                <a:latin typeface="STHeiti" pitchFamily="34" charset="0"/>
-                <a:ea typeface="Arial" pitchFamily="34" charset="-122"/>
-                <a:cs typeface="Arial" pitchFamily="34" charset="-120"/>
+                <a:latin typeface="Arial" pitchFamily="34" charset="0"/>
+                <a:ea typeface="Microsoft JhengHei" pitchFamily="34" charset="-122"/>
+                <a:cs typeface="Microsoft JhengHei" pitchFamily="34" charset="-120"/>
               </a:rPr>
               <a:t>Sync</a:t>
             </a:r>
@@ -10510,9 +10558,9 @@
                 <a:solidFill>
                   <a:srgbClr val="1F1E1D"/>
                 </a:solidFill>
-                <a:latin typeface="STHeiti" pitchFamily="34" charset="0"/>
-                <a:ea typeface="Arial" pitchFamily="34" charset="-122"/>
-                <a:cs typeface="Arial" pitchFamily="34" charset="-120"/>
+                <a:latin typeface="Arial" pitchFamily="34" charset="0"/>
+                <a:ea typeface="Microsoft JhengHei" pitchFamily="34" charset="-122"/>
+                <a:cs typeface="Microsoft JhengHei" pitchFamily="34" charset="-120"/>
               </a:rPr>
               <a:t>Revoke</a:t>
             </a:r>
@@ -10575,9 +10623,9 @@
                 <a:solidFill>
                   <a:srgbClr val="1F1E1D"/>
                 </a:solidFill>
-                <a:latin typeface="STHeiti" pitchFamily="34" charset="0"/>
-                <a:ea typeface="Arial" pitchFamily="34" charset="-122"/>
-                <a:cs typeface="Arial" pitchFamily="34" charset="-120"/>
+                <a:latin typeface="Arial" pitchFamily="34" charset="0"/>
+                <a:ea typeface="Microsoft JhengHei" pitchFamily="34" charset="-122"/>
+                <a:cs typeface="Microsoft JhengHei" pitchFamily="34" charset="-120"/>
               </a:rPr>
               <a:t>Normalize</a:t>
             </a:r>
@@ -10640,7 +10688,7 @@
                 <a:solidFill>
                   <a:srgbClr val="1F1E1D"/>
                 </a:solidFill>
-                <a:latin typeface="STHeiti" pitchFamily="34" charset="0"/>
+                <a:latin typeface="Arial" pitchFamily="34" charset="0"/>
                 <a:ea typeface="Microsoft JhengHei" pitchFamily="34" charset="-122"/>
                 <a:cs typeface="Microsoft JhengHei" pitchFamily="34" charset="-120"/>
               </a:rPr>
@@ -10705,7 +10753,7 @@
                 <a:solidFill>
                   <a:srgbClr val="1F1E1D"/>
                 </a:solidFill>
-                <a:latin typeface="STHeiti" pitchFamily="34" charset="0"/>
+                <a:latin typeface="Arial" pitchFamily="34" charset="0"/>
                 <a:ea typeface="Microsoft JhengHei" pitchFamily="34" charset="-122"/>
                 <a:cs typeface="Microsoft JhengHei" pitchFamily="34" charset="-120"/>
               </a:rPr>
@@ -10770,7 +10818,7 @@
                 <a:solidFill>
                   <a:srgbClr val="1F1E1D"/>
                 </a:solidFill>
-                <a:latin typeface="STHeiti" pitchFamily="34" charset="0"/>
+                <a:latin typeface="Arial" pitchFamily="34" charset="0"/>
                 <a:ea typeface="Microsoft JhengHei" pitchFamily="34" charset="-122"/>
                 <a:cs typeface="Microsoft JhengHei" pitchFamily="34" charset="-120"/>
               </a:rPr>
@@ -10835,7 +10883,7 @@
                 <a:solidFill>
                   <a:srgbClr val="1F1E1D"/>
                 </a:solidFill>
-                <a:latin typeface="STHeiti" pitchFamily="34" charset="0"/>
+                <a:latin typeface="Arial" pitchFamily="34" charset="0"/>
                 <a:ea typeface="Microsoft JhengHei" pitchFamily="34" charset="-122"/>
                 <a:cs typeface="Microsoft JhengHei" pitchFamily="34" charset="-120"/>
               </a:rPr>
@@ -10900,7 +10948,7 @@
                 <a:solidFill>
                   <a:srgbClr val="1F1E1D"/>
                 </a:solidFill>
-                <a:latin typeface="STHeiti" pitchFamily="34" charset="0"/>
+                <a:latin typeface="Arial" pitchFamily="34" charset="0"/>
                 <a:ea typeface="Microsoft JhengHei" pitchFamily="34" charset="-122"/>
                 <a:cs typeface="Microsoft JhengHei" pitchFamily="34" charset="-120"/>
               </a:rPr>
@@ -10965,7 +11013,7 @@
                 <a:solidFill>
                   <a:srgbClr val="1F1E1D"/>
                 </a:solidFill>
-                <a:latin typeface="STHeiti" pitchFamily="34" charset="0"/>
+                <a:latin typeface="Arial" pitchFamily="34" charset="0"/>
                 <a:ea typeface="Microsoft JhengHei" pitchFamily="34" charset="-122"/>
                 <a:cs typeface="Microsoft JhengHei" pitchFamily="34" charset="-120"/>
               </a:rPr>
@@ -11030,7 +11078,7 @@
                 <a:solidFill>
                   <a:srgbClr val="1F1E1D"/>
                 </a:solidFill>
-                <a:latin typeface="STHeiti" pitchFamily="34" charset="0"/>
+                <a:latin typeface="Arial" pitchFamily="34" charset="0"/>
                 <a:ea typeface="Microsoft JhengHei" pitchFamily="34" charset="-122"/>
                 <a:cs typeface="Microsoft JhengHei" pitchFamily="34" charset="-120"/>
               </a:rPr>
@@ -11069,7 +11117,7 @@
                 <a:solidFill>
                   <a:srgbClr val="68645C"/>
                 </a:solidFill>
-                <a:latin typeface="STHeiti" pitchFamily="34" charset="0"/>
+                <a:latin typeface="Arial" pitchFamily="34" charset="0"/>
                 <a:ea typeface="Microsoft JhengHei" pitchFamily="34" charset="-122"/>
                 <a:cs typeface="Microsoft JhengHei" pitchFamily="34" charset="-120"/>
               </a:rPr>
@@ -11108,9 +11156,9 @@
                 <a:solidFill>
                   <a:srgbClr val="9DA89F"/>
                 </a:solidFill>
-                <a:latin typeface="STHeiti" pitchFamily="34" charset="0"/>
-                <a:ea typeface="Arial" pitchFamily="34" charset="-122"/>
-                <a:cs typeface="Arial" pitchFamily="34" charset="-120"/>
+                <a:latin typeface="Arial" pitchFamily="34" charset="0"/>
+                <a:ea typeface="Microsoft JhengHei" pitchFamily="34" charset="-122"/>
+                <a:cs typeface="Microsoft JhengHei" pitchFamily="34" charset="-120"/>
               </a:rPr>
               <a:t>18</a:t>
             </a:r>
@@ -11204,9 +11252,9 @@
                 <a:solidFill>
                   <a:srgbClr val="68645C"/>
                 </a:solidFill>
-                <a:latin typeface="STHeiti" pitchFamily="34" charset="0"/>
-                <a:ea typeface="Arial" pitchFamily="34" charset="-122"/>
-                <a:cs typeface="Arial" pitchFamily="34" charset="-120"/>
+                <a:latin typeface="Arial" pitchFamily="34" charset="0"/>
+                <a:ea typeface="Microsoft JhengHei" pitchFamily="34" charset="-122"/>
+                <a:cs typeface="Microsoft JhengHei" pitchFamily="34" charset="-120"/>
               </a:rPr>
               <a:t>PART 2 — 核心功能</a:t>
             </a:r>
@@ -11240,7 +11288,9 @@
                 <a:solidFill>
                   <a:srgbClr val="1F1E1D"/>
                 </a:solidFill>
-                <a:latin typeface="STHeiti"/>
+                <a:latin typeface="Arial"/>
+                <a:ea typeface="Microsoft JhengHei"/>
+                <a:cs typeface="Microsoft JhengHei"/>
               </a:rPr>
               <a:t>v0.5.0：把一個 decision loop 做完整</a:t>
             </a:r>
@@ -11279,7 +11329,7 @@
                 <a:solidFill>
                   <a:srgbClr val="1F1E1D"/>
                 </a:solidFill>
-                <a:latin typeface="STHeiti" pitchFamily="34" charset="0"/>
+                <a:latin typeface="Arial" pitchFamily="34" charset="0"/>
                 <a:ea typeface="Microsoft JhengHei" pitchFamily="34" charset="-122"/>
                 <a:cs typeface="Microsoft JhengHei" pitchFamily="34" charset="-120"/>
               </a:rPr>
@@ -11368,9 +11418,9 @@
                 <a:solidFill>
                   <a:srgbClr val="1F1E1D"/>
                 </a:solidFill>
-                <a:latin typeface="STHeiti" pitchFamily="34" charset="0"/>
-                <a:ea typeface="Arial" pitchFamily="34" charset="-122"/>
-                <a:cs typeface="Arial" pitchFamily="34" charset="-120"/>
+                <a:latin typeface="Arial" pitchFamily="34" charset="0"/>
+                <a:ea typeface="Microsoft JhengHei" pitchFamily="34" charset="-122"/>
+                <a:cs typeface="Microsoft JhengHei" pitchFamily="34" charset="-120"/>
               </a:rPr>
               <a:t>assess_fitness_state
 get_evidence_coverage</a:t>
@@ -11411,9 +11461,9 @@
                 <a:solidFill>
                   <a:srgbClr val="68645C"/>
                 </a:solidFill>
-                <a:latin typeface="STHeiti" pitchFamily="34" charset="0"/>
-                <a:ea typeface="Arial" pitchFamily="34" charset="-122"/>
-                <a:cs typeface="Arial" pitchFamily="34" charset="-120"/>
+                <a:latin typeface="Arial" pitchFamily="34" charset="0"/>
+                <a:ea typeface="Microsoft JhengHei" pitchFamily="34" charset="-122"/>
+                <a:cs typeface="Microsoft JhengHei" pitchFamily="34" charset="-120"/>
               </a:rPr>
               <a:t>狀態與訊號覆蓋</a:t>
             </a:r>
@@ -11431,9 +11481,9 @@
                 <a:solidFill>
                   <a:srgbClr val="68645C"/>
                 </a:solidFill>
-                <a:latin typeface="STHeiti" pitchFamily="34" charset="0"/>
-                <a:ea typeface="Arial" pitchFamily="34" charset="-122"/>
-                <a:cs typeface="Arial" pitchFamily="34" charset="-120"/>
+                <a:latin typeface="Arial" pitchFamily="34" charset="0"/>
+                <a:ea typeface="Microsoft JhengHei" pitchFamily="34" charset="-122"/>
+                <a:cs typeface="Microsoft JhengHei" pitchFamily="34" charset="-120"/>
               </a:rPr>
               <a:t/>
             </a:r>
@@ -11520,9 +11570,9 @@
                 <a:solidFill>
                   <a:srgbClr val="1F1E1D"/>
                 </a:solidFill>
-                <a:latin typeface="STHeiti" pitchFamily="34" charset="0"/>
-                <a:ea typeface="Arial" pitchFamily="34" charset="-122"/>
-                <a:cs typeface="Arial" pitchFamily="34" charset="-120"/>
+                <a:latin typeface="Arial" pitchFamily="34" charset="0"/>
+                <a:ea typeface="Microsoft JhengHei" pitchFamily="34" charset="-122"/>
+                <a:cs typeface="Microsoft JhengHei" pitchFamily="34" charset="-120"/>
               </a:rPr>
               <a:t>decide_session
 explain_decision</a:t>
@@ -11563,9 +11613,9 @@
                 <a:solidFill>
                   <a:srgbClr val="68645C"/>
                 </a:solidFill>
-                <a:latin typeface="STHeiti" pitchFamily="34" charset="0"/>
-                <a:ea typeface="Arial" pitchFamily="34" charset="-122"/>
-                <a:cs typeface="Arial" pitchFamily="34" charset="-120"/>
+                <a:latin typeface="Arial" pitchFamily="34" charset="0"/>
+                <a:ea typeface="Microsoft JhengHei" pitchFamily="34" charset="-122"/>
+                <a:cs typeface="Microsoft JhengHei" pitchFamily="34" charset="-120"/>
               </a:rPr>
               <a:t>決策與版本化 trace</a:t>
             </a:r>
@@ -11583,9 +11633,9 @@
                 <a:solidFill>
                   <a:srgbClr val="68645C"/>
                 </a:solidFill>
-                <a:latin typeface="STHeiti" pitchFamily="34" charset="0"/>
-                <a:ea typeface="Arial" pitchFamily="34" charset="-122"/>
-                <a:cs typeface="Arial" pitchFamily="34" charset="-120"/>
+                <a:latin typeface="Arial" pitchFamily="34" charset="0"/>
+                <a:ea typeface="Microsoft JhengHei" pitchFamily="34" charset="-122"/>
+                <a:cs typeface="Microsoft JhengHei" pitchFamily="34" charset="-120"/>
               </a:rPr>
               <a:t/>
             </a:r>
@@ -11672,9 +11722,9 @@
                 <a:solidFill>
                   <a:srgbClr val="1F1E1D"/>
                 </a:solidFill>
-                <a:latin typeface="STHeiti" pitchFamily="34" charset="0"/>
-                <a:ea typeface="Arial" pitchFamily="34" charset="-122"/>
-                <a:cs typeface="Arial" pitchFamily="34" charset="-120"/>
+                <a:latin typeface="Arial" pitchFamily="34" charset="0"/>
+                <a:ea typeface="Microsoft JhengHei" pitchFamily="34" charset="-122"/>
+                <a:cs typeface="Microsoft JhengHei" pitchFamily="34" charset="-120"/>
               </a:rPr>
               <a:t>decide_exercise_substitution</a:t>
             </a:r>
@@ -11714,9 +11764,9 @@
                 <a:solidFill>
                   <a:srgbClr val="68645C"/>
                 </a:solidFill>
-                <a:latin typeface="STHeiti" pitchFamily="34" charset="0"/>
-                <a:ea typeface="Arial" pitchFamily="34" charset="-122"/>
-                <a:cs typeface="Arial" pitchFamily="34" charset="-120"/>
+                <a:latin typeface="Arial" pitchFamily="34" charset="0"/>
+                <a:ea typeface="Microsoft JhengHei" pitchFamily="34" charset="-122"/>
+                <a:cs typeface="Microsoft JhengHei" pitchFamily="34" charset="-120"/>
               </a:rPr>
               <a:t>換一個等效的動作</a:t>
             </a:r>
@@ -11734,9 +11784,9 @@
                 <a:solidFill>
                   <a:srgbClr val="68645C"/>
                 </a:solidFill>
-                <a:latin typeface="STHeiti" pitchFamily="34" charset="0"/>
-                <a:ea typeface="Arial" pitchFamily="34" charset="-122"/>
-                <a:cs typeface="Arial" pitchFamily="34" charset="-120"/>
+                <a:latin typeface="Arial" pitchFamily="34" charset="0"/>
+                <a:ea typeface="Microsoft JhengHei" pitchFamily="34" charset="-122"/>
+                <a:cs typeface="Microsoft JhengHei" pitchFamily="34" charset="-120"/>
               </a:rPr>
               <a:t/>
             </a:r>
@@ -11823,9 +11873,9 @@
                 <a:solidFill>
                   <a:srgbClr val="1F1E1D"/>
                 </a:solidFill>
-                <a:latin typeface="STHeiti" pitchFamily="34" charset="0"/>
-                <a:ea typeface="Arial" pitchFamily="34" charset="-122"/>
-                <a:cs typeface="Arial" pitchFamily="34" charset="-120"/>
+                <a:latin typeface="Arial" pitchFamily="34" charset="0"/>
+                <a:ea typeface="Microsoft JhengHei" pitchFamily="34" charset="-122"/>
+                <a:cs typeface="Microsoft JhengHei" pitchFamily="34" charset="-120"/>
               </a:rPr>
               <a:t>generate_plan
 generate_workout</a:t>
@@ -11866,9 +11916,9 @@
                 <a:solidFill>
                   <a:srgbClr val="68645C"/>
                 </a:solidFill>
-                <a:latin typeface="STHeiti" pitchFamily="34" charset="0"/>
-                <a:ea typeface="Arial" pitchFamily="34" charset="-122"/>
-                <a:cs typeface="Arial" pitchFamily="34" charset="-120"/>
+                <a:latin typeface="Arial" pitchFamily="34" charset="0"/>
+                <a:ea typeface="Microsoft JhengHei" pitchFamily="34" charset="-122"/>
+                <a:cs typeface="Microsoft JhengHei" pitchFamily="34" charset="-120"/>
               </a:rPr>
               <a:t>多週計畫與單次 workout</a:t>
             </a:r>
@@ -11886,9 +11936,9 @@
                 <a:solidFill>
                   <a:srgbClr val="68645C"/>
                 </a:solidFill>
-                <a:latin typeface="STHeiti" pitchFamily="34" charset="0"/>
-                <a:ea typeface="Arial" pitchFamily="34" charset="-122"/>
-                <a:cs typeface="Arial" pitchFamily="34" charset="-120"/>
+                <a:latin typeface="Arial" pitchFamily="34" charset="0"/>
+                <a:ea typeface="Microsoft JhengHei" pitchFamily="34" charset="-122"/>
+                <a:cs typeface="Microsoft JhengHei" pitchFamily="34" charset="-120"/>
               </a:rPr>
               <a:t/>
             </a:r>
@@ -11975,9 +12025,9 @@
                 <a:solidFill>
                   <a:srgbClr val="1F1E1D"/>
                 </a:solidFill>
-                <a:latin typeface="STHeiti" pitchFamily="34" charset="0"/>
-                <a:ea typeface="Arial" pitchFamily="34" charset="-122"/>
-                <a:cs typeface="Arial" pitchFamily="34" charset="-120"/>
+                <a:latin typeface="Arial" pitchFamily="34" charset="0"/>
+                <a:ea typeface="Microsoft JhengHei" pitchFamily="34" charset="-122"/>
+                <a:cs typeface="Microsoft JhengHei" pitchFamily="34" charset="-120"/>
               </a:rPr>
               <a:t>preview_adjust_plan</a:t>
             </a:r>
@@ -12017,9 +12067,9 @@
                 <a:solidFill>
                   <a:srgbClr val="68645C"/>
                 </a:solidFill>
-                <a:latin typeface="STHeiti" pitchFamily="34" charset="0"/>
-                <a:ea typeface="Arial" pitchFamily="34" charset="-122"/>
-                <a:cs typeface="Arial" pitchFamily="34" charset="-120"/>
+                <a:latin typeface="Arial" pitchFamily="34" charset="0"/>
+                <a:ea typeface="Microsoft JhengHei" pitchFamily="34" charset="-122"/>
+                <a:cs typeface="Microsoft JhengHei" pitchFamily="34" charset="-120"/>
               </a:rPr>
               <a:t>先看調整後的計畫長什麼樣</a:t>
             </a:r>
@@ -12037,9 +12087,9 @@
                 <a:solidFill>
                   <a:srgbClr val="68645C"/>
                 </a:solidFill>
-                <a:latin typeface="STHeiti" pitchFamily="34" charset="0"/>
-                <a:ea typeface="Arial" pitchFamily="34" charset="-122"/>
-                <a:cs typeface="Arial" pitchFamily="34" charset="-120"/>
+                <a:latin typeface="Arial" pitchFamily="34" charset="0"/>
+                <a:ea typeface="Microsoft JhengHei" pitchFamily="34" charset="-122"/>
+                <a:cs typeface="Microsoft JhengHei" pitchFamily="34" charset="-120"/>
               </a:rPr>
               <a:t/>
             </a:r>
@@ -12126,9 +12176,9 @@
                 <a:solidFill>
                   <a:srgbClr val="1F1E1D"/>
                 </a:solidFill>
-                <a:latin typeface="STHeiti" pitchFamily="34" charset="0"/>
-                <a:ea typeface="Arial" pitchFamily="34" charset="-122"/>
-                <a:cs typeface="Arial" pitchFamily="34" charset="-120"/>
+                <a:latin typeface="Arial" pitchFamily="34" charset="0"/>
+                <a:ea typeface="Microsoft JhengHei" pitchFamily="34" charset="-122"/>
+                <a:cs typeface="Microsoft JhengHei" pitchFamily="34" charset="-120"/>
               </a:rPr>
               <a:t>commit_adjust_plan
 submit_outcome</a:t>
@@ -12169,9 +12219,9 @@
                 <a:solidFill>
                   <a:srgbClr val="68645C"/>
                 </a:solidFill>
-                <a:latin typeface="STHeiti" pitchFamily="34" charset="0"/>
-                <a:ea typeface="Arial" pitchFamily="34" charset="-122"/>
-                <a:cs typeface="Arial" pitchFamily="34" charset="-120"/>
+                <a:latin typeface="Arial" pitchFamily="34" charset="0"/>
+                <a:ea typeface="Microsoft JhengHei" pitchFamily="34" charset="-122"/>
+                <a:cs typeface="Microsoft JhengHei" pitchFamily="34" charset="-120"/>
               </a:rPr>
               <a:t>提交計畫與結果回報</a:t>
             </a:r>
@@ -12189,9 +12239,9 @@
                 <a:solidFill>
                   <a:srgbClr val="68645C"/>
                 </a:solidFill>
-                <a:latin typeface="STHeiti" pitchFamily="34" charset="0"/>
-                <a:ea typeface="Arial" pitchFamily="34" charset="-122"/>
-                <a:cs typeface="Arial" pitchFamily="34" charset="-120"/>
+                <a:latin typeface="Arial" pitchFamily="34" charset="0"/>
+                <a:ea typeface="Microsoft JhengHei" pitchFamily="34" charset="-122"/>
+                <a:cs typeface="Microsoft JhengHei" pitchFamily="34" charset="-120"/>
               </a:rPr>
               <a:t/>
             </a:r>
@@ -12228,9 +12278,9 @@
                 <a:solidFill>
                   <a:srgbClr val="9DA89F"/>
                 </a:solidFill>
-                <a:latin typeface="STHeiti" pitchFamily="34" charset="0"/>
-                <a:ea typeface="Arial" pitchFamily="34" charset="-122"/>
-                <a:cs typeface="Arial" pitchFamily="34" charset="-120"/>
+                <a:latin typeface="Arial" pitchFamily="34" charset="0"/>
+                <a:ea typeface="Microsoft JhengHei" pitchFamily="34" charset="-122"/>
+                <a:cs typeface="Microsoft JhengHei" pitchFamily="34" charset="-120"/>
               </a:rPr>
               <a:t>19</a:t>
             </a:r>
@@ -12324,9 +12374,9 @@
                 <a:solidFill>
                   <a:srgbClr val="68645C"/>
                 </a:solidFill>
-                <a:latin typeface="STHeiti" pitchFamily="34" charset="0"/>
-                <a:ea typeface="Arial" pitchFamily="34" charset="-122"/>
-                <a:cs typeface="Arial" pitchFamily="34" charset="-120"/>
+                <a:latin typeface="Arial" pitchFamily="34" charset="0"/>
+                <a:ea typeface="Microsoft JhengHei" pitchFamily="34" charset="-122"/>
+                <a:cs typeface="Microsoft JhengHei" pitchFamily="34" charset="-120"/>
               </a:rPr>
               <a:t>AGENDA</a:t>
             </a:r>
@@ -12363,7 +12413,7 @@
                 <a:solidFill>
                   <a:srgbClr val="1F1E1D"/>
                 </a:solidFill>
-                <a:latin typeface="STHeiti" pitchFamily="34" charset="0"/>
+                <a:latin typeface="Arial" pitchFamily="34" charset="0"/>
                 <a:ea typeface="Microsoft JhengHei" pitchFamily="34" charset="-122"/>
                 <a:cs typeface="Microsoft JhengHei" pitchFamily="34" charset="-120"/>
               </a:rPr>
@@ -12399,7 +12449,9 @@
                 <a:solidFill>
                   <a:srgbClr val="1F1E1D"/>
                 </a:solidFill>
-                <a:latin typeface="STHeiti"/>
+                <a:latin typeface="Arial"/>
+                <a:ea typeface="Microsoft JhengHei"/>
+                <a:cs typeface="Microsoft JhengHei"/>
               </a:rPr>
               <a:t>先看今天的決策，再看 evidence chain 與 privacy boundary，最後看產品驗證與 roadmap。</a:t>
             </a:r>
@@ -12461,9 +12513,9 @@
                 <a:solidFill>
                   <a:srgbClr val="157554"/>
                 </a:solidFill>
-                <a:latin typeface="STHeiti" pitchFamily="34" charset="0"/>
-                <a:ea typeface="Arial" pitchFamily="34" charset="-122"/>
-                <a:cs typeface="Arial" pitchFamily="34" charset="-120"/>
+                <a:latin typeface="Arial" pitchFamily="34" charset="0"/>
+                <a:ea typeface="Microsoft JhengHei" pitchFamily="34" charset="-122"/>
+                <a:cs typeface="Microsoft JhengHei" pitchFamily="34" charset="-120"/>
               </a:rPr>
               <a:t>01</a:t>
             </a:r>
@@ -12500,7 +12552,7 @@
                 <a:solidFill>
                   <a:srgbClr val="1F1E1D"/>
                 </a:solidFill>
-                <a:latin typeface="STHeiti" pitchFamily="34" charset="0"/>
+                <a:latin typeface="Arial" pitchFamily="34" charset="0"/>
                 <a:ea typeface="Microsoft JhengHei" pitchFamily="34" charset="-122"/>
                 <a:cs typeface="Microsoft JhengHei" pitchFamily="34" charset="-120"/>
               </a:rPr>
@@ -12536,7 +12588,9 @@
                 <a:solidFill>
                   <a:srgbClr val="1F1E1D"/>
                 </a:solidFill>
-                <a:latin typeface="STHeiti"/>
+                <a:latin typeface="Arial"/>
+                <a:ea typeface="Microsoft JhengHei"/>
+                <a:cs typeface="Microsoft JhengHei"/>
               </a:rPr>
               <a:t>從原定課表到今天要做什麼</a:t>
             </a:r>
@@ -12598,9 +12652,9 @@
                 <a:solidFill>
                   <a:srgbClr val="157554"/>
                 </a:solidFill>
-                <a:latin typeface="STHeiti" pitchFamily="34" charset="0"/>
-                <a:ea typeface="Arial" pitchFamily="34" charset="-122"/>
-                <a:cs typeface="Arial" pitchFamily="34" charset="-120"/>
+                <a:latin typeface="Arial" pitchFamily="34" charset="0"/>
+                <a:ea typeface="Microsoft JhengHei" pitchFamily="34" charset="-122"/>
+                <a:cs typeface="Microsoft JhengHei" pitchFamily="34" charset="-120"/>
               </a:rPr>
               <a:t>02</a:t>
             </a:r>
@@ -12637,7 +12691,7 @@
                 <a:solidFill>
                   <a:srgbClr val="1F1E1D"/>
                 </a:solidFill>
-                <a:latin typeface="STHeiti" pitchFamily="34" charset="0"/>
+                <a:latin typeface="Arial" pitchFamily="34" charset="0"/>
                 <a:ea typeface="Microsoft JhengHei" pitchFamily="34" charset="-122"/>
                 <a:cs typeface="Microsoft JhengHei" pitchFamily="34" charset="-120"/>
               </a:rPr>
@@ -12673,7 +12727,9 @@
                 <a:solidFill>
                   <a:srgbClr val="1F1E1D"/>
                 </a:solidFill>
-                <a:latin typeface="STHeiti"/>
+                <a:latin typeface="Arial"/>
+                <a:ea typeface="Microsoft JhengHei"/>
+                <a:cs typeface="Microsoft JhengHei"/>
               </a:rPr>
               <a:t>證據、理由、缺失與信心都可檢查</a:t>
             </a:r>
@@ -12735,9 +12791,9 @@
                 <a:solidFill>
                   <a:srgbClr val="1F1E1D"/>
                 </a:solidFill>
-                <a:latin typeface="STHeiti" pitchFamily="34" charset="0"/>
-                <a:ea typeface="Arial" pitchFamily="34" charset="-122"/>
-                <a:cs typeface="Arial" pitchFamily="34" charset="-120"/>
+                <a:latin typeface="Arial" pitchFamily="34" charset="0"/>
+                <a:ea typeface="Microsoft JhengHei" pitchFamily="34" charset="-122"/>
+                <a:cs typeface="Microsoft JhengHei" pitchFamily="34" charset="-120"/>
               </a:rPr>
               <a:t>03</a:t>
             </a:r>
@@ -12774,7 +12830,7 @@
                 <a:solidFill>
                   <a:srgbClr val="1F1E1D"/>
                 </a:solidFill>
-                <a:latin typeface="STHeiti" pitchFamily="34" charset="0"/>
+                <a:latin typeface="Arial" pitchFamily="34" charset="0"/>
                 <a:ea typeface="Microsoft JhengHei" pitchFamily="34" charset="-122"/>
                 <a:cs typeface="Microsoft JhengHei" pitchFamily="34" charset="-120"/>
               </a:rPr>
@@ -12810,7 +12866,9 @@
                 <a:solidFill>
                   <a:srgbClr val="1F1E1D"/>
                 </a:solidFill>
-                <a:latin typeface="STHeiti"/>
+                <a:latin typeface="Arial"/>
+                <a:ea typeface="Microsoft JhengHei"/>
+                <a:cs typeface="Microsoft JhengHei"/>
               </a:rPr>
               <a:t>AI coach 可替換，健康歷史留在你的控制邊界</a:t>
             </a:r>
@@ -12846,9 +12904,9 @@
                 <a:solidFill>
                   <a:srgbClr val="9DA89F"/>
                 </a:solidFill>
-                <a:latin typeface="STHeiti" pitchFamily="34" charset="0"/>
-                <a:ea typeface="Arial" pitchFamily="34" charset="-122"/>
-                <a:cs typeface="Arial" pitchFamily="34" charset="-120"/>
+                <a:latin typeface="Arial" pitchFamily="34" charset="0"/>
+                <a:ea typeface="Microsoft JhengHei" pitchFamily="34" charset="-122"/>
+                <a:cs typeface="Microsoft JhengHei" pitchFamily="34" charset="-120"/>
               </a:rPr>
               <a:t>02</a:t>
             </a:r>
@@ -12942,9 +13000,9 @@
                 <a:solidFill>
                   <a:srgbClr val="68645C"/>
                 </a:solidFill>
-                <a:latin typeface="STHeiti" pitchFamily="34" charset="0"/>
-                <a:ea typeface="Arial" pitchFamily="34" charset="-122"/>
-                <a:cs typeface="Arial" pitchFamily="34" charset="-120"/>
+                <a:latin typeface="Arial" pitchFamily="34" charset="0"/>
+                <a:ea typeface="Microsoft JhengHei" pitchFamily="34" charset="-122"/>
+                <a:cs typeface="Microsoft JhengHei" pitchFamily="34" charset="-120"/>
               </a:rPr>
               <a:t>PART 2 — 工具准入判準</a:t>
             </a:r>
@@ -13007,7 +13065,7 @@
                 <a:solidFill>
                   <a:srgbClr val="1F1E1D"/>
                 </a:solidFill>
-                <a:latin typeface="STHeiti" pitchFamily="34" charset="0"/>
+                <a:latin typeface="Arial" pitchFamily="34" charset="0"/>
                 <a:ea typeface="Microsoft JhengHei" pitchFamily="34" charset="-122"/>
                 <a:cs typeface="Microsoft JhengHei" pitchFamily="34" charset="-120"/>
               </a:rPr>
@@ -13046,7 +13104,7 @@
                 <a:solidFill>
                   <a:srgbClr val="68645C"/>
                 </a:solidFill>
-                <a:latin typeface="STHeiti" pitchFamily="34" charset="0"/>
+                <a:latin typeface="Arial" pitchFamily="34" charset="0"/>
                 <a:ea typeface="Microsoft JhengHei" pitchFamily="34" charset="-122"/>
                 <a:cs typeface="Microsoft JhengHei" pitchFamily="34" charset="-120"/>
               </a:rPr>
@@ -13135,7 +13193,7 @@
                 <a:solidFill>
                   <a:srgbClr val="1F1E1D"/>
                 </a:solidFill>
-                <a:latin typeface="STHeiti" pitchFamily="34" charset="0"/>
+                <a:latin typeface="Arial" pitchFamily="34" charset="0"/>
                 <a:ea typeface="Microsoft JhengHei" pitchFamily="34" charset="-122"/>
                 <a:cs typeface="Microsoft JhengHei" pitchFamily="34" charset="-120"/>
               </a:rPr>
@@ -13224,7 +13282,7 @@
                 <a:solidFill>
                   <a:srgbClr val="1F1E1D"/>
                 </a:solidFill>
-                <a:latin typeface="STHeiti" pitchFamily="34" charset="0"/>
+                <a:latin typeface="Arial" pitchFamily="34" charset="0"/>
                 <a:ea typeface="Microsoft JhengHei" pitchFamily="34" charset="-122"/>
                 <a:cs typeface="Microsoft JhengHei" pitchFamily="34" charset="-120"/>
               </a:rPr>
@@ -13313,7 +13371,7 @@
                 <a:solidFill>
                   <a:srgbClr val="1F1E1D"/>
                 </a:solidFill>
-                <a:latin typeface="STHeiti" pitchFamily="34" charset="0"/>
+                <a:latin typeface="Arial" pitchFamily="34" charset="0"/>
                 <a:ea typeface="Microsoft JhengHei" pitchFamily="34" charset="-122"/>
                 <a:cs typeface="Microsoft JhengHei" pitchFamily="34" charset="-120"/>
               </a:rPr>
@@ -13352,7 +13410,7 @@
                 <a:solidFill>
                   <a:srgbClr val="157554"/>
                 </a:solidFill>
-                <a:latin typeface="STHeiti" pitchFamily="34" charset="0"/>
+                <a:latin typeface="Arial" pitchFamily="34" charset="0"/>
                 <a:ea typeface="Microsoft JhengHei" pitchFamily="34" charset="-122"/>
                 <a:cs typeface="Microsoft JhengHei" pitchFamily="34" charset="-120"/>
               </a:rPr>
@@ -13417,7 +13475,7 @@
                 <a:solidFill>
                   <a:srgbClr val="C9D0C8"/>
                 </a:solidFill>
-                <a:latin typeface="STHeiti" pitchFamily="34" charset="0"/>
+                <a:latin typeface="Arial" pitchFamily="34" charset="0"/>
                 <a:ea typeface="Microsoft JhengHei" pitchFamily="34" charset="-122"/>
                 <a:cs typeface="Microsoft JhengHei" pitchFamily="34" charset="-120"/>
               </a:rPr>
@@ -13456,7 +13514,7 @@
                 <a:solidFill>
                   <a:srgbClr val="C9D0C8"/>
                 </a:solidFill>
-                <a:latin typeface="STHeiti" pitchFamily="34" charset="0"/>
+                <a:latin typeface="Arial" pitchFamily="34" charset="0"/>
                 <a:ea typeface="Microsoft JhengHei" pitchFamily="34" charset="-122"/>
                 <a:cs typeface="Microsoft JhengHei" pitchFamily="34" charset="-120"/>
               </a:rPr>
@@ -13495,9 +13553,9 @@
                 <a:solidFill>
                   <a:srgbClr val="9DA89F"/>
                 </a:solidFill>
-                <a:latin typeface="STHeiti" pitchFamily="34" charset="0"/>
-                <a:ea typeface="Arial" pitchFamily="34" charset="-122"/>
-                <a:cs typeface="Arial" pitchFamily="34" charset="-120"/>
+                <a:latin typeface="Arial" pitchFamily="34" charset="0"/>
+                <a:ea typeface="Microsoft JhengHei" pitchFamily="34" charset="-122"/>
+                <a:cs typeface="Microsoft JhengHei" pitchFamily="34" charset="-120"/>
               </a:rPr>
               <a:t>20</a:t>
             </a:r>
@@ -13591,9 +13649,9 @@
                 <a:solidFill>
                   <a:srgbClr val="68645C"/>
                 </a:solidFill>
-                <a:latin typeface="STHeiti" pitchFamily="34" charset="0"/>
-                <a:ea typeface="Arial" pitchFamily="34" charset="-122"/>
-                <a:cs typeface="Arial" pitchFamily="34" charset="-120"/>
+                <a:latin typeface="Arial" pitchFamily="34" charset="0"/>
+                <a:ea typeface="Microsoft JhengHei" pitchFamily="34" charset="-122"/>
+                <a:cs typeface="Microsoft JhengHei" pitchFamily="34" charset="-120"/>
               </a:rPr>
               <a:t>PART 2 — 核心功能</a:t>
             </a:r>
@@ -13627,7 +13685,9 @@
                 <a:solidFill>
                   <a:srgbClr val="1F1E1D"/>
                 </a:solidFill>
-                <a:latin typeface="STHeiti"/>
+                <a:latin typeface="Arial"/>
+                <a:ea typeface="Microsoft JhengHei"/>
+                <a:cs typeface="Microsoft JhengHei"/>
               </a:rPr>
               <a:t>同一顆 engine，三種部署形態</a:t>
             </a:r>
@@ -13666,7 +13726,7 @@
                 <a:solidFill>
                   <a:srgbClr val="1F1E1D"/>
                 </a:solidFill>
-                <a:latin typeface="STHeiti" pitchFamily="34" charset="0"/>
+                <a:latin typeface="Arial" pitchFamily="34" charset="0"/>
                 <a:ea typeface="Microsoft JhengHei" pitchFamily="34" charset="-122"/>
                 <a:cs typeface="Microsoft JhengHei" pitchFamily="34" charset="-120"/>
               </a:rPr>
@@ -13755,9 +13815,9 @@
                 <a:solidFill>
                   <a:srgbClr val="1F1E1D"/>
                 </a:solidFill>
-                <a:latin typeface="STHeiti" pitchFamily="34" charset="0"/>
-                <a:ea typeface="Arial" pitchFamily="34" charset="-122"/>
-                <a:cs typeface="Arial" pitchFamily="34" charset="-120"/>
+                <a:latin typeface="Arial" pitchFamily="34" charset="0"/>
+                <a:ea typeface="Microsoft JhengHei" pitchFamily="34" charset="-122"/>
+                <a:cs typeface="Microsoft JhengHei" pitchFamily="34" charset="-120"/>
               </a:rPr>
               <a:t>Local desktop</a:t>
             </a:r>
@@ -13794,7 +13854,7 @@
                 <a:solidFill>
                   <a:srgbClr val="68645C"/>
                 </a:solidFill>
-                <a:latin typeface="STHeiti" pitchFamily="34" charset="0"/>
+                <a:latin typeface="Arial" pitchFamily="34" charset="0"/>
                 <a:ea typeface="Microsoft JhengHei" pitchFamily="34" charset="-122"/>
                 <a:cs typeface="Microsoft JhengHei" pitchFamily="34" charset="-120"/>
               </a:rPr>
@@ -13883,9 +13943,9 @@
                 <a:solidFill>
                   <a:srgbClr val="1F1E1D"/>
                 </a:solidFill>
-                <a:latin typeface="STHeiti" pitchFamily="34" charset="0"/>
-                <a:ea typeface="Arial" pitchFamily="34" charset="-122"/>
-                <a:cs typeface="Arial" pitchFamily="34" charset="-120"/>
+                <a:latin typeface="Arial" pitchFamily="34" charset="0"/>
+                <a:ea typeface="Microsoft JhengHei" pitchFamily="34" charset="-122"/>
+                <a:cs typeface="Microsoft JhengHei" pitchFamily="34" charset="-120"/>
               </a:rPr>
               <a:t>User-controlled private</a:t>
             </a:r>
@@ -13922,7 +13982,7 @@
                 <a:solidFill>
                   <a:srgbClr val="68645C"/>
                 </a:solidFill>
-                <a:latin typeface="STHeiti" pitchFamily="34" charset="0"/>
+                <a:latin typeface="Arial" pitchFamily="34" charset="0"/>
                 <a:ea typeface="Microsoft JhengHei" pitchFamily="34" charset="-122"/>
                 <a:cs typeface="Microsoft JhengHei" pitchFamily="34" charset="-120"/>
               </a:rPr>
@@ -14011,9 +14071,9 @@
                 <a:solidFill>
                   <a:srgbClr val="1F1E1D"/>
                 </a:solidFill>
-                <a:latin typeface="STHeiti" pitchFamily="34" charset="0"/>
-                <a:ea typeface="Arial" pitchFamily="34" charset="-122"/>
-                <a:cs typeface="Arial" pitchFamily="34" charset="-120"/>
+                <a:latin typeface="Arial" pitchFamily="34" charset="0"/>
+                <a:ea typeface="Microsoft JhengHei" pitchFamily="34" charset="-122"/>
+                <a:cs typeface="Microsoft JhengHei" pitchFamily="34" charset="-120"/>
               </a:rPr>
               <a:t>Controlled mobile</a:t>
             </a:r>
@@ -14050,7 +14110,7 @@
                 <a:solidFill>
                   <a:srgbClr val="68645C"/>
                 </a:solidFill>
-                <a:latin typeface="STHeiti" pitchFamily="34" charset="0"/>
+                <a:latin typeface="Arial" pitchFamily="34" charset="0"/>
                 <a:ea typeface="Microsoft JhengHei" pitchFamily="34" charset="-122"/>
                 <a:cs typeface="Microsoft JhengHei" pitchFamily="34" charset="-120"/>
               </a:rPr>
@@ -14139,9 +14199,9 @@
                 <a:solidFill>
                   <a:srgbClr val="1F1E1D"/>
                 </a:solidFill>
-                <a:latin typeface="STHeiti" pitchFamily="34" charset="0"/>
-                <a:ea typeface="Arial" pitchFamily="34" charset="-122"/>
-                <a:cs typeface="Arial" pitchFamily="34" charset="-120"/>
+                <a:latin typeface="Arial" pitchFamily="34" charset="0"/>
+                <a:ea typeface="Microsoft JhengHei" pitchFamily="34" charset="-122"/>
+                <a:cs typeface="Microsoft JhengHei" pitchFamily="34" charset="-120"/>
               </a:rPr>
               <a:t>Hosted remote</a:t>
             </a:r>
@@ -14178,7 +14238,7 @@
                 <a:solidFill>
                   <a:srgbClr val="68645C"/>
                 </a:solidFill>
-                <a:latin typeface="STHeiti" pitchFamily="34" charset="0"/>
+                <a:latin typeface="Arial" pitchFamily="34" charset="0"/>
                 <a:ea typeface="Microsoft JhengHei" pitchFamily="34" charset="-122"/>
                 <a:cs typeface="Microsoft JhengHei" pitchFamily="34" charset="-120"/>
               </a:rPr>
@@ -14217,9 +14277,9 @@
                 <a:solidFill>
                   <a:srgbClr val="9DA89F"/>
                 </a:solidFill>
-                <a:latin typeface="STHeiti" pitchFamily="34" charset="0"/>
-                <a:ea typeface="Arial" pitchFamily="34" charset="-122"/>
-                <a:cs typeface="Arial" pitchFamily="34" charset="-120"/>
+                <a:latin typeface="Arial" pitchFamily="34" charset="0"/>
+                <a:ea typeface="Microsoft JhengHei" pitchFamily="34" charset="-122"/>
+                <a:cs typeface="Microsoft JhengHei" pitchFamily="34" charset="-120"/>
               </a:rPr>
               <a:t>21</a:t>
             </a:r>
@@ -14313,9 +14373,9 @@
                 <a:solidFill>
                   <a:srgbClr val="68645C"/>
                 </a:solidFill>
-                <a:latin typeface="STHeiti" pitchFamily="34" charset="0"/>
-                <a:ea typeface="Arial" pitchFamily="34" charset="-122"/>
-                <a:cs typeface="Arial" pitchFamily="34" charset="-120"/>
+                <a:latin typeface="Arial" pitchFamily="34" charset="0"/>
+                <a:ea typeface="Microsoft JhengHei" pitchFamily="34" charset="-122"/>
+                <a:cs typeface="Microsoft JhengHei" pitchFamily="34" charset="-120"/>
               </a:rPr>
               <a:t>PART 3 — 應用情境</a:t>
             </a:r>
@@ -14349,7 +14409,9 @@
                 <a:solidFill>
                   <a:srgbClr val="1F1E1D"/>
                 </a:solidFill>
-                <a:latin typeface="STHeiti"/>
+                <a:latin typeface="Arial"/>
+                <a:ea typeface="Microsoft JhengHei"/>
+                <a:cs typeface="Microsoft JhengHei"/>
               </a:rPr>
               <a:t>六種使用者真的會問的問題</a:t>
             </a:r>
@@ -14388,7 +14450,7 @@
                 <a:solidFill>
                   <a:srgbClr val="1F1E1D"/>
                 </a:solidFill>
-                <a:latin typeface="STHeiti" pitchFamily="34" charset="0"/>
+                <a:latin typeface="Arial" pitchFamily="34" charset="0"/>
                 <a:ea typeface="Microsoft JhengHei" pitchFamily="34" charset="-122"/>
                 <a:cs typeface="Microsoft JhengHei" pitchFamily="34" charset="-120"/>
               </a:rPr>
@@ -14477,9 +14539,9 @@
                 <a:solidFill>
                   <a:srgbClr val="1F1E1D"/>
                 </a:solidFill>
-                <a:latin typeface="STHeiti" pitchFamily="34" charset="0"/>
-                <a:ea typeface="Arial" pitchFamily="34" charset="-122"/>
-                <a:cs typeface="Arial" pitchFamily="34" charset="-120"/>
+                <a:latin typeface="Arial" pitchFamily="34" charset="0"/>
+                <a:ea typeface="Microsoft JhengHei" pitchFamily="34" charset="-122"/>
+                <a:cs typeface="Microsoft JhengHei" pitchFamily="34" charset="-120"/>
               </a:rPr>
               <a:t>A</a:t>
             </a:r>
@@ -14519,7 +14581,7 @@
                 <a:solidFill>
                   <a:srgbClr val="1F1E1D"/>
                 </a:solidFill>
-                <a:latin typeface="STHeiti" pitchFamily="34" charset="0"/>
+                <a:latin typeface="Arial" pitchFamily="34" charset="0"/>
                 <a:ea typeface="Microsoft JhengHei" pitchFamily="34" charset="-122"/>
                 <a:cs typeface="Microsoft JhengHei" pitchFamily="34" charset="-120"/>
               </a:rPr>
@@ -14608,9 +14670,9 @@
                 <a:solidFill>
                   <a:srgbClr val="1F1E1D"/>
                 </a:solidFill>
-                <a:latin typeface="STHeiti" pitchFamily="34" charset="0"/>
-                <a:ea typeface="Arial" pitchFamily="34" charset="-122"/>
-                <a:cs typeface="Arial" pitchFamily="34" charset="-120"/>
+                <a:latin typeface="Arial" pitchFamily="34" charset="0"/>
+                <a:ea typeface="Microsoft JhengHei" pitchFamily="34" charset="-122"/>
+                <a:cs typeface="Microsoft JhengHei" pitchFamily="34" charset="-120"/>
               </a:rPr>
               <a:t>B</a:t>
             </a:r>
@@ -14650,7 +14712,7 @@
                 <a:solidFill>
                   <a:srgbClr val="1F1E1D"/>
                 </a:solidFill>
-                <a:latin typeface="STHeiti" pitchFamily="34" charset="0"/>
+                <a:latin typeface="Arial" pitchFamily="34" charset="0"/>
                 <a:ea typeface="Microsoft JhengHei" pitchFamily="34" charset="-122"/>
                 <a:cs typeface="Microsoft JhengHei" pitchFamily="34" charset="-120"/>
               </a:rPr>
@@ -14739,9 +14801,9 @@
                 <a:solidFill>
                   <a:srgbClr val="1F1E1D"/>
                 </a:solidFill>
-                <a:latin typeface="STHeiti" pitchFamily="34" charset="0"/>
-                <a:ea typeface="Arial" pitchFamily="34" charset="-122"/>
-                <a:cs typeface="Arial" pitchFamily="34" charset="-120"/>
+                <a:latin typeface="Arial" pitchFamily="34" charset="0"/>
+                <a:ea typeface="Microsoft JhengHei" pitchFamily="34" charset="-122"/>
+                <a:cs typeface="Microsoft JhengHei" pitchFamily="34" charset="-120"/>
               </a:rPr>
               <a:t>C</a:t>
             </a:r>
@@ -14781,7 +14843,7 @@
                 <a:solidFill>
                   <a:srgbClr val="1F1E1D"/>
                 </a:solidFill>
-                <a:latin typeface="STHeiti" pitchFamily="34" charset="0"/>
+                <a:latin typeface="Arial" pitchFamily="34" charset="0"/>
                 <a:ea typeface="Microsoft JhengHei" pitchFamily="34" charset="-122"/>
                 <a:cs typeface="Microsoft JhengHei" pitchFamily="34" charset="-120"/>
               </a:rPr>
@@ -14870,9 +14932,9 @@
                 <a:solidFill>
                   <a:srgbClr val="1F1E1D"/>
                 </a:solidFill>
-                <a:latin typeface="STHeiti" pitchFamily="34" charset="0"/>
-                <a:ea typeface="Arial" pitchFamily="34" charset="-122"/>
-                <a:cs typeface="Arial" pitchFamily="34" charset="-120"/>
+                <a:latin typeface="Arial" pitchFamily="34" charset="0"/>
+                <a:ea typeface="Microsoft JhengHei" pitchFamily="34" charset="-122"/>
+                <a:cs typeface="Microsoft JhengHei" pitchFamily="34" charset="-120"/>
               </a:rPr>
               <a:t>D</a:t>
             </a:r>
@@ -14912,7 +14974,7 @@
                 <a:solidFill>
                   <a:srgbClr val="1F1E1D"/>
                 </a:solidFill>
-                <a:latin typeface="STHeiti" pitchFamily="34" charset="0"/>
+                <a:latin typeface="Arial" pitchFamily="34" charset="0"/>
                 <a:ea typeface="Microsoft JhengHei" pitchFamily="34" charset="-122"/>
                 <a:cs typeface="Microsoft JhengHei" pitchFamily="34" charset="-120"/>
               </a:rPr>
@@ -15001,9 +15063,9 @@
                 <a:solidFill>
                   <a:srgbClr val="1F1E1D"/>
                 </a:solidFill>
-                <a:latin typeface="STHeiti" pitchFamily="34" charset="0"/>
-                <a:ea typeface="Arial" pitchFamily="34" charset="-122"/>
-                <a:cs typeface="Arial" pitchFamily="34" charset="-120"/>
+                <a:latin typeface="Arial" pitchFamily="34" charset="0"/>
+                <a:ea typeface="Microsoft JhengHei" pitchFamily="34" charset="-122"/>
+                <a:cs typeface="Microsoft JhengHei" pitchFamily="34" charset="-120"/>
               </a:rPr>
               <a:t>E</a:t>
             </a:r>
@@ -15043,7 +15105,7 @@
                 <a:solidFill>
                   <a:srgbClr val="1F1E1D"/>
                 </a:solidFill>
-                <a:latin typeface="STHeiti" pitchFamily="34" charset="0"/>
+                <a:latin typeface="Arial" pitchFamily="34" charset="0"/>
                 <a:ea typeface="Microsoft JhengHei" pitchFamily="34" charset="-122"/>
                 <a:cs typeface="Microsoft JhengHei" pitchFamily="34" charset="-120"/>
               </a:rPr>
@@ -15132,9 +15194,9 @@
                 <a:solidFill>
                   <a:srgbClr val="1F1E1D"/>
                 </a:solidFill>
-                <a:latin typeface="STHeiti" pitchFamily="34" charset="0"/>
-                <a:ea typeface="Arial" pitchFamily="34" charset="-122"/>
-                <a:cs typeface="Arial" pitchFamily="34" charset="-120"/>
+                <a:latin typeface="Arial" pitchFamily="34" charset="0"/>
+                <a:ea typeface="Microsoft JhengHei" pitchFamily="34" charset="-122"/>
+                <a:cs typeface="Microsoft JhengHei" pitchFamily="34" charset="-120"/>
               </a:rPr>
               <a:t>F</a:t>
             </a:r>
@@ -15174,7 +15236,7 @@
                 <a:solidFill>
                   <a:srgbClr val="1F1E1D"/>
                 </a:solidFill>
-                <a:latin typeface="STHeiti" pitchFamily="34" charset="0"/>
+                <a:latin typeface="Arial" pitchFamily="34" charset="0"/>
                 <a:ea typeface="Microsoft JhengHei" pitchFamily="34" charset="-122"/>
                 <a:cs typeface="Microsoft JhengHei" pitchFamily="34" charset="-120"/>
               </a:rPr>
@@ -15213,9 +15275,9 @@
                 <a:solidFill>
                   <a:srgbClr val="9DA89F"/>
                 </a:solidFill>
-                <a:latin typeface="STHeiti" pitchFamily="34" charset="0"/>
-                <a:ea typeface="Arial" pitchFamily="34" charset="-122"/>
-                <a:cs typeface="Arial" pitchFamily="34" charset="-120"/>
+                <a:latin typeface="Arial" pitchFamily="34" charset="0"/>
+                <a:ea typeface="Microsoft JhengHei" pitchFamily="34" charset="-122"/>
+                <a:cs typeface="Microsoft JhengHei" pitchFamily="34" charset="-120"/>
               </a:rPr>
               <a:t>22</a:t>
             </a:r>
@@ -15309,9 +15371,9 @@
                 <a:solidFill>
                   <a:srgbClr val="68645C"/>
                 </a:solidFill>
-                <a:latin typeface="STHeiti" pitchFamily="34" charset="0"/>
-                <a:ea typeface="Arial" pitchFamily="34" charset="-122"/>
-                <a:cs typeface="Arial" pitchFamily="34" charset="-120"/>
+                <a:latin typeface="Arial" pitchFamily="34" charset="0"/>
+                <a:ea typeface="Microsoft JhengHei" pitchFamily="34" charset="-122"/>
+                <a:cs typeface="Microsoft JhengHei" pitchFamily="34" charset="-120"/>
               </a:rPr>
               <a:t>情境 A</a:t>
             </a:r>
@@ -15374,7 +15436,7 @@
                 <a:solidFill>
                   <a:srgbClr val="1F1E1D"/>
                 </a:solidFill>
-                <a:latin typeface="STHeiti" pitchFamily="34" charset="0"/>
+                <a:latin typeface="Arial" pitchFamily="34" charset="0"/>
                 <a:ea typeface="Microsoft JhengHei" pitchFamily="34" charset="-122"/>
                 <a:cs typeface="Microsoft JhengHei" pitchFamily="34" charset="-120"/>
               </a:rPr>
@@ -15413,7 +15475,7 @@
                 <a:solidFill>
                   <a:srgbClr val="68645C"/>
                 </a:solidFill>
-                <a:latin typeface="STHeiti" pitchFamily="34" charset="0"/>
+                <a:latin typeface="Arial" pitchFamily="34" charset="0"/>
                 <a:ea typeface="Microsoft JhengHei" pitchFamily="34" charset="-122"/>
                 <a:cs typeface="Microsoft JhengHei" pitchFamily="34" charset="-120"/>
               </a:rPr>
@@ -15502,7 +15564,7 @@
                 <a:solidFill>
                   <a:srgbClr val="1F1E1D"/>
                 </a:solidFill>
-                <a:latin typeface="STHeiti" pitchFamily="34" charset="0"/>
+                <a:latin typeface="Arial" pitchFamily="34" charset="0"/>
                 <a:ea typeface="Microsoft JhengHei" pitchFamily="34" charset="-122"/>
                 <a:cs typeface="Microsoft JhengHei" pitchFamily="34" charset="-120"/>
               </a:rPr>
@@ -15591,7 +15653,7 @@
                 <a:solidFill>
                   <a:srgbClr val="1F1E1D"/>
                 </a:solidFill>
-                <a:latin typeface="STHeiti" pitchFamily="34" charset="0"/>
+                <a:latin typeface="Arial" pitchFamily="34" charset="0"/>
                 <a:ea typeface="Microsoft JhengHei" pitchFamily="34" charset="-122"/>
                 <a:cs typeface="Microsoft JhengHei" pitchFamily="34" charset="-120"/>
               </a:rPr>
@@ -15680,7 +15742,7 @@
                 <a:solidFill>
                   <a:srgbClr val="1F1E1D"/>
                 </a:solidFill>
-                <a:latin typeface="STHeiti" pitchFamily="34" charset="0"/>
+                <a:latin typeface="Arial" pitchFamily="34" charset="0"/>
                 <a:ea typeface="Microsoft JhengHei" pitchFamily="34" charset="-122"/>
                 <a:cs typeface="Microsoft JhengHei" pitchFamily="34" charset="-120"/>
               </a:rPr>
@@ -15719,7 +15781,7 @@
                 <a:solidFill>
                   <a:srgbClr val="157554"/>
                 </a:solidFill>
-                <a:latin typeface="STHeiti" pitchFamily="34" charset="0"/>
+                <a:latin typeface="Arial" pitchFamily="34" charset="0"/>
                 <a:ea typeface="Microsoft JhengHei" pitchFamily="34" charset="-122"/>
                 <a:cs typeface="Microsoft JhengHei" pitchFamily="34" charset="-120"/>
               </a:rPr>
@@ -15784,7 +15846,7 @@
                 <a:solidFill>
                   <a:srgbClr val="C9D0C8"/>
                 </a:solidFill>
-                <a:latin typeface="STHeiti" pitchFamily="34" charset="0"/>
+                <a:latin typeface="Arial" pitchFamily="34" charset="0"/>
                 <a:ea typeface="Microsoft JhengHei" pitchFamily="34" charset="-122"/>
                 <a:cs typeface="Microsoft JhengHei" pitchFamily="34" charset="-120"/>
               </a:rPr>
@@ -15823,7 +15885,7 @@
                 <a:solidFill>
                   <a:srgbClr val="C9D0C8"/>
                 </a:solidFill>
-                <a:latin typeface="STHeiti" pitchFamily="34" charset="0"/>
+                <a:latin typeface="Arial" pitchFamily="34" charset="0"/>
                 <a:ea typeface="Microsoft JhengHei" pitchFamily="34" charset="-122"/>
                 <a:cs typeface="Microsoft JhengHei" pitchFamily="34" charset="-120"/>
               </a:rPr>
@@ -15862,7 +15924,7 @@
                 <a:solidFill>
                   <a:srgbClr val="C9D0C8"/>
                 </a:solidFill>
-                <a:latin typeface="STHeiti" pitchFamily="34" charset="0"/>
+                <a:latin typeface="Arial" pitchFamily="34" charset="0"/>
                 <a:ea typeface="Microsoft JhengHei" pitchFamily="34" charset="-122"/>
                 <a:cs typeface="Microsoft JhengHei" pitchFamily="34" charset="-120"/>
               </a:rPr>
@@ -15901,9 +15963,9 @@
                 <a:solidFill>
                   <a:srgbClr val="9DA89F"/>
                 </a:solidFill>
-                <a:latin typeface="STHeiti" pitchFamily="34" charset="0"/>
-                <a:ea typeface="Arial" pitchFamily="34" charset="-122"/>
-                <a:cs typeface="Arial" pitchFamily="34" charset="-120"/>
+                <a:latin typeface="Arial" pitchFamily="34" charset="0"/>
+                <a:ea typeface="Microsoft JhengHei" pitchFamily="34" charset="-122"/>
+                <a:cs typeface="Microsoft JhengHei" pitchFamily="34" charset="-120"/>
               </a:rPr>
               <a:t>23</a:t>
             </a:r>
@@ -15997,9 +16059,9 @@
                 <a:solidFill>
                   <a:srgbClr val="68645C"/>
                 </a:solidFill>
-                <a:latin typeface="STHeiti" pitchFamily="34" charset="0"/>
-                <a:ea typeface="Arial" pitchFamily="34" charset="-122"/>
-                <a:cs typeface="Arial" pitchFamily="34" charset="-120"/>
+                <a:latin typeface="Arial" pitchFamily="34" charset="0"/>
+                <a:ea typeface="Microsoft JhengHei" pitchFamily="34" charset="-122"/>
+                <a:cs typeface="Microsoft JhengHei" pitchFamily="34" charset="-120"/>
               </a:rPr>
               <a:t>情境 B</a:t>
             </a:r>
@@ -16062,7 +16124,7 @@
                 <a:solidFill>
                   <a:srgbClr val="1F1E1D"/>
                 </a:solidFill>
-                <a:latin typeface="STHeiti" pitchFamily="34" charset="0"/>
+                <a:latin typeface="Arial" pitchFamily="34" charset="0"/>
                 <a:ea typeface="Microsoft JhengHei" pitchFamily="34" charset="-122"/>
                 <a:cs typeface="Microsoft JhengHei" pitchFamily="34" charset="-120"/>
               </a:rPr>
@@ -16101,7 +16163,7 @@
                 <a:solidFill>
                   <a:srgbClr val="68645C"/>
                 </a:solidFill>
-                <a:latin typeface="STHeiti" pitchFamily="34" charset="0"/>
+                <a:latin typeface="Arial" pitchFamily="34" charset="0"/>
                 <a:ea typeface="Microsoft JhengHei" pitchFamily="34" charset="-122"/>
                 <a:cs typeface="Microsoft JhengHei" pitchFamily="34" charset="-120"/>
               </a:rPr>
@@ -16190,7 +16252,7 @@
                 <a:solidFill>
                   <a:srgbClr val="1F1E1D"/>
                 </a:solidFill>
-                <a:latin typeface="STHeiti" pitchFamily="34" charset="0"/>
+                <a:latin typeface="Arial" pitchFamily="34" charset="0"/>
                 <a:ea typeface="Microsoft JhengHei" pitchFamily="34" charset="-122"/>
                 <a:cs typeface="Microsoft JhengHei" pitchFamily="34" charset="-120"/>
               </a:rPr>
@@ -16279,7 +16341,7 @@
                 <a:solidFill>
                   <a:srgbClr val="1F1E1D"/>
                 </a:solidFill>
-                <a:latin typeface="STHeiti" pitchFamily="34" charset="0"/>
+                <a:latin typeface="Arial" pitchFamily="34" charset="0"/>
                 <a:ea typeface="Microsoft JhengHei" pitchFamily="34" charset="-122"/>
                 <a:cs typeface="Microsoft JhengHei" pitchFamily="34" charset="-120"/>
               </a:rPr>
@@ -16368,7 +16430,7 @@
                 <a:solidFill>
                   <a:srgbClr val="1F1E1D"/>
                 </a:solidFill>
-                <a:latin typeface="STHeiti" pitchFamily="34" charset="0"/>
+                <a:latin typeface="Arial" pitchFamily="34" charset="0"/>
                 <a:ea typeface="Microsoft JhengHei" pitchFamily="34" charset="-122"/>
                 <a:cs typeface="Microsoft JhengHei" pitchFamily="34" charset="-120"/>
               </a:rPr>
@@ -16407,7 +16469,7 @@
                 <a:solidFill>
                   <a:srgbClr val="157554"/>
                 </a:solidFill>
-                <a:latin typeface="STHeiti" pitchFamily="34" charset="0"/>
+                <a:latin typeface="Arial" pitchFamily="34" charset="0"/>
                 <a:ea typeface="Microsoft JhengHei" pitchFamily="34" charset="-122"/>
                 <a:cs typeface="Microsoft JhengHei" pitchFamily="34" charset="-120"/>
               </a:rPr>
@@ -16472,7 +16534,7 @@
                 <a:solidFill>
                   <a:srgbClr val="C9D0C8"/>
                 </a:solidFill>
-                <a:latin typeface="STHeiti" pitchFamily="34" charset="0"/>
+                <a:latin typeface="Arial" pitchFamily="34" charset="0"/>
                 <a:ea typeface="Microsoft JhengHei" pitchFamily="34" charset="-122"/>
                 <a:cs typeface="Microsoft JhengHei" pitchFamily="34" charset="-120"/>
               </a:rPr>
@@ -16511,7 +16573,7 @@
                 <a:solidFill>
                   <a:srgbClr val="C9D0C8"/>
                 </a:solidFill>
-                <a:latin typeface="STHeiti" pitchFamily="34" charset="0"/>
+                <a:latin typeface="Arial" pitchFamily="34" charset="0"/>
                 <a:ea typeface="Microsoft JhengHei" pitchFamily="34" charset="-122"/>
                 <a:cs typeface="Microsoft JhengHei" pitchFamily="34" charset="-120"/>
               </a:rPr>
@@ -16550,7 +16612,7 @@
                 <a:solidFill>
                   <a:srgbClr val="C9D0C8"/>
                 </a:solidFill>
-                <a:latin typeface="STHeiti" pitchFamily="34" charset="0"/>
+                <a:latin typeface="Arial" pitchFamily="34" charset="0"/>
                 <a:ea typeface="Microsoft JhengHei" pitchFamily="34" charset="-122"/>
                 <a:cs typeface="Microsoft JhengHei" pitchFamily="34" charset="-120"/>
               </a:rPr>
@@ -16589,9 +16651,9 @@
                 <a:solidFill>
                   <a:srgbClr val="9DA89F"/>
                 </a:solidFill>
-                <a:latin typeface="STHeiti" pitchFamily="34" charset="0"/>
-                <a:ea typeface="Arial" pitchFamily="34" charset="-122"/>
-                <a:cs typeface="Arial" pitchFamily="34" charset="-120"/>
+                <a:latin typeface="Arial" pitchFamily="34" charset="0"/>
+                <a:ea typeface="Microsoft JhengHei" pitchFamily="34" charset="-122"/>
+                <a:cs typeface="Microsoft JhengHei" pitchFamily="34" charset="-120"/>
               </a:rPr>
               <a:t>24</a:t>
             </a:r>
@@ -16685,9 +16747,9 @@
                 <a:solidFill>
                   <a:srgbClr val="68645C"/>
                 </a:solidFill>
-                <a:latin typeface="STHeiti" pitchFamily="34" charset="0"/>
-                <a:ea typeface="Arial" pitchFamily="34" charset="-122"/>
-                <a:cs typeface="Arial" pitchFamily="34" charset="-120"/>
+                <a:latin typeface="Arial" pitchFamily="34" charset="0"/>
+                <a:ea typeface="Microsoft JhengHei" pitchFamily="34" charset="-122"/>
+                <a:cs typeface="Microsoft JhengHei" pitchFamily="34" charset="-120"/>
               </a:rPr>
               <a:t>情境 C</a:t>
             </a:r>
@@ -16750,7 +16812,7 @@
                 <a:solidFill>
                   <a:srgbClr val="1F1E1D"/>
                 </a:solidFill>
-                <a:latin typeface="STHeiti" pitchFamily="34" charset="0"/>
+                <a:latin typeface="Arial" pitchFamily="34" charset="0"/>
                 <a:ea typeface="Microsoft JhengHei" pitchFamily="34" charset="-122"/>
                 <a:cs typeface="Microsoft JhengHei" pitchFamily="34" charset="-120"/>
               </a:rPr>
@@ -16789,7 +16851,7 @@
                 <a:solidFill>
                   <a:srgbClr val="68645C"/>
                 </a:solidFill>
-                <a:latin typeface="STHeiti" pitchFamily="34" charset="0"/>
+                <a:latin typeface="Arial" pitchFamily="34" charset="0"/>
                 <a:ea typeface="Microsoft JhengHei" pitchFamily="34" charset="-122"/>
                 <a:cs typeface="Microsoft JhengHei" pitchFamily="34" charset="-120"/>
               </a:rPr>
@@ -16878,7 +16940,7 @@
                 <a:solidFill>
                   <a:srgbClr val="1F1E1D"/>
                 </a:solidFill>
-                <a:latin typeface="STHeiti" pitchFamily="34" charset="0"/>
+                <a:latin typeface="Arial" pitchFamily="34" charset="0"/>
                 <a:ea typeface="Microsoft JhengHei" pitchFamily="34" charset="-122"/>
                 <a:cs typeface="Microsoft JhengHei" pitchFamily="34" charset="-120"/>
               </a:rPr>
@@ -16967,7 +17029,7 @@
                 <a:solidFill>
                   <a:srgbClr val="1F1E1D"/>
                 </a:solidFill>
-                <a:latin typeface="STHeiti" pitchFamily="34" charset="0"/>
+                <a:latin typeface="Arial" pitchFamily="34" charset="0"/>
                 <a:ea typeface="Microsoft JhengHei" pitchFamily="34" charset="-122"/>
                 <a:cs typeface="Microsoft JhengHei" pitchFamily="34" charset="-120"/>
               </a:rPr>
@@ -17056,7 +17118,7 @@
                 <a:solidFill>
                   <a:srgbClr val="1F1E1D"/>
                 </a:solidFill>
-                <a:latin typeface="STHeiti" pitchFamily="34" charset="0"/>
+                <a:latin typeface="Arial" pitchFamily="34" charset="0"/>
                 <a:ea typeface="Microsoft JhengHei" pitchFamily="34" charset="-122"/>
                 <a:cs typeface="Microsoft JhengHei" pitchFamily="34" charset="-120"/>
               </a:rPr>
@@ -17095,7 +17157,7 @@
                 <a:solidFill>
                   <a:srgbClr val="157554"/>
                 </a:solidFill>
-                <a:latin typeface="STHeiti" pitchFamily="34" charset="0"/>
+                <a:latin typeface="Arial" pitchFamily="34" charset="0"/>
                 <a:ea typeface="Microsoft JhengHei" pitchFamily="34" charset="-122"/>
                 <a:cs typeface="Microsoft JhengHei" pitchFamily="34" charset="-120"/>
               </a:rPr>
@@ -17160,7 +17222,7 @@
                 <a:solidFill>
                   <a:srgbClr val="C9D0C8"/>
                 </a:solidFill>
-                <a:latin typeface="STHeiti" pitchFamily="34" charset="0"/>
+                <a:latin typeface="Arial" pitchFamily="34" charset="0"/>
                 <a:ea typeface="Microsoft JhengHei" pitchFamily="34" charset="-122"/>
                 <a:cs typeface="Microsoft JhengHei" pitchFamily="34" charset="-120"/>
               </a:rPr>
@@ -17199,7 +17261,7 @@
                 <a:solidFill>
                   <a:srgbClr val="C9D0C8"/>
                 </a:solidFill>
-                <a:latin typeface="STHeiti" pitchFamily="34" charset="0"/>
+                <a:latin typeface="Arial" pitchFamily="34" charset="0"/>
                 <a:ea typeface="Microsoft JhengHei" pitchFamily="34" charset="-122"/>
                 <a:cs typeface="Microsoft JhengHei" pitchFamily="34" charset="-120"/>
               </a:rPr>
@@ -17238,9 +17300,9 @@
                 <a:solidFill>
                   <a:srgbClr val="9DA89F"/>
                 </a:solidFill>
-                <a:latin typeface="STHeiti" pitchFamily="34" charset="0"/>
-                <a:ea typeface="Arial" pitchFamily="34" charset="-122"/>
-                <a:cs typeface="Arial" pitchFamily="34" charset="-120"/>
+                <a:latin typeface="Arial" pitchFamily="34" charset="0"/>
+                <a:ea typeface="Microsoft JhengHei" pitchFamily="34" charset="-122"/>
+                <a:cs typeface="Microsoft JhengHei" pitchFamily="34" charset="-120"/>
               </a:rPr>
               <a:t>25</a:t>
             </a:r>
@@ -17334,9 +17396,9 @@
                 <a:solidFill>
                   <a:srgbClr val="68645C"/>
                 </a:solidFill>
-                <a:latin typeface="STHeiti" pitchFamily="34" charset="0"/>
-                <a:ea typeface="Arial" pitchFamily="34" charset="-122"/>
-                <a:cs typeface="Arial" pitchFamily="34" charset="-120"/>
+                <a:latin typeface="Arial" pitchFamily="34" charset="0"/>
+                <a:ea typeface="Microsoft JhengHei" pitchFamily="34" charset="-122"/>
+                <a:cs typeface="Microsoft JhengHei" pitchFamily="34" charset="-120"/>
               </a:rPr>
               <a:t>情境 D</a:t>
             </a:r>
@@ -17399,7 +17461,7 @@
                 <a:solidFill>
                   <a:srgbClr val="1F1E1D"/>
                 </a:solidFill>
-                <a:latin typeface="STHeiti" pitchFamily="34" charset="0"/>
+                <a:latin typeface="Arial" pitchFamily="34" charset="0"/>
                 <a:ea typeface="Microsoft JhengHei" pitchFamily="34" charset="-122"/>
                 <a:cs typeface="Microsoft JhengHei" pitchFamily="34" charset="-120"/>
               </a:rPr>
@@ -17438,7 +17500,7 @@
                 <a:solidFill>
                   <a:srgbClr val="68645C"/>
                 </a:solidFill>
-                <a:latin typeface="STHeiti" pitchFamily="34" charset="0"/>
+                <a:latin typeface="Arial" pitchFamily="34" charset="0"/>
                 <a:ea typeface="Microsoft JhengHei" pitchFamily="34" charset="-122"/>
                 <a:cs typeface="Microsoft JhengHei" pitchFamily="34" charset="-120"/>
               </a:rPr>
@@ -17527,7 +17589,7 @@
                 <a:solidFill>
                   <a:srgbClr val="1F1E1D"/>
                 </a:solidFill>
-                <a:latin typeface="STHeiti" pitchFamily="34" charset="0"/>
+                <a:latin typeface="Arial" pitchFamily="34" charset="0"/>
                 <a:ea typeface="Microsoft JhengHei" pitchFamily="34" charset="-122"/>
                 <a:cs typeface="Microsoft JhengHei" pitchFamily="34" charset="-120"/>
               </a:rPr>
@@ -17616,7 +17678,7 @@
                 <a:solidFill>
                   <a:srgbClr val="1F1E1D"/>
                 </a:solidFill>
-                <a:latin typeface="STHeiti" pitchFamily="34" charset="0"/>
+                <a:latin typeface="Arial" pitchFamily="34" charset="0"/>
                 <a:ea typeface="Microsoft JhengHei" pitchFamily="34" charset="-122"/>
                 <a:cs typeface="Microsoft JhengHei" pitchFamily="34" charset="-120"/>
               </a:rPr>
@@ -17705,7 +17767,7 @@
                 <a:solidFill>
                   <a:srgbClr val="1F1E1D"/>
                 </a:solidFill>
-                <a:latin typeface="STHeiti" pitchFamily="34" charset="0"/>
+                <a:latin typeface="Arial" pitchFamily="34" charset="0"/>
                 <a:ea typeface="Microsoft JhengHei" pitchFamily="34" charset="-122"/>
                 <a:cs typeface="Microsoft JhengHei" pitchFamily="34" charset="-120"/>
               </a:rPr>
@@ -17744,7 +17806,7 @@
                 <a:solidFill>
                   <a:srgbClr val="157554"/>
                 </a:solidFill>
-                <a:latin typeface="STHeiti" pitchFamily="34" charset="0"/>
+                <a:latin typeface="Arial" pitchFamily="34" charset="0"/>
                 <a:ea typeface="Microsoft JhengHei" pitchFamily="34" charset="-122"/>
                 <a:cs typeface="Microsoft JhengHei" pitchFamily="34" charset="-120"/>
               </a:rPr>
@@ -17809,7 +17871,7 @@
                 <a:solidFill>
                   <a:srgbClr val="C9D0C8"/>
                 </a:solidFill>
-                <a:latin typeface="STHeiti" pitchFamily="34" charset="0"/>
+                <a:latin typeface="Arial" pitchFamily="34" charset="0"/>
                 <a:ea typeface="Microsoft JhengHei" pitchFamily="34" charset="-122"/>
                 <a:cs typeface="Microsoft JhengHei" pitchFamily="34" charset="-120"/>
               </a:rPr>
@@ -17848,7 +17910,7 @@
                 <a:solidFill>
                   <a:srgbClr val="C9D0C8"/>
                 </a:solidFill>
-                <a:latin typeface="STHeiti" pitchFamily="34" charset="0"/>
+                <a:latin typeface="Arial" pitchFamily="34" charset="0"/>
                 <a:ea typeface="Microsoft JhengHei" pitchFamily="34" charset="-122"/>
                 <a:cs typeface="Microsoft JhengHei" pitchFamily="34" charset="-120"/>
               </a:rPr>
@@ -17887,7 +17949,7 @@
                 <a:solidFill>
                   <a:srgbClr val="C9D0C8"/>
                 </a:solidFill>
-                <a:latin typeface="STHeiti" pitchFamily="34" charset="0"/>
+                <a:latin typeface="Arial" pitchFamily="34" charset="0"/>
                 <a:ea typeface="Microsoft JhengHei" pitchFamily="34" charset="-122"/>
                 <a:cs typeface="Microsoft JhengHei" pitchFamily="34" charset="-120"/>
               </a:rPr>
@@ -17926,9 +17988,9 @@
                 <a:solidFill>
                   <a:srgbClr val="9DA89F"/>
                 </a:solidFill>
-                <a:latin typeface="STHeiti" pitchFamily="34" charset="0"/>
-                <a:ea typeface="Arial" pitchFamily="34" charset="-122"/>
-                <a:cs typeface="Arial" pitchFamily="34" charset="-120"/>
+                <a:latin typeface="Arial" pitchFamily="34" charset="0"/>
+                <a:ea typeface="Microsoft JhengHei" pitchFamily="34" charset="-122"/>
+                <a:cs typeface="Microsoft JhengHei" pitchFamily="34" charset="-120"/>
               </a:rPr>
               <a:t>26</a:t>
             </a:r>
@@ -18022,9 +18084,9 @@
                 <a:solidFill>
                   <a:srgbClr val="68645C"/>
                 </a:solidFill>
-                <a:latin typeface="STHeiti" pitchFamily="34" charset="0"/>
-                <a:ea typeface="Arial" pitchFamily="34" charset="-122"/>
-                <a:cs typeface="Arial" pitchFamily="34" charset="-120"/>
+                <a:latin typeface="Arial" pitchFamily="34" charset="0"/>
+                <a:ea typeface="Microsoft JhengHei" pitchFamily="34" charset="-122"/>
+                <a:cs typeface="Microsoft JhengHei" pitchFamily="34" charset="-120"/>
               </a:rPr>
               <a:t>情境 E</a:t>
             </a:r>
@@ -18087,7 +18149,7 @@
                 <a:solidFill>
                   <a:srgbClr val="1F1E1D"/>
                 </a:solidFill>
-                <a:latin typeface="STHeiti" pitchFamily="34" charset="0"/>
+                <a:latin typeface="Arial" pitchFamily="34" charset="0"/>
                 <a:ea typeface="Microsoft JhengHei" pitchFamily="34" charset="-122"/>
                 <a:cs typeface="Microsoft JhengHei" pitchFamily="34" charset="-120"/>
               </a:rPr>
@@ -18126,7 +18188,7 @@
                 <a:solidFill>
                   <a:srgbClr val="68645C"/>
                 </a:solidFill>
-                <a:latin typeface="STHeiti" pitchFamily="34" charset="0"/>
+                <a:latin typeface="Arial" pitchFamily="34" charset="0"/>
                 <a:ea typeface="Microsoft JhengHei" pitchFamily="34" charset="-122"/>
                 <a:cs typeface="Microsoft JhengHei" pitchFamily="34" charset="-120"/>
               </a:rPr>
@@ -18215,7 +18277,7 @@
                 <a:solidFill>
                   <a:srgbClr val="1F1E1D"/>
                 </a:solidFill>
-                <a:latin typeface="STHeiti" pitchFamily="34" charset="0"/>
+                <a:latin typeface="Arial" pitchFamily="34" charset="0"/>
                 <a:ea typeface="Microsoft JhengHei" pitchFamily="34" charset="-122"/>
                 <a:cs typeface="Microsoft JhengHei" pitchFamily="34" charset="-120"/>
               </a:rPr>
@@ -18304,7 +18366,7 @@
                 <a:solidFill>
                   <a:srgbClr val="1F1E1D"/>
                 </a:solidFill>
-                <a:latin typeface="STHeiti" pitchFamily="34" charset="0"/>
+                <a:latin typeface="Arial" pitchFamily="34" charset="0"/>
                 <a:ea typeface="Microsoft JhengHei" pitchFamily="34" charset="-122"/>
                 <a:cs typeface="Microsoft JhengHei" pitchFamily="34" charset="-120"/>
               </a:rPr>
@@ -18393,7 +18455,7 @@
                 <a:solidFill>
                   <a:srgbClr val="1F1E1D"/>
                 </a:solidFill>
-                <a:latin typeface="STHeiti" pitchFamily="34" charset="0"/>
+                <a:latin typeface="Arial" pitchFamily="34" charset="0"/>
                 <a:ea typeface="Microsoft JhengHei" pitchFamily="34" charset="-122"/>
                 <a:cs typeface="Microsoft JhengHei" pitchFamily="34" charset="-120"/>
               </a:rPr>
@@ -18432,7 +18494,7 @@
                 <a:solidFill>
                   <a:srgbClr val="157554"/>
                 </a:solidFill>
-                <a:latin typeface="STHeiti" pitchFamily="34" charset="0"/>
+                <a:latin typeface="Arial" pitchFamily="34" charset="0"/>
                 <a:ea typeface="Microsoft JhengHei" pitchFamily="34" charset="-122"/>
                 <a:cs typeface="Microsoft JhengHei" pitchFamily="34" charset="-120"/>
               </a:rPr>
@@ -18497,7 +18559,7 @@
                 <a:solidFill>
                   <a:srgbClr val="C9D0C8"/>
                 </a:solidFill>
-                <a:latin typeface="STHeiti" pitchFamily="34" charset="0"/>
+                <a:latin typeface="Arial" pitchFamily="34" charset="0"/>
                 <a:ea typeface="Microsoft JhengHei" pitchFamily="34" charset="-122"/>
                 <a:cs typeface="Microsoft JhengHei" pitchFamily="34" charset="-120"/>
               </a:rPr>
@@ -18536,7 +18598,7 @@
                 <a:solidFill>
                   <a:srgbClr val="C9D0C8"/>
                 </a:solidFill>
-                <a:latin typeface="STHeiti" pitchFamily="34" charset="0"/>
+                <a:latin typeface="Arial" pitchFamily="34" charset="0"/>
                 <a:ea typeface="Microsoft JhengHei" pitchFamily="34" charset="-122"/>
                 <a:cs typeface="Microsoft JhengHei" pitchFamily="34" charset="-120"/>
               </a:rPr>
@@ -18575,9 +18637,9 @@
                 <a:solidFill>
                   <a:srgbClr val="9DA89F"/>
                 </a:solidFill>
-                <a:latin typeface="STHeiti" pitchFamily="34" charset="0"/>
-                <a:ea typeface="Arial" pitchFamily="34" charset="-122"/>
-                <a:cs typeface="Arial" pitchFamily="34" charset="-120"/>
+                <a:latin typeface="Arial" pitchFamily="34" charset="0"/>
+                <a:ea typeface="Microsoft JhengHei" pitchFamily="34" charset="-122"/>
+                <a:cs typeface="Microsoft JhengHei" pitchFamily="34" charset="-120"/>
               </a:rPr>
               <a:t>27</a:t>
             </a:r>
@@ -18671,9 +18733,9 @@
                 <a:solidFill>
                   <a:srgbClr val="68645C"/>
                 </a:solidFill>
-                <a:latin typeface="STHeiti" pitchFamily="34" charset="0"/>
-                <a:ea typeface="Arial" pitchFamily="34" charset="-122"/>
-                <a:cs typeface="Arial" pitchFamily="34" charset="-120"/>
+                <a:latin typeface="Arial" pitchFamily="34" charset="0"/>
+                <a:ea typeface="Microsoft JhengHei" pitchFamily="34" charset="-122"/>
+                <a:cs typeface="Microsoft JhengHei" pitchFamily="34" charset="-120"/>
               </a:rPr>
               <a:t>情境 F</a:t>
             </a:r>
@@ -18736,7 +18798,7 @@
                 <a:solidFill>
                   <a:srgbClr val="1F1E1D"/>
                 </a:solidFill>
-                <a:latin typeface="STHeiti" pitchFamily="34" charset="0"/>
+                <a:latin typeface="Arial" pitchFamily="34" charset="0"/>
                 <a:ea typeface="Microsoft JhengHei" pitchFamily="34" charset="-122"/>
                 <a:cs typeface="Microsoft JhengHei" pitchFamily="34" charset="-120"/>
               </a:rPr>
@@ -18775,7 +18837,7 @@
                 <a:solidFill>
                   <a:srgbClr val="68645C"/>
                 </a:solidFill>
-                <a:latin typeface="STHeiti" pitchFamily="34" charset="0"/>
+                <a:latin typeface="Arial" pitchFamily="34" charset="0"/>
                 <a:ea typeface="Microsoft JhengHei" pitchFamily="34" charset="-122"/>
                 <a:cs typeface="Microsoft JhengHei" pitchFamily="34" charset="-120"/>
               </a:rPr>
@@ -18864,7 +18926,7 @@
                 <a:solidFill>
                   <a:srgbClr val="1F1E1D"/>
                 </a:solidFill>
-                <a:latin typeface="STHeiti" pitchFamily="34" charset="0"/>
+                <a:latin typeface="Arial" pitchFamily="34" charset="0"/>
                 <a:ea typeface="Microsoft JhengHei" pitchFamily="34" charset="-122"/>
                 <a:cs typeface="Microsoft JhengHei" pitchFamily="34" charset="-120"/>
               </a:rPr>
@@ -18953,7 +19015,7 @@
                 <a:solidFill>
                   <a:srgbClr val="1F1E1D"/>
                 </a:solidFill>
-                <a:latin typeface="STHeiti" pitchFamily="34" charset="0"/>
+                <a:latin typeface="Arial" pitchFamily="34" charset="0"/>
                 <a:ea typeface="Microsoft JhengHei" pitchFamily="34" charset="-122"/>
                 <a:cs typeface="Microsoft JhengHei" pitchFamily="34" charset="-120"/>
               </a:rPr>
@@ -19042,7 +19104,7 @@
                 <a:solidFill>
                   <a:srgbClr val="1F1E1D"/>
                 </a:solidFill>
-                <a:latin typeface="STHeiti" pitchFamily="34" charset="0"/>
+                <a:latin typeface="Arial" pitchFamily="34" charset="0"/>
                 <a:ea typeface="Microsoft JhengHei" pitchFamily="34" charset="-122"/>
                 <a:cs typeface="Microsoft JhengHei" pitchFamily="34" charset="-120"/>
               </a:rPr>
@@ -19081,7 +19143,7 @@
                 <a:solidFill>
                   <a:srgbClr val="157554"/>
                 </a:solidFill>
-                <a:latin typeface="STHeiti" pitchFamily="34" charset="0"/>
+                <a:latin typeface="Arial" pitchFamily="34" charset="0"/>
                 <a:ea typeface="Microsoft JhengHei" pitchFamily="34" charset="-122"/>
                 <a:cs typeface="Microsoft JhengHei" pitchFamily="34" charset="-120"/>
               </a:rPr>
@@ -19146,7 +19208,7 @@
                 <a:solidFill>
                   <a:srgbClr val="C9D0C8"/>
                 </a:solidFill>
-                <a:latin typeface="STHeiti" pitchFamily="34" charset="0"/>
+                <a:latin typeface="Arial" pitchFamily="34" charset="0"/>
                 <a:ea typeface="Microsoft JhengHei" pitchFamily="34" charset="-122"/>
                 <a:cs typeface="Microsoft JhengHei" pitchFamily="34" charset="-120"/>
               </a:rPr>
@@ -19185,7 +19247,7 @@
                 <a:solidFill>
                   <a:srgbClr val="C9D0C8"/>
                 </a:solidFill>
-                <a:latin typeface="STHeiti" pitchFamily="34" charset="0"/>
+                <a:latin typeface="Arial" pitchFamily="34" charset="0"/>
                 <a:ea typeface="Microsoft JhengHei" pitchFamily="34" charset="-122"/>
                 <a:cs typeface="Microsoft JhengHei" pitchFamily="34" charset="-120"/>
               </a:rPr>
@@ -19224,9 +19286,9 @@
                 <a:solidFill>
                   <a:srgbClr val="9DA89F"/>
                 </a:solidFill>
-                <a:latin typeface="STHeiti" pitchFamily="34" charset="0"/>
-                <a:ea typeface="Arial" pitchFamily="34" charset="-122"/>
-                <a:cs typeface="Arial" pitchFamily="34" charset="-120"/>
+                <a:latin typeface="Arial" pitchFamily="34" charset="0"/>
+                <a:ea typeface="Microsoft JhengHei" pitchFamily="34" charset="-122"/>
+                <a:cs typeface="Microsoft JhengHei" pitchFamily="34" charset="-120"/>
               </a:rPr>
               <a:t>28</a:t>
             </a:r>
@@ -19320,9 +19382,9 @@
                 <a:solidFill>
                   <a:srgbClr val="9FAEBE"/>
                 </a:solidFill>
-                <a:latin typeface="STHeiti" pitchFamily="34" charset="0"/>
-                <a:ea typeface="Arial" pitchFamily="34" charset="-122"/>
-                <a:cs typeface="Arial" pitchFamily="34" charset="-120"/>
+                <a:latin typeface="Arial" pitchFamily="34" charset="0"/>
+                <a:ea typeface="Microsoft JhengHei" pitchFamily="34" charset="-122"/>
+                <a:cs typeface="Microsoft JhengHei" pitchFamily="34" charset="-120"/>
               </a:rPr>
               <a:t>PART 3 — 應用情境</a:t>
             </a:r>
@@ -19356,7 +19418,9 @@
                 <a:solidFill>
                   <a:srgbClr val="FAF9F5"/>
                 </a:solidFill>
-                <a:latin typeface="STHeiti"/>
+                <a:latin typeface="Arial"/>
+                <a:ea typeface="Microsoft JhengHei"/>
+                <a:cs typeface="Microsoft JhengHei"/>
               </a:rPr>
               <a:t>共通點：先有 Evidence，才談 Decision</a:t>
             </a:r>
@@ -19395,7 +19459,7 @@
                 <a:solidFill>
                   <a:srgbClr val="D6DAE4"/>
                 </a:solidFill>
-                <a:latin typeface="STHeiti" pitchFamily="34" charset="0"/>
+                <a:latin typeface="Arial" pitchFamily="34" charset="0"/>
                 <a:ea typeface="Microsoft JhengHei" pitchFamily="34" charset="-122"/>
                 <a:cs typeface="Microsoft JhengHei" pitchFamily="34" charset="-120"/>
               </a:rPr>
@@ -19460,7 +19524,7 @@
                 <a:solidFill>
                   <a:srgbClr val="9FAEBE"/>
                 </a:solidFill>
-                <a:latin typeface="STHeiti" pitchFamily="34" charset="0"/>
+                <a:latin typeface="Arial" pitchFamily="34" charset="0"/>
                 <a:ea typeface="Microsoft JhengHei" pitchFamily="34" charset="-122"/>
                 <a:cs typeface="Microsoft JhengHei" pitchFamily="34" charset="-120"/>
               </a:rPr>
@@ -19502,7 +19566,7 @@
                 <a:solidFill>
                   <a:srgbClr val="FAF9F5"/>
                 </a:solidFill>
-                <a:latin typeface="STHeiti" pitchFamily="34" charset="0"/>
+                <a:latin typeface="Arial" pitchFamily="34" charset="0"/>
                 <a:ea typeface="Microsoft JhengHei" pitchFamily="34" charset="-122"/>
                 <a:cs typeface="Microsoft JhengHei" pitchFamily="34" charset="-120"/>
               </a:rPr>
@@ -19567,7 +19631,7 @@
                 <a:solidFill>
                   <a:srgbClr val="FFE0C4"/>
                 </a:solidFill>
-                <a:latin typeface="STHeiti" pitchFamily="34" charset="0"/>
+                <a:latin typeface="Arial" pitchFamily="34" charset="0"/>
                 <a:ea typeface="Microsoft JhengHei" pitchFamily="34" charset="-122"/>
                 <a:cs typeface="Microsoft JhengHei" pitchFamily="34" charset="-120"/>
               </a:rPr>
@@ -19609,7 +19673,7 @@
                 <a:solidFill>
                   <a:srgbClr val="FAF9F5"/>
                 </a:solidFill>
-                <a:latin typeface="STHeiti" pitchFamily="34" charset="0"/>
+                <a:latin typeface="Arial" pitchFamily="34" charset="0"/>
                 <a:ea typeface="Microsoft JhengHei" pitchFamily="34" charset="-122"/>
                 <a:cs typeface="Microsoft JhengHei" pitchFamily="34" charset="-120"/>
               </a:rPr>
@@ -19648,7 +19712,7 @@
                 <a:solidFill>
                   <a:srgbClr val="C3C9D6"/>
                 </a:solidFill>
-                <a:latin typeface="STHeiti" pitchFamily="34" charset="0"/>
+                <a:latin typeface="Arial" pitchFamily="34" charset="0"/>
                 <a:ea typeface="Microsoft JhengHei" pitchFamily="34" charset="-122"/>
                 <a:cs typeface="Microsoft JhengHei" pitchFamily="34" charset="-120"/>
               </a:rPr>
@@ -19687,9 +19751,9 @@
                 <a:solidFill>
                   <a:srgbClr val="9DA89F"/>
                 </a:solidFill>
-                <a:latin typeface="STHeiti" pitchFamily="34" charset="0"/>
-                <a:ea typeface="Arial" pitchFamily="34" charset="-122"/>
-                <a:cs typeface="Arial" pitchFamily="34" charset="-120"/>
+                <a:latin typeface="Arial" pitchFamily="34" charset="0"/>
+                <a:ea typeface="Microsoft JhengHei" pitchFamily="34" charset="-122"/>
+                <a:cs typeface="Microsoft JhengHei" pitchFamily="34" charset="-120"/>
               </a:rPr>
               <a:t>29</a:t>
             </a:r>
@@ -19783,9 +19847,9 @@
                 <a:solidFill>
                   <a:srgbClr val="68645C"/>
                 </a:solidFill>
-                <a:latin typeface="STHeiti" pitchFamily="34" charset="0"/>
-                <a:ea typeface="Arial" pitchFamily="34" charset="-122"/>
-                <a:cs typeface="Arial" pitchFamily="34" charset="-120"/>
+                <a:latin typeface="Arial" pitchFamily="34" charset="0"/>
+                <a:ea typeface="Microsoft JhengHei" pitchFamily="34" charset="-122"/>
+                <a:cs typeface="Microsoft JhengHei" pitchFamily="34" charset="-120"/>
               </a:rPr>
               <a:t>PART 1 — 核心概念</a:t>
             </a:r>
@@ -19819,7 +19883,9 @@
                 <a:solidFill>
                   <a:srgbClr val="1F1E1D"/>
                 </a:solidFill>
-                <a:latin typeface="STHeiti"/>
+                <a:latin typeface="Arial"/>
+                <a:ea typeface="Microsoft JhengHei"/>
+                <a:cs typeface="Microsoft JhengHei"/>
               </a:rPr>
               <a:t>一般 AI 知道運動知識，卻不知道連續的你</a:t>
             </a:r>
@@ -19858,7 +19924,7 @@
                 <a:solidFill>
                   <a:srgbClr val="1F1E1D"/>
                 </a:solidFill>
-                <a:latin typeface="STHeiti" pitchFamily="34" charset="0"/>
+                <a:latin typeface="Arial" pitchFamily="34" charset="0"/>
                 <a:ea typeface="Microsoft JhengHei" pitchFamily="34" charset="-122"/>
                 <a:cs typeface="Microsoft JhengHei" pitchFamily="34" charset="-120"/>
               </a:rPr>
@@ -19923,9 +19989,9 @@
                 <a:solidFill>
                   <a:srgbClr val="1F1E1D"/>
                 </a:solidFill>
-                <a:latin typeface="STHeiti" pitchFamily="34" charset="0"/>
-                <a:ea typeface="Arial" pitchFamily="34" charset="-122"/>
-                <a:cs typeface="Arial" pitchFamily="34" charset="-120"/>
+                <a:latin typeface="Arial" pitchFamily="34" charset="0"/>
+                <a:ea typeface="Microsoft JhengHei" pitchFamily="34" charset="-122"/>
+                <a:cs typeface="Microsoft JhengHei" pitchFamily="34" charset="-120"/>
               </a:rPr>
               <a:t>Apple Health</a:t>
             </a:r>
@@ -19965,7 +20031,7 @@
                 <a:solidFill>
                   <a:srgbClr val="68645C"/>
                 </a:solidFill>
-                <a:latin typeface="STHeiti" pitchFamily="34" charset="0"/>
+                <a:latin typeface="Arial" pitchFamily="34" charset="0"/>
                 <a:ea typeface="Microsoft JhengHei" pitchFamily="34" charset="-122"/>
                 <a:cs typeface="Microsoft JhengHei" pitchFamily="34" charset="-120"/>
               </a:rPr>
@@ -20030,9 +20096,9 @@
                 <a:solidFill>
                   <a:srgbClr val="1F1E1D"/>
                 </a:solidFill>
-                <a:latin typeface="STHeiti" pitchFamily="34" charset="0"/>
-                <a:ea typeface="Arial" pitchFamily="34" charset="-122"/>
-                <a:cs typeface="Arial" pitchFamily="34" charset="-120"/>
+                <a:latin typeface="Arial" pitchFamily="34" charset="0"/>
+                <a:ea typeface="Microsoft JhengHei" pitchFamily="34" charset="-122"/>
+                <a:cs typeface="Microsoft JhengHei" pitchFamily="34" charset="-120"/>
               </a:rPr>
               <a:t>Garmin</a:t>
             </a:r>
@@ -20072,7 +20138,7 @@
                 <a:solidFill>
                   <a:srgbClr val="68645C"/>
                 </a:solidFill>
-                <a:latin typeface="STHeiti" pitchFamily="34" charset="0"/>
+                <a:latin typeface="Arial" pitchFamily="34" charset="0"/>
                 <a:ea typeface="Microsoft JhengHei" pitchFamily="34" charset="-122"/>
                 <a:cs typeface="Microsoft JhengHei" pitchFamily="34" charset="-120"/>
               </a:rPr>
@@ -20137,9 +20203,9 @@
                 <a:solidFill>
                   <a:srgbClr val="1F1E1D"/>
                 </a:solidFill>
-                <a:latin typeface="STHeiti" pitchFamily="34" charset="0"/>
-                <a:ea typeface="Arial" pitchFamily="34" charset="-122"/>
-                <a:cs typeface="Arial" pitchFamily="34" charset="-120"/>
+                <a:latin typeface="Arial" pitchFamily="34" charset="0"/>
+                <a:ea typeface="Microsoft JhengHei" pitchFamily="34" charset="-122"/>
+                <a:cs typeface="Microsoft JhengHei" pitchFamily="34" charset="-120"/>
               </a:rPr>
               <a:t>Strava</a:t>
             </a:r>
@@ -20179,7 +20245,7 @@
                 <a:solidFill>
                   <a:srgbClr val="68645C"/>
                 </a:solidFill>
-                <a:latin typeface="STHeiti" pitchFamily="34" charset="0"/>
+                <a:latin typeface="Arial" pitchFamily="34" charset="0"/>
                 <a:ea typeface="Microsoft JhengHei" pitchFamily="34" charset="-122"/>
                 <a:cs typeface="Microsoft JhengHei" pitchFamily="34" charset="-120"/>
               </a:rPr>
@@ -20244,9 +20310,9 @@
                 <a:solidFill>
                   <a:srgbClr val="157554"/>
                 </a:solidFill>
-                <a:latin typeface="STHeiti" pitchFamily="34" charset="0"/>
-                <a:ea typeface="Arial" pitchFamily="34" charset="-122"/>
-                <a:cs typeface="Arial" pitchFamily="34" charset="-120"/>
+                <a:latin typeface="Arial" pitchFamily="34" charset="0"/>
+                <a:ea typeface="Microsoft JhengHei" pitchFamily="34" charset="-122"/>
+                <a:cs typeface="Microsoft JhengHei" pitchFamily="34" charset="-120"/>
               </a:rPr>
               <a:t>健身房</a:t>
             </a:r>
@@ -20286,7 +20352,7 @@
                 <a:solidFill>
                   <a:srgbClr val="9BA3B4"/>
                 </a:solidFill>
-                <a:latin typeface="STHeiti" pitchFamily="34" charset="0"/>
+                <a:latin typeface="Arial" pitchFamily="34" charset="0"/>
                 <a:ea typeface="Microsoft JhengHei" pitchFamily="34" charset="-122"/>
                 <a:cs typeface="Microsoft JhengHei" pitchFamily="34" charset="-120"/>
               </a:rPr>
@@ -20325,7 +20391,7 @@
                 <a:solidFill>
                   <a:srgbClr val="68645C"/>
                 </a:solidFill>
-                <a:latin typeface="STHeiti" pitchFamily="34" charset="0"/>
+                <a:latin typeface="Arial" pitchFamily="34" charset="0"/>
                 <a:ea typeface="Microsoft JhengHei" pitchFamily="34" charset="-122"/>
                 <a:cs typeface="Microsoft JhengHei" pitchFamily="34" charset="-120"/>
               </a:rPr>
@@ -20364,9 +20430,9 @@
                 <a:solidFill>
                   <a:srgbClr val="9DA89F"/>
                 </a:solidFill>
-                <a:latin typeface="STHeiti" pitchFamily="34" charset="0"/>
-                <a:ea typeface="Arial" pitchFamily="34" charset="-122"/>
-                <a:cs typeface="Arial" pitchFamily="34" charset="-120"/>
+                <a:latin typeface="Arial" pitchFamily="34" charset="0"/>
+                <a:ea typeface="Microsoft JhengHei" pitchFamily="34" charset="-122"/>
+                <a:cs typeface="Microsoft JhengHei" pitchFamily="34" charset="-120"/>
               </a:rPr>
               <a:t>03</a:t>
             </a:r>
@@ -20460,9 +20526,9 @@
                 <a:solidFill>
                   <a:srgbClr val="68645C"/>
                 </a:solidFill>
-                <a:latin typeface="STHeiti" pitchFamily="34" charset="0"/>
-                <a:ea typeface="Arial" pitchFamily="34" charset="-122"/>
-                <a:cs typeface="Arial" pitchFamily="34" charset="-120"/>
+                <a:latin typeface="Arial" pitchFamily="34" charset="0"/>
+                <a:ea typeface="Microsoft JhengHei" pitchFamily="34" charset="-122"/>
+                <a:cs typeface="Microsoft JhengHei" pitchFamily="34" charset="-120"/>
               </a:rPr>
               <a:t>PART 3 — 現況與待做</a:t>
             </a:r>
@@ -20496,7 +20562,9 @@
                 <a:solidFill>
                   <a:srgbClr val="1F1E1D"/>
                 </a:solidFill>
-                <a:latin typeface="STHeiti"/>
+                <a:latin typeface="Arial"/>
+                <a:ea typeface="Microsoft JhengHei"/>
+                <a:cs typeface="Microsoft JhengHei"/>
               </a:rPr>
               <a:t>先用產品頁驗證，再進 private engine</a:t>
             </a:r>
@@ -20535,7 +20603,7 @@
                 <a:solidFill>
                   <a:srgbClr val="1F1E1D"/>
                 </a:solidFill>
-                <a:latin typeface="STHeiti" pitchFamily="34" charset="0"/>
+                <a:latin typeface="Arial" pitchFamily="34" charset="0"/>
                 <a:ea typeface="Microsoft JhengHei" pitchFamily="34" charset="-122"/>
                 <a:cs typeface="Microsoft JhengHei" pitchFamily="34" charset="-120"/>
               </a:rPr>
@@ -20624,9 +20692,9 @@
                 <a:solidFill>
                   <a:srgbClr val="1F1E1D"/>
                 </a:solidFill>
-                <a:latin typeface="STHeiti" pitchFamily="34" charset="0"/>
-                <a:ea typeface="Arial" pitchFamily="34" charset="-122"/>
-                <a:cs typeface="Arial" pitchFamily="34" charset="-120"/>
+                <a:latin typeface="Arial" pitchFamily="34" charset="0"/>
+                <a:ea typeface="Microsoft JhengHei" pitchFamily="34" charset="-122"/>
+                <a:cs typeface="Microsoft JhengHei" pitchFamily="34" charset="-120"/>
               </a:rPr>
               <a:t>0</a:t>
             </a:r>
@@ -20663,7 +20731,7 @@
                 <a:solidFill>
                   <a:srgbClr val="1F1E1D"/>
                 </a:solidFill>
-                <a:latin typeface="STHeiti" pitchFamily="34" charset="0"/>
+                <a:latin typeface="Arial" pitchFamily="34" charset="0"/>
                 <a:ea typeface="Microsoft JhengHei" pitchFamily="34" charset="-122"/>
                 <a:cs typeface="Microsoft JhengHei" pitchFamily="34" charset="-120"/>
               </a:rPr>
@@ -20702,7 +20770,7 @@
                 <a:solidFill>
                   <a:srgbClr val="68645C"/>
                 </a:solidFill>
-                <a:latin typeface="STHeiti" pitchFamily="34" charset="0"/>
+                <a:latin typeface="Arial" pitchFamily="34" charset="0"/>
                 <a:ea typeface="Microsoft JhengHei" pitchFamily="34" charset="-122"/>
                 <a:cs typeface="Microsoft JhengHei" pitchFamily="34" charset="-120"/>
               </a:rPr>
@@ -20768,7 +20836,7 @@
                 <a:solidFill>
                   <a:srgbClr val="68645C"/>
                 </a:solidFill>
-                <a:latin typeface="STHeiti" pitchFamily="34" charset="0"/>
+                <a:latin typeface="Arial" pitchFamily="34" charset="0"/>
                 <a:ea typeface="Microsoft JhengHei" pitchFamily="34" charset="-122"/>
                 <a:cs typeface="Microsoft JhengHei" pitchFamily="34" charset="-120"/>
               </a:rPr>
@@ -20857,9 +20925,9 @@
                 <a:solidFill>
                   <a:srgbClr val="1F1E1D"/>
                 </a:solidFill>
-                <a:latin typeface="STHeiti" pitchFamily="34" charset="0"/>
-                <a:ea typeface="Arial" pitchFamily="34" charset="-122"/>
-                <a:cs typeface="Arial" pitchFamily="34" charset="-120"/>
+                <a:latin typeface="Arial" pitchFamily="34" charset="0"/>
+                <a:ea typeface="Microsoft JhengHei" pitchFamily="34" charset="-122"/>
+                <a:cs typeface="Microsoft JhengHei" pitchFamily="34" charset="-120"/>
               </a:rPr>
               <a:t>1</a:t>
             </a:r>
@@ -20896,7 +20964,7 @@
                 <a:solidFill>
                   <a:srgbClr val="1F1E1D"/>
                 </a:solidFill>
-                <a:latin typeface="STHeiti" pitchFamily="34" charset="0"/>
+                <a:latin typeface="Arial" pitchFamily="34" charset="0"/>
                 <a:ea typeface="Microsoft JhengHei" pitchFamily="34" charset="-122"/>
                 <a:cs typeface="Microsoft JhengHei" pitchFamily="34" charset="-120"/>
               </a:rPr>
@@ -20935,7 +21003,7 @@
                 <a:solidFill>
                   <a:srgbClr val="68645C"/>
                 </a:solidFill>
-                <a:latin typeface="STHeiti" pitchFamily="34" charset="0"/>
+                <a:latin typeface="Arial" pitchFamily="34" charset="0"/>
                 <a:ea typeface="Microsoft JhengHei" pitchFamily="34" charset="-122"/>
                 <a:cs typeface="Microsoft JhengHei" pitchFamily="34" charset="-120"/>
               </a:rPr>
@@ -21001,7 +21069,7 @@
                 <a:solidFill>
                   <a:srgbClr val="157554"/>
                 </a:solidFill>
-                <a:latin typeface="STHeiti" pitchFamily="34" charset="0"/>
+                <a:latin typeface="Arial" pitchFamily="34" charset="0"/>
                 <a:ea typeface="Microsoft JhengHei" pitchFamily="34" charset="-122"/>
                 <a:cs typeface="Microsoft JhengHei" pitchFamily="34" charset="-120"/>
               </a:rPr>
@@ -21090,9 +21158,9 @@
                 <a:solidFill>
                   <a:srgbClr val="1F1E1D"/>
                 </a:solidFill>
-                <a:latin typeface="STHeiti" pitchFamily="34" charset="0"/>
-                <a:ea typeface="Arial" pitchFamily="34" charset="-122"/>
-                <a:cs typeface="Arial" pitchFamily="34" charset="-120"/>
+                <a:latin typeface="Arial" pitchFamily="34" charset="0"/>
+                <a:ea typeface="Microsoft JhengHei" pitchFamily="34" charset="-122"/>
+                <a:cs typeface="Microsoft JhengHei" pitchFamily="34" charset="-120"/>
               </a:rPr>
               <a:t>2</a:t>
             </a:r>
@@ -21129,7 +21197,7 @@
                 <a:solidFill>
                   <a:srgbClr val="1F1E1D"/>
                 </a:solidFill>
-                <a:latin typeface="STHeiti" pitchFamily="34" charset="0"/>
+                <a:latin typeface="Arial" pitchFamily="34" charset="0"/>
                 <a:ea typeface="Microsoft JhengHei" pitchFamily="34" charset="-122"/>
                 <a:cs typeface="Microsoft JhengHei" pitchFamily="34" charset="-120"/>
               </a:rPr>
@@ -21168,7 +21236,7 @@
                 <a:solidFill>
                   <a:srgbClr val="68645C"/>
                 </a:solidFill>
-                <a:latin typeface="STHeiti" pitchFamily="34" charset="0"/>
+                <a:latin typeface="Arial" pitchFamily="34" charset="0"/>
                 <a:ea typeface="Microsoft JhengHei" pitchFamily="34" charset="-122"/>
                 <a:cs typeface="Microsoft JhengHei" pitchFamily="34" charset="-120"/>
               </a:rPr>
@@ -21234,7 +21302,7 @@
                 <a:solidFill>
                   <a:srgbClr val="157554"/>
                 </a:solidFill>
-                <a:latin typeface="STHeiti" pitchFamily="34" charset="0"/>
+                <a:latin typeface="Arial" pitchFamily="34" charset="0"/>
                 <a:ea typeface="Microsoft JhengHei" pitchFamily="34" charset="-122"/>
                 <a:cs typeface="Microsoft JhengHei" pitchFamily="34" charset="-120"/>
               </a:rPr>
@@ -21323,9 +21391,9 @@
                 <a:solidFill>
                   <a:srgbClr val="1F1E1D"/>
                 </a:solidFill>
-                <a:latin typeface="STHeiti" pitchFamily="34" charset="0"/>
-                <a:ea typeface="Arial" pitchFamily="34" charset="-122"/>
-                <a:cs typeface="Arial" pitchFamily="34" charset="-120"/>
+                <a:latin typeface="Arial" pitchFamily="34" charset="0"/>
+                <a:ea typeface="Microsoft JhengHei" pitchFamily="34" charset="-122"/>
+                <a:cs typeface="Microsoft JhengHei" pitchFamily="34" charset="-120"/>
               </a:rPr>
               <a:t>3</a:t>
             </a:r>
@@ -21362,7 +21430,7 @@
                 <a:solidFill>
                   <a:srgbClr val="1F1E1D"/>
                 </a:solidFill>
-                <a:latin typeface="STHeiti" pitchFamily="34" charset="0"/>
+                <a:latin typeface="Arial" pitchFamily="34" charset="0"/>
                 <a:ea typeface="Microsoft JhengHei" pitchFamily="34" charset="-122"/>
                 <a:cs typeface="Microsoft JhengHei" pitchFamily="34" charset="-120"/>
               </a:rPr>
@@ -21401,7 +21469,7 @@
                 <a:solidFill>
                   <a:srgbClr val="68645C"/>
                 </a:solidFill>
-                <a:latin typeface="STHeiti" pitchFamily="34" charset="0"/>
+                <a:latin typeface="Arial" pitchFamily="34" charset="0"/>
                 <a:ea typeface="Microsoft JhengHei" pitchFamily="34" charset="-122"/>
                 <a:cs typeface="Microsoft JhengHei" pitchFamily="34" charset="-120"/>
               </a:rPr>
@@ -21467,7 +21535,7 @@
                 <a:solidFill>
                   <a:srgbClr val="1F1E1D"/>
                 </a:solidFill>
-                <a:latin typeface="STHeiti" pitchFamily="34" charset="0"/>
+                <a:latin typeface="Arial" pitchFamily="34" charset="0"/>
                 <a:ea typeface="Microsoft JhengHei" pitchFamily="34" charset="-122"/>
                 <a:cs typeface="Microsoft JhengHei" pitchFamily="34" charset="-120"/>
               </a:rPr>
@@ -21556,9 +21624,9 @@
                 <a:solidFill>
                   <a:srgbClr val="1F1E1D"/>
                 </a:solidFill>
-                <a:latin typeface="STHeiti" pitchFamily="34" charset="0"/>
-                <a:ea typeface="Arial" pitchFamily="34" charset="-122"/>
-                <a:cs typeface="Arial" pitchFamily="34" charset="-120"/>
+                <a:latin typeface="Arial" pitchFamily="34" charset="0"/>
+                <a:ea typeface="Microsoft JhengHei" pitchFamily="34" charset="-122"/>
+                <a:cs typeface="Microsoft JhengHei" pitchFamily="34" charset="-120"/>
               </a:rPr>
               <a:t>4</a:t>
             </a:r>
@@ -21595,7 +21663,7 @@
                 <a:solidFill>
                   <a:srgbClr val="1F1E1D"/>
                 </a:solidFill>
-                <a:latin typeface="STHeiti" pitchFamily="34" charset="0"/>
+                <a:latin typeface="Arial" pitchFamily="34" charset="0"/>
                 <a:ea typeface="Microsoft JhengHei" pitchFamily="34" charset="-122"/>
                 <a:cs typeface="Microsoft JhengHei" pitchFamily="34" charset="-120"/>
               </a:rPr>
@@ -21634,7 +21702,7 @@
                 <a:solidFill>
                   <a:srgbClr val="68645C"/>
                 </a:solidFill>
-                <a:latin typeface="STHeiti" pitchFamily="34" charset="0"/>
+                <a:latin typeface="Arial" pitchFamily="34" charset="0"/>
                 <a:ea typeface="Microsoft JhengHei" pitchFamily="34" charset="-122"/>
                 <a:cs typeface="Microsoft JhengHei" pitchFamily="34" charset="-120"/>
               </a:rPr>
@@ -21700,7 +21768,7 @@
                 <a:solidFill>
                   <a:srgbClr val="4A5568"/>
                 </a:solidFill>
-                <a:latin typeface="STHeiti" pitchFamily="34" charset="0"/>
+                <a:latin typeface="Arial" pitchFamily="34" charset="0"/>
                 <a:ea typeface="Microsoft JhengHei" pitchFamily="34" charset="-122"/>
                 <a:cs typeface="Microsoft JhengHei" pitchFamily="34" charset="-120"/>
               </a:rPr>
@@ -21789,9 +21857,9 @@
                 <a:solidFill>
                   <a:srgbClr val="1F1E1D"/>
                 </a:solidFill>
-                <a:latin typeface="STHeiti" pitchFamily="34" charset="0"/>
-                <a:ea typeface="Arial" pitchFamily="34" charset="-122"/>
-                <a:cs typeface="Arial" pitchFamily="34" charset="-120"/>
+                <a:latin typeface="Arial" pitchFamily="34" charset="0"/>
+                <a:ea typeface="Microsoft JhengHei" pitchFamily="34" charset="-122"/>
+                <a:cs typeface="Microsoft JhengHei" pitchFamily="34" charset="-120"/>
               </a:rPr>
               <a:t>5</a:t>
             </a:r>
@@ -21828,7 +21896,7 @@
                 <a:solidFill>
                   <a:srgbClr val="1F1E1D"/>
                 </a:solidFill>
-                <a:latin typeface="STHeiti" pitchFamily="34" charset="0"/>
+                <a:latin typeface="Arial" pitchFamily="34" charset="0"/>
                 <a:ea typeface="Microsoft JhengHei" pitchFamily="34" charset="-122"/>
                 <a:cs typeface="Microsoft JhengHei" pitchFamily="34" charset="-120"/>
               </a:rPr>
@@ -21867,7 +21935,7 @@
                 <a:solidFill>
                   <a:srgbClr val="68645C"/>
                 </a:solidFill>
-                <a:latin typeface="STHeiti" pitchFamily="34" charset="0"/>
+                <a:latin typeface="Arial" pitchFamily="34" charset="0"/>
                 <a:ea typeface="Microsoft JhengHei" pitchFamily="34" charset="-122"/>
                 <a:cs typeface="Microsoft JhengHei" pitchFamily="34" charset="-120"/>
               </a:rPr>
@@ -21933,7 +22001,7 @@
                 <a:solidFill>
                   <a:srgbClr val="157554"/>
                 </a:solidFill>
-                <a:latin typeface="STHeiti" pitchFamily="34" charset="0"/>
+                <a:latin typeface="Arial" pitchFamily="34" charset="0"/>
                 <a:ea typeface="Microsoft JhengHei" pitchFamily="34" charset="-122"/>
                 <a:cs typeface="Microsoft JhengHei" pitchFamily="34" charset="-120"/>
               </a:rPr>
@@ -22022,9 +22090,9 @@
                 <a:solidFill>
                   <a:srgbClr val="1F1E1D"/>
                 </a:solidFill>
-                <a:latin typeface="STHeiti" pitchFamily="34" charset="0"/>
-                <a:ea typeface="Arial" pitchFamily="34" charset="-122"/>
-                <a:cs typeface="Arial" pitchFamily="34" charset="-120"/>
+                <a:latin typeface="Arial" pitchFamily="34" charset="0"/>
+                <a:ea typeface="Microsoft JhengHei" pitchFamily="34" charset="-122"/>
+                <a:cs typeface="Microsoft JhengHei" pitchFamily="34" charset="-120"/>
               </a:rPr>
               <a:t>6</a:t>
             </a:r>
@@ -22061,7 +22129,7 @@
                 <a:solidFill>
                   <a:srgbClr val="1F1E1D"/>
                 </a:solidFill>
-                <a:latin typeface="STHeiti" pitchFamily="34" charset="0"/>
+                <a:latin typeface="Arial" pitchFamily="34" charset="0"/>
                 <a:ea typeface="Microsoft JhengHei" pitchFamily="34" charset="-122"/>
                 <a:cs typeface="Microsoft JhengHei" pitchFamily="34" charset="-120"/>
               </a:rPr>
@@ -22100,7 +22168,7 @@
                 <a:solidFill>
                   <a:srgbClr val="68645C"/>
                 </a:solidFill>
-                <a:latin typeface="STHeiti" pitchFamily="34" charset="0"/>
+                <a:latin typeface="Arial" pitchFamily="34" charset="0"/>
                 <a:ea typeface="Microsoft JhengHei" pitchFamily="34" charset="-122"/>
                 <a:cs typeface="Microsoft JhengHei" pitchFamily="34" charset="-120"/>
               </a:rPr>
@@ -22166,7 +22234,7 @@
                 <a:solidFill>
                   <a:srgbClr val="157554"/>
                 </a:solidFill>
-                <a:latin typeface="STHeiti" pitchFamily="34" charset="0"/>
+                <a:latin typeface="Arial" pitchFamily="34" charset="0"/>
                 <a:ea typeface="Microsoft JhengHei" pitchFamily="34" charset="-122"/>
                 <a:cs typeface="Microsoft JhengHei" pitchFamily="34" charset="-120"/>
               </a:rPr>
@@ -22255,9 +22323,9 @@
                 <a:solidFill>
                   <a:srgbClr val="1F1E1D"/>
                 </a:solidFill>
-                <a:latin typeface="STHeiti" pitchFamily="34" charset="0"/>
-                <a:ea typeface="Arial" pitchFamily="34" charset="-122"/>
-                <a:cs typeface="Arial" pitchFamily="34" charset="-120"/>
+                <a:latin typeface="Arial" pitchFamily="34" charset="0"/>
+                <a:ea typeface="Microsoft JhengHei" pitchFamily="34" charset="-122"/>
+                <a:cs typeface="Microsoft JhengHei" pitchFamily="34" charset="-120"/>
               </a:rPr>
               <a:t>7</a:t>
             </a:r>
@@ -22294,7 +22362,7 @@
                 <a:solidFill>
                   <a:srgbClr val="1F1E1D"/>
                 </a:solidFill>
-                <a:latin typeface="STHeiti" pitchFamily="34" charset="0"/>
+                <a:latin typeface="Arial" pitchFamily="34" charset="0"/>
                 <a:ea typeface="Microsoft JhengHei" pitchFamily="34" charset="-122"/>
                 <a:cs typeface="Microsoft JhengHei" pitchFamily="34" charset="-120"/>
               </a:rPr>
@@ -22333,7 +22401,7 @@
                 <a:solidFill>
                   <a:srgbClr val="68645C"/>
                 </a:solidFill>
-                <a:latin typeface="STHeiti" pitchFamily="34" charset="0"/>
+                <a:latin typeface="Arial" pitchFamily="34" charset="0"/>
                 <a:ea typeface="Microsoft JhengHei" pitchFamily="34" charset="-122"/>
                 <a:cs typeface="Microsoft JhengHei" pitchFamily="34" charset="-120"/>
               </a:rPr>
@@ -22399,7 +22467,7 @@
                 <a:solidFill>
                   <a:srgbClr val="1F1E1D"/>
                 </a:solidFill>
-                <a:latin typeface="STHeiti" pitchFamily="34" charset="0"/>
+                <a:latin typeface="Arial" pitchFamily="34" charset="0"/>
                 <a:ea typeface="Microsoft JhengHei" pitchFamily="34" charset="-122"/>
                 <a:cs typeface="Microsoft JhengHei" pitchFamily="34" charset="-120"/>
               </a:rPr>
@@ -22488,9 +22556,9 @@
                 <a:solidFill>
                   <a:srgbClr val="1F1E1D"/>
                 </a:solidFill>
-                <a:latin typeface="STHeiti" pitchFamily="34" charset="0"/>
-                <a:ea typeface="Arial" pitchFamily="34" charset="-122"/>
-                <a:cs typeface="Arial" pitchFamily="34" charset="-120"/>
+                <a:latin typeface="Arial" pitchFamily="34" charset="0"/>
+                <a:ea typeface="Microsoft JhengHei" pitchFamily="34" charset="-122"/>
+                <a:cs typeface="Microsoft JhengHei" pitchFamily="34" charset="-120"/>
               </a:rPr>
               <a:t>8</a:t>
             </a:r>
@@ -22527,7 +22595,7 @@
                 <a:solidFill>
                   <a:srgbClr val="1F1E1D"/>
                 </a:solidFill>
-                <a:latin typeface="STHeiti" pitchFamily="34" charset="0"/>
+                <a:latin typeface="Arial" pitchFamily="34" charset="0"/>
                 <a:ea typeface="Microsoft JhengHei" pitchFamily="34" charset="-122"/>
                 <a:cs typeface="Microsoft JhengHei" pitchFamily="34" charset="-120"/>
               </a:rPr>
@@ -22566,7 +22634,7 @@
                 <a:solidFill>
                   <a:srgbClr val="68645C"/>
                 </a:solidFill>
-                <a:latin typeface="STHeiti" pitchFamily="34" charset="0"/>
+                <a:latin typeface="Arial" pitchFamily="34" charset="0"/>
                 <a:ea typeface="Microsoft JhengHei" pitchFamily="34" charset="-122"/>
                 <a:cs typeface="Microsoft JhengHei" pitchFamily="34" charset="-120"/>
               </a:rPr>
@@ -22632,7 +22700,7 @@
                 <a:solidFill>
                   <a:srgbClr val="4A5568"/>
                 </a:solidFill>
-                <a:latin typeface="STHeiti" pitchFamily="34" charset="0"/>
+                <a:latin typeface="Arial" pitchFamily="34" charset="0"/>
                 <a:ea typeface="Microsoft JhengHei" pitchFamily="34" charset="-122"/>
                 <a:cs typeface="Microsoft JhengHei" pitchFamily="34" charset="-120"/>
               </a:rPr>
@@ -22671,9 +22739,9 @@
                 <a:solidFill>
                   <a:srgbClr val="9DA89F"/>
                 </a:solidFill>
-                <a:latin typeface="STHeiti" pitchFamily="34" charset="0"/>
-                <a:ea typeface="Arial" pitchFamily="34" charset="-122"/>
-                <a:cs typeface="Arial" pitchFamily="34" charset="-120"/>
+                <a:latin typeface="Arial" pitchFamily="34" charset="0"/>
+                <a:ea typeface="Microsoft JhengHei" pitchFamily="34" charset="-122"/>
+                <a:cs typeface="Microsoft JhengHei" pitchFamily="34" charset="-120"/>
               </a:rPr>
               <a:t>30</a:t>
             </a:r>
@@ -22767,9 +22835,9 @@
                 <a:solidFill>
                   <a:srgbClr val="68645C"/>
                 </a:solidFill>
-                <a:latin typeface="STHeiti" pitchFamily="34" charset="0"/>
-                <a:ea typeface="Arial" pitchFamily="34" charset="-122"/>
-                <a:cs typeface="Arial" pitchFamily="34" charset="-120"/>
+                <a:latin typeface="Arial" pitchFamily="34" charset="0"/>
+                <a:ea typeface="Microsoft JhengHei" pitchFamily="34" charset="-122"/>
+                <a:cs typeface="Microsoft JhengHei" pitchFamily="34" charset="-120"/>
               </a:rPr>
               <a:t>POSITIONING</a:t>
             </a:r>
@@ -22803,7 +22871,9 @@
                 <a:solidFill>
                   <a:srgbClr val="1F1E1D"/>
                 </a:solidFill>
-                <a:latin typeface="STHeiti"/>
+                <a:latin typeface="Arial"/>
+                <a:ea typeface="Microsoft JhengHei"/>
+                <a:cs typeface="Microsoft JhengHei"/>
               </a:rPr>
               <a:t>Pacevera 是 personal fitness decision layer</a:t>
             </a:r>
@@ -22831,24 +22901,17 @@
           <a:bodyPr wrap="square" lIns="0" tIns="0" rIns="0" bIns="0" rtlCol="0" anchor="t"/>
           <a:lstStyle/>
           <a:p>
-            <a:pPr marL="0" indent="0">
-              <a:lnSpc>
-                <a:spcPts val="3200"/>
-              </a:lnSpc>
-              <a:buNone/>
-            </a:pPr>
-            <a:r>
-              <a:rPr lang="en-US" sz="2000" dirty="0">
+            <a:r>
+              <a:rPr>
                 <a:solidFill>
                   <a:srgbClr val="1F1E1D"/>
                 </a:solidFill>
-                <a:latin typeface="STHeiti" pitchFamily="34" charset="0"/>
-                <a:ea typeface="Microsoft JhengHei" pitchFamily="34" charset="-122"/>
-                <a:cs typeface="Microsoft JhengHei" pitchFamily="34" charset="-120"/>
-              </a:rPr>
-              <a:t>我們要的是運動領域的決策基礎層:證據、規則與可追溯的 from → to。</a:t>
-            </a:r>
-            <a:endParaRPr lang="en-US" sz="2000" dirty="0"/>
+                <a:latin typeface="Arial"/>
+                <a:ea typeface="Microsoft JhengHei"/>
+                <a:cs typeface="Microsoft JhengHei"/>
+              </a:rPr>
+              <a:t>我們要的是運動領域的決策基礎層:證據、規則與可追溯的訓練變更。</a:t>
+            </a:r>
           </a:p>
         </p:txBody>
       </p:sp>
@@ -22905,11 +22968,11 @@
             <a:r>
               <a:rPr lang="en-US" sz="2200" b="1" dirty="0">
                 <a:solidFill>
-                  <a:srgbClr val="DAD2C3"/>
-                </a:solidFill>
-                <a:latin typeface="STHeiti" pitchFamily="34" charset="0"/>
-                <a:ea typeface="Arial" pitchFamily="34" charset="-122"/>
-                <a:cs typeface="Arial" pitchFamily="34" charset="-120"/>
+                  <a:srgbClr val="1F1E1D"/>
+                </a:solidFill>
+                <a:latin typeface="Arial" pitchFamily="34" charset="0"/>
+                <a:ea typeface="Microsoft JhengHei" pitchFamily="34" charset="-122"/>
+                <a:cs typeface="Microsoft JhengHei" pitchFamily="34" charset="-120"/>
               </a:rPr>
               <a:t>Plaid</a:t>
             </a:r>
@@ -22947,9 +23010,9 @@
             <a:r>
               <a:rPr lang="en-US" sz="1400" dirty="0">
                 <a:solidFill>
-                  <a:srgbClr val="68645C"/>
-                </a:solidFill>
-                <a:latin typeface="STHeiti" pitchFamily="34" charset="0"/>
+                  <a:srgbClr val="1F1E1D"/>
+                </a:solidFill>
+                <a:latin typeface="Arial" pitchFamily="34" charset="0"/>
                 <a:ea typeface="Microsoft JhengHei" pitchFamily="34" charset="-122"/>
                 <a:cs typeface="Microsoft JhengHei" pitchFamily="34" charset="-120"/>
               </a:rPr>
@@ -23012,11 +23075,11 @@
             <a:r>
               <a:rPr lang="en-US" sz="2200" b="1" dirty="0">
                 <a:solidFill>
-                  <a:srgbClr val="DAD2C3"/>
-                </a:solidFill>
-                <a:latin typeface="STHeiti" pitchFamily="34" charset="0"/>
-                <a:ea typeface="Arial" pitchFamily="34" charset="-122"/>
-                <a:cs typeface="Arial" pitchFamily="34" charset="-120"/>
+                  <a:srgbClr val="1F1E1D"/>
+                </a:solidFill>
+                <a:latin typeface="Arial" pitchFamily="34" charset="0"/>
+                <a:ea typeface="Microsoft JhengHei" pitchFamily="34" charset="-122"/>
+                <a:cs typeface="Microsoft JhengHei" pitchFamily="34" charset="-120"/>
               </a:rPr>
               <a:t>Stripe</a:t>
             </a:r>
@@ -23054,9 +23117,9 @@
             <a:r>
               <a:rPr lang="en-US" sz="1400" dirty="0">
                 <a:solidFill>
-                  <a:srgbClr val="68645C"/>
-                </a:solidFill>
-                <a:latin typeface="STHeiti" pitchFamily="34" charset="0"/>
+                  <a:srgbClr val="1F1E1D"/>
+                </a:solidFill>
+                <a:latin typeface="Arial" pitchFamily="34" charset="0"/>
                 <a:ea typeface="Microsoft JhengHei" pitchFamily="34" charset="-122"/>
                 <a:cs typeface="Microsoft JhengHei" pitchFamily="34" charset="-120"/>
               </a:rPr>
@@ -23121,9 +23184,9 @@
                 <a:solidFill>
                   <a:srgbClr val="157554"/>
                 </a:solidFill>
-                <a:latin typeface="STHeiti" pitchFamily="34" charset="0"/>
-                <a:ea typeface="Arial" pitchFamily="34" charset="-122"/>
-                <a:cs typeface="Arial" pitchFamily="34" charset="-120"/>
+                <a:latin typeface="Arial" pitchFamily="34" charset="0"/>
+                <a:ea typeface="Microsoft JhengHei" pitchFamily="34" charset="-122"/>
+                <a:cs typeface="Microsoft JhengHei" pitchFamily="34" charset="-120"/>
               </a:rPr>
               <a:t>Us</a:t>
             </a:r>
@@ -23161,9 +23224,9 @@
             <a:r>
               <a:rPr lang="en-US" sz="1400" dirty="0">
                 <a:solidFill>
-                  <a:srgbClr val="D6DAE4"/>
-                </a:solidFill>
-                <a:latin typeface="STHeiti" pitchFamily="34" charset="0"/>
+                  <a:srgbClr val="FAF9F5"/>
+                </a:solidFill>
+                <a:latin typeface="Arial" pitchFamily="34" charset="0"/>
                 <a:ea typeface="Microsoft JhengHei" pitchFamily="34" charset="-122"/>
                 <a:cs typeface="Microsoft JhengHei" pitchFamily="34" charset="-120"/>
               </a:rPr>
@@ -23181,9 +23244,9 @@
             <a:r>
               <a:rPr lang="en-US" sz="1400" dirty="0">
                 <a:solidFill>
-                  <a:srgbClr val="D6DAE4"/>
-                </a:solidFill>
-                <a:latin typeface="STHeiti" pitchFamily="34" charset="0"/>
+                  <a:srgbClr val="FAF9F5"/>
+                </a:solidFill>
+                <a:latin typeface="Arial" pitchFamily="34" charset="0"/>
                 <a:ea typeface="Microsoft JhengHei" pitchFamily="34" charset="-122"/>
                 <a:cs typeface="Microsoft JhengHei" pitchFamily="34" charset="-120"/>
               </a:rPr>
@@ -23222,7 +23285,7 @@
                 <a:solidFill>
                   <a:srgbClr val="68645C"/>
                 </a:solidFill>
-                <a:latin typeface="STHeiti" pitchFamily="34" charset="0"/>
+                <a:latin typeface="Arial" pitchFamily="34" charset="0"/>
                 <a:ea typeface="Microsoft JhengHei" pitchFamily="34" charset="-122"/>
                 <a:cs typeface="Microsoft JhengHei" pitchFamily="34" charset="-120"/>
               </a:rPr>
@@ -23261,9 +23324,9 @@
                 <a:solidFill>
                   <a:srgbClr val="9DA89F"/>
                 </a:solidFill>
-                <a:latin typeface="STHeiti" pitchFamily="34" charset="0"/>
-                <a:ea typeface="Arial" pitchFamily="34" charset="-122"/>
-                <a:cs typeface="Arial" pitchFamily="34" charset="-120"/>
+                <a:latin typeface="Arial" pitchFamily="34" charset="0"/>
+                <a:ea typeface="Microsoft JhengHei" pitchFamily="34" charset="-122"/>
+                <a:cs typeface="Microsoft JhengHei" pitchFamily="34" charset="-120"/>
               </a:rPr>
               <a:t>31</a:t>
             </a:r>
@@ -23383,9 +23446,9 @@
                 <a:solidFill>
                   <a:srgbClr val="9FAEBE"/>
                 </a:solidFill>
-                <a:latin typeface="STHeiti" pitchFamily="34" charset="0"/>
-                <a:ea typeface="Arial" pitchFamily="34" charset="-122"/>
-                <a:cs typeface="Arial" pitchFamily="34" charset="-120"/>
+                <a:latin typeface="Arial" pitchFamily="34" charset="0"/>
+                <a:ea typeface="Microsoft JhengHei" pitchFamily="34" charset="-122"/>
+                <a:cs typeface="Microsoft JhengHei" pitchFamily="34" charset="-120"/>
               </a:rPr>
               <a:t>TAKEAWAY</a:t>
             </a:r>
@@ -23425,7 +23488,7 @@
                 <a:solidFill>
                   <a:srgbClr val="FAF9F5"/>
                 </a:solidFill>
-                <a:latin typeface="STHeiti" pitchFamily="34" charset="0"/>
+                <a:latin typeface="Arial" pitchFamily="34" charset="0"/>
                 <a:ea typeface="Microsoft JhengHei" pitchFamily="34" charset="-122"/>
                 <a:cs typeface="Microsoft JhengHei" pitchFamily="34" charset="-120"/>
               </a:rPr>
@@ -23445,7 +23508,7 @@
                 <a:solidFill>
                   <a:srgbClr val="FAF9F5"/>
                 </a:solidFill>
-                <a:latin typeface="STHeiti" pitchFamily="34" charset="0"/>
+                <a:latin typeface="Arial" pitchFamily="34" charset="0"/>
                 <a:ea typeface="Microsoft JhengHei" pitchFamily="34" charset="-122"/>
                 <a:cs typeface="Microsoft JhengHei" pitchFamily="34" charset="-120"/>
               </a:rPr>
@@ -23465,7 +23528,7 @@
                 <a:solidFill>
                   <a:srgbClr val="FAF9F5"/>
                 </a:solidFill>
-                <a:latin typeface="STHeiti" pitchFamily="34" charset="0"/>
+                <a:latin typeface="Arial" pitchFamily="34" charset="0"/>
                 <a:ea typeface="Microsoft JhengHei" pitchFamily="34" charset="-122"/>
                 <a:cs typeface="Microsoft JhengHei" pitchFamily="34" charset="-120"/>
               </a:rPr>
@@ -23531,9 +23594,9 @@
                 <a:solidFill>
                   <a:srgbClr val="C3C9D6"/>
                 </a:solidFill>
-                <a:latin typeface="STHeiti" pitchFamily="34" charset="0"/>
-                <a:ea typeface="Arial" pitchFamily="34" charset="-122"/>
-                <a:cs typeface="Arial" pitchFamily="34" charset="-120"/>
+                <a:latin typeface="Arial" pitchFamily="34" charset="0"/>
+                <a:ea typeface="Microsoft JhengHei" pitchFamily="34" charset="-122"/>
+                <a:cs typeface="Microsoft JhengHei" pitchFamily="34" charset="-120"/>
               </a:rPr>
               <a:t>Pacevera — Fitness Decision Engine</a:t>
             </a:r>
@@ -23570,7 +23633,7 @@
                 <a:solidFill>
                   <a:srgbClr val="7C8497"/>
                 </a:solidFill>
-                <a:latin typeface="STHeiti" pitchFamily="34" charset="0"/>
+                <a:latin typeface="Arial" pitchFamily="34" charset="0"/>
                 <a:ea typeface="Microsoft JhengHei" pitchFamily="34" charset="-122"/>
                 <a:cs typeface="Microsoft JhengHei" pitchFamily="34" charset="-120"/>
               </a:rPr>
@@ -23666,9 +23729,9 @@
                 <a:solidFill>
                   <a:srgbClr val="68645C"/>
                 </a:solidFill>
-                <a:latin typeface="STHeiti" pitchFamily="34" charset="0"/>
-                <a:ea typeface="Arial" pitchFamily="34" charset="-122"/>
-                <a:cs typeface="Arial" pitchFamily="34" charset="-120"/>
+                <a:latin typeface="Arial" pitchFamily="34" charset="0"/>
+                <a:ea typeface="Microsoft JhengHei" pitchFamily="34" charset="-122"/>
+                <a:cs typeface="Microsoft JhengHei" pitchFamily="34" charset="-120"/>
               </a:rPr>
               <a:t>PART 1 — 核心概念</a:t>
             </a:r>
@@ -23705,7 +23768,7 @@
                 <a:solidFill>
                   <a:srgbClr val="1F1E1D"/>
                 </a:solidFill>
-                <a:latin typeface="STHeiti" pitchFamily="34" charset="0"/>
+                <a:latin typeface="Arial" pitchFamily="34" charset="0"/>
                 <a:ea typeface="Microsoft JhengHei" pitchFamily="34" charset="-122"/>
                 <a:cs typeface="Microsoft JhengHei" pitchFamily="34" charset="-120"/>
               </a:rPr>
@@ -23747,7 +23810,7 @@
                 <a:solidFill>
                   <a:srgbClr val="1F1E1D"/>
                 </a:solidFill>
-                <a:latin typeface="STHeiti" pitchFamily="34" charset="0"/>
+                <a:latin typeface="Arial" pitchFamily="34" charset="0"/>
                 <a:ea typeface="Microsoft JhengHei" pitchFamily="34" charset="-122"/>
                 <a:cs typeface="Microsoft JhengHei" pitchFamily="34" charset="-120"/>
               </a:rPr>
@@ -23812,9 +23875,9 @@
                 <a:solidFill>
                   <a:srgbClr val="1F1E1D"/>
                 </a:solidFill>
-                <a:latin typeface="STHeiti" pitchFamily="34" charset="0"/>
-                <a:ea typeface="Arial" pitchFamily="34" charset="-122"/>
-                <a:cs typeface="Arial" pitchFamily="34" charset="-120"/>
+                <a:latin typeface="Arial" pitchFamily="34" charset="0"/>
+                <a:ea typeface="Microsoft JhengHei" pitchFamily="34" charset="-122"/>
+                <a:cs typeface="Microsoft JhengHei" pitchFamily="34" charset="-120"/>
               </a:rPr>
               <a:t>ChatGPT</a:t>
             </a:r>
@@ -23851,7 +23914,7 @@
                 <a:solidFill>
                   <a:srgbClr val="68645C"/>
                 </a:solidFill>
-                <a:latin typeface="STHeiti" pitchFamily="34" charset="0"/>
+                <a:latin typeface="Arial" pitchFamily="34" charset="0"/>
                 <a:ea typeface="Microsoft JhengHei" pitchFamily="34" charset="-122"/>
                 <a:cs typeface="Microsoft JhengHei" pitchFamily="34" charset="-120"/>
               </a:rPr>
@@ -23917,7 +23980,7 @@
                 <a:solidFill>
                   <a:srgbClr val="157554"/>
                 </a:solidFill>
-                <a:latin typeface="STHeiti" pitchFamily="34" charset="0"/>
+                <a:latin typeface="Arial" pitchFamily="34" charset="0"/>
                 <a:ea typeface="Microsoft JhengHei" pitchFamily="34" charset="-122"/>
                 <a:cs typeface="Microsoft JhengHei" pitchFamily="34" charset="-120"/>
               </a:rPr>
@@ -23982,9 +24045,9 @@
                 <a:solidFill>
                   <a:srgbClr val="1F1E1D"/>
                 </a:solidFill>
-                <a:latin typeface="STHeiti" pitchFamily="34" charset="0"/>
-                <a:ea typeface="Arial" pitchFamily="34" charset="-122"/>
-                <a:cs typeface="Arial" pitchFamily="34" charset="-120"/>
+                <a:latin typeface="Arial" pitchFamily="34" charset="0"/>
+                <a:ea typeface="Microsoft JhengHei" pitchFamily="34" charset="-122"/>
+                <a:cs typeface="Microsoft JhengHei" pitchFamily="34" charset="-120"/>
               </a:rPr>
               <a:t>Claude</a:t>
             </a:r>
@@ -24021,7 +24084,7 @@
                 <a:solidFill>
                   <a:srgbClr val="68645C"/>
                 </a:solidFill>
-                <a:latin typeface="STHeiti" pitchFamily="34" charset="0"/>
+                <a:latin typeface="Arial" pitchFamily="34" charset="0"/>
                 <a:ea typeface="Microsoft JhengHei" pitchFamily="34" charset="-122"/>
                 <a:cs typeface="Microsoft JhengHei" pitchFamily="34" charset="-120"/>
               </a:rPr>
@@ -24087,7 +24150,7 @@
                 <a:solidFill>
                   <a:srgbClr val="157554"/>
                 </a:solidFill>
-                <a:latin typeface="STHeiti" pitchFamily="34" charset="0"/>
+                <a:latin typeface="Arial" pitchFamily="34" charset="0"/>
                 <a:ea typeface="Microsoft JhengHei" pitchFamily="34" charset="-122"/>
                 <a:cs typeface="Microsoft JhengHei" pitchFamily="34" charset="-120"/>
               </a:rPr>
@@ -24152,9 +24215,9 @@
                 <a:solidFill>
                   <a:srgbClr val="1F1E1D"/>
                 </a:solidFill>
-                <a:latin typeface="STHeiti" pitchFamily="34" charset="0"/>
-                <a:ea typeface="Arial" pitchFamily="34" charset="-122"/>
-                <a:cs typeface="Arial" pitchFamily="34" charset="-120"/>
+                <a:latin typeface="Arial" pitchFamily="34" charset="0"/>
+                <a:ea typeface="Microsoft JhengHei" pitchFamily="34" charset="-122"/>
+                <a:cs typeface="Microsoft JhengHei" pitchFamily="34" charset="-120"/>
               </a:rPr>
               <a:t>Gemini</a:t>
             </a:r>
@@ -24191,7 +24254,7 @@
                 <a:solidFill>
                   <a:srgbClr val="68645C"/>
                 </a:solidFill>
-                <a:latin typeface="STHeiti" pitchFamily="34" charset="0"/>
+                <a:latin typeface="Arial" pitchFamily="34" charset="0"/>
                 <a:ea typeface="Microsoft JhengHei" pitchFamily="34" charset="-122"/>
                 <a:cs typeface="Microsoft JhengHei" pitchFamily="34" charset="-120"/>
               </a:rPr>
@@ -24257,7 +24320,7 @@
                 <a:solidFill>
                   <a:srgbClr val="157554"/>
                 </a:solidFill>
-                <a:latin typeface="STHeiti" pitchFamily="34" charset="0"/>
+                <a:latin typeface="Arial" pitchFamily="34" charset="0"/>
                 <a:ea typeface="Microsoft JhengHei" pitchFamily="34" charset="-122"/>
                 <a:cs typeface="Microsoft JhengHei" pitchFamily="34" charset="-120"/>
               </a:rPr>
@@ -24296,9 +24359,9 @@
                 <a:solidFill>
                   <a:srgbClr val="9DA89F"/>
                 </a:solidFill>
-                <a:latin typeface="STHeiti" pitchFamily="34" charset="0"/>
-                <a:ea typeface="Arial" pitchFamily="34" charset="-122"/>
-                <a:cs typeface="Arial" pitchFamily="34" charset="-120"/>
+                <a:latin typeface="Arial" pitchFamily="34" charset="0"/>
+                <a:ea typeface="Microsoft JhengHei" pitchFamily="34" charset="-122"/>
+                <a:cs typeface="Microsoft JhengHei" pitchFamily="34" charset="-120"/>
               </a:rPr>
               <a:t>04</a:t>
             </a:r>
@@ -24392,9 +24455,9 @@
                 <a:solidFill>
                   <a:srgbClr val="9FAEBE"/>
                 </a:solidFill>
-                <a:latin typeface="STHeiti" pitchFamily="34" charset="0"/>
-                <a:ea typeface="Arial" pitchFamily="34" charset="-122"/>
-                <a:cs typeface="Arial" pitchFamily="34" charset="-120"/>
+                <a:latin typeface="Arial" pitchFamily="34" charset="0"/>
+                <a:ea typeface="Microsoft JhengHei" pitchFamily="34" charset="-122"/>
+                <a:cs typeface="Microsoft JhengHei" pitchFamily="34" charset="-120"/>
               </a:rPr>
               <a:t>PART 1 — 核心概念</a:t>
             </a:r>
@@ -24428,7 +24491,9 @@
                 <a:solidFill>
                   <a:srgbClr val="FAF9F5"/>
                 </a:solidFill>
-                <a:latin typeface="STHeiti"/>
+                <a:latin typeface="Arial"/>
+                <a:ea typeface="Microsoft JhengHei"/>
+                <a:cs typeface="Microsoft JhengHei"/>
               </a:rPr>
               <a:t>我們要蓋的是 AI coach 與今天決策之間的一層</a:t>
             </a:r>
@@ -24467,7 +24532,7 @@
                 <a:solidFill>
                   <a:srgbClr val="D6DAE4"/>
                 </a:solidFill>
-                <a:latin typeface="STHeiti" pitchFamily="34" charset="0"/>
+                <a:latin typeface="Arial" pitchFamily="34" charset="0"/>
                 <a:ea typeface="Microsoft JhengHei" pitchFamily="34" charset="-122"/>
                 <a:cs typeface="Microsoft JhengHei" pitchFamily="34" charset="-120"/>
               </a:rPr>
@@ -24532,9 +24597,9 @@
                 <a:solidFill>
                   <a:srgbClr val="FAF9F5"/>
                 </a:solidFill>
-                <a:latin typeface="STHeiti" pitchFamily="34" charset="0"/>
-                <a:ea typeface="Arial" pitchFamily="34" charset="-122"/>
-                <a:cs typeface="Arial" pitchFamily="34" charset="-120"/>
+                <a:latin typeface="Arial" pitchFamily="34" charset="0"/>
+                <a:ea typeface="Microsoft JhengHei" pitchFamily="34" charset="-122"/>
+                <a:cs typeface="Microsoft JhengHei" pitchFamily="34" charset="-120"/>
               </a:rPr>
               <a:t>Semantic Fitness Layer</a:t>
             </a:r>
@@ -24571,9 +24636,9 @@
                 <a:solidFill>
                   <a:srgbClr val="FFE0C4"/>
                 </a:solidFill>
-                <a:latin typeface="STHeiti" pitchFamily="34" charset="0"/>
-                <a:ea typeface="Arial" pitchFamily="34" charset="-122"/>
-                <a:cs typeface="Arial" pitchFamily="34" charset="-120"/>
+                <a:latin typeface="Arial" pitchFamily="34" charset="0"/>
+                <a:ea typeface="Microsoft JhengHei" pitchFamily="34" charset="-122"/>
+                <a:cs typeface="Microsoft JhengHei" pitchFamily="34" charset="-120"/>
               </a:rPr>
               <a:t>Normalize  →  Reasoning  →  Semantic</a:t>
             </a:r>
@@ -24610,7 +24675,7 @@
                 <a:solidFill>
                   <a:srgbClr val="C3C9D6"/>
                 </a:solidFill>
-                <a:latin typeface="STHeiti" pitchFamily="34" charset="0"/>
+                <a:latin typeface="Arial" pitchFamily="34" charset="0"/>
                 <a:ea typeface="Microsoft JhengHei" pitchFamily="34" charset="-122"/>
                 <a:cs typeface="Microsoft JhengHei" pitchFamily="34" charset="-120"/>
               </a:rPr>
@@ -24649,9 +24714,9 @@
                 <a:solidFill>
                   <a:srgbClr val="9DA89F"/>
                 </a:solidFill>
-                <a:latin typeface="STHeiti" pitchFamily="34" charset="0"/>
-                <a:ea typeface="Arial" pitchFamily="34" charset="-122"/>
-                <a:cs typeface="Arial" pitchFamily="34" charset="-120"/>
+                <a:latin typeface="Arial" pitchFamily="34" charset="0"/>
+                <a:ea typeface="Microsoft JhengHei" pitchFamily="34" charset="-122"/>
+                <a:cs typeface="Microsoft JhengHei" pitchFamily="34" charset="-120"/>
               </a:rPr>
               <a:t>05</a:t>
             </a:r>
@@ -24745,9 +24810,9 @@
                 <a:solidFill>
                   <a:srgbClr val="9FAEBE"/>
                 </a:solidFill>
-                <a:latin typeface="STHeiti" pitchFamily="34" charset="0"/>
-                <a:ea typeface="Arial" pitchFamily="34" charset="-122"/>
-                <a:cs typeface="Arial" pitchFamily="34" charset="-120"/>
+                <a:latin typeface="Arial" pitchFamily="34" charset="0"/>
+                <a:ea typeface="Microsoft JhengHei" pitchFamily="34" charset="-122"/>
+                <a:cs typeface="Microsoft JhengHei" pitchFamily="34" charset="-120"/>
               </a:rPr>
               <a:t>PART 1 — 核心概念</a:t>
             </a:r>
@@ -24781,7 +24846,9 @@
                 <a:solidFill>
                   <a:srgbClr val="FAF9F5"/>
                 </a:solidFill>
-                <a:latin typeface="STHeiti"/>
+                <a:latin typeface="Arial"/>
+                <a:ea typeface="Microsoft JhengHei"/>
+                <a:cs typeface="Microsoft JhengHei"/>
               </a:rPr>
               <a:t>Your AI can coach. Pacevera helps it decide.</a:t>
             </a:r>
@@ -24809,24 +24876,17 @@
           <a:bodyPr wrap="square" lIns="0" tIns="0" rIns="0" bIns="0" rtlCol="0" anchor="t"/>
           <a:lstStyle/>
           <a:p>
-            <a:pPr marL="0" indent="0">
-              <a:lnSpc>
-                <a:spcPts val="3200"/>
-              </a:lnSpc>
-              <a:buNone/>
-            </a:pPr>
-            <a:r>
-              <a:rPr lang="en-US" sz="2000" dirty="0">
-                <a:solidFill>
-                  <a:srgbClr val="D6DAE4"/>
-                </a:solidFill>
-                <a:latin typeface="STHeiti" pitchFamily="34" charset="0"/>
-                <a:ea typeface="Microsoft JhengHei" pitchFamily="34" charset="-122"/>
-                <a:cs typeface="Microsoft JhengHei" pitchFamily="34" charset="-120"/>
-              </a:rPr>
-              <a:t>AI host 負責理解與表達;Pacevera 在使用者控制的資料邊界內負責計算、仲裁與追溯。</a:t>
-            </a:r>
-            <a:endParaRPr lang="en-US" sz="2000" dirty="0"/>
+            <a:r>
+              <a:rPr>
+                <a:solidFill>
+                  <a:srgbClr val="FAF9F5"/>
+                </a:solidFill>
+                <a:latin typeface="Arial"/>
+                <a:ea typeface="Microsoft JhengHei"/>
+                <a:cs typeface="Microsoft JhengHei"/>
+              </a:rPr>
+              <a:t>AI host 負責理解與表達;Pacevera 在使用者控制的資料邊界內負責計算、判斷與追溯。</a:t>
+            </a:r>
           </a:p>
         </p:txBody>
       </p:sp>
@@ -24847,7 +24907,7 @@
             </a:avLst>
           </a:prstGeom>
           <a:solidFill>
-            <a:srgbClr val="1E2A40"/>
+            <a:srgbClr val="157554"/>
           </a:solidFill>
           <a:ln/>
         </p:spPr>
@@ -24883,9 +24943,9 @@
             <a:r>
               <a:rPr lang="en-US" sz="1400" b="1" dirty="0">
                 <a:solidFill>
-                  <a:srgbClr val="9FAEBE"/>
-                </a:solidFill>
-                <a:latin typeface="STHeiti" pitchFamily="34" charset="0"/>
+                  <a:srgbClr val="FAF9F5"/>
+                </a:solidFill>
+                <a:latin typeface="Arial" pitchFamily="34" charset="0"/>
                 <a:ea typeface="Microsoft JhengHei" pitchFamily="34" charset="-122"/>
                 <a:cs typeface="Microsoft JhengHei" pitchFamily="34" charset="-120"/>
               </a:rPr>
@@ -24927,7 +24987,7 @@
                 <a:solidFill>
                   <a:srgbClr val="FAF9F5"/>
                 </a:solidFill>
-                <a:latin typeface="STHeiti" pitchFamily="34" charset="0"/>
+                <a:latin typeface="Arial" pitchFamily="34" charset="0"/>
                 <a:ea typeface="Microsoft JhengHei" pitchFamily="34" charset="-122"/>
                 <a:cs typeface="Microsoft JhengHei" pitchFamily="34" charset="-120"/>
               </a:rPr>
@@ -24954,7 +25014,7 @@
             </a:avLst>
           </a:prstGeom>
           <a:solidFill>
-            <a:srgbClr val="157554"/>
+            <a:srgbClr val="1E2A40"/>
           </a:solidFill>
           <a:ln/>
         </p:spPr>
@@ -24990,9 +25050,9 @@
             <a:r>
               <a:rPr lang="en-US" sz="1400" b="1" dirty="0">
                 <a:solidFill>
-                  <a:srgbClr val="FFE0C4"/>
-                </a:solidFill>
-                <a:latin typeface="STHeiti" pitchFamily="34" charset="0"/>
+                  <a:srgbClr val="FAF9F5"/>
+                </a:solidFill>
+                <a:latin typeface="Arial" pitchFamily="34" charset="0"/>
                 <a:ea typeface="Microsoft JhengHei" pitchFamily="34" charset="-122"/>
                 <a:cs typeface="Microsoft JhengHei" pitchFamily="34" charset="-120"/>
               </a:rPr>
@@ -25034,7 +25094,7 @@
                 <a:solidFill>
                   <a:srgbClr val="FAF9F5"/>
                 </a:solidFill>
-                <a:latin typeface="STHeiti" pitchFamily="34" charset="0"/>
+                <a:latin typeface="Arial" pitchFamily="34" charset="0"/>
                 <a:ea typeface="Microsoft JhengHei" pitchFamily="34" charset="-122"/>
                 <a:cs typeface="Microsoft JhengHei" pitchFamily="34" charset="-120"/>
               </a:rPr>
@@ -25071,9 +25131,9 @@
             <a:r>
               <a:rPr lang="en-US" sz="1800" i="1" dirty="0">
                 <a:solidFill>
-                  <a:srgbClr val="C3C9D6"/>
-                </a:solidFill>
-                <a:latin typeface="STHeiti" pitchFamily="34" charset="0"/>
+                  <a:srgbClr val="FAF9F5"/>
+                </a:solidFill>
+                <a:latin typeface="Arial" pitchFamily="34" charset="0"/>
                 <a:ea typeface="Microsoft JhengHei" pitchFamily="34" charset="-122"/>
                 <a:cs typeface="Microsoft JhengHei" pitchFamily="34" charset="-120"/>
               </a:rPr>
@@ -25112,9 +25172,9 @@
                 <a:solidFill>
                   <a:srgbClr val="9DA89F"/>
                 </a:solidFill>
-                <a:latin typeface="STHeiti" pitchFamily="34" charset="0"/>
-                <a:ea typeface="Arial" pitchFamily="34" charset="-122"/>
-                <a:cs typeface="Arial" pitchFamily="34" charset="-120"/>
+                <a:latin typeface="Arial" pitchFamily="34" charset="0"/>
+                <a:ea typeface="Microsoft JhengHei" pitchFamily="34" charset="-122"/>
+                <a:cs typeface="Microsoft JhengHei" pitchFamily="34" charset="-120"/>
               </a:rPr>
               <a:t>06</a:t>
             </a:r>
@@ -25208,9 +25268,9 @@
                 <a:solidFill>
                   <a:srgbClr val="68645C"/>
                 </a:solidFill>
-                <a:latin typeface="STHeiti" pitchFamily="34" charset="0"/>
-                <a:ea typeface="Arial" pitchFamily="34" charset="-122"/>
-                <a:cs typeface="Arial" pitchFamily="34" charset="-120"/>
+                <a:latin typeface="Arial" pitchFamily="34" charset="0"/>
+                <a:ea typeface="Microsoft JhengHei" pitchFamily="34" charset="-122"/>
+                <a:cs typeface="Microsoft JhengHei" pitchFamily="34" charset="-120"/>
               </a:rPr>
               <a:t>PART 1 — 核心概念</a:t>
             </a:r>
@@ -25244,7 +25304,9 @@
                 <a:solidFill>
                   <a:srgbClr val="1F1E1D"/>
                 </a:solidFill>
-                <a:latin typeface="STHeiti"/>
+                <a:latin typeface="Arial"/>
+                <a:ea typeface="Microsoft JhengHei"/>
+                <a:cs typeface="Microsoft JhengHei"/>
               </a:rPr>
               <a:t>Evidence 留在你的控制邊界</a:t>
             </a:r>
@@ -25283,7 +25345,7 @@
                 <a:solidFill>
                   <a:srgbClr val="1F1E1D"/>
                 </a:solidFill>
-                <a:latin typeface="STHeiti" pitchFamily="34" charset="0"/>
+                <a:latin typeface="Arial" pitchFamily="34" charset="0"/>
                 <a:ea typeface="Microsoft JhengHei" pitchFamily="34" charset="-122"/>
                 <a:cs typeface="Microsoft JhengHei" pitchFamily="34" charset="-120"/>
               </a:rPr>
@@ -25348,7 +25410,7 @@
                 <a:solidFill>
                   <a:srgbClr val="9AA1B0"/>
                 </a:solidFill>
-                <a:latin typeface="STHeiti" pitchFamily="34" charset="0"/>
+                <a:latin typeface="Arial" pitchFamily="34" charset="0"/>
                 <a:ea typeface="Microsoft JhengHei" pitchFamily="34" charset="-122"/>
                 <a:cs typeface="Microsoft JhengHei" pitchFamily="34" charset="-120"/>
               </a:rPr>
@@ -25385,9 +25447,9 @@
             <a:r>
               <a:rPr lang="en-US" sz="1800" b="1" dirty="0">
                 <a:solidFill>
-                  <a:srgbClr val="DAD2C3"/>
-                </a:solidFill>
-                <a:latin typeface="STHeiti" pitchFamily="34" charset="0"/>
+                  <a:srgbClr val="1F1E1D"/>
+                </a:solidFill>
+                <a:latin typeface="Arial" pitchFamily="34" charset="0"/>
                 <a:ea typeface="Microsoft JhengHei" pitchFamily="34" charset="-122"/>
                 <a:cs typeface="Microsoft JhengHei" pitchFamily="34" charset="-120"/>
               </a:rPr>
@@ -25452,7 +25514,7 @@
                 <a:solidFill>
                   <a:srgbClr val="157554"/>
                 </a:solidFill>
-                <a:latin typeface="STHeiti" pitchFamily="34" charset="0"/>
+                <a:latin typeface="Arial" pitchFamily="34" charset="0"/>
                 <a:ea typeface="Microsoft JhengHei" pitchFamily="34" charset="-122"/>
                 <a:cs typeface="Microsoft JhengHei" pitchFamily="34" charset="-120"/>
               </a:rPr>
@@ -25483,21 +25545,17 @@
           <a:bodyPr wrap="square" lIns="0" tIns="0" rIns="0" bIns="0" rtlCol="0" anchor="ctr"/>
           <a:lstStyle/>
           <a:p>
-            <a:pPr marL="0" indent="0">
-              <a:buNone/>
-            </a:pPr>
-            <a:r>
-              <a:rPr lang="en-US" sz="1800" b="1" dirty="0">
+            <a:r>
+              <a:rPr>
                 <a:solidFill>
                   <a:srgbClr val="1F1E1D"/>
                 </a:solidFill>
-                <a:latin typeface="STHeiti" pitchFamily="34" charset="0"/>
-                <a:ea typeface="Microsoft JhengHei" pitchFamily="34" charset="-122"/>
-                <a:cs typeface="Microsoft JhengHei" pitchFamily="34" charset="-120"/>
-              </a:rPr>
-              <a:t>Decision from → to · reason · missing signals · versioned trace</a:t>
-            </a:r>
-            <a:endParaRPr lang="en-US" sz="1800" dirty="0"/>
+                <a:latin typeface="Arial"/>
+                <a:ea typeface="Microsoft JhengHei"/>
+                <a:cs typeface="Microsoft JhengHei"/>
+              </a:rPr>
+              <a:t>Planned session · Today’s session · reason · missing signals · versioned trace</a:t>
+            </a:r>
           </a:p>
         </p:txBody>
       </p:sp>
@@ -25530,9 +25588,9 @@
                 <a:solidFill>
                   <a:srgbClr val="9DA89F"/>
                 </a:solidFill>
-                <a:latin typeface="STHeiti" pitchFamily="34" charset="0"/>
-                <a:ea typeface="Arial" pitchFamily="34" charset="-122"/>
-                <a:cs typeface="Arial" pitchFamily="34" charset="-120"/>
+                <a:latin typeface="Arial" pitchFamily="34" charset="0"/>
+                <a:ea typeface="Microsoft JhengHei" pitchFamily="34" charset="-122"/>
+                <a:cs typeface="Microsoft JhengHei" pitchFamily="34" charset="-120"/>
               </a:rPr>
               <a:t>07</a:t>
             </a:r>
@@ -25626,9 +25684,9 @@
                 <a:solidFill>
                   <a:srgbClr val="9FAEBE"/>
                 </a:solidFill>
-                <a:latin typeface="STHeiti" pitchFamily="34" charset="0"/>
-                <a:ea typeface="Arial" pitchFamily="34" charset="-122"/>
-                <a:cs typeface="Arial" pitchFamily="34" charset="-120"/>
+                <a:latin typeface="Arial" pitchFamily="34" charset="0"/>
+                <a:ea typeface="Microsoft JhengHei" pitchFamily="34" charset="-122"/>
+                <a:cs typeface="Microsoft JhengHei" pitchFamily="34" charset="-120"/>
               </a:rPr>
               <a:t>PART 1 — 核心概念</a:t>
             </a:r>
@@ -25662,7 +25720,9 @@
                 <a:solidFill>
                   <a:srgbClr val="FAF9F5"/>
                 </a:solidFill>
-                <a:latin typeface="STHeiti"/>
+                <a:latin typeface="Arial"/>
+                <a:ea typeface="Microsoft JhengHei"/>
+                <a:cs typeface="Microsoft JhengHei"/>
               </a:rPr>
               <a:t>輸出不是分數，是今天的 change</a:t>
             </a:r>
@@ -25701,7 +25761,7 @@
                 <a:solidFill>
                   <a:srgbClr val="D6DAE4"/>
                 </a:solidFill>
-                <a:latin typeface="STHeiti" pitchFamily="34" charset="0"/>
+                <a:latin typeface="Arial" pitchFamily="34" charset="0"/>
                 <a:ea typeface="Microsoft JhengHei" pitchFamily="34" charset="-122"/>
                 <a:cs typeface="Microsoft JhengHei" pitchFamily="34" charset="-120"/>
               </a:rPr>
@@ -25769,9 +25829,9 @@
                 <a:solidFill>
                   <a:srgbClr val="49D993"/>
                 </a:solidFill>
-                <a:latin typeface="STHeiti" pitchFamily="34" charset="0"/>
-                <a:ea typeface="Courier New" pitchFamily="34" charset="-122"/>
-                <a:cs typeface="Courier New" pitchFamily="34" charset="-120"/>
+                <a:latin typeface="Arial" pitchFamily="34" charset="0"/>
+                <a:ea typeface="Microsoft JhengHei" pitchFamily="34" charset="-122"/>
+                <a:cs typeface="Microsoft JhengHei" pitchFamily="34" charset="-120"/>
               </a:rPr>
               <a:t>FitnessState:</a:t>
             </a:r>
@@ -25789,9 +25849,9 @@
                 <a:solidFill>
                   <a:srgbClr val="49D993"/>
                 </a:solidFill>
-                <a:latin typeface="STHeiti" pitchFamily="34" charset="0"/>
-                <a:ea typeface="Courier New" pitchFamily="34" charset="-122"/>
-                <a:cs typeface="Courier New" pitchFamily="34" charset="-120"/>
+                <a:latin typeface="Arial" pitchFamily="34" charset="0"/>
+                <a:ea typeface="Microsoft JhengHei" pitchFamily="34" charset="-122"/>
+                <a:cs typeface="Microsoft JhengHei" pitchFamily="34" charset="-120"/>
               </a:rPr>
               <a:t>  recovery: 62</a:t>
             </a:r>
@@ -25809,9 +25869,9 @@
                 <a:solidFill>
                   <a:srgbClr val="49D993"/>
                 </a:solidFill>
-                <a:latin typeface="STHeiti" pitchFamily="34" charset="0"/>
-                <a:ea typeface="Courier New" pitchFamily="34" charset="-122"/>
-                <a:cs typeface="Courier New" pitchFamily="34" charset="-120"/>
+                <a:latin typeface="Arial" pitchFamily="34" charset="0"/>
+                <a:ea typeface="Microsoft JhengHei" pitchFamily="34" charset="-122"/>
+                <a:cs typeface="Microsoft JhengHei" pitchFamily="34" charset="-120"/>
               </a:rPr>
               <a:t>  fatigue: 48</a:t>
             </a:r>
@@ -25829,9 +25889,9 @@
                 <a:solidFill>
                   <a:srgbClr val="49D993"/>
                 </a:solidFill>
-                <a:latin typeface="STHeiti" pitchFamily="34" charset="0"/>
-                <a:ea typeface="Courier New" pitchFamily="34" charset="-122"/>
-                <a:cs typeface="Courier New" pitchFamily="34" charset="-120"/>
+                <a:latin typeface="Arial" pitchFamily="34" charset="0"/>
+                <a:ea typeface="Microsoft JhengHei" pitchFamily="34" charset="-122"/>
+                <a:cs typeface="Microsoft JhengHei" pitchFamily="34" charset="-120"/>
               </a:rPr>
               <a:t>  readiness: 55</a:t>
             </a:r>
@@ -25849,9 +25909,9 @@
                 <a:solidFill>
                   <a:srgbClr val="49D993"/>
                 </a:solidFill>
-                <a:latin typeface="STHeiti" pitchFamily="34" charset="0"/>
-                <a:ea typeface="Courier New" pitchFamily="34" charset="-122"/>
-                <a:cs typeface="Courier New" pitchFamily="34" charset="-120"/>
+                <a:latin typeface="Arial" pitchFamily="34" charset="0"/>
+                <a:ea typeface="Microsoft JhengHei" pitchFamily="34" charset="-122"/>
+                <a:cs typeface="Microsoft JhengHei" pitchFamily="34" charset="-120"/>
               </a:rPr>
               <a:t>  acwr: 1.52</a:t>
             </a:r>
@@ -25869,9 +25929,9 @@
                 <a:solidFill>
                   <a:srgbClr val="49D993"/>
                 </a:solidFill>
-                <a:latin typeface="STHeiti" pitchFamily="34" charset="0"/>
-                <a:ea typeface="Courier New" pitchFamily="34" charset="-122"/>
-                <a:cs typeface="Courier New" pitchFamily="34" charset="-120"/>
+                <a:latin typeface="Arial" pitchFamily="34" charset="0"/>
+                <a:ea typeface="Microsoft JhengHei" pitchFamily="34" charset="-122"/>
+                <a:cs typeface="Microsoft JhengHei" pitchFamily="34" charset="-120"/>
               </a:rPr>
               <a:t>  confidence: 0.71</a:t>
             </a:r>
@@ -25889,9 +25949,9 @@
                 <a:solidFill>
                   <a:srgbClr val="49D993"/>
                 </a:solidFill>
-                <a:latin typeface="STHeiti" pitchFamily="34" charset="0"/>
-                <a:ea typeface="Courier New" pitchFamily="34" charset="-122"/>
-                <a:cs typeface="Courier New" pitchFamily="34" charset="-120"/>
+                <a:latin typeface="Arial" pitchFamily="34" charset="0"/>
+                <a:ea typeface="Microsoft JhengHei" pitchFamily="34" charset="-122"/>
+                <a:cs typeface="Microsoft JhengHei" pitchFamily="34" charset="-120"/>
               </a:rPr>
               <a:t>  missing: ["rpe"]</a:t>
             </a:r>
@@ -25946,153 +26006,96 @@
           <a:bodyPr wrap="square" lIns="0" tIns="0" rIns="0" bIns="0" rtlCol="0" anchor="t"/>
           <a:lstStyle/>
           <a:p>
-            <a:pPr marL="0" indent="0">
-              <a:lnSpc>
-                <a:spcPts val="1900"/>
-              </a:lnSpc>
-              <a:buNone/>
-            </a:pPr>
-            <a:r>
-              <a:rPr lang="en-US" sz="1250" dirty="0">
-                <a:solidFill>
-                  <a:srgbClr val="ECAE4D"/>
-                </a:solidFill>
-                <a:latin typeface="STHeiti" pitchFamily="34" charset="0"/>
-                <a:ea typeface="Courier New" pitchFamily="34" charset="-122"/>
-                <a:cs typeface="Courier New" pitchFamily="34" charset="-120"/>
+            <a:r>
+              <a:rPr>
+                <a:solidFill>
+                  <a:srgbClr val="FAF9F5"/>
+                </a:solidFill>
+                <a:latin typeface="Arial"/>
+                <a:ea typeface="Microsoft JhengHei"/>
+                <a:cs typeface="Microsoft JhengHei"/>
               </a:rPr>
               <a:t>Decision: adjust</a:t>
             </a:r>
-            <a:endParaRPr lang="en-US" sz="1250" dirty="0"/>
-          </a:p>
-          <a:p>
-            <a:pPr marL="0" indent="0">
-              <a:lnSpc>
-                <a:spcPts val="1900"/>
-              </a:lnSpc>
-              <a:buNone/>
-            </a:pPr>
-            <a:r>
-              <a:rPr lang="en-US" sz="1250" dirty="0">
-                <a:solidFill>
-                  <a:srgbClr val="ECAE4D"/>
-                </a:solidFill>
-                <a:latin typeface="STHeiti" pitchFamily="34" charset="0"/>
-                <a:ea typeface="Courier New" pitchFamily="34" charset="-122"/>
-                <a:cs typeface="Courier New" pitchFamily="34" charset="-120"/>
+          </a:p>
+          <a:p>
+            <a:r>
+              <a:rPr>
+                <a:solidFill>
+                  <a:srgbClr val="FAF9F5"/>
+                </a:solidFill>
+                <a:latin typeface="Arial"/>
+                <a:ea typeface="Microsoft JhengHei"/>
+                <a:cs typeface="Microsoft JhengHei"/>
               </a:rPr>
               <a:t>Action:</a:t>
             </a:r>
-            <a:endParaRPr lang="en-US" sz="1250" dirty="0"/>
-          </a:p>
-          <a:p>
-            <a:pPr marL="0" indent="0">
-              <a:lnSpc>
-                <a:spcPts val="1900"/>
-              </a:lnSpc>
-              <a:buNone/>
-            </a:pPr>
-            <a:r>
-              <a:rPr lang="en-US" sz="1250" dirty="0">
-                <a:solidFill>
-                  <a:srgbClr val="ECAE4D"/>
-                </a:solidFill>
-                <a:latin typeface="STHeiti" pitchFamily="34" charset="0"/>
-                <a:ea typeface="Courier New" pitchFamily="34" charset="-122"/>
-                <a:cs typeface="Courier New" pitchFamily="34" charset="-120"/>
-              </a:rPr>
-              <a:t>  from: VO₂max Intervals</a:t>
-            </a:r>
-            <a:endParaRPr lang="en-US" sz="1250" dirty="0"/>
-          </a:p>
-          <a:p>
-            <a:pPr marL="0" indent="0">
-              <a:lnSpc>
-                <a:spcPts val="1900"/>
-              </a:lnSpc>
-              <a:buNone/>
-            </a:pPr>
-            <a:r>
-              <a:rPr lang="en-US" sz="1250" dirty="0">
-                <a:solidFill>
-                  <a:srgbClr val="ECAE4D"/>
-                </a:solidFill>
-                <a:latin typeface="STHeiti" pitchFamily="34" charset="0"/>
-                <a:ea typeface="Courier New" pitchFamily="34" charset="-122"/>
-                <a:cs typeface="Courier New" pitchFamily="34" charset="-120"/>
-              </a:rPr>
-              <a:t>  to:   Zone 2 · 45 min</a:t>
-            </a:r>
-            <a:endParaRPr lang="en-US" sz="1250" dirty="0"/>
-          </a:p>
-          <a:p>
-            <a:pPr marL="0" indent="0">
-              <a:lnSpc>
-                <a:spcPts val="1900"/>
-              </a:lnSpc>
-              <a:buNone/>
-            </a:pPr>
-            <a:endParaRPr lang="en-US" sz="1250" dirty="0"/>
-          </a:p>
-          <a:p>
-            <a:pPr marL="0" indent="0">
-              <a:lnSpc>
-                <a:spcPts val="1900"/>
-              </a:lnSpc>
-              <a:buNone/>
-            </a:pPr>
-            <a:r>
-              <a:rPr lang="en-US" sz="1250" dirty="0">
-                <a:solidFill>
-                  <a:srgbClr val="ECAE4D"/>
-                </a:solidFill>
-                <a:latin typeface="STHeiti" pitchFamily="34" charset="0"/>
-                <a:ea typeface="Courier New" pitchFamily="34" charset="-122"/>
-                <a:cs typeface="Courier New" pitchFamily="34" charset="-120"/>
+          </a:p>
+          <a:p>
+            <a:r>
+              <a:rPr>
+                <a:solidFill>
+                  <a:srgbClr val="FAF9F5"/>
+                </a:solidFill>
+                <a:latin typeface="Arial"/>
+                <a:ea typeface="Microsoft JhengHei"/>
+                <a:cs typeface="Microsoft JhengHei"/>
+              </a:rPr>
+              <a:t>  planned_session: VO₂max Intervals</a:t>
+            </a:r>
+          </a:p>
+          <a:p>
+            <a:r>
+              <a:rPr>
+                <a:solidFill>
+                  <a:srgbClr val="FAF9F5"/>
+                </a:solidFill>
+                <a:latin typeface="Arial"/>
+                <a:ea typeface="Microsoft JhengHei"/>
+                <a:cs typeface="Microsoft JhengHei"/>
+              </a:rPr>
+              <a:t>  today_session:   Zone 2 · 45 min</a:t>
+            </a:r>
+          </a:p>
+          <a:p/>
+          <a:p>
+            <a:r>
+              <a:rPr>
+                <a:solidFill>
+                  <a:srgbClr val="FAF9F5"/>
+                </a:solidFill>
+                <a:latin typeface="Arial"/>
+                <a:ea typeface="Microsoft JhengHei"/>
+                <a:cs typeface="Microsoft JhengHei"/>
               </a:rPr>
               <a:t>Reason:</a:t>
             </a:r>
-            <a:endParaRPr lang="en-US" sz="1250" dirty="0"/>
-          </a:p>
-          <a:p>
-            <a:pPr marL="0" indent="0">
-              <a:lnSpc>
-                <a:spcPts val="1900"/>
-              </a:lnSpc>
-              <a:buNone/>
-            </a:pPr>
-            <a:r>
-              <a:rPr lang="en-US" sz="1250" dirty="0">
-                <a:solidFill>
-                  <a:srgbClr val="ECAE4D"/>
-                </a:solidFill>
-                <a:latin typeface="STHeiti" pitchFamily="34" charset="0"/>
-                <a:ea typeface="Courier New" pitchFamily="34" charset="-122"/>
-                <a:cs typeface="Courier New" pitchFamily="34" charset="-120"/>
+          </a:p>
+          <a:p>
+            <a:r>
+              <a:rPr>
+                <a:solidFill>
+                  <a:srgbClr val="FAF9F5"/>
+                </a:solidFill>
+                <a:latin typeface="Arial"/>
+                <a:ea typeface="Microsoft JhengHei"/>
+                <a:cs typeface="Microsoft JhengHei"/>
               </a:rPr>
               <a:t>  - ACWR 1.52 &gt; 1.40</a:t>
             </a:r>
-            <a:endParaRPr lang="en-US" sz="1250" dirty="0"/>
-          </a:p>
-          <a:p>
-            <a:pPr marL="0" indent="0">
-              <a:lnSpc>
-                <a:spcPts val="1900"/>
-              </a:lnSpc>
-              <a:buNone/>
-            </a:pPr>
-            <a:r>
-              <a:rPr lang="en-US" sz="1250" dirty="0">
-                <a:solidFill>
-                  <a:srgbClr val="ECAE4D"/>
-                </a:solidFill>
-                <a:latin typeface="STHeiti" pitchFamily="34" charset="0"/>
-                <a:ea typeface="Courier New" pitchFamily="34" charset="-122"/>
-                <a:cs typeface="Courier New" pitchFamily="34" charset="-120"/>
+          </a:p>
+          <a:p>
+            <a:r>
+              <a:rPr>
+                <a:solidFill>
+                  <a:srgbClr val="FAF9F5"/>
+                </a:solidFill>
+                <a:latin typeface="Arial"/>
+                <a:ea typeface="Microsoft JhengHei"/>
+                <a:cs typeface="Microsoft JhengHei"/>
               </a:rPr>
               <a:t>  - Sleep debt · HRV -12%</a:t>
             </a:r>
-            <a:endParaRPr lang="en-US" sz="1250" dirty="0"/>
           </a:p>
         </p:txBody>
       </p:sp>
@@ -26125,9 +26128,9 @@
                 <a:solidFill>
                   <a:srgbClr val="9DA89F"/>
                 </a:solidFill>
-                <a:latin typeface="STHeiti" pitchFamily="34" charset="0"/>
-                <a:ea typeface="Arial" pitchFamily="34" charset="-122"/>
-                <a:cs typeface="Arial" pitchFamily="34" charset="-120"/>
+                <a:latin typeface="Arial" pitchFamily="34" charset="0"/>
+                <a:ea typeface="Microsoft JhengHei" pitchFamily="34" charset="-122"/>
+                <a:cs typeface="Microsoft JhengHei" pitchFamily="34" charset="-120"/>
               </a:rPr>
               <a:t>08</a:t>
             </a:r>
@@ -26221,9 +26224,9 @@
                 <a:solidFill>
                   <a:srgbClr val="68645C"/>
                 </a:solidFill>
-                <a:latin typeface="STHeiti" pitchFamily="34" charset="0"/>
-                <a:ea typeface="Arial" pitchFamily="34" charset="-122"/>
-                <a:cs typeface="Arial" pitchFamily="34" charset="-120"/>
+                <a:latin typeface="Arial" pitchFamily="34" charset="0"/>
+                <a:ea typeface="Microsoft JhengHei" pitchFamily="34" charset="-122"/>
+                <a:cs typeface="Microsoft JhengHei" pitchFamily="34" charset="-120"/>
               </a:rPr>
               <a:t>PART 1 — 核心概念</a:t>
             </a:r>
@@ -26260,7 +26263,7 @@
                 <a:solidFill>
                   <a:srgbClr val="1F1E1D"/>
                 </a:solidFill>
-                <a:latin typeface="STHeiti" pitchFamily="34" charset="0"/>
+                <a:latin typeface="Arial" pitchFamily="34" charset="0"/>
                 <a:ea typeface="Microsoft JhengHei" pitchFamily="34" charset="-122"/>
                 <a:cs typeface="Microsoft JhengHei" pitchFamily="34" charset="-120"/>
               </a:rPr>
@@ -26302,7 +26305,7 @@
                 <a:solidFill>
                   <a:srgbClr val="1F1E1D"/>
                 </a:solidFill>
-                <a:latin typeface="STHeiti" pitchFamily="34" charset="0"/>
+                <a:latin typeface="Arial" pitchFamily="34" charset="0"/>
                 <a:ea typeface="Microsoft JhengHei" pitchFamily="34" charset="-122"/>
                 <a:cs typeface="Microsoft JhengHei" pitchFamily="34" charset="-120"/>
               </a:rPr>
@@ -26391,9 +26394,9 @@
                 <a:solidFill>
                   <a:srgbClr val="1F1E1D"/>
                 </a:solidFill>
-                <a:latin typeface="STHeiti" pitchFamily="34" charset="0"/>
-                <a:ea typeface="Arial" pitchFamily="34" charset="-122"/>
-                <a:cs typeface="Arial" pitchFamily="34" charset="-120"/>
+                <a:latin typeface="Arial" pitchFamily="34" charset="0"/>
+                <a:ea typeface="Microsoft JhengHei" pitchFamily="34" charset="-122"/>
+                <a:cs typeface="Microsoft JhengHei" pitchFamily="34" charset="-120"/>
               </a:rPr>
               <a:t>AI / Client Layer</a:t>
             </a:r>
@@ -26430,7 +26433,7 @@
                 <a:solidFill>
                   <a:srgbClr val="68645C"/>
                 </a:solidFill>
-                <a:latin typeface="STHeiti" pitchFamily="34" charset="0"/>
+                <a:latin typeface="Arial" pitchFamily="34" charset="0"/>
                 <a:ea typeface="Microsoft JhengHei" pitchFamily="34" charset="-122"/>
                 <a:cs typeface="Microsoft JhengHei" pitchFamily="34" charset="-120"/>
               </a:rPr>
@@ -26519,9 +26522,9 @@
                 <a:solidFill>
                   <a:srgbClr val="1F1E1D"/>
                 </a:solidFill>
-                <a:latin typeface="STHeiti" pitchFamily="34" charset="0"/>
-                <a:ea typeface="Arial" pitchFamily="34" charset="-122"/>
-                <a:cs typeface="Arial" pitchFamily="34" charset="-120"/>
+                <a:latin typeface="Arial" pitchFamily="34" charset="0"/>
+                <a:ea typeface="Microsoft JhengHei" pitchFamily="34" charset="-122"/>
+                <a:cs typeface="Microsoft JhengHei" pitchFamily="34" charset="-120"/>
               </a:rPr>
               <a:t>Pacevera Interface</a:t>
             </a:r>
@@ -26558,7 +26561,7 @@
                 <a:solidFill>
                   <a:srgbClr val="68645C"/>
                 </a:solidFill>
-                <a:latin typeface="STHeiti" pitchFamily="34" charset="0"/>
+                <a:latin typeface="Arial" pitchFamily="34" charset="0"/>
                 <a:ea typeface="Microsoft JhengHei" pitchFamily="34" charset="-122"/>
                 <a:cs typeface="Microsoft JhengHei" pitchFamily="34" charset="-120"/>
               </a:rPr>
@@ -26647,9 +26650,9 @@
                 <a:solidFill>
                   <a:srgbClr val="1F1E1D"/>
                 </a:solidFill>
-                <a:latin typeface="STHeiti" pitchFamily="34" charset="0"/>
-                <a:ea typeface="Arial" pitchFamily="34" charset="-122"/>
-                <a:cs typeface="Arial" pitchFamily="34" charset="-120"/>
+                <a:latin typeface="Arial" pitchFamily="34" charset="0"/>
+                <a:ea typeface="Microsoft JhengHei" pitchFamily="34" charset="-122"/>
+                <a:cs typeface="Microsoft JhengHei" pitchFamily="34" charset="-120"/>
               </a:rPr>
               <a:t>Decision Infrastructure</a:t>
             </a:r>
@@ -26686,7 +26689,7 @@
                 <a:solidFill>
                   <a:srgbClr val="68645C"/>
                 </a:solidFill>
-                <a:latin typeface="STHeiti" pitchFamily="34" charset="0"/>
+                <a:latin typeface="Arial" pitchFamily="34" charset="0"/>
                 <a:ea typeface="Microsoft JhengHei" pitchFamily="34" charset="-122"/>
                 <a:cs typeface="Microsoft JhengHei" pitchFamily="34" charset="-120"/>
               </a:rPr>
@@ -26775,9 +26778,9 @@
                 <a:solidFill>
                   <a:srgbClr val="1F1E1D"/>
                 </a:solidFill>
-                <a:latin typeface="STHeiti" pitchFamily="34" charset="0"/>
-                <a:ea typeface="Arial" pitchFamily="34" charset="-122"/>
-                <a:cs typeface="Arial" pitchFamily="34" charset="-120"/>
+                <a:latin typeface="Arial" pitchFamily="34" charset="0"/>
+                <a:ea typeface="Microsoft JhengHei" pitchFamily="34" charset="-122"/>
+                <a:cs typeface="Microsoft JhengHei" pitchFamily="34" charset="-120"/>
               </a:rPr>
               <a:t>User-controlled Evidence</a:t>
             </a:r>
@@ -26814,7 +26817,7 @@
                 <a:solidFill>
                   <a:srgbClr val="68645C"/>
                 </a:solidFill>
-                <a:latin typeface="STHeiti" pitchFamily="34" charset="0"/>
+                <a:latin typeface="Arial" pitchFamily="34" charset="0"/>
                 <a:ea typeface="Microsoft JhengHei" pitchFamily="34" charset="-122"/>
                 <a:cs typeface="Microsoft JhengHei" pitchFamily="34" charset="-120"/>
               </a:rPr>
@@ -26853,9 +26856,9 @@
                 <a:solidFill>
                   <a:srgbClr val="9DA89F"/>
                 </a:solidFill>
-                <a:latin typeface="STHeiti" pitchFamily="34" charset="0"/>
-                <a:ea typeface="Arial" pitchFamily="34" charset="-122"/>
-                <a:cs typeface="Arial" pitchFamily="34" charset="-120"/>
+                <a:latin typeface="Arial" pitchFamily="34" charset="0"/>
+                <a:ea typeface="Microsoft JhengHei" pitchFamily="34" charset="-122"/>
+                <a:cs typeface="Microsoft JhengHei" pitchFamily="34" charset="-120"/>
               </a:rPr>
               <a:t>09</a:t>
             </a:r>
